--- a/M2/Presentation_Qualities.pptx
+++ b/M2/Presentation_Qualities.pptx
@@ -5,7 +5,7 @@
     <p:sldMasterId id="2147483648" r:id="rId1"/>
   </p:sldMasterIdLst>
   <p:notesMasterIdLst>
-    <p:notesMasterId r:id="rId7"/>
+    <p:notesMasterId r:id="rId15"/>
   </p:notesMasterIdLst>
   <p:sldIdLst>
     <p:sldId id="256" r:id="rId2"/>
@@ -13,6 +13,14 @@
     <p:sldId id="261" r:id="rId4"/>
     <p:sldId id="257" r:id="rId5"/>
     <p:sldId id="259" r:id="rId6"/>
+    <p:sldId id="262" r:id="rId7"/>
+    <p:sldId id="263" r:id="rId8"/>
+    <p:sldId id="264" r:id="rId9"/>
+    <p:sldId id="265" r:id="rId10"/>
+    <p:sldId id="266" r:id="rId11"/>
+    <p:sldId id="267" r:id="rId12"/>
+    <p:sldId id="268" r:id="rId13"/>
+    <p:sldId id="269" r:id="rId14"/>
   </p:sldIdLst>
   <p:sldSz cx="12192000" cy="6858000"/>
   <p:notesSz cx="6858000" cy="9144000"/>
@@ -111,6 +119,11 @@
       </a:defRPr>
     </a:lvl9pPr>
   </p:defaultTextStyle>
+  <p:extLst>
+    <p:ext uri="{EFAFB233-063F-42B5-8137-9DF3F51BA10A}">
+      <p15:sldGuideLst xmlns:p15="http://schemas.microsoft.com/office/powerpoint/2012/main"/>
+    </p:ext>
+  </p:extLst>
 </p:presentation>
 </file>
 
@@ -692,7 +705,7 @@
           <a:p>
             <a:fld id="{FC1B7745-5391-477F-8AE8-1136866A9302}" type="datetimeFigureOut">
               <a:rPr lang="es-ES" smtClean="0"/>
-              <a:t>02/01/2026</a:t>
+              <a:t>04/01/2026</a:t>
             </a:fld>
             <a:endParaRPr lang="es-ES"/>
           </a:p>
@@ -850,7 +863,7 @@
           <a:p>
             <a:fld id="{44806F1A-BC72-4B4D-B94E-9BE432BE5415}" type="slidenum">
               <a:rPr lang="es-ES" smtClean="0"/>
-              <a:t>‹Nº›</a:t>
+              <a:t>‹#›</a:t>
             </a:fld>
             <a:endParaRPr lang="es-ES"/>
           </a:p>
@@ -1190,7 +1203,7 @@
           <a:p>
             <a:fld id="{6A3C2F7B-537C-4500-BF1F-DDEBE70AF5A2}" type="datetimeFigureOut">
               <a:rPr lang="es-ES" smtClean="0"/>
-              <a:t>02/01/2026</a:t>
+              <a:t>04/01/2026</a:t>
             </a:fld>
             <a:endParaRPr lang="es-ES"/>
           </a:p>
@@ -1244,7 +1257,7 @@
           <a:p>
             <a:fld id="{5CDF74C9-6FB5-4621-B7DC-E9E2DB2ABB0E}" type="slidenum">
               <a:rPr lang="es-ES" smtClean="0"/>
-              <a:t>‹Nº›</a:t>
+              <a:t>‹#›</a:t>
             </a:fld>
             <a:endParaRPr lang="es-ES"/>
           </a:p>
@@ -1388,7 +1401,7 @@
           <a:p>
             <a:fld id="{6A3C2F7B-537C-4500-BF1F-DDEBE70AF5A2}" type="datetimeFigureOut">
               <a:rPr lang="es-ES" smtClean="0"/>
-              <a:t>02/01/2026</a:t>
+              <a:t>04/01/2026</a:t>
             </a:fld>
             <a:endParaRPr lang="es-ES"/>
           </a:p>
@@ -1442,7 +1455,7 @@
           <a:p>
             <a:fld id="{5CDF74C9-6FB5-4621-B7DC-E9E2DB2ABB0E}" type="slidenum">
               <a:rPr lang="es-ES" smtClean="0"/>
-              <a:t>‹Nº›</a:t>
+              <a:t>‹#›</a:t>
             </a:fld>
             <a:endParaRPr lang="es-ES"/>
           </a:p>
@@ -1596,7 +1609,7 @@
           <a:p>
             <a:fld id="{6A3C2F7B-537C-4500-BF1F-DDEBE70AF5A2}" type="datetimeFigureOut">
               <a:rPr lang="es-ES" smtClean="0"/>
-              <a:t>02/01/2026</a:t>
+              <a:t>04/01/2026</a:t>
             </a:fld>
             <a:endParaRPr lang="es-ES"/>
           </a:p>
@@ -1650,7 +1663,7 @@
           <a:p>
             <a:fld id="{5CDF74C9-6FB5-4621-B7DC-E9E2DB2ABB0E}" type="slidenum">
               <a:rPr lang="es-ES" smtClean="0"/>
-              <a:t>‹Nº›</a:t>
+              <a:t>‹#›</a:t>
             </a:fld>
             <a:endParaRPr lang="es-ES"/>
           </a:p>
@@ -1794,7 +1807,7 @@
           <a:p>
             <a:fld id="{6A3C2F7B-537C-4500-BF1F-DDEBE70AF5A2}" type="datetimeFigureOut">
               <a:rPr lang="es-ES" smtClean="0"/>
-              <a:t>02/01/2026</a:t>
+              <a:t>04/01/2026</a:t>
             </a:fld>
             <a:endParaRPr lang="es-ES"/>
           </a:p>
@@ -1848,7 +1861,7 @@
           <a:p>
             <a:fld id="{5CDF74C9-6FB5-4621-B7DC-E9E2DB2ABB0E}" type="slidenum">
               <a:rPr lang="es-ES" smtClean="0"/>
-              <a:t>‹Nº›</a:t>
+              <a:t>‹#›</a:t>
             </a:fld>
             <a:endParaRPr lang="es-ES"/>
           </a:p>
@@ -2069,7 +2082,7 @@
           <a:p>
             <a:fld id="{6A3C2F7B-537C-4500-BF1F-DDEBE70AF5A2}" type="datetimeFigureOut">
               <a:rPr lang="es-ES" smtClean="0"/>
-              <a:t>02/01/2026</a:t>
+              <a:t>04/01/2026</a:t>
             </a:fld>
             <a:endParaRPr lang="es-ES"/>
           </a:p>
@@ -2123,7 +2136,7 @@
           <a:p>
             <a:fld id="{5CDF74C9-6FB5-4621-B7DC-E9E2DB2ABB0E}" type="slidenum">
               <a:rPr lang="es-ES" smtClean="0"/>
-              <a:t>‹Nº›</a:t>
+              <a:t>‹#›</a:t>
             </a:fld>
             <a:endParaRPr lang="es-ES"/>
           </a:p>
@@ -2334,7 +2347,7 @@
           <a:p>
             <a:fld id="{6A3C2F7B-537C-4500-BF1F-DDEBE70AF5A2}" type="datetimeFigureOut">
               <a:rPr lang="es-ES" smtClean="0"/>
-              <a:t>02/01/2026</a:t>
+              <a:t>04/01/2026</a:t>
             </a:fld>
             <a:endParaRPr lang="es-ES"/>
           </a:p>
@@ -2388,7 +2401,7 @@
           <a:p>
             <a:fld id="{5CDF74C9-6FB5-4621-B7DC-E9E2DB2ABB0E}" type="slidenum">
               <a:rPr lang="es-ES" smtClean="0"/>
-              <a:t>‹Nº›</a:t>
+              <a:t>‹#›</a:t>
             </a:fld>
             <a:endParaRPr lang="es-ES"/>
           </a:p>
@@ -2746,7 +2759,7 @@
           <a:p>
             <a:fld id="{6A3C2F7B-537C-4500-BF1F-DDEBE70AF5A2}" type="datetimeFigureOut">
               <a:rPr lang="es-ES" smtClean="0"/>
-              <a:t>02/01/2026</a:t>
+              <a:t>04/01/2026</a:t>
             </a:fld>
             <a:endParaRPr lang="es-ES"/>
           </a:p>
@@ -2800,7 +2813,7 @@
           <a:p>
             <a:fld id="{5CDF74C9-6FB5-4621-B7DC-E9E2DB2ABB0E}" type="slidenum">
               <a:rPr lang="es-ES" smtClean="0"/>
-              <a:t>‹Nº›</a:t>
+              <a:t>‹#›</a:t>
             </a:fld>
             <a:endParaRPr lang="es-ES"/>
           </a:p>
@@ -2887,7 +2900,7 @@
           <a:p>
             <a:fld id="{6A3C2F7B-537C-4500-BF1F-DDEBE70AF5A2}" type="datetimeFigureOut">
               <a:rPr lang="es-ES" smtClean="0"/>
-              <a:t>02/01/2026</a:t>
+              <a:t>04/01/2026</a:t>
             </a:fld>
             <a:endParaRPr lang="es-ES"/>
           </a:p>
@@ -2941,7 +2954,7 @@
           <a:p>
             <a:fld id="{5CDF74C9-6FB5-4621-B7DC-E9E2DB2ABB0E}" type="slidenum">
               <a:rPr lang="es-ES" smtClean="0"/>
-              <a:t>‹Nº›</a:t>
+              <a:t>‹#›</a:t>
             </a:fld>
             <a:endParaRPr lang="es-ES"/>
           </a:p>
@@ -3000,7 +3013,7 @@
           <a:p>
             <a:fld id="{6A3C2F7B-537C-4500-BF1F-DDEBE70AF5A2}" type="datetimeFigureOut">
               <a:rPr lang="es-ES" smtClean="0"/>
-              <a:t>02/01/2026</a:t>
+              <a:t>04/01/2026</a:t>
             </a:fld>
             <a:endParaRPr lang="es-ES"/>
           </a:p>
@@ -3054,7 +3067,7 @@
           <a:p>
             <a:fld id="{5CDF74C9-6FB5-4621-B7DC-E9E2DB2ABB0E}" type="slidenum">
               <a:rPr lang="es-ES" smtClean="0"/>
-              <a:t>‹Nº›</a:t>
+              <a:t>‹#›</a:t>
             </a:fld>
             <a:endParaRPr lang="es-ES"/>
           </a:p>
@@ -3311,7 +3324,7 @@
           <a:p>
             <a:fld id="{6A3C2F7B-537C-4500-BF1F-DDEBE70AF5A2}" type="datetimeFigureOut">
               <a:rPr lang="es-ES" smtClean="0"/>
-              <a:t>02/01/2026</a:t>
+              <a:t>04/01/2026</a:t>
             </a:fld>
             <a:endParaRPr lang="es-ES"/>
           </a:p>
@@ -3365,7 +3378,7 @@
           <a:p>
             <a:fld id="{5CDF74C9-6FB5-4621-B7DC-E9E2DB2ABB0E}" type="slidenum">
               <a:rPr lang="es-ES" smtClean="0"/>
-              <a:t>‹Nº›</a:t>
+              <a:t>‹#›</a:t>
             </a:fld>
             <a:endParaRPr lang="es-ES"/>
           </a:p>
@@ -3599,7 +3612,7 @@
           <a:p>
             <a:fld id="{6A3C2F7B-537C-4500-BF1F-DDEBE70AF5A2}" type="datetimeFigureOut">
               <a:rPr lang="es-ES" smtClean="0"/>
-              <a:t>02/01/2026</a:t>
+              <a:t>04/01/2026</a:t>
             </a:fld>
             <a:endParaRPr lang="es-ES"/>
           </a:p>
@@ -3653,7 +3666,7 @@
           <a:p>
             <a:fld id="{5CDF74C9-6FB5-4621-B7DC-E9E2DB2ABB0E}" type="slidenum">
               <a:rPr lang="es-ES" smtClean="0"/>
-              <a:t>‹Nº›</a:t>
+              <a:t>‹#›</a:t>
             </a:fld>
             <a:endParaRPr lang="es-ES"/>
           </a:p>
@@ -3840,7 +3853,7 @@
           <a:p>
             <a:fld id="{6A3C2F7B-537C-4500-BF1F-DDEBE70AF5A2}" type="datetimeFigureOut">
               <a:rPr lang="es-ES" smtClean="0"/>
-              <a:t>02/01/2026</a:t>
+              <a:t>04/01/2026</a:t>
             </a:fld>
             <a:endParaRPr lang="es-ES"/>
           </a:p>
@@ -3930,7 +3943,7 @@
           <a:p>
             <a:fld id="{5CDF74C9-6FB5-4621-B7DC-E9E2DB2ABB0E}" type="slidenum">
               <a:rPr lang="es-ES" smtClean="0"/>
-              <a:t>‹Nº›</a:t>
+              <a:t>‹#›</a:t>
             </a:fld>
             <a:endParaRPr lang="es-ES"/>
           </a:p>
@@ -4320,6 +4333,438 @@
 </p:sld>
 </file>
 
+<file path=ppt/slides/slide10.xml><?xml version="1.0" encoding="utf-8"?>
+<p:sld xmlns:a="http://schemas.openxmlformats.org/drawingml/2006/main" xmlns:r="http://schemas.openxmlformats.org/officeDocument/2006/relationships" xmlns:p="http://schemas.openxmlformats.org/presentationml/2006/main">
+  <p:cSld>
+    <p:spTree>
+      <p:nvGrpSpPr>
+        <p:cNvPr id="1" name=""/>
+        <p:cNvGrpSpPr/>
+        <p:nvPr/>
+      </p:nvGrpSpPr>
+      <p:grpSpPr>
+        <a:xfrm>
+          <a:off x="0" y="0"/>
+          <a:ext cx="0" cy="0"/>
+          <a:chOff x="0" y="0"/>
+          <a:chExt cx="0" cy="0"/>
+        </a:xfrm>
+      </p:grpSpPr>
+      <p:sp>
+        <p:nvSpPr>
+          <p:cNvPr id="2" name="Title 1">
+            <a:extLst>
+              <a:ext uri="{FF2B5EF4-FFF2-40B4-BE49-F238E27FC236}">
+                <a16:creationId xmlns:a16="http://schemas.microsoft.com/office/drawing/2014/main" id="{2CE60735-A537-3771-AF87-49D96D824C5F}"/>
+              </a:ext>
+            </a:extLst>
+          </p:cNvPr>
+          <p:cNvSpPr>
+            <a:spLocks noGrp="1"/>
+          </p:cNvSpPr>
+          <p:nvPr>
+            <p:ph type="title"/>
+          </p:nvPr>
+        </p:nvSpPr>
+        <p:spPr/>
+        <p:txBody>
+          <a:bodyPr/>
+          <a:lstStyle/>
+          <a:p>
+            <a:endParaRPr lang="en-ZM"/>
+          </a:p>
+        </p:txBody>
+      </p:sp>
+      <p:sp>
+        <p:nvSpPr>
+          <p:cNvPr id="3" name="Content Placeholder 2">
+            <a:extLst>
+              <a:ext uri="{FF2B5EF4-FFF2-40B4-BE49-F238E27FC236}">
+                <a16:creationId xmlns:a16="http://schemas.microsoft.com/office/drawing/2014/main" id="{A095BDFC-CEBF-BE12-2C41-624DAAF080AD}"/>
+              </a:ext>
+            </a:extLst>
+          </p:cNvPr>
+          <p:cNvSpPr>
+            <a:spLocks noGrp="1"/>
+          </p:cNvSpPr>
+          <p:nvPr>
+            <p:ph idx="1"/>
+          </p:nvPr>
+        </p:nvSpPr>
+        <p:spPr/>
+        <p:txBody>
+          <a:bodyPr/>
+          <a:lstStyle/>
+          <a:p>
+            <a:pPr marL="0" indent="0">
+              <a:buNone/>
+            </a:pPr>
+            <a:r>
+              <a:rPr lang="en-US" b="1" dirty="0"/>
+              <a:t>4. Development Environment Support:</a:t>
+            </a:r>
+          </a:p>
+          <a:p>
+            <a:r>
+              <a:rPr lang="en-US" dirty="0"/>
+              <a:t>Dedicated development deployment environment shown</a:t>
+            </a:r>
+          </a:p>
+          <a:p>
+            <a:r>
+              <a:rPr lang="en-US" dirty="0"/>
+              <a:t>Test instances of external systems enable isolated testing</a:t>
+            </a:r>
+            <a:endParaRPr lang="en-ZM" dirty="0"/>
+          </a:p>
+          <a:p>
+            <a:pPr marL="0" indent="0">
+              <a:buNone/>
+            </a:pPr>
+            <a:endParaRPr lang="en-ZM" dirty="0"/>
+          </a:p>
+        </p:txBody>
+      </p:sp>
+    </p:spTree>
+    <p:extLst>
+      <p:ext uri="{BB962C8B-B14F-4D97-AF65-F5344CB8AC3E}">
+        <p14:creationId xmlns:p14="http://schemas.microsoft.com/office/powerpoint/2010/main" val="4077293303"/>
+      </p:ext>
+    </p:extLst>
+  </p:cSld>
+  <p:clrMapOvr>
+    <a:masterClrMapping/>
+  </p:clrMapOvr>
+</p:sld>
+</file>
+
+<file path=ppt/slides/slide11.xml><?xml version="1.0" encoding="utf-8"?>
+<p:sld xmlns:a="http://schemas.openxmlformats.org/drawingml/2006/main" xmlns:r="http://schemas.openxmlformats.org/officeDocument/2006/relationships" xmlns:p="http://schemas.openxmlformats.org/presentationml/2006/main">
+  <p:cSld>
+    <p:spTree>
+      <p:nvGrpSpPr>
+        <p:cNvPr id="1" name="">
+          <a:extLst>
+            <a:ext uri="{FF2B5EF4-FFF2-40B4-BE49-F238E27FC236}">
+              <a16:creationId xmlns:a16="http://schemas.microsoft.com/office/drawing/2014/main" id="{9CD5A564-3280-47EA-6EB4-37EE3CC4F677}"/>
+            </a:ext>
+          </a:extLst>
+        </p:cNvPr>
+        <p:cNvGrpSpPr/>
+        <p:nvPr/>
+      </p:nvGrpSpPr>
+      <p:grpSpPr>
+        <a:xfrm>
+          <a:off x="0" y="0"/>
+          <a:ext cx="0" cy="0"/>
+          <a:chOff x="0" y="0"/>
+          <a:chExt cx="0" cy="0"/>
+        </a:xfrm>
+      </p:grpSpPr>
+      <p:sp>
+        <p:nvSpPr>
+          <p:cNvPr id="2" name="Título 1">
+            <a:extLst>
+              <a:ext uri="{FF2B5EF4-FFF2-40B4-BE49-F238E27FC236}">
+                <a16:creationId xmlns:a16="http://schemas.microsoft.com/office/drawing/2014/main" id="{14076DA3-E36E-FE13-DF66-EC0FC5678E7C}"/>
+              </a:ext>
+            </a:extLst>
+          </p:cNvPr>
+          <p:cNvSpPr>
+            <a:spLocks noGrp="1"/>
+          </p:cNvSpPr>
+          <p:nvPr>
+            <p:ph type="title"/>
+          </p:nvPr>
+        </p:nvSpPr>
+        <p:spPr>
+          <a:xfrm>
+            <a:off x="630935" y="323088"/>
+            <a:ext cx="11329761" cy="1798320"/>
+          </a:xfrm>
+        </p:spPr>
+        <p:txBody>
+          <a:bodyPr anchor="b">
+            <a:normAutofit/>
+          </a:bodyPr>
+          <a:lstStyle/>
+          <a:p>
+            <a:r>
+              <a:rPr lang="en-US" dirty="0"/>
+              <a:t>REQUIREMENT: SECURITY &amp; DATA PRIVACY</a:t>
+            </a:r>
+            <a:endParaRPr lang="es-ES" dirty="0"/>
+          </a:p>
+        </p:txBody>
+      </p:sp>
+      <p:sp>
+        <p:nvSpPr>
+          <p:cNvPr id="3" name="Marcador de contenido 2">
+            <a:extLst>
+              <a:ext uri="{FF2B5EF4-FFF2-40B4-BE49-F238E27FC236}">
+                <a16:creationId xmlns:a16="http://schemas.microsoft.com/office/drawing/2014/main" id="{B1DBC167-6B30-04B2-10C3-8F3E9D505C20}"/>
+              </a:ext>
+            </a:extLst>
+          </p:cNvPr>
+          <p:cNvSpPr>
+            <a:spLocks noGrp="1"/>
+          </p:cNvSpPr>
+          <p:nvPr>
+            <p:ph idx="1"/>
+          </p:nvPr>
+        </p:nvSpPr>
+        <p:spPr>
+          <a:xfrm>
+            <a:off x="630936" y="2660904"/>
+            <a:ext cx="10962966" cy="3547872"/>
+          </a:xfrm>
+        </p:spPr>
+        <p:txBody>
+          <a:bodyPr anchor="t">
+            <a:normAutofit/>
+          </a:bodyPr>
+          <a:lstStyle/>
+          <a:p>
+            <a:r>
+              <a:rPr lang="en-US" sz="2400" dirty="0"/>
+              <a:t>Protect sensitive user data (grades, PII, </a:t>
+            </a:r>
+            <a:r>
+              <a:rPr lang="en-US" sz="2400" dirty="0" err="1"/>
+              <a:t>etc</a:t>
+            </a:r>
+            <a:r>
+              <a:rPr lang="en-US" sz="2400" dirty="0"/>
+              <a:t>) with end-to-end encryption, role-based access control (RBAC).</a:t>
+            </a:r>
+          </a:p>
+          <a:p>
+            <a:pPr marL="0" indent="0">
+              <a:buNone/>
+            </a:pPr>
+            <a:endParaRPr lang="en-US" sz="2400" dirty="0"/>
+          </a:p>
+          <a:p>
+            <a:r>
+              <a:rPr lang="en-US" sz="2400" dirty="0"/>
+              <a:t>Architectural Extension: Required</a:t>
+            </a:r>
+          </a:p>
+        </p:txBody>
+      </p:sp>
+    </p:spTree>
+    <p:extLst>
+      <p:ext uri="{BB962C8B-B14F-4D97-AF65-F5344CB8AC3E}">
+        <p14:creationId xmlns:p14="http://schemas.microsoft.com/office/powerpoint/2010/main" val="300417712"/>
+      </p:ext>
+    </p:extLst>
+  </p:cSld>
+  <p:clrMapOvr>
+    <a:masterClrMapping/>
+  </p:clrMapOvr>
+</p:sld>
+</file>
+
+<file path=ppt/slides/slide12.xml><?xml version="1.0" encoding="utf-8"?>
+<p:sld xmlns:a="http://schemas.openxmlformats.org/drawingml/2006/main" xmlns:r="http://schemas.openxmlformats.org/officeDocument/2006/relationships" xmlns:p="http://schemas.openxmlformats.org/presentationml/2006/main">
+  <p:cSld>
+    <p:spTree>
+      <p:nvGrpSpPr>
+        <p:cNvPr id="1" name="">
+          <a:extLst>
+            <a:ext uri="{FF2B5EF4-FFF2-40B4-BE49-F238E27FC236}">
+              <a16:creationId xmlns:a16="http://schemas.microsoft.com/office/drawing/2014/main" id="{438C8ECC-DEBD-9C29-DED3-D8CD5C21064E}"/>
+            </a:ext>
+          </a:extLst>
+        </p:cNvPr>
+        <p:cNvGrpSpPr/>
+        <p:nvPr/>
+      </p:nvGrpSpPr>
+      <p:grpSpPr>
+        <a:xfrm>
+          <a:off x="0" y="0"/>
+          <a:ext cx="0" cy="0"/>
+          <a:chOff x="0" y="0"/>
+          <a:chExt cx="0" cy="0"/>
+        </a:xfrm>
+      </p:grpSpPr>
+      <p:sp>
+        <p:nvSpPr>
+          <p:cNvPr id="2" name="Title 1">
+            <a:extLst>
+              <a:ext uri="{FF2B5EF4-FFF2-40B4-BE49-F238E27FC236}">
+                <a16:creationId xmlns:a16="http://schemas.microsoft.com/office/drawing/2014/main" id="{FCE3AF4B-DA69-8205-596C-F3631AE846C8}"/>
+              </a:ext>
+            </a:extLst>
+          </p:cNvPr>
+          <p:cNvSpPr>
+            <a:spLocks noGrp="1"/>
+          </p:cNvSpPr>
+          <p:nvPr>
+            <p:ph type="title"/>
+          </p:nvPr>
+        </p:nvSpPr>
+        <p:spPr/>
+        <p:txBody>
+          <a:bodyPr/>
+          <a:lstStyle/>
+          <a:p>
+            <a:r>
+              <a:rPr lang="en-US" dirty="0"/>
+              <a:t>Current Strengths:</a:t>
+            </a:r>
+            <a:endParaRPr lang="en-ZM" dirty="0"/>
+          </a:p>
+        </p:txBody>
+      </p:sp>
+      <p:sp>
+        <p:nvSpPr>
+          <p:cNvPr id="3" name="Content Placeholder 2">
+            <a:extLst>
+              <a:ext uri="{FF2B5EF4-FFF2-40B4-BE49-F238E27FC236}">
+                <a16:creationId xmlns:a16="http://schemas.microsoft.com/office/drawing/2014/main" id="{05E84634-1399-449B-7C2A-90CE298700AB}"/>
+              </a:ext>
+            </a:extLst>
+          </p:cNvPr>
+          <p:cNvSpPr>
+            <a:spLocks noGrp="1"/>
+          </p:cNvSpPr>
+          <p:nvPr>
+            <p:ph idx="1"/>
+          </p:nvPr>
+        </p:nvSpPr>
+        <p:spPr/>
+        <p:txBody>
+          <a:bodyPr>
+            <a:normAutofit/>
+          </a:bodyPr>
+          <a:lstStyle/>
+          <a:p>
+            <a:r>
+              <a:rPr lang="en-US" dirty="0"/>
+              <a:t>Integration with Identity Provider (IdP) for SSO authentication</a:t>
+            </a:r>
+          </a:p>
+          <a:p>
+            <a:r>
+              <a:rPr lang="en-US" dirty="0"/>
+              <a:t>HTTPS communication between web app and API</a:t>
+            </a:r>
+          </a:p>
+          <a:p>
+            <a:endParaRPr lang="en-ZM" dirty="0"/>
+          </a:p>
+        </p:txBody>
+      </p:sp>
+    </p:spTree>
+    <p:extLst>
+      <p:ext uri="{BB962C8B-B14F-4D97-AF65-F5344CB8AC3E}">
+        <p14:creationId xmlns:p14="http://schemas.microsoft.com/office/powerpoint/2010/main" val="4045528519"/>
+      </p:ext>
+    </p:extLst>
+  </p:cSld>
+  <p:clrMapOvr>
+    <a:masterClrMapping/>
+  </p:clrMapOvr>
+</p:sld>
+</file>
+
+<file path=ppt/slides/slide13.xml><?xml version="1.0" encoding="utf-8"?>
+<p:sld xmlns:a="http://schemas.openxmlformats.org/drawingml/2006/main" xmlns:r="http://schemas.openxmlformats.org/officeDocument/2006/relationships" xmlns:p="http://schemas.openxmlformats.org/presentationml/2006/main">
+  <p:cSld>
+    <p:spTree>
+      <p:nvGrpSpPr>
+        <p:cNvPr id="1" name=""/>
+        <p:cNvGrpSpPr/>
+        <p:nvPr/>
+      </p:nvGrpSpPr>
+      <p:grpSpPr>
+        <a:xfrm>
+          <a:off x="0" y="0"/>
+          <a:ext cx="0" cy="0"/>
+          <a:chOff x="0" y="0"/>
+          <a:chExt cx="0" cy="0"/>
+        </a:xfrm>
+      </p:grpSpPr>
+      <p:sp>
+        <p:nvSpPr>
+          <p:cNvPr id="2" name="Title 1">
+            <a:extLst>
+              <a:ext uri="{FF2B5EF4-FFF2-40B4-BE49-F238E27FC236}">
+                <a16:creationId xmlns:a16="http://schemas.microsoft.com/office/drawing/2014/main" id="{6E1E8EFF-25A9-691C-FBDD-89827A5836AE}"/>
+              </a:ext>
+            </a:extLst>
+          </p:cNvPr>
+          <p:cNvSpPr>
+            <a:spLocks noGrp="1"/>
+          </p:cNvSpPr>
+          <p:nvPr>
+            <p:ph type="title"/>
+          </p:nvPr>
+        </p:nvSpPr>
+        <p:spPr/>
+        <p:txBody>
+          <a:bodyPr/>
+          <a:lstStyle/>
+          <a:p>
+            <a:r>
+              <a:rPr lang="en-US" dirty="0"/>
+              <a:t>SUGGESTED ARCHITECTURAL EXTENSION:</a:t>
+            </a:r>
+            <a:endParaRPr lang="en-ZM" dirty="0"/>
+          </a:p>
+        </p:txBody>
+      </p:sp>
+      <p:sp>
+        <p:nvSpPr>
+          <p:cNvPr id="3" name="Content Placeholder 2">
+            <a:extLst>
+              <a:ext uri="{FF2B5EF4-FFF2-40B4-BE49-F238E27FC236}">
+                <a16:creationId xmlns:a16="http://schemas.microsoft.com/office/drawing/2014/main" id="{EF75029D-7F7E-D7D5-D383-BE48FF2C2FBC}"/>
+              </a:ext>
+            </a:extLst>
+          </p:cNvPr>
+          <p:cNvSpPr>
+            <a:spLocks noGrp="1"/>
+          </p:cNvSpPr>
+          <p:nvPr>
+            <p:ph idx="1"/>
+          </p:nvPr>
+        </p:nvSpPr>
+        <p:spPr/>
+        <p:txBody>
+          <a:bodyPr/>
+          <a:lstStyle/>
+          <a:p>
+            <a:r>
+              <a:rPr lang="en-US" dirty="0"/>
+              <a:t>Implement "</a:t>
+            </a:r>
+            <a:r>
+              <a:rPr lang="en-US" b="1" dirty="0"/>
+              <a:t>Data Encryption Service</a:t>
+            </a:r>
+            <a:r>
+              <a:rPr lang="en-US" dirty="0"/>
+              <a:t>" component for at-rest encryption</a:t>
+            </a:r>
+            <a:endParaRPr lang="en-ZM" dirty="0"/>
+          </a:p>
+        </p:txBody>
+      </p:sp>
+    </p:spTree>
+    <p:extLst>
+      <p:ext uri="{BB962C8B-B14F-4D97-AF65-F5344CB8AC3E}">
+        <p14:creationId xmlns:p14="http://schemas.microsoft.com/office/powerpoint/2010/main" val="1658002362"/>
+      </p:ext>
+    </p:extLst>
+  </p:cSld>
+  <p:clrMapOvr>
+    <a:masterClrMapping/>
+  </p:clrMapOvr>
+</p:sld>
+</file>
+
 <file path=ppt/slides/slide2.xml><?xml version="1.0" encoding="utf-8"?>
 <p:sld xmlns:a="http://schemas.openxmlformats.org/drawingml/2006/main" xmlns:r="http://schemas.openxmlformats.org/officeDocument/2006/relationships" xmlns:p="http://schemas.openxmlformats.org/presentationml/2006/main">
   <p:cSld>
@@ -6691,6 +7136,813 @@
     <p:extLst>
       <p:ext uri="{BB962C8B-B14F-4D97-AF65-F5344CB8AC3E}">
         <p14:creationId xmlns:p14="http://schemas.microsoft.com/office/powerpoint/2010/main" val="1428783815"/>
+      </p:ext>
+    </p:extLst>
+  </p:cSld>
+  <p:clrMapOvr>
+    <a:masterClrMapping/>
+  </p:clrMapOvr>
+</p:sld>
+</file>
+
+<file path=ppt/slides/slide6.xml><?xml version="1.0" encoding="utf-8"?>
+<p:sld xmlns:a="http://schemas.openxmlformats.org/drawingml/2006/main" xmlns:r="http://schemas.openxmlformats.org/officeDocument/2006/relationships" xmlns:p="http://schemas.openxmlformats.org/presentationml/2006/main">
+  <p:cSld>
+    <p:bg>
+      <p:bgPr>
+        <a:solidFill>
+          <a:schemeClr val="bg1"/>
+        </a:solidFill>
+        <a:effectLst/>
+      </p:bgPr>
+    </p:bg>
+    <p:spTree>
+      <p:nvGrpSpPr>
+        <p:cNvPr id="1" name="">
+          <a:extLst>
+            <a:ext uri="{FF2B5EF4-FFF2-40B4-BE49-F238E27FC236}">
+              <a16:creationId xmlns:a16="http://schemas.microsoft.com/office/drawing/2014/main" id="{25E70CB8-8633-2C81-5E8F-E290E0F85551}"/>
+            </a:ext>
+          </a:extLst>
+        </p:cNvPr>
+        <p:cNvGrpSpPr/>
+        <p:nvPr/>
+      </p:nvGrpSpPr>
+      <p:grpSpPr>
+        <a:xfrm>
+          <a:off x="0" y="0"/>
+          <a:ext cx="0" cy="0"/>
+          <a:chOff x="0" y="0"/>
+          <a:chExt cx="0" cy="0"/>
+        </a:xfrm>
+      </p:grpSpPr>
+      <p:sp useBgFill="1">
+        <p:nvSpPr>
+          <p:cNvPr id="38" name="Rectangle 37">
+            <a:extLst>
+              <a:ext uri="{FF2B5EF4-FFF2-40B4-BE49-F238E27FC236}">
+                <a16:creationId xmlns:a16="http://schemas.microsoft.com/office/drawing/2014/main" id="{C5E75634-15CB-9D6A-CDB5-F8B85CDFFA00}"/>
+              </a:ext>
+              <a:ext uri="{C183D7F6-B498-43B3-948B-1728B52AA6E4}">
+                <adec:decorative xmlns:adec="http://schemas.microsoft.com/office/drawing/2017/decorative" val="1"/>
+              </a:ext>
+            </a:extLst>
+          </p:cNvPr>
+          <p:cNvSpPr>
+            <a:spLocks noGrp="1" noRot="1" noChangeAspect="1" noMove="1" noResize="1" noEditPoints="1" noAdjustHandles="1" noChangeArrowheads="1" noChangeShapeType="1" noTextEdit="1"/>
+          </p:cNvSpPr>
+          <p:nvPr>
+            <p:extLst>
+              <p:ext uri="{386F3935-93C4-4BCD-93E2-E3B085C9AB24}">
+                <p16:designElem xmlns:p16="http://schemas.microsoft.com/office/powerpoint/2015/main" val="1"/>
+              </p:ext>
+            </p:extLst>
+          </p:nvPr>
+        </p:nvSpPr>
+        <p:spPr>
+          <a:xfrm>
+            <a:off x="0" y="0"/>
+            <a:ext cx="12192000" cy="6858000"/>
+          </a:xfrm>
+          <a:prstGeom prst="rect">
+            <a:avLst/>
+          </a:prstGeom>
+          <a:ln>
+            <a:noFill/>
+          </a:ln>
+        </p:spPr>
+        <p:style>
+          <a:lnRef idx="2">
+            <a:schemeClr val="accent1">
+              <a:shade val="50000"/>
+            </a:schemeClr>
+          </a:lnRef>
+          <a:fillRef idx="1">
+            <a:schemeClr val="accent1"/>
+          </a:fillRef>
+          <a:effectRef idx="0">
+            <a:schemeClr val="accent1"/>
+          </a:effectRef>
+          <a:fontRef idx="minor">
+            <a:schemeClr val="lt1"/>
+          </a:fontRef>
+        </p:style>
+        <p:txBody>
+          <a:bodyPr rtlCol="0" anchor="ctr"/>
+          <a:lstStyle/>
+          <a:p>
+            <a:pPr algn="ctr"/>
+            <a:endParaRPr lang="en-US"/>
+          </a:p>
+        </p:txBody>
+      </p:sp>
+      <p:sp>
+        <p:nvSpPr>
+          <p:cNvPr id="2" name="Título 1">
+            <a:extLst>
+              <a:ext uri="{FF2B5EF4-FFF2-40B4-BE49-F238E27FC236}">
+                <a16:creationId xmlns:a16="http://schemas.microsoft.com/office/drawing/2014/main" id="{63F8C4A2-9322-E16F-5D94-BBD2DF2A18E3}"/>
+              </a:ext>
+            </a:extLst>
+          </p:cNvPr>
+          <p:cNvSpPr>
+            <a:spLocks noGrp="1"/>
+          </p:cNvSpPr>
+          <p:nvPr>
+            <p:ph type="title"/>
+          </p:nvPr>
+        </p:nvSpPr>
+        <p:spPr>
+          <a:xfrm>
+            <a:off x="630935" y="323088"/>
+            <a:ext cx="11329761" cy="1798320"/>
+          </a:xfrm>
+        </p:spPr>
+        <p:txBody>
+          <a:bodyPr anchor="b">
+            <a:normAutofit/>
+          </a:bodyPr>
+          <a:lstStyle/>
+          <a:p>
+            <a:r>
+              <a:rPr lang="en-US" dirty="0"/>
+              <a:t>REQUIREMENT:</a:t>
+            </a:r>
+            <a:br>
+              <a:rPr lang="en-US" dirty="0"/>
+            </a:br>
+            <a:r>
+              <a:rPr lang="en-US" dirty="0"/>
+              <a:t>MAINTAINABILITY &amp; TESTABILITY</a:t>
+            </a:r>
+            <a:endParaRPr lang="es-ES" dirty="0"/>
+          </a:p>
+        </p:txBody>
+      </p:sp>
+      <p:sp>
+        <p:nvSpPr>
+          <p:cNvPr id="40" name="sketch line">
+            <a:extLst>
+              <a:ext uri="{FF2B5EF4-FFF2-40B4-BE49-F238E27FC236}">
+                <a16:creationId xmlns:a16="http://schemas.microsoft.com/office/drawing/2014/main" id="{6A0269F3-3669-58A4-2F0A-7B1542108189}"/>
+              </a:ext>
+              <a:ext uri="{C183D7F6-B498-43B3-948B-1728B52AA6E4}">
+                <adec:decorative xmlns:adec="http://schemas.microsoft.com/office/drawing/2017/decorative" val="1"/>
+              </a:ext>
+            </a:extLst>
+          </p:cNvPr>
+          <p:cNvSpPr>
+            <a:spLocks noGrp="1" noRot="1" noChangeAspect="1" noMove="1" noResize="1" noEditPoints="1" noAdjustHandles="1" noChangeArrowheads="1" noChangeShapeType="1" noTextEdit="1"/>
+          </p:cNvSpPr>
+          <p:nvPr>
+            <p:extLst>
+              <p:ext uri="{386F3935-93C4-4BCD-93E2-E3B085C9AB24}">
+                <p16:designElem xmlns:p16="http://schemas.microsoft.com/office/powerpoint/2015/main" val="1"/>
+              </p:ext>
+            </p:extLst>
+          </p:nvPr>
+        </p:nvSpPr>
+        <p:spPr>
+          <a:xfrm>
+            <a:off x="643278" y="2372868"/>
+            <a:ext cx="3255095" cy="18288"/>
+          </a:xfrm>
+          <a:custGeom>
+            <a:avLst/>
+            <a:gdLst>
+              <a:gd name="csX0" fmla="*/ 0 w 3255095"/>
+              <a:gd name="csY0" fmla="*/ 0 h 18288"/>
+              <a:gd name="csX1" fmla="*/ 618468 w 3255095"/>
+              <a:gd name="csY1" fmla="*/ 0 h 18288"/>
+              <a:gd name="csX2" fmla="*/ 1269487 w 3255095"/>
+              <a:gd name="csY2" fmla="*/ 0 h 18288"/>
+              <a:gd name="csX3" fmla="*/ 1953057 w 3255095"/>
+              <a:gd name="csY3" fmla="*/ 0 h 18288"/>
+              <a:gd name="csX4" fmla="*/ 2636627 w 3255095"/>
+              <a:gd name="csY4" fmla="*/ 0 h 18288"/>
+              <a:gd name="csX5" fmla="*/ 3255095 w 3255095"/>
+              <a:gd name="csY5" fmla="*/ 0 h 18288"/>
+              <a:gd name="csX6" fmla="*/ 3255095 w 3255095"/>
+              <a:gd name="csY6" fmla="*/ 18288 h 18288"/>
+              <a:gd name="csX7" fmla="*/ 2538974 w 3255095"/>
+              <a:gd name="csY7" fmla="*/ 18288 h 18288"/>
+              <a:gd name="csX8" fmla="*/ 1822853 w 3255095"/>
+              <a:gd name="csY8" fmla="*/ 18288 h 18288"/>
+              <a:gd name="csX9" fmla="*/ 1171834 w 3255095"/>
+              <a:gd name="csY9" fmla="*/ 18288 h 18288"/>
+              <a:gd name="csX10" fmla="*/ 0 w 3255095"/>
+              <a:gd name="csY10" fmla="*/ 18288 h 18288"/>
+              <a:gd name="csX11" fmla="*/ 0 w 3255095"/>
+              <a:gd name="csY11" fmla="*/ 0 h 18288"/>
+            </a:gdLst>
+            <a:ahLst/>
+            <a:cxnLst>
+              <a:cxn ang="0">
+                <a:pos x="csX0" y="csY0"/>
+              </a:cxn>
+              <a:cxn ang="0">
+                <a:pos x="csX1" y="csY1"/>
+              </a:cxn>
+              <a:cxn ang="0">
+                <a:pos x="csX2" y="csY2"/>
+              </a:cxn>
+              <a:cxn ang="0">
+                <a:pos x="csX3" y="csY3"/>
+              </a:cxn>
+              <a:cxn ang="0">
+                <a:pos x="csX4" y="csY4"/>
+              </a:cxn>
+              <a:cxn ang="0">
+                <a:pos x="csX5" y="csY5"/>
+              </a:cxn>
+              <a:cxn ang="0">
+                <a:pos x="csX6" y="csY6"/>
+              </a:cxn>
+              <a:cxn ang="0">
+                <a:pos x="csX7" y="csY7"/>
+              </a:cxn>
+              <a:cxn ang="0">
+                <a:pos x="csX8" y="csY8"/>
+              </a:cxn>
+              <a:cxn ang="0">
+                <a:pos x="csX9" y="csY9"/>
+              </a:cxn>
+              <a:cxn ang="0">
+                <a:pos x="csX10" y="csY10"/>
+              </a:cxn>
+              <a:cxn ang="0">
+                <a:pos x="csX11" y="csY11"/>
+              </a:cxn>
+            </a:cxnLst>
+            <a:rect l="l" t="t" r="r" b="b"/>
+            <a:pathLst>
+              <a:path w="3255095" h="18288" fill="none" extrusionOk="0">
+                <a:moveTo>
+                  <a:pt x="0" y="0"/>
+                </a:moveTo>
+                <a:cubicBezTo>
+                  <a:pt x="240201" y="-22123"/>
+                  <a:pt x="462021" y="-19623"/>
+                  <a:pt x="618468" y="0"/>
+                </a:cubicBezTo>
+                <a:cubicBezTo>
+                  <a:pt x="774915" y="19623"/>
+                  <a:pt x="974734" y="2035"/>
+                  <a:pt x="1269487" y="0"/>
+                </a:cubicBezTo>
+                <a:cubicBezTo>
+                  <a:pt x="1564240" y="-2035"/>
+                  <a:pt x="1733579" y="10639"/>
+                  <a:pt x="1953057" y="0"/>
+                </a:cubicBezTo>
+                <a:cubicBezTo>
+                  <a:pt x="2172535" y="-10639"/>
+                  <a:pt x="2453962" y="14018"/>
+                  <a:pt x="2636627" y="0"/>
+                </a:cubicBezTo>
+                <a:cubicBezTo>
+                  <a:pt x="2819292" y="-14018"/>
+                  <a:pt x="3121375" y="5399"/>
+                  <a:pt x="3255095" y="0"/>
+                </a:cubicBezTo>
+                <a:cubicBezTo>
+                  <a:pt x="3254386" y="8157"/>
+                  <a:pt x="3254682" y="12125"/>
+                  <a:pt x="3255095" y="18288"/>
+                </a:cubicBezTo>
+                <a:cubicBezTo>
+                  <a:pt x="3088545" y="23203"/>
+                  <a:pt x="2687475" y="7419"/>
+                  <a:pt x="2538974" y="18288"/>
+                </a:cubicBezTo>
+                <a:cubicBezTo>
+                  <a:pt x="2390473" y="29157"/>
+                  <a:pt x="2137381" y="-8959"/>
+                  <a:pt x="1822853" y="18288"/>
+                </a:cubicBezTo>
+                <a:cubicBezTo>
+                  <a:pt x="1508325" y="45535"/>
+                  <a:pt x="1466437" y="20385"/>
+                  <a:pt x="1171834" y="18288"/>
+                </a:cubicBezTo>
+                <a:cubicBezTo>
+                  <a:pt x="877231" y="16191"/>
+                  <a:pt x="561097" y="37643"/>
+                  <a:pt x="0" y="18288"/>
+                </a:cubicBezTo>
+                <a:cubicBezTo>
+                  <a:pt x="-46" y="12483"/>
+                  <a:pt x="-203" y="6491"/>
+                  <a:pt x="0" y="0"/>
+                </a:cubicBezTo>
+                <a:close/>
+              </a:path>
+              <a:path w="3255095" h="18288" stroke="0" extrusionOk="0">
+                <a:moveTo>
+                  <a:pt x="0" y="0"/>
+                </a:moveTo>
+                <a:cubicBezTo>
+                  <a:pt x="291965" y="19429"/>
+                  <a:pt x="363155" y="8568"/>
+                  <a:pt x="618468" y="0"/>
+                </a:cubicBezTo>
+                <a:cubicBezTo>
+                  <a:pt x="873781" y="-8568"/>
+                  <a:pt x="904459" y="-19505"/>
+                  <a:pt x="1171834" y="0"/>
+                </a:cubicBezTo>
+                <a:cubicBezTo>
+                  <a:pt x="1439209" y="19505"/>
+                  <a:pt x="1744369" y="9790"/>
+                  <a:pt x="1887955" y="0"/>
+                </a:cubicBezTo>
+                <a:cubicBezTo>
+                  <a:pt x="2031541" y="-9790"/>
+                  <a:pt x="2346378" y="21240"/>
+                  <a:pt x="2506423" y="0"/>
+                </a:cubicBezTo>
+                <a:cubicBezTo>
+                  <a:pt x="2666468" y="-21240"/>
+                  <a:pt x="2990257" y="30414"/>
+                  <a:pt x="3255095" y="0"/>
+                </a:cubicBezTo>
+                <a:cubicBezTo>
+                  <a:pt x="3254831" y="4493"/>
+                  <a:pt x="3255479" y="9472"/>
+                  <a:pt x="3255095" y="18288"/>
+                </a:cubicBezTo>
+                <a:cubicBezTo>
+                  <a:pt x="3120743" y="16690"/>
+                  <a:pt x="2759628" y="42462"/>
+                  <a:pt x="2604076" y="18288"/>
+                </a:cubicBezTo>
+                <a:cubicBezTo>
+                  <a:pt x="2448524" y="-5886"/>
+                  <a:pt x="2184336" y="19599"/>
+                  <a:pt x="1887955" y="18288"/>
+                </a:cubicBezTo>
+                <a:cubicBezTo>
+                  <a:pt x="1591574" y="16977"/>
+                  <a:pt x="1548845" y="6870"/>
+                  <a:pt x="1334589" y="18288"/>
+                </a:cubicBezTo>
+                <a:cubicBezTo>
+                  <a:pt x="1120333" y="29706"/>
+                  <a:pt x="996014" y="9662"/>
+                  <a:pt x="683570" y="18288"/>
+                </a:cubicBezTo>
+                <a:cubicBezTo>
+                  <a:pt x="371126" y="26914"/>
+                  <a:pt x="198687" y="16167"/>
+                  <a:pt x="0" y="18288"/>
+                </a:cubicBezTo>
+                <a:cubicBezTo>
+                  <a:pt x="843" y="9577"/>
+                  <a:pt x="371" y="6900"/>
+                  <a:pt x="0" y="0"/>
+                </a:cubicBezTo>
+                <a:close/>
+              </a:path>
+            </a:pathLst>
+          </a:custGeom>
+          <a:solidFill>
+            <a:schemeClr val="accent2"/>
+          </a:solidFill>
+          <a:ln w="38100" cap="rnd">
+            <a:solidFill>
+              <a:schemeClr val="accent2"/>
+            </a:solidFill>
+            <a:round/>
+            <a:extLst>
+              <a:ext uri="{C807C97D-BFC1-408E-A445-0C87EB9F89A2}">
+                <ask:lineSketchStyleProps xmlns:ask="http://schemas.microsoft.com/office/drawing/2018/sketchyshapes" sd="1219033472">
+                  <a:prstGeom prst="rect">
+                    <a:avLst/>
+                  </a:prstGeom>
+                  <ask:type>
+                    <ask:lineSketchFreehand/>
+                  </ask:type>
+                </ask:lineSketchStyleProps>
+              </a:ext>
+            </a:extLst>
+          </a:ln>
+        </p:spPr>
+        <p:style>
+          <a:lnRef idx="2">
+            <a:schemeClr val="accent1">
+              <a:shade val="50000"/>
+            </a:schemeClr>
+          </a:lnRef>
+          <a:fillRef idx="1">
+            <a:schemeClr val="accent1"/>
+          </a:fillRef>
+          <a:effectRef idx="0">
+            <a:schemeClr val="accent1"/>
+          </a:effectRef>
+          <a:fontRef idx="minor">
+            <a:schemeClr val="lt1"/>
+          </a:fontRef>
+        </p:style>
+        <p:txBody>
+          <a:bodyPr rtlCol="0" anchor="ctr"/>
+          <a:lstStyle/>
+          <a:p>
+            <a:pPr algn="ctr"/>
+            <a:endParaRPr lang="en-US"/>
+          </a:p>
+        </p:txBody>
+      </p:sp>
+      <p:sp>
+        <p:nvSpPr>
+          <p:cNvPr id="3" name="Marcador de contenido 2">
+            <a:extLst>
+              <a:ext uri="{FF2B5EF4-FFF2-40B4-BE49-F238E27FC236}">
+                <a16:creationId xmlns:a16="http://schemas.microsoft.com/office/drawing/2014/main" id="{29827EA1-A2E6-8E6F-2D10-4A8287FFC540}"/>
+              </a:ext>
+            </a:extLst>
+          </p:cNvPr>
+          <p:cNvSpPr>
+            <a:spLocks noGrp="1"/>
+          </p:cNvSpPr>
+          <p:nvPr>
+            <p:ph idx="1"/>
+          </p:nvPr>
+        </p:nvSpPr>
+        <p:spPr>
+          <a:xfrm>
+            <a:off x="630936" y="2660904"/>
+            <a:ext cx="10962966" cy="3547872"/>
+          </a:xfrm>
+        </p:spPr>
+        <p:txBody>
+          <a:bodyPr anchor="t">
+            <a:normAutofit/>
+          </a:bodyPr>
+          <a:lstStyle/>
+          <a:p>
+            <a:r>
+              <a:rPr lang="en-US" sz="2400" dirty="0"/>
+              <a:t>Enable independent deployment of components, comprehensive automated testing, support bi-weekly releases.</a:t>
+            </a:r>
+          </a:p>
+          <a:p>
+            <a:endParaRPr lang="en-US" sz="2400" dirty="0"/>
+          </a:p>
+          <a:p>
+            <a:r>
+              <a:rPr lang="en-US" sz="2400" dirty="0"/>
+              <a:t>Architectural Extension: None required</a:t>
+            </a:r>
+          </a:p>
+        </p:txBody>
+      </p:sp>
+    </p:spTree>
+    <p:extLst>
+      <p:ext uri="{BB962C8B-B14F-4D97-AF65-F5344CB8AC3E}">
+        <p14:creationId xmlns:p14="http://schemas.microsoft.com/office/powerpoint/2010/main" val="1704966931"/>
+      </p:ext>
+    </p:extLst>
+  </p:cSld>
+  <p:clrMapOvr>
+    <a:masterClrMapping/>
+  </p:clrMapOvr>
+</p:sld>
+</file>
+
+<file path=ppt/slides/slide7.xml><?xml version="1.0" encoding="utf-8"?>
+<p:sld xmlns:a="http://schemas.openxmlformats.org/drawingml/2006/main" xmlns:r="http://schemas.openxmlformats.org/officeDocument/2006/relationships" xmlns:p="http://schemas.openxmlformats.org/presentationml/2006/main">
+  <p:cSld>
+    <p:spTree>
+      <p:nvGrpSpPr>
+        <p:cNvPr id="1" name=""/>
+        <p:cNvGrpSpPr/>
+        <p:nvPr/>
+      </p:nvGrpSpPr>
+      <p:grpSpPr>
+        <a:xfrm>
+          <a:off x="0" y="0"/>
+          <a:ext cx="0" cy="0"/>
+          <a:chOff x="0" y="0"/>
+          <a:chExt cx="0" cy="0"/>
+        </a:xfrm>
+      </p:grpSpPr>
+      <p:sp>
+        <p:nvSpPr>
+          <p:cNvPr id="2" name="Title 1">
+            <a:extLst>
+              <a:ext uri="{FF2B5EF4-FFF2-40B4-BE49-F238E27FC236}">
+                <a16:creationId xmlns:a16="http://schemas.microsoft.com/office/drawing/2014/main" id="{9300C51F-749D-800C-7CAA-218B24BBBA95}"/>
+              </a:ext>
+            </a:extLst>
+          </p:cNvPr>
+          <p:cNvSpPr>
+            <a:spLocks noGrp="1"/>
+          </p:cNvSpPr>
+          <p:nvPr>
+            <p:ph type="title"/>
+          </p:nvPr>
+        </p:nvSpPr>
+        <p:spPr/>
+        <p:txBody>
+          <a:bodyPr/>
+          <a:lstStyle/>
+          <a:p>
+            <a:r>
+              <a:rPr lang="en-US" dirty="0"/>
+              <a:t>Current Strengths:</a:t>
+            </a:r>
+            <a:endParaRPr lang="en-ZM" dirty="0"/>
+          </a:p>
+        </p:txBody>
+      </p:sp>
+      <p:sp>
+        <p:nvSpPr>
+          <p:cNvPr id="3" name="Content Placeholder 2">
+            <a:extLst>
+              <a:ext uri="{FF2B5EF4-FFF2-40B4-BE49-F238E27FC236}">
+                <a16:creationId xmlns:a16="http://schemas.microsoft.com/office/drawing/2014/main" id="{38E731C8-CB74-3794-A9C7-895285FE80A6}"/>
+              </a:ext>
+            </a:extLst>
+          </p:cNvPr>
+          <p:cNvSpPr>
+            <a:spLocks noGrp="1"/>
+          </p:cNvSpPr>
+          <p:nvPr>
+            <p:ph idx="1"/>
+          </p:nvPr>
+        </p:nvSpPr>
+        <p:spPr/>
+        <p:txBody>
+          <a:bodyPr>
+            <a:normAutofit/>
+          </a:bodyPr>
+          <a:lstStyle/>
+          <a:p>
+            <a:pPr marL="0" indent="0">
+              <a:buNone/>
+            </a:pPr>
+            <a:r>
+              <a:rPr lang="en-US" b="1" dirty="0"/>
+              <a:t>1. Clean Separation of Concerns:</a:t>
+            </a:r>
+          </a:p>
+          <a:p>
+            <a:r>
+              <a:rPr lang="en-US" dirty="0"/>
+              <a:t>Clear component boundaries with single responsibilities (Term Management, Registration, Grading, Results)</a:t>
+            </a:r>
+          </a:p>
+          <a:p>
+            <a:r>
+              <a:rPr lang="en-US" dirty="0"/>
+              <a:t>Hexagonal/ports-and-adapters pattern evident (Persistence Adapter, Integration Adapter)</a:t>
+            </a:r>
+          </a:p>
+          <a:p>
+            <a:r>
+              <a:rPr lang="en-US" dirty="0"/>
+              <a:t>Components communicate through well-defined interfaces</a:t>
+            </a:r>
+          </a:p>
+          <a:p>
+            <a:endParaRPr lang="en-US" dirty="0"/>
+          </a:p>
+          <a:p>
+            <a:endParaRPr lang="en-ZM" dirty="0"/>
+          </a:p>
+        </p:txBody>
+      </p:sp>
+    </p:spTree>
+    <p:extLst>
+      <p:ext uri="{BB962C8B-B14F-4D97-AF65-F5344CB8AC3E}">
+        <p14:creationId xmlns:p14="http://schemas.microsoft.com/office/powerpoint/2010/main" val="1818847291"/>
+      </p:ext>
+    </p:extLst>
+  </p:cSld>
+  <p:clrMapOvr>
+    <a:masterClrMapping/>
+  </p:clrMapOvr>
+</p:sld>
+</file>
+
+<file path=ppt/slides/slide8.xml><?xml version="1.0" encoding="utf-8"?>
+<p:sld xmlns:a="http://schemas.openxmlformats.org/drawingml/2006/main" xmlns:r="http://schemas.openxmlformats.org/officeDocument/2006/relationships" xmlns:p="http://schemas.openxmlformats.org/presentationml/2006/main">
+  <p:cSld>
+    <p:spTree>
+      <p:nvGrpSpPr>
+        <p:cNvPr id="1" name=""/>
+        <p:cNvGrpSpPr/>
+        <p:nvPr/>
+      </p:nvGrpSpPr>
+      <p:grpSpPr>
+        <a:xfrm>
+          <a:off x="0" y="0"/>
+          <a:ext cx="0" cy="0"/>
+          <a:chOff x="0" y="0"/>
+          <a:chExt cx="0" cy="0"/>
+        </a:xfrm>
+      </p:grpSpPr>
+      <p:sp>
+        <p:nvSpPr>
+          <p:cNvPr id="2" name="Title 1">
+            <a:extLst>
+              <a:ext uri="{FF2B5EF4-FFF2-40B4-BE49-F238E27FC236}">
+                <a16:creationId xmlns:a16="http://schemas.microsoft.com/office/drawing/2014/main" id="{FE991824-B68A-6E46-F513-9ED57B37DC97}"/>
+              </a:ext>
+            </a:extLst>
+          </p:cNvPr>
+          <p:cNvSpPr>
+            <a:spLocks noGrp="1"/>
+          </p:cNvSpPr>
+          <p:nvPr>
+            <p:ph type="title"/>
+          </p:nvPr>
+        </p:nvSpPr>
+        <p:spPr/>
+        <p:txBody>
+          <a:bodyPr/>
+          <a:lstStyle/>
+          <a:p>
+            <a:endParaRPr lang="en-ZM"/>
+          </a:p>
+        </p:txBody>
+      </p:sp>
+      <p:sp>
+        <p:nvSpPr>
+          <p:cNvPr id="3" name="Content Placeholder 2">
+            <a:extLst>
+              <a:ext uri="{FF2B5EF4-FFF2-40B4-BE49-F238E27FC236}">
+                <a16:creationId xmlns:a16="http://schemas.microsoft.com/office/drawing/2014/main" id="{3BA3024D-1C22-0AF7-81C5-D00687464850}"/>
+              </a:ext>
+            </a:extLst>
+          </p:cNvPr>
+          <p:cNvSpPr>
+            <a:spLocks noGrp="1"/>
+          </p:cNvSpPr>
+          <p:nvPr>
+            <p:ph idx="1"/>
+          </p:nvPr>
+        </p:nvSpPr>
+        <p:spPr/>
+        <p:txBody>
+          <a:bodyPr>
+            <a:normAutofit/>
+          </a:bodyPr>
+          <a:lstStyle/>
+          <a:p>
+            <a:pPr marL="0" indent="0">
+              <a:buNone/>
+            </a:pPr>
+            <a:r>
+              <a:rPr lang="en-US" b="1" dirty="0"/>
+              <a:t>2. Testability by Design:</a:t>
+            </a:r>
+          </a:p>
+          <a:p>
+            <a:r>
+              <a:rPr lang="en-US" dirty="0"/>
+              <a:t>Integration Adapter abstracts external systems - can be mocked for unit testing</a:t>
+            </a:r>
+          </a:p>
+          <a:p>
+            <a:r>
+              <a:rPr lang="en-US" dirty="0"/>
+              <a:t>Persistence Adapter abstracts database - enables in-memory testing</a:t>
+            </a:r>
+          </a:p>
+          <a:p>
+            <a:r>
+              <a:rPr lang="en-US" dirty="0"/>
+              <a:t>Each component has clear inputs/outputs suitable for contract testing</a:t>
+            </a:r>
+          </a:p>
+          <a:p>
+            <a:r>
+              <a:rPr lang="en-US" dirty="0"/>
+              <a:t>Dynamic views document interaction flows useful for integration test scenarios</a:t>
+            </a:r>
+          </a:p>
+          <a:p>
+            <a:endParaRPr lang="en-US" dirty="0"/>
+          </a:p>
+          <a:p>
+            <a:endParaRPr lang="en-ZM" dirty="0"/>
+          </a:p>
+        </p:txBody>
+      </p:sp>
+    </p:spTree>
+    <p:extLst>
+      <p:ext uri="{BB962C8B-B14F-4D97-AF65-F5344CB8AC3E}">
+        <p14:creationId xmlns:p14="http://schemas.microsoft.com/office/powerpoint/2010/main" val="1483507386"/>
+      </p:ext>
+    </p:extLst>
+  </p:cSld>
+  <p:clrMapOvr>
+    <a:masterClrMapping/>
+  </p:clrMapOvr>
+</p:sld>
+</file>
+
+<file path=ppt/slides/slide9.xml><?xml version="1.0" encoding="utf-8"?>
+<p:sld xmlns:a="http://schemas.openxmlformats.org/drawingml/2006/main" xmlns:r="http://schemas.openxmlformats.org/officeDocument/2006/relationships" xmlns:p="http://schemas.openxmlformats.org/presentationml/2006/main">
+  <p:cSld>
+    <p:spTree>
+      <p:nvGrpSpPr>
+        <p:cNvPr id="1" name=""/>
+        <p:cNvGrpSpPr/>
+        <p:nvPr/>
+      </p:nvGrpSpPr>
+      <p:grpSpPr>
+        <a:xfrm>
+          <a:off x="0" y="0"/>
+          <a:ext cx="0" cy="0"/>
+          <a:chOff x="0" y="0"/>
+          <a:chExt cx="0" cy="0"/>
+        </a:xfrm>
+      </p:grpSpPr>
+      <p:sp>
+        <p:nvSpPr>
+          <p:cNvPr id="2" name="Title 1">
+            <a:extLst>
+              <a:ext uri="{FF2B5EF4-FFF2-40B4-BE49-F238E27FC236}">
+                <a16:creationId xmlns:a16="http://schemas.microsoft.com/office/drawing/2014/main" id="{A10F5296-7D6A-AC7E-A3EF-4D5B8A2453B4}"/>
+              </a:ext>
+            </a:extLst>
+          </p:cNvPr>
+          <p:cNvSpPr>
+            <a:spLocks noGrp="1"/>
+          </p:cNvSpPr>
+          <p:nvPr>
+            <p:ph type="title"/>
+          </p:nvPr>
+        </p:nvSpPr>
+        <p:spPr/>
+        <p:txBody>
+          <a:bodyPr/>
+          <a:lstStyle/>
+          <a:p>
+            <a:endParaRPr lang="en-ZM"/>
+          </a:p>
+        </p:txBody>
+      </p:sp>
+      <p:sp>
+        <p:nvSpPr>
+          <p:cNvPr id="3" name="Content Placeholder 2">
+            <a:extLst>
+              <a:ext uri="{FF2B5EF4-FFF2-40B4-BE49-F238E27FC236}">
+                <a16:creationId xmlns:a16="http://schemas.microsoft.com/office/drawing/2014/main" id="{2F722D86-143A-E623-FB54-DBD636FE4625}"/>
+              </a:ext>
+            </a:extLst>
+          </p:cNvPr>
+          <p:cNvSpPr>
+            <a:spLocks noGrp="1"/>
+          </p:cNvSpPr>
+          <p:nvPr>
+            <p:ph idx="1"/>
+          </p:nvPr>
+        </p:nvSpPr>
+        <p:spPr/>
+        <p:txBody>
+          <a:bodyPr>
+            <a:normAutofit/>
+          </a:bodyPr>
+          <a:lstStyle/>
+          <a:p>
+            <a:pPr marL="0" indent="0">
+              <a:buNone/>
+            </a:pPr>
+            <a:r>
+              <a:rPr lang="en-US" b="1" dirty="0"/>
+              <a:t>3. Deployment Independence:</a:t>
+            </a:r>
+          </a:p>
+          <a:p>
+            <a:r>
+              <a:rPr lang="en-US" dirty="0"/>
+              <a:t>Web Application (SPA) can be deployed separately from Backend API</a:t>
+            </a:r>
+          </a:p>
+          <a:p>
+            <a:r>
+              <a:rPr lang="en-US" dirty="0"/>
+              <a:t>Component-level separation within API container allows for future microservices extraction</a:t>
+            </a:r>
+          </a:p>
+          <a:p>
+            <a:r>
+              <a:rPr lang="en-US" dirty="0"/>
+              <a:t>Database schema changes can be managed through migration scripts independently</a:t>
+            </a:r>
+          </a:p>
+          <a:p>
+            <a:endParaRPr lang="en-US" dirty="0"/>
+          </a:p>
+        </p:txBody>
+      </p:sp>
+    </p:spTree>
+    <p:extLst>
+      <p:ext uri="{BB962C8B-B14F-4D97-AF65-F5344CB8AC3E}">
+        <p14:creationId xmlns:p14="http://schemas.microsoft.com/office/powerpoint/2010/main" val="334085847"/>
       </p:ext>
     </p:extLst>
   </p:cSld>

--- a/M2/Presentation_Qualities.pptx
+++ b/M2/Presentation_Qualities.pptx
@@ -5,7 +5,7 @@
     <p:sldMasterId id="2147483648" r:id="rId1"/>
   </p:sldMasterIdLst>
   <p:notesMasterIdLst>
-    <p:notesMasterId r:id="rId15"/>
+    <p:notesMasterId r:id="rId19"/>
   </p:notesMasterIdLst>
   <p:sldIdLst>
     <p:sldId id="256" r:id="rId2"/>
@@ -21,6 +21,10 @@
     <p:sldId id="267" r:id="rId12"/>
     <p:sldId id="268" r:id="rId13"/>
     <p:sldId id="269" r:id="rId14"/>
+    <p:sldId id="271" r:id="rId15"/>
+    <p:sldId id="272" r:id="rId16"/>
+    <p:sldId id="273" r:id="rId17"/>
+    <p:sldId id="274" r:id="rId18"/>
   </p:sldIdLst>
   <p:sldSz cx="12192000" cy="6858000"/>
   <p:notesSz cx="6858000" cy="9144000"/>
@@ -705,7 +709,7 @@
           <a:p>
             <a:fld id="{FC1B7745-5391-477F-8AE8-1136866A9302}" type="datetimeFigureOut">
               <a:rPr lang="es-ES" smtClean="0"/>
-              <a:t>04/01/2026</a:t>
+              <a:t>4/1/26</a:t>
             </a:fld>
             <a:endParaRPr lang="es-ES"/>
           </a:p>
@@ -1203,7 +1207,7 @@
           <a:p>
             <a:fld id="{6A3C2F7B-537C-4500-BF1F-DDEBE70AF5A2}" type="datetimeFigureOut">
               <a:rPr lang="es-ES" smtClean="0"/>
-              <a:t>04/01/2026</a:t>
+              <a:t>4/1/26</a:t>
             </a:fld>
             <a:endParaRPr lang="es-ES"/>
           </a:p>
@@ -1401,7 +1405,7 @@
           <a:p>
             <a:fld id="{6A3C2F7B-537C-4500-BF1F-DDEBE70AF5A2}" type="datetimeFigureOut">
               <a:rPr lang="es-ES" smtClean="0"/>
-              <a:t>04/01/2026</a:t>
+              <a:t>4/1/26</a:t>
             </a:fld>
             <a:endParaRPr lang="es-ES"/>
           </a:p>
@@ -1609,7 +1613,7 @@
           <a:p>
             <a:fld id="{6A3C2F7B-537C-4500-BF1F-DDEBE70AF5A2}" type="datetimeFigureOut">
               <a:rPr lang="es-ES" smtClean="0"/>
-              <a:t>04/01/2026</a:t>
+              <a:t>4/1/26</a:t>
             </a:fld>
             <a:endParaRPr lang="es-ES"/>
           </a:p>
@@ -1807,7 +1811,7 @@
           <a:p>
             <a:fld id="{6A3C2F7B-537C-4500-BF1F-DDEBE70AF5A2}" type="datetimeFigureOut">
               <a:rPr lang="es-ES" smtClean="0"/>
-              <a:t>04/01/2026</a:t>
+              <a:t>4/1/26</a:t>
             </a:fld>
             <a:endParaRPr lang="es-ES"/>
           </a:p>
@@ -2082,7 +2086,7 @@
           <a:p>
             <a:fld id="{6A3C2F7B-537C-4500-BF1F-DDEBE70AF5A2}" type="datetimeFigureOut">
               <a:rPr lang="es-ES" smtClean="0"/>
-              <a:t>04/01/2026</a:t>
+              <a:t>4/1/26</a:t>
             </a:fld>
             <a:endParaRPr lang="es-ES"/>
           </a:p>
@@ -2347,7 +2351,7 @@
           <a:p>
             <a:fld id="{6A3C2F7B-537C-4500-BF1F-DDEBE70AF5A2}" type="datetimeFigureOut">
               <a:rPr lang="es-ES" smtClean="0"/>
-              <a:t>04/01/2026</a:t>
+              <a:t>4/1/26</a:t>
             </a:fld>
             <a:endParaRPr lang="es-ES"/>
           </a:p>
@@ -2759,7 +2763,7 @@
           <a:p>
             <a:fld id="{6A3C2F7B-537C-4500-BF1F-DDEBE70AF5A2}" type="datetimeFigureOut">
               <a:rPr lang="es-ES" smtClean="0"/>
-              <a:t>04/01/2026</a:t>
+              <a:t>4/1/26</a:t>
             </a:fld>
             <a:endParaRPr lang="es-ES"/>
           </a:p>
@@ -2900,7 +2904,7 @@
           <a:p>
             <a:fld id="{6A3C2F7B-537C-4500-BF1F-DDEBE70AF5A2}" type="datetimeFigureOut">
               <a:rPr lang="es-ES" smtClean="0"/>
-              <a:t>04/01/2026</a:t>
+              <a:t>4/1/26</a:t>
             </a:fld>
             <a:endParaRPr lang="es-ES"/>
           </a:p>
@@ -3013,7 +3017,7 @@
           <a:p>
             <a:fld id="{6A3C2F7B-537C-4500-BF1F-DDEBE70AF5A2}" type="datetimeFigureOut">
               <a:rPr lang="es-ES" smtClean="0"/>
-              <a:t>04/01/2026</a:t>
+              <a:t>4/1/26</a:t>
             </a:fld>
             <a:endParaRPr lang="es-ES"/>
           </a:p>
@@ -3324,7 +3328,7 @@
           <a:p>
             <a:fld id="{6A3C2F7B-537C-4500-BF1F-DDEBE70AF5A2}" type="datetimeFigureOut">
               <a:rPr lang="es-ES" smtClean="0"/>
-              <a:t>04/01/2026</a:t>
+              <a:t>4/1/26</a:t>
             </a:fld>
             <a:endParaRPr lang="es-ES"/>
           </a:p>
@@ -3612,7 +3616,7 @@
           <a:p>
             <a:fld id="{6A3C2F7B-537C-4500-BF1F-DDEBE70AF5A2}" type="datetimeFigureOut">
               <a:rPr lang="es-ES" smtClean="0"/>
-              <a:t>04/01/2026</a:t>
+              <a:t>4/1/26</a:t>
             </a:fld>
             <a:endParaRPr lang="es-ES"/>
           </a:p>
@@ -3853,7 +3857,7 @@
           <a:p>
             <a:fld id="{6A3C2F7B-537C-4500-BF1F-DDEBE70AF5A2}" type="datetimeFigureOut">
               <a:rPr lang="es-ES" smtClean="0"/>
-              <a:t>04/01/2026</a:t>
+              <a:t>4/1/26</a:t>
             </a:fld>
             <a:endParaRPr lang="es-ES"/>
           </a:p>
@@ -4765,6 +4769,1121 @@
 </p:sld>
 </file>
 
+<file path=ppt/slides/slide14.xml><?xml version="1.0" encoding="utf-8"?>
+<p:sld xmlns:a="http://schemas.openxmlformats.org/drawingml/2006/main" xmlns:r="http://schemas.openxmlformats.org/officeDocument/2006/relationships" xmlns:p="http://schemas.openxmlformats.org/presentationml/2006/main">
+  <p:cSld>
+    <p:spTree>
+      <p:nvGrpSpPr>
+        <p:cNvPr id="1" name=""/>
+        <p:cNvGrpSpPr/>
+        <p:nvPr/>
+      </p:nvGrpSpPr>
+      <p:grpSpPr>
+        <a:xfrm>
+          <a:off x="0" y="0"/>
+          <a:ext cx="0" cy="0"/>
+          <a:chOff x="0" y="0"/>
+          <a:chExt cx="0" cy="0"/>
+        </a:xfrm>
+      </p:grpSpPr>
+      <p:sp>
+        <p:nvSpPr>
+          <p:cNvPr id="2" name="Title 1">
+            <a:extLst>
+              <a:ext uri="{FF2B5EF4-FFF2-40B4-BE49-F238E27FC236}">
+                <a16:creationId xmlns:a16="http://schemas.microsoft.com/office/drawing/2014/main" id="{BBF5A8BF-6192-B19B-A2C6-CDA80A202DF4}"/>
+              </a:ext>
+            </a:extLst>
+          </p:cNvPr>
+          <p:cNvSpPr>
+            <a:spLocks noGrp="1"/>
+          </p:cNvSpPr>
+          <p:nvPr>
+            <p:ph type="title"/>
+          </p:nvPr>
+        </p:nvSpPr>
+        <p:spPr>
+          <a:xfrm>
+            <a:off x="838200" y="371904"/>
+            <a:ext cx="10515600" cy="1325563"/>
+          </a:xfrm>
+        </p:spPr>
+        <p:txBody>
+          <a:bodyPr/>
+          <a:lstStyle/>
+          <a:p>
+            <a:r>
+              <a:rPr lang="es-ES" dirty="0"/>
+              <a:t>RELIABILITY PROBLEM</a:t>
+            </a:r>
+            <a:endParaRPr lang="en-US" dirty="0"/>
+          </a:p>
+        </p:txBody>
+      </p:sp>
+      <p:sp>
+        <p:nvSpPr>
+          <p:cNvPr id="3" name="Content Placeholder 2">
+            <a:extLst>
+              <a:ext uri="{FF2B5EF4-FFF2-40B4-BE49-F238E27FC236}">
+                <a16:creationId xmlns:a16="http://schemas.microsoft.com/office/drawing/2014/main" id="{D4E7DA52-6770-12C8-9262-6A9C1DD7109B}"/>
+              </a:ext>
+            </a:extLst>
+          </p:cNvPr>
+          <p:cNvSpPr>
+            <a:spLocks noGrp="1"/>
+          </p:cNvSpPr>
+          <p:nvPr>
+            <p:ph idx="1"/>
+          </p:nvPr>
+        </p:nvSpPr>
+        <p:spPr>
+          <a:xfrm>
+            <a:off x="838200" y="1410227"/>
+            <a:ext cx="6872416" cy="2676118"/>
+          </a:xfrm>
+        </p:spPr>
+        <p:txBody>
+          <a:bodyPr>
+            <a:normAutofit/>
+          </a:bodyPr>
+          <a:lstStyle/>
+          <a:p>
+            <a:pPr marL="0" indent="0">
+              <a:buNone/>
+            </a:pPr>
+            <a:r>
+              <a:rPr lang="en-IN" sz="1400" dirty="0"/>
+              <a:t>During peak usage (e.g. after grade publication or before exam registration deadlines), external systems such as the </a:t>
+            </a:r>
+            <a:r>
+              <a:rPr lang="en-IN" sz="1400" b="1" dirty="0"/>
+              <a:t>Student Information System (SIS)</a:t>
+            </a:r>
+            <a:r>
+              <a:rPr lang="en-IN" sz="1400" dirty="0"/>
+              <a:t> or the </a:t>
+            </a:r>
+            <a:r>
+              <a:rPr lang="en-IN" sz="1400" b="1" dirty="0"/>
+              <a:t>Timetable Service</a:t>
+            </a:r>
+            <a:r>
+              <a:rPr lang="en-IN" sz="1400" dirty="0"/>
+              <a:t> may become temporarily unavailable or respond slowly.</a:t>
+            </a:r>
+            <a:br>
+              <a:rPr lang="en-IN" sz="1400" dirty="0"/>
+            </a:br>
+            <a:r>
+              <a:rPr lang="en-IN" sz="1400" dirty="0"/>
+              <a:t>When this happens, core EXA functionality (registration, result viewing, or grading workflows) may fail or hang due to synchronous dependencies on these external services.</a:t>
+            </a:r>
+          </a:p>
+          <a:p>
+            <a:endParaRPr lang="en-US" sz="1400" dirty="0"/>
+          </a:p>
+        </p:txBody>
+      </p:sp>
+      <p:sp>
+        <p:nvSpPr>
+          <p:cNvPr id="4" name="Content Placeholder 2">
+            <a:extLst>
+              <a:ext uri="{FF2B5EF4-FFF2-40B4-BE49-F238E27FC236}">
+                <a16:creationId xmlns:a16="http://schemas.microsoft.com/office/drawing/2014/main" id="{76EA7DAE-2384-CF0F-BD90-CCE4EE120430}"/>
+              </a:ext>
+            </a:extLst>
+          </p:cNvPr>
+          <p:cNvSpPr txBox="1">
+            <a:spLocks/>
+          </p:cNvSpPr>
+          <p:nvPr/>
+        </p:nvSpPr>
+        <p:spPr>
+          <a:xfrm>
+            <a:off x="838200" y="2748286"/>
+            <a:ext cx="6872416" cy="3985654"/>
+          </a:xfrm>
+          <a:prstGeom prst="rect">
+            <a:avLst/>
+          </a:prstGeom>
+        </p:spPr>
+        <p:txBody>
+          <a:bodyPr vert="horz" lIns="91440" tIns="45720" rIns="91440" bIns="45720" rtlCol="0">
+            <a:normAutofit/>
+          </a:bodyPr>
+          <a:lstStyle>
+            <a:lvl1pPr marL="228600" indent="-228600" algn="l" defTabSz="914400" rtl="0" eaLnBrk="1" latinLnBrk="0" hangingPunct="1">
+              <a:lnSpc>
+                <a:spcPct val="90000"/>
+              </a:lnSpc>
+              <a:spcBef>
+                <a:spcPts val="1000"/>
+              </a:spcBef>
+              <a:buFont typeface="Arial" panose="020B0604020202020204" pitchFamily="34" charset="0"/>
+              <a:buChar char="•"/>
+              <a:defRPr sz="2800" kern="1200">
+                <a:solidFill>
+                  <a:schemeClr val="tx1"/>
+                </a:solidFill>
+                <a:latin typeface="+mn-lt"/>
+                <a:ea typeface="+mn-ea"/>
+                <a:cs typeface="+mn-cs"/>
+              </a:defRPr>
+            </a:lvl1pPr>
+            <a:lvl2pPr marL="685800" indent="-228600" algn="l" defTabSz="914400" rtl="0" eaLnBrk="1" latinLnBrk="0" hangingPunct="1">
+              <a:lnSpc>
+                <a:spcPct val="90000"/>
+              </a:lnSpc>
+              <a:spcBef>
+                <a:spcPts val="500"/>
+              </a:spcBef>
+              <a:buFont typeface="Arial" panose="020B0604020202020204" pitchFamily="34" charset="0"/>
+              <a:buChar char="•"/>
+              <a:defRPr sz="2400" kern="1200">
+                <a:solidFill>
+                  <a:schemeClr val="tx1"/>
+                </a:solidFill>
+                <a:latin typeface="+mn-lt"/>
+                <a:ea typeface="+mn-ea"/>
+                <a:cs typeface="+mn-cs"/>
+              </a:defRPr>
+            </a:lvl2pPr>
+            <a:lvl3pPr marL="1143000" indent="-228600" algn="l" defTabSz="914400" rtl="0" eaLnBrk="1" latinLnBrk="0" hangingPunct="1">
+              <a:lnSpc>
+                <a:spcPct val="90000"/>
+              </a:lnSpc>
+              <a:spcBef>
+                <a:spcPts val="500"/>
+              </a:spcBef>
+              <a:buFont typeface="Arial" panose="020B0604020202020204" pitchFamily="34" charset="0"/>
+              <a:buChar char="•"/>
+              <a:defRPr sz="2000" kern="1200">
+                <a:solidFill>
+                  <a:schemeClr val="tx1"/>
+                </a:solidFill>
+                <a:latin typeface="+mn-lt"/>
+                <a:ea typeface="+mn-ea"/>
+                <a:cs typeface="+mn-cs"/>
+              </a:defRPr>
+            </a:lvl3pPr>
+            <a:lvl4pPr marL="1600200" indent="-228600" algn="l" defTabSz="914400" rtl="0" eaLnBrk="1" latinLnBrk="0" hangingPunct="1">
+              <a:lnSpc>
+                <a:spcPct val="90000"/>
+              </a:lnSpc>
+              <a:spcBef>
+                <a:spcPts val="500"/>
+              </a:spcBef>
+              <a:buFont typeface="Arial" panose="020B0604020202020204" pitchFamily="34" charset="0"/>
+              <a:buChar char="•"/>
+              <a:defRPr sz="1800" kern="1200">
+                <a:solidFill>
+                  <a:schemeClr val="tx1"/>
+                </a:solidFill>
+                <a:latin typeface="+mn-lt"/>
+                <a:ea typeface="+mn-ea"/>
+                <a:cs typeface="+mn-cs"/>
+              </a:defRPr>
+            </a:lvl4pPr>
+            <a:lvl5pPr marL="2057400" indent="-228600" algn="l" defTabSz="914400" rtl="0" eaLnBrk="1" latinLnBrk="0" hangingPunct="1">
+              <a:lnSpc>
+                <a:spcPct val="90000"/>
+              </a:lnSpc>
+              <a:spcBef>
+                <a:spcPts val="500"/>
+              </a:spcBef>
+              <a:buFont typeface="Arial" panose="020B0604020202020204" pitchFamily="34" charset="0"/>
+              <a:buChar char="•"/>
+              <a:defRPr sz="1800" kern="1200">
+                <a:solidFill>
+                  <a:schemeClr val="tx1"/>
+                </a:solidFill>
+                <a:latin typeface="+mn-lt"/>
+                <a:ea typeface="+mn-ea"/>
+                <a:cs typeface="+mn-cs"/>
+              </a:defRPr>
+            </a:lvl5pPr>
+            <a:lvl6pPr marL="2514600" indent="-228600" algn="l" defTabSz="914400" rtl="0" eaLnBrk="1" latinLnBrk="0" hangingPunct="1">
+              <a:lnSpc>
+                <a:spcPct val="90000"/>
+              </a:lnSpc>
+              <a:spcBef>
+                <a:spcPts val="500"/>
+              </a:spcBef>
+              <a:buFont typeface="Arial" panose="020B0604020202020204" pitchFamily="34" charset="0"/>
+              <a:buChar char="•"/>
+              <a:defRPr sz="1800" kern="1200">
+                <a:solidFill>
+                  <a:schemeClr val="tx1"/>
+                </a:solidFill>
+                <a:latin typeface="+mn-lt"/>
+                <a:ea typeface="+mn-ea"/>
+                <a:cs typeface="+mn-cs"/>
+              </a:defRPr>
+            </a:lvl6pPr>
+            <a:lvl7pPr marL="2971800" indent="-228600" algn="l" defTabSz="914400" rtl="0" eaLnBrk="1" latinLnBrk="0" hangingPunct="1">
+              <a:lnSpc>
+                <a:spcPct val="90000"/>
+              </a:lnSpc>
+              <a:spcBef>
+                <a:spcPts val="500"/>
+              </a:spcBef>
+              <a:buFont typeface="Arial" panose="020B0604020202020204" pitchFamily="34" charset="0"/>
+              <a:buChar char="•"/>
+              <a:defRPr sz="1800" kern="1200">
+                <a:solidFill>
+                  <a:schemeClr val="tx1"/>
+                </a:solidFill>
+                <a:latin typeface="+mn-lt"/>
+                <a:ea typeface="+mn-ea"/>
+                <a:cs typeface="+mn-cs"/>
+              </a:defRPr>
+            </a:lvl7pPr>
+            <a:lvl8pPr marL="3429000" indent="-228600" algn="l" defTabSz="914400" rtl="0" eaLnBrk="1" latinLnBrk="0" hangingPunct="1">
+              <a:lnSpc>
+                <a:spcPct val="90000"/>
+              </a:lnSpc>
+              <a:spcBef>
+                <a:spcPts val="500"/>
+              </a:spcBef>
+              <a:buFont typeface="Arial" panose="020B0604020202020204" pitchFamily="34" charset="0"/>
+              <a:buChar char="•"/>
+              <a:defRPr sz="1800" kern="1200">
+                <a:solidFill>
+                  <a:schemeClr val="tx1"/>
+                </a:solidFill>
+                <a:latin typeface="+mn-lt"/>
+                <a:ea typeface="+mn-ea"/>
+                <a:cs typeface="+mn-cs"/>
+              </a:defRPr>
+            </a:lvl8pPr>
+            <a:lvl9pPr marL="3886200" indent="-228600" algn="l" defTabSz="914400" rtl="0" eaLnBrk="1" latinLnBrk="0" hangingPunct="1">
+              <a:lnSpc>
+                <a:spcPct val="90000"/>
+              </a:lnSpc>
+              <a:spcBef>
+                <a:spcPts val="500"/>
+              </a:spcBef>
+              <a:buFont typeface="Arial" panose="020B0604020202020204" pitchFamily="34" charset="0"/>
+              <a:buChar char="•"/>
+              <a:defRPr sz="1800" kern="1200">
+                <a:solidFill>
+                  <a:schemeClr val="tx1"/>
+                </a:solidFill>
+                <a:latin typeface="+mn-lt"/>
+                <a:ea typeface="+mn-ea"/>
+                <a:cs typeface="+mn-cs"/>
+              </a:defRPr>
+            </a:lvl9pPr>
+          </a:lstStyle>
+          <a:p>
+            <a:r>
+              <a:rPr lang="en-IN" sz="1400" b="1" dirty="0"/>
+              <a:t>Involved Users:</a:t>
+            </a:r>
+            <a:br>
+              <a:rPr lang="en-IN" sz="1400" dirty="0"/>
+            </a:br>
+            <a:r>
+              <a:rPr lang="en-IN" sz="1400" dirty="0"/>
+              <a:t>Student, Teacher</a:t>
+            </a:r>
+          </a:p>
+          <a:p>
+            <a:r>
+              <a:rPr lang="en-IN" sz="1400" b="1" dirty="0"/>
+              <a:t>Affected System Parts:</a:t>
+            </a:r>
+            <a:br>
+              <a:rPr lang="en-IN" sz="1400" dirty="0"/>
+            </a:br>
+            <a:r>
+              <a:rPr lang="en-IN" sz="1400" b="1" i="1" u="sng" dirty="0"/>
+              <a:t>1. In Backend API:</a:t>
+            </a:r>
+          </a:p>
+          <a:p>
+            <a:pPr>
+              <a:buFont typeface="Arial" panose="020B0604020202020204" pitchFamily="34" charset="0"/>
+              <a:buChar char="•"/>
+            </a:pPr>
+            <a:r>
+              <a:rPr lang="en-IN" sz="1400" dirty="0"/>
+              <a:t>Integration Adapter</a:t>
+            </a:r>
+          </a:p>
+          <a:p>
+            <a:pPr>
+              <a:buFont typeface="Arial" panose="020B0604020202020204" pitchFamily="34" charset="0"/>
+              <a:buChar char="•"/>
+            </a:pPr>
+            <a:r>
+              <a:rPr lang="en-IN" sz="1400" dirty="0"/>
+              <a:t>Registration Management</a:t>
+            </a:r>
+          </a:p>
+          <a:p>
+            <a:pPr>
+              <a:buFont typeface="Arial" panose="020B0604020202020204" pitchFamily="34" charset="0"/>
+              <a:buChar char="•"/>
+            </a:pPr>
+            <a:r>
+              <a:rPr lang="en-IN" sz="1400" dirty="0"/>
+              <a:t>Grading Management</a:t>
+            </a:r>
+          </a:p>
+          <a:p>
+            <a:pPr>
+              <a:buFont typeface="Arial" panose="020B0604020202020204" pitchFamily="34" charset="0"/>
+              <a:buChar char="•"/>
+            </a:pPr>
+            <a:r>
+              <a:rPr lang="en-IN" sz="1400" dirty="0"/>
+              <a:t>Result Viewing</a:t>
+            </a:r>
+          </a:p>
+          <a:p>
+            <a:pPr marL="0" indent="0">
+              <a:buNone/>
+            </a:pPr>
+            <a:r>
+              <a:rPr lang="en-IN" sz="1400" dirty="0"/>
+              <a:t>       </a:t>
+            </a:r>
+            <a:r>
+              <a:rPr lang="en-IN" sz="1400" b="1" i="1" u="sng" dirty="0"/>
+              <a:t>2. In External Systems:</a:t>
+            </a:r>
+          </a:p>
+          <a:p>
+            <a:pPr>
+              <a:buFont typeface="Arial" panose="020B0604020202020204" pitchFamily="34" charset="0"/>
+              <a:buChar char="•"/>
+            </a:pPr>
+            <a:r>
+              <a:rPr lang="en-IN" sz="1400" dirty="0"/>
+              <a:t>Student Information System (SIS)</a:t>
+            </a:r>
+          </a:p>
+          <a:p>
+            <a:pPr>
+              <a:buFont typeface="Arial" panose="020B0604020202020204" pitchFamily="34" charset="0"/>
+              <a:buChar char="•"/>
+            </a:pPr>
+            <a:r>
+              <a:rPr lang="en-IN" sz="1400" dirty="0"/>
+              <a:t>Timetable Service</a:t>
+            </a:r>
+          </a:p>
+          <a:p>
+            <a:r>
+              <a:rPr lang="en-IN" sz="1400" dirty="0"/>
+              <a:t>The current architecture allows failures in external systems to propagate into EXA, reducing overall system reliability and potentially blocking critical academic processes.</a:t>
+            </a:r>
+          </a:p>
+        </p:txBody>
+      </p:sp>
+    </p:spTree>
+    <p:extLst>
+      <p:ext uri="{BB962C8B-B14F-4D97-AF65-F5344CB8AC3E}">
+        <p14:creationId xmlns:p14="http://schemas.microsoft.com/office/powerpoint/2010/main" val="1850926752"/>
+      </p:ext>
+    </p:extLst>
+  </p:cSld>
+  <p:clrMapOvr>
+    <a:masterClrMapping/>
+  </p:clrMapOvr>
+</p:sld>
+</file>
+
+<file path=ppt/slides/slide15.xml><?xml version="1.0" encoding="utf-8"?>
+<p:sld xmlns:a="http://schemas.openxmlformats.org/drawingml/2006/main" xmlns:r="http://schemas.openxmlformats.org/officeDocument/2006/relationships" xmlns:p="http://schemas.openxmlformats.org/presentationml/2006/main">
+  <p:cSld>
+    <p:spTree>
+      <p:nvGrpSpPr>
+        <p:cNvPr id="1" name=""/>
+        <p:cNvGrpSpPr/>
+        <p:nvPr/>
+      </p:nvGrpSpPr>
+      <p:grpSpPr>
+        <a:xfrm>
+          <a:off x="0" y="0"/>
+          <a:ext cx="0" cy="0"/>
+          <a:chOff x="0" y="0"/>
+          <a:chExt cx="0" cy="0"/>
+        </a:xfrm>
+      </p:grpSpPr>
+      <p:sp>
+        <p:nvSpPr>
+          <p:cNvPr id="2" name="Title 1">
+            <a:extLst>
+              <a:ext uri="{FF2B5EF4-FFF2-40B4-BE49-F238E27FC236}">
+                <a16:creationId xmlns:a16="http://schemas.microsoft.com/office/drawing/2014/main" id="{7861492E-D05F-0551-FB12-98F52F4AA679}"/>
+              </a:ext>
+            </a:extLst>
+          </p:cNvPr>
+          <p:cNvSpPr>
+            <a:spLocks noGrp="1"/>
+          </p:cNvSpPr>
+          <p:nvPr>
+            <p:ph type="title"/>
+          </p:nvPr>
+        </p:nvSpPr>
+        <p:spPr/>
+        <p:txBody>
+          <a:bodyPr/>
+          <a:lstStyle/>
+          <a:p>
+            <a:r>
+              <a:rPr lang="en-US" dirty="0"/>
+              <a:t>RELIABILITY PROBLEM - SOLUTION</a:t>
+            </a:r>
+          </a:p>
+        </p:txBody>
+      </p:sp>
+      <p:sp>
+        <p:nvSpPr>
+          <p:cNvPr id="3" name="Content Placeholder 2">
+            <a:extLst>
+              <a:ext uri="{FF2B5EF4-FFF2-40B4-BE49-F238E27FC236}">
+                <a16:creationId xmlns:a16="http://schemas.microsoft.com/office/drawing/2014/main" id="{986C3049-3CFB-C0C6-6DEA-D54AF5767D8C}"/>
+              </a:ext>
+            </a:extLst>
+          </p:cNvPr>
+          <p:cNvSpPr>
+            <a:spLocks noGrp="1"/>
+          </p:cNvSpPr>
+          <p:nvPr>
+            <p:ph idx="1"/>
+          </p:nvPr>
+        </p:nvSpPr>
+        <p:spPr>
+          <a:xfrm>
+            <a:off x="838200" y="1576301"/>
+            <a:ext cx="10515600" cy="4916574"/>
+          </a:xfrm>
+        </p:spPr>
+        <p:txBody>
+          <a:bodyPr>
+            <a:normAutofit/>
+          </a:bodyPr>
+          <a:lstStyle/>
+          <a:p>
+            <a:pPr>
+              <a:buFont typeface="Arial" panose="020B0604020202020204" pitchFamily="34" charset="0"/>
+              <a:buChar char="•"/>
+            </a:pPr>
+            <a:r>
+              <a:rPr lang="en-IN" sz="1600" dirty="0"/>
+              <a:t>The solution introduces </a:t>
+            </a:r>
+            <a:r>
+              <a:rPr lang="en-IN" sz="1600" b="1" dirty="0"/>
+              <a:t>fault-tolerance mechanisms</a:t>
+            </a:r>
+            <a:r>
+              <a:rPr lang="en-IN" sz="1600" dirty="0"/>
+              <a:t> at the Integration Adapter level. All communication with external systems is guarded by :</a:t>
+            </a:r>
+          </a:p>
+          <a:p>
+            <a:pPr marL="742950" lvl="1" indent="-285750">
+              <a:buFont typeface="Arial" panose="020B0604020202020204" pitchFamily="34" charset="0"/>
+              <a:buChar char="•"/>
+            </a:pPr>
+            <a:r>
+              <a:rPr lang="en-IN" sz="1600" dirty="0"/>
+              <a:t>timeouts</a:t>
+            </a:r>
+          </a:p>
+          <a:p>
+            <a:pPr marL="742950" lvl="1" indent="-285750">
+              <a:buFont typeface="Arial" panose="020B0604020202020204" pitchFamily="34" charset="0"/>
+              <a:buChar char="•"/>
+            </a:pPr>
+            <a:r>
+              <a:rPr lang="en-IN" sz="1600" dirty="0"/>
+              <a:t>retries with backoff</a:t>
+            </a:r>
+          </a:p>
+          <a:p>
+            <a:pPr marL="742950" lvl="1" indent="-285750">
+              <a:buFont typeface="Arial" panose="020B0604020202020204" pitchFamily="34" charset="0"/>
+              <a:buChar char="•"/>
+            </a:pPr>
+            <a:r>
+              <a:rPr lang="en-IN" sz="1600" dirty="0"/>
+              <a:t>circuit breakers</a:t>
+            </a:r>
+          </a:p>
+          <a:p>
+            <a:pPr>
+              <a:buFontTx/>
+              <a:buChar char="-"/>
+            </a:pPr>
+            <a:r>
+              <a:rPr lang="en-IN" sz="1600" dirty="0"/>
+              <a:t>If an external system is unavailable, the Integration Adapter either:</a:t>
+            </a:r>
+          </a:p>
+          <a:p>
+            <a:pPr>
+              <a:buFontTx/>
+              <a:buChar char="-"/>
+            </a:pPr>
+            <a:r>
+              <a:rPr lang="en-IN" sz="1600" dirty="0"/>
+              <a:t>returns cached or last-known-valid data where possible or fails fast and allows the calling business component to continue in a degraded but controlled mode.</a:t>
+            </a:r>
+          </a:p>
+          <a:p>
+            <a:pPr>
+              <a:buFontTx/>
+              <a:buChar char="-"/>
+            </a:pPr>
+            <a:r>
+              <a:rPr lang="en-IN" sz="1600" dirty="0"/>
+              <a:t>This prevents cascading failures, ensures that EXA remains operational for core use cases, and significantly improves system reliability even when external dependencies are unstable.</a:t>
+            </a:r>
+          </a:p>
+          <a:p>
+            <a:pPr marL="0" indent="0">
+              <a:buNone/>
+            </a:pPr>
+            <a:r>
+              <a:rPr lang="en-IN" sz="1600" b="1" u="sng" dirty="0"/>
+              <a:t>Result : </a:t>
+            </a:r>
+          </a:p>
+          <a:p>
+            <a:pPr>
+              <a:buFont typeface="Arial" panose="020B0604020202020204" pitchFamily="34" charset="0"/>
+              <a:buChar char="•"/>
+            </a:pPr>
+            <a:r>
+              <a:rPr lang="en-IN" sz="1600" dirty="0"/>
+              <a:t>External system outages are </a:t>
+            </a:r>
+            <a:r>
+              <a:rPr lang="en-IN" sz="1600" b="1" dirty="0"/>
+              <a:t>isolated</a:t>
+            </a:r>
+            <a:r>
+              <a:rPr lang="en-IN" sz="1600" dirty="0"/>
+              <a:t> from the rest of EXA.</a:t>
+            </a:r>
+          </a:p>
+          <a:p>
+            <a:pPr>
+              <a:buFont typeface="Arial" panose="020B0604020202020204" pitchFamily="34" charset="0"/>
+              <a:buChar char="•"/>
+            </a:pPr>
+            <a:r>
+              <a:rPr lang="en-IN" sz="1600" dirty="0"/>
+              <a:t>Core functionality continues to operate in a </a:t>
+            </a:r>
+            <a:r>
+              <a:rPr lang="en-IN" sz="1600" b="1" dirty="0"/>
+              <a:t>controlled or degraded mode</a:t>
+            </a:r>
+            <a:r>
+              <a:rPr lang="en-IN" sz="1600" dirty="0"/>
+              <a:t>.</a:t>
+            </a:r>
+          </a:p>
+          <a:p>
+            <a:pPr>
+              <a:buFont typeface="Arial" panose="020B0604020202020204" pitchFamily="34" charset="0"/>
+              <a:buChar char="•"/>
+            </a:pPr>
+            <a:r>
+              <a:rPr lang="en-IN" sz="1600" dirty="0"/>
+              <a:t>The system remains reliable even when external dependencies are unstable.</a:t>
+            </a:r>
+          </a:p>
+          <a:p>
+            <a:endParaRPr lang="en-US" sz="1600" dirty="0"/>
+          </a:p>
+        </p:txBody>
+      </p:sp>
+    </p:spTree>
+    <p:extLst>
+      <p:ext uri="{BB962C8B-B14F-4D97-AF65-F5344CB8AC3E}">
+        <p14:creationId xmlns:p14="http://schemas.microsoft.com/office/powerpoint/2010/main" val="2424220181"/>
+      </p:ext>
+    </p:extLst>
+  </p:cSld>
+  <p:clrMapOvr>
+    <a:masterClrMapping/>
+  </p:clrMapOvr>
+</p:sld>
+</file>
+
+<file path=ppt/slides/slide16.xml><?xml version="1.0" encoding="utf-8"?>
+<p:sld xmlns:a="http://schemas.openxmlformats.org/drawingml/2006/main" xmlns:r="http://schemas.openxmlformats.org/officeDocument/2006/relationships" xmlns:p="http://schemas.openxmlformats.org/presentationml/2006/main">
+  <p:cSld>
+    <p:spTree>
+      <p:nvGrpSpPr>
+        <p:cNvPr id="1" name="">
+          <a:extLst>
+            <a:ext uri="{FF2B5EF4-FFF2-40B4-BE49-F238E27FC236}">
+              <a16:creationId xmlns:a16="http://schemas.microsoft.com/office/drawing/2014/main" id="{BED39D40-5BA7-2569-F1BD-6849E1830767}"/>
+            </a:ext>
+          </a:extLst>
+        </p:cNvPr>
+        <p:cNvGrpSpPr/>
+        <p:nvPr/>
+      </p:nvGrpSpPr>
+      <p:grpSpPr>
+        <a:xfrm>
+          <a:off x="0" y="0"/>
+          <a:ext cx="0" cy="0"/>
+          <a:chOff x="0" y="0"/>
+          <a:chExt cx="0" cy="0"/>
+        </a:xfrm>
+      </p:grpSpPr>
+      <p:sp>
+        <p:nvSpPr>
+          <p:cNvPr id="2" name="Title 1">
+            <a:extLst>
+              <a:ext uri="{FF2B5EF4-FFF2-40B4-BE49-F238E27FC236}">
+                <a16:creationId xmlns:a16="http://schemas.microsoft.com/office/drawing/2014/main" id="{4DB2F9C2-E074-AF8A-1377-DA20DFE3BF74}"/>
+              </a:ext>
+            </a:extLst>
+          </p:cNvPr>
+          <p:cNvSpPr>
+            <a:spLocks noGrp="1"/>
+          </p:cNvSpPr>
+          <p:nvPr>
+            <p:ph type="title"/>
+          </p:nvPr>
+        </p:nvSpPr>
+        <p:spPr/>
+        <p:txBody>
+          <a:bodyPr/>
+          <a:lstStyle/>
+          <a:p>
+            <a:r>
+              <a:rPr lang="en-US" dirty="0"/>
+              <a:t>SCALABILITY PROBLEM</a:t>
+            </a:r>
+          </a:p>
+        </p:txBody>
+      </p:sp>
+      <p:sp>
+        <p:nvSpPr>
+          <p:cNvPr id="3" name="Content Placeholder 2">
+            <a:extLst>
+              <a:ext uri="{FF2B5EF4-FFF2-40B4-BE49-F238E27FC236}">
+                <a16:creationId xmlns:a16="http://schemas.microsoft.com/office/drawing/2014/main" id="{507A19C4-06C0-422C-043A-49388C722F15}"/>
+              </a:ext>
+            </a:extLst>
+          </p:cNvPr>
+          <p:cNvSpPr>
+            <a:spLocks noGrp="1"/>
+          </p:cNvSpPr>
+          <p:nvPr>
+            <p:ph idx="1"/>
+          </p:nvPr>
+        </p:nvSpPr>
+        <p:spPr>
+          <a:xfrm>
+            <a:off x="838200" y="1576301"/>
+            <a:ext cx="5822092" cy="4916574"/>
+          </a:xfrm>
+        </p:spPr>
+        <p:txBody>
+          <a:bodyPr>
+            <a:normAutofit/>
+          </a:bodyPr>
+          <a:lstStyle/>
+          <a:p>
+            <a:pPr marL="0" indent="0">
+              <a:buNone/>
+            </a:pPr>
+            <a:r>
+              <a:rPr lang="en-IN" sz="1400" dirty="0"/>
+              <a:t>At predictable times such as the beginning of the semester or during exam registration openings, </a:t>
+            </a:r>
+            <a:r>
+              <a:rPr lang="en-IN" sz="1400" b="1" dirty="0"/>
+              <a:t>hundreds or thousands of students</a:t>
+            </a:r>
+            <a:r>
+              <a:rPr lang="en-IN" sz="1400" dirty="0"/>
+              <a:t> may simultaneously attempt to register for exam terms or view schedules.</a:t>
+            </a:r>
+            <a:br>
+              <a:rPr lang="en-IN" sz="1400" dirty="0"/>
+            </a:br>
+            <a:r>
+              <a:rPr lang="en-IN" sz="1400" dirty="0"/>
+              <a:t>This leads to sudden spikes in load on the Backend API, particularly on registration-related components and database access.</a:t>
+            </a:r>
+          </a:p>
+          <a:p>
+            <a:r>
+              <a:rPr lang="en-IN" sz="1400" b="1" dirty="0"/>
+              <a:t>Involved Users:</a:t>
+            </a:r>
+            <a:br>
+              <a:rPr lang="en-IN" sz="1400" dirty="0"/>
+            </a:br>
+            <a:r>
+              <a:rPr lang="en-IN" sz="1400" dirty="0"/>
+              <a:t>Student</a:t>
+            </a:r>
+          </a:p>
+          <a:p>
+            <a:r>
+              <a:rPr lang="en-IN" sz="1400" b="1" dirty="0"/>
+              <a:t>Affected System Parts:</a:t>
+            </a:r>
+            <a:br>
+              <a:rPr lang="en-IN" sz="1400" dirty="0"/>
+            </a:br>
+            <a:r>
+              <a:rPr lang="en-IN" sz="1400" b="1" i="1" u="sng" dirty="0"/>
+              <a:t>1. In Backend API:</a:t>
+            </a:r>
+          </a:p>
+          <a:p>
+            <a:pPr>
+              <a:buFont typeface="Arial" panose="020B0604020202020204" pitchFamily="34" charset="0"/>
+              <a:buChar char="•"/>
+            </a:pPr>
+            <a:r>
+              <a:rPr lang="en-IN" sz="1400" dirty="0"/>
+              <a:t>Registration Management</a:t>
+            </a:r>
+          </a:p>
+          <a:p>
+            <a:pPr>
+              <a:buFont typeface="Arial" panose="020B0604020202020204" pitchFamily="34" charset="0"/>
+              <a:buChar char="•"/>
+            </a:pPr>
+            <a:r>
+              <a:rPr lang="en-IN" sz="1400" dirty="0"/>
+              <a:t>Persistence Adapter</a:t>
+            </a:r>
+          </a:p>
+          <a:p>
+            <a:pPr>
+              <a:buFont typeface="Arial" panose="020B0604020202020204" pitchFamily="34" charset="0"/>
+              <a:buChar char="•"/>
+            </a:pPr>
+            <a:r>
+              <a:rPr lang="en-IN" sz="1400" dirty="0"/>
+              <a:t>Database</a:t>
+            </a:r>
+          </a:p>
+          <a:p>
+            <a:pPr marL="0" indent="0">
+              <a:buNone/>
+            </a:pPr>
+            <a:r>
+              <a:rPr lang="en-IN" sz="1400" dirty="0"/>
+              <a:t>        </a:t>
+            </a:r>
+            <a:r>
+              <a:rPr lang="en-IN" sz="1400" b="1" i="1" u="sng" dirty="0"/>
+              <a:t>2 .In Infrastructure:</a:t>
+            </a:r>
+          </a:p>
+          <a:p>
+            <a:pPr>
+              <a:buFont typeface="Arial" panose="020B0604020202020204" pitchFamily="34" charset="0"/>
+              <a:buChar char="•"/>
+            </a:pPr>
+            <a:r>
+              <a:rPr lang="en-IN" sz="1400" dirty="0"/>
+              <a:t>Backend API container</a:t>
+            </a:r>
+          </a:p>
+          <a:p>
+            <a:r>
+              <a:rPr lang="en-IN" sz="1400" dirty="0"/>
+              <a:t>The current architecture risks performance degradation or request failures under high concurrent load if backend components cannot scale quickly enough.</a:t>
+            </a:r>
+          </a:p>
+        </p:txBody>
+      </p:sp>
+    </p:spTree>
+    <p:extLst>
+      <p:ext uri="{BB962C8B-B14F-4D97-AF65-F5344CB8AC3E}">
+        <p14:creationId xmlns:p14="http://schemas.microsoft.com/office/powerpoint/2010/main" val="4207599846"/>
+      </p:ext>
+    </p:extLst>
+  </p:cSld>
+  <p:clrMapOvr>
+    <a:masterClrMapping/>
+  </p:clrMapOvr>
+</p:sld>
+</file>
+
+<file path=ppt/slides/slide17.xml><?xml version="1.0" encoding="utf-8"?>
+<p:sld xmlns:a="http://schemas.openxmlformats.org/drawingml/2006/main" xmlns:r="http://schemas.openxmlformats.org/officeDocument/2006/relationships" xmlns:p="http://schemas.openxmlformats.org/presentationml/2006/main">
+  <p:cSld>
+    <p:spTree>
+      <p:nvGrpSpPr>
+        <p:cNvPr id="1" name="">
+          <a:extLst>
+            <a:ext uri="{FF2B5EF4-FFF2-40B4-BE49-F238E27FC236}">
+              <a16:creationId xmlns:a16="http://schemas.microsoft.com/office/drawing/2014/main" id="{34589FD4-F64C-5040-48BE-90CE4AED2200}"/>
+            </a:ext>
+          </a:extLst>
+        </p:cNvPr>
+        <p:cNvGrpSpPr/>
+        <p:nvPr/>
+      </p:nvGrpSpPr>
+      <p:grpSpPr>
+        <a:xfrm>
+          <a:off x="0" y="0"/>
+          <a:ext cx="0" cy="0"/>
+          <a:chOff x="0" y="0"/>
+          <a:chExt cx="0" cy="0"/>
+        </a:xfrm>
+      </p:grpSpPr>
+      <p:sp>
+        <p:nvSpPr>
+          <p:cNvPr id="2" name="Title 1">
+            <a:extLst>
+              <a:ext uri="{FF2B5EF4-FFF2-40B4-BE49-F238E27FC236}">
+                <a16:creationId xmlns:a16="http://schemas.microsoft.com/office/drawing/2014/main" id="{9B3E253C-2669-E61B-5E0B-3E768F7A81C7}"/>
+              </a:ext>
+            </a:extLst>
+          </p:cNvPr>
+          <p:cNvSpPr>
+            <a:spLocks noGrp="1"/>
+          </p:cNvSpPr>
+          <p:nvPr>
+            <p:ph type="title"/>
+          </p:nvPr>
+        </p:nvSpPr>
+        <p:spPr/>
+        <p:txBody>
+          <a:bodyPr/>
+          <a:lstStyle/>
+          <a:p>
+            <a:r>
+              <a:rPr lang="en-US" dirty="0"/>
+              <a:t>SCALABILITY PROBLEM - SOLUTION</a:t>
+            </a:r>
+          </a:p>
+        </p:txBody>
+      </p:sp>
+      <p:sp>
+        <p:nvSpPr>
+          <p:cNvPr id="3" name="Content Placeholder 2">
+            <a:extLst>
+              <a:ext uri="{FF2B5EF4-FFF2-40B4-BE49-F238E27FC236}">
+                <a16:creationId xmlns:a16="http://schemas.microsoft.com/office/drawing/2014/main" id="{54DA6D41-842D-DABC-4394-97E36FBBDAC3}"/>
+              </a:ext>
+            </a:extLst>
+          </p:cNvPr>
+          <p:cNvSpPr>
+            <a:spLocks noGrp="1"/>
+          </p:cNvSpPr>
+          <p:nvPr>
+            <p:ph idx="1"/>
+          </p:nvPr>
+        </p:nvSpPr>
+        <p:spPr>
+          <a:xfrm>
+            <a:off x="838200" y="1576301"/>
+            <a:ext cx="6711778" cy="4916574"/>
+          </a:xfrm>
+        </p:spPr>
+        <p:txBody>
+          <a:bodyPr>
+            <a:noAutofit/>
+          </a:bodyPr>
+          <a:lstStyle/>
+          <a:p>
+            <a:r>
+              <a:rPr lang="en-IN" sz="1400" dirty="0"/>
+              <a:t>The solution leverages </a:t>
+            </a:r>
+            <a:r>
+              <a:rPr lang="en-IN" sz="1400" b="1" dirty="0"/>
+              <a:t>horizontal scalability</a:t>
+            </a:r>
+            <a:r>
+              <a:rPr lang="en-IN" sz="1400" dirty="0"/>
+              <a:t> of the Backend API container.</a:t>
+            </a:r>
+            <a:br>
+              <a:rPr lang="en-IN" sz="1400" dirty="0"/>
+            </a:br>
+            <a:r>
+              <a:rPr lang="en-IN" sz="1400" dirty="0"/>
+              <a:t>The Registration Management component is designed to be stateless, allowing multiple instances to be deployed behind a load balancer.</a:t>
+            </a:r>
+          </a:p>
+          <a:p>
+            <a:r>
+              <a:rPr lang="en-IN" sz="1400" dirty="0"/>
+              <a:t>Database access is optimized through connection pooling and efficient transaction handling, while predictable peak periods are handled by </a:t>
+            </a:r>
+            <a:r>
+              <a:rPr lang="en-IN" sz="1400" b="1" dirty="0"/>
+              <a:t>pre-scaling</a:t>
+            </a:r>
+            <a:r>
+              <a:rPr lang="en-IN" sz="1400" dirty="0"/>
+              <a:t> backend instances ahead of time.</a:t>
+            </a:r>
+          </a:p>
+          <a:p>
+            <a:pPr marL="0" indent="0">
+              <a:buNone/>
+            </a:pPr>
+            <a:endParaRPr lang="en-IN" sz="1400" dirty="0"/>
+          </a:p>
+          <a:p>
+            <a:pPr marL="0" indent="0">
+              <a:buNone/>
+            </a:pPr>
+            <a:r>
+              <a:rPr lang="en-IN" sz="1400" dirty="0"/>
+              <a:t>Design backend components (especially </a:t>
+            </a:r>
+            <a:r>
+              <a:rPr lang="en-IN" sz="1400" b="1" dirty="0"/>
+              <a:t>Registration Management</a:t>
+            </a:r>
+            <a:r>
+              <a:rPr lang="en-IN" sz="1400" dirty="0"/>
+              <a:t>) to be </a:t>
+            </a:r>
+            <a:r>
+              <a:rPr lang="en-IN" sz="1400" b="1" dirty="0"/>
+              <a:t>stateless</a:t>
+            </a:r>
+            <a:r>
+              <a:rPr lang="en-IN" sz="1400" dirty="0"/>
+              <a:t>.</a:t>
+            </a:r>
+          </a:p>
+          <a:p>
+            <a:pPr>
+              <a:buFont typeface="Arial" panose="020B0604020202020204" pitchFamily="34" charset="0"/>
+              <a:buChar char="•"/>
+            </a:pPr>
+            <a:r>
+              <a:rPr lang="en-IN" sz="1400" dirty="0"/>
+              <a:t>Deploy the </a:t>
+            </a:r>
+            <a:r>
+              <a:rPr lang="en-IN" sz="1400" b="1" dirty="0"/>
+              <a:t>Backend API</a:t>
+            </a:r>
+            <a:r>
+              <a:rPr lang="en-IN" sz="1400" dirty="0"/>
+              <a:t> as multiple instances behind a load balancer.</a:t>
+            </a:r>
+          </a:p>
+          <a:p>
+            <a:pPr>
+              <a:buFont typeface="Arial" panose="020B0604020202020204" pitchFamily="34" charset="0"/>
+              <a:buChar char="•"/>
+            </a:pPr>
+            <a:r>
+              <a:rPr lang="en-IN" sz="1400" dirty="0"/>
+              <a:t>Use:</a:t>
+            </a:r>
+          </a:p>
+          <a:p>
+            <a:pPr marL="742950" lvl="1" indent="-285750">
+              <a:buFont typeface="Arial" panose="020B0604020202020204" pitchFamily="34" charset="0"/>
+              <a:buChar char="•"/>
+            </a:pPr>
+            <a:r>
+              <a:rPr lang="en-IN" sz="1400" dirty="0"/>
+              <a:t>horizontal scaling</a:t>
+            </a:r>
+          </a:p>
+          <a:p>
+            <a:pPr marL="742950" lvl="1" indent="-285750">
+              <a:buFont typeface="Arial" panose="020B0604020202020204" pitchFamily="34" charset="0"/>
+              <a:buChar char="•"/>
+            </a:pPr>
+            <a:r>
+              <a:rPr lang="en-IN" sz="1400" dirty="0"/>
+              <a:t>connection pooling</a:t>
+            </a:r>
+          </a:p>
+          <a:p>
+            <a:pPr marL="742950" lvl="1" indent="-285750">
+              <a:buFont typeface="Arial" panose="020B0604020202020204" pitchFamily="34" charset="0"/>
+              <a:buChar char="•"/>
+            </a:pPr>
+            <a:r>
+              <a:rPr lang="en-IN" sz="1400" dirty="0"/>
+              <a:t>pre-scaling during known peak periods</a:t>
+            </a:r>
+          </a:p>
+          <a:p>
+            <a:r>
+              <a:rPr lang="en-IN" sz="1400" b="1" dirty="0"/>
+              <a:t>Result</a:t>
+            </a:r>
+          </a:p>
+          <a:p>
+            <a:pPr>
+              <a:buFont typeface="Arial" panose="020B0604020202020204" pitchFamily="34" charset="0"/>
+              <a:buChar char="•"/>
+            </a:pPr>
+            <a:r>
+              <a:rPr lang="en-IN" sz="1400" dirty="0"/>
+              <a:t>The system can handle </a:t>
+            </a:r>
+            <a:r>
+              <a:rPr lang="en-IN" sz="1400" b="1" dirty="0"/>
+              <a:t>large bursts of concurrent requests</a:t>
+            </a:r>
+            <a:r>
+              <a:rPr lang="en-IN" sz="1400" dirty="0"/>
+              <a:t>.</a:t>
+            </a:r>
+          </a:p>
+          <a:p>
+            <a:pPr>
+              <a:buFont typeface="Arial" panose="020B0604020202020204" pitchFamily="34" charset="0"/>
+              <a:buChar char="•"/>
+            </a:pPr>
+            <a:r>
+              <a:rPr lang="en-IN" sz="1400" dirty="0"/>
+              <a:t>Performance remains stable during peak usage.</a:t>
+            </a:r>
+          </a:p>
+          <a:p>
+            <a:pPr>
+              <a:buFont typeface="Arial" panose="020B0604020202020204" pitchFamily="34" charset="0"/>
+              <a:buChar char="•"/>
+            </a:pPr>
+            <a:r>
+              <a:rPr lang="en-IN" sz="1400" dirty="0"/>
+              <a:t>Scalability requirements are met without architectural complexity.</a:t>
+            </a:r>
+          </a:p>
+          <a:p>
+            <a:endParaRPr lang="en-IN" sz="1400" dirty="0"/>
+          </a:p>
+        </p:txBody>
+      </p:sp>
+    </p:spTree>
+    <p:extLst>
+      <p:ext uri="{BB962C8B-B14F-4D97-AF65-F5344CB8AC3E}">
+        <p14:creationId xmlns:p14="http://schemas.microsoft.com/office/powerpoint/2010/main" val="3582287329"/>
+      </p:ext>
+    </p:extLst>
+  </p:cSld>
+  <p:clrMapOvr>
+    <a:masterClrMapping/>
+  </p:clrMapOvr>
+</p:sld>
+</file>
+
 <file path=ppt/slides/slide2.xml><?xml version="1.0" encoding="utf-8"?>
 <p:sld xmlns:a="http://schemas.openxmlformats.org/drawingml/2006/main" xmlns:r="http://schemas.openxmlformats.org/officeDocument/2006/relationships" xmlns:p="http://schemas.openxmlformats.org/presentationml/2006/main">
   <p:cSld>
@@ -4922,93 +6041,93 @@
           <a:custGeom>
             <a:avLst/>
             <a:gdLst>
-              <a:gd name="csX0" fmla="*/ 0 w 4243589"/>
-              <a:gd name="csY0" fmla="*/ 0 h 18288"/>
-              <a:gd name="csX1" fmla="*/ 478919 w 4243589"/>
-              <a:gd name="csY1" fmla="*/ 0 h 18288"/>
-              <a:gd name="csX2" fmla="*/ 957839 w 4243589"/>
-              <a:gd name="csY2" fmla="*/ 0 h 18288"/>
-              <a:gd name="csX3" fmla="*/ 1521630 w 4243589"/>
-              <a:gd name="csY3" fmla="*/ 0 h 18288"/>
-              <a:gd name="csX4" fmla="*/ 2212729 w 4243589"/>
-              <a:gd name="csY4" fmla="*/ 0 h 18288"/>
-              <a:gd name="csX5" fmla="*/ 2734084 w 4243589"/>
-              <a:gd name="csY5" fmla="*/ 0 h 18288"/>
-              <a:gd name="csX6" fmla="*/ 3255439 w 4243589"/>
-              <a:gd name="csY6" fmla="*/ 0 h 18288"/>
-              <a:gd name="csX7" fmla="*/ 4243589 w 4243589"/>
-              <a:gd name="csY7" fmla="*/ 0 h 18288"/>
-              <a:gd name="csX8" fmla="*/ 4243589 w 4243589"/>
-              <a:gd name="csY8" fmla="*/ 18288 h 18288"/>
-              <a:gd name="csX9" fmla="*/ 3594926 w 4243589"/>
-              <a:gd name="csY9" fmla="*/ 18288 h 18288"/>
-              <a:gd name="csX10" fmla="*/ 3073571 w 4243589"/>
-              <a:gd name="csY10" fmla="*/ 18288 h 18288"/>
-              <a:gd name="csX11" fmla="*/ 2552216 w 4243589"/>
-              <a:gd name="csY11" fmla="*/ 18288 h 18288"/>
-              <a:gd name="csX12" fmla="*/ 1903553 w 4243589"/>
-              <a:gd name="csY12" fmla="*/ 18288 h 18288"/>
-              <a:gd name="csX13" fmla="*/ 1212454 w 4243589"/>
-              <a:gd name="csY13" fmla="*/ 18288 h 18288"/>
-              <a:gd name="csX14" fmla="*/ 733535 w 4243589"/>
-              <a:gd name="csY14" fmla="*/ 18288 h 18288"/>
-              <a:gd name="csX15" fmla="*/ 0 w 4243589"/>
-              <a:gd name="csY15" fmla="*/ 18288 h 18288"/>
-              <a:gd name="csX16" fmla="*/ 0 w 4243589"/>
-              <a:gd name="csY16" fmla="*/ 0 h 18288"/>
+              <a:gd name="connsiteX0" fmla="*/ 0 w 4243589"/>
+              <a:gd name="connsiteY0" fmla="*/ 0 h 18288"/>
+              <a:gd name="connsiteX1" fmla="*/ 478919 w 4243589"/>
+              <a:gd name="connsiteY1" fmla="*/ 0 h 18288"/>
+              <a:gd name="connsiteX2" fmla="*/ 957839 w 4243589"/>
+              <a:gd name="connsiteY2" fmla="*/ 0 h 18288"/>
+              <a:gd name="connsiteX3" fmla="*/ 1521630 w 4243589"/>
+              <a:gd name="connsiteY3" fmla="*/ 0 h 18288"/>
+              <a:gd name="connsiteX4" fmla="*/ 2212729 w 4243589"/>
+              <a:gd name="connsiteY4" fmla="*/ 0 h 18288"/>
+              <a:gd name="connsiteX5" fmla="*/ 2734084 w 4243589"/>
+              <a:gd name="connsiteY5" fmla="*/ 0 h 18288"/>
+              <a:gd name="connsiteX6" fmla="*/ 3255439 w 4243589"/>
+              <a:gd name="connsiteY6" fmla="*/ 0 h 18288"/>
+              <a:gd name="connsiteX7" fmla="*/ 4243589 w 4243589"/>
+              <a:gd name="connsiteY7" fmla="*/ 0 h 18288"/>
+              <a:gd name="connsiteX8" fmla="*/ 4243589 w 4243589"/>
+              <a:gd name="connsiteY8" fmla="*/ 18288 h 18288"/>
+              <a:gd name="connsiteX9" fmla="*/ 3594926 w 4243589"/>
+              <a:gd name="connsiteY9" fmla="*/ 18288 h 18288"/>
+              <a:gd name="connsiteX10" fmla="*/ 3073571 w 4243589"/>
+              <a:gd name="connsiteY10" fmla="*/ 18288 h 18288"/>
+              <a:gd name="connsiteX11" fmla="*/ 2552216 w 4243589"/>
+              <a:gd name="connsiteY11" fmla="*/ 18288 h 18288"/>
+              <a:gd name="connsiteX12" fmla="*/ 1903553 w 4243589"/>
+              <a:gd name="connsiteY12" fmla="*/ 18288 h 18288"/>
+              <a:gd name="connsiteX13" fmla="*/ 1212454 w 4243589"/>
+              <a:gd name="connsiteY13" fmla="*/ 18288 h 18288"/>
+              <a:gd name="connsiteX14" fmla="*/ 733535 w 4243589"/>
+              <a:gd name="connsiteY14" fmla="*/ 18288 h 18288"/>
+              <a:gd name="connsiteX15" fmla="*/ 0 w 4243589"/>
+              <a:gd name="connsiteY15" fmla="*/ 18288 h 18288"/>
+              <a:gd name="connsiteX16" fmla="*/ 0 w 4243589"/>
+              <a:gd name="connsiteY16" fmla="*/ 0 h 18288"/>
             </a:gdLst>
             <a:ahLst/>
             <a:cxnLst>
               <a:cxn ang="0">
-                <a:pos x="csX0" y="csY0"/>
+                <a:pos x="connsiteX0" y="connsiteY0"/>
               </a:cxn>
               <a:cxn ang="0">
-                <a:pos x="csX1" y="csY1"/>
+                <a:pos x="connsiteX1" y="connsiteY1"/>
               </a:cxn>
               <a:cxn ang="0">
-                <a:pos x="csX2" y="csY2"/>
+                <a:pos x="connsiteX2" y="connsiteY2"/>
               </a:cxn>
               <a:cxn ang="0">
-                <a:pos x="csX3" y="csY3"/>
+                <a:pos x="connsiteX3" y="connsiteY3"/>
               </a:cxn>
               <a:cxn ang="0">
-                <a:pos x="csX4" y="csY4"/>
+                <a:pos x="connsiteX4" y="connsiteY4"/>
               </a:cxn>
               <a:cxn ang="0">
-                <a:pos x="csX5" y="csY5"/>
+                <a:pos x="connsiteX5" y="connsiteY5"/>
               </a:cxn>
               <a:cxn ang="0">
-                <a:pos x="csX6" y="csY6"/>
+                <a:pos x="connsiteX6" y="connsiteY6"/>
               </a:cxn>
               <a:cxn ang="0">
-                <a:pos x="csX7" y="csY7"/>
+                <a:pos x="connsiteX7" y="connsiteY7"/>
               </a:cxn>
               <a:cxn ang="0">
-                <a:pos x="csX8" y="csY8"/>
+                <a:pos x="connsiteX8" y="connsiteY8"/>
               </a:cxn>
               <a:cxn ang="0">
-                <a:pos x="csX9" y="csY9"/>
+                <a:pos x="connsiteX9" y="connsiteY9"/>
               </a:cxn>
               <a:cxn ang="0">
-                <a:pos x="csX10" y="csY10"/>
+                <a:pos x="connsiteX10" y="connsiteY10"/>
               </a:cxn>
               <a:cxn ang="0">
-                <a:pos x="csX11" y="csY11"/>
+                <a:pos x="connsiteX11" y="connsiteY11"/>
               </a:cxn>
               <a:cxn ang="0">
-                <a:pos x="csX12" y="csY12"/>
+                <a:pos x="connsiteX12" y="connsiteY12"/>
               </a:cxn>
               <a:cxn ang="0">
-                <a:pos x="csX13" y="csY13"/>
+                <a:pos x="connsiteX13" y="connsiteY13"/>
               </a:cxn>
               <a:cxn ang="0">
-                <a:pos x="csX14" y="csY14"/>
+                <a:pos x="connsiteX14" y="connsiteY14"/>
               </a:cxn>
               <a:cxn ang="0">
-                <a:pos x="csX15" y="csY15"/>
+                <a:pos x="connsiteX15" y="connsiteY15"/>
               </a:cxn>
               <a:cxn ang="0">
-                <a:pos x="csX16" y="csY16"/>
+                <a:pos x="connsiteX16" y="connsiteY16"/>
               </a:cxn>
             </a:cxnLst>
             <a:rect l="l" t="t" r="r" b="b"/>
@@ -5572,68 +6691,68 @@
           <a:custGeom>
             <a:avLst/>
             <a:gdLst>
-              <a:gd name="csX0" fmla="*/ 0 w 3255095"/>
-              <a:gd name="csY0" fmla="*/ 0 h 18288"/>
-              <a:gd name="csX1" fmla="*/ 618468 w 3255095"/>
-              <a:gd name="csY1" fmla="*/ 0 h 18288"/>
-              <a:gd name="csX2" fmla="*/ 1269487 w 3255095"/>
-              <a:gd name="csY2" fmla="*/ 0 h 18288"/>
-              <a:gd name="csX3" fmla="*/ 1953057 w 3255095"/>
-              <a:gd name="csY3" fmla="*/ 0 h 18288"/>
-              <a:gd name="csX4" fmla="*/ 2636627 w 3255095"/>
-              <a:gd name="csY4" fmla="*/ 0 h 18288"/>
-              <a:gd name="csX5" fmla="*/ 3255095 w 3255095"/>
-              <a:gd name="csY5" fmla="*/ 0 h 18288"/>
-              <a:gd name="csX6" fmla="*/ 3255095 w 3255095"/>
-              <a:gd name="csY6" fmla="*/ 18288 h 18288"/>
-              <a:gd name="csX7" fmla="*/ 2538974 w 3255095"/>
-              <a:gd name="csY7" fmla="*/ 18288 h 18288"/>
-              <a:gd name="csX8" fmla="*/ 1822853 w 3255095"/>
-              <a:gd name="csY8" fmla="*/ 18288 h 18288"/>
-              <a:gd name="csX9" fmla="*/ 1171834 w 3255095"/>
-              <a:gd name="csY9" fmla="*/ 18288 h 18288"/>
-              <a:gd name="csX10" fmla="*/ 0 w 3255095"/>
-              <a:gd name="csY10" fmla="*/ 18288 h 18288"/>
-              <a:gd name="csX11" fmla="*/ 0 w 3255095"/>
-              <a:gd name="csY11" fmla="*/ 0 h 18288"/>
+              <a:gd name="connsiteX0" fmla="*/ 0 w 3255095"/>
+              <a:gd name="connsiteY0" fmla="*/ 0 h 18288"/>
+              <a:gd name="connsiteX1" fmla="*/ 618468 w 3255095"/>
+              <a:gd name="connsiteY1" fmla="*/ 0 h 18288"/>
+              <a:gd name="connsiteX2" fmla="*/ 1269487 w 3255095"/>
+              <a:gd name="connsiteY2" fmla="*/ 0 h 18288"/>
+              <a:gd name="connsiteX3" fmla="*/ 1953057 w 3255095"/>
+              <a:gd name="connsiteY3" fmla="*/ 0 h 18288"/>
+              <a:gd name="connsiteX4" fmla="*/ 2636627 w 3255095"/>
+              <a:gd name="connsiteY4" fmla="*/ 0 h 18288"/>
+              <a:gd name="connsiteX5" fmla="*/ 3255095 w 3255095"/>
+              <a:gd name="connsiteY5" fmla="*/ 0 h 18288"/>
+              <a:gd name="connsiteX6" fmla="*/ 3255095 w 3255095"/>
+              <a:gd name="connsiteY6" fmla="*/ 18288 h 18288"/>
+              <a:gd name="connsiteX7" fmla="*/ 2538974 w 3255095"/>
+              <a:gd name="connsiteY7" fmla="*/ 18288 h 18288"/>
+              <a:gd name="connsiteX8" fmla="*/ 1822853 w 3255095"/>
+              <a:gd name="connsiteY8" fmla="*/ 18288 h 18288"/>
+              <a:gd name="connsiteX9" fmla="*/ 1171834 w 3255095"/>
+              <a:gd name="connsiteY9" fmla="*/ 18288 h 18288"/>
+              <a:gd name="connsiteX10" fmla="*/ 0 w 3255095"/>
+              <a:gd name="connsiteY10" fmla="*/ 18288 h 18288"/>
+              <a:gd name="connsiteX11" fmla="*/ 0 w 3255095"/>
+              <a:gd name="connsiteY11" fmla="*/ 0 h 18288"/>
             </a:gdLst>
             <a:ahLst/>
             <a:cxnLst>
               <a:cxn ang="0">
-                <a:pos x="csX0" y="csY0"/>
+                <a:pos x="connsiteX0" y="connsiteY0"/>
               </a:cxn>
               <a:cxn ang="0">
-                <a:pos x="csX1" y="csY1"/>
+                <a:pos x="connsiteX1" y="connsiteY1"/>
               </a:cxn>
               <a:cxn ang="0">
-                <a:pos x="csX2" y="csY2"/>
+                <a:pos x="connsiteX2" y="connsiteY2"/>
               </a:cxn>
               <a:cxn ang="0">
-                <a:pos x="csX3" y="csY3"/>
+                <a:pos x="connsiteX3" y="connsiteY3"/>
               </a:cxn>
               <a:cxn ang="0">
-                <a:pos x="csX4" y="csY4"/>
+                <a:pos x="connsiteX4" y="connsiteY4"/>
               </a:cxn>
               <a:cxn ang="0">
-                <a:pos x="csX5" y="csY5"/>
+                <a:pos x="connsiteX5" y="connsiteY5"/>
               </a:cxn>
               <a:cxn ang="0">
-                <a:pos x="csX6" y="csY6"/>
+                <a:pos x="connsiteX6" y="connsiteY6"/>
               </a:cxn>
               <a:cxn ang="0">
-                <a:pos x="csX7" y="csY7"/>
+                <a:pos x="connsiteX7" y="connsiteY7"/>
               </a:cxn>
               <a:cxn ang="0">
-                <a:pos x="csX8" y="csY8"/>
+                <a:pos x="connsiteX8" y="connsiteY8"/>
               </a:cxn>
               <a:cxn ang="0">
-                <a:pos x="csX9" y="csY9"/>
+                <a:pos x="connsiteX9" y="connsiteY9"/>
               </a:cxn>
               <a:cxn ang="0">
-                <a:pos x="csX10" y="csY10"/>
+                <a:pos x="connsiteX10" y="connsiteY10"/>
               </a:cxn>
               <a:cxn ang="0">
-                <a:pos x="csX11" y="csY11"/>
+                <a:pos x="connsiteX11" y="connsiteY11"/>
               </a:cxn>
             </a:cxnLst>
             <a:rect l="l" t="t" r="r" b="b"/>
@@ -6065,68 +7184,68 @@
           <a:custGeom>
             <a:avLst/>
             <a:gdLst>
-              <a:gd name="csX0" fmla="*/ 0 w 3255095"/>
-              <a:gd name="csY0" fmla="*/ 0 h 18288"/>
-              <a:gd name="csX1" fmla="*/ 618468 w 3255095"/>
-              <a:gd name="csY1" fmla="*/ 0 h 18288"/>
-              <a:gd name="csX2" fmla="*/ 1269487 w 3255095"/>
-              <a:gd name="csY2" fmla="*/ 0 h 18288"/>
-              <a:gd name="csX3" fmla="*/ 1953057 w 3255095"/>
-              <a:gd name="csY3" fmla="*/ 0 h 18288"/>
-              <a:gd name="csX4" fmla="*/ 2636627 w 3255095"/>
-              <a:gd name="csY4" fmla="*/ 0 h 18288"/>
-              <a:gd name="csX5" fmla="*/ 3255095 w 3255095"/>
-              <a:gd name="csY5" fmla="*/ 0 h 18288"/>
-              <a:gd name="csX6" fmla="*/ 3255095 w 3255095"/>
-              <a:gd name="csY6" fmla="*/ 18288 h 18288"/>
-              <a:gd name="csX7" fmla="*/ 2538974 w 3255095"/>
-              <a:gd name="csY7" fmla="*/ 18288 h 18288"/>
-              <a:gd name="csX8" fmla="*/ 1822853 w 3255095"/>
-              <a:gd name="csY8" fmla="*/ 18288 h 18288"/>
-              <a:gd name="csX9" fmla="*/ 1171834 w 3255095"/>
-              <a:gd name="csY9" fmla="*/ 18288 h 18288"/>
-              <a:gd name="csX10" fmla="*/ 0 w 3255095"/>
-              <a:gd name="csY10" fmla="*/ 18288 h 18288"/>
-              <a:gd name="csX11" fmla="*/ 0 w 3255095"/>
-              <a:gd name="csY11" fmla="*/ 0 h 18288"/>
+              <a:gd name="connsiteX0" fmla="*/ 0 w 3255095"/>
+              <a:gd name="connsiteY0" fmla="*/ 0 h 18288"/>
+              <a:gd name="connsiteX1" fmla="*/ 618468 w 3255095"/>
+              <a:gd name="connsiteY1" fmla="*/ 0 h 18288"/>
+              <a:gd name="connsiteX2" fmla="*/ 1269487 w 3255095"/>
+              <a:gd name="connsiteY2" fmla="*/ 0 h 18288"/>
+              <a:gd name="connsiteX3" fmla="*/ 1953057 w 3255095"/>
+              <a:gd name="connsiteY3" fmla="*/ 0 h 18288"/>
+              <a:gd name="connsiteX4" fmla="*/ 2636627 w 3255095"/>
+              <a:gd name="connsiteY4" fmla="*/ 0 h 18288"/>
+              <a:gd name="connsiteX5" fmla="*/ 3255095 w 3255095"/>
+              <a:gd name="connsiteY5" fmla="*/ 0 h 18288"/>
+              <a:gd name="connsiteX6" fmla="*/ 3255095 w 3255095"/>
+              <a:gd name="connsiteY6" fmla="*/ 18288 h 18288"/>
+              <a:gd name="connsiteX7" fmla="*/ 2538974 w 3255095"/>
+              <a:gd name="connsiteY7" fmla="*/ 18288 h 18288"/>
+              <a:gd name="connsiteX8" fmla="*/ 1822853 w 3255095"/>
+              <a:gd name="connsiteY8" fmla="*/ 18288 h 18288"/>
+              <a:gd name="connsiteX9" fmla="*/ 1171834 w 3255095"/>
+              <a:gd name="connsiteY9" fmla="*/ 18288 h 18288"/>
+              <a:gd name="connsiteX10" fmla="*/ 0 w 3255095"/>
+              <a:gd name="connsiteY10" fmla="*/ 18288 h 18288"/>
+              <a:gd name="connsiteX11" fmla="*/ 0 w 3255095"/>
+              <a:gd name="connsiteY11" fmla="*/ 0 h 18288"/>
             </a:gdLst>
             <a:ahLst/>
             <a:cxnLst>
               <a:cxn ang="0">
-                <a:pos x="csX0" y="csY0"/>
+                <a:pos x="connsiteX0" y="connsiteY0"/>
               </a:cxn>
               <a:cxn ang="0">
-                <a:pos x="csX1" y="csY1"/>
+                <a:pos x="connsiteX1" y="connsiteY1"/>
               </a:cxn>
               <a:cxn ang="0">
-                <a:pos x="csX2" y="csY2"/>
+                <a:pos x="connsiteX2" y="connsiteY2"/>
               </a:cxn>
               <a:cxn ang="0">
-                <a:pos x="csX3" y="csY3"/>
+                <a:pos x="connsiteX3" y="connsiteY3"/>
               </a:cxn>
               <a:cxn ang="0">
-                <a:pos x="csX4" y="csY4"/>
+                <a:pos x="connsiteX4" y="connsiteY4"/>
               </a:cxn>
               <a:cxn ang="0">
-                <a:pos x="csX5" y="csY5"/>
+                <a:pos x="connsiteX5" y="connsiteY5"/>
               </a:cxn>
               <a:cxn ang="0">
-                <a:pos x="csX6" y="csY6"/>
+                <a:pos x="connsiteX6" y="connsiteY6"/>
               </a:cxn>
               <a:cxn ang="0">
-                <a:pos x="csX7" y="csY7"/>
+                <a:pos x="connsiteX7" y="connsiteY7"/>
               </a:cxn>
               <a:cxn ang="0">
-                <a:pos x="csX8" y="csY8"/>
+                <a:pos x="connsiteX8" y="connsiteY8"/>
               </a:cxn>
               <a:cxn ang="0">
-                <a:pos x="csX9" y="csY9"/>
+                <a:pos x="connsiteX9" y="connsiteY9"/>
               </a:cxn>
               <a:cxn ang="0">
-                <a:pos x="csX10" y="csY10"/>
+                <a:pos x="connsiteX10" y="connsiteY10"/>
               </a:cxn>
               <a:cxn ang="0">
-                <a:pos x="csX11" y="csY11"/>
+                <a:pos x="connsiteX11" y="connsiteY11"/>
               </a:cxn>
             </a:cxnLst>
             <a:rect l="l" t="t" r="r" b="b"/>
@@ -6559,68 +7678,68 @@
           <a:custGeom>
             <a:avLst/>
             <a:gdLst>
-              <a:gd name="csX0" fmla="*/ 0 w 3255095"/>
-              <a:gd name="csY0" fmla="*/ 0 h 18288"/>
-              <a:gd name="csX1" fmla="*/ 618468 w 3255095"/>
-              <a:gd name="csY1" fmla="*/ 0 h 18288"/>
-              <a:gd name="csX2" fmla="*/ 1269487 w 3255095"/>
-              <a:gd name="csY2" fmla="*/ 0 h 18288"/>
-              <a:gd name="csX3" fmla="*/ 1953057 w 3255095"/>
-              <a:gd name="csY3" fmla="*/ 0 h 18288"/>
-              <a:gd name="csX4" fmla="*/ 2636627 w 3255095"/>
-              <a:gd name="csY4" fmla="*/ 0 h 18288"/>
-              <a:gd name="csX5" fmla="*/ 3255095 w 3255095"/>
-              <a:gd name="csY5" fmla="*/ 0 h 18288"/>
-              <a:gd name="csX6" fmla="*/ 3255095 w 3255095"/>
-              <a:gd name="csY6" fmla="*/ 18288 h 18288"/>
-              <a:gd name="csX7" fmla="*/ 2538974 w 3255095"/>
-              <a:gd name="csY7" fmla="*/ 18288 h 18288"/>
-              <a:gd name="csX8" fmla="*/ 1822853 w 3255095"/>
-              <a:gd name="csY8" fmla="*/ 18288 h 18288"/>
-              <a:gd name="csX9" fmla="*/ 1171834 w 3255095"/>
-              <a:gd name="csY9" fmla="*/ 18288 h 18288"/>
-              <a:gd name="csX10" fmla="*/ 0 w 3255095"/>
-              <a:gd name="csY10" fmla="*/ 18288 h 18288"/>
-              <a:gd name="csX11" fmla="*/ 0 w 3255095"/>
-              <a:gd name="csY11" fmla="*/ 0 h 18288"/>
+              <a:gd name="connsiteX0" fmla="*/ 0 w 3255095"/>
+              <a:gd name="connsiteY0" fmla="*/ 0 h 18288"/>
+              <a:gd name="connsiteX1" fmla="*/ 618468 w 3255095"/>
+              <a:gd name="connsiteY1" fmla="*/ 0 h 18288"/>
+              <a:gd name="connsiteX2" fmla="*/ 1269487 w 3255095"/>
+              <a:gd name="connsiteY2" fmla="*/ 0 h 18288"/>
+              <a:gd name="connsiteX3" fmla="*/ 1953057 w 3255095"/>
+              <a:gd name="connsiteY3" fmla="*/ 0 h 18288"/>
+              <a:gd name="connsiteX4" fmla="*/ 2636627 w 3255095"/>
+              <a:gd name="connsiteY4" fmla="*/ 0 h 18288"/>
+              <a:gd name="connsiteX5" fmla="*/ 3255095 w 3255095"/>
+              <a:gd name="connsiteY5" fmla="*/ 0 h 18288"/>
+              <a:gd name="connsiteX6" fmla="*/ 3255095 w 3255095"/>
+              <a:gd name="connsiteY6" fmla="*/ 18288 h 18288"/>
+              <a:gd name="connsiteX7" fmla="*/ 2538974 w 3255095"/>
+              <a:gd name="connsiteY7" fmla="*/ 18288 h 18288"/>
+              <a:gd name="connsiteX8" fmla="*/ 1822853 w 3255095"/>
+              <a:gd name="connsiteY8" fmla="*/ 18288 h 18288"/>
+              <a:gd name="connsiteX9" fmla="*/ 1171834 w 3255095"/>
+              <a:gd name="connsiteY9" fmla="*/ 18288 h 18288"/>
+              <a:gd name="connsiteX10" fmla="*/ 0 w 3255095"/>
+              <a:gd name="connsiteY10" fmla="*/ 18288 h 18288"/>
+              <a:gd name="connsiteX11" fmla="*/ 0 w 3255095"/>
+              <a:gd name="connsiteY11" fmla="*/ 0 h 18288"/>
             </a:gdLst>
             <a:ahLst/>
             <a:cxnLst>
               <a:cxn ang="0">
-                <a:pos x="csX0" y="csY0"/>
+                <a:pos x="connsiteX0" y="connsiteY0"/>
               </a:cxn>
               <a:cxn ang="0">
-                <a:pos x="csX1" y="csY1"/>
+                <a:pos x="connsiteX1" y="connsiteY1"/>
               </a:cxn>
               <a:cxn ang="0">
-                <a:pos x="csX2" y="csY2"/>
+                <a:pos x="connsiteX2" y="connsiteY2"/>
               </a:cxn>
               <a:cxn ang="0">
-                <a:pos x="csX3" y="csY3"/>
+                <a:pos x="connsiteX3" y="connsiteY3"/>
               </a:cxn>
               <a:cxn ang="0">
-                <a:pos x="csX4" y="csY4"/>
+                <a:pos x="connsiteX4" y="connsiteY4"/>
               </a:cxn>
               <a:cxn ang="0">
-                <a:pos x="csX5" y="csY5"/>
+                <a:pos x="connsiteX5" y="connsiteY5"/>
               </a:cxn>
               <a:cxn ang="0">
-                <a:pos x="csX6" y="csY6"/>
+                <a:pos x="connsiteX6" y="connsiteY6"/>
               </a:cxn>
               <a:cxn ang="0">
-                <a:pos x="csX7" y="csY7"/>
+                <a:pos x="connsiteX7" y="connsiteY7"/>
               </a:cxn>
               <a:cxn ang="0">
-                <a:pos x="csX8" y="csY8"/>
+                <a:pos x="connsiteX8" y="connsiteY8"/>
               </a:cxn>
               <a:cxn ang="0">
-                <a:pos x="csX9" y="csY9"/>
+                <a:pos x="connsiteX9" y="connsiteY9"/>
               </a:cxn>
               <a:cxn ang="0">
-                <a:pos x="csX10" y="csY10"/>
+                <a:pos x="connsiteX10" y="connsiteY10"/>
               </a:cxn>
               <a:cxn ang="0">
-                <a:pos x="csX11" y="csY11"/>
+                <a:pos x="connsiteX11" y="connsiteY11"/>
               </a:cxn>
             </a:cxnLst>
             <a:rect l="l" t="t" r="r" b="b"/>
@@ -7310,68 +8429,68 @@
           <a:custGeom>
             <a:avLst/>
             <a:gdLst>
-              <a:gd name="csX0" fmla="*/ 0 w 3255095"/>
-              <a:gd name="csY0" fmla="*/ 0 h 18288"/>
-              <a:gd name="csX1" fmla="*/ 618468 w 3255095"/>
-              <a:gd name="csY1" fmla="*/ 0 h 18288"/>
-              <a:gd name="csX2" fmla="*/ 1269487 w 3255095"/>
-              <a:gd name="csY2" fmla="*/ 0 h 18288"/>
-              <a:gd name="csX3" fmla="*/ 1953057 w 3255095"/>
-              <a:gd name="csY3" fmla="*/ 0 h 18288"/>
-              <a:gd name="csX4" fmla="*/ 2636627 w 3255095"/>
-              <a:gd name="csY4" fmla="*/ 0 h 18288"/>
-              <a:gd name="csX5" fmla="*/ 3255095 w 3255095"/>
-              <a:gd name="csY5" fmla="*/ 0 h 18288"/>
-              <a:gd name="csX6" fmla="*/ 3255095 w 3255095"/>
-              <a:gd name="csY6" fmla="*/ 18288 h 18288"/>
-              <a:gd name="csX7" fmla="*/ 2538974 w 3255095"/>
-              <a:gd name="csY7" fmla="*/ 18288 h 18288"/>
-              <a:gd name="csX8" fmla="*/ 1822853 w 3255095"/>
-              <a:gd name="csY8" fmla="*/ 18288 h 18288"/>
-              <a:gd name="csX9" fmla="*/ 1171834 w 3255095"/>
-              <a:gd name="csY9" fmla="*/ 18288 h 18288"/>
-              <a:gd name="csX10" fmla="*/ 0 w 3255095"/>
-              <a:gd name="csY10" fmla="*/ 18288 h 18288"/>
-              <a:gd name="csX11" fmla="*/ 0 w 3255095"/>
-              <a:gd name="csY11" fmla="*/ 0 h 18288"/>
+              <a:gd name="connsiteX0" fmla="*/ 0 w 3255095"/>
+              <a:gd name="connsiteY0" fmla="*/ 0 h 18288"/>
+              <a:gd name="connsiteX1" fmla="*/ 618468 w 3255095"/>
+              <a:gd name="connsiteY1" fmla="*/ 0 h 18288"/>
+              <a:gd name="connsiteX2" fmla="*/ 1269487 w 3255095"/>
+              <a:gd name="connsiteY2" fmla="*/ 0 h 18288"/>
+              <a:gd name="connsiteX3" fmla="*/ 1953057 w 3255095"/>
+              <a:gd name="connsiteY3" fmla="*/ 0 h 18288"/>
+              <a:gd name="connsiteX4" fmla="*/ 2636627 w 3255095"/>
+              <a:gd name="connsiteY4" fmla="*/ 0 h 18288"/>
+              <a:gd name="connsiteX5" fmla="*/ 3255095 w 3255095"/>
+              <a:gd name="connsiteY5" fmla="*/ 0 h 18288"/>
+              <a:gd name="connsiteX6" fmla="*/ 3255095 w 3255095"/>
+              <a:gd name="connsiteY6" fmla="*/ 18288 h 18288"/>
+              <a:gd name="connsiteX7" fmla="*/ 2538974 w 3255095"/>
+              <a:gd name="connsiteY7" fmla="*/ 18288 h 18288"/>
+              <a:gd name="connsiteX8" fmla="*/ 1822853 w 3255095"/>
+              <a:gd name="connsiteY8" fmla="*/ 18288 h 18288"/>
+              <a:gd name="connsiteX9" fmla="*/ 1171834 w 3255095"/>
+              <a:gd name="connsiteY9" fmla="*/ 18288 h 18288"/>
+              <a:gd name="connsiteX10" fmla="*/ 0 w 3255095"/>
+              <a:gd name="connsiteY10" fmla="*/ 18288 h 18288"/>
+              <a:gd name="connsiteX11" fmla="*/ 0 w 3255095"/>
+              <a:gd name="connsiteY11" fmla="*/ 0 h 18288"/>
             </a:gdLst>
             <a:ahLst/>
             <a:cxnLst>
               <a:cxn ang="0">
-                <a:pos x="csX0" y="csY0"/>
+                <a:pos x="connsiteX0" y="connsiteY0"/>
               </a:cxn>
               <a:cxn ang="0">
-                <a:pos x="csX1" y="csY1"/>
+                <a:pos x="connsiteX1" y="connsiteY1"/>
               </a:cxn>
               <a:cxn ang="0">
-                <a:pos x="csX2" y="csY2"/>
+                <a:pos x="connsiteX2" y="connsiteY2"/>
               </a:cxn>
               <a:cxn ang="0">
-                <a:pos x="csX3" y="csY3"/>
+                <a:pos x="connsiteX3" y="connsiteY3"/>
               </a:cxn>
               <a:cxn ang="0">
-                <a:pos x="csX4" y="csY4"/>
+                <a:pos x="connsiteX4" y="connsiteY4"/>
               </a:cxn>
               <a:cxn ang="0">
-                <a:pos x="csX5" y="csY5"/>
+                <a:pos x="connsiteX5" y="connsiteY5"/>
               </a:cxn>
               <a:cxn ang="0">
-                <a:pos x="csX6" y="csY6"/>
+                <a:pos x="connsiteX6" y="connsiteY6"/>
               </a:cxn>
               <a:cxn ang="0">
-                <a:pos x="csX7" y="csY7"/>
+                <a:pos x="connsiteX7" y="connsiteY7"/>
               </a:cxn>
               <a:cxn ang="0">
-                <a:pos x="csX8" y="csY8"/>
+                <a:pos x="connsiteX8" y="connsiteY8"/>
               </a:cxn>
               <a:cxn ang="0">
-                <a:pos x="csX9" y="csY9"/>
+                <a:pos x="connsiteX9" y="connsiteY9"/>
               </a:cxn>
               <a:cxn ang="0">
-                <a:pos x="csX10" y="csY10"/>
+                <a:pos x="connsiteX10" y="connsiteY10"/>
               </a:cxn>
               <a:cxn ang="0">
-                <a:pos x="csX11" y="csY11"/>
+                <a:pos x="connsiteX11" y="connsiteY11"/>
               </a:cxn>
             </a:cxnLst>
             <a:rect l="l" t="t" r="r" b="b"/>

--- a/M2/Presentation_Qualities.pptx
+++ b/M2/Presentation_Qualities.pptx
@@ -5,7 +5,7 @@
     <p:sldMasterId id="2147483648" r:id="rId1"/>
   </p:sldMasterIdLst>
   <p:notesMasterIdLst>
-    <p:notesMasterId r:id="rId19"/>
+    <p:notesMasterId r:id="rId20"/>
   </p:notesMasterIdLst>
   <p:sldIdLst>
     <p:sldId id="256" r:id="rId2"/>
@@ -22,9 +22,10 @@
     <p:sldId id="268" r:id="rId13"/>
     <p:sldId id="269" r:id="rId14"/>
     <p:sldId id="271" r:id="rId15"/>
-    <p:sldId id="272" r:id="rId16"/>
-    <p:sldId id="273" r:id="rId17"/>
-    <p:sldId id="274" r:id="rId18"/>
+    <p:sldId id="275" r:id="rId16"/>
+    <p:sldId id="272" r:id="rId17"/>
+    <p:sldId id="273" r:id="rId18"/>
+    <p:sldId id="274" r:id="rId19"/>
   </p:sldIdLst>
   <p:sldSz cx="12192000" cy="6858000"/>
   <p:notesSz cx="6858000" cy="9144000"/>
@@ -4839,7 +4840,7 @@
         <p:spPr>
           <a:xfrm>
             <a:off x="838200" y="1410227"/>
-            <a:ext cx="6872416" cy="2676118"/>
+            <a:ext cx="10983686" cy="2676118"/>
           </a:xfrm>
         </p:spPr>
         <p:txBody>
@@ -4900,8 +4901,8 @@
         </p:nvSpPr>
         <p:spPr>
           <a:xfrm>
-            <a:off x="838200" y="2748286"/>
-            <a:ext cx="6872416" cy="3985654"/>
+            <a:off x="838200" y="2500442"/>
+            <a:ext cx="10515599" cy="3985654"/>
           </a:xfrm>
           <a:prstGeom prst="rect">
             <a:avLst/>
@@ -5200,6 +5201,186 @@
   <p:cSld>
     <p:spTree>
       <p:nvGrpSpPr>
+        <p:cNvPr id="1" name="">
+          <a:extLst>
+            <a:ext uri="{FF2B5EF4-FFF2-40B4-BE49-F238E27FC236}">
+              <a16:creationId xmlns:a16="http://schemas.microsoft.com/office/drawing/2014/main" id="{C276359A-14C5-7420-7D3C-6272E9E43856}"/>
+            </a:ext>
+          </a:extLst>
+        </p:cNvPr>
+        <p:cNvGrpSpPr/>
+        <p:nvPr/>
+      </p:nvGrpSpPr>
+      <p:grpSpPr>
+        <a:xfrm>
+          <a:off x="0" y="0"/>
+          <a:ext cx="0" cy="0"/>
+          <a:chOff x="0" y="0"/>
+          <a:chExt cx="0" cy="0"/>
+        </a:xfrm>
+      </p:grpSpPr>
+      <p:pic>
+        <p:nvPicPr>
+          <p:cNvPr id="6" name="Picture 5" descr="A computer screen shot of a blue square&#10;&#10;Description automatically generated">
+            <a:extLst>
+              <a:ext uri="{FF2B5EF4-FFF2-40B4-BE49-F238E27FC236}">
+                <a16:creationId xmlns:a16="http://schemas.microsoft.com/office/drawing/2014/main" id="{64756387-0ECD-87E3-89D6-AFB651CF36CC}"/>
+              </a:ext>
+            </a:extLst>
+          </p:cNvPr>
+          <p:cNvPicPr>
+            <a:picLocks noChangeAspect="1"/>
+          </p:cNvPicPr>
+          <p:nvPr/>
+        </p:nvPicPr>
+        <p:blipFill>
+          <a:blip r:embed="rId2">
+            <a:extLst>
+              <a:ext uri="{28A0092B-C50C-407E-A947-70E740481C1C}">
+                <a14:useLocalDpi xmlns:a14="http://schemas.microsoft.com/office/drawing/2010/main" val="0"/>
+              </a:ext>
+            </a:extLst>
+          </a:blip>
+          <a:stretch>
+            <a:fillRect/>
+          </a:stretch>
+        </p:blipFill>
+        <p:spPr>
+          <a:xfrm>
+            <a:off x="208005" y="4483809"/>
+            <a:ext cx="5002624" cy="2104684"/>
+          </a:xfrm>
+          <a:prstGeom prst="rect">
+            <a:avLst/>
+          </a:prstGeom>
+        </p:spPr>
+      </p:pic>
+      <p:pic>
+        <p:nvPicPr>
+          <p:cNvPr id="8" name="Picture 7" descr="A screen shot of a computer&#10;&#10;Description automatically generated">
+            <a:extLst>
+              <a:ext uri="{FF2B5EF4-FFF2-40B4-BE49-F238E27FC236}">
+                <a16:creationId xmlns:a16="http://schemas.microsoft.com/office/drawing/2014/main" id="{7731F945-049D-3EE4-2A14-C58B6E8F6A37}"/>
+              </a:ext>
+            </a:extLst>
+          </p:cNvPr>
+          <p:cNvPicPr>
+            <a:picLocks noChangeAspect="1"/>
+          </p:cNvPicPr>
+          <p:nvPr/>
+        </p:nvPicPr>
+        <p:blipFill>
+          <a:blip r:embed="rId3">
+            <a:extLst>
+              <a:ext uri="{28A0092B-C50C-407E-A947-70E740481C1C}">
+                <a14:useLocalDpi xmlns:a14="http://schemas.microsoft.com/office/drawing/2010/main" val="0"/>
+              </a:ext>
+            </a:extLst>
+          </a:blip>
+          <a:stretch>
+            <a:fillRect/>
+          </a:stretch>
+        </p:blipFill>
+        <p:spPr>
+          <a:xfrm>
+            <a:off x="208005" y="2597228"/>
+            <a:ext cx="5002624" cy="1663543"/>
+          </a:xfrm>
+          <a:prstGeom prst="rect">
+            <a:avLst/>
+          </a:prstGeom>
+        </p:spPr>
+      </p:pic>
+      <p:pic>
+        <p:nvPicPr>
+          <p:cNvPr id="10" name="Picture 9" descr="A diagram of a computer&#10;&#10;Description automatically generated with medium confidence">
+            <a:extLst>
+              <a:ext uri="{FF2B5EF4-FFF2-40B4-BE49-F238E27FC236}">
+                <a16:creationId xmlns:a16="http://schemas.microsoft.com/office/drawing/2014/main" id="{DDF59564-2438-153C-A486-73C9E01ACE08}"/>
+              </a:ext>
+            </a:extLst>
+          </p:cNvPr>
+          <p:cNvPicPr>
+            <a:picLocks noChangeAspect="1"/>
+          </p:cNvPicPr>
+          <p:nvPr/>
+        </p:nvPicPr>
+        <p:blipFill>
+          <a:blip r:embed="rId4">
+            <a:extLst>
+              <a:ext uri="{28A0092B-C50C-407E-A947-70E740481C1C}">
+                <a14:useLocalDpi xmlns:a14="http://schemas.microsoft.com/office/drawing/2010/main" val="0"/>
+              </a:ext>
+            </a:extLst>
+          </a:blip>
+          <a:stretch>
+            <a:fillRect/>
+          </a:stretch>
+        </p:blipFill>
+        <p:spPr>
+          <a:xfrm>
+            <a:off x="208005" y="206707"/>
+            <a:ext cx="5002624" cy="2197414"/>
+          </a:xfrm>
+          <a:prstGeom prst="rect">
+            <a:avLst/>
+          </a:prstGeom>
+        </p:spPr>
+      </p:pic>
+      <p:pic>
+        <p:nvPicPr>
+          <p:cNvPr id="13" name="Picture 12" descr="A diagram of information on a black background&#10;&#10;Description automatically generated">
+            <a:extLst>
+              <a:ext uri="{FF2B5EF4-FFF2-40B4-BE49-F238E27FC236}">
+                <a16:creationId xmlns:a16="http://schemas.microsoft.com/office/drawing/2014/main" id="{C61C75C9-A944-A64E-B956-B63FAF320A79}"/>
+              </a:ext>
+            </a:extLst>
+          </p:cNvPr>
+          <p:cNvPicPr>
+            <a:picLocks noChangeAspect="1"/>
+          </p:cNvPicPr>
+          <p:nvPr/>
+        </p:nvPicPr>
+        <p:blipFill>
+          <a:blip r:embed="rId5">
+            <a:extLst>
+              <a:ext uri="{28A0092B-C50C-407E-A947-70E740481C1C}">
+                <a14:useLocalDpi xmlns:a14="http://schemas.microsoft.com/office/drawing/2010/main" val="0"/>
+              </a:ext>
+            </a:extLst>
+          </a:blip>
+          <a:stretch>
+            <a:fillRect/>
+          </a:stretch>
+        </p:blipFill>
+        <p:spPr>
+          <a:xfrm>
+            <a:off x="5394825" y="576882"/>
+            <a:ext cx="6589170" cy="5704236"/>
+          </a:xfrm>
+          <a:prstGeom prst="rect">
+            <a:avLst/>
+          </a:prstGeom>
+        </p:spPr>
+      </p:pic>
+    </p:spTree>
+    <p:extLst>
+      <p:ext uri="{BB962C8B-B14F-4D97-AF65-F5344CB8AC3E}">
+        <p14:creationId xmlns:p14="http://schemas.microsoft.com/office/powerpoint/2010/main" val="3130857123"/>
+      </p:ext>
+    </p:extLst>
+  </p:cSld>
+  <p:clrMapOvr>
+    <a:masterClrMapping/>
+  </p:clrMapOvr>
+</p:sld>
+</file>
+
+<file path=ppt/slides/slide16.xml><?xml version="1.0" encoding="utf-8"?>
+<p:sld xmlns:a="http://schemas.openxmlformats.org/drawingml/2006/main" xmlns:r="http://schemas.openxmlformats.org/officeDocument/2006/relationships" xmlns:p="http://schemas.openxmlformats.org/presentationml/2006/main">
+  <p:cSld>
+    <p:spTree>
+      <p:nvGrpSpPr>
         <p:cNvPr id="1" name=""/>
         <p:cNvGrpSpPr/>
         <p:nvPr/>
@@ -5418,7 +5599,7 @@
 </p:sld>
 </file>
 
-<file path=ppt/slides/slide16.xml><?xml version="1.0" encoding="utf-8"?>
+<file path=ppt/slides/slide17.xml><?xml version="1.0" encoding="utf-8"?>
 <p:sld xmlns:a="http://schemas.openxmlformats.org/drawingml/2006/main" xmlns:r="http://schemas.openxmlformats.org/officeDocument/2006/relationships" xmlns:p="http://schemas.openxmlformats.org/presentationml/2006/main">
   <p:cSld>
     <p:spTree>
@@ -5607,6 +5788,66 @@
           </a:p>
         </p:txBody>
       </p:sp>
+      <p:pic>
+        <p:nvPicPr>
+          <p:cNvPr id="4" name="Picture 3">
+            <a:extLst>
+              <a:ext uri="{FF2B5EF4-FFF2-40B4-BE49-F238E27FC236}">
+                <a16:creationId xmlns:a16="http://schemas.microsoft.com/office/drawing/2014/main" id="{E37E8AB3-C565-EBB4-D07A-9E8F74AEB62D}"/>
+              </a:ext>
+            </a:extLst>
+          </p:cNvPr>
+          <p:cNvPicPr>
+            <a:picLocks noChangeAspect="1"/>
+          </p:cNvPicPr>
+          <p:nvPr/>
+        </p:nvPicPr>
+        <p:blipFill>
+          <a:blip r:embed="rId2"/>
+          <a:stretch>
+            <a:fillRect/>
+          </a:stretch>
+        </p:blipFill>
+        <p:spPr>
+          <a:xfrm>
+            <a:off x="7037613" y="365125"/>
+            <a:ext cx="4871357" cy="2863811"/>
+          </a:xfrm>
+          <a:prstGeom prst="rect">
+            <a:avLst/>
+          </a:prstGeom>
+        </p:spPr>
+      </p:pic>
+      <p:pic>
+        <p:nvPicPr>
+          <p:cNvPr id="5" name="Picture 4">
+            <a:extLst>
+              <a:ext uri="{FF2B5EF4-FFF2-40B4-BE49-F238E27FC236}">
+                <a16:creationId xmlns:a16="http://schemas.microsoft.com/office/drawing/2014/main" id="{001737CF-8176-6A2B-F7DD-BFACAF39465B}"/>
+              </a:ext>
+            </a:extLst>
+          </p:cNvPr>
+          <p:cNvPicPr>
+            <a:picLocks noChangeAspect="1"/>
+          </p:cNvPicPr>
+          <p:nvPr/>
+        </p:nvPicPr>
+        <p:blipFill>
+          <a:blip r:embed="rId3"/>
+          <a:stretch>
+            <a:fillRect/>
+          </a:stretch>
+        </p:blipFill>
+        <p:spPr>
+          <a:xfrm>
+            <a:off x="7037612" y="3429000"/>
+            <a:ext cx="4871358" cy="2493671"/>
+          </a:xfrm>
+          <a:prstGeom prst="rect">
+            <a:avLst/>
+          </a:prstGeom>
+        </p:spPr>
+      </p:pic>
     </p:spTree>
     <p:extLst>
       <p:ext uri="{BB962C8B-B14F-4D97-AF65-F5344CB8AC3E}">
@@ -5620,7 +5861,7 @@
 </p:sld>
 </file>
 
-<file path=ppt/slides/slide17.xml><?xml version="1.0" encoding="utf-8"?>
+<file path=ppt/slides/slide18.xml><?xml version="1.0" encoding="utf-8"?>
 <p:sld xmlns:a="http://schemas.openxmlformats.org/drawingml/2006/main" xmlns:r="http://schemas.openxmlformats.org/officeDocument/2006/relationships" xmlns:p="http://schemas.openxmlformats.org/presentationml/2006/main">
   <p:cSld>
     <p:spTree>
@@ -5871,6 +6112,36 @@
           </a:p>
         </p:txBody>
       </p:sp>
+      <p:pic>
+        <p:nvPicPr>
+          <p:cNvPr id="4" name="Picture 3">
+            <a:extLst>
+              <a:ext uri="{FF2B5EF4-FFF2-40B4-BE49-F238E27FC236}">
+                <a16:creationId xmlns:a16="http://schemas.microsoft.com/office/drawing/2014/main" id="{0A82EF55-1F5E-91C9-E445-35B2ED7EC62C}"/>
+              </a:ext>
+            </a:extLst>
+          </p:cNvPr>
+          <p:cNvPicPr>
+            <a:picLocks noChangeAspect="1"/>
+          </p:cNvPicPr>
+          <p:nvPr/>
+        </p:nvPicPr>
+        <p:blipFill>
+          <a:blip r:embed="rId2"/>
+          <a:stretch>
+            <a:fillRect/>
+          </a:stretch>
+        </p:blipFill>
+        <p:spPr>
+          <a:xfrm>
+            <a:off x="7821386" y="1576301"/>
+            <a:ext cx="3985984" cy="2627927"/>
+          </a:xfrm>
+          <a:prstGeom prst="rect">
+            <a:avLst/>
+          </a:prstGeom>
+        </p:spPr>
+      </p:pic>
     </p:spTree>
     <p:extLst>
       <p:ext uri="{BB962C8B-B14F-4D97-AF65-F5344CB8AC3E}">

--- a/M2/Presentation_Qualities.pptx
+++ b/M2/Presentation_Qualities.pptx
@@ -5,7 +5,7 @@
     <p:sldMasterId id="2147483648" r:id="rId1"/>
   </p:sldMasterIdLst>
   <p:notesMasterIdLst>
-    <p:notesMasterId r:id="rId20"/>
+    <p:notesMasterId r:id="rId21"/>
   </p:notesMasterIdLst>
   <p:sldIdLst>
     <p:sldId id="256" r:id="rId2"/>
@@ -26,6 +26,7 @@
     <p:sldId id="272" r:id="rId17"/>
     <p:sldId id="273" r:id="rId18"/>
     <p:sldId id="274" r:id="rId19"/>
+    <p:sldId id="276" r:id="rId20"/>
   </p:sldIdLst>
   <p:sldSz cx="12192000" cy="6858000"/>
   <p:notesSz cx="6858000" cy="9144000"/>
@@ -710,7 +711,7 @@
           <a:p>
             <a:fld id="{FC1B7745-5391-477F-8AE8-1136866A9302}" type="datetimeFigureOut">
               <a:rPr lang="es-ES" smtClean="0"/>
-              <a:t>4/1/26</a:t>
+              <a:t>05/01/2026</a:t>
             </a:fld>
             <a:endParaRPr lang="es-ES"/>
           </a:p>
@@ -1208,7 +1209,7 @@
           <a:p>
             <a:fld id="{6A3C2F7B-537C-4500-BF1F-DDEBE70AF5A2}" type="datetimeFigureOut">
               <a:rPr lang="es-ES" smtClean="0"/>
-              <a:t>4/1/26</a:t>
+              <a:t>05/01/2026</a:t>
             </a:fld>
             <a:endParaRPr lang="es-ES"/>
           </a:p>
@@ -1406,7 +1407,7 @@
           <a:p>
             <a:fld id="{6A3C2F7B-537C-4500-BF1F-DDEBE70AF5A2}" type="datetimeFigureOut">
               <a:rPr lang="es-ES" smtClean="0"/>
-              <a:t>4/1/26</a:t>
+              <a:t>05/01/2026</a:t>
             </a:fld>
             <a:endParaRPr lang="es-ES"/>
           </a:p>
@@ -1614,7 +1615,7 @@
           <a:p>
             <a:fld id="{6A3C2F7B-537C-4500-BF1F-DDEBE70AF5A2}" type="datetimeFigureOut">
               <a:rPr lang="es-ES" smtClean="0"/>
-              <a:t>4/1/26</a:t>
+              <a:t>05/01/2026</a:t>
             </a:fld>
             <a:endParaRPr lang="es-ES"/>
           </a:p>
@@ -1812,7 +1813,7 @@
           <a:p>
             <a:fld id="{6A3C2F7B-537C-4500-BF1F-DDEBE70AF5A2}" type="datetimeFigureOut">
               <a:rPr lang="es-ES" smtClean="0"/>
-              <a:t>4/1/26</a:t>
+              <a:t>05/01/2026</a:t>
             </a:fld>
             <a:endParaRPr lang="es-ES"/>
           </a:p>
@@ -2087,7 +2088,7 @@
           <a:p>
             <a:fld id="{6A3C2F7B-537C-4500-BF1F-DDEBE70AF5A2}" type="datetimeFigureOut">
               <a:rPr lang="es-ES" smtClean="0"/>
-              <a:t>4/1/26</a:t>
+              <a:t>05/01/2026</a:t>
             </a:fld>
             <a:endParaRPr lang="es-ES"/>
           </a:p>
@@ -2352,7 +2353,7 @@
           <a:p>
             <a:fld id="{6A3C2F7B-537C-4500-BF1F-DDEBE70AF5A2}" type="datetimeFigureOut">
               <a:rPr lang="es-ES" smtClean="0"/>
-              <a:t>4/1/26</a:t>
+              <a:t>05/01/2026</a:t>
             </a:fld>
             <a:endParaRPr lang="es-ES"/>
           </a:p>
@@ -2764,7 +2765,7 @@
           <a:p>
             <a:fld id="{6A3C2F7B-537C-4500-BF1F-DDEBE70AF5A2}" type="datetimeFigureOut">
               <a:rPr lang="es-ES" smtClean="0"/>
-              <a:t>4/1/26</a:t>
+              <a:t>05/01/2026</a:t>
             </a:fld>
             <a:endParaRPr lang="es-ES"/>
           </a:p>
@@ -2905,7 +2906,7 @@
           <a:p>
             <a:fld id="{6A3C2F7B-537C-4500-BF1F-DDEBE70AF5A2}" type="datetimeFigureOut">
               <a:rPr lang="es-ES" smtClean="0"/>
-              <a:t>4/1/26</a:t>
+              <a:t>05/01/2026</a:t>
             </a:fld>
             <a:endParaRPr lang="es-ES"/>
           </a:p>
@@ -3018,7 +3019,7 @@
           <a:p>
             <a:fld id="{6A3C2F7B-537C-4500-BF1F-DDEBE70AF5A2}" type="datetimeFigureOut">
               <a:rPr lang="es-ES" smtClean="0"/>
-              <a:t>4/1/26</a:t>
+              <a:t>05/01/2026</a:t>
             </a:fld>
             <a:endParaRPr lang="es-ES"/>
           </a:p>
@@ -3329,7 +3330,7 @@
           <a:p>
             <a:fld id="{6A3C2F7B-537C-4500-BF1F-DDEBE70AF5A2}" type="datetimeFigureOut">
               <a:rPr lang="es-ES" smtClean="0"/>
-              <a:t>4/1/26</a:t>
+              <a:t>05/01/2026</a:t>
             </a:fld>
             <a:endParaRPr lang="es-ES"/>
           </a:p>
@@ -3617,7 +3618,7 @@
           <a:p>
             <a:fld id="{6A3C2F7B-537C-4500-BF1F-DDEBE70AF5A2}" type="datetimeFigureOut">
               <a:rPr lang="es-ES" smtClean="0"/>
-              <a:t>4/1/26</a:t>
+              <a:t>05/01/2026</a:t>
             </a:fld>
             <a:endParaRPr lang="es-ES"/>
           </a:p>
@@ -3858,7 +3859,7 @@
           <a:p>
             <a:fld id="{6A3C2F7B-537C-4500-BF1F-DDEBE70AF5A2}" type="datetimeFigureOut">
               <a:rPr lang="es-ES" smtClean="0"/>
-              <a:t>4/1/26</a:t>
+              <a:t>05/01/2026</a:t>
             </a:fld>
             <a:endParaRPr lang="es-ES"/>
           </a:p>
@@ -6155,6 +6156,165 @@
 </p:sld>
 </file>
 
+<file path=ppt/slides/slide19.xml><?xml version="1.0" encoding="utf-8"?>
+<p:sld xmlns:a="http://schemas.openxmlformats.org/drawingml/2006/main" xmlns:r="http://schemas.openxmlformats.org/officeDocument/2006/relationships" xmlns:p="http://schemas.openxmlformats.org/presentationml/2006/main">
+  <p:cSld>
+    <p:spTree>
+      <p:nvGrpSpPr>
+        <p:cNvPr id="1" name="">
+          <a:extLst>
+            <a:ext uri="{FF2B5EF4-FFF2-40B4-BE49-F238E27FC236}">
+              <a16:creationId xmlns:a16="http://schemas.microsoft.com/office/drawing/2014/main" id="{4B94F80A-071C-338C-291F-2AD14EF3B1C7}"/>
+            </a:ext>
+          </a:extLst>
+        </p:cNvPr>
+        <p:cNvGrpSpPr/>
+        <p:nvPr/>
+      </p:nvGrpSpPr>
+      <p:grpSpPr>
+        <a:xfrm>
+          <a:off x="0" y="0"/>
+          <a:ext cx="0" cy="0"/>
+          <a:chOff x="0" y="0"/>
+          <a:chExt cx="0" cy="0"/>
+        </a:xfrm>
+      </p:grpSpPr>
+      <p:sp>
+        <p:nvSpPr>
+          <p:cNvPr id="2" name="Title 1">
+            <a:extLst>
+              <a:ext uri="{FF2B5EF4-FFF2-40B4-BE49-F238E27FC236}">
+                <a16:creationId xmlns:a16="http://schemas.microsoft.com/office/drawing/2014/main" id="{CE747146-4EA1-AA67-17BB-5CA0BD57D447}"/>
+              </a:ext>
+            </a:extLst>
+          </p:cNvPr>
+          <p:cNvSpPr>
+            <a:spLocks noGrp="1"/>
+          </p:cNvSpPr>
+          <p:nvPr>
+            <p:ph type="title"/>
+          </p:nvPr>
+        </p:nvSpPr>
+        <p:spPr/>
+        <p:txBody>
+          <a:bodyPr/>
+          <a:lstStyle/>
+          <a:p>
+            <a:r>
+              <a:rPr lang="en-001" dirty="0"/>
+              <a:t>SECURITY </a:t>
+            </a:r>
+            <a:r>
+              <a:rPr lang="en-US" dirty="0"/>
+              <a:t>PROBLEM</a:t>
+            </a:r>
+          </a:p>
+        </p:txBody>
+      </p:sp>
+      <p:sp>
+        <p:nvSpPr>
+          <p:cNvPr id="3" name="Content Placeholder 2">
+            <a:extLst>
+              <a:ext uri="{FF2B5EF4-FFF2-40B4-BE49-F238E27FC236}">
+                <a16:creationId xmlns:a16="http://schemas.microsoft.com/office/drawing/2014/main" id="{3275C814-2661-2F57-ADD4-4A961CB1C671}"/>
+              </a:ext>
+            </a:extLst>
+          </p:cNvPr>
+          <p:cNvSpPr>
+            <a:spLocks noGrp="1"/>
+          </p:cNvSpPr>
+          <p:nvPr>
+            <p:ph idx="1"/>
+          </p:nvPr>
+        </p:nvSpPr>
+        <p:spPr>
+          <a:xfrm>
+            <a:off x="838200" y="1576301"/>
+            <a:ext cx="5822092" cy="4916574"/>
+          </a:xfrm>
+        </p:spPr>
+        <p:txBody>
+          <a:bodyPr>
+            <a:normAutofit lnSpcReduction="10000"/>
+          </a:bodyPr>
+          <a:lstStyle/>
+          <a:p>
+            <a:pPr marL="0" indent="0">
+              <a:buNone/>
+            </a:pPr>
+            <a:r>
+              <a:rPr lang="en-US" sz="2400" dirty="0"/>
+              <a:t>An attacker sends a grade edit request to Grading Management component.</a:t>
+            </a:r>
+            <a:endParaRPr lang="en-001" sz="2400" dirty="0"/>
+          </a:p>
+          <a:p>
+            <a:pPr marL="0" indent="0">
+              <a:buNone/>
+            </a:pPr>
+            <a:endParaRPr lang="en-001" sz="2400" dirty="0"/>
+          </a:p>
+          <a:p>
+            <a:pPr marL="0" indent="0">
+              <a:buNone/>
+            </a:pPr>
+            <a:r>
+              <a:rPr lang="en-001" sz="3200" dirty="0"/>
+              <a:t>Solution:</a:t>
+            </a:r>
+          </a:p>
+          <a:p>
+            <a:pPr marL="0" indent="0">
+              <a:buNone/>
+            </a:pPr>
+            <a:endParaRPr lang="en-001" sz="2400" dirty="0"/>
+          </a:p>
+          <a:p>
+            <a:pPr marL="0" indent="0">
+              <a:buNone/>
+            </a:pPr>
+            <a:r>
+              <a:rPr lang="en-US" sz="2400" dirty="0"/>
+              <a:t>The request is detected, an attacker is not recognized as a teacher, notification is sent (or the grades data is restored).</a:t>
+            </a:r>
+            <a:endParaRPr lang="en-001" sz="2400" dirty="0"/>
+          </a:p>
+          <a:p>
+            <a:pPr marL="0" indent="0">
+              <a:buNone/>
+            </a:pPr>
+            <a:endParaRPr lang="en-001" sz="2400" dirty="0"/>
+          </a:p>
+          <a:p>
+            <a:pPr marL="0" indent="0">
+              <a:buNone/>
+            </a:pPr>
+            <a:endParaRPr lang="en-001" sz="2400" dirty="0"/>
+          </a:p>
+          <a:p>
+            <a:pPr marL="0" indent="0">
+              <a:buNone/>
+            </a:pPr>
+            <a:r>
+              <a:rPr lang="en-001" sz="2400" dirty="0"/>
+              <a:t>The current architecture does not require an update.</a:t>
+            </a:r>
+          </a:p>
+        </p:txBody>
+      </p:sp>
+    </p:spTree>
+    <p:extLst>
+      <p:ext uri="{BB962C8B-B14F-4D97-AF65-F5344CB8AC3E}">
+        <p14:creationId xmlns:p14="http://schemas.microsoft.com/office/powerpoint/2010/main" val="976070164"/>
+      </p:ext>
+    </p:extLst>
+  </p:cSld>
+  <p:clrMapOvr>
+    <a:masterClrMapping/>
+  </p:clrMapOvr>
+</p:sld>
+</file>
+
 <file path=ppt/slides/slide2.xml><?xml version="1.0" encoding="utf-8"?>
 <p:sld xmlns:a="http://schemas.openxmlformats.org/drawingml/2006/main" xmlns:r="http://schemas.openxmlformats.org/officeDocument/2006/relationships" xmlns:p="http://schemas.openxmlformats.org/presentationml/2006/main">
   <p:cSld>
@@ -6312,93 +6472,93 @@
           <a:custGeom>
             <a:avLst/>
             <a:gdLst>
-              <a:gd name="connsiteX0" fmla="*/ 0 w 4243589"/>
-              <a:gd name="connsiteY0" fmla="*/ 0 h 18288"/>
-              <a:gd name="connsiteX1" fmla="*/ 478919 w 4243589"/>
-              <a:gd name="connsiteY1" fmla="*/ 0 h 18288"/>
-              <a:gd name="connsiteX2" fmla="*/ 957839 w 4243589"/>
-              <a:gd name="connsiteY2" fmla="*/ 0 h 18288"/>
-              <a:gd name="connsiteX3" fmla="*/ 1521630 w 4243589"/>
-              <a:gd name="connsiteY3" fmla="*/ 0 h 18288"/>
-              <a:gd name="connsiteX4" fmla="*/ 2212729 w 4243589"/>
-              <a:gd name="connsiteY4" fmla="*/ 0 h 18288"/>
-              <a:gd name="connsiteX5" fmla="*/ 2734084 w 4243589"/>
-              <a:gd name="connsiteY5" fmla="*/ 0 h 18288"/>
-              <a:gd name="connsiteX6" fmla="*/ 3255439 w 4243589"/>
-              <a:gd name="connsiteY6" fmla="*/ 0 h 18288"/>
-              <a:gd name="connsiteX7" fmla="*/ 4243589 w 4243589"/>
-              <a:gd name="connsiteY7" fmla="*/ 0 h 18288"/>
-              <a:gd name="connsiteX8" fmla="*/ 4243589 w 4243589"/>
-              <a:gd name="connsiteY8" fmla="*/ 18288 h 18288"/>
-              <a:gd name="connsiteX9" fmla="*/ 3594926 w 4243589"/>
-              <a:gd name="connsiteY9" fmla="*/ 18288 h 18288"/>
-              <a:gd name="connsiteX10" fmla="*/ 3073571 w 4243589"/>
-              <a:gd name="connsiteY10" fmla="*/ 18288 h 18288"/>
-              <a:gd name="connsiteX11" fmla="*/ 2552216 w 4243589"/>
-              <a:gd name="connsiteY11" fmla="*/ 18288 h 18288"/>
-              <a:gd name="connsiteX12" fmla="*/ 1903553 w 4243589"/>
-              <a:gd name="connsiteY12" fmla="*/ 18288 h 18288"/>
-              <a:gd name="connsiteX13" fmla="*/ 1212454 w 4243589"/>
-              <a:gd name="connsiteY13" fmla="*/ 18288 h 18288"/>
-              <a:gd name="connsiteX14" fmla="*/ 733535 w 4243589"/>
-              <a:gd name="connsiteY14" fmla="*/ 18288 h 18288"/>
-              <a:gd name="connsiteX15" fmla="*/ 0 w 4243589"/>
-              <a:gd name="connsiteY15" fmla="*/ 18288 h 18288"/>
-              <a:gd name="connsiteX16" fmla="*/ 0 w 4243589"/>
-              <a:gd name="connsiteY16" fmla="*/ 0 h 18288"/>
+              <a:gd name="csX0" fmla="*/ 0 w 4243589"/>
+              <a:gd name="csY0" fmla="*/ 0 h 18288"/>
+              <a:gd name="csX1" fmla="*/ 478919 w 4243589"/>
+              <a:gd name="csY1" fmla="*/ 0 h 18288"/>
+              <a:gd name="csX2" fmla="*/ 957839 w 4243589"/>
+              <a:gd name="csY2" fmla="*/ 0 h 18288"/>
+              <a:gd name="csX3" fmla="*/ 1521630 w 4243589"/>
+              <a:gd name="csY3" fmla="*/ 0 h 18288"/>
+              <a:gd name="csX4" fmla="*/ 2212729 w 4243589"/>
+              <a:gd name="csY4" fmla="*/ 0 h 18288"/>
+              <a:gd name="csX5" fmla="*/ 2734084 w 4243589"/>
+              <a:gd name="csY5" fmla="*/ 0 h 18288"/>
+              <a:gd name="csX6" fmla="*/ 3255439 w 4243589"/>
+              <a:gd name="csY6" fmla="*/ 0 h 18288"/>
+              <a:gd name="csX7" fmla="*/ 4243589 w 4243589"/>
+              <a:gd name="csY7" fmla="*/ 0 h 18288"/>
+              <a:gd name="csX8" fmla="*/ 4243589 w 4243589"/>
+              <a:gd name="csY8" fmla="*/ 18288 h 18288"/>
+              <a:gd name="csX9" fmla="*/ 3594926 w 4243589"/>
+              <a:gd name="csY9" fmla="*/ 18288 h 18288"/>
+              <a:gd name="csX10" fmla="*/ 3073571 w 4243589"/>
+              <a:gd name="csY10" fmla="*/ 18288 h 18288"/>
+              <a:gd name="csX11" fmla="*/ 2552216 w 4243589"/>
+              <a:gd name="csY11" fmla="*/ 18288 h 18288"/>
+              <a:gd name="csX12" fmla="*/ 1903553 w 4243589"/>
+              <a:gd name="csY12" fmla="*/ 18288 h 18288"/>
+              <a:gd name="csX13" fmla="*/ 1212454 w 4243589"/>
+              <a:gd name="csY13" fmla="*/ 18288 h 18288"/>
+              <a:gd name="csX14" fmla="*/ 733535 w 4243589"/>
+              <a:gd name="csY14" fmla="*/ 18288 h 18288"/>
+              <a:gd name="csX15" fmla="*/ 0 w 4243589"/>
+              <a:gd name="csY15" fmla="*/ 18288 h 18288"/>
+              <a:gd name="csX16" fmla="*/ 0 w 4243589"/>
+              <a:gd name="csY16" fmla="*/ 0 h 18288"/>
             </a:gdLst>
             <a:ahLst/>
             <a:cxnLst>
               <a:cxn ang="0">
-                <a:pos x="connsiteX0" y="connsiteY0"/>
+                <a:pos x="csX0" y="csY0"/>
               </a:cxn>
               <a:cxn ang="0">
-                <a:pos x="connsiteX1" y="connsiteY1"/>
+                <a:pos x="csX1" y="csY1"/>
               </a:cxn>
               <a:cxn ang="0">
-                <a:pos x="connsiteX2" y="connsiteY2"/>
+                <a:pos x="csX2" y="csY2"/>
               </a:cxn>
               <a:cxn ang="0">
-                <a:pos x="connsiteX3" y="connsiteY3"/>
+                <a:pos x="csX3" y="csY3"/>
               </a:cxn>
               <a:cxn ang="0">
-                <a:pos x="connsiteX4" y="connsiteY4"/>
+                <a:pos x="csX4" y="csY4"/>
               </a:cxn>
               <a:cxn ang="0">
-                <a:pos x="connsiteX5" y="connsiteY5"/>
+                <a:pos x="csX5" y="csY5"/>
               </a:cxn>
               <a:cxn ang="0">
-                <a:pos x="connsiteX6" y="connsiteY6"/>
+                <a:pos x="csX6" y="csY6"/>
               </a:cxn>
               <a:cxn ang="0">
-                <a:pos x="connsiteX7" y="connsiteY7"/>
+                <a:pos x="csX7" y="csY7"/>
               </a:cxn>
               <a:cxn ang="0">
-                <a:pos x="connsiteX8" y="connsiteY8"/>
+                <a:pos x="csX8" y="csY8"/>
               </a:cxn>
               <a:cxn ang="0">
-                <a:pos x="connsiteX9" y="connsiteY9"/>
+                <a:pos x="csX9" y="csY9"/>
               </a:cxn>
               <a:cxn ang="0">
-                <a:pos x="connsiteX10" y="connsiteY10"/>
+                <a:pos x="csX10" y="csY10"/>
               </a:cxn>
               <a:cxn ang="0">
-                <a:pos x="connsiteX11" y="connsiteY11"/>
+                <a:pos x="csX11" y="csY11"/>
               </a:cxn>
               <a:cxn ang="0">
-                <a:pos x="connsiteX12" y="connsiteY12"/>
+                <a:pos x="csX12" y="csY12"/>
               </a:cxn>
               <a:cxn ang="0">
-                <a:pos x="connsiteX13" y="connsiteY13"/>
+                <a:pos x="csX13" y="csY13"/>
               </a:cxn>
               <a:cxn ang="0">
-                <a:pos x="connsiteX14" y="connsiteY14"/>
+                <a:pos x="csX14" y="csY14"/>
               </a:cxn>
               <a:cxn ang="0">
-                <a:pos x="connsiteX15" y="connsiteY15"/>
+                <a:pos x="csX15" y="csY15"/>
               </a:cxn>
               <a:cxn ang="0">
-                <a:pos x="connsiteX16" y="connsiteY16"/>
+                <a:pos x="csX16" y="csY16"/>
               </a:cxn>
             </a:cxnLst>
             <a:rect l="l" t="t" r="r" b="b"/>
@@ -6962,68 +7122,68 @@
           <a:custGeom>
             <a:avLst/>
             <a:gdLst>
-              <a:gd name="connsiteX0" fmla="*/ 0 w 3255095"/>
-              <a:gd name="connsiteY0" fmla="*/ 0 h 18288"/>
-              <a:gd name="connsiteX1" fmla="*/ 618468 w 3255095"/>
-              <a:gd name="connsiteY1" fmla="*/ 0 h 18288"/>
-              <a:gd name="connsiteX2" fmla="*/ 1269487 w 3255095"/>
-              <a:gd name="connsiteY2" fmla="*/ 0 h 18288"/>
-              <a:gd name="connsiteX3" fmla="*/ 1953057 w 3255095"/>
-              <a:gd name="connsiteY3" fmla="*/ 0 h 18288"/>
-              <a:gd name="connsiteX4" fmla="*/ 2636627 w 3255095"/>
-              <a:gd name="connsiteY4" fmla="*/ 0 h 18288"/>
-              <a:gd name="connsiteX5" fmla="*/ 3255095 w 3255095"/>
-              <a:gd name="connsiteY5" fmla="*/ 0 h 18288"/>
-              <a:gd name="connsiteX6" fmla="*/ 3255095 w 3255095"/>
-              <a:gd name="connsiteY6" fmla="*/ 18288 h 18288"/>
-              <a:gd name="connsiteX7" fmla="*/ 2538974 w 3255095"/>
-              <a:gd name="connsiteY7" fmla="*/ 18288 h 18288"/>
-              <a:gd name="connsiteX8" fmla="*/ 1822853 w 3255095"/>
-              <a:gd name="connsiteY8" fmla="*/ 18288 h 18288"/>
-              <a:gd name="connsiteX9" fmla="*/ 1171834 w 3255095"/>
-              <a:gd name="connsiteY9" fmla="*/ 18288 h 18288"/>
-              <a:gd name="connsiteX10" fmla="*/ 0 w 3255095"/>
-              <a:gd name="connsiteY10" fmla="*/ 18288 h 18288"/>
-              <a:gd name="connsiteX11" fmla="*/ 0 w 3255095"/>
-              <a:gd name="connsiteY11" fmla="*/ 0 h 18288"/>
+              <a:gd name="csX0" fmla="*/ 0 w 3255095"/>
+              <a:gd name="csY0" fmla="*/ 0 h 18288"/>
+              <a:gd name="csX1" fmla="*/ 618468 w 3255095"/>
+              <a:gd name="csY1" fmla="*/ 0 h 18288"/>
+              <a:gd name="csX2" fmla="*/ 1269487 w 3255095"/>
+              <a:gd name="csY2" fmla="*/ 0 h 18288"/>
+              <a:gd name="csX3" fmla="*/ 1953057 w 3255095"/>
+              <a:gd name="csY3" fmla="*/ 0 h 18288"/>
+              <a:gd name="csX4" fmla="*/ 2636627 w 3255095"/>
+              <a:gd name="csY4" fmla="*/ 0 h 18288"/>
+              <a:gd name="csX5" fmla="*/ 3255095 w 3255095"/>
+              <a:gd name="csY5" fmla="*/ 0 h 18288"/>
+              <a:gd name="csX6" fmla="*/ 3255095 w 3255095"/>
+              <a:gd name="csY6" fmla="*/ 18288 h 18288"/>
+              <a:gd name="csX7" fmla="*/ 2538974 w 3255095"/>
+              <a:gd name="csY7" fmla="*/ 18288 h 18288"/>
+              <a:gd name="csX8" fmla="*/ 1822853 w 3255095"/>
+              <a:gd name="csY8" fmla="*/ 18288 h 18288"/>
+              <a:gd name="csX9" fmla="*/ 1171834 w 3255095"/>
+              <a:gd name="csY9" fmla="*/ 18288 h 18288"/>
+              <a:gd name="csX10" fmla="*/ 0 w 3255095"/>
+              <a:gd name="csY10" fmla="*/ 18288 h 18288"/>
+              <a:gd name="csX11" fmla="*/ 0 w 3255095"/>
+              <a:gd name="csY11" fmla="*/ 0 h 18288"/>
             </a:gdLst>
             <a:ahLst/>
             <a:cxnLst>
               <a:cxn ang="0">
-                <a:pos x="connsiteX0" y="connsiteY0"/>
+                <a:pos x="csX0" y="csY0"/>
               </a:cxn>
               <a:cxn ang="0">
-                <a:pos x="connsiteX1" y="connsiteY1"/>
+                <a:pos x="csX1" y="csY1"/>
               </a:cxn>
               <a:cxn ang="0">
-                <a:pos x="connsiteX2" y="connsiteY2"/>
+                <a:pos x="csX2" y="csY2"/>
               </a:cxn>
               <a:cxn ang="0">
-                <a:pos x="connsiteX3" y="connsiteY3"/>
+                <a:pos x="csX3" y="csY3"/>
               </a:cxn>
               <a:cxn ang="0">
-                <a:pos x="connsiteX4" y="connsiteY4"/>
+                <a:pos x="csX4" y="csY4"/>
               </a:cxn>
               <a:cxn ang="0">
-                <a:pos x="connsiteX5" y="connsiteY5"/>
+                <a:pos x="csX5" y="csY5"/>
               </a:cxn>
               <a:cxn ang="0">
-                <a:pos x="connsiteX6" y="connsiteY6"/>
+                <a:pos x="csX6" y="csY6"/>
               </a:cxn>
               <a:cxn ang="0">
-                <a:pos x="connsiteX7" y="connsiteY7"/>
+                <a:pos x="csX7" y="csY7"/>
               </a:cxn>
               <a:cxn ang="0">
-                <a:pos x="connsiteX8" y="connsiteY8"/>
+                <a:pos x="csX8" y="csY8"/>
               </a:cxn>
               <a:cxn ang="0">
-                <a:pos x="connsiteX9" y="connsiteY9"/>
+                <a:pos x="csX9" y="csY9"/>
               </a:cxn>
               <a:cxn ang="0">
-                <a:pos x="connsiteX10" y="connsiteY10"/>
+                <a:pos x="csX10" y="csY10"/>
               </a:cxn>
               <a:cxn ang="0">
-                <a:pos x="connsiteX11" y="connsiteY11"/>
+                <a:pos x="csX11" y="csY11"/>
               </a:cxn>
             </a:cxnLst>
             <a:rect l="l" t="t" r="r" b="b"/>
@@ -7455,68 +7615,68 @@
           <a:custGeom>
             <a:avLst/>
             <a:gdLst>
-              <a:gd name="connsiteX0" fmla="*/ 0 w 3255095"/>
-              <a:gd name="connsiteY0" fmla="*/ 0 h 18288"/>
-              <a:gd name="connsiteX1" fmla="*/ 618468 w 3255095"/>
-              <a:gd name="connsiteY1" fmla="*/ 0 h 18288"/>
-              <a:gd name="connsiteX2" fmla="*/ 1269487 w 3255095"/>
-              <a:gd name="connsiteY2" fmla="*/ 0 h 18288"/>
-              <a:gd name="connsiteX3" fmla="*/ 1953057 w 3255095"/>
-              <a:gd name="connsiteY3" fmla="*/ 0 h 18288"/>
-              <a:gd name="connsiteX4" fmla="*/ 2636627 w 3255095"/>
-              <a:gd name="connsiteY4" fmla="*/ 0 h 18288"/>
-              <a:gd name="connsiteX5" fmla="*/ 3255095 w 3255095"/>
-              <a:gd name="connsiteY5" fmla="*/ 0 h 18288"/>
-              <a:gd name="connsiteX6" fmla="*/ 3255095 w 3255095"/>
-              <a:gd name="connsiteY6" fmla="*/ 18288 h 18288"/>
-              <a:gd name="connsiteX7" fmla="*/ 2538974 w 3255095"/>
-              <a:gd name="connsiteY7" fmla="*/ 18288 h 18288"/>
-              <a:gd name="connsiteX8" fmla="*/ 1822853 w 3255095"/>
-              <a:gd name="connsiteY8" fmla="*/ 18288 h 18288"/>
-              <a:gd name="connsiteX9" fmla="*/ 1171834 w 3255095"/>
-              <a:gd name="connsiteY9" fmla="*/ 18288 h 18288"/>
-              <a:gd name="connsiteX10" fmla="*/ 0 w 3255095"/>
-              <a:gd name="connsiteY10" fmla="*/ 18288 h 18288"/>
-              <a:gd name="connsiteX11" fmla="*/ 0 w 3255095"/>
-              <a:gd name="connsiteY11" fmla="*/ 0 h 18288"/>
+              <a:gd name="csX0" fmla="*/ 0 w 3255095"/>
+              <a:gd name="csY0" fmla="*/ 0 h 18288"/>
+              <a:gd name="csX1" fmla="*/ 618468 w 3255095"/>
+              <a:gd name="csY1" fmla="*/ 0 h 18288"/>
+              <a:gd name="csX2" fmla="*/ 1269487 w 3255095"/>
+              <a:gd name="csY2" fmla="*/ 0 h 18288"/>
+              <a:gd name="csX3" fmla="*/ 1953057 w 3255095"/>
+              <a:gd name="csY3" fmla="*/ 0 h 18288"/>
+              <a:gd name="csX4" fmla="*/ 2636627 w 3255095"/>
+              <a:gd name="csY4" fmla="*/ 0 h 18288"/>
+              <a:gd name="csX5" fmla="*/ 3255095 w 3255095"/>
+              <a:gd name="csY5" fmla="*/ 0 h 18288"/>
+              <a:gd name="csX6" fmla="*/ 3255095 w 3255095"/>
+              <a:gd name="csY6" fmla="*/ 18288 h 18288"/>
+              <a:gd name="csX7" fmla="*/ 2538974 w 3255095"/>
+              <a:gd name="csY7" fmla="*/ 18288 h 18288"/>
+              <a:gd name="csX8" fmla="*/ 1822853 w 3255095"/>
+              <a:gd name="csY8" fmla="*/ 18288 h 18288"/>
+              <a:gd name="csX9" fmla="*/ 1171834 w 3255095"/>
+              <a:gd name="csY9" fmla="*/ 18288 h 18288"/>
+              <a:gd name="csX10" fmla="*/ 0 w 3255095"/>
+              <a:gd name="csY10" fmla="*/ 18288 h 18288"/>
+              <a:gd name="csX11" fmla="*/ 0 w 3255095"/>
+              <a:gd name="csY11" fmla="*/ 0 h 18288"/>
             </a:gdLst>
             <a:ahLst/>
             <a:cxnLst>
               <a:cxn ang="0">
-                <a:pos x="connsiteX0" y="connsiteY0"/>
+                <a:pos x="csX0" y="csY0"/>
               </a:cxn>
               <a:cxn ang="0">
-                <a:pos x="connsiteX1" y="connsiteY1"/>
+                <a:pos x="csX1" y="csY1"/>
               </a:cxn>
               <a:cxn ang="0">
-                <a:pos x="connsiteX2" y="connsiteY2"/>
+                <a:pos x="csX2" y="csY2"/>
               </a:cxn>
               <a:cxn ang="0">
-                <a:pos x="connsiteX3" y="connsiteY3"/>
+                <a:pos x="csX3" y="csY3"/>
               </a:cxn>
               <a:cxn ang="0">
-                <a:pos x="connsiteX4" y="connsiteY4"/>
+                <a:pos x="csX4" y="csY4"/>
               </a:cxn>
               <a:cxn ang="0">
-                <a:pos x="connsiteX5" y="connsiteY5"/>
+                <a:pos x="csX5" y="csY5"/>
               </a:cxn>
               <a:cxn ang="0">
-                <a:pos x="connsiteX6" y="connsiteY6"/>
+                <a:pos x="csX6" y="csY6"/>
               </a:cxn>
               <a:cxn ang="0">
-                <a:pos x="connsiteX7" y="connsiteY7"/>
+                <a:pos x="csX7" y="csY7"/>
               </a:cxn>
               <a:cxn ang="0">
-                <a:pos x="connsiteX8" y="connsiteY8"/>
+                <a:pos x="csX8" y="csY8"/>
               </a:cxn>
               <a:cxn ang="0">
-                <a:pos x="connsiteX9" y="connsiteY9"/>
+                <a:pos x="csX9" y="csY9"/>
               </a:cxn>
               <a:cxn ang="0">
-                <a:pos x="connsiteX10" y="connsiteY10"/>
+                <a:pos x="csX10" y="csY10"/>
               </a:cxn>
               <a:cxn ang="0">
-                <a:pos x="connsiteX11" y="connsiteY11"/>
+                <a:pos x="csX11" y="csY11"/>
               </a:cxn>
             </a:cxnLst>
             <a:rect l="l" t="t" r="r" b="b"/>
@@ -7949,68 +8109,68 @@
           <a:custGeom>
             <a:avLst/>
             <a:gdLst>
-              <a:gd name="connsiteX0" fmla="*/ 0 w 3255095"/>
-              <a:gd name="connsiteY0" fmla="*/ 0 h 18288"/>
-              <a:gd name="connsiteX1" fmla="*/ 618468 w 3255095"/>
-              <a:gd name="connsiteY1" fmla="*/ 0 h 18288"/>
-              <a:gd name="connsiteX2" fmla="*/ 1269487 w 3255095"/>
-              <a:gd name="connsiteY2" fmla="*/ 0 h 18288"/>
-              <a:gd name="connsiteX3" fmla="*/ 1953057 w 3255095"/>
-              <a:gd name="connsiteY3" fmla="*/ 0 h 18288"/>
-              <a:gd name="connsiteX4" fmla="*/ 2636627 w 3255095"/>
-              <a:gd name="connsiteY4" fmla="*/ 0 h 18288"/>
-              <a:gd name="connsiteX5" fmla="*/ 3255095 w 3255095"/>
-              <a:gd name="connsiteY5" fmla="*/ 0 h 18288"/>
-              <a:gd name="connsiteX6" fmla="*/ 3255095 w 3255095"/>
-              <a:gd name="connsiteY6" fmla="*/ 18288 h 18288"/>
-              <a:gd name="connsiteX7" fmla="*/ 2538974 w 3255095"/>
-              <a:gd name="connsiteY7" fmla="*/ 18288 h 18288"/>
-              <a:gd name="connsiteX8" fmla="*/ 1822853 w 3255095"/>
-              <a:gd name="connsiteY8" fmla="*/ 18288 h 18288"/>
-              <a:gd name="connsiteX9" fmla="*/ 1171834 w 3255095"/>
-              <a:gd name="connsiteY9" fmla="*/ 18288 h 18288"/>
-              <a:gd name="connsiteX10" fmla="*/ 0 w 3255095"/>
-              <a:gd name="connsiteY10" fmla="*/ 18288 h 18288"/>
-              <a:gd name="connsiteX11" fmla="*/ 0 w 3255095"/>
-              <a:gd name="connsiteY11" fmla="*/ 0 h 18288"/>
+              <a:gd name="csX0" fmla="*/ 0 w 3255095"/>
+              <a:gd name="csY0" fmla="*/ 0 h 18288"/>
+              <a:gd name="csX1" fmla="*/ 618468 w 3255095"/>
+              <a:gd name="csY1" fmla="*/ 0 h 18288"/>
+              <a:gd name="csX2" fmla="*/ 1269487 w 3255095"/>
+              <a:gd name="csY2" fmla="*/ 0 h 18288"/>
+              <a:gd name="csX3" fmla="*/ 1953057 w 3255095"/>
+              <a:gd name="csY3" fmla="*/ 0 h 18288"/>
+              <a:gd name="csX4" fmla="*/ 2636627 w 3255095"/>
+              <a:gd name="csY4" fmla="*/ 0 h 18288"/>
+              <a:gd name="csX5" fmla="*/ 3255095 w 3255095"/>
+              <a:gd name="csY5" fmla="*/ 0 h 18288"/>
+              <a:gd name="csX6" fmla="*/ 3255095 w 3255095"/>
+              <a:gd name="csY6" fmla="*/ 18288 h 18288"/>
+              <a:gd name="csX7" fmla="*/ 2538974 w 3255095"/>
+              <a:gd name="csY7" fmla="*/ 18288 h 18288"/>
+              <a:gd name="csX8" fmla="*/ 1822853 w 3255095"/>
+              <a:gd name="csY8" fmla="*/ 18288 h 18288"/>
+              <a:gd name="csX9" fmla="*/ 1171834 w 3255095"/>
+              <a:gd name="csY9" fmla="*/ 18288 h 18288"/>
+              <a:gd name="csX10" fmla="*/ 0 w 3255095"/>
+              <a:gd name="csY10" fmla="*/ 18288 h 18288"/>
+              <a:gd name="csX11" fmla="*/ 0 w 3255095"/>
+              <a:gd name="csY11" fmla="*/ 0 h 18288"/>
             </a:gdLst>
             <a:ahLst/>
             <a:cxnLst>
               <a:cxn ang="0">
-                <a:pos x="connsiteX0" y="connsiteY0"/>
+                <a:pos x="csX0" y="csY0"/>
               </a:cxn>
               <a:cxn ang="0">
-                <a:pos x="connsiteX1" y="connsiteY1"/>
+                <a:pos x="csX1" y="csY1"/>
               </a:cxn>
               <a:cxn ang="0">
-                <a:pos x="connsiteX2" y="connsiteY2"/>
+                <a:pos x="csX2" y="csY2"/>
               </a:cxn>
               <a:cxn ang="0">
-                <a:pos x="connsiteX3" y="connsiteY3"/>
+                <a:pos x="csX3" y="csY3"/>
               </a:cxn>
               <a:cxn ang="0">
-                <a:pos x="connsiteX4" y="connsiteY4"/>
+                <a:pos x="csX4" y="csY4"/>
               </a:cxn>
               <a:cxn ang="0">
-                <a:pos x="connsiteX5" y="connsiteY5"/>
+                <a:pos x="csX5" y="csY5"/>
               </a:cxn>
               <a:cxn ang="0">
-                <a:pos x="connsiteX6" y="connsiteY6"/>
+                <a:pos x="csX6" y="csY6"/>
               </a:cxn>
               <a:cxn ang="0">
-                <a:pos x="connsiteX7" y="connsiteY7"/>
+                <a:pos x="csX7" y="csY7"/>
               </a:cxn>
               <a:cxn ang="0">
-                <a:pos x="connsiteX8" y="connsiteY8"/>
+                <a:pos x="csX8" y="csY8"/>
               </a:cxn>
               <a:cxn ang="0">
-                <a:pos x="connsiteX9" y="connsiteY9"/>
+                <a:pos x="csX9" y="csY9"/>
               </a:cxn>
               <a:cxn ang="0">
-                <a:pos x="connsiteX10" y="connsiteY10"/>
+                <a:pos x="csX10" y="csY10"/>
               </a:cxn>
               <a:cxn ang="0">
-                <a:pos x="connsiteX11" y="connsiteY11"/>
+                <a:pos x="csX11" y="csY11"/>
               </a:cxn>
             </a:cxnLst>
             <a:rect l="l" t="t" r="r" b="b"/>
@@ -8700,68 +8860,68 @@
           <a:custGeom>
             <a:avLst/>
             <a:gdLst>
-              <a:gd name="connsiteX0" fmla="*/ 0 w 3255095"/>
-              <a:gd name="connsiteY0" fmla="*/ 0 h 18288"/>
-              <a:gd name="connsiteX1" fmla="*/ 618468 w 3255095"/>
-              <a:gd name="connsiteY1" fmla="*/ 0 h 18288"/>
-              <a:gd name="connsiteX2" fmla="*/ 1269487 w 3255095"/>
-              <a:gd name="connsiteY2" fmla="*/ 0 h 18288"/>
-              <a:gd name="connsiteX3" fmla="*/ 1953057 w 3255095"/>
-              <a:gd name="connsiteY3" fmla="*/ 0 h 18288"/>
-              <a:gd name="connsiteX4" fmla="*/ 2636627 w 3255095"/>
-              <a:gd name="connsiteY4" fmla="*/ 0 h 18288"/>
-              <a:gd name="connsiteX5" fmla="*/ 3255095 w 3255095"/>
-              <a:gd name="connsiteY5" fmla="*/ 0 h 18288"/>
-              <a:gd name="connsiteX6" fmla="*/ 3255095 w 3255095"/>
-              <a:gd name="connsiteY6" fmla="*/ 18288 h 18288"/>
-              <a:gd name="connsiteX7" fmla="*/ 2538974 w 3255095"/>
-              <a:gd name="connsiteY7" fmla="*/ 18288 h 18288"/>
-              <a:gd name="connsiteX8" fmla="*/ 1822853 w 3255095"/>
-              <a:gd name="connsiteY8" fmla="*/ 18288 h 18288"/>
-              <a:gd name="connsiteX9" fmla="*/ 1171834 w 3255095"/>
-              <a:gd name="connsiteY9" fmla="*/ 18288 h 18288"/>
-              <a:gd name="connsiteX10" fmla="*/ 0 w 3255095"/>
-              <a:gd name="connsiteY10" fmla="*/ 18288 h 18288"/>
-              <a:gd name="connsiteX11" fmla="*/ 0 w 3255095"/>
-              <a:gd name="connsiteY11" fmla="*/ 0 h 18288"/>
+              <a:gd name="csX0" fmla="*/ 0 w 3255095"/>
+              <a:gd name="csY0" fmla="*/ 0 h 18288"/>
+              <a:gd name="csX1" fmla="*/ 618468 w 3255095"/>
+              <a:gd name="csY1" fmla="*/ 0 h 18288"/>
+              <a:gd name="csX2" fmla="*/ 1269487 w 3255095"/>
+              <a:gd name="csY2" fmla="*/ 0 h 18288"/>
+              <a:gd name="csX3" fmla="*/ 1953057 w 3255095"/>
+              <a:gd name="csY3" fmla="*/ 0 h 18288"/>
+              <a:gd name="csX4" fmla="*/ 2636627 w 3255095"/>
+              <a:gd name="csY4" fmla="*/ 0 h 18288"/>
+              <a:gd name="csX5" fmla="*/ 3255095 w 3255095"/>
+              <a:gd name="csY5" fmla="*/ 0 h 18288"/>
+              <a:gd name="csX6" fmla="*/ 3255095 w 3255095"/>
+              <a:gd name="csY6" fmla="*/ 18288 h 18288"/>
+              <a:gd name="csX7" fmla="*/ 2538974 w 3255095"/>
+              <a:gd name="csY7" fmla="*/ 18288 h 18288"/>
+              <a:gd name="csX8" fmla="*/ 1822853 w 3255095"/>
+              <a:gd name="csY8" fmla="*/ 18288 h 18288"/>
+              <a:gd name="csX9" fmla="*/ 1171834 w 3255095"/>
+              <a:gd name="csY9" fmla="*/ 18288 h 18288"/>
+              <a:gd name="csX10" fmla="*/ 0 w 3255095"/>
+              <a:gd name="csY10" fmla="*/ 18288 h 18288"/>
+              <a:gd name="csX11" fmla="*/ 0 w 3255095"/>
+              <a:gd name="csY11" fmla="*/ 0 h 18288"/>
             </a:gdLst>
             <a:ahLst/>
             <a:cxnLst>
               <a:cxn ang="0">
-                <a:pos x="connsiteX0" y="connsiteY0"/>
+                <a:pos x="csX0" y="csY0"/>
               </a:cxn>
               <a:cxn ang="0">
-                <a:pos x="connsiteX1" y="connsiteY1"/>
+                <a:pos x="csX1" y="csY1"/>
               </a:cxn>
               <a:cxn ang="0">
-                <a:pos x="connsiteX2" y="connsiteY2"/>
+                <a:pos x="csX2" y="csY2"/>
               </a:cxn>
               <a:cxn ang="0">
-                <a:pos x="connsiteX3" y="connsiteY3"/>
+                <a:pos x="csX3" y="csY3"/>
               </a:cxn>
               <a:cxn ang="0">
-                <a:pos x="connsiteX4" y="connsiteY4"/>
+                <a:pos x="csX4" y="csY4"/>
               </a:cxn>
               <a:cxn ang="0">
-                <a:pos x="connsiteX5" y="connsiteY5"/>
+                <a:pos x="csX5" y="csY5"/>
               </a:cxn>
               <a:cxn ang="0">
-                <a:pos x="connsiteX6" y="connsiteY6"/>
+                <a:pos x="csX6" y="csY6"/>
               </a:cxn>
               <a:cxn ang="0">
-                <a:pos x="connsiteX7" y="connsiteY7"/>
+                <a:pos x="csX7" y="csY7"/>
               </a:cxn>
               <a:cxn ang="0">
-                <a:pos x="connsiteX8" y="connsiteY8"/>
+                <a:pos x="csX8" y="csY8"/>
               </a:cxn>
               <a:cxn ang="0">
-                <a:pos x="connsiteX9" y="connsiteY9"/>
+                <a:pos x="csX9" y="csY9"/>
               </a:cxn>
               <a:cxn ang="0">
-                <a:pos x="connsiteX10" y="connsiteY10"/>
+                <a:pos x="csX10" y="csY10"/>
               </a:cxn>
               <a:cxn ang="0">
-                <a:pos x="connsiteX11" y="connsiteY11"/>
+                <a:pos x="csX11" y="csY11"/>
               </a:cxn>
             </a:cxnLst>
             <a:rect l="l" t="t" r="r" b="b"/>

--- a/M2/Presentation_Qualities.pptx
+++ b/M2/Presentation_Qualities.pptx
@@ -5,28 +5,29 @@
     <p:sldMasterId id="2147483648" r:id="rId1"/>
   </p:sldMasterIdLst>
   <p:notesMasterIdLst>
-    <p:notesMasterId r:id="rId21"/>
+    <p:notesMasterId r:id="rId22"/>
   </p:notesMasterIdLst>
   <p:sldIdLst>
     <p:sldId id="256" r:id="rId2"/>
-    <p:sldId id="260" r:id="rId3"/>
-    <p:sldId id="261" r:id="rId4"/>
-    <p:sldId id="257" r:id="rId5"/>
-    <p:sldId id="259" r:id="rId6"/>
-    <p:sldId id="262" r:id="rId7"/>
-    <p:sldId id="263" r:id="rId8"/>
-    <p:sldId id="264" r:id="rId9"/>
-    <p:sldId id="265" r:id="rId10"/>
-    <p:sldId id="266" r:id="rId11"/>
-    <p:sldId id="267" r:id="rId12"/>
-    <p:sldId id="268" r:id="rId13"/>
-    <p:sldId id="269" r:id="rId14"/>
-    <p:sldId id="271" r:id="rId15"/>
-    <p:sldId id="275" r:id="rId16"/>
-    <p:sldId id="272" r:id="rId17"/>
-    <p:sldId id="273" r:id="rId18"/>
-    <p:sldId id="274" r:id="rId19"/>
-    <p:sldId id="276" r:id="rId20"/>
+    <p:sldId id="276" r:id="rId3"/>
+    <p:sldId id="277" r:id="rId4"/>
+    <p:sldId id="260" r:id="rId5"/>
+    <p:sldId id="261" r:id="rId6"/>
+    <p:sldId id="257" r:id="rId7"/>
+    <p:sldId id="259" r:id="rId8"/>
+    <p:sldId id="262" r:id="rId9"/>
+    <p:sldId id="263" r:id="rId10"/>
+    <p:sldId id="264" r:id="rId11"/>
+    <p:sldId id="265" r:id="rId12"/>
+    <p:sldId id="266" r:id="rId13"/>
+    <p:sldId id="267" r:id="rId14"/>
+    <p:sldId id="268" r:id="rId15"/>
+    <p:sldId id="269" r:id="rId16"/>
+    <p:sldId id="271" r:id="rId17"/>
+    <p:sldId id="275" r:id="rId18"/>
+    <p:sldId id="272" r:id="rId19"/>
+    <p:sldId id="273" r:id="rId20"/>
+    <p:sldId id="274" r:id="rId21"/>
   </p:sldIdLst>
   <p:sldSz cx="12192000" cy="6858000"/>
   <p:notesSz cx="6858000" cy="9144000"/>
@@ -629,6 +630,230 @@
 </pc:chgInfo>
 </file>
 
+<file path=ppt/ink/ink1.xml><?xml version="1.0" encoding="utf-8"?>
+<inkml:ink xmlns:inkml="http://www.w3.org/2003/InkML">
+  <inkml:definitions>
+    <inkml:context xml:id="ctx0">
+      <inkml:inkSource xml:id="inkSrc0">
+        <inkml:traceFormat>
+          <inkml:channel name="X" type="integer" min="-2.14748E9" max="2.14748E9" units="cm"/>
+          <inkml:channel name="Y" type="integer" min="-2.14748E9" max="2.14748E9" units="cm"/>
+          <inkml:channel name="F" type="integer" max="32767" units="dev"/>
+        </inkml:traceFormat>
+        <inkml:channelProperties>
+          <inkml:channelProperty channel="X" name="resolution" value="1000" units="1/cm"/>
+          <inkml:channelProperty channel="Y" name="resolution" value="1000" units="1/cm"/>
+          <inkml:channelProperty channel="F" name="resolution" value="0" units="1/dev"/>
+        </inkml:channelProperties>
+      </inkml:inkSource>
+      <inkml:timestamp xml:id="ts0" timeString="2026-01-05T10:44:14.386"/>
+    </inkml:context>
+    <inkml:brush xml:id="br0">
+      <inkml:brushProperty name="width" value="0.1" units="cm"/>
+      <inkml:brushProperty name="height" value="0.1" units="cm"/>
+      <inkml:brushProperty name="color" value="#E71224"/>
+    </inkml:brush>
+  </inkml:definitions>
+  <inkml:trace contextRef="#ctx0" brushRef="#br0">354 54 24575,'702'-21'0,"344"-12"0,255 34 0,-1270-1 0,-1 2 0,0 2 0,0 0 0,0 2 0,0 1 0,-1 2 0,0 1 0,-1 1 0,0 1 0,0 1 0,39 27 0,-67-40 0,37 25 0,41 33 0,-68-49 0,1 1 0,-1 0 0,-1 1 0,0 0 0,-1 0 0,0 1 0,0 0 0,5 14 0,47 146 0,-21-53 0,-29-96 0,2 1 0,0-1 0,26 35 0,1 0 0,15 20 0,-43-64 0,0 0 0,-1 1 0,0 0 0,-1 1 0,-1 0 0,0 0 0,-1 1 0,8 29 0,-2 55 0,-11-67 0,14 60 0,-5-45 0,-2 0 0,5 96 0,-16 102 0,-1-92 0,5-1 0,-4 167 0,1-309 0,0 0 0,-1 0 0,0-1 0,-1 1 0,0-1 0,0 0 0,-2 0 0,1 0 0,-1 0 0,-12 17 0,5-11 0,-1-1 0,-1-1 0,0 0 0,-2-1 0,-20 16 0,-45 39 0,48-39 0,-58 40 0,78-62 0,-1 0 0,0-1 0,0 0 0,0-1 0,-1-1 0,0 0 0,0-1 0,-21 3 0,-44 0 0,-145-8 0,103-2 0,-603 2 0,705 0 0,1 0 0,-1-2 0,1 0 0,-38-12 0,-72-34 0,-15-6 0,-117-3 0,109 28 0,112 24 0,0-1 0,-77-25 0,27-3 0,-1 5 0,-1 4 0,-188-28 0,257 52 0,1 0 0,0-2 0,1-1 0,-1 0 0,1-1 0,0-2 0,0 0 0,-36-20 0,30 10 0,-1 1 0,-1 2 0,0 1 0,-1 1 0,0 2 0,-39-10 0,40 15 0,-1-2 0,1-1 0,0-2 0,1 0 0,0-2 0,1-1 0,0-2 0,1 0 0,-32-27 0,17 8 0,-44-48 0,68 64 0,1-1 0,1 0 0,1-1 0,-21-43 0,-37-104 0,62 137 0,1 0 0,1 0 0,-6-53 0,9 45 0,-17-57 0,13 61 0,1 1 0,-3-51 0,8-328 0,5 207 0,-2 173 0,2 0 0,1-1 0,10-49 0,-9 68 0,1 0 0,0-1 0,1 2 0,0-1 0,2 1 0,-1 0 0,2 0 0,0 1 0,15-17 0,-16 19-114,2 1 1,-1 0-1,1 0 0,1 1 0,-1 0 1,2 1-1,-1 1 0,1-1 0,0 2 1,1 0-1,13-5 0,6 3-6712</inkml:trace>
+</inkml:ink>
+</file>
+
+<file path=ppt/ink/ink2.xml><?xml version="1.0" encoding="utf-8"?>
+<inkml:ink xmlns:inkml="http://www.w3.org/2003/InkML">
+  <inkml:definitions>
+    <inkml:context xml:id="ctx0">
+      <inkml:inkSource xml:id="inkSrc0">
+        <inkml:traceFormat>
+          <inkml:channel name="X" type="integer" min="-2.14748E9" max="2.14748E9" units="cm"/>
+          <inkml:channel name="Y" type="integer" min="-2.14748E9" max="2.14748E9" units="cm"/>
+          <inkml:channel name="F" type="integer" max="32767" units="dev"/>
+        </inkml:traceFormat>
+        <inkml:channelProperties>
+          <inkml:channelProperty channel="X" name="resolution" value="1000" units="1/cm"/>
+          <inkml:channelProperty channel="Y" name="resolution" value="1000" units="1/cm"/>
+          <inkml:channelProperty channel="F" name="resolution" value="0" units="1/dev"/>
+        </inkml:channelProperties>
+      </inkml:inkSource>
+      <inkml:timestamp xml:id="ts0" timeString="2026-01-05T10:45:08.672"/>
+    </inkml:context>
+    <inkml:brush xml:id="br0">
+      <inkml:brushProperty name="width" value="0.1" units="cm"/>
+      <inkml:brushProperty name="height" value="0.1" units="cm"/>
+      <inkml:brushProperty name="color" value="#E71224"/>
+    </inkml:brush>
+  </inkml:definitions>
+  <inkml:trace contextRef="#ctx0" brushRef="#br0">57 0 24575,'9'5'0,"0"0"0,0 0 0,1-1 0,0-1 0,-1 1 0,14 1 0,8 4 0,62 17 0,2-3 0,1-4 0,0-5 0,1-4 0,141-3 0,1015-13 0,-705 8 0,-447 0 0,116-5 0,-179-2 0,48-14 0,31-4 0,286 15 0,-234 11 0,-149-3 0,-1 0 0,1 1 0,0 1 0,-1 1 0,20 6 0,-32-6 0,1-1 0,-1 1 0,0 1 0,0-1 0,-1 1 0,1 1 0,-1-1 0,0 1 0,0 0 0,0 0 0,-1 1 0,1 0 0,-1 0 0,-1 0 0,7 11 0,-2 3 0,0 0 0,-1 0 0,-2 1 0,8 35 0,-4-14 0,0 1 0,-2 0 0,4 87 0,-13 89 0,-2-86 0,4 40 0,-3 163 0,1-318 0,-1-1 0,-1 1 0,-1-1 0,0 0 0,-8 18 0,-38 77 0,32-77 0,-4 15 0,-18 63 0,-16 37 0,27-82 0,15-35 0,-29 54 0,33-68 0,0 1 0,-9 29 0,15-37 0,0 1 0,-1-1 0,0 1 0,-1-1 0,-1-1 0,0 1 0,0-1 0,-1-1 0,-17 19 0,2-10 0,-1-1 0,0-1 0,-2-1 0,0-1 0,0-1 0,-2-2 0,1-1 0,-1-1 0,-1-1 0,0-1 0,0-2 0,-1-1 0,-31 1 0,-326-5 0,166-4 0,111 5 0,-129-5 0,186-6 0,-96-27 0,123 28 0,-99-31 0,79 22 0,-1 2 0,0 3 0,-78-11 0,77 17 0,-58-15 0,65 11 0,0 2 0,-63-4 0,-125 13 0,213-3 0,0 0 0,0 0 0,0-2 0,0 0 0,1 0 0,0-2 0,-17-7 0,-37-13 0,28 14 0,-1 1 0,-1 2 0,0 2 0,-50-1 0,-55-5 0,-9 1 0,72 13 0,44 1 0,-69-7 0,106 5 0,1-1 0,-1 0 0,1 1 0,0-2 0,-1 1 0,1 0 0,0-1 0,0 1 0,0-1 0,0 0 0,0 0 0,0 0 0,0-1 0,1 1 0,-1-1 0,1 1 0,0-1 0,-1 0 0,1 0 0,1 0 0,-1 0 0,0 0 0,1 0 0,-1-1 0,1 1 0,0 0 0,-1-7 0,-1-7 0,1-1 0,1 1 0,0-1 0,3-25 0,-2 25 0,7-585 0,-7 496 0,-2 80 0,-1-1 0,-1 1 0,-13-44 0,-6-39 0,0-141 0,12-164-149,12 295-1067,-1 76-5610</inkml:trace>
+</inkml:ink>
+</file>
+
+<file path=ppt/ink/ink3.xml><?xml version="1.0" encoding="utf-8"?>
+<inkml:ink xmlns:inkml="http://www.w3.org/2003/InkML">
+  <inkml:definitions>
+    <inkml:context xml:id="ctx0">
+      <inkml:inkSource xml:id="inkSrc0">
+        <inkml:traceFormat>
+          <inkml:channel name="X" type="integer" min="-2.14748E9" max="2.14748E9" units="cm"/>
+          <inkml:channel name="Y" type="integer" min="-2.14748E9" max="2.14748E9" units="cm"/>
+          <inkml:channel name="F" type="integer" max="32767" units="dev"/>
+        </inkml:traceFormat>
+        <inkml:channelProperties>
+          <inkml:channelProperty channel="X" name="resolution" value="1000" units="1/cm"/>
+          <inkml:channelProperty channel="Y" name="resolution" value="1000" units="1/cm"/>
+          <inkml:channelProperty channel="F" name="resolution" value="0" units="1/dev"/>
+        </inkml:channelProperties>
+      </inkml:inkSource>
+      <inkml:timestamp xml:id="ts0" timeString="2026-01-05T10:45:20.516"/>
+    </inkml:context>
+    <inkml:brush xml:id="br0">
+      <inkml:brushProperty name="width" value="0.1" units="cm"/>
+      <inkml:brushProperty name="height" value="0.1" units="cm"/>
+      <inkml:brushProperty name="color" value="#E71224"/>
+    </inkml:brush>
+  </inkml:definitions>
+  <inkml:trace contextRef="#ctx0" brushRef="#br0">1 0 24575,'0'5'0,"0"10"0,0 7 0,0 10 0,0 3 0,0-4-8191</inkml:trace>
+</inkml:ink>
+</file>
+
+<file path=ppt/ink/ink4.xml><?xml version="1.0" encoding="utf-8"?>
+<inkml:ink xmlns:inkml="http://www.w3.org/2003/InkML">
+  <inkml:definitions>
+    <inkml:context xml:id="ctx0">
+      <inkml:inkSource xml:id="inkSrc0">
+        <inkml:traceFormat>
+          <inkml:channel name="X" type="integer" min="-2.14748E9" max="2.14748E9" units="cm"/>
+          <inkml:channel name="Y" type="integer" min="-2.14748E9" max="2.14748E9" units="cm"/>
+          <inkml:channel name="F" type="integer" max="32767" units="dev"/>
+        </inkml:traceFormat>
+        <inkml:channelProperties>
+          <inkml:channelProperty channel="X" name="resolution" value="1000" units="1/cm"/>
+          <inkml:channelProperty channel="Y" name="resolution" value="1000" units="1/cm"/>
+          <inkml:channelProperty channel="F" name="resolution" value="0" units="1/dev"/>
+        </inkml:channelProperties>
+      </inkml:inkSource>
+      <inkml:timestamp xml:id="ts0" timeString="2026-01-05T10:45:23.404"/>
+    </inkml:context>
+    <inkml:brush xml:id="br0">
+      <inkml:brushProperty name="width" value="0.1" units="cm"/>
+      <inkml:brushProperty name="height" value="0.1" units="cm"/>
+      <inkml:brushProperty name="color" value="#E71224"/>
+    </inkml:brush>
+  </inkml:definitions>
+  <inkml:trace contextRef="#ctx0" brushRef="#br0">1 0 24575,'0'0'-8191</inkml:trace>
+</inkml:ink>
+</file>
+
+<file path=ppt/ink/ink5.xml><?xml version="1.0" encoding="utf-8"?>
+<inkml:ink xmlns:inkml="http://www.w3.org/2003/InkML">
+  <inkml:definitions>
+    <inkml:context xml:id="ctx0">
+      <inkml:inkSource xml:id="inkSrc0">
+        <inkml:traceFormat>
+          <inkml:channel name="X" type="integer" min="-2.14748E9" max="2.14748E9" units="cm"/>
+          <inkml:channel name="Y" type="integer" min="-2.14748E9" max="2.14748E9" units="cm"/>
+          <inkml:channel name="F" type="integer" max="32767" units="dev"/>
+        </inkml:traceFormat>
+        <inkml:channelProperties>
+          <inkml:channelProperty channel="X" name="resolution" value="1000" units="1/cm"/>
+          <inkml:channelProperty channel="Y" name="resolution" value="1000" units="1/cm"/>
+          <inkml:channelProperty channel="F" name="resolution" value="0" units="1/dev"/>
+        </inkml:channelProperties>
+      </inkml:inkSource>
+      <inkml:timestamp xml:id="ts0" timeString="2026-01-05T10:45:31.245"/>
+    </inkml:context>
+    <inkml:brush xml:id="br0">
+      <inkml:brushProperty name="width" value="0.1" units="cm"/>
+      <inkml:brushProperty name="height" value="0.1" units="cm"/>
+      <inkml:brushProperty name="color" value="#E71224"/>
+    </inkml:brush>
+  </inkml:definitions>
+  <inkml:trace contextRef="#ctx0" brushRef="#br0">122 0 24575,'2'140'0,"-5"145"0,0-260 0,-1 0 0,-2-1 0,0 1 0,-1-1 0,-19 40 0,12-32 0,-17 67 0,16-28-1365,7-44-5461</inkml:trace>
+</inkml:ink>
+</file>
+
+<file path=ppt/ink/ink6.xml><?xml version="1.0" encoding="utf-8"?>
+<inkml:ink xmlns:inkml="http://www.w3.org/2003/InkML">
+  <inkml:definitions>
+    <inkml:context xml:id="ctx0">
+      <inkml:inkSource xml:id="inkSrc0">
+        <inkml:traceFormat>
+          <inkml:channel name="X" type="integer" min="-2.14748E9" max="2.14748E9" units="cm"/>
+          <inkml:channel name="Y" type="integer" min="-2.14748E9" max="2.14748E9" units="cm"/>
+          <inkml:channel name="F" type="integer" max="32767" units="dev"/>
+        </inkml:traceFormat>
+        <inkml:channelProperties>
+          <inkml:channelProperty channel="X" name="resolution" value="1000" units="1/cm"/>
+          <inkml:channelProperty channel="Y" name="resolution" value="1000" units="1/cm"/>
+          <inkml:channelProperty channel="F" name="resolution" value="0" units="1/dev"/>
+        </inkml:channelProperties>
+      </inkml:inkSource>
+      <inkml:timestamp xml:id="ts0" timeString="2026-01-05T10:45:41.447"/>
+    </inkml:context>
+    <inkml:brush xml:id="br0">
+      <inkml:brushProperty name="width" value="0.1" units="cm"/>
+      <inkml:brushProperty name="height" value="0.1" units="cm"/>
+      <inkml:brushProperty name="color" value="#E71224"/>
+    </inkml:brush>
+  </inkml:definitions>
+  <inkml:trace contextRef="#ctx0" brushRef="#br0">3650 0 24575,'-7'1'0,"0"0"0,0 0 0,0 1 0,0 0 0,0 0 0,0 1 0,1 0 0,-1 0 0,1 0 0,0 1 0,-10 8 0,-4 4 0,-35 35 0,48-43 0,0-1 0,0 0 0,-1 0 0,0 0 0,0-1 0,-1 0 0,1 0 0,-1-1 0,-1 0 0,1-1 0,-1 0 0,0-1 0,-16 4 0,-7 0 0,0 0 0,1 2 0,0 1 0,-50 25 0,27 0 0,46-27 0,-1-1 0,0 0 0,0-1 0,-1 0 0,-19 7 0,-16-1 0,-53 7 0,32-7 0,51-8 0,-1 1 0,-16 8 0,-34 9 0,26-14 0,1 1 0,0 2 0,-75 33 0,66-20 0,-49 23 0,66-34 0,13-5 0,0 0 0,-1-2 0,-24 6 0,16-8 0,19-4 0,0 1 0,1 1 0,-1-1 0,0 1 0,1 1 0,0 0 0,-1 0 0,1 0 0,0 1 0,0 0 0,-10 8 0,0 5 0,0-1 0,-1-2 0,0 0 0,-1 0 0,-1-2 0,0-1 0,0 0 0,-1-2 0,-1 0 0,1-2 0,-1 0 0,-1-2 0,-45 6 0,46-8 0,0 1 0,0 1 0,0 1 0,1 1 0,-39 18 0,51-21 0,-13 4 0,0-2 0,0 0 0,-46 4 0,37-5 0,-45 11 0,-7 3 0,-16 4 0,89-19 0,0 0 0,0 0 0,0 1 0,1 1 0,0 0 0,-14 10 0,-139 94 0,83-60 0,57-37 0,-1-1 0,0-2 0,-1 0 0,0-1 0,-34 6 0,-50 19 0,44-16 0,55-17 0,0 1 0,0 1 0,0 0 0,0 0 0,0 1 0,1 0 0,0 0 0,0 1 0,-17 12 0,-81 65 110,71-56-848,-42 38 1,53-39-6089</inkml:trace>
+</inkml:ink>
+</file>
+
+<file path=ppt/ink/ink7.xml><?xml version="1.0" encoding="utf-8"?>
+<inkml:ink xmlns:inkml="http://www.w3.org/2003/InkML">
+  <inkml:definitions>
+    <inkml:context xml:id="ctx0">
+      <inkml:inkSource xml:id="inkSrc0">
+        <inkml:traceFormat>
+          <inkml:channel name="X" type="integer" min="-2.14748E9" max="2.14748E9" units="cm"/>
+          <inkml:channel name="Y" type="integer" min="-2.14748E9" max="2.14748E9" units="cm"/>
+          <inkml:channel name="F" type="integer" max="32767" units="dev"/>
+        </inkml:traceFormat>
+        <inkml:channelProperties>
+          <inkml:channelProperty channel="X" name="resolution" value="1000" units="1/cm"/>
+          <inkml:channelProperty channel="Y" name="resolution" value="1000" units="1/cm"/>
+          <inkml:channelProperty channel="F" name="resolution" value="0" units="1/dev"/>
+        </inkml:channelProperties>
+      </inkml:inkSource>
+      <inkml:timestamp xml:id="ts0" timeString="2026-01-05T10:45:49.462"/>
+    </inkml:context>
+    <inkml:brush xml:id="br0">
+      <inkml:brushProperty name="width" value="0.1" units="cm"/>
+      <inkml:brushProperty name="height" value="0.1" units="cm"/>
+      <inkml:brushProperty name="color" value="#E71224"/>
+    </inkml:brush>
+  </inkml:definitions>
+  <inkml:trace contextRef="#ctx0" brushRef="#br0">1682 5 24575,'12'0'0,"0"1"0,0 1 0,0 0 0,0 0 0,-1 2 0,1-1 0,-1 1 0,16 8 0,-2 1 0,-1 2 0,34 26 0,-32-24 0,38 20 0,-39-24 0,-1 1 0,31 25 0,-45-32 0,-1 1 0,0 0 0,-1 1 0,0 0 0,0 0 0,-1 0 0,0 1 0,0 0 0,-1 1 0,-1 0 0,0-1 0,0 2 0,-1-1 0,5 21 0,1 22 0,-6-30 0,1-1 0,12 36 0,-9-36 0,-2-1 0,0 1 0,-1 0 0,2 47 0,-7 95 0,-2-88 0,2-62 0,0 0 0,-2 0 0,0-1 0,-7 26 0,7-33 0,0 0 0,-1-1 0,0 0 0,0 0 0,0 0 0,-1 0 0,0 0 0,-1-1 0,1 0 0,-1 0 0,0 0 0,-8 7 0,-2 0 0,1 1 0,-18 21 0,19-19 0,-1 0 0,-21 16 0,-98 64 0,102-74 0,-1-1 0,-2-1 0,-42 17 0,58-30 0,0-1 0,0-1 0,0 0 0,0-2 0,-21 1 0,-96-5 0,58 0 0,-969 1 0,1034 1 0,-1 0 0,0-1 0,0-1 0,1 0 0,-1 0 0,1-1 0,-1-1 0,1 0 0,0-1 0,0 0 0,1-1 0,0 0 0,0 0 0,0-2 0,1 1 0,0-1 0,0-1 0,1 0 0,0 0 0,1-1 0,-14-20 0,0-9 0,3-2 0,1 0 0,2-2 0,1 1 0,-15-86 0,23 76 0,3-1 0,2 1 0,6-58 0,-2 9 0,-3 33 0,1-49 0,1 103 0,1-1 0,0 1 0,1 0 0,0-1 0,10-21 0,-11 30 0,1 1 0,0 0 0,0 0 0,1 1 0,-1-1 0,1 1 0,0 0 0,0-1 0,1 2 0,-1-1 0,1 0 0,8-4 0,5-1 0,1 0 0,23-8 0,-10 5 0,155-81 0,-155 77 0,0 1 0,1 3 0,42-12 0,6-2 0,-50 16 0,0 2 0,0 1 0,1 2 0,51-3 0,134 9 0,-91 3 0,143-4-1365,-230 0-5461</inkml:trace>
+</inkml:ink>
+</file>
+
+<file path=ppt/ink/ink8.xml><?xml version="1.0" encoding="utf-8"?>
+<inkml:ink xmlns:inkml="http://www.w3.org/2003/InkML">
+  <inkml:definitions>
+    <inkml:context xml:id="ctx0">
+      <inkml:inkSource xml:id="inkSrc0">
+        <inkml:traceFormat>
+          <inkml:channel name="X" type="integer" min="-2.14748E9" max="2.14748E9" units="cm"/>
+          <inkml:channel name="Y" type="integer" min="-2.14748E9" max="2.14748E9" units="cm"/>
+          <inkml:channel name="F" type="integer" max="32767" units="dev"/>
+        </inkml:traceFormat>
+        <inkml:channelProperties>
+          <inkml:channelProperty channel="X" name="resolution" value="1000" units="1/cm"/>
+          <inkml:channelProperty channel="Y" name="resolution" value="1000" units="1/cm"/>
+          <inkml:channelProperty channel="F" name="resolution" value="0" units="1/dev"/>
+        </inkml:channelProperties>
+      </inkml:inkSource>
+      <inkml:timestamp xml:id="ts0" timeString="2026-01-05T10:46:19.687"/>
+    </inkml:context>
+    <inkml:brush xml:id="br0">
+      <inkml:brushProperty name="width" value="0.1" units="cm"/>
+      <inkml:brushProperty name="height" value="0.1" units="cm"/>
+      <inkml:brushProperty name="color" value="#E71224"/>
+    </inkml:brush>
+  </inkml:definitions>
+  <inkml:trace contextRef="#ctx0" brushRef="#br0">1 0 24575,'0'0'-8191</inkml:trace>
+</inkml:ink>
+</file>
+
 <file path=ppt/notesMasters/notesMaster1.xml><?xml version="1.0" encoding="utf-8"?>
 <p:notesMaster xmlns:a="http://schemas.openxmlformats.org/drawingml/2006/main" xmlns:r="http://schemas.openxmlformats.org/officeDocument/2006/relationships" xmlns:p="http://schemas.openxmlformats.org/presentationml/2006/main">
   <p:cSld>
@@ -1043,7 +1268,7 @@
           <a:p>
             <a:fld id="{44806F1A-BC72-4B4D-B94E-9BE432BE5415}" type="slidenum">
               <a:rPr lang="es-ES" smtClean="0"/>
-              <a:t>2</a:t>
+              <a:t>4</a:t>
             </a:fld>
             <a:endParaRPr lang="es-ES"/>
           </a:p>
@@ -4292,37 +4517,21 @@
             <p:ph type="ctrTitle"/>
           </p:nvPr>
         </p:nvSpPr>
-        <p:spPr/>
+        <p:spPr>
+          <a:xfrm>
+            <a:off x="1524000" y="1504327"/>
+            <a:ext cx="9144000" cy="2387600"/>
+          </a:xfrm>
+        </p:spPr>
         <p:txBody>
           <a:bodyPr/>
           <a:lstStyle/>
           <a:p>
-            <a:endParaRPr lang="es-ES"/>
-          </a:p>
-        </p:txBody>
-      </p:sp>
-      <p:sp>
-        <p:nvSpPr>
-          <p:cNvPr id="3" name="Subtítulo 2">
-            <a:extLst>
-              <a:ext uri="{FF2B5EF4-FFF2-40B4-BE49-F238E27FC236}">
-                <a16:creationId xmlns:a16="http://schemas.microsoft.com/office/drawing/2014/main" id="{E1B75CE3-D0D0-D9DA-4B45-6DDADDB1D0E0}"/>
-              </a:ext>
-            </a:extLst>
-          </p:cNvPr>
-          <p:cNvSpPr>
-            <a:spLocks noGrp="1"/>
-          </p:cNvSpPr>
-          <p:nvPr>
-            <p:ph type="subTitle" idx="1"/>
-          </p:nvPr>
-        </p:nvSpPr>
-        <p:spPr/>
-        <p:txBody>
-          <a:bodyPr/>
-          <a:lstStyle/>
-          <a:p>
-            <a:endParaRPr lang="es-ES"/>
+            <a:r>
+              <a:rPr lang="en-001" dirty="0"/>
+              <a:t>M2 SHOWCASE</a:t>
+            </a:r>
+            <a:endParaRPr lang="es-ES" dirty="0"/>
           </a:p>
         </p:txBody>
       </p:sp>
@@ -4361,6 +4570,233 @@
           <p:cNvPr id="2" name="Title 1">
             <a:extLst>
               <a:ext uri="{FF2B5EF4-FFF2-40B4-BE49-F238E27FC236}">
+                <a16:creationId xmlns:a16="http://schemas.microsoft.com/office/drawing/2014/main" id="{FE991824-B68A-6E46-F513-9ED57B37DC97}"/>
+              </a:ext>
+            </a:extLst>
+          </p:cNvPr>
+          <p:cNvSpPr>
+            <a:spLocks noGrp="1"/>
+          </p:cNvSpPr>
+          <p:nvPr>
+            <p:ph type="title"/>
+          </p:nvPr>
+        </p:nvSpPr>
+        <p:spPr/>
+        <p:txBody>
+          <a:bodyPr/>
+          <a:lstStyle/>
+          <a:p>
+            <a:endParaRPr lang="en-ZM"/>
+          </a:p>
+        </p:txBody>
+      </p:sp>
+      <p:sp>
+        <p:nvSpPr>
+          <p:cNvPr id="3" name="Content Placeholder 2">
+            <a:extLst>
+              <a:ext uri="{FF2B5EF4-FFF2-40B4-BE49-F238E27FC236}">
+                <a16:creationId xmlns:a16="http://schemas.microsoft.com/office/drawing/2014/main" id="{3BA3024D-1C22-0AF7-81C5-D00687464850}"/>
+              </a:ext>
+            </a:extLst>
+          </p:cNvPr>
+          <p:cNvSpPr>
+            <a:spLocks noGrp="1"/>
+          </p:cNvSpPr>
+          <p:nvPr>
+            <p:ph idx="1"/>
+          </p:nvPr>
+        </p:nvSpPr>
+        <p:spPr/>
+        <p:txBody>
+          <a:bodyPr>
+            <a:normAutofit/>
+          </a:bodyPr>
+          <a:lstStyle/>
+          <a:p>
+            <a:pPr marL="0" indent="0">
+              <a:buNone/>
+            </a:pPr>
+            <a:r>
+              <a:rPr lang="en-US" b="1" dirty="0"/>
+              <a:t>2. Testability by Design:</a:t>
+            </a:r>
+          </a:p>
+          <a:p>
+            <a:r>
+              <a:rPr lang="en-US" dirty="0"/>
+              <a:t>Integration Adapter abstracts external systems - can be mocked for unit testing</a:t>
+            </a:r>
+          </a:p>
+          <a:p>
+            <a:r>
+              <a:rPr lang="en-US" dirty="0"/>
+              <a:t>Persistence Adapter abstracts database - enables in-memory testing</a:t>
+            </a:r>
+          </a:p>
+          <a:p>
+            <a:r>
+              <a:rPr lang="en-US" dirty="0"/>
+              <a:t>Each component has clear inputs/outputs suitable for contract testing</a:t>
+            </a:r>
+          </a:p>
+          <a:p>
+            <a:r>
+              <a:rPr lang="en-US" dirty="0"/>
+              <a:t>Dynamic views document interaction flows useful for integration test scenarios</a:t>
+            </a:r>
+          </a:p>
+          <a:p>
+            <a:endParaRPr lang="en-US" dirty="0"/>
+          </a:p>
+          <a:p>
+            <a:endParaRPr lang="en-ZM" dirty="0"/>
+          </a:p>
+        </p:txBody>
+      </p:sp>
+    </p:spTree>
+    <p:extLst>
+      <p:ext uri="{BB962C8B-B14F-4D97-AF65-F5344CB8AC3E}">
+        <p14:creationId xmlns:p14="http://schemas.microsoft.com/office/powerpoint/2010/main" val="1483507386"/>
+      </p:ext>
+    </p:extLst>
+  </p:cSld>
+  <p:clrMapOvr>
+    <a:masterClrMapping/>
+  </p:clrMapOvr>
+</p:sld>
+</file>
+
+<file path=ppt/slides/slide11.xml><?xml version="1.0" encoding="utf-8"?>
+<p:sld xmlns:a="http://schemas.openxmlformats.org/drawingml/2006/main" xmlns:r="http://schemas.openxmlformats.org/officeDocument/2006/relationships" xmlns:p="http://schemas.openxmlformats.org/presentationml/2006/main">
+  <p:cSld>
+    <p:spTree>
+      <p:nvGrpSpPr>
+        <p:cNvPr id="1" name=""/>
+        <p:cNvGrpSpPr/>
+        <p:nvPr/>
+      </p:nvGrpSpPr>
+      <p:grpSpPr>
+        <a:xfrm>
+          <a:off x="0" y="0"/>
+          <a:ext cx="0" cy="0"/>
+          <a:chOff x="0" y="0"/>
+          <a:chExt cx="0" cy="0"/>
+        </a:xfrm>
+      </p:grpSpPr>
+      <p:sp>
+        <p:nvSpPr>
+          <p:cNvPr id="2" name="Title 1">
+            <a:extLst>
+              <a:ext uri="{FF2B5EF4-FFF2-40B4-BE49-F238E27FC236}">
+                <a16:creationId xmlns:a16="http://schemas.microsoft.com/office/drawing/2014/main" id="{A10F5296-7D6A-AC7E-A3EF-4D5B8A2453B4}"/>
+              </a:ext>
+            </a:extLst>
+          </p:cNvPr>
+          <p:cNvSpPr>
+            <a:spLocks noGrp="1"/>
+          </p:cNvSpPr>
+          <p:nvPr>
+            <p:ph type="title"/>
+          </p:nvPr>
+        </p:nvSpPr>
+        <p:spPr/>
+        <p:txBody>
+          <a:bodyPr/>
+          <a:lstStyle/>
+          <a:p>
+            <a:endParaRPr lang="en-ZM"/>
+          </a:p>
+        </p:txBody>
+      </p:sp>
+      <p:sp>
+        <p:nvSpPr>
+          <p:cNvPr id="3" name="Content Placeholder 2">
+            <a:extLst>
+              <a:ext uri="{FF2B5EF4-FFF2-40B4-BE49-F238E27FC236}">
+                <a16:creationId xmlns:a16="http://schemas.microsoft.com/office/drawing/2014/main" id="{2F722D86-143A-E623-FB54-DBD636FE4625}"/>
+              </a:ext>
+            </a:extLst>
+          </p:cNvPr>
+          <p:cNvSpPr>
+            <a:spLocks noGrp="1"/>
+          </p:cNvSpPr>
+          <p:nvPr>
+            <p:ph idx="1"/>
+          </p:nvPr>
+        </p:nvSpPr>
+        <p:spPr/>
+        <p:txBody>
+          <a:bodyPr>
+            <a:normAutofit/>
+          </a:bodyPr>
+          <a:lstStyle/>
+          <a:p>
+            <a:pPr marL="0" indent="0">
+              <a:buNone/>
+            </a:pPr>
+            <a:r>
+              <a:rPr lang="en-US" b="1" dirty="0"/>
+              <a:t>3. Deployment Independence:</a:t>
+            </a:r>
+          </a:p>
+          <a:p>
+            <a:r>
+              <a:rPr lang="en-US" dirty="0"/>
+              <a:t>Web Application (SPA) can be deployed separately from Backend API</a:t>
+            </a:r>
+          </a:p>
+          <a:p>
+            <a:r>
+              <a:rPr lang="en-US" dirty="0"/>
+              <a:t>Component-level separation within API container allows for future microservices extraction</a:t>
+            </a:r>
+          </a:p>
+          <a:p>
+            <a:r>
+              <a:rPr lang="en-US" dirty="0"/>
+              <a:t>Database schema changes can be managed through migration scripts independently</a:t>
+            </a:r>
+          </a:p>
+          <a:p>
+            <a:endParaRPr lang="en-US" dirty="0"/>
+          </a:p>
+        </p:txBody>
+      </p:sp>
+    </p:spTree>
+    <p:extLst>
+      <p:ext uri="{BB962C8B-B14F-4D97-AF65-F5344CB8AC3E}">
+        <p14:creationId xmlns:p14="http://schemas.microsoft.com/office/powerpoint/2010/main" val="334085847"/>
+      </p:ext>
+    </p:extLst>
+  </p:cSld>
+  <p:clrMapOvr>
+    <a:masterClrMapping/>
+  </p:clrMapOvr>
+</p:sld>
+</file>
+
+<file path=ppt/slides/slide12.xml><?xml version="1.0" encoding="utf-8"?>
+<p:sld xmlns:a="http://schemas.openxmlformats.org/drawingml/2006/main" xmlns:r="http://schemas.openxmlformats.org/officeDocument/2006/relationships" xmlns:p="http://schemas.openxmlformats.org/presentationml/2006/main">
+  <p:cSld>
+    <p:spTree>
+      <p:nvGrpSpPr>
+        <p:cNvPr id="1" name=""/>
+        <p:cNvGrpSpPr/>
+        <p:nvPr/>
+      </p:nvGrpSpPr>
+      <p:grpSpPr>
+        <a:xfrm>
+          <a:off x="0" y="0"/>
+          <a:ext cx="0" cy="0"/>
+          <a:chOff x="0" y="0"/>
+          <a:chExt cx="0" cy="0"/>
+        </a:xfrm>
+      </p:grpSpPr>
+      <p:sp>
+        <p:nvSpPr>
+          <p:cNvPr id="2" name="Title 1">
+            <a:extLst>
+              <a:ext uri="{FF2B5EF4-FFF2-40B4-BE49-F238E27FC236}">
                 <a16:creationId xmlns:a16="http://schemas.microsoft.com/office/drawing/2014/main" id="{2CE60735-A537-3771-AF87-49D96D824C5F}"/>
               </a:ext>
             </a:extLst>
@@ -4444,7 +4880,7 @@
 </p:sld>
 </file>
 
-<file path=ppt/slides/slide11.xml><?xml version="1.0" encoding="utf-8"?>
+<file path=ppt/slides/slide13.xml><?xml version="1.0" encoding="utf-8"?>
 <p:sld xmlns:a="http://schemas.openxmlformats.org/drawingml/2006/main" xmlns:r="http://schemas.openxmlformats.org/officeDocument/2006/relationships" xmlns:p="http://schemas.openxmlformats.org/presentationml/2006/main">
   <p:cSld>
     <p:spTree>
@@ -4499,6 +4935,13 @@
               <a:rPr lang="en-US" dirty="0"/>
               <a:t>REQUIREMENT: SECURITY &amp; DATA PRIVACY</a:t>
             </a:r>
+            <a:br>
+              <a:rPr lang="en-001" dirty="0"/>
+            </a:br>
+            <a:r>
+              <a:rPr lang="en-001" sz="2000" dirty="0"/>
+              <a:t>(by Martin)</a:t>
+            </a:r>
             <a:endParaRPr lang="es-ES" dirty="0"/>
           </a:p>
         </p:txBody>
@@ -4571,7 +5014,7 @@
 </p:sld>
 </file>
 
-<file path=ppt/slides/slide12.xml><?xml version="1.0" encoding="utf-8"?>
+<file path=ppt/slides/slide14.xml><?xml version="1.0" encoding="utf-8"?>
 <p:sld xmlns:a="http://schemas.openxmlformats.org/drawingml/2006/main" xmlns:r="http://schemas.openxmlformats.org/officeDocument/2006/relationships" xmlns:p="http://schemas.openxmlformats.org/presentationml/2006/main">
   <p:cSld>
     <p:spTree>
@@ -4675,7 +5118,7 @@
 </p:sld>
 </file>
 
-<file path=ppt/slides/slide13.xml><?xml version="1.0" encoding="utf-8"?>
+<file path=ppt/slides/slide15.xml><?xml version="1.0" encoding="utf-8"?>
 <p:sld xmlns:a="http://schemas.openxmlformats.org/drawingml/2006/main" xmlns:r="http://schemas.openxmlformats.org/officeDocument/2006/relationships" xmlns:p="http://schemas.openxmlformats.org/presentationml/2006/main">
   <p:cSld>
     <p:spTree>
@@ -4771,7 +5214,7 @@
 </p:sld>
 </file>
 
-<file path=ppt/slides/slide14.xml><?xml version="1.0" encoding="utf-8"?>
+<file path=ppt/slides/slide16.xml><?xml version="1.0" encoding="utf-8"?>
 <p:sld xmlns:a="http://schemas.openxmlformats.org/drawingml/2006/main" xmlns:r="http://schemas.openxmlformats.org/officeDocument/2006/relationships" xmlns:p="http://schemas.openxmlformats.org/presentationml/2006/main">
   <p:cSld>
     <p:spTree>
@@ -4806,7 +5249,7 @@
         </p:nvSpPr>
         <p:spPr>
           <a:xfrm>
-            <a:off x="838200" y="371904"/>
+            <a:off x="838200" y="100691"/>
             <a:ext cx="10515600" cy="1325563"/>
           </a:xfrm>
         </p:spPr>
@@ -4818,7 +5261,14 @@
               <a:rPr lang="es-ES" dirty="0"/>
               <a:t>RELIABILITY PROBLEM</a:t>
             </a:r>
-            <a:endParaRPr lang="en-US" dirty="0"/>
+            <a:br>
+              <a:rPr lang="en-001" dirty="0"/>
+            </a:br>
+            <a:r>
+              <a:rPr lang="en-001" sz="2000" dirty="0"/>
+              <a:t>(by Yash)</a:t>
+            </a:r>
+            <a:endParaRPr lang="en-US" sz="2000" dirty="0"/>
           </a:p>
         </p:txBody>
       </p:sp>
@@ -5197,7 +5647,7 @@
 </p:sld>
 </file>
 
-<file path=ppt/slides/slide15.xml><?xml version="1.0" encoding="utf-8"?>
+<file path=ppt/slides/slide17.xml><?xml version="1.0" encoding="utf-8"?>
 <p:sld xmlns:a="http://schemas.openxmlformats.org/drawingml/2006/main" xmlns:r="http://schemas.openxmlformats.org/officeDocument/2006/relationships" xmlns:p="http://schemas.openxmlformats.org/presentationml/2006/main">
   <p:cSld>
     <p:spTree>
@@ -5377,7 +5827,7 @@
 </p:sld>
 </file>
 
-<file path=ppt/slides/slide16.xml><?xml version="1.0" encoding="utf-8"?>
+<file path=ppt/slides/slide18.xml><?xml version="1.0" encoding="utf-8"?>
 <p:sld xmlns:a="http://schemas.openxmlformats.org/drawingml/2006/main" xmlns:r="http://schemas.openxmlformats.org/officeDocument/2006/relationships" xmlns:p="http://schemas.openxmlformats.org/presentationml/2006/main">
   <p:cSld>
     <p:spTree>
@@ -5600,7 +6050,7 @@
 </p:sld>
 </file>
 
-<file path=ppt/slides/slide17.xml><?xml version="1.0" encoding="utf-8"?>
+<file path=ppt/slides/slide19.xml><?xml version="1.0" encoding="utf-8"?>
 <p:sld xmlns:a="http://schemas.openxmlformats.org/drawingml/2006/main" xmlns:r="http://schemas.openxmlformats.org/officeDocument/2006/relationships" xmlns:p="http://schemas.openxmlformats.org/presentationml/2006/main">
   <p:cSld>
     <p:spTree>
@@ -5639,7 +6089,12 @@
             <p:ph type="title"/>
           </p:nvPr>
         </p:nvSpPr>
-        <p:spPr/>
+        <p:spPr>
+          <a:xfrm>
+            <a:off x="838200" y="182945"/>
+            <a:ext cx="10515600" cy="1325563"/>
+          </a:xfrm>
+        </p:spPr>
         <p:txBody>
           <a:bodyPr/>
           <a:lstStyle/>
@@ -5648,6 +6103,14 @@
               <a:rPr lang="en-US" dirty="0"/>
               <a:t>SCALABILITY PROBLEM</a:t>
             </a:r>
+            <a:br>
+              <a:rPr lang="en-001" dirty="0"/>
+            </a:br>
+            <a:r>
+              <a:rPr lang="en-001" sz="2000" dirty="0"/>
+              <a:t>(by Yash)</a:t>
+            </a:r>
+            <a:endParaRPr lang="en-US" dirty="0"/>
           </a:p>
         </p:txBody>
       </p:sp>
@@ -5862,7 +6325,215 @@
 </p:sld>
 </file>
 
-<file path=ppt/slides/slide18.xml><?xml version="1.0" encoding="utf-8"?>
+<file path=ppt/slides/slide2.xml><?xml version="1.0" encoding="utf-8"?>
+<p:sld xmlns:a="http://schemas.openxmlformats.org/drawingml/2006/main" xmlns:r="http://schemas.openxmlformats.org/officeDocument/2006/relationships" xmlns:p="http://schemas.openxmlformats.org/presentationml/2006/main">
+  <p:cSld>
+    <p:spTree>
+      <p:nvGrpSpPr>
+        <p:cNvPr id="1" name="">
+          <a:extLst>
+            <a:ext uri="{FF2B5EF4-FFF2-40B4-BE49-F238E27FC236}">
+              <a16:creationId xmlns:a16="http://schemas.microsoft.com/office/drawing/2014/main" id="{4B94F80A-071C-338C-291F-2AD14EF3B1C7}"/>
+            </a:ext>
+          </a:extLst>
+        </p:cNvPr>
+        <p:cNvGrpSpPr/>
+        <p:nvPr/>
+      </p:nvGrpSpPr>
+      <p:grpSpPr>
+        <a:xfrm>
+          <a:off x="0" y="0"/>
+          <a:ext cx="0" cy="0"/>
+          <a:chOff x="0" y="0"/>
+          <a:chExt cx="0" cy="0"/>
+        </a:xfrm>
+      </p:grpSpPr>
+      <p:sp>
+        <p:nvSpPr>
+          <p:cNvPr id="2" name="Title 1">
+            <a:extLst>
+              <a:ext uri="{FF2B5EF4-FFF2-40B4-BE49-F238E27FC236}">
+                <a16:creationId xmlns:a16="http://schemas.microsoft.com/office/drawing/2014/main" id="{CE747146-4EA1-AA67-17BB-5CA0BD57D447}"/>
+              </a:ext>
+            </a:extLst>
+          </p:cNvPr>
+          <p:cNvSpPr>
+            <a:spLocks noGrp="1"/>
+          </p:cNvSpPr>
+          <p:nvPr>
+            <p:ph type="title"/>
+          </p:nvPr>
+        </p:nvSpPr>
+        <p:spPr>
+          <a:xfrm>
+            <a:off x="433086" y="0"/>
+            <a:ext cx="10515600" cy="1325563"/>
+          </a:xfrm>
+        </p:spPr>
+        <p:txBody>
+          <a:bodyPr/>
+          <a:lstStyle/>
+          <a:p>
+            <a:r>
+              <a:rPr lang="en-001" dirty="0"/>
+              <a:t>SECURITY </a:t>
+            </a:r>
+            <a:r>
+              <a:rPr lang="en-US" dirty="0"/>
+              <a:t>PROBLEM</a:t>
+            </a:r>
+            <a:br>
+              <a:rPr lang="en-001" dirty="0"/>
+            </a:br>
+            <a:r>
+              <a:rPr lang="en-001" sz="2000" dirty="0"/>
+              <a:t>(Valentyn)</a:t>
+            </a:r>
+            <a:endParaRPr lang="en-US" sz="2000" dirty="0"/>
+          </a:p>
+        </p:txBody>
+      </p:sp>
+      <p:sp>
+        <p:nvSpPr>
+          <p:cNvPr id="3" name="Content Placeholder 2">
+            <a:extLst>
+              <a:ext uri="{FF2B5EF4-FFF2-40B4-BE49-F238E27FC236}">
+                <a16:creationId xmlns:a16="http://schemas.microsoft.com/office/drawing/2014/main" id="{3275C814-2661-2F57-ADD4-4A961CB1C671}"/>
+              </a:ext>
+            </a:extLst>
+          </p:cNvPr>
+          <p:cNvSpPr>
+            <a:spLocks noGrp="1"/>
+          </p:cNvSpPr>
+          <p:nvPr>
+            <p:ph idx="1"/>
+          </p:nvPr>
+        </p:nvSpPr>
+        <p:spPr>
+          <a:xfrm>
+            <a:off x="6095999" y="196057"/>
+            <a:ext cx="5822092" cy="4916574"/>
+          </a:xfrm>
+        </p:spPr>
+        <p:txBody>
+          <a:bodyPr>
+            <a:normAutofit/>
+          </a:bodyPr>
+          <a:lstStyle/>
+          <a:p>
+            <a:pPr marL="0" indent="0">
+              <a:buNone/>
+            </a:pPr>
+            <a:r>
+              <a:rPr lang="en-US" sz="2400" dirty="0"/>
+              <a:t>An attacker</a:t>
+            </a:r>
+            <a:r>
+              <a:rPr lang="en-001" sz="2400" dirty="0"/>
+              <a:t> tries to modify the grades by</a:t>
+            </a:r>
+            <a:r>
+              <a:rPr lang="en-US" sz="2400" dirty="0"/>
+              <a:t> </a:t>
+            </a:r>
+            <a:r>
+              <a:rPr lang="en-001" sz="2400" dirty="0"/>
+              <a:t>sending </a:t>
+            </a:r>
+            <a:r>
+              <a:rPr lang="en-US" sz="2400" dirty="0"/>
+              <a:t>a grade edit request to Grading Management component.</a:t>
+            </a:r>
+            <a:endParaRPr lang="en-001" sz="2400" dirty="0"/>
+          </a:p>
+          <a:p>
+            <a:pPr marL="0" indent="0">
+              <a:buNone/>
+            </a:pPr>
+            <a:endParaRPr lang="en-001" sz="2400" dirty="0"/>
+          </a:p>
+          <a:p>
+            <a:pPr marL="0" indent="0">
+              <a:buNone/>
+            </a:pPr>
+            <a:r>
+              <a:rPr lang="en-001" sz="3200" dirty="0"/>
+              <a:t>Solution:</a:t>
+            </a:r>
+            <a:endParaRPr lang="en-001" sz="2400" dirty="0"/>
+          </a:p>
+          <a:p>
+            <a:pPr marL="0" indent="0">
+              <a:buNone/>
+            </a:pPr>
+            <a:r>
+              <a:rPr lang="en-US" sz="2400" dirty="0"/>
+              <a:t>The request is detected, an attacker is not recognized as a teacher, notification is sent.</a:t>
+            </a:r>
+            <a:endParaRPr lang="en-001" sz="2400" dirty="0"/>
+          </a:p>
+          <a:p>
+            <a:pPr marL="0" indent="0">
+              <a:buNone/>
+            </a:pPr>
+            <a:endParaRPr lang="en-001" sz="2400" dirty="0"/>
+          </a:p>
+          <a:p>
+            <a:pPr marL="0" indent="0">
+              <a:buNone/>
+            </a:pPr>
+            <a:r>
+              <a:rPr lang="en-US" sz="2400" dirty="0"/>
+              <a:t>No architecture modification is needed because a notification is just being sent.</a:t>
+            </a:r>
+            <a:endParaRPr lang="en-001" sz="2400" dirty="0"/>
+          </a:p>
+        </p:txBody>
+      </p:sp>
+      <p:pic>
+        <p:nvPicPr>
+          <p:cNvPr id="13" name="Picture 12">
+            <a:extLst>
+              <a:ext uri="{FF2B5EF4-FFF2-40B4-BE49-F238E27FC236}">
+                <a16:creationId xmlns:a16="http://schemas.microsoft.com/office/drawing/2014/main" id="{11C8A0D1-575D-4D21-5CD4-9B1DD20D63DA}"/>
+              </a:ext>
+            </a:extLst>
+          </p:cNvPr>
+          <p:cNvPicPr>
+            <a:picLocks noChangeAspect="1"/>
+          </p:cNvPicPr>
+          <p:nvPr/>
+        </p:nvPicPr>
+        <p:blipFill>
+          <a:blip r:embed="rId2"/>
+          <a:stretch>
+            <a:fillRect/>
+          </a:stretch>
+        </p:blipFill>
+        <p:spPr>
+          <a:xfrm>
+            <a:off x="527860" y="5080572"/>
+            <a:ext cx="11136279" cy="1581371"/>
+          </a:xfrm>
+          <a:prstGeom prst="rect">
+            <a:avLst/>
+          </a:prstGeom>
+        </p:spPr>
+      </p:pic>
+    </p:spTree>
+    <p:extLst>
+      <p:ext uri="{BB962C8B-B14F-4D97-AF65-F5344CB8AC3E}">
+        <p14:creationId xmlns:p14="http://schemas.microsoft.com/office/powerpoint/2010/main" val="976070164"/>
+      </p:ext>
+    </p:extLst>
+  </p:cSld>
+  <p:clrMapOvr>
+    <a:masterClrMapping/>
+  </p:clrMapOvr>
+</p:sld>
+</file>
+
+<file path=ppt/slides/slide20.xml><?xml version="1.0" encoding="utf-8"?>
 <p:sld xmlns:a="http://schemas.openxmlformats.org/drawingml/2006/main" xmlns:r="http://schemas.openxmlformats.org/officeDocument/2006/relationships" xmlns:p="http://schemas.openxmlformats.org/presentationml/2006/main">
   <p:cSld>
     <p:spTree>
@@ -6156,18 +6827,12 @@
 </p:sld>
 </file>
 
-<file path=ppt/slides/slide19.xml><?xml version="1.0" encoding="utf-8"?>
+<file path=ppt/slides/slide3.xml><?xml version="1.0" encoding="utf-8"?>
 <p:sld xmlns:a="http://schemas.openxmlformats.org/drawingml/2006/main" xmlns:r="http://schemas.openxmlformats.org/officeDocument/2006/relationships" xmlns:p="http://schemas.openxmlformats.org/presentationml/2006/main">
   <p:cSld>
     <p:spTree>
       <p:nvGrpSpPr>
-        <p:cNvPr id="1" name="">
-          <a:extLst>
-            <a:ext uri="{FF2B5EF4-FFF2-40B4-BE49-F238E27FC236}">
-              <a16:creationId xmlns:a16="http://schemas.microsoft.com/office/drawing/2014/main" id="{4B94F80A-071C-338C-291F-2AD14EF3B1C7}"/>
-            </a:ext>
-          </a:extLst>
-        </p:cNvPr>
+        <p:cNvPr id="1" name=""/>
         <p:cNvGrpSpPr/>
         <p:nvPr/>
       </p:nvGrpSpPr>
@@ -6184,7 +6849,7 @@
           <p:cNvPr id="2" name="Title 1">
             <a:extLst>
               <a:ext uri="{FF2B5EF4-FFF2-40B4-BE49-F238E27FC236}">
-                <a16:creationId xmlns:a16="http://schemas.microsoft.com/office/drawing/2014/main" id="{CE747146-4EA1-AA67-17BB-5CA0BD57D447}"/>
+                <a16:creationId xmlns:a16="http://schemas.microsoft.com/office/drawing/2014/main" id="{4BFF0CC7-8071-6FF2-1A2D-CA044F5ECA70}"/>
               </a:ext>
             </a:extLst>
           </p:cNvPr>
@@ -6200,14 +6865,7 @@
           <a:bodyPr/>
           <a:lstStyle/>
           <a:p>
-            <a:r>
-              <a:rPr lang="en-001" dirty="0"/>
-              <a:t>SECURITY </a:t>
-            </a:r>
-            <a:r>
-              <a:rPr lang="en-US" dirty="0"/>
-              <a:t>PROBLEM</a:t>
-            </a:r>
+            <a:endParaRPr lang="en-001"/>
           </a:p>
         </p:txBody>
       </p:sp>
@@ -6216,7 +6874,7 @@
           <p:cNvPr id="3" name="Content Placeholder 2">
             <a:extLst>
               <a:ext uri="{FF2B5EF4-FFF2-40B4-BE49-F238E27FC236}">
-                <a16:creationId xmlns:a16="http://schemas.microsoft.com/office/drawing/2014/main" id="{3275C814-2661-2F57-ADD4-4A961CB1C671}"/>
+                <a16:creationId xmlns:a16="http://schemas.microsoft.com/office/drawing/2014/main" id="{FE003C02-2DC2-7A9E-2EAD-351C47E7D582}"/>
               </a:ext>
             </a:extLst>
           </p:cNvPr>
@@ -6227,85 +6885,457 @@
             <p:ph idx="1"/>
           </p:nvPr>
         </p:nvSpPr>
+        <p:spPr/>
+        <p:txBody>
+          <a:bodyPr/>
+          <a:lstStyle/>
+          <a:p>
+            <a:endParaRPr lang="en-001"/>
+          </a:p>
+        </p:txBody>
+      </p:sp>
+      <p:pic>
+        <p:nvPicPr>
+          <p:cNvPr id="5" name="Picture 4">
+            <a:extLst>
+              <a:ext uri="{FF2B5EF4-FFF2-40B4-BE49-F238E27FC236}">
+                <a16:creationId xmlns:a16="http://schemas.microsoft.com/office/drawing/2014/main" id="{2C1C7190-0ED2-522C-BBC2-E294EDC171D9}"/>
+              </a:ext>
+            </a:extLst>
+          </p:cNvPr>
+          <p:cNvPicPr>
+            <a:picLocks noChangeAspect="1"/>
+          </p:cNvPicPr>
+          <p:nvPr/>
+        </p:nvPicPr>
+        <p:blipFill>
+          <a:blip r:embed="rId2"/>
+          <a:stretch>
+            <a:fillRect/>
+          </a:stretch>
+        </p:blipFill>
         <p:spPr>
           <a:xfrm>
-            <a:off x="838200" y="1576301"/>
-            <a:ext cx="5822092" cy="4916574"/>
+            <a:off x="0" y="0"/>
+            <a:ext cx="12192000" cy="6857999"/>
           </a:xfrm>
+          <a:prstGeom prst="rect">
+            <a:avLst/>
+          </a:prstGeom>
         </p:spPr>
-        <p:txBody>
-          <a:bodyPr>
-            <a:normAutofit lnSpcReduction="10000"/>
-          </a:bodyPr>
-          <a:lstStyle/>
-          <a:p>
-            <a:pPr marL="0" indent="0">
-              <a:buNone/>
-            </a:pPr>
-            <a:r>
-              <a:rPr lang="en-US" sz="2400" dirty="0"/>
-              <a:t>An attacker sends a grade edit request to Grading Management component.</a:t>
-            </a:r>
-            <a:endParaRPr lang="en-001" sz="2400" dirty="0"/>
-          </a:p>
-          <a:p>
-            <a:pPr marL="0" indent="0">
-              <a:buNone/>
-            </a:pPr>
-            <a:endParaRPr lang="en-001" sz="2400" dirty="0"/>
-          </a:p>
-          <a:p>
-            <a:pPr marL="0" indent="0">
-              <a:buNone/>
-            </a:pPr>
-            <a:r>
-              <a:rPr lang="en-001" sz="3200" dirty="0"/>
-              <a:t>Solution:</a:t>
-            </a:r>
-          </a:p>
-          <a:p>
-            <a:pPr marL="0" indent="0">
-              <a:buNone/>
-            </a:pPr>
-            <a:endParaRPr lang="en-001" sz="2400" dirty="0"/>
-          </a:p>
-          <a:p>
-            <a:pPr marL="0" indent="0">
-              <a:buNone/>
-            </a:pPr>
-            <a:r>
-              <a:rPr lang="en-US" sz="2400" dirty="0"/>
-              <a:t>The request is detected, an attacker is not recognized as a teacher, notification is sent (or the grades data is restored).</a:t>
-            </a:r>
-            <a:endParaRPr lang="en-001" sz="2400" dirty="0"/>
-          </a:p>
-          <a:p>
-            <a:pPr marL="0" indent="0">
-              <a:buNone/>
-            </a:pPr>
-            <a:endParaRPr lang="en-001" sz="2400" dirty="0"/>
-          </a:p>
-          <a:p>
-            <a:pPr marL="0" indent="0">
-              <a:buNone/>
-            </a:pPr>
-            <a:endParaRPr lang="en-001" sz="2400" dirty="0"/>
-          </a:p>
-          <a:p>
-            <a:pPr marL="0" indent="0">
-              <a:buNone/>
-            </a:pPr>
-            <a:r>
-              <a:rPr lang="en-001" sz="2400" dirty="0"/>
-              <a:t>The current architecture does not require an update.</a:t>
-            </a:r>
-          </a:p>
-        </p:txBody>
-      </p:sp>
+      </p:pic>
+      <mc:AlternateContent xmlns:mc="http://schemas.openxmlformats.org/markup-compatibility/2006">
+        <mc:Choice xmlns:p14="http://schemas.microsoft.com/office/powerpoint/2010/main" Requires="p14">
+          <p:contentPart p14:bwMode="auto" r:id="rId3">
+            <p14:nvContentPartPr>
+              <p14:cNvPr id="7" name="Ink 6">
+                <a:extLst>
+                  <a:ext uri="{FF2B5EF4-FFF2-40B4-BE49-F238E27FC236}">
+                    <a16:creationId xmlns:a16="http://schemas.microsoft.com/office/drawing/2014/main" id="{9DB232F3-C777-45C4-5D8A-F214BA04B058}"/>
+                  </a:ext>
+                </a:extLst>
+              </p14:cNvPr>
+              <p14:cNvContentPartPr/>
+              <p14:nvPr/>
+            </p14:nvContentPartPr>
+            <p14:xfrm>
+              <a:off x="6487100" y="2558045"/>
+              <a:ext cx="1588320" cy="1032840"/>
+            </p14:xfrm>
+          </p:contentPart>
+        </mc:Choice>
+        <mc:Fallback>
+          <p:pic>
+            <p:nvPicPr>
+              <p:cNvPr id="7" name="Ink 6">
+                <a:extLst>
+                  <a:ext uri="{FF2B5EF4-FFF2-40B4-BE49-F238E27FC236}">
+                    <a16:creationId xmlns:a16="http://schemas.microsoft.com/office/drawing/2014/main" id="{9DB232F3-C777-45C4-5D8A-F214BA04B058}"/>
+                  </a:ext>
+                </a:extLst>
+              </p:cNvPr>
+              <p:cNvPicPr/>
+              <p:nvPr/>
+            </p:nvPicPr>
+            <p:blipFill>
+              <a:blip r:embed="rId4"/>
+              <a:stretch>
+                <a:fillRect/>
+              </a:stretch>
+            </p:blipFill>
+            <p:spPr>
+              <a:xfrm>
+                <a:off x="6469460" y="2540045"/>
+                <a:ext cx="1623960" cy="1068480"/>
+              </a:xfrm>
+              <a:prstGeom prst="rect">
+                <a:avLst/>
+              </a:prstGeom>
+            </p:spPr>
+          </p:pic>
+        </mc:Fallback>
+      </mc:AlternateContent>
+      <mc:AlternateContent xmlns:mc="http://schemas.openxmlformats.org/markup-compatibility/2006">
+        <mc:Choice xmlns:p14="http://schemas.microsoft.com/office/powerpoint/2010/main" Requires="p14">
+          <p:contentPart p14:bwMode="auto" r:id="rId5">
+            <p14:nvContentPartPr>
+              <p14:cNvPr id="9" name="Ink 8">
+                <a:extLst>
+                  <a:ext uri="{FF2B5EF4-FFF2-40B4-BE49-F238E27FC236}">
+                    <a16:creationId xmlns:a16="http://schemas.microsoft.com/office/drawing/2014/main" id="{9D43A3EB-A922-141D-A4B8-B0FBE552064C}"/>
+                  </a:ext>
+                </a:extLst>
+              </p14:cNvPr>
+              <p14:cNvContentPartPr/>
+              <p14:nvPr/>
+            </p14:nvContentPartPr>
+            <p14:xfrm>
+              <a:off x="4016420" y="4522925"/>
+              <a:ext cx="1490760" cy="935280"/>
+            </p14:xfrm>
+          </p:contentPart>
+        </mc:Choice>
+        <mc:Fallback>
+          <p:pic>
+            <p:nvPicPr>
+              <p:cNvPr id="9" name="Ink 8">
+                <a:extLst>
+                  <a:ext uri="{FF2B5EF4-FFF2-40B4-BE49-F238E27FC236}">
+                    <a16:creationId xmlns:a16="http://schemas.microsoft.com/office/drawing/2014/main" id="{9D43A3EB-A922-141D-A4B8-B0FBE552064C}"/>
+                  </a:ext>
+                </a:extLst>
+              </p:cNvPr>
+              <p:cNvPicPr/>
+              <p:nvPr/>
+            </p:nvPicPr>
+            <p:blipFill>
+              <a:blip r:embed="rId6"/>
+              <a:stretch>
+                <a:fillRect/>
+              </a:stretch>
+            </p:blipFill>
+            <p:spPr>
+              <a:xfrm>
+                <a:off x="3998780" y="4504925"/>
+                <a:ext cx="1526400" cy="970920"/>
+              </a:xfrm>
+              <a:prstGeom prst="rect">
+                <a:avLst/>
+              </a:prstGeom>
+            </p:spPr>
+          </p:pic>
+        </mc:Fallback>
+      </mc:AlternateContent>
+      <mc:AlternateContent xmlns:mc="http://schemas.openxmlformats.org/markup-compatibility/2006">
+        <mc:Choice xmlns:p14="http://schemas.microsoft.com/office/powerpoint/2010/main" Requires="p14">
+          <p:contentPart p14:bwMode="auto" r:id="rId7">
+            <p14:nvContentPartPr>
+              <p14:cNvPr id="13" name="Ink 12">
+                <a:extLst>
+                  <a:ext uri="{FF2B5EF4-FFF2-40B4-BE49-F238E27FC236}">
+                    <a16:creationId xmlns:a16="http://schemas.microsoft.com/office/drawing/2014/main" id="{8E755EB7-AAA1-0B7C-3273-5A659ECD1E27}"/>
+                  </a:ext>
+                </a:extLst>
+              </p14:cNvPr>
+              <p14:cNvContentPartPr/>
+              <p14:nvPr/>
+            </p14:nvContentPartPr>
+            <p14:xfrm>
+              <a:off x="4016780" y="4542725"/>
+              <a:ext cx="360" cy="50760"/>
+            </p14:xfrm>
+          </p:contentPart>
+        </mc:Choice>
+        <mc:Fallback>
+          <p:pic>
+            <p:nvPicPr>
+              <p:cNvPr id="13" name="Ink 12">
+                <a:extLst>
+                  <a:ext uri="{FF2B5EF4-FFF2-40B4-BE49-F238E27FC236}">
+                    <a16:creationId xmlns:a16="http://schemas.microsoft.com/office/drawing/2014/main" id="{8E755EB7-AAA1-0B7C-3273-5A659ECD1E27}"/>
+                  </a:ext>
+                </a:extLst>
+              </p:cNvPr>
+              <p:cNvPicPr/>
+              <p:nvPr/>
+            </p:nvPicPr>
+            <p:blipFill>
+              <a:blip r:embed="rId8"/>
+              <a:stretch>
+                <a:fillRect/>
+              </a:stretch>
+            </p:blipFill>
+            <p:spPr>
+              <a:xfrm>
+                <a:off x="3999140" y="4524725"/>
+                <a:ext cx="36000" cy="86400"/>
+              </a:xfrm>
+              <a:prstGeom prst="rect">
+                <a:avLst/>
+              </a:prstGeom>
+            </p:spPr>
+          </p:pic>
+        </mc:Fallback>
+      </mc:AlternateContent>
+      <mc:AlternateContent xmlns:mc="http://schemas.openxmlformats.org/markup-compatibility/2006">
+        <mc:Choice xmlns:p14="http://schemas.microsoft.com/office/powerpoint/2010/main" Requires="p14">
+          <p:contentPart p14:bwMode="auto" r:id="rId9">
+            <p14:nvContentPartPr>
+              <p14:cNvPr id="14" name="Ink 13">
+                <a:extLst>
+                  <a:ext uri="{FF2B5EF4-FFF2-40B4-BE49-F238E27FC236}">
+                    <a16:creationId xmlns:a16="http://schemas.microsoft.com/office/drawing/2014/main" id="{2C9D63BF-D432-F027-A00F-ADBD55BE6D1B}"/>
+                  </a:ext>
+                </a:extLst>
+              </p14:cNvPr>
+              <p14:cNvContentPartPr/>
+              <p14:nvPr/>
+            </p14:nvContentPartPr>
+            <p14:xfrm>
+              <a:off x="6595100" y="2607005"/>
+              <a:ext cx="360" cy="360"/>
+            </p14:xfrm>
+          </p:contentPart>
+        </mc:Choice>
+        <mc:Fallback>
+          <p:pic>
+            <p:nvPicPr>
+              <p:cNvPr id="14" name="Ink 13">
+                <a:extLst>
+                  <a:ext uri="{FF2B5EF4-FFF2-40B4-BE49-F238E27FC236}">
+                    <a16:creationId xmlns:a16="http://schemas.microsoft.com/office/drawing/2014/main" id="{2C9D63BF-D432-F027-A00F-ADBD55BE6D1B}"/>
+                  </a:ext>
+                </a:extLst>
+              </p:cNvPr>
+              <p:cNvPicPr/>
+              <p:nvPr/>
+            </p:nvPicPr>
+            <p:blipFill>
+              <a:blip r:embed="rId10"/>
+              <a:stretch>
+                <a:fillRect/>
+              </a:stretch>
+            </p:blipFill>
+            <p:spPr>
+              <a:xfrm>
+                <a:off x="6577460" y="2589005"/>
+                <a:ext cx="36000" cy="36000"/>
+              </a:xfrm>
+              <a:prstGeom prst="rect">
+                <a:avLst/>
+              </a:prstGeom>
+            </p:spPr>
+          </p:pic>
+        </mc:Fallback>
+      </mc:AlternateContent>
+      <mc:AlternateContent xmlns:mc="http://schemas.openxmlformats.org/markup-compatibility/2006">
+        <mc:Choice xmlns:p14="http://schemas.microsoft.com/office/powerpoint/2010/main" Requires="p14">
+          <p:contentPart p14:bwMode="auto" r:id="rId11">
+            <p14:nvContentPartPr>
+              <p14:cNvPr id="16" name="Ink 15">
+                <a:extLst>
+                  <a:ext uri="{FF2B5EF4-FFF2-40B4-BE49-F238E27FC236}">
+                    <a16:creationId xmlns:a16="http://schemas.microsoft.com/office/drawing/2014/main" id="{FFA2B420-EF32-C3F2-52A5-60C1C5F77F45}"/>
+                  </a:ext>
+                </a:extLst>
+              </p14:cNvPr>
+              <p14:cNvContentPartPr/>
+              <p14:nvPr/>
+            </p14:nvContentPartPr>
+            <p14:xfrm>
+              <a:off x="7193420" y="3569645"/>
+              <a:ext cx="44640" cy="302760"/>
+            </p14:xfrm>
+          </p:contentPart>
+        </mc:Choice>
+        <mc:Fallback>
+          <p:pic>
+            <p:nvPicPr>
+              <p:cNvPr id="16" name="Ink 15">
+                <a:extLst>
+                  <a:ext uri="{FF2B5EF4-FFF2-40B4-BE49-F238E27FC236}">
+                    <a16:creationId xmlns:a16="http://schemas.microsoft.com/office/drawing/2014/main" id="{FFA2B420-EF32-C3F2-52A5-60C1C5F77F45}"/>
+                  </a:ext>
+                </a:extLst>
+              </p:cNvPr>
+              <p:cNvPicPr/>
+              <p:nvPr/>
+            </p:nvPicPr>
+            <p:blipFill>
+              <a:blip r:embed="rId12"/>
+              <a:stretch>
+                <a:fillRect/>
+              </a:stretch>
+            </p:blipFill>
+            <p:spPr>
+              <a:xfrm>
+                <a:off x="7175780" y="3551645"/>
+                <a:ext cx="80280" cy="338400"/>
+              </a:xfrm>
+              <a:prstGeom prst="rect">
+                <a:avLst/>
+              </a:prstGeom>
+            </p:spPr>
+          </p:pic>
+        </mc:Fallback>
+      </mc:AlternateContent>
+      <mc:AlternateContent xmlns:mc="http://schemas.openxmlformats.org/markup-compatibility/2006">
+        <mc:Choice xmlns:p14="http://schemas.microsoft.com/office/powerpoint/2010/main" Requires="p14">
+          <p:contentPart p14:bwMode="auto" r:id="rId13">
+            <p14:nvContentPartPr>
+              <p14:cNvPr id="19" name="Ink 18">
+                <a:extLst>
+                  <a:ext uri="{FF2B5EF4-FFF2-40B4-BE49-F238E27FC236}">
+                    <a16:creationId xmlns:a16="http://schemas.microsoft.com/office/drawing/2014/main" id="{F9503393-C4AD-77D7-8EC0-AE3FC8C827D2}"/>
+                  </a:ext>
+                </a:extLst>
+              </p14:cNvPr>
+              <p14:cNvContentPartPr/>
+              <p14:nvPr/>
+            </p14:nvContentPartPr>
+            <p14:xfrm>
+              <a:off x="5534180" y="4114325"/>
+              <a:ext cx="1314000" cy="550080"/>
+            </p14:xfrm>
+          </p:contentPart>
+        </mc:Choice>
+        <mc:Fallback>
+          <p:pic>
+            <p:nvPicPr>
+              <p:cNvPr id="19" name="Ink 18">
+                <a:extLst>
+                  <a:ext uri="{FF2B5EF4-FFF2-40B4-BE49-F238E27FC236}">
+                    <a16:creationId xmlns:a16="http://schemas.microsoft.com/office/drawing/2014/main" id="{F9503393-C4AD-77D7-8EC0-AE3FC8C827D2}"/>
+                  </a:ext>
+                </a:extLst>
+              </p:cNvPr>
+              <p:cNvPicPr/>
+              <p:nvPr/>
+            </p:nvPicPr>
+            <p:blipFill>
+              <a:blip r:embed="rId14"/>
+              <a:stretch>
+                <a:fillRect/>
+              </a:stretch>
+            </p:blipFill>
+            <p:spPr>
+              <a:xfrm>
+                <a:off x="5516540" y="4096325"/>
+                <a:ext cx="1349640" cy="585720"/>
+              </a:xfrm>
+              <a:prstGeom prst="rect">
+                <a:avLst/>
+              </a:prstGeom>
+            </p:spPr>
+          </p:pic>
+        </mc:Fallback>
+      </mc:AlternateContent>
+      <mc:AlternateContent xmlns:mc="http://schemas.openxmlformats.org/markup-compatibility/2006">
+        <mc:Choice xmlns:p14="http://schemas.microsoft.com/office/powerpoint/2010/main" Requires="p14">
+          <p:contentPart p14:bwMode="auto" r:id="rId15">
+            <p14:nvContentPartPr>
+              <p14:cNvPr id="20" name="Ink 19">
+                <a:extLst>
+                  <a:ext uri="{FF2B5EF4-FFF2-40B4-BE49-F238E27FC236}">
+                    <a16:creationId xmlns:a16="http://schemas.microsoft.com/office/drawing/2014/main" id="{26D9AF15-2338-013C-C94F-A998DA4DFF6C}"/>
+                  </a:ext>
+                </a:extLst>
+              </p14:cNvPr>
+              <p14:cNvContentPartPr/>
+              <p14:nvPr/>
+            </p14:nvContentPartPr>
+            <p14:xfrm>
+              <a:off x="6660980" y="3752885"/>
+              <a:ext cx="820800" cy="529200"/>
+            </p14:xfrm>
+          </p:contentPart>
+        </mc:Choice>
+        <mc:Fallback>
+          <p:pic>
+            <p:nvPicPr>
+              <p:cNvPr id="20" name="Ink 19">
+                <a:extLst>
+                  <a:ext uri="{FF2B5EF4-FFF2-40B4-BE49-F238E27FC236}">
+                    <a16:creationId xmlns:a16="http://schemas.microsoft.com/office/drawing/2014/main" id="{26D9AF15-2338-013C-C94F-A998DA4DFF6C}"/>
+                  </a:ext>
+                </a:extLst>
+              </p:cNvPr>
+              <p:cNvPicPr/>
+              <p:nvPr/>
+            </p:nvPicPr>
+            <p:blipFill>
+              <a:blip r:embed="rId16"/>
+              <a:stretch>
+                <a:fillRect/>
+              </a:stretch>
+            </p:blipFill>
+            <p:spPr>
+              <a:xfrm>
+                <a:off x="6642980" y="3734885"/>
+                <a:ext cx="856440" cy="564840"/>
+              </a:xfrm>
+              <a:prstGeom prst="rect">
+                <a:avLst/>
+              </a:prstGeom>
+            </p:spPr>
+          </p:pic>
+        </mc:Fallback>
+      </mc:AlternateContent>
+      <mc:AlternateContent xmlns:mc="http://schemas.openxmlformats.org/markup-compatibility/2006">
+        <mc:Choice xmlns:p14="http://schemas.microsoft.com/office/powerpoint/2010/main" Requires="p14">
+          <p:contentPart p14:bwMode="auto" r:id="rId17">
+            <p14:nvContentPartPr>
+              <p14:cNvPr id="21" name="Ink 20">
+                <a:extLst>
+                  <a:ext uri="{FF2B5EF4-FFF2-40B4-BE49-F238E27FC236}">
+                    <a16:creationId xmlns:a16="http://schemas.microsoft.com/office/drawing/2014/main" id="{24294F88-D4EB-4A6C-9872-98481925EDE7}"/>
+                  </a:ext>
+                </a:extLst>
+              </p14:cNvPr>
+              <p14:cNvContentPartPr/>
+              <p14:nvPr/>
+            </p14:nvContentPartPr>
+            <p14:xfrm>
+              <a:off x="13073660" y="3200285"/>
+              <a:ext cx="360" cy="360"/>
+            </p14:xfrm>
+          </p:contentPart>
+        </mc:Choice>
+        <mc:Fallback>
+          <p:pic>
+            <p:nvPicPr>
+              <p:cNvPr id="21" name="Ink 20">
+                <a:extLst>
+                  <a:ext uri="{FF2B5EF4-FFF2-40B4-BE49-F238E27FC236}">
+                    <a16:creationId xmlns:a16="http://schemas.microsoft.com/office/drawing/2014/main" id="{24294F88-D4EB-4A6C-9872-98481925EDE7}"/>
+                  </a:ext>
+                </a:extLst>
+              </p:cNvPr>
+              <p:cNvPicPr/>
+              <p:nvPr/>
+            </p:nvPicPr>
+            <p:blipFill>
+              <a:blip r:embed="rId10"/>
+              <a:stretch>
+                <a:fillRect/>
+              </a:stretch>
+            </p:blipFill>
+            <p:spPr>
+              <a:xfrm>
+                <a:off x="13056020" y="3182285"/>
+                <a:ext cx="36000" cy="36000"/>
+              </a:xfrm>
+              <a:prstGeom prst="rect">
+                <a:avLst/>
+              </a:prstGeom>
+            </p:spPr>
+          </p:pic>
+        </mc:Fallback>
+      </mc:AlternateContent>
     </p:spTree>
     <p:extLst>
       <p:ext uri="{BB962C8B-B14F-4D97-AF65-F5344CB8AC3E}">
-        <p14:creationId xmlns:p14="http://schemas.microsoft.com/office/powerpoint/2010/main" val="976070164"/>
+        <p14:creationId xmlns:p14="http://schemas.microsoft.com/office/powerpoint/2010/main" val="3801917038"/>
       </p:ext>
     </p:extLst>
   </p:cSld>
@@ -6315,7 +7345,7 @@
 </p:sld>
 </file>
 
-<file path=ppt/slides/slide2.xml><?xml version="1.0" encoding="utf-8"?>
+<file path=ppt/slides/slide4.xml><?xml version="1.0" encoding="utf-8"?>
 <p:sld xmlns:a="http://schemas.openxmlformats.org/drawingml/2006/main" xmlns:r="http://schemas.openxmlformats.org/officeDocument/2006/relationships" xmlns:p="http://schemas.openxmlformats.org/presentationml/2006/main">
   <p:cSld>
     <p:bg>
@@ -6430,14 +7460,22 @@
         </p:spPr>
         <p:txBody>
           <a:bodyPr anchor="b">
-            <a:normAutofit/>
+            <a:normAutofit fontScale="90000"/>
           </a:bodyPr>
           <a:lstStyle/>
           <a:p>
             <a:r>
-              <a:rPr lang="es-ES" sz="5400"/>
+              <a:rPr lang="es-ES" sz="5400" dirty="0"/>
               <a:t>AVALABILITY PROBLEM: ISSUE</a:t>
             </a:r>
+            <a:br>
+              <a:rPr lang="en-001" sz="5400" dirty="0"/>
+            </a:br>
+            <a:r>
+              <a:rPr lang="en-001" sz="2000" dirty="0"/>
+              <a:t>(by Iker)</a:t>
+            </a:r>
+            <a:endParaRPr lang="es-ES" sz="5400" dirty="0"/>
           </a:p>
         </p:txBody>
       </p:sp>
@@ -6965,7 +8003,7 @@
 </p:sld>
 </file>
 
-<file path=ppt/slides/slide3.xml><?xml version="1.0" encoding="utf-8"?>
+<file path=ppt/slides/slide5.xml><?xml version="1.0" encoding="utf-8"?>
 <p:sld xmlns:a="http://schemas.openxmlformats.org/drawingml/2006/main" xmlns:r="http://schemas.openxmlformats.org/officeDocument/2006/relationships" xmlns:p="http://schemas.openxmlformats.org/presentationml/2006/main">
   <p:cSld>
     <p:bg>
@@ -7464,7 +8502,7 @@
 </p:sld>
 </file>
 
-<file path=ppt/slides/slide4.xml><?xml version="1.0" encoding="utf-8"?>
+<file path=ppt/slides/slide6.xml><?xml version="1.0" encoding="utf-8"?>
 <p:sld xmlns:a="http://schemas.openxmlformats.org/drawingml/2006/main" xmlns:r="http://schemas.openxmlformats.org/officeDocument/2006/relationships" xmlns:p="http://schemas.openxmlformats.org/presentationml/2006/main">
   <p:cSld>
     <p:bg>
@@ -7573,14 +8611,22 @@
         </p:spPr>
         <p:txBody>
           <a:bodyPr anchor="b">
-            <a:normAutofit/>
+            <a:normAutofit fontScale="90000"/>
           </a:bodyPr>
           <a:lstStyle/>
           <a:p>
             <a:r>
-              <a:rPr lang="es-ES" sz="5000"/>
+              <a:rPr lang="es-ES" sz="5000" dirty="0"/>
               <a:t>MODIFIABILITY PROBLEM: ISSUE</a:t>
             </a:r>
+            <a:br>
+              <a:rPr lang="en-001" sz="5000" dirty="0"/>
+            </a:br>
+            <a:r>
+              <a:rPr lang="en-001" sz="2200" dirty="0"/>
+              <a:t>(by Iker)</a:t>
+            </a:r>
+            <a:endParaRPr lang="es-ES" sz="2200" dirty="0"/>
           </a:p>
         </p:txBody>
       </p:sp>
@@ -7951,7 +8997,7 @@
 </p:sld>
 </file>
 
-<file path=ppt/slides/slide5.xml><?xml version="1.0" encoding="utf-8"?>
+<file path=ppt/slides/slide7.xml><?xml version="1.0" encoding="utf-8"?>
 <p:sld xmlns:a="http://schemas.openxmlformats.org/drawingml/2006/main" xmlns:r="http://schemas.openxmlformats.org/officeDocument/2006/relationships" xmlns:p="http://schemas.openxmlformats.org/presentationml/2006/main">
   <p:cSld>
     <p:bg>
@@ -8695,7 +9741,7 @@
 </p:sld>
 </file>
 
-<file path=ppt/slides/slide6.xml><?xml version="1.0" encoding="utf-8"?>
+<file path=ppt/slides/slide8.xml><?xml version="1.0" encoding="utf-8"?>
 <p:sld xmlns:a="http://schemas.openxmlformats.org/drawingml/2006/main" xmlns:r="http://schemas.openxmlformats.org/officeDocument/2006/relationships" xmlns:p="http://schemas.openxmlformats.org/presentationml/2006/main">
   <p:cSld>
     <p:bg>
@@ -8824,6 +9870,13 @@
             <a:r>
               <a:rPr lang="en-US" dirty="0"/>
               <a:t>MAINTAINABILITY &amp; TESTABILITY</a:t>
+            </a:r>
+            <a:br>
+              <a:rPr lang="en-001" dirty="0"/>
+            </a:br>
+            <a:r>
+              <a:rPr lang="en-001" sz="2000" dirty="0"/>
+              <a:t>(by Martin)</a:t>
             </a:r>
             <a:endParaRPr lang="es-ES" dirty="0"/>
           </a:p>
@@ -9159,240 +10212,6 @@
 </p:sld>
 </file>
 
-<file path=ppt/slides/slide7.xml><?xml version="1.0" encoding="utf-8"?>
-<p:sld xmlns:a="http://schemas.openxmlformats.org/drawingml/2006/main" xmlns:r="http://schemas.openxmlformats.org/officeDocument/2006/relationships" xmlns:p="http://schemas.openxmlformats.org/presentationml/2006/main">
-  <p:cSld>
-    <p:spTree>
-      <p:nvGrpSpPr>
-        <p:cNvPr id="1" name=""/>
-        <p:cNvGrpSpPr/>
-        <p:nvPr/>
-      </p:nvGrpSpPr>
-      <p:grpSpPr>
-        <a:xfrm>
-          <a:off x="0" y="0"/>
-          <a:ext cx="0" cy="0"/>
-          <a:chOff x="0" y="0"/>
-          <a:chExt cx="0" cy="0"/>
-        </a:xfrm>
-      </p:grpSpPr>
-      <p:sp>
-        <p:nvSpPr>
-          <p:cNvPr id="2" name="Title 1">
-            <a:extLst>
-              <a:ext uri="{FF2B5EF4-FFF2-40B4-BE49-F238E27FC236}">
-                <a16:creationId xmlns:a16="http://schemas.microsoft.com/office/drawing/2014/main" id="{9300C51F-749D-800C-7CAA-218B24BBBA95}"/>
-              </a:ext>
-            </a:extLst>
-          </p:cNvPr>
-          <p:cNvSpPr>
-            <a:spLocks noGrp="1"/>
-          </p:cNvSpPr>
-          <p:nvPr>
-            <p:ph type="title"/>
-          </p:nvPr>
-        </p:nvSpPr>
-        <p:spPr/>
-        <p:txBody>
-          <a:bodyPr/>
-          <a:lstStyle/>
-          <a:p>
-            <a:r>
-              <a:rPr lang="en-US" dirty="0"/>
-              <a:t>Current Strengths:</a:t>
-            </a:r>
-            <a:endParaRPr lang="en-ZM" dirty="0"/>
-          </a:p>
-        </p:txBody>
-      </p:sp>
-      <p:sp>
-        <p:nvSpPr>
-          <p:cNvPr id="3" name="Content Placeholder 2">
-            <a:extLst>
-              <a:ext uri="{FF2B5EF4-FFF2-40B4-BE49-F238E27FC236}">
-                <a16:creationId xmlns:a16="http://schemas.microsoft.com/office/drawing/2014/main" id="{38E731C8-CB74-3794-A9C7-895285FE80A6}"/>
-              </a:ext>
-            </a:extLst>
-          </p:cNvPr>
-          <p:cNvSpPr>
-            <a:spLocks noGrp="1"/>
-          </p:cNvSpPr>
-          <p:nvPr>
-            <p:ph idx="1"/>
-          </p:nvPr>
-        </p:nvSpPr>
-        <p:spPr/>
-        <p:txBody>
-          <a:bodyPr>
-            <a:normAutofit/>
-          </a:bodyPr>
-          <a:lstStyle/>
-          <a:p>
-            <a:pPr marL="0" indent="0">
-              <a:buNone/>
-            </a:pPr>
-            <a:r>
-              <a:rPr lang="en-US" b="1" dirty="0"/>
-              <a:t>1. Clean Separation of Concerns:</a:t>
-            </a:r>
-          </a:p>
-          <a:p>
-            <a:r>
-              <a:rPr lang="en-US" dirty="0"/>
-              <a:t>Clear component boundaries with single responsibilities (Term Management, Registration, Grading, Results)</a:t>
-            </a:r>
-          </a:p>
-          <a:p>
-            <a:r>
-              <a:rPr lang="en-US" dirty="0"/>
-              <a:t>Hexagonal/ports-and-adapters pattern evident (Persistence Adapter, Integration Adapter)</a:t>
-            </a:r>
-          </a:p>
-          <a:p>
-            <a:r>
-              <a:rPr lang="en-US" dirty="0"/>
-              <a:t>Components communicate through well-defined interfaces</a:t>
-            </a:r>
-          </a:p>
-          <a:p>
-            <a:endParaRPr lang="en-US" dirty="0"/>
-          </a:p>
-          <a:p>
-            <a:endParaRPr lang="en-ZM" dirty="0"/>
-          </a:p>
-        </p:txBody>
-      </p:sp>
-    </p:spTree>
-    <p:extLst>
-      <p:ext uri="{BB962C8B-B14F-4D97-AF65-F5344CB8AC3E}">
-        <p14:creationId xmlns:p14="http://schemas.microsoft.com/office/powerpoint/2010/main" val="1818847291"/>
-      </p:ext>
-    </p:extLst>
-  </p:cSld>
-  <p:clrMapOvr>
-    <a:masterClrMapping/>
-  </p:clrMapOvr>
-</p:sld>
-</file>
-
-<file path=ppt/slides/slide8.xml><?xml version="1.0" encoding="utf-8"?>
-<p:sld xmlns:a="http://schemas.openxmlformats.org/drawingml/2006/main" xmlns:r="http://schemas.openxmlformats.org/officeDocument/2006/relationships" xmlns:p="http://schemas.openxmlformats.org/presentationml/2006/main">
-  <p:cSld>
-    <p:spTree>
-      <p:nvGrpSpPr>
-        <p:cNvPr id="1" name=""/>
-        <p:cNvGrpSpPr/>
-        <p:nvPr/>
-      </p:nvGrpSpPr>
-      <p:grpSpPr>
-        <a:xfrm>
-          <a:off x="0" y="0"/>
-          <a:ext cx="0" cy="0"/>
-          <a:chOff x="0" y="0"/>
-          <a:chExt cx="0" cy="0"/>
-        </a:xfrm>
-      </p:grpSpPr>
-      <p:sp>
-        <p:nvSpPr>
-          <p:cNvPr id="2" name="Title 1">
-            <a:extLst>
-              <a:ext uri="{FF2B5EF4-FFF2-40B4-BE49-F238E27FC236}">
-                <a16:creationId xmlns:a16="http://schemas.microsoft.com/office/drawing/2014/main" id="{FE991824-B68A-6E46-F513-9ED57B37DC97}"/>
-              </a:ext>
-            </a:extLst>
-          </p:cNvPr>
-          <p:cNvSpPr>
-            <a:spLocks noGrp="1"/>
-          </p:cNvSpPr>
-          <p:nvPr>
-            <p:ph type="title"/>
-          </p:nvPr>
-        </p:nvSpPr>
-        <p:spPr/>
-        <p:txBody>
-          <a:bodyPr/>
-          <a:lstStyle/>
-          <a:p>
-            <a:endParaRPr lang="en-ZM"/>
-          </a:p>
-        </p:txBody>
-      </p:sp>
-      <p:sp>
-        <p:nvSpPr>
-          <p:cNvPr id="3" name="Content Placeholder 2">
-            <a:extLst>
-              <a:ext uri="{FF2B5EF4-FFF2-40B4-BE49-F238E27FC236}">
-                <a16:creationId xmlns:a16="http://schemas.microsoft.com/office/drawing/2014/main" id="{3BA3024D-1C22-0AF7-81C5-D00687464850}"/>
-              </a:ext>
-            </a:extLst>
-          </p:cNvPr>
-          <p:cNvSpPr>
-            <a:spLocks noGrp="1"/>
-          </p:cNvSpPr>
-          <p:nvPr>
-            <p:ph idx="1"/>
-          </p:nvPr>
-        </p:nvSpPr>
-        <p:spPr/>
-        <p:txBody>
-          <a:bodyPr>
-            <a:normAutofit/>
-          </a:bodyPr>
-          <a:lstStyle/>
-          <a:p>
-            <a:pPr marL="0" indent="0">
-              <a:buNone/>
-            </a:pPr>
-            <a:r>
-              <a:rPr lang="en-US" b="1" dirty="0"/>
-              <a:t>2. Testability by Design:</a:t>
-            </a:r>
-          </a:p>
-          <a:p>
-            <a:r>
-              <a:rPr lang="en-US" dirty="0"/>
-              <a:t>Integration Adapter abstracts external systems - can be mocked for unit testing</a:t>
-            </a:r>
-          </a:p>
-          <a:p>
-            <a:r>
-              <a:rPr lang="en-US" dirty="0"/>
-              <a:t>Persistence Adapter abstracts database - enables in-memory testing</a:t>
-            </a:r>
-          </a:p>
-          <a:p>
-            <a:r>
-              <a:rPr lang="en-US" dirty="0"/>
-              <a:t>Each component has clear inputs/outputs suitable for contract testing</a:t>
-            </a:r>
-          </a:p>
-          <a:p>
-            <a:r>
-              <a:rPr lang="en-US" dirty="0"/>
-              <a:t>Dynamic views document interaction flows useful for integration test scenarios</a:t>
-            </a:r>
-          </a:p>
-          <a:p>
-            <a:endParaRPr lang="en-US" dirty="0"/>
-          </a:p>
-          <a:p>
-            <a:endParaRPr lang="en-ZM" dirty="0"/>
-          </a:p>
-        </p:txBody>
-      </p:sp>
-    </p:spTree>
-    <p:extLst>
-      <p:ext uri="{BB962C8B-B14F-4D97-AF65-F5344CB8AC3E}">
-        <p14:creationId xmlns:p14="http://schemas.microsoft.com/office/powerpoint/2010/main" val="1483507386"/>
-      </p:ext>
-    </p:extLst>
-  </p:cSld>
-  <p:clrMapOvr>
-    <a:masterClrMapping/>
-  </p:clrMapOvr>
-</p:sld>
-</file>
-
 <file path=ppt/slides/slide9.xml><?xml version="1.0" encoding="utf-8"?>
 <p:sld xmlns:a="http://schemas.openxmlformats.org/drawingml/2006/main" xmlns:r="http://schemas.openxmlformats.org/officeDocument/2006/relationships" xmlns:p="http://schemas.openxmlformats.org/presentationml/2006/main">
   <p:cSld>
@@ -9415,7 +10234,7 @@
           <p:cNvPr id="2" name="Title 1">
             <a:extLst>
               <a:ext uri="{FF2B5EF4-FFF2-40B4-BE49-F238E27FC236}">
-                <a16:creationId xmlns:a16="http://schemas.microsoft.com/office/drawing/2014/main" id="{A10F5296-7D6A-AC7E-A3EF-4D5B8A2453B4}"/>
+                <a16:creationId xmlns:a16="http://schemas.microsoft.com/office/drawing/2014/main" id="{9300C51F-749D-800C-7CAA-218B24BBBA95}"/>
               </a:ext>
             </a:extLst>
           </p:cNvPr>
@@ -9431,7 +10250,11 @@
           <a:bodyPr/>
           <a:lstStyle/>
           <a:p>
-            <a:endParaRPr lang="en-ZM"/>
+            <a:r>
+              <a:rPr lang="en-US" dirty="0"/>
+              <a:t>Current Strengths:</a:t>
+            </a:r>
+            <a:endParaRPr lang="en-ZM" dirty="0"/>
           </a:p>
         </p:txBody>
       </p:sp>
@@ -9440,7 +10263,7 @@
           <p:cNvPr id="3" name="Content Placeholder 2">
             <a:extLst>
               <a:ext uri="{FF2B5EF4-FFF2-40B4-BE49-F238E27FC236}">
-                <a16:creationId xmlns:a16="http://schemas.microsoft.com/office/drawing/2014/main" id="{2F722D86-143A-E623-FB54-DBD636FE4625}"/>
+                <a16:creationId xmlns:a16="http://schemas.microsoft.com/office/drawing/2014/main" id="{38E731C8-CB74-3794-A9C7-895285FE80A6}"/>
               </a:ext>
             </a:extLst>
           </p:cNvPr>
@@ -9463,36 +10286,39 @@
             </a:pPr>
             <a:r>
               <a:rPr lang="en-US" b="1" dirty="0"/>
-              <a:t>3. Deployment Independence:</a:t>
+              <a:t>1. Clean Separation of Concerns:</a:t>
             </a:r>
           </a:p>
           <a:p>
             <a:r>
               <a:rPr lang="en-US" dirty="0"/>
-              <a:t>Web Application (SPA) can be deployed separately from Backend API</a:t>
+              <a:t>Clear component boundaries with single responsibilities (Term Management, Registration, Grading, Results)</a:t>
             </a:r>
           </a:p>
           <a:p>
             <a:r>
               <a:rPr lang="en-US" dirty="0"/>
-              <a:t>Component-level separation within API container allows for future microservices extraction</a:t>
+              <a:t>Hexagonal/ports-and-adapters pattern evident (Persistence Adapter, Integration Adapter)</a:t>
             </a:r>
           </a:p>
           <a:p>
             <a:r>
               <a:rPr lang="en-US" dirty="0"/>
-              <a:t>Database schema changes can be managed through migration scripts independently</a:t>
+              <a:t>Components communicate through well-defined interfaces</a:t>
             </a:r>
           </a:p>
           <a:p>
             <a:endParaRPr lang="en-US" dirty="0"/>
+          </a:p>
+          <a:p>
+            <a:endParaRPr lang="en-ZM" dirty="0"/>
           </a:p>
         </p:txBody>
       </p:sp>
     </p:spTree>
     <p:extLst>
       <p:ext uri="{BB962C8B-B14F-4D97-AF65-F5344CB8AC3E}">
-        <p14:creationId xmlns:p14="http://schemas.microsoft.com/office/powerpoint/2010/main" val="334085847"/>
+        <p14:creationId xmlns:p14="http://schemas.microsoft.com/office/powerpoint/2010/main" val="1818847291"/>
       </p:ext>
     </p:extLst>
   </p:cSld>

--- a/M2/Presentation_Qualities.pptx
+++ b/M2/Presentation_Qualities.pptx
@@ -5,7 +5,7 @@
     <p:sldMasterId id="2147483696" r:id="rId1"/>
   </p:sldMasterIdLst>
   <p:notesMasterIdLst>
-    <p:notesMasterId r:id="rId25"/>
+    <p:notesMasterId r:id="rId23"/>
   </p:notesMasterIdLst>
   <p:sldIdLst>
     <p:sldId id="256" r:id="rId2"/>
@@ -14,23 +14,21 @@
     <p:sldId id="260" r:id="rId5"/>
     <p:sldId id="261" r:id="rId6"/>
     <p:sldId id="257" r:id="rId7"/>
-    <p:sldId id="259" r:id="rId8"/>
-    <p:sldId id="262" r:id="rId9"/>
-    <p:sldId id="277" r:id="rId10"/>
-    <p:sldId id="263" r:id="rId11"/>
-    <p:sldId id="264" r:id="rId12"/>
-    <p:sldId id="265" r:id="rId13"/>
-    <p:sldId id="266" r:id="rId14"/>
-    <p:sldId id="267" r:id="rId15"/>
-    <p:sldId id="268" r:id="rId16"/>
-    <p:sldId id="278" r:id="rId17"/>
-    <p:sldId id="269" r:id="rId18"/>
-    <p:sldId id="271" r:id="rId19"/>
-    <p:sldId id="275" r:id="rId20"/>
-    <p:sldId id="272" r:id="rId21"/>
-    <p:sldId id="273" r:id="rId22"/>
-    <p:sldId id="274" r:id="rId23"/>
-    <p:sldId id="276" r:id="rId24"/>
+    <p:sldId id="262" r:id="rId8"/>
+    <p:sldId id="277" r:id="rId9"/>
+    <p:sldId id="263" r:id="rId10"/>
+    <p:sldId id="281" r:id="rId11"/>
+    <p:sldId id="282" r:id="rId12"/>
+    <p:sldId id="283" r:id="rId13"/>
+    <p:sldId id="284" r:id="rId14"/>
+    <p:sldId id="285" r:id="rId15"/>
+    <p:sldId id="259" r:id="rId16"/>
+    <p:sldId id="271" r:id="rId17"/>
+    <p:sldId id="275" r:id="rId18"/>
+    <p:sldId id="272" r:id="rId19"/>
+    <p:sldId id="273" r:id="rId20"/>
+    <p:sldId id="274" r:id="rId21"/>
+    <p:sldId id="276" r:id="rId22"/>
   </p:sldIdLst>
   <p:sldSz cx="12192000" cy="6858000"/>
   <p:notesSz cx="6858000" cy="9144000"/>
@@ -633,2597 +631,6 @@
 </pc:chgInfo>
 </file>
 
-<file path=ppt/diagrams/colors1.xml><?xml version="1.0" encoding="utf-8"?>
-<dgm:colorsDef xmlns:dgm="http://schemas.openxmlformats.org/drawingml/2006/diagram" xmlns:a="http://schemas.openxmlformats.org/drawingml/2006/main" uniqueId="urn:microsoft.com/office/officeart/2018/5/colors/Iconchunking_neutralbg_colorful1">
-  <dgm:title val=""/>
-  <dgm:desc val=""/>
-  <dgm:catLst>
-    <dgm:cat type="colorful" pri="10100"/>
-  </dgm:catLst>
-  <dgm:styleLbl name="node0">
-    <dgm:fillClrLst meth="repeat">
-      <a:schemeClr val="accent1"/>
-    </dgm:fillClrLst>
-    <dgm:linClrLst meth="repeat">
-      <a:schemeClr val="lt1"/>
-    </dgm:linClrLst>
-    <dgm:effectClrLst/>
-    <dgm:txLinClrLst/>
-    <dgm:txFillClrLst/>
-    <dgm:txEffectClrLst/>
-  </dgm:styleLbl>
-  <dgm:styleLbl name="node1">
-    <dgm:fillClrLst meth="repeat">
-      <a:schemeClr val="accent2"/>
-      <a:schemeClr val="accent3"/>
-      <a:schemeClr val="accent4"/>
-      <a:schemeClr val="accent5"/>
-      <a:schemeClr val="accent6"/>
-    </dgm:fillClrLst>
-    <dgm:linClrLst meth="repeat">
-      <a:schemeClr val="lt1">
-        <a:alpha val="0"/>
-      </a:schemeClr>
-    </dgm:linClrLst>
-    <dgm:effectClrLst/>
-    <dgm:txLinClrLst/>
-    <dgm:txFillClrLst/>
-    <dgm:txEffectClrLst/>
-  </dgm:styleLbl>
-  <dgm:styleLbl name="alignNode1">
-    <dgm:fillClrLst meth="repeat">
-      <a:schemeClr val="accent2"/>
-      <a:schemeClr val="accent3"/>
-      <a:schemeClr val="accent4"/>
-      <a:schemeClr val="accent5"/>
-      <a:schemeClr val="accent6"/>
-    </dgm:fillClrLst>
-    <dgm:linClrLst meth="repeat">
-      <a:schemeClr val="accent2"/>
-      <a:schemeClr val="accent3"/>
-      <a:schemeClr val="accent4"/>
-      <a:schemeClr val="accent5"/>
-      <a:schemeClr val="accent6"/>
-    </dgm:linClrLst>
-    <dgm:effectClrLst/>
-    <dgm:txLinClrLst/>
-    <dgm:txFillClrLst/>
-    <dgm:txEffectClrLst/>
-  </dgm:styleLbl>
-  <dgm:styleLbl name="lnNode1">
-    <dgm:fillClrLst meth="repeat">
-      <a:schemeClr val="accent2"/>
-      <a:schemeClr val="accent3"/>
-      <a:schemeClr val="accent4"/>
-      <a:schemeClr val="accent5"/>
-      <a:schemeClr val="accent6"/>
-    </dgm:fillClrLst>
-    <dgm:linClrLst meth="repeat">
-      <a:schemeClr val="lt1"/>
-    </dgm:linClrLst>
-    <dgm:effectClrLst/>
-    <dgm:txLinClrLst/>
-    <dgm:txFillClrLst/>
-    <dgm:txEffectClrLst/>
-  </dgm:styleLbl>
-  <dgm:styleLbl name="vennNode1">
-    <dgm:fillClrLst meth="repeat">
-      <a:schemeClr val="accent2">
-        <a:alpha val="50000"/>
-      </a:schemeClr>
-      <a:schemeClr val="accent3">
-        <a:alpha val="50000"/>
-      </a:schemeClr>
-      <a:schemeClr val="accent4">
-        <a:alpha val="50000"/>
-      </a:schemeClr>
-      <a:schemeClr val="accent5">
-        <a:alpha val="50000"/>
-      </a:schemeClr>
-      <a:schemeClr val="accent6">
-        <a:alpha val="50000"/>
-      </a:schemeClr>
-    </dgm:fillClrLst>
-    <dgm:linClrLst meth="repeat">
-      <a:schemeClr val="lt1"/>
-    </dgm:linClrLst>
-    <dgm:effectClrLst/>
-    <dgm:txLinClrLst/>
-    <dgm:txFillClrLst/>
-    <dgm:txEffectClrLst/>
-  </dgm:styleLbl>
-  <dgm:styleLbl name="node2">
-    <dgm:fillClrLst>
-      <a:schemeClr val="accent2"/>
-    </dgm:fillClrLst>
-    <dgm:linClrLst meth="repeat">
-      <a:schemeClr val="lt1"/>
-    </dgm:linClrLst>
-    <dgm:effectClrLst/>
-    <dgm:txLinClrLst/>
-    <dgm:txFillClrLst/>
-    <dgm:txEffectClrLst/>
-  </dgm:styleLbl>
-  <dgm:styleLbl name="node3">
-    <dgm:fillClrLst>
-      <a:schemeClr val="accent3"/>
-    </dgm:fillClrLst>
-    <dgm:linClrLst meth="repeat">
-      <a:schemeClr val="lt1"/>
-    </dgm:linClrLst>
-    <dgm:effectClrLst/>
-    <dgm:txLinClrLst/>
-    <dgm:txFillClrLst/>
-    <dgm:txEffectClrLst/>
-  </dgm:styleLbl>
-  <dgm:styleLbl name="node4">
-    <dgm:fillClrLst>
-      <a:schemeClr val="accent4"/>
-    </dgm:fillClrLst>
-    <dgm:linClrLst meth="repeat">
-      <a:schemeClr val="lt1"/>
-    </dgm:linClrLst>
-    <dgm:effectClrLst/>
-    <dgm:txLinClrLst/>
-    <dgm:txFillClrLst/>
-    <dgm:txEffectClrLst/>
-  </dgm:styleLbl>
-  <dgm:styleLbl name="fgImgPlace1">
-    <dgm:fillClrLst meth="repeat">
-      <a:schemeClr val="accent2">
-        <a:tint val="50000"/>
-      </a:schemeClr>
-      <a:schemeClr val="accent3">
-        <a:tint val="50000"/>
-      </a:schemeClr>
-      <a:schemeClr val="accent4">
-        <a:tint val="50000"/>
-      </a:schemeClr>
-      <a:schemeClr val="accent5">
-        <a:tint val="50000"/>
-      </a:schemeClr>
-      <a:schemeClr val="accent6">
-        <a:tint val="50000"/>
-      </a:schemeClr>
-    </dgm:fillClrLst>
-    <dgm:linClrLst meth="repeat">
-      <a:schemeClr val="lt1"/>
-    </dgm:linClrLst>
-    <dgm:effectClrLst/>
-    <dgm:txLinClrLst/>
-    <dgm:txFillClrLst meth="repeat">
-      <a:schemeClr val="lt1"/>
-    </dgm:txFillClrLst>
-    <dgm:txEffectClrLst/>
-  </dgm:styleLbl>
-  <dgm:styleLbl name="alignImgPlace1">
-    <dgm:fillClrLst>
-      <a:schemeClr val="accent1">
-        <a:tint val="50000"/>
-      </a:schemeClr>
-      <a:schemeClr val="accent2">
-        <a:tint val="20000"/>
-      </a:schemeClr>
-    </dgm:fillClrLst>
-    <dgm:linClrLst meth="repeat">
-      <a:schemeClr val="lt1"/>
-    </dgm:linClrLst>
-    <dgm:effectClrLst/>
-    <dgm:txLinClrLst/>
-    <dgm:txFillClrLst meth="repeat">
-      <a:schemeClr val="lt1"/>
-    </dgm:txFillClrLst>
-    <dgm:txEffectClrLst/>
-  </dgm:styleLbl>
-  <dgm:styleLbl name="bgImgPlace1">
-    <dgm:fillClrLst>
-      <a:schemeClr val="accent1">
-        <a:tint val="50000"/>
-      </a:schemeClr>
-      <a:schemeClr val="accent2">
-        <a:tint val="20000"/>
-      </a:schemeClr>
-    </dgm:fillClrLst>
-    <dgm:linClrLst meth="repeat">
-      <a:schemeClr val="lt1"/>
-    </dgm:linClrLst>
-    <dgm:effectClrLst/>
-    <dgm:txLinClrLst/>
-    <dgm:txFillClrLst meth="repeat">
-      <a:schemeClr val="lt1"/>
-    </dgm:txFillClrLst>
-    <dgm:txEffectClrLst/>
-  </dgm:styleLbl>
-  <dgm:styleLbl name="sibTrans2D1">
-    <dgm:fillClrLst meth="repeat">
-      <a:schemeClr val="accent2"/>
-      <a:schemeClr val="accent3"/>
-      <a:schemeClr val="accent4"/>
-      <a:schemeClr val="accent5"/>
-      <a:schemeClr val="accent6"/>
-    </dgm:fillClrLst>
-    <dgm:linClrLst meth="cycle">
-      <a:schemeClr val="lt1"/>
-    </dgm:linClrLst>
-    <dgm:effectClrLst/>
-    <dgm:txLinClrLst/>
-    <dgm:txFillClrLst/>
-    <dgm:txEffectClrLst/>
-  </dgm:styleLbl>
-  <dgm:styleLbl name="fgSibTrans2D1">
-    <dgm:fillClrLst meth="repeat">
-      <a:schemeClr val="accent2"/>
-      <a:schemeClr val="accent3"/>
-      <a:schemeClr val="accent4"/>
-      <a:schemeClr val="accent5"/>
-      <a:schemeClr val="accent6"/>
-    </dgm:fillClrLst>
-    <dgm:linClrLst meth="cycle">
-      <a:schemeClr val="lt1"/>
-    </dgm:linClrLst>
-    <dgm:effectClrLst/>
-    <dgm:txLinClrLst/>
-    <dgm:txFillClrLst meth="repeat">
-      <a:schemeClr val="lt1"/>
-    </dgm:txFillClrLst>
-    <dgm:txEffectClrLst/>
-  </dgm:styleLbl>
-  <dgm:styleLbl name="bgSibTrans2D1">
-    <dgm:fillClrLst meth="repeat">
-      <a:schemeClr val="accent2"/>
-      <a:schemeClr val="accent3"/>
-      <a:schemeClr val="accent4"/>
-      <a:schemeClr val="accent5"/>
-      <a:schemeClr val="accent6"/>
-    </dgm:fillClrLst>
-    <dgm:linClrLst meth="cycle">
-      <a:schemeClr val="lt1"/>
-    </dgm:linClrLst>
-    <dgm:effectClrLst/>
-    <dgm:txLinClrLst/>
-    <dgm:txFillClrLst meth="repeat">
-      <a:schemeClr val="lt1"/>
-    </dgm:txFillClrLst>
-    <dgm:txEffectClrLst/>
-  </dgm:styleLbl>
-  <dgm:styleLbl name="sibTrans1D1">
-    <dgm:fillClrLst meth="repeat">
-      <a:schemeClr val="accent2"/>
-      <a:schemeClr val="accent3"/>
-      <a:schemeClr val="accent4"/>
-      <a:schemeClr val="accent5"/>
-      <a:schemeClr val="accent6"/>
-    </dgm:fillClrLst>
-    <dgm:linClrLst meth="repeat">
-      <a:schemeClr val="accent2"/>
-      <a:schemeClr val="accent3"/>
-      <a:schemeClr val="accent4"/>
-      <a:schemeClr val="accent5"/>
-      <a:schemeClr val="accent6"/>
-    </dgm:linClrLst>
-    <dgm:effectClrLst/>
-    <dgm:txLinClrLst/>
-    <dgm:txFillClrLst meth="repeat">
-      <a:schemeClr val="tx1"/>
-    </dgm:txFillClrLst>
-    <dgm:txEffectClrLst/>
-  </dgm:styleLbl>
-  <dgm:styleLbl name="callout">
-    <dgm:fillClrLst meth="repeat">
-      <a:schemeClr val="accent2"/>
-    </dgm:fillClrLst>
-    <dgm:linClrLst meth="repeat">
-      <a:schemeClr val="accent2">
-        <a:tint val="50000"/>
-      </a:schemeClr>
-    </dgm:linClrLst>
-    <dgm:effectClrLst/>
-    <dgm:txLinClrLst/>
-    <dgm:txFillClrLst meth="repeat">
-      <a:schemeClr val="tx1"/>
-    </dgm:txFillClrLst>
-    <dgm:txEffectClrLst/>
-  </dgm:styleLbl>
-  <dgm:styleLbl name="asst0">
-    <dgm:fillClrLst meth="repeat">
-      <a:schemeClr val="accent1"/>
-    </dgm:fillClrLst>
-    <dgm:linClrLst meth="repeat">
-      <a:schemeClr val="lt1"/>
-    </dgm:linClrLst>
-    <dgm:effectClrLst/>
-    <dgm:txLinClrLst/>
-    <dgm:txFillClrLst/>
-    <dgm:txEffectClrLst/>
-  </dgm:styleLbl>
-  <dgm:styleLbl name="asst1">
-    <dgm:fillClrLst meth="repeat">
-      <a:schemeClr val="accent2"/>
-    </dgm:fillClrLst>
-    <dgm:linClrLst meth="repeat">
-      <a:schemeClr val="lt1"/>
-    </dgm:linClrLst>
-    <dgm:effectClrLst/>
-    <dgm:txLinClrLst/>
-    <dgm:txFillClrLst/>
-    <dgm:txEffectClrLst/>
-  </dgm:styleLbl>
-  <dgm:styleLbl name="asst2">
-    <dgm:fillClrLst>
-      <a:schemeClr val="accent3"/>
-    </dgm:fillClrLst>
-    <dgm:linClrLst meth="repeat">
-      <a:schemeClr val="lt1"/>
-    </dgm:linClrLst>
-    <dgm:effectClrLst/>
-    <dgm:txLinClrLst/>
-    <dgm:txFillClrLst/>
-    <dgm:txEffectClrLst/>
-  </dgm:styleLbl>
-  <dgm:styleLbl name="asst3">
-    <dgm:fillClrLst>
-      <a:schemeClr val="accent4"/>
-    </dgm:fillClrLst>
-    <dgm:linClrLst meth="repeat">
-      <a:schemeClr val="lt1"/>
-    </dgm:linClrLst>
-    <dgm:effectClrLst/>
-    <dgm:txLinClrLst/>
-    <dgm:txFillClrLst/>
-    <dgm:txEffectClrLst/>
-  </dgm:styleLbl>
-  <dgm:styleLbl name="asst4">
-    <dgm:fillClrLst>
-      <a:schemeClr val="accent5"/>
-    </dgm:fillClrLst>
-    <dgm:linClrLst meth="repeat">
-      <a:schemeClr val="lt1"/>
-    </dgm:linClrLst>
-    <dgm:effectClrLst/>
-    <dgm:txLinClrLst/>
-    <dgm:txFillClrLst/>
-    <dgm:txEffectClrLst/>
-  </dgm:styleLbl>
-  <dgm:styleLbl name="parChTrans2D1">
-    <dgm:fillClrLst meth="repeat">
-      <a:schemeClr val="accent2"/>
-    </dgm:fillClrLst>
-    <dgm:linClrLst meth="repeat">
-      <a:schemeClr val="lt1"/>
-    </dgm:linClrLst>
-    <dgm:effectClrLst/>
-    <dgm:txLinClrLst/>
-    <dgm:txFillClrLst meth="repeat">
-      <a:schemeClr val="lt1"/>
-    </dgm:txFillClrLst>
-    <dgm:txEffectClrLst/>
-  </dgm:styleLbl>
-  <dgm:styleLbl name="parChTrans2D2">
-    <dgm:fillClrLst meth="repeat">
-      <a:schemeClr val="accent3"/>
-    </dgm:fillClrLst>
-    <dgm:linClrLst meth="repeat">
-      <a:schemeClr val="lt1"/>
-    </dgm:linClrLst>
-    <dgm:effectClrLst/>
-    <dgm:txLinClrLst/>
-    <dgm:txFillClrLst/>
-    <dgm:txEffectClrLst/>
-  </dgm:styleLbl>
-  <dgm:styleLbl name="parChTrans2D3">
-    <dgm:fillClrLst meth="repeat">
-      <a:schemeClr val="accent4"/>
-    </dgm:fillClrLst>
-    <dgm:linClrLst meth="repeat">
-      <a:schemeClr val="lt1"/>
-    </dgm:linClrLst>
-    <dgm:effectClrLst/>
-    <dgm:txLinClrLst/>
-    <dgm:txFillClrLst/>
-    <dgm:txEffectClrLst/>
-  </dgm:styleLbl>
-  <dgm:styleLbl name="parChTrans2D4">
-    <dgm:fillClrLst meth="repeat">
-      <a:schemeClr val="accent5"/>
-    </dgm:fillClrLst>
-    <dgm:linClrLst meth="repeat">
-      <a:schemeClr val="lt1"/>
-    </dgm:linClrLst>
-    <dgm:effectClrLst/>
-    <dgm:txLinClrLst/>
-    <dgm:txFillClrLst meth="repeat">
-      <a:schemeClr val="lt1"/>
-    </dgm:txFillClrLst>
-    <dgm:txEffectClrLst/>
-  </dgm:styleLbl>
-  <dgm:styleLbl name="parChTrans1D1">
-    <dgm:fillClrLst meth="repeat">
-      <a:schemeClr val="accent2"/>
-    </dgm:fillClrLst>
-    <dgm:linClrLst meth="repeat">
-      <a:schemeClr val="accent1"/>
-    </dgm:linClrLst>
-    <dgm:effectClrLst/>
-    <dgm:txLinClrLst/>
-    <dgm:txFillClrLst meth="repeat">
-      <a:schemeClr val="tx1"/>
-    </dgm:txFillClrLst>
-    <dgm:txEffectClrLst/>
-  </dgm:styleLbl>
-  <dgm:styleLbl name="parChTrans1D2">
-    <dgm:fillClrLst meth="repeat">
-      <a:schemeClr val="accent3">
-        <a:tint val="90000"/>
-      </a:schemeClr>
-    </dgm:fillClrLst>
-    <dgm:linClrLst meth="repeat">
-      <a:schemeClr val="accent2"/>
-    </dgm:linClrLst>
-    <dgm:effectClrLst/>
-    <dgm:txLinClrLst/>
-    <dgm:txFillClrLst meth="repeat">
-      <a:schemeClr val="tx1"/>
-    </dgm:txFillClrLst>
-    <dgm:txEffectClrLst/>
-  </dgm:styleLbl>
-  <dgm:styleLbl name="parChTrans1D3">
-    <dgm:fillClrLst meth="repeat">
-      <a:schemeClr val="accent4">
-        <a:tint val="70000"/>
-      </a:schemeClr>
-    </dgm:fillClrLst>
-    <dgm:linClrLst meth="repeat">
-      <a:schemeClr val="accent3"/>
-    </dgm:linClrLst>
-    <dgm:effectClrLst/>
-    <dgm:txLinClrLst/>
-    <dgm:txFillClrLst meth="repeat">
-      <a:schemeClr val="tx1"/>
-    </dgm:txFillClrLst>
-    <dgm:txEffectClrLst/>
-  </dgm:styleLbl>
-  <dgm:styleLbl name="parChTrans1D4">
-    <dgm:fillClrLst meth="repeat">
-      <a:schemeClr val="accent5">
-        <a:tint val="50000"/>
-      </a:schemeClr>
-    </dgm:fillClrLst>
-    <dgm:linClrLst meth="repeat">
-      <a:schemeClr val="accent4"/>
-    </dgm:linClrLst>
-    <dgm:effectClrLst/>
-    <dgm:txLinClrLst/>
-    <dgm:txFillClrLst meth="repeat">
-      <a:schemeClr val="tx1"/>
-    </dgm:txFillClrLst>
-    <dgm:txEffectClrLst/>
-  </dgm:styleLbl>
-  <dgm:styleLbl name="fgAcc1">
-    <dgm:fillClrLst meth="repeat">
-      <a:schemeClr val="lt1">
-        <a:alpha val="90000"/>
-      </a:schemeClr>
-    </dgm:fillClrLst>
-    <dgm:linClrLst meth="repeat">
-      <a:schemeClr val="accent2"/>
-      <a:schemeClr val="accent3"/>
-      <a:schemeClr val="accent4"/>
-      <a:schemeClr val="accent5"/>
-      <a:schemeClr val="accent6"/>
-    </dgm:linClrLst>
-    <dgm:effectClrLst/>
-    <dgm:txLinClrLst/>
-    <dgm:txFillClrLst meth="repeat">
-      <a:schemeClr val="dk1"/>
-    </dgm:txFillClrLst>
-    <dgm:txEffectClrLst/>
-  </dgm:styleLbl>
-  <dgm:styleLbl name="conFgAcc1">
-    <dgm:fillClrLst meth="repeat">
-      <a:schemeClr val="lt1">
-        <a:alpha val="90000"/>
-      </a:schemeClr>
-    </dgm:fillClrLst>
-    <dgm:linClrLst meth="repeat">
-      <a:schemeClr val="accent2"/>
-      <a:schemeClr val="accent3"/>
-      <a:schemeClr val="accent4"/>
-      <a:schemeClr val="accent5"/>
-      <a:schemeClr val="accent6"/>
-    </dgm:linClrLst>
-    <dgm:effectClrLst/>
-    <dgm:txLinClrLst/>
-    <dgm:txFillClrLst meth="repeat">
-      <a:schemeClr val="dk1"/>
-    </dgm:txFillClrLst>
-    <dgm:txEffectClrLst/>
-  </dgm:styleLbl>
-  <dgm:styleLbl name="alignAcc1">
-    <dgm:fillClrLst meth="repeat">
-      <a:schemeClr val="lt1">
-        <a:alpha val="90000"/>
-      </a:schemeClr>
-    </dgm:fillClrLst>
-    <dgm:linClrLst meth="repeat">
-      <a:schemeClr val="accent2"/>
-      <a:schemeClr val="accent3"/>
-      <a:schemeClr val="accent4"/>
-      <a:schemeClr val="accent5"/>
-      <a:schemeClr val="accent6"/>
-    </dgm:linClrLst>
-    <dgm:effectClrLst/>
-    <dgm:txLinClrLst/>
-    <dgm:txFillClrLst meth="repeat">
-      <a:schemeClr val="dk1"/>
-    </dgm:txFillClrLst>
-    <dgm:txEffectClrLst/>
-  </dgm:styleLbl>
-  <dgm:styleLbl name="trAlignAcc1">
-    <dgm:fillClrLst meth="repeat">
-      <a:schemeClr val="lt1">
-        <a:alpha val="40000"/>
-      </a:schemeClr>
-    </dgm:fillClrLst>
-    <dgm:linClrLst meth="repeat">
-      <a:schemeClr val="accent1"/>
-    </dgm:linClrLst>
-    <dgm:effectClrLst/>
-    <dgm:txLinClrLst/>
-    <dgm:txFillClrLst meth="repeat">
-      <a:schemeClr val="dk1"/>
-    </dgm:txFillClrLst>
-    <dgm:txEffectClrLst/>
-  </dgm:styleLbl>
-  <dgm:styleLbl name="bgAcc1">
-    <dgm:fillClrLst meth="repeat">
-      <a:schemeClr val="lt1">
-        <a:alpha val="90000"/>
-      </a:schemeClr>
-    </dgm:fillClrLst>
-    <dgm:linClrLst meth="repeat">
-      <a:schemeClr val="accent2"/>
-      <a:schemeClr val="accent3"/>
-      <a:schemeClr val="accent4"/>
-      <a:schemeClr val="accent5"/>
-      <a:schemeClr val="accent6"/>
-    </dgm:linClrLst>
-    <dgm:effectClrLst/>
-    <dgm:txLinClrLst/>
-    <dgm:txFillClrLst meth="repeat">
-      <a:schemeClr val="dk1"/>
-    </dgm:txFillClrLst>
-    <dgm:txEffectClrLst/>
-  </dgm:styleLbl>
-  <dgm:styleLbl name="solidFgAcc1">
-    <dgm:fillClrLst meth="repeat">
-      <a:schemeClr val="lt1"/>
-    </dgm:fillClrLst>
-    <dgm:linClrLst meth="repeat">
-      <a:schemeClr val="accent2"/>
-      <a:schemeClr val="accent3"/>
-      <a:schemeClr val="accent4"/>
-      <a:schemeClr val="accent5"/>
-      <a:schemeClr val="accent6"/>
-    </dgm:linClrLst>
-    <dgm:effectClrLst/>
-    <dgm:txLinClrLst/>
-    <dgm:txFillClrLst meth="repeat">
-      <a:schemeClr val="dk1"/>
-    </dgm:txFillClrLst>
-    <dgm:txEffectClrLst/>
-  </dgm:styleLbl>
-  <dgm:styleLbl name="solidAlignAcc1">
-    <dgm:fillClrLst meth="repeat">
-      <a:schemeClr val="lt1"/>
-    </dgm:fillClrLst>
-    <dgm:linClrLst meth="repeat">
-      <a:schemeClr val="accent2"/>
-      <a:schemeClr val="accent3"/>
-      <a:schemeClr val="accent4"/>
-      <a:schemeClr val="accent5"/>
-      <a:schemeClr val="accent6"/>
-    </dgm:linClrLst>
-    <dgm:effectClrLst/>
-    <dgm:txLinClrLst/>
-    <dgm:txFillClrLst meth="repeat">
-      <a:schemeClr val="dk1"/>
-    </dgm:txFillClrLst>
-    <dgm:txEffectClrLst/>
-  </dgm:styleLbl>
-  <dgm:styleLbl name="solidBgAcc1">
-    <dgm:fillClrLst meth="repeat">
-      <a:schemeClr val="lt1"/>
-    </dgm:fillClrLst>
-    <dgm:linClrLst meth="repeat">
-      <a:schemeClr val="accent2"/>
-      <a:schemeClr val="accent3"/>
-      <a:schemeClr val="accent4"/>
-      <a:schemeClr val="accent5"/>
-      <a:schemeClr val="accent6"/>
-    </dgm:linClrLst>
-    <dgm:effectClrLst/>
-    <dgm:txLinClrLst/>
-    <dgm:txFillClrLst meth="repeat">
-      <a:schemeClr val="dk1"/>
-    </dgm:txFillClrLst>
-    <dgm:txEffectClrLst/>
-  </dgm:styleLbl>
-  <dgm:styleLbl name="fgAccFollowNode1">
-    <dgm:fillClrLst meth="repeat">
-      <a:schemeClr val="accent2">
-        <a:tint val="40000"/>
-        <a:alpha val="90000"/>
-      </a:schemeClr>
-      <a:schemeClr val="accent3">
-        <a:tint val="40000"/>
-        <a:alpha val="90000"/>
-      </a:schemeClr>
-      <a:schemeClr val="accent4">
-        <a:tint val="40000"/>
-        <a:alpha val="90000"/>
-      </a:schemeClr>
-      <a:schemeClr val="accent5">
-        <a:tint val="40000"/>
-        <a:alpha val="90000"/>
-      </a:schemeClr>
-      <a:schemeClr val="accent6">
-        <a:tint val="40000"/>
-        <a:alpha val="90000"/>
-      </a:schemeClr>
-    </dgm:fillClrLst>
-    <dgm:linClrLst meth="repeat">
-      <a:schemeClr val="accent2">
-        <a:tint val="40000"/>
-        <a:alpha val="90000"/>
-      </a:schemeClr>
-      <a:schemeClr val="accent3">
-        <a:tint val="40000"/>
-        <a:alpha val="90000"/>
-      </a:schemeClr>
-      <a:schemeClr val="accent4">
-        <a:tint val="40000"/>
-        <a:alpha val="90000"/>
-      </a:schemeClr>
-      <a:schemeClr val="accent5">
-        <a:tint val="40000"/>
-        <a:alpha val="90000"/>
-      </a:schemeClr>
-      <a:schemeClr val="accent6">
-        <a:tint val="40000"/>
-        <a:alpha val="90000"/>
-      </a:schemeClr>
-    </dgm:linClrLst>
-    <dgm:effectClrLst/>
-    <dgm:txLinClrLst/>
-    <dgm:txFillClrLst meth="repeat">
-      <a:schemeClr val="dk1"/>
-    </dgm:txFillClrLst>
-    <dgm:txEffectClrLst/>
-  </dgm:styleLbl>
-  <dgm:styleLbl name="alignAccFollowNode1">
-    <dgm:fillClrLst meth="repeat">
-      <a:schemeClr val="accent2">
-        <a:tint val="40000"/>
-        <a:alpha val="90000"/>
-      </a:schemeClr>
-      <a:schemeClr val="accent3">
-        <a:tint val="40000"/>
-        <a:alpha val="90000"/>
-      </a:schemeClr>
-      <a:schemeClr val="accent4">
-        <a:tint val="40000"/>
-        <a:alpha val="90000"/>
-      </a:schemeClr>
-      <a:schemeClr val="accent5">
-        <a:tint val="40000"/>
-        <a:alpha val="90000"/>
-      </a:schemeClr>
-      <a:schemeClr val="accent6">
-        <a:tint val="40000"/>
-        <a:alpha val="90000"/>
-      </a:schemeClr>
-    </dgm:fillClrLst>
-    <dgm:linClrLst meth="repeat">
-      <a:schemeClr val="accent2">
-        <a:tint val="40000"/>
-        <a:alpha val="90000"/>
-      </a:schemeClr>
-      <a:schemeClr val="accent3">
-        <a:tint val="40000"/>
-        <a:alpha val="90000"/>
-      </a:schemeClr>
-      <a:schemeClr val="accent4">
-        <a:tint val="40000"/>
-        <a:alpha val="90000"/>
-      </a:schemeClr>
-      <a:schemeClr val="accent5">
-        <a:tint val="40000"/>
-        <a:alpha val="90000"/>
-      </a:schemeClr>
-      <a:schemeClr val="accent6">
-        <a:tint val="40000"/>
-        <a:alpha val="90000"/>
-      </a:schemeClr>
-    </dgm:linClrLst>
-    <dgm:effectClrLst/>
-    <dgm:txLinClrLst/>
-    <dgm:txFillClrLst meth="repeat">
-      <a:schemeClr val="dk1"/>
-    </dgm:txFillClrLst>
-    <dgm:txEffectClrLst/>
-  </dgm:styleLbl>
-  <dgm:styleLbl name="bgAccFollowNode1">
-    <dgm:fillClrLst meth="repeat">
-      <a:schemeClr val="accent2">
-        <a:tint val="40000"/>
-        <a:alpha val="90000"/>
-      </a:schemeClr>
-      <a:schemeClr val="accent3">
-        <a:tint val="40000"/>
-        <a:alpha val="90000"/>
-      </a:schemeClr>
-      <a:schemeClr val="accent4">
-        <a:tint val="40000"/>
-        <a:alpha val="90000"/>
-      </a:schemeClr>
-      <a:schemeClr val="accent5">
-        <a:tint val="40000"/>
-        <a:alpha val="90000"/>
-      </a:schemeClr>
-      <a:schemeClr val="accent6">
-        <a:tint val="40000"/>
-        <a:alpha val="90000"/>
-      </a:schemeClr>
-    </dgm:fillClrLst>
-    <dgm:linClrLst meth="repeat">
-      <a:schemeClr val="accent2">
-        <a:tint val="40000"/>
-        <a:alpha val="90000"/>
-      </a:schemeClr>
-      <a:schemeClr val="accent3">
-        <a:tint val="40000"/>
-        <a:alpha val="90000"/>
-      </a:schemeClr>
-      <a:schemeClr val="accent4">
-        <a:tint val="40000"/>
-        <a:alpha val="90000"/>
-      </a:schemeClr>
-      <a:schemeClr val="accent5">
-        <a:tint val="40000"/>
-        <a:alpha val="90000"/>
-      </a:schemeClr>
-      <a:schemeClr val="accent6">
-        <a:tint val="40000"/>
-        <a:alpha val="90000"/>
-      </a:schemeClr>
-    </dgm:linClrLst>
-    <dgm:effectClrLst/>
-    <dgm:txLinClrLst/>
-    <dgm:txFillClrLst meth="repeat">
-      <a:schemeClr val="dk1"/>
-    </dgm:txFillClrLst>
-    <dgm:txEffectClrLst/>
-  </dgm:styleLbl>
-  <dgm:styleLbl name="fgAcc0">
-    <dgm:fillClrLst meth="repeat">
-      <a:schemeClr val="lt1">
-        <a:alpha val="90000"/>
-      </a:schemeClr>
-    </dgm:fillClrLst>
-    <dgm:linClrLst>
-      <a:schemeClr val="accent1"/>
-    </dgm:linClrLst>
-    <dgm:effectClrLst/>
-    <dgm:txLinClrLst/>
-    <dgm:txFillClrLst meth="repeat">
-      <a:schemeClr val="dk1"/>
-    </dgm:txFillClrLst>
-    <dgm:txEffectClrLst/>
-  </dgm:styleLbl>
-  <dgm:styleLbl name="fgAcc2">
-    <dgm:fillClrLst meth="repeat">
-      <a:schemeClr val="lt1">
-        <a:alpha val="90000"/>
-      </a:schemeClr>
-    </dgm:fillClrLst>
-    <dgm:linClrLst>
-      <a:schemeClr val="accent2"/>
-    </dgm:linClrLst>
-    <dgm:effectClrLst/>
-    <dgm:txLinClrLst/>
-    <dgm:txFillClrLst meth="repeat">
-      <a:schemeClr val="dk1"/>
-    </dgm:txFillClrLst>
-    <dgm:txEffectClrLst/>
-  </dgm:styleLbl>
-  <dgm:styleLbl name="fgAcc3">
-    <dgm:fillClrLst meth="repeat">
-      <a:schemeClr val="lt1">
-        <a:alpha val="90000"/>
-      </a:schemeClr>
-    </dgm:fillClrLst>
-    <dgm:linClrLst>
-      <a:schemeClr val="accent3"/>
-    </dgm:linClrLst>
-    <dgm:effectClrLst/>
-    <dgm:txLinClrLst/>
-    <dgm:txFillClrLst meth="repeat">
-      <a:schemeClr val="dk1"/>
-    </dgm:txFillClrLst>
-    <dgm:txEffectClrLst/>
-  </dgm:styleLbl>
-  <dgm:styleLbl name="fgAcc4">
-    <dgm:fillClrLst meth="repeat">
-      <a:schemeClr val="lt1">
-        <a:alpha val="90000"/>
-      </a:schemeClr>
-    </dgm:fillClrLst>
-    <dgm:linClrLst>
-      <a:schemeClr val="accent4"/>
-    </dgm:linClrLst>
-    <dgm:effectClrLst/>
-    <dgm:txLinClrLst/>
-    <dgm:txFillClrLst meth="repeat">
-      <a:schemeClr val="dk1"/>
-    </dgm:txFillClrLst>
-    <dgm:txEffectClrLst/>
-  </dgm:styleLbl>
-  <dgm:styleLbl name="bgShp">
-    <dgm:fillClrLst meth="repeat">
-      <a:schemeClr val="bg1">
-        <a:lumMod val="95000"/>
-      </a:schemeClr>
-    </dgm:fillClrLst>
-    <dgm:linClrLst meth="repeat">
-      <a:schemeClr val="dk1"/>
-    </dgm:linClrLst>
-    <dgm:effectClrLst/>
-    <dgm:txLinClrLst/>
-    <dgm:txFillClrLst meth="repeat">
-      <a:schemeClr val="dk1"/>
-    </dgm:txFillClrLst>
-    <dgm:txEffectClrLst/>
-  </dgm:styleLbl>
-  <dgm:styleLbl name="dkBgShp">
-    <dgm:fillClrLst meth="repeat">
-      <a:schemeClr val="accent2">
-        <a:shade val="90000"/>
-      </a:schemeClr>
-    </dgm:fillClrLst>
-    <dgm:linClrLst meth="repeat">
-      <a:schemeClr val="dk1"/>
-    </dgm:linClrLst>
-    <dgm:effectClrLst/>
-    <dgm:txLinClrLst/>
-    <dgm:txFillClrLst meth="repeat">
-      <a:schemeClr val="lt1"/>
-    </dgm:txFillClrLst>
-    <dgm:txEffectClrLst/>
-  </dgm:styleLbl>
-  <dgm:styleLbl name="trBgShp">
-    <dgm:fillClrLst meth="repeat">
-      <a:schemeClr val="accent1">
-        <a:tint val="50000"/>
-        <a:alpha val="40000"/>
-      </a:schemeClr>
-    </dgm:fillClrLst>
-    <dgm:linClrLst meth="repeat">
-      <a:schemeClr val="accent2"/>
-    </dgm:linClrLst>
-    <dgm:effectClrLst/>
-    <dgm:txLinClrLst/>
-    <dgm:txFillClrLst meth="repeat">
-      <a:schemeClr val="lt1"/>
-    </dgm:txFillClrLst>
-    <dgm:txEffectClrLst/>
-  </dgm:styleLbl>
-  <dgm:styleLbl name="fgShp">
-    <dgm:fillClrLst meth="repeat">
-      <a:schemeClr val="accent2">
-        <a:tint val="40000"/>
-      </a:schemeClr>
-    </dgm:fillClrLst>
-    <dgm:linClrLst meth="repeat">
-      <a:schemeClr val="lt1"/>
-    </dgm:linClrLst>
-    <dgm:effectClrLst/>
-    <dgm:txLinClrLst/>
-    <dgm:txFillClrLst meth="repeat">
-      <a:schemeClr val="dk1"/>
-    </dgm:txFillClrLst>
-    <dgm:txEffectClrLst/>
-  </dgm:styleLbl>
-  <dgm:styleLbl name="revTx">
-    <dgm:fillClrLst meth="repeat">
-      <a:schemeClr val="lt1">
-        <a:alpha val="0"/>
-      </a:schemeClr>
-    </dgm:fillClrLst>
-    <dgm:linClrLst meth="repeat">
-      <a:schemeClr val="dk1">
-        <a:alpha val="0"/>
-      </a:schemeClr>
-    </dgm:linClrLst>
-    <dgm:effectClrLst/>
-    <dgm:txLinClrLst/>
-    <dgm:txFillClrLst meth="repeat">
-      <a:schemeClr val="tx1"/>
-    </dgm:txFillClrLst>
-    <dgm:txEffectClrLst/>
-  </dgm:styleLbl>
-</dgm:colorsDef>
-</file>
-
-<file path=ppt/diagrams/data1.xml><?xml version="1.0" encoding="utf-8"?>
-<dgm:dataModel xmlns:dgm="http://schemas.openxmlformats.org/drawingml/2006/diagram" xmlns:a="http://schemas.openxmlformats.org/drawingml/2006/main">
-  <dgm:ptLst>
-    <dgm:pt modelId="{AFFC6FD5-3E95-4BC9-AA59-4BADDE39FEE0}" type="doc">
-      <dgm:prSet loTypeId="urn:microsoft.com/office/officeart/2018/2/layout/IconLabelList" loCatId="icon" qsTypeId="urn:microsoft.com/office/officeart/2005/8/quickstyle/simple1" qsCatId="simple" csTypeId="urn:microsoft.com/office/officeart/2018/5/colors/Iconchunking_neutralbg_colorful1" csCatId="colorful" phldr="1"/>
-      <dgm:spPr/>
-      <dgm:t>
-        <a:bodyPr/>
-        <a:lstStyle/>
-        <a:p>
-          <a:endParaRPr lang="en-US"/>
-        </a:p>
-      </dgm:t>
-    </dgm:pt>
-    <dgm:pt modelId="{F9FD7349-9983-4285-B197-D27610B1FD90}">
-      <dgm:prSet/>
-      <dgm:spPr/>
-      <dgm:t>
-        <a:bodyPr/>
-        <a:lstStyle/>
-        <a:p>
-          <a:r>
-            <a:rPr lang="en-US"/>
-            <a:t>Integration with Identity Provider (IdP) for SSO authentication</a:t>
-          </a:r>
-        </a:p>
-      </dgm:t>
-    </dgm:pt>
-    <dgm:pt modelId="{F3497900-8AB4-4F07-AC38-06F867F2C1F7}" type="parTrans" cxnId="{E349652D-D529-4BB8-8696-F7CC33E3A546}">
-      <dgm:prSet/>
-      <dgm:spPr/>
-      <dgm:t>
-        <a:bodyPr/>
-        <a:lstStyle/>
-        <a:p>
-          <a:endParaRPr lang="en-US"/>
-        </a:p>
-      </dgm:t>
-    </dgm:pt>
-    <dgm:pt modelId="{4D77D513-4EAE-484B-8143-10C19A5A588F}" type="sibTrans" cxnId="{E349652D-D529-4BB8-8696-F7CC33E3A546}">
-      <dgm:prSet/>
-      <dgm:spPr/>
-      <dgm:t>
-        <a:bodyPr/>
-        <a:lstStyle/>
-        <a:p>
-          <a:endParaRPr lang="en-US"/>
-        </a:p>
-      </dgm:t>
-    </dgm:pt>
-    <dgm:pt modelId="{B89EEF8A-7FD4-41C7-8F65-DFCF42031AC1}">
-      <dgm:prSet/>
-      <dgm:spPr/>
-      <dgm:t>
-        <a:bodyPr/>
-        <a:lstStyle/>
-        <a:p>
-          <a:r>
-            <a:rPr lang="en-US"/>
-            <a:t>HTTPS communication between web app and API</a:t>
-          </a:r>
-        </a:p>
-      </dgm:t>
-    </dgm:pt>
-    <dgm:pt modelId="{71D4E294-8FDA-4E39-A3D5-3A964879F174}" type="parTrans" cxnId="{F75D7951-44A6-41C5-A8CE-D8D00AE6D8C7}">
-      <dgm:prSet/>
-      <dgm:spPr/>
-      <dgm:t>
-        <a:bodyPr/>
-        <a:lstStyle/>
-        <a:p>
-          <a:endParaRPr lang="en-US"/>
-        </a:p>
-      </dgm:t>
-    </dgm:pt>
-    <dgm:pt modelId="{0AE5975A-D2F4-4B0D-B62D-1BFEBC23C440}" type="sibTrans" cxnId="{F75D7951-44A6-41C5-A8CE-D8D00AE6D8C7}">
-      <dgm:prSet/>
-      <dgm:spPr/>
-      <dgm:t>
-        <a:bodyPr/>
-        <a:lstStyle/>
-        <a:p>
-          <a:endParaRPr lang="en-US"/>
-        </a:p>
-      </dgm:t>
-    </dgm:pt>
-    <dgm:pt modelId="{394AFB09-E5A1-4FBA-B47C-D86C3EEFB86E}" type="pres">
-      <dgm:prSet presAssocID="{AFFC6FD5-3E95-4BC9-AA59-4BADDE39FEE0}" presName="root" presStyleCnt="0">
-        <dgm:presLayoutVars>
-          <dgm:dir/>
-          <dgm:resizeHandles val="exact"/>
-        </dgm:presLayoutVars>
-      </dgm:prSet>
-      <dgm:spPr/>
-    </dgm:pt>
-    <dgm:pt modelId="{F20437B0-17B2-4EA6-B95B-46FF5AC2B242}" type="pres">
-      <dgm:prSet presAssocID="{F9FD7349-9983-4285-B197-D27610B1FD90}" presName="compNode" presStyleCnt="0"/>
-      <dgm:spPr/>
-    </dgm:pt>
-    <dgm:pt modelId="{B9F2F49B-BEE3-4780-BAF9-8B3A179BBFB0}" type="pres">
-      <dgm:prSet presAssocID="{F9FD7349-9983-4285-B197-D27610B1FD90}" presName="iconRect" presStyleLbl="node1" presStyleIdx="0" presStyleCnt="2"/>
-      <dgm:spPr>
-        <a:blipFill>
-          <a:blip xmlns:r="http://schemas.openxmlformats.org/officeDocument/2006/relationships" r:embed="rId1">
-            <a:extLst>
-              <a:ext uri="{28A0092B-C50C-407E-A947-70E740481C1C}">
-                <a14:useLocalDpi xmlns:a14="http://schemas.microsoft.com/office/drawing/2010/main" val="0"/>
-              </a:ext>
-              <a:ext uri="{96DAC541-7B7A-43D3-8B79-37D633B846F1}">
-                <asvg:svgBlip xmlns:asvg="http://schemas.microsoft.com/office/drawing/2016/SVG/main" r:embed="rId2"/>
-              </a:ext>
-            </a:extLst>
-          </a:blip>
-          <a:stretch>
-            <a:fillRect/>
-          </a:stretch>
-        </a:blipFill>
-        <a:ln>
-          <a:noFill/>
-        </a:ln>
-      </dgm:spPr>
-      <dgm:extLst>
-        <a:ext uri="{E40237B7-FDA0-4F09-8148-C483321AD2D9}">
-          <dgm14:cNvPr xmlns:dgm14="http://schemas.microsoft.com/office/drawing/2010/diagram" id="0" name="" descr="Employee Badge"/>
-        </a:ext>
-      </dgm:extLst>
-    </dgm:pt>
-    <dgm:pt modelId="{FD4859E1-A8C8-40AB-8987-C65DC1EE7404}" type="pres">
-      <dgm:prSet presAssocID="{F9FD7349-9983-4285-B197-D27610B1FD90}" presName="spaceRect" presStyleCnt="0"/>
-      <dgm:spPr/>
-    </dgm:pt>
-    <dgm:pt modelId="{05777D77-00E1-4137-9F6A-AA53EE6E6862}" type="pres">
-      <dgm:prSet presAssocID="{F9FD7349-9983-4285-B197-D27610B1FD90}" presName="textRect" presStyleLbl="revTx" presStyleIdx="0" presStyleCnt="2">
-        <dgm:presLayoutVars>
-          <dgm:chMax val="1"/>
-          <dgm:chPref val="1"/>
-        </dgm:presLayoutVars>
-      </dgm:prSet>
-      <dgm:spPr/>
-    </dgm:pt>
-    <dgm:pt modelId="{0904C8FE-B734-48AA-971C-F7B73AE5A135}" type="pres">
-      <dgm:prSet presAssocID="{4D77D513-4EAE-484B-8143-10C19A5A588F}" presName="sibTrans" presStyleCnt="0"/>
-      <dgm:spPr/>
-    </dgm:pt>
-    <dgm:pt modelId="{DB71A3F8-04F5-4E3E-9576-D2B87D7873BE}" type="pres">
-      <dgm:prSet presAssocID="{B89EEF8A-7FD4-41C7-8F65-DFCF42031AC1}" presName="compNode" presStyleCnt="0"/>
-      <dgm:spPr/>
-    </dgm:pt>
-    <dgm:pt modelId="{20AD1B8A-22E7-4191-97CD-7A08391511E9}" type="pres">
-      <dgm:prSet presAssocID="{B89EEF8A-7FD4-41C7-8F65-DFCF42031AC1}" presName="iconRect" presStyleLbl="node1" presStyleIdx="1" presStyleCnt="2"/>
-      <dgm:spPr>
-        <a:blipFill>
-          <a:blip xmlns:r="http://schemas.openxmlformats.org/officeDocument/2006/relationships" r:embed="rId3">
-            <a:extLst>
-              <a:ext uri="{28A0092B-C50C-407E-A947-70E740481C1C}">
-                <a14:useLocalDpi xmlns:a14="http://schemas.microsoft.com/office/drawing/2010/main" val="0"/>
-              </a:ext>
-              <a:ext uri="{96DAC541-7B7A-43D3-8B79-37D633B846F1}">
-                <asvg:svgBlip xmlns:asvg="http://schemas.microsoft.com/office/drawing/2016/SVG/main" r:embed="rId4"/>
-              </a:ext>
-            </a:extLst>
-          </a:blip>
-          <a:stretch>
-            <a:fillRect/>
-          </a:stretch>
-        </a:blipFill>
-        <a:ln>
-          <a:noFill/>
-        </a:ln>
-      </dgm:spPr>
-      <dgm:extLst>
-        <a:ext uri="{E40237B7-FDA0-4F09-8148-C483321AD2D9}">
-          <dgm14:cNvPr xmlns:dgm14="http://schemas.microsoft.com/office/drawing/2010/diagram" id="0" name="" descr="Smart Phone"/>
-        </a:ext>
-      </dgm:extLst>
-    </dgm:pt>
-    <dgm:pt modelId="{8D0B9BAE-B8FB-4D25-854E-CCEAC7E060BA}" type="pres">
-      <dgm:prSet presAssocID="{B89EEF8A-7FD4-41C7-8F65-DFCF42031AC1}" presName="spaceRect" presStyleCnt="0"/>
-      <dgm:spPr/>
-    </dgm:pt>
-    <dgm:pt modelId="{918BFF7D-EDC8-4940-B0A9-1664EE930606}" type="pres">
-      <dgm:prSet presAssocID="{B89EEF8A-7FD4-41C7-8F65-DFCF42031AC1}" presName="textRect" presStyleLbl="revTx" presStyleIdx="1" presStyleCnt="2">
-        <dgm:presLayoutVars>
-          <dgm:chMax val="1"/>
-          <dgm:chPref val="1"/>
-        </dgm:presLayoutVars>
-      </dgm:prSet>
-      <dgm:spPr/>
-    </dgm:pt>
-  </dgm:ptLst>
-  <dgm:cxnLst>
-    <dgm:cxn modelId="{E349652D-D529-4BB8-8696-F7CC33E3A546}" srcId="{AFFC6FD5-3E95-4BC9-AA59-4BADDE39FEE0}" destId="{F9FD7349-9983-4285-B197-D27610B1FD90}" srcOrd="0" destOrd="0" parTransId="{F3497900-8AB4-4F07-AC38-06F867F2C1F7}" sibTransId="{4D77D513-4EAE-484B-8143-10C19A5A588F}"/>
-    <dgm:cxn modelId="{82B4134C-218C-42AB-B8BF-0E2A3A589AE2}" type="presOf" srcId="{AFFC6FD5-3E95-4BC9-AA59-4BADDE39FEE0}" destId="{394AFB09-E5A1-4FBA-B47C-D86C3EEFB86E}" srcOrd="0" destOrd="0" presId="urn:microsoft.com/office/officeart/2018/2/layout/IconLabelList"/>
-    <dgm:cxn modelId="{F75D7951-44A6-41C5-A8CE-D8D00AE6D8C7}" srcId="{AFFC6FD5-3E95-4BC9-AA59-4BADDE39FEE0}" destId="{B89EEF8A-7FD4-41C7-8F65-DFCF42031AC1}" srcOrd="1" destOrd="0" parTransId="{71D4E294-8FDA-4E39-A3D5-3A964879F174}" sibTransId="{0AE5975A-D2F4-4B0D-B62D-1BFEBC23C440}"/>
-    <dgm:cxn modelId="{7056C38E-D114-4BCB-82C9-5B21B2C000DE}" type="presOf" srcId="{F9FD7349-9983-4285-B197-D27610B1FD90}" destId="{05777D77-00E1-4137-9F6A-AA53EE6E6862}" srcOrd="0" destOrd="0" presId="urn:microsoft.com/office/officeart/2018/2/layout/IconLabelList"/>
-    <dgm:cxn modelId="{1AC106CD-51C1-41B7-88EE-E3D33C5EFE2B}" type="presOf" srcId="{B89EEF8A-7FD4-41C7-8F65-DFCF42031AC1}" destId="{918BFF7D-EDC8-4940-B0A9-1664EE930606}" srcOrd="0" destOrd="0" presId="urn:microsoft.com/office/officeart/2018/2/layout/IconLabelList"/>
-    <dgm:cxn modelId="{4771FF29-572A-4D16-8B63-E39D35316656}" type="presParOf" srcId="{394AFB09-E5A1-4FBA-B47C-D86C3EEFB86E}" destId="{F20437B0-17B2-4EA6-B95B-46FF5AC2B242}" srcOrd="0" destOrd="0" presId="urn:microsoft.com/office/officeart/2018/2/layout/IconLabelList"/>
-    <dgm:cxn modelId="{1E1EBD86-5E0A-4F17-A014-9AE8650B4BDD}" type="presParOf" srcId="{F20437B0-17B2-4EA6-B95B-46FF5AC2B242}" destId="{B9F2F49B-BEE3-4780-BAF9-8B3A179BBFB0}" srcOrd="0" destOrd="0" presId="urn:microsoft.com/office/officeart/2018/2/layout/IconLabelList"/>
-    <dgm:cxn modelId="{664CA6FC-7B57-4BBF-9B27-6BD886334161}" type="presParOf" srcId="{F20437B0-17B2-4EA6-B95B-46FF5AC2B242}" destId="{FD4859E1-A8C8-40AB-8987-C65DC1EE7404}" srcOrd="1" destOrd="0" presId="urn:microsoft.com/office/officeart/2018/2/layout/IconLabelList"/>
-    <dgm:cxn modelId="{D055BB7B-BF59-4206-94D9-9E509A5130D8}" type="presParOf" srcId="{F20437B0-17B2-4EA6-B95B-46FF5AC2B242}" destId="{05777D77-00E1-4137-9F6A-AA53EE6E6862}" srcOrd="2" destOrd="0" presId="urn:microsoft.com/office/officeart/2018/2/layout/IconLabelList"/>
-    <dgm:cxn modelId="{18B5063D-7E61-4ED5-9CCD-1D2C86CB21E7}" type="presParOf" srcId="{394AFB09-E5A1-4FBA-B47C-D86C3EEFB86E}" destId="{0904C8FE-B734-48AA-971C-F7B73AE5A135}" srcOrd="1" destOrd="0" presId="urn:microsoft.com/office/officeart/2018/2/layout/IconLabelList"/>
-    <dgm:cxn modelId="{8B12DF74-5731-4B09-BA98-D407FCE638C1}" type="presParOf" srcId="{394AFB09-E5A1-4FBA-B47C-D86C3EEFB86E}" destId="{DB71A3F8-04F5-4E3E-9576-D2B87D7873BE}" srcOrd="2" destOrd="0" presId="urn:microsoft.com/office/officeart/2018/2/layout/IconLabelList"/>
-    <dgm:cxn modelId="{41B729C8-FDAA-4217-9BFA-6CC757469781}" type="presParOf" srcId="{DB71A3F8-04F5-4E3E-9576-D2B87D7873BE}" destId="{20AD1B8A-22E7-4191-97CD-7A08391511E9}" srcOrd="0" destOrd="0" presId="urn:microsoft.com/office/officeart/2018/2/layout/IconLabelList"/>
-    <dgm:cxn modelId="{AC32A2BE-E5EA-4084-BBAC-90092BAA74B3}" type="presParOf" srcId="{DB71A3F8-04F5-4E3E-9576-D2B87D7873BE}" destId="{8D0B9BAE-B8FB-4D25-854E-CCEAC7E060BA}" srcOrd="1" destOrd="0" presId="urn:microsoft.com/office/officeart/2018/2/layout/IconLabelList"/>
-    <dgm:cxn modelId="{EC9A85B5-4225-4B15-8FE6-F7EC26309B5E}" type="presParOf" srcId="{DB71A3F8-04F5-4E3E-9576-D2B87D7873BE}" destId="{918BFF7D-EDC8-4940-B0A9-1664EE930606}" srcOrd="2" destOrd="0" presId="urn:microsoft.com/office/officeart/2018/2/layout/IconLabelList"/>
-  </dgm:cxnLst>
-  <dgm:bg/>
-  <dgm:whole/>
-  <dgm:extLst>
-    <a:ext uri="http://schemas.microsoft.com/office/drawing/2008/diagram">
-      <dsp:dataModelExt xmlns:dsp="http://schemas.microsoft.com/office/drawing/2008/diagram" relId="rId8" minVer="http://schemas.openxmlformats.org/drawingml/2006/diagram"/>
-    </a:ext>
-  </dgm:extLst>
-</dgm:dataModel>
-</file>
-
-<file path=ppt/diagrams/drawing1.xml><?xml version="1.0" encoding="utf-8"?>
-<dsp:drawing xmlns:dgm="http://schemas.openxmlformats.org/drawingml/2006/diagram" xmlns:dsp="http://schemas.microsoft.com/office/drawing/2008/diagram" xmlns:a="http://schemas.openxmlformats.org/drawingml/2006/main">
-  <dsp:spTree>
-    <dsp:nvGrpSpPr>
-      <dsp:cNvPr id="0" name=""/>
-      <dsp:cNvGrpSpPr/>
-    </dsp:nvGrpSpPr>
-    <dsp:grpSpPr/>
-    <dsp:sp modelId="{B9F2F49B-BEE3-4780-BAF9-8B3A179BBFB0}">
-      <dsp:nvSpPr>
-        <dsp:cNvPr id="0" name=""/>
-        <dsp:cNvSpPr/>
-      </dsp:nvSpPr>
-      <dsp:spPr>
-        <a:xfrm>
-          <a:off x="1666837" y="381911"/>
-          <a:ext cx="1944000" cy="1944000"/>
-        </a:xfrm>
-        <a:prstGeom prst="rect">
-          <a:avLst/>
-        </a:prstGeom>
-        <a:blipFill>
-          <a:blip xmlns:r="http://schemas.openxmlformats.org/officeDocument/2006/relationships" r:embed="rId1">
-            <a:extLst>
-              <a:ext uri="{28A0092B-C50C-407E-A947-70E740481C1C}">
-                <a14:useLocalDpi xmlns:a14="http://schemas.microsoft.com/office/drawing/2010/main" val="0"/>
-              </a:ext>
-              <a:ext uri="{96DAC541-7B7A-43D3-8B79-37D633B846F1}">
-                <asvg:svgBlip xmlns:asvg="http://schemas.microsoft.com/office/drawing/2016/SVG/main" r:embed="rId2"/>
-              </a:ext>
-            </a:extLst>
-          </a:blip>
-          <a:stretch>
-            <a:fillRect/>
-          </a:stretch>
-        </a:blipFill>
-        <a:ln w="15875" cap="rnd" cmpd="sng" algn="ctr">
-          <a:noFill/>
-          <a:prstDash val="solid"/>
-        </a:ln>
-        <a:effectLst/>
-      </dsp:spPr>
-      <dsp:style>
-        <a:lnRef idx="2">
-          <a:scrgbClr r="0" g="0" b="0"/>
-        </a:lnRef>
-        <a:fillRef idx="1">
-          <a:scrgbClr r="0" g="0" b="0"/>
-        </a:fillRef>
-        <a:effectRef idx="0">
-          <a:scrgbClr r="0" g="0" b="0"/>
-        </a:effectRef>
-        <a:fontRef idx="minor">
-          <a:schemeClr val="lt1"/>
-        </a:fontRef>
-      </dsp:style>
-    </dsp:sp>
-    <dsp:sp modelId="{05777D77-00E1-4137-9F6A-AA53EE6E6862}">
-      <dsp:nvSpPr>
-        <dsp:cNvPr id="0" name=""/>
-        <dsp:cNvSpPr/>
-      </dsp:nvSpPr>
-      <dsp:spPr>
-        <a:xfrm>
-          <a:off x="478837" y="2796457"/>
-          <a:ext cx="4320000" cy="720000"/>
-        </a:xfrm>
-        <a:prstGeom prst="rect">
-          <a:avLst/>
-        </a:prstGeom>
-        <a:noFill/>
-        <a:ln>
-          <a:noFill/>
-        </a:ln>
-        <a:effectLst/>
-      </dsp:spPr>
-      <dsp:style>
-        <a:lnRef idx="0">
-          <a:scrgbClr r="0" g="0" b="0"/>
-        </a:lnRef>
-        <a:fillRef idx="0">
-          <a:scrgbClr r="0" g="0" b="0"/>
-        </a:fillRef>
-        <a:effectRef idx="0">
-          <a:scrgbClr r="0" g="0" b="0"/>
-        </a:effectRef>
-        <a:fontRef idx="minor"/>
-      </dsp:style>
-      <dsp:txBody>
-        <a:bodyPr spcFirstLastPara="0" vert="horz" wrap="square" lIns="0" tIns="0" rIns="0" bIns="0" numCol="1" spcCol="1270" anchor="t" anchorCtr="0">
-          <a:noAutofit/>
-        </a:bodyPr>
-        <a:lstStyle/>
-        <a:p>
-          <a:pPr marL="0" lvl="0" indent="0" algn="ctr" defTabSz="1022350">
-            <a:lnSpc>
-              <a:spcPct val="90000"/>
-            </a:lnSpc>
-            <a:spcBef>
-              <a:spcPct val="0"/>
-            </a:spcBef>
-            <a:spcAft>
-              <a:spcPct val="35000"/>
-            </a:spcAft>
-            <a:buNone/>
-          </a:pPr>
-          <a:r>
-            <a:rPr lang="en-US" sz="2300" kern="1200"/>
-            <a:t>Integration with Identity Provider (IdP) for SSO authentication</a:t>
-          </a:r>
-        </a:p>
-      </dsp:txBody>
-      <dsp:txXfrm>
-        <a:off x="478837" y="2796457"/>
-        <a:ext cx="4320000" cy="720000"/>
-      </dsp:txXfrm>
-    </dsp:sp>
-    <dsp:sp modelId="{20AD1B8A-22E7-4191-97CD-7A08391511E9}">
-      <dsp:nvSpPr>
-        <dsp:cNvPr id="0" name=""/>
-        <dsp:cNvSpPr/>
-      </dsp:nvSpPr>
-      <dsp:spPr>
-        <a:xfrm>
-          <a:off x="6742837" y="381911"/>
-          <a:ext cx="1944000" cy="1944000"/>
-        </a:xfrm>
-        <a:prstGeom prst="rect">
-          <a:avLst/>
-        </a:prstGeom>
-        <a:blipFill>
-          <a:blip xmlns:r="http://schemas.openxmlformats.org/officeDocument/2006/relationships" r:embed="rId3">
-            <a:extLst>
-              <a:ext uri="{28A0092B-C50C-407E-A947-70E740481C1C}">
-                <a14:useLocalDpi xmlns:a14="http://schemas.microsoft.com/office/drawing/2010/main" val="0"/>
-              </a:ext>
-              <a:ext uri="{96DAC541-7B7A-43D3-8B79-37D633B846F1}">
-                <asvg:svgBlip xmlns:asvg="http://schemas.microsoft.com/office/drawing/2016/SVG/main" r:embed="rId4"/>
-              </a:ext>
-            </a:extLst>
-          </a:blip>
-          <a:stretch>
-            <a:fillRect/>
-          </a:stretch>
-        </a:blipFill>
-        <a:ln w="15875" cap="rnd" cmpd="sng" algn="ctr">
-          <a:noFill/>
-          <a:prstDash val="solid"/>
-        </a:ln>
-        <a:effectLst/>
-      </dsp:spPr>
-      <dsp:style>
-        <a:lnRef idx="2">
-          <a:scrgbClr r="0" g="0" b="0"/>
-        </a:lnRef>
-        <a:fillRef idx="1">
-          <a:scrgbClr r="0" g="0" b="0"/>
-        </a:fillRef>
-        <a:effectRef idx="0">
-          <a:scrgbClr r="0" g="0" b="0"/>
-        </a:effectRef>
-        <a:fontRef idx="minor">
-          <a:schemeClr val="lt1"/>
-        </a:fontRef>
-      </dsp:style>
-    </dsp:sp>
-    <dsp:sp modelId="{918BFF7D-EDC8-4940-B0A9-1664EE930606}">
-      <dsp:nvSpPr>
-        <dsp:cNvPr id="0" name=""/>
-        <dsp:cNvSpPr/>
-      </dsp:nvSpPr>
-      <dsp:spPr>
-        <a:xfrm>
-          <a:off x="5554837" y="2796457"/>
-          <a:ext cx="4320000" cy="720000"/>
-        </a:xfrm>
-        <a:prstGeom prst="rect">
-          <a:avLst/>
-        </a:prstGeom>
-        <a:noFill/>
-        <a:ln>
-          <a:noFill/>
-        </a:ln>
-        <a:effectLst/>
-      </dsp:spPr>
-      <dsp:style>
-        <a:lnRef idx="0">
-          <a:scrgbClr r="0" g="0" b="0"/>
-        </a:lnRef>
-        <a:fillRef idx="0">
-          <a:scrgbClr r="0" g="0" b="0"/>
-        </a:fillRef>
-        <a:effectRef idx="0">
-          <a:scrgbClr r="0" g="0" b="0"/>
-        </a:effectRef>
-        <a:fontRef idx="minor"/>
-      </dsp:style>
-      <dsp:txBody>
-        <a:bodyPr spcFirstLastPara="0" vert="horz" wrap="square" lIns="0" tIns="0" rIns="0" bIns="0" numCol="1" spcCol="1270" anchor="t" anchorCtr="0">
-          <a:noAutofit/>
-        </a:bodyPr>
-        <a:lstStyle/>
-        <a:p>
-          <a:pPr marL="0" lvl="0" indent="0" algn="ctr" defTabSz="1022350">
-            <a:lnSpc>
-              <a:spcPct val="90000"/>
-            </a:lnSpc>
-            <a:spcBef>
-              <a:spcPct val="0"/>
-            </a:spcBef>
-            <a:spcAft>
-              <a:spcPct val="35000"/>
-            </a:spcAft>
-            <a:buNone/>
-          </a:pPr>
-          <a:r>
-            <a:rPr lang="en-US" sz="2300" kern="1200"/>
-            <a:t>HTTPS communication between web app and API</a:t>
-          </a:r>
-        </a:p>
-      </dsp:txBody>
-      <dsp:txXfrm>
-        <a:off x="5554837" y="2796457"/>
-        <a:ext cx="4320000" cy="720000"/>
-      </dsp:txXfrm>
-    </dsp:sp>
-  </dsp:spTree>
-</dsp:drawing>
-</file>
-
-<file path=ppt/diagrams/layout1.xml><?xml version="1.0" encoding="utf-8"?>
-<dgm:layoutDef xmlns:dgm="http://schemas.openxmlformats.org/drawingml/2006/diagram" xmlns:a="http://schemas.openxmlformats.org/drawingml/2006/main" uniqueId="urn:microsoft.com/office/officeart/2018/2/layout/IconLabelList">
-  <dgm:title val="Icon Label List"/>
-  <dgm:desc val="Use to show non-sequential or grouped chunks of information accompanied by a related visuals. Works best with icons or small pictures with short text captions."/>
-  <dgm:catLst>
-    <dgm:cat type="icon" pri="500"/>
-  </dgm:catLst>
-  <dgm:sampData useDef="1">
-    <dgm:dataModel>
-      <dgm:ptLst/>
-      <dgm:bg/>
-      <dgm:whole/>
-    </dgm:dataModel>
-  </dgm:sampData>
-  <dgm:styleData useDef="1">
-    <dgm:dataModel>
-      <dgm:ptLst/>
-      <dgm:bg/>
-      <dgm:whole/>
-    </dgm:dataModel>
-  </dgm:styleData>
-  <dgm:clrData useDef="1">
-    <dgm:dataModel>
-      <dgm:ptLst/>
-      <dgm:bg/>
-      <dgm:whole/>
-    </dgm:dataModel>
-  </dgm:clrData>
-  <dgm:layoutNode name="root">
-    <dgm:varLst>
-      <dgm:dir/>
-      <dgm:resizeHandles val="exact"/>
-    </dgm:varLst>
-    <dgm:choose name="Name0">
-      <dgm:if name="Name1" axis="self" func="var" arg="dir" op="equ" val="norm">
-        <dgm:alg type="snake">
-          <dgm:param type="grDir" val="tL"/>
-          <dgm:param type="flowDir" val="row"/>
-          <dgm:param type="contDir" val="sameDir"/>
-          <dgm:param type="off" val="ctr"/>
-          <dgm:param type="vertAlign" val="mid"/>
-          <dgm:param type="horzAlign" val="ctr"/>
-        </dgm:alg>
-      </dgm:if>
-      <dgm:else name="Name2">
-        <dgm:alg type="snake">
-          <dgm:param type="grDir" val="tR"/>
-          <dgm:param type="flowDir" val="row"/>
-          <dgm:param type="contDir" val="sameDir"/>
-          <dgm:param type="off" val="ctr"/>
-          <dgm:param type="vertAlign" val="mid"/>
-          <dgm:param type="horzAlign" val="ctr"/>
-        </dgm:alg>
-      </dgm:else>
-    </dgm:choose>
-    <dgm:shape xmlns:r="http://schemas.openxmlformats.org/officeDocument/2006/relationships" r:blip="">
-      <dgm:adjLst/>
-    </dgm:shape>
-    <dgm:presOf/>
-    <dgm:choose name="Name3">
-      <dgm:if name="Name4" axis="ch" ptType="node" func="cnt" op="lte" val="2">
-        <dgm:constrLst>
-          <dgm:constr type="h" for="ch" forName="compNode" refType="h" fact="0.4"/>
-          <dgm:constr type="w" for="ch" forName="compNode" val="120"/>
-          <dgm:constr type="w" for="ch" forName="sibTrans" refType="w" refFor="ch" refForName="compNode" fact="0.175"/>
-          <dgm:constr type="sp" refType="w" refFor="ch" refForName="compNode" op="equ" fact="0.25"/>
-          <dgm:constr type="primFontSz" for="des" ptType="node" op="equ" val="50"/>
-          <dgm:constr type="h" for="des" forName="compNode" op="equ"/>
-          <dgm:constr type="h" for="des" forName="textRect" op="equ"/>
-        </dgm:constrLst>
-      </dgm:if>
-      <dgm:if name="Name5" axis="ch" ptType="node" func="cnt" op="lte" val="4">
-        <dgm:constrLst>
-          <dgm:constr type="h" for="ch" forName="compNode" refType="h" fact="0.4"/>
-          <dgm:constr type="w" for="ch" forName="compNode" refType="w"/>
-          <dgm:constr type="w" for="ch" forName="sibTrans" refType="w" refFor="ch" refForName="compNode" fact="0.175"/>
-          <dgm:constr type="sp" refType="w" refFor="ch" refForName="compNode" op="equ" fact="0.25"/>
-          <dgm:constr type="primFontSz" for="des" ptType="node" op="equ" val="36"/>
-          <dgm:constr type="h" for="des" forName="compNode" op="equ"/>
-          <dgm:constr type="h" for="des" forName="textRect" op="equ"/>
-        </dgm:constrLst>
-      </dgm:if>
-      <dgm:else name="Name6">
-        <dgm:constrLst>
-          <dgm:constr type="h" for="ch" forName="compNode" refType="h" fact="0.4"/>
-          <dgm:constr type="w" for="ch" forName="compNode" refType="w"/>
-          <dgm:constr type="w" for="ch" forName="sibTrans" refType="w" refFor="ch" refForName="compNode" fact="0.175"/>
-          <dgm:constr type="sp" refType="w" refFor="ch" refForName="compNode" op="equ" fact="0.25"/>
-          <dgm:constr type="primFontSz" for="des" ptType="node" op="equ" val="24"/>
-          <dgm:constr type="h" for="des" forName="compNode" op="equ"/>
-          <dgm:constr type="h" for="des" forName="textRect" op="equ"/>
-        </dgm:constrLst>
-      </dgm:else>
-    </dgm:choose>
-    <dgm:ruleLst>
-      <dgm:rule type="w" for="ch" forName="compNode" val="50" fact="NaN" max="NaN"/>
-    </dgm:ruleLst>
-    <dgm:forEach name="Name7" axis="ch" ptType="node">
-      <dgm:layoutNode name="compNode">
-        <dgm:alg type="composite"/>
-        <dgm:shape xmlns:r="http://schemas.openxmlformats.org/officeDocument/2006/relationships" r:blip="">
-          <dgm:adjLst/>
-        </dgm:shape>
-        <dgm:presOf axis="self"/>
-        <dgm:constrLst>
-          <dgm:constr type="w" for="ch" forName="iconRect" refType="w" fact="0.45"/>
-          <dgm:constr type="h" for="ch" forName="iconRect" refType="w" refFor="ch" refForName="iconRect"/>
-          <dgm:constr type="ctrX" for="ch" forName="iconRect" refType="w" fact="0.5"/>
-          <dgm:constr type="t" for="ch" forName="iconRect"/>
-          <dgm:constr type="h" for="ch" forName="spaceRect" refType="h" fact="0.15"/>
-          <dgm:constr type="w" for="ch" forName="spaceRect" refType="w"/>
-          <dgm:constr type="l" for="ch" forName="spaceRect"/>
-          <dgm:constr type="t" for="ch" forName="spaceRect" refType="b" refFor="ch" refForName="iconRect"/>
-          <dgm:constr type="h" for="ch" forName="textRect" val="20"/>
-          <dgm:constr type="w" for="ch" forName="textRect" refType="w"/>
-          <dgm:constr type="l" for="ch" forName="textRect"/>
-          <dgm:constr type="t" for="ch" forName="textRect" refType="b" refFor="ch" refForName="spaceRect"/>
-        </dgm:constrLst>
-        <dgm:ruleLst>
-          <dgm:rule type="h" val="INF" fact="NaN" max="NaN"/>
-        </dgm:ruleLst>
-        <dgm:layoutNode name="iconRect" styleLbl="node1">
-          <dgm:alg type="sp"/>
-          <dgm:shape xmlns:r="http://schemas.openxmlformats.org/officeDocument/2006/relationships" type="rect" r:blip="" blipPhldr="1">
-            <dgm:adjLst/>
-          </dgm:shape>
-          <dgm:presOf/>
-          <dgm:constrLst/>
-          <dgm:ruleLst/>
-        </dgm:layoutNode>
-        <dgm:layoutNode name="spaceRect">
-          <dgm:alg type="sp"/>
-          <dgm:shape xmlns:r="http://schemas.openxmlformats.org/officeDocument/2006/relationships" r:blip="">
-            <dgm:adjLst/>
-          </dgm:shape>
-          <dgm:presOf/>
-          <dgm:constrLst/>
-          <dgm:ruleLst/>
-        </dgm:layoutNode>
-        <dgm:layoutNode name="textRect" styleLbl="revTx">
-          <dgm:varLst>
-            <dgm:chMax val="1"/>
-            <dgm:chPref val="1"/>
-          </dgm:varLst>
-          <dgm:alg type="tx">
-            <dgm:param type="txAnchorVert" val="t"/>
-          </dgm:alg>
-          <dgm:shape xmlns:r="http://schemas.openxmlformats.org/officeDocument/2006/relationships" type="rect" r:blip="">
-            <dgm:adjLst/>
-          </dgm:shape>
-          <dgm:presOf axis="self" ptType="node"/>
-          <dgm:constrLst>
-            <dgm:constr type="lMarg"/>
-            <dgm:constr type="rMarg"/>
-            <dgm:constr type="tMarg"/>
-            <dgm:constr type="bMarg"/>
-          </dgm:constrLst>
-          <dgm:ruleLst>
-            <dgm:rule type="primFontSz" val="11" fact="NaN" max="NaN"/>
-            <dgm:rule type="h" val="INF" fact="NaN" max="NaN"/>
-          </dgm:ruleLst>
-        </dgm:layoutNode>
-      </dgm:layoutNode>
-      <dgm:forEach name="Name8" axis="followSib" ptType="sibTrans" cnt="1">
-        <dgm:layoutNode name="sibTrans">
-          <dgm:alg type="sp"/>
-          <dgm:shape xmlns:r="http://schemas.openxmlformats.org/officeDocument/2006/relationships" r:blip="">
-            <dgm:adjLst/>
-          </dgm:shape>
-          <dgm:presOf axis="self"/>
-          <dgm:constrLst/>
-          <dgm:ruleLst/>
-        </dgm:layoutNode>
-      </dgm:forEach>
-    </dgm:forEach>
-  </dgm:layoutNode>
-  <dgm:extLst>
-    <a:ext uri="{68A01E43-0DF5-4B5B-8FA6-DAF915123BFB}">
-      <dgm1612:lstStyle xmlns:dgm1612="http://schemas.microsoft.com/office/drawing/2016/12/diagram">
-        <a:lvl1pPr>
-          <a:lnSpc>
-            <a:spcPct val="100000"/>
-          </a:lnSpc>
-        </a:lvl1pPr>
-      </dgm1612:lstStyle>
-    </a:ext>
-  </dgm:extLst>
-</dgm:layoutDef>
-</file>
-
-<file path=ppt/diagrams/quickStyle1.xml><?xml version="1.0" encoding="utf-8"?>
-<dgm:styleDef xmlns:dgm="http://schemas.openxmlformats.org/drawingml/2006/diagram" xmlns:a="http://schemas.openxmlformats.org/drawingml/2006/main" uniqueId="urn:microsoft.com/office/officeart/2005/8/quickstyle/simple1">
-  <dgm:title val=""/>
-  <dgm:desc val=""/>
-  <dgm:catLst>
-    <dgm:cat type="simple" pri="10100"/>
-  </dgm:catLst>
-  <dgm:scene3d>
-    <a:camera prst="orthographicFront"/>
-    <a:lightRig rig="threePt" dir="t"/>
-  </dgm:scene3d>
-  <dgm:styleLbl name="node0">
-    <dgm:scene3d>
-      <a:camera prst="orthographicFront"/>
-      <a:lightRig rig="threePt" dir="t"/>
-    </dgm:scene3d>
-    <dgm:sp3d/>
-    <dgm:txPr/>
-    <dgm:style>
-      <a:lnRef idx="2">
-        <a:scrgbClr r="0" g="0" b="0"/>
-      </a:lnRef>
-      <a:fillRef idx="1">
-        <a:scrgbClr r="0" g="0" b="0"/>
-      </a:fillRef>
-      <a:effectRef idx="0">
-        <a:scrgbClr r="0" g="0" b="0"/>
-      </a:effectRef>
-      <a:fontRef idx="minor">
-        <a:schemeClr val="lt1"/>
-      </a:fontRef>
-    </dgm:style>
-  </dgm:styleLbl>
-  <dgm:styleLbl name="lnNode1">
-    <dgm:scene3d>
-      <a:camera prst="orthographicFront"/>
-      <a:lightRig rig="threePt" dir="t"/>
-    </dgm:scene3d>
-    <dgm:sp3d/>
-    <dgm:txPr/>
-    <dgm:style>
-      <a:lnRef idx="2">
-        <a:scrgbClr r="0" g="0" b="0"/>
-      </a:lnRef>
-      <a:fillRef idx="1">
-        <a:scrgbClr r="0" g="0" b="0"/>
-      </a:fillRef>
-      <a:effectRef idx="0">
-        <a:scrgbClr r="0" g="0" b="0"/>
-      </a:effectRef>
-      <a:fontRef idx="minor">
-        <a:schemeClr val="lt1"/>
-      </a:fontRef>
-    </dgm:style>
-  </dgm:styleLbl>
-  <dgm:styleLbl name="vennNode1">
-    <dgm:scene3d>
-      <a:camera prst="orthographicFront"/>
-      <a:lightRig rig="threePt" dir="t"/>
-    </dgm:scene3d>
-    <dgm:sp3d/>
-    <dgm:txPr/>
-    <dgm:style>
-      <a:lnRef idx="2">
-        <a:scrgbClr r="0" g="0" b="0"/>
-      </a:lnRef>
-      <a:fillRef idx="1">
-        <a:scrgbClr r="0" g="0" b="0"/>
-      </a:fillRef>
-      <a:effectRef idx="0">
-        <a:scrgbClr r="0" g="0" b="0"/>
-      </a:effectRef>
-      <a:fontRef idx="minor">
-        <a:schemeClr val="tx1"/>
-      </a:fontRef>
-    </dgm:style>
-  </dgm:styleLbl>
-  <dgm:styleLbl name="alignNode1">
-    <dgm:scene3d>
-      <a:camera prst="orthographicFront"/>
-      <a:lightRig rig="threePt" dir="t"/>
-    </dgm:scene3d>
-    <dgm:sp3d/>
-    <dgm:txPr/>
-    <dgm:style>
-      <a:lnRef idx="2">
-        <a:scrgbClr r="0" g="0" b="0"/>
-      </a:lnRef>
-      <a:fillRef idx="1">
-        <a:scrgbClr r="0" g="0" b="0"/>
-      </a:fillRef>
-      <a:effectRef idx="0">
-        <a:scrgbClr r="0" g="0" b="0"/>
-      </a:effectRef>
-      <a:fontRef idx="minor">
-        <a:schemeClr val="lt1"/>
-      </a:fontRef>
-    </dgm:style>
-  </dgm:styleLbl>
-  <dgm:styleLbl name="node1">
-    <dgm:scene3d>
-      <a:camera prst="orthographicFront"/>
-      <a:lightRig rig="threePt" dir="t"/>
-    </dgm:scene3d>
-    <dgm:sp3d/>
-    <dgm:txPr/>
-    <dgm:style>
-      <a:lnRef idx="2">
-        <a:scrgbClr r="0" g="0" b="0"/>
-      </a:lnRef>
-      <a:fillRef idx="1">
-        <a:scrgbClr r="0" g="0" b="0"/>
-      </a:fillRef>
-      <a:effectRef idx="0">
-        <a:scrgbClr r="0" g="0" b="0"/>
-      </a:effectRef>
-      <a:fontRef idx="minor">
-        <a:schemeClr val="lt1"/>
-      </a:fontRef>
-    </dgm:style>
-  </dgm:styleLbl>
-  <dgm:styleLbl name="node2">
-    <dgm:scene3d>
-      <a:camera prst="orthographicFront"/>
-      <a:lightRig rig="threePt" dir="t"/>
-    </dgm:scene3d>
-    <dgm:sp3d/>
-    <dgm:txPr/>
-    <dgm:style>
-      <a:lnRef idx="2">
-        <a:scrgbClr r="0" g="0" b="0"/>
-      </a:lnRef>
-      <a:fillRef idx="1">
-        <a:scrgbClr r="0" g="0" b="0"/>
-      </a:fillRef>
-      <a:effectRef idx="0">
-        <a:scrgbClr r="0" g="0" b="0"/>
-      </a:effectRef>
-      <a:fontRef idx="minor">
-        <a:schemeClr val="lt1"/>
-      </a:fontRef>
-    </dgm:style>
-  </dgm:styleLbl>
-  <dgm:styleLbl name="node3">
-    <dgm:scene3d>
-      <a:camera prst="orthographicFront"/>
-      <a:lightRig rig="threePt" dir="t"/>
-    </dgm:scene3d>
-    <dgm:sp3d/>
-    <dgm:txPr/>
-    <dgm:style>
-      <a:lnRef idx="2">
-        <a:scrgbClr r="0" g="0" b="0"/>
-      </a:lnRef>
-      <a:fillRef idx="1">
-        <a:scrgbClr r="0" g="0" b="0"/>
-      </a:fillRef>
-      <a:effectRef idx="0">
-        <a:scrgbClr r="0" g="0" b="0"/>
-      </a:effectRef>
-      <a:fontRef idx="minor">
-        <a:schemeClr val="lt1"/>
-      </a:fontRef>
-    </dgm:style>
-  </dgm:styleLbl>
-  <dgm:styleLbl name="node4">
-    <dgm:scene3d>
-      <a:camera prst="orthographicFront"/>
-      <a:lightRig rig="threePt" dir="t"/>
-    </dgm:scene3d>
-    <dgm:sp3d/>
-    <dgm:txPr/>
-    <dgm:style>
-      <a:lnRef idx="2">
-        <a:scrgbClr r="0" g="0" b="0"/>
-      </a:lnRef>
-      <a:fillRef idx="1">
-        <a:scrgbClr r="0" g="0" b="0"/>
-      </a:fillRef>
-      <a:effectRef idx="0">
-        <a:scrgbClr r="0" g="0" b="0"/>
-      </a:effectRef>
-      <a:fontRef idx="minor">
-        <a:schemeClr val="lt1"/>
-      </a:fontRef>
-    </dgm:style>
-  </dgm:styleLbl>
-  <dgm:styleLbl name="fgImgPlace1">
-    <dgm:scene3d>
-      <a:camera prst="orthographicFront"/>
-      <a:lightRig rig="threePt" dir="t"/>
-    </dgm:scene3d>
-    <dgm:sp3d/>
-    <dgm:txPr/>
-    <dgm:style>
-      <a:lnRef idx="2">
-        <a:scrgbClr r="0" g="0" b="0"/>
-      </a:lnRef>
-      <a:fillRef idx="1">
-        <a:scrgbClr r="0" g="0" b="0"/>
-      </a:fillRef>
-      <a:effectRef idx="0">
-        <a:scrgbClr r="0" g="0" b="0"/>
-      </a:effectRef>
-      <a:fontRef idx="minor"/>
-    </dgm:style>
-  </dgm:styleLbl>
-  <dgm:styleLbl name="alignImgPlace1">
-    <dgm:scene3d>
-      <a:camera prst="orthographicFront"/>
-      <a:lightRig rig="threePt" dir="t"/>
-    </dgm:scene3d>
-    <dgm:sp3d/>
-    <dgm:txPr/>
-    <dgm:style>
-      <a:lnRef idx="2">
-        <a:scrgbClr r="0" g="0" b="0"/>
-      </a:lnRef>
-      <a:fillRef idx="1">
-        <a:scrgbClr r="0" g="0" b="0"/>
-      </a:fillRef>
-      <a:effectRef idx="0">
-        <a:scrgbClr r="0" g="0" b="0"/>
-      </a:effectRef>
-      <a:fontRef idx="minor"/>
-    </dgm:style>
-  </dgm:styleLbl>
-  <dgm:styleLbl name="bgImgPlace1">
-    <dgm:scene3d>
-      <a:camera prst="orthographicFront"/>
-      <a:lightRig rig="threePt" dir="t"/>
-    </dgm:scene3d>
-    <dgm:sp3d/>
-    <dgm:txPr/>
-    <dgm:style>
-      <a:lnRef idx="2">
-        <a:scrgbClr r="0" g="0" b="0"/>
-      </a:lnRef>
-      <a:fillRef idx="1">
-        <a:scrgbClr r="0" g="0" b="0"/>
-      </a:fillRef>
-      <a:effectRef idx="0">
-        <a:scrgbClr r="0" g="0" b="0"/>
-      </a:effectRef>
-      <a:fontRef idx="minor"/>
-    </dgm:style>
-  </dgm:styleLbl>
-  <dgm:styleLbl name="sibTrans2D1">
-    <dgm:scene3d>
-      <a:camera prst="orthographicFront"/>
-      <a:lightRig rig="threePt" dir="t"/>
-    </dgm:scene3d>
-    <dgm:sp3d/>
-    <dgm:txPr/>
-    <dgm:style>
-      <a:lnRef idx="0">
-        <a:scrgbClr r="0" g="0" b="0"/>
-      </a:lnRef>
-      <a:fillRef idx="1">
-        <a:scrgbClr r="0" g="0" b="0"/>
-      </a:fillRef>
-      <a:effectRef idx="0">
-        <a:scrgbClr r="0" g="0" b="0"/>
-      </a:effectRef>
-      <a:fontRef idx="minor">
-        <a:schemeClr val="lt1"/>
-      </a:fontRef>
-    </dgm:style>
-  </dgm:styleLbl>
-  <dgm:styleLbl name="fgSibTrans2D1">
-    <dgm:scene3d>
-      <a:camera prst="orthographicFront"/>
-      <a:lightRig rig="threePt" dir="t"/>
-    </dgm:scene3d>
-    <dgm:sp3d/>
-    <dgm:txPr/>
-    <dgm:style>
-      <a:lnRef idx="0">
-        <a:scrgbClr r="0" g="0" b="0"/>
-      </a:lnRef>
-      <a:fillRef idx="1">
-        <a:scrgbClr r="0" g="0" b="0"/>
-      </a:fillRef>
-      <a:effectRef idx="0">
-        <a:scrgbClr r="0" g="0" b="0"/>
-      </a:effectRef>
-      <a:fontRef idx="minor">
-        <a:schemeClr val="lt1"/>
-      </a:fontRef>
-    </dgm:style>
-  </dgm:styleLbl>
-  <dgm:styleLbl name="bgSibTrans2D1">
-    <dgm:scene3d>
-      <a:camera prst="orthographicFront"/>
-      <a:lightRig rig="threePt" dir="t"/>
-    </dgm:scene3d>
-    <dgm:sp3d/>
-    <dgm:txPr/>
-    <dgm:style>
-      <a:lnRef idx="0">
-        <a:scrgbClr r="0" g="0" b="0"/>
-      </a:lnRef>
-      <a:fillRef idx="1">
-        <a:scrgbClr r="0" g="0" b="0"/>
-      </a:fillRef>
-      <a:effectRef idx="0">
-        <a:scrgbClr r="0" g="0" b="0"/>
-      </a:effectRef>
-      <a:fontRef idx="minor">
-        <a:schemeClr val="lt1"/>
-      </a:fontRef>
-    </dgm:style>
-  </dgm:styleLbl>
-  <dgm:styleLbl name="sibTrans1D1">
-    <dgm:scene3d>
-      <a:camera prst="orthographicFront"/>
-      <a:lightRig rig="threePt" dir="t"/>
-    </dgm:scene3d>
-    <dgm:sp3d/>
-    <dgm:txPr/>
-    <dgm:style>
-      <a:lnRef idx="1">
-        <a:scrgbClr r="0" g="0" b="0"/>
-      </a:lnRef>
-      <a:fillRef idx="0">
-        <a:scrgbClr r="0" g="0" b="0"/>
-      </a:fillRef>
-      <a:effectRef idx="0">
-        <a:scrgbClr r="0" g="0" b="0"/>
-      </a:effectRef>
-      <a:fontRef idx="minor"/>
-    </dgm:style>
-  </dgm:styleLbl>
-  <dgm:styleLbl name="callout">
-    <dgm:scene3d>
-      <a:camera prst="orthographicFront"/>
-      <a:lightRig rig="threePt" dir="t"/>
-    </dgm:scene3d>
-    <dgm:sp3d/>
-    <dgm:txPr/>
-    <dgm:style>
-      <a:lnRef idx="2">
-        <a:scrgbClr r="0" g="0" b="0"/>
-      </a:lnRef>
-      <a:fillRef idx="1">
-        <a:scrgbClr r="0" g="0" b="0"/>
-      </a:fillRef>
-      <a:effectRef idx="0">
-        <a:scrgbClr r="0" g="0" b="0"/>
-      </a:effectRef>
-      <a:fontRef idx="minor"/>
-    </dgm:style>
-  </dgm:styleLbl>
-  <dgm:styleLbl name="asst0">
-    <dgm:scene3d>
-      <a:camera prst="orthographicFront"/>
-      <a:lightRig rig="threePt" dir="t"/>
-    </dgm:scene3d>
-    <dgm:sp3d/>
-    <dgm:txPr/>
-    <dgm:style>
-      <a:lnRef idx="2">
-        <a:scrgbClr r="0" g="0" b="0"/>
-      </a:lnRef>
-      <a:fillRef idx="1">
-        <a:scrgbClr r="0" g="0" b="0"/>
-      </a:fillRef>
-      <a:effectRef idx="0">
-        <a:scrgbClr r="0" g="0" b="0"/>
-      </a:effectRef>
-      <a:fontRef idx="minor">
-        <a:schemeClr val="lt1"/>
-      </a:fontRef>
-    </dgm:style>
-  </dgm:styleLbl>
-  <dgm:styleLbl name="asst1">
-    <dgm:scene3d>
-      <a:camera prst="orthographicFront"/>
-      <a:lightRig rig="threePt" dir="t"/>
-    </dgm:scene3d>
-    <dgm:sp3d/>
-    <dgm:txPr/>
-    <dgm:style>
-      <a:lnRef idx="2">
-        <a:scrgbClr r="0" g="0" b="0"/>
-      </a:lnRef>
-      <a:fillRef idx="1">
-        <a:scrgbClr r="0" g="0" b="0"/>
-      </a:fillRef>
-      <a:effectRef idx="0">
-        <a:scrgbClr r="0" g="0" b="0"/>
-      </a:effectRef>
-      <a:fontRef idx="minor">
-        <a:schemeClr val="lt1"/>
-      </a:fontRef>
-    </dgm:style>
-  </dgm:styleLbl>
-  <dgm:styleLbl name="asst2">
-    <dgm:scene3d>
-      <a:camera prst="orthographicFront"/>
-      <a:lightRig rig="threePt" dir="t"/>
-    </dgm:scene3d>
-    <dgm:sp3d/>
-    <dgm:txPr/>
-    <dgm:style>
-      <a:lnRef idx="2">
-        <a:scrgbClr r="0" g="0" b="0"/>
-      </a:lnRef>
-      <a:fillRef idx="1">
-        <a:scrgbClr r="0" g="0" b="0"/>
-      </a:fillRef>
-      <a:effectRef idx="0">
-        <a:scrgbClr r="0" g="0" b="0"/>
-      </a:effectRef>
-      <a:fontRef idx="minor">
-        <a:schemeClr val="lt1"/>
-      </a:fontRef>
-    </dgm:style>
-  </dgm:styleLbl>
-  <dgm:styleLbl name="asst3">
-    <dgm:scene3d>
-      <a:camera prst="orthographicFront"/>
-      <a:lightRig rig="threePt" dir="t"/>
-    </dgm:scene3d>
-    <dgm:sp3d/>
-    <dgm:txPr/>
-    <dgm:style>
-      <a:lnRef idx="2">
-        <a:scrgbClr r="0" g="0" b="0"/>
-      </a:lnRef>
-      <a:fillRef idx="1">
-        <a:scrgbClr r="0" g="0" b="0"/>
-      </a:fillRef>
-      <a:effectRef idx="0">
-        <a:scrgbClr r="0" g="0" b="0"/>
-      </a:effectRef>
-      <a:fontRef idx="minor">
-        <a:schemeClr val="lt1"/>
-      </a:fontRef>
-    </dgm:style>
-  </dgm:styleLbl>
-  <dgm:styleLbl name="asst4">
-    <dgm:scene3d>
-      <a:camera prst="orthographicFront"/>
-      <a:lightRig rig="threePt" dir="t"/>
-    </dgm:scene3d>
-    <dgm:sp3d/>
-    <dgm:txPr/>
-    <dgm:style>
-      <a:lnRef idx="2">
-        <a:scrgbClr r="0" g="0" b="0"/>
-      </a:lnRef>
-      <a:fillRef idx="1">
-        <a:scrgbClr r="0" g="0" b="0"/>
-      </a:fillRef>
-      <a:effectRef idx="0">
-        <a:scrgbClr r="0" g="0" b="0"/>
-      </a:effectRef>
-      <a:fontRef idx="minor">
-        <a:schemeClr val="lt1"/>
-      </a:fontRef>
-    </dgm:style>
-  </dgm:styleLbl>
-  <dgm:styleLbl name="parChTrans2D1">
-    <dgm:scene3d>
-      <a:camera prst="orthographicFront"/>
-      <a:lightRig rig="threePt" dir="t"/>
-    </dgm:scene3d>
-    <dgm:sp3d/>
-    <dgm:txPr/>
-    <dgm:style>
-      <a:lnRef idx="2">
-        <a:scrgbClr r="0" g="0" b="0"/>
-      </a:lnRef>
-      <a:fillRef idx="1">
-        <a:scrgbClr r="0" g="0" b="0"/>
-      </a:fillRef>
-      <a:effectRef idx="0">
-        <a:scrgbClr r="0" g="0" b="0"/>
-      </a:effectRef>
-      <a:fontRef idx="minor">
-        <a:schemeClr val="lt1"/>
-      </a:fontRef>
-    </dgm:style>
-  </dgm:styleLbl>
-  <dgm:styleLbl name="parChTrans2D2">
-    <dgm:scene3d>
-      <a:camera prst="orthographicFront"/>
-      <a:lightRig rig="threePt" dir="t"/>
-    </dgm:scene3d>
-    <dgm:sp3d/>
-    <dgm:txPr/>
-    <dgm:style>
-      <a:lnRef idx="2">
-        <a:scrgbClr r="0" g="0" b="0"/>
-      </a:lnRef>
-      <a:fillRef idx="1">
-        <a:scrgbClr r="0" g="0" b="0"/>
-      </a:fillRef>
-      <a:effectRef idx="0">
-        <a:scrgbClr r="0" g="0" b="0"/>
-      </a:effectRef>
-      <a:fontRef idx="minor">
-        <a:schemeClr val="lt1"/>
-      </a:fontRef>
-    </dgm:style>
-  </dgm:styleLbl>
-  <dgm:styleLbl name="parChTrans2D3">
-    <dgm:scene3d>
-      <a:camera prst="orthographicFront"/>
-      <a:lightRig rig="threePt" dir="t"/>
-    </dgm:scene3d>
-    <dgm:sp3d/>
-    <dgm:txPr/>
-    <dgm:style>
-      <a:lnRef idx="2">
-        <a:scrgbClr r="0" g="0" b="0"/>
-      </a:lnRef>
-      <a:fillRef idx="1">
-        <a:scrgbClr r="0" g="0" b="0"/>
-      </a:fillRef>
-      <a:effectRef idx="0">
-        <a:scrgbClr r="0" g="0" b="0"/>
-      </a:effectRef>
-      <a:fontRef idx="minor">
-        <a:schemeClr val="lt1"/>
-      </a:fontRef>
-    </dgm:style>
-  </dgm:styleLbl>
-  <dgm:styleLbl name="parChTrans2D4">
-    <dgm:scene3d>
-      <a:camera prst="orthographicFront"/>
-      <a:lightRig rig="threePt" dir="t"/>
-    </dgm:scene3d>
-    <dgm:sp3d/>
-    <dgm:txPr/>
-    <dgm:style>
-      <a:lnRef idx="2">
-        <a:scrgbClr r="0" g="0" b="0"/>
-      </a:lnRef>
-      <a:fillRef idx="1">
-        <a:scrgbClr r="0" g="0" b="0"/>
-      </a:fillRef>
-      <a:effectRef idx="0">
-        <a:scrgbClr r="0" g="0" b="0"/>
-      </a:effectRef>
-      <a:fontRef idx="minor">
-        <a:schemeClr val="lt1"/>
-      </a:fontRef>
-    </dgm:style>
-  </dgm:styleLbl>
-  <dgm:styleLbl name="parChTrans1D1">
-    <dgm:scene3d>
-      <a:camera prst="orthographicFront"/>
-      <a:lightRig rig="threePt" dir="t"/>
-    </dgm:scene3d>
-    <dgm:sp3d/>
-    <dgm:txPr/>
-    <dgm:style>
-      <a:lnRef idx="2">
-        <a:scrgbClr r="0" g="0" b="0"/>
-      </a:lnRef>
-      <a:fillRef idx="0">
-        <a:scrgbClr r="0" g="0" b="0"/>
-      </a:fillRef>
-      <a:effectRef idx="0">
-        <a:scrgbClr r="0" g="0" b="0"/>
-      </a:effectRef>
-      <a:fontRef idx="minor"/>
-    </dgm:style>
-  </dgm:styleLbl>
-  <dgm:styleLbl name="parChTrans1D2">
-    <dgm:scene3d>
-      <a:camera prst="orthographicFront"/>
-      <a:lightRig rig="threePt" dir="t"/>
-    </dgm:scene3d>
-    <dgm:sp3d/>
-    <dgm:txPr/>
-    <dgm:style>
-      <a:lnRef idx="2">
-        <a:scrgbClr r="0" g="0" b="0"/>
-      </a:lnRef>
-      <a:fillRef idx="0">
-        <a:scrgbClr r="0" g="0" b="0"/>
-      </a:fillRef>
-      <a:effectRef idx="0">
-        <a:scrgbClr r="0" g="0" b="0"/>
-      </a:effectRef>
-      <a:fontRef idx="minor"/>
-    </dgm:style>
-  </dgm:styleLbl>
-  <dgm:styleLbl name="parChTrans1D3">
-    <dgm:scene3d>
-      <a:camera prst="orthographicFront"/>
-      <a:lightRig rig="threePt" dir="t"/>
-    </dgm:scene3d>
-    <dgm:sp3d/>
-    <dgm:txPr/>
-    <dgm:style>
-      <a:lnRef idx="2">
-        <a:scrgbClr r="0" g="0" b="0"/>
-      </a:lnRef>
-      <a:fillRef idx="0">
-        <a:scrgbClr r="0" g="0" b="0"/>
-      </a:fillRef>
-      <a:effectRef idx="0">
-        <a:scrgbClr r="0" g="0" b="0"/>
-      </a:effectRef>
-      <a:fontRef idx="minor"/>
-    </dgm:style>
-  </dgm:styleLbl>
-  <dgm:styleLbl name="parChTrans1D4">
-    <dgm:scene3d>
-      <a:camera prst="orthographicFront"/>
-      <a:lightRig rig="threePt" dir="t"/>
-    </dgm:scene3d>
-    <dgm:sp3d/>
-    <dgm:txPr/>
-    <dgm:style>
-      <a:lnRef idx="2">
-        <a:scrgbClr r="0" g="0" b="0"/>
-      </a:lnRef>
-      <a:fillRef idx="0">
-        <a:scrgbClr r="0" g="0" b="0"/>
-      </a:fillRef>
-      <a:effectRef idx="0">
-        <a:scrgbClr r="0" g="0" b="0"/>
-      </a:effectRef>
-      <a:fontRef idx="minor"/>
-    </dgm:style>
-  </dgm:styleLbl>
-  <dgm:styleLbl name="fgAcc1">
-    <dgm:scene3d>
-      <a:camera prst="orthographicFront"/>
-      <a:lightRig rig="threePt" dir="t"/>
-    </dgm:scene3d>
-    <dgm:sp3d/>
-    <dgm:txPr/>
-    <dgm:style>
-      <a:lnRef idx="2">
-        <a:scrgbClr r="0" g="0" b="0"/>
-      </a:lnRef>
-      <a:fillRef idx="1">
-        <a:scrgbClr r="0" g="0" b="0"/>
-      </a:fillRef>
-      <a:effectRef idx="0">
-        <a:scrgbClr r="0" g="0" b="0"/>
-      </a:effectRef>
-      <a:fontRef idx="minor"/>
-    </dgm:style>
-  </dgm:styleLbl>
-  <dgm:styleLbl name="conFgAcc1">
-    <dgm:scene3d>
-      <a:camera prst="orthographicFront"/>
-      <a:lightRig rig="threePt" dir="t"/>
-    </dgm:scene3d>
-    <dgm:sp3d/>
-    <dgm:txPr/>
-    <dgm:style>
-      <a:lnRef idx="2">
-        <a:scrgbClr r="0" g="0" b="0"/>
-      </a:lnRef>
-      <a:fillRef idx="1">
-        <a:scrgbClr r="0" g="0" b="0"/>
-      </a:fillRef>
-      <a:effectRef idx="0">
-        <a:scrgbClr r="0" g="0" b="0"/>
-      </a:effectRef>
-      <a:fontRef idx="minor"/>
-    </dgm:style>
-  </dgm:styleLbl>
-  <dgm:styleLbl name="alignAcc1">
-    <dgm:scene3d>
-      <a:camera prst="orthographicFront"/>
-      <a:lightRig rig="threePt" dir="t"/>
-    </dgm:scene3d>
-    <dgm:sp3d/>
-    <dgm:txPr/>
-    <dgm:style>
-      <a:lnRef idx="2">
-        <a:scrgbClr r="0" g="0" b="0"/>
-      </a:lnRef>
-      <a:fillRef idx="1">
-        <a:scrgbClr r="0" g="0" b="0"/>
-      </a:fillRef>
-      <a:effectRef idx="0">
-        <a:scrgbClr r="0" g="0" b="0"/>
-      </a:effectRef>
-      <a:fontRef idx="minor"/>
-    </dgm:style>
-  </dgm:styleLbl>
-  <dgm:styleLbl name="trAlignAcc1">
-    <dgm:scene3d>
-      <a:camera prst="orthographicFront"/>
-      <a:lightRig rig="threePt" dir="t"/>
-    </dgm:scene3d>
-    <dgm:sp3d/>
-    <dgm:txPr/>
-    <dgm:style>
-      <a:lnRef idx="1">
-        <a:scrgbClr r="0" g="0" b="0"/>
-      </a:lnRef>
-      <a:fillRef idx="1">
-        <a:scrgbClr r="0" g="0" b="0"/>
-      </a:fillRef>
-      <a:effectRef idx="0">
-        <a:scrgbClr r="0" g="0" b="0"/>
-      </a:effectRef>
-      <a:fontRef idx="minor"/>
-    </dgm:style>
-  </dgm:styleLbl>
-  <dgm:styleLbl name="bgAcc1">
-    <dgm:scene3d>
-      <a:camera prst="orthographicFront"/>
-      <a:lightRig rig="threePt" dir="t"/>
-    </dgm:scene3d>
-    <dgm:sp3d/>
-    <dgm:txPr/>
-    <dgm:style>
-      <a:lnRef idx="2">
-        <a:scrgbClr r="0" g="0" b="0"/>
-      </a:lnRef>
-      <a:fillRef idx="1">
-        <a:scrgbClr r="0" g="0" b="0"/>
-      </a:fillRef>
-      <a:effectRef idx="0">
-        <a:scrgbClr r="0" g="0" b="0"/>
-      </a:effectRef>
-      <a:fontRef idx="minor"/>
-    </dgm:style>
-  </dgm:styleLbl>
-  <dgm:styleLbl name="solidFgAcc1">
-    <dgm:scene3d>
-      <a:camera prst="orthographicFront"/>
-      <a:lightRig rig="threePt" dir="t"/>
-    </dgm:scene3d>
-    <dgm:sp3d/>
-    <dgm:txPr/>
-    <dgm:style>
-      <a:lnRef idx="2">
-        <a:scrgbClr r="0" g="0" b="0"/>
-      </a:lnRef>
-      <a:fillRef idx="1">
-        <a:scrgbClr r="0" g="0" b="0"/>
-      </a:fillRef>
-      <a:effectRef idx="0">
-        <a:scrgbClr r="0" g="0" b="0"/>
-      </a:effectRef>
-      <a:fontRef idx="minor"/>
-    </dgm:style>
-  </dgm:styleLbl>
-  <dgm:styleLbl name="solidAlignAcc1">
-    <dgm:scene3d>
-      <a:camera prst="orthographicFront"/>
-      <a:lightRig rig="threePt" dir="t"/>
-    </dgm:scene3d>
-    <dgm:sp3d/>
-    <dgm:txPr/>
-    <dgm:style>
-      <a:lnRef idx="2">
-        <a:scrgbClr r="0" g="0" b="0"/>
-      </a:lnRef>
-      <a:fillRef idx="1">
-        <a:scrgbClr r="0" g="0" b="0"/>
-      </a:fillRef>
-      <a:effectRef idx="0">
-        <a:scrgbClr r="0" g="0" b="0"/>
-      </a:effectRef>
-      <a:fontRef idx="minor"/>
-    </dgm:style>
-  </dgm:styleLbl>
-  <dgm:styleLbl name="solidBgAcc1">
-    <dgm:scene3d>
-      <a:camera prst="orthographicFront"/>
-      <a:lightRig rig="threePt" dir="t"/>
-    </dgm:scene3d>
-    <dgm:sp3d/>
-    <dgm:txPr/>
-    <dgm:style>
-      <a:lnRef idx="2">
-        <a:scrgbClr r="0" g="0" b="0"/>
-      </a:lnRef>
-      <a:fillRef idx="1">
-        <a:scrgbClr r="0" g="0" b="0"/>
-      </a:fillRef>
-      <a:effectRef idx="0">
-        <a:scrgbClr r="0" g="0" b="0"/>
-      </a:effectRef>
-      <a:fontRef idx="minor"/>
-    </dgm:style>
-  </dgm:styleLbl>
-  <dgm:styleLbl name="fgAccFollowNode1">
-    <dgm:scene3d>
-      <a:camera prst="orthographicFront"/>
-      <a:lightRig rig="threePt" dir="t"/>
-    </dgm:scene3d>
-    <dgm:sp3d/>
-    <dgm:txPr/>
-    <dgm:style>
-      <a:lnRef idx="2">
-        <a:scrgbClr r="0" g="0" b="0"/>
-      </a:lnRef>
-      <a:fillRef idx="1">
-        <a:scrgbClr r="0" g="0" b="0"/>
-      </a:fillRef>
-      <a:effectRef idx="0">
-        <a:scrgbClr r="0" g="0" b="0"/>
-      </a:effectRef>
-      <a:fontRef idx="minor"/>
-    </dgm:style>
-  </dgm:styleLbl>
-  <dgm:styleLbl name="alignAccFollowNode1">
-    <dgm:scene3d>
-      <a:camera prst="orthographicFront"/>
-      <a:lightRig rig="threePt" dir="t"/>
-    </dgm:scene3d>
-    <dgm:sp3d/>
-    <dgm:txPr/>
-    <dgm:style>
-      <a:lnRef idx="2">
-        <a:scrgbClr r="0" g="0" b="0"/>
-      </a:lnRef>
-      <a:fillRef idx="1">
-        <a:scrgbClr r="0" g="0" b="0"/>
-      </a:fillRef>
-      <a:effectRef idx="0">
-        <a:scrgbClr r="0" g="0" b="0"/>
-      </a:effectRef>
-      <a:fontRef idx="minor"/>
-    </dgm:style>
-  </dgm:styleLbl>
-  <dgm:styleLbl name="bgAccFollowNode1">
-    <dgm:scene3d>
-      <a:camera prst="orthographicFront"/>
-      <a:lightRig rig="threePt" dir="t"/>
-    </dgm:scene3d>
-    <dgm:sp3d/>
-    <dgm:txPr/>
-    <dgm:style>
-      <a:lnRef idx="2">
-        <a:scrgbClr r="0" g="0" b="0"/>
-      </a:lnRef>
-      <a:fillRef idx="1">
-        <a:scrgbClr r="0" g="0" b="0"/>
-      </a:fillRef>
-      <a:effectRef idx="0">
-        <a:scrgbClr r="0" g="0" b="0"/>
-      </a:effectRef>
-      <a:fontRef idx="minor"/>
-    </dgm:style>
-  </dgm:styleLbl>
-  <dgm:styleLbl name="fgAcc0">
-    <dgm:scene3d>
-      <a:camera prst="orthographicFront"/>
-      <a:lightRig rig="threePt" dir="t"/>
-    </dgm:scene3d>
-    <dgm:sp3d/>
-    <dgm:txPr/>
-    <dgm:style>
-      <a:lnRef idx="2">
-        <a:scrgbClr r="0" g="0" b="0"/>
-      </a:lnRef>
-      <a:fillRef idx="1">
-        <a:scrgbClr r="0" g="0" b="0"/>
-      </a:fillRef>
-      <a:effectRef idx="0">
-        <a:scrgbClr r="0" g="0" b="0"/>
-      </a:effectRef>
-      <a:fontRef idx="minor"/>
-    </dgm:style>
-  </dgm:styleLbl>
-  <dgm:styleLbl name="fgAcc2">
-    <dgm:scene3d>
-      <a:camera prst="orthographicFront"/>
-      <a:lightRig rig="threePt" dir="t"/>
-    </dgm:scene3d>
-    <dgm:sp3d/>
-    <dgm:txPr/>
-    <dgm:style>
-      <a:lnRef idx="2">
-        <a:scrgbClr r="0" g="0" b="0"/>
-      </a:lnRef>
-      <a:fillRef idx="1">
-        <a:scrgbClr r="0" g="0" b="0"/>
-      </a:fillRef>
-      <a:effectRef idx="0">
-        <a:scrgbClr r="0" g="0" b="0"/>
-      </a:effectRef>
-      <a:fontRef idx="minor"/>
-    </dgm:style>
-  </dgm:styleLbl>
-  <dgm:styleLbl name="fgAcc3">
-    <dgm:scene3d>
-      <a:camera prst="orthographicFront"/>
-      <a:lightRig rig="threePt" dir="t"/>
-    </dgm:scene3d>
-    <dgm:sp3d/>
-    <dgm:txPr/>
-    <dgm:style>
-      <a:lnRef idx="2">
-        <a:scrgbClr r="0" g="0" b="0"/>
-      </a:lnRef>
-      <a:fillRef idx="1">
-        <a:scrgbClr r="0" g="0" b="0"/>
-      </a:fillRef>
-      <a:effectRef idx="0">
-        <a:scrgbClr r="0" g="0" b="0"/>
-      </a:effectRef>
-      <a:fontRef idx="minor"/>
-    </dgm:style>
-  </dgm:styleLbl>
-  <dgm:styleLbl name="fgAcc4">
-    <dgm:scene3d>
-      <a:camera prst="orthographicFront"/>
-      <a:lightRig rig="threePt" dir="t"/>
-    </dgm:scene3d>
-    <dgm:sp3d/>
-    <dgm:txPr/>
-    <dgm:style>
-      <a:lnRef idx="2">
-        <a:scrgbClr r="0" g="0" b="0"/>
-      </a:lnRef>
-      <a:fillRef idx="1">
-        <a:scrgbClr r="0" g="0" b="0"/>
-      </a:fillRef>
-      <a:effectRef idx="0">
-        <a:scrgbClr r="0" g="0" b="0"/>
-      </a:effectRef>
-      <a:fontRef idx="minor"/>
-    </dgm:style>
-  </dgm:styleLbl>
-  <dgm:styleLbl name="bgShp">
-    <dgm:scene3d>
-      <a:camera prst="orthographicFront"/>
-      <a:lightRig rig="threePt" dir="t"/>
-    </dgm:scene3d>
-    <dgm:sp3d/>
-    <dgm:txPr/>
-    <dgm:style>
-      <a:lnRef idx="0">
-        <a:scrgbClr r="0" g="0" b="0"/>
-      </a:lnRef>
-      <a:fillRef idx="1">
-        <a:scrgbClr r="0" g="0" b="0"/>
-      </a:fillRef>
-      <a:effectRef idx="0">
-        <a:scrgbClr r="0" g="0" b="0"/>
-      </a:effectRef>
-      <a:fontRef idx="minor"/>
-    </dgm:style>
-  </dgm:styleLbl>
-  <dgm:styleLbl name="dkBgShp">
-    <dgm:scene3d>
-      <a:camera prst="orthographicFront"/>
-      <a:lightRig rig="threePt" dir="t"/>
-    </dgm:scene3d>
-    <dgm:sp3d/>
-    <dgm:txPr/>
-    <dgm:style>
-      <a:lnRef idx="0">
-        <a:scrgbClr r="0" g="0" b="0"/>
-      </a:lnRef>
-      <a:fillRef idx="1">
-        <a:scrgbClr r="0" g="0" b="0"/>
-      </a:fillRef>
-      <a:effectRef idx="0">
-        <a:scrgbClr r="0" g="0" b="0"/>
-      </a:effectRef>
-      <a:fontRef idx="minor"/>
-    </dgm:style>
-  </dgm:styleLbl>
-  <dgm:styleLbl name="trBgShp">
-    <dgm:scene3d>
-      <a:camera prst="orthographicFront"/>
-      <a:lightRig rig="threePt" dir="t"/>
-    </dgm:scene3d>
-    <dgm:sp3d/>
-    <dgm:txPr/>
-    <dgm:style>
-      <a:lnRef idx="0">
-        <a:scrgbClr r="0" g="0" b="0"/>
-      </a:lnRef>
-      <a:fillRef idx="1">
-        <a:scrgbClr r="0" g="0" b="0"/>
-      </a:fillRef>
-      <a:effectRef idx="0">
-        <a:scrgbClr r="0" g="0" b="0"/>
-      </a:effectRef>
-      <a:fontRef idx="minor"/>
-    </dgm:style>
-  </dgm:styleLbl>
-  <dgm:styleLbl name="fgShp">
-    <dgm:scene3d>
-      <a:camera prst="orthographicFront"/>
-      <a:lightRig rig="threePt" dir="t"/>
-    </dgm:scene3d>
-    <dgm:sp3d/>
-    <dgm:txPr/>
-    <dgm:style>
-      <a:lnRef idx="2">
-        <a:scrgbClr r="0" g="0" b="0"/>
-      </a:lnRef>
-      <a:fillRef idx="1">
-        <a:scrgbClr r="0" g="0" b="0"/>
-      </a:fillRef>
-      <a:effectRef idx="0">
-        <a:scrgbClr r="0" g="0" b="0"/>
-      </a:effectRef>
-      <a:fontRef idx="minor"/>
-    </dgm:style>
-  </dgm:styleLbl>
-  <dgm:styleLbl name="revTx">
-    <dgm:scene3d>
-      <a:camera prst="orthographicFront"/>
-      <a:lightRig rig="threePt" dir="t"/>
-    </dgm:scene3d>
-    <dgm:sp3d/>
-    <dgm:txPr/>
-    <dgm:style>
-      <a:lnRef idx="0">
-        <a:scrgbClr r="0" g="0" b="0"/>
-      </a:lnRef>
-      <a:fillRef idx="0">
-        <a:scrgbClr r="0" g="0" b="0"/>
-      </a:fillRef>
-      <a:effectRef idx="0">
-        <a:scrgbClr r="0" g="0" b="0"/>
-      </a:effectRef>
-      <a:fontRef idx="minor"/>
-    </dgm:style>
-  </dgm:styleLbl>
-</dgm:styleDef>
-</file>
-
 <file path=ppt/ink/ink1.xml><?xml version="1.0" encoding="utf-8"?>
 <inkml:ink xmlns:inkml="http://www.w3.org/2003/InkML">
   <inkml:definitions>
@@ -9930,6 +7337,390 @@
   <p:cSld>
     <p:spTree>
       <p:nvGrpSpPr>
+        <p:cNvPr id="1" name="">
+          <a:extLst>
+            <a:ext uri="{FF2B5EF4-FFF2-40B4-BE49-F238E27FC236}">
+              <a16:creationId xmlns:a16="http://schemas.microsoft.com/office/drawing/2014/main" id="{984B77C8-86F8-E297-FD90-C6EB3144DB1E}"/>
+            </a:ext>
+          </a:extLst>
+        </p:cNvPr>
+        <p:cNvGrpSpPr/>
+        <p:nvPr/>
+      </p:nvGrpSpPr>
+      <p:grpSpPr>
+        <a:xfrm>
+          <a:off x="0" y="0"/>
+          <a:ext cx="0" cy="0"/>
+          <a:chOff x="0" y="0"/>
+          <a:chExt cx="0" cy="0"/>
+        </a:xfrm>
+      </p:grpSpPr>
+      <p:sp>
+        <p:nvSpPr>
+          <p:cNvPr id="2" name="Título 1">
+            <a:extLst>
+              <a:ext uri="{FF2B5EF4-FFF2-40B4-BE49-F238E27FC236}">
+                <a16:creationId xmlns:a16="http://schemas.microsoft.com/office/drawing/2014/main" id="{4125AF98-02D2-4A52-30C9-70867A96324E}"/>
+              </a:ext>
+            </a:extLst>
+          </p:cNvPr>
+          <p:cNvSpPr>
+            <a:spLocks noGrp="1"/>
+          </p:cNvSpPr>
+          <p:nvPr>
+            <p:ph type="title"/>
+          </p:nvPr>
+        </p:nvSpPr>
+        <p:spPr>
+          <a:xfrm>
+            <a:off x="900506" y="1118808"/>
+            <a:ext cx="4671467" cy="4747683"/>
+          </a:xfrm>
+        </p:spPr>
+        <p:txBody>
+          <a:bodyPr anchor="ctr">
+            <a:normAutofit/>
+          </a:bodyPr>
+          <a:lstStyle/>
+          <a:p>
+            <a:pPr algn="l"/>
+            <a:r>
+              <a:rPr lang="en-US" sz="3400" dirty="0"/>
+              <a:t>REQUIREMENT:</a:t>
+            </a:r>
+            <a:br>
+              <a:rPr lang="en-US" sz="3400" dirty="0"/>
+            </a:br>
+            <a:r>
+              <a:rPr lang="en-US" sz="3400" dirty="0"/>
+              <a:t>PERFORMANCE</a:t>
+            </a:r>
+            <a:endParaRPr lang="es-ES" sz="3400" dirty="0"/>
+          </a:p>
+        </p:txBody>
+      </p:sp>
+      <p:sp>
+        <p:nvSpPr>
+          <p:cNvPr id="3" name="Marcador de contenido 2">
+            <a:extLst>
+              <a:ext uri="{FF2B5EF4-FFF2-40B4-BE49-F238E27FC236}">
+                <a16:creationId xmlns:a16="http://schemas.microsoft.com/office/drawing/2014/main" id="{2D80C310-5A23-B5E2-E3DC-253150498B92}"/>
+              </a:ext>
+            </a:extLst>
+          </p:cNvPr>
+          <p:cNvSpPr>
+            <a:spLocks noGrp="1"/>
+          </p:cNvSpPr>
+          <p:nvPr>
+            <p:ph idx="1"/>
+          </p:nvPr>
+        </p:nvSpPr>
+        <p:spPr>
+          <a:xfrm>
+            <a:off x="6498769" y="1118809"/>
+            <a:ext cx="5049763" cy="4747681"/>
+          </a:xfrm>
+          <a:effectLst/>
+        </p:spPr>
+        <p:txBody>
+          <a:bodyPr anchor="ctr">
+            <a:normAutofit/>
+          </a:bodyPr>
+          <a:lstStyle/>
+          <a:p>
+            <a:r>
+              <a:rPr lang="en-US" dirty="0">
+                <a:solidFill>
+                  <a:schemeClr val="tx1"/>
+                </a:solidFill>
+              </a:rPr>
+              <a:t>When a user makes a request, the system should respond within a maximum of 2 seconds during peak periods (5000 requests per second).</a:t>
+            </a:r>
+          </a:p>
+          <a:p>
+            <a:r>
+              <a:rPr lang="en-US" dirty="0">
+                <a:solidFill>
+                  <a:schemeClr val="tx1"/>
+                </a:solidFill>
+              </a:rPr>
+              <a:t>Architectural Extension: Required</a:t>
+            </a:r>
+          </a:p>
+        </p:txBody>
+      </p:sp>
+    </p:spTree>
+    <p:extLst>
+      <p:ext uri="{BB962C8B-B14F-4D97-AF65-F5344CB8AC3E}">
+        <p14:creationId xmlns:p14="http://schemas.microsoft.com/office/powerpoint/2010/main" val="2883465363"/>
+      </p:ext>
+    </p:extLst>
+  </p:cSld>
+  <p:clrMapOvr>
+    <a:masterClrMapping/>
+  </p:clrMapOvr>
+</p:sld>
+</file>
+
+<file path=ppt/slides/slide11.xml><?xml version="1.0" encoding="utf-8"?>
+<p:sld xmlns:a="http://schemas.openxmlformats.org/drawingml/2006/main" xmlns:r="http://schemas.openxmlformats.org/officeDocument/2006/relationships" xmlns:p="http://schemas.openxmlformats.org/presentationml/2006/main">
+  <p:cSld>
+    <p:spTree>
+      <p:nvGrpSpPr>
+        <p:cNvPr id="1" name="">
+          <a:extLst>
+            <a:ext uri="{FF2B5EF4-FFF2-40B4-BE49-F238E27FC236}">
+              <a16:creationId xmlns:a16="http://schemas.microsoft.com/office/drawing/2014/main" id="{B1C4D62A-20FC-49D3-6447-24E7BD8867F7}"/>
+            </a:ext>
+          </a:extLst>
+        </p:cNvPr>
+        <p:cNvGrpSpPr/>
+        <p:nvPr/>
+      </p:nvGrpSpPr>
+      <p:grpSpPr>
+        <a:xfrm>
+          <a:off x="0" y="0"/>
+          <a:ext cx="0" cy="0"/>
+          <a:chOff x="0" y="0"/>
+          <a:chExt cx="0" cy="0"/>
+        </a:xfrm>
+      </p:grpSpPr>
+      <p:sp>
+        <p:nvSpPr>
+          <p:cNvPr id="2" name="Title 1">
+            <a:extLst>
+              <a:ext uri="{FF2B5EF4-FFF2-40B4-BE49-F238E27FC236}">
+                <a16:creationId xmlns:a16="http://schemas.microsoft.com/office/drawing/2014/main" id="{0255E221-35D3-8772-BBCF-29A000DDE294}"/>
+              </a:ext>
+            </a:extLst>
+          </p:cNvPr>
+          <p:cNvSpPr>
+            <a:spLocks noGrp="1"/>
+          </p:cNvSpPr>
+          <p:nvPr>
+            <p:ph type="title"/>
+          </p:nvPr>
+        </p:nvSpPr>
+        <p:spPr>
+          <a:xfrm>
+            <a:off x="834013" y="1115568"/>
+            <a:ext cx="3487616" cy="4626864"/>
+          </a:xfrm>
+        </p:spPr>
+        <p:txBody>
+          <a:bodyPr>
+            <a:normAutofit/>
+          </a:bodyPr>
+          <a:lstStyle/>
+          <a:p>
+            <a:pPr algn="l"/>
+            <a:r>
+              <a:rPr lang="en-US" sz="3600" b="1" dirty="0"/>
+              <a:t>1. Integration and Persistence bottlenecks:</a:t>
+            </a:r>
+            <a:br>
+              <a:rPr lang="en-US" sz="3600" b="1" dirty="0"/>
+            </a:br>
+            <a:endParaRPr lang="en-ZM" sz="3600" dirty="0"/>
+          </a:p>
+        </p:txBody>
+      </p:sp>
+      <p:sp>
+        <p:nvSpPr>
+          <p:cNvPr id="3" name="Content Placeholder 2">
+            <a:extLst>
+              <a:ext uri="{FF2B5EF4-FFF2-40B4-BE49-F238E27FC236}">
+                <a16:creationId xmlns:a16="http://schemas.microsoft.com/office/drawing/2014/main" id="{5C992ADA-53CB-FDC5-2768-88146B8688A1}"/>
+              </a:ext>
+            </a:extLst>
+          </p:cNvPr>
+          <p:cNvSpPr>
+            <a:spLocks noGrp="1"/>
+          </p:cNvSpPr>
+          <p:nvPr>
+            <p:ph idx="1"/>
+          </p:nvPr>
+        </p:nvSpPr>
+        <p:spPr>
+          <a:xfrm>
+            <a:off x="5105398" y="1115568"/>
+            <a:ext cx="6245352" cy="4626864"/>
+          </a:xfrm>
+        </p:spPr>
+        <p:txBody>
+          <a:bodyPr anchor="ctr">
+            <a:normAutofit/>
+          </a:bodyPr>
+          <a:lstStyle/>
+          <a:p>
+            <a:pPr algn="just"/>
+            <a:r>
+              <a:rPr lang="en-US" dirty="0"/>
+              <a:t>During runtime, at least two instances of the Persistence and Integration adaptors must be deployed in order to cushion the load as these may create a bottleneck.</a:t>
+            </a:r>
+          </a:p>
+          <a:p>
+            <a:pPr algn="just"/>
+            <a:r>
+              <a:rPr lang="en-US" dirty="0"/>
+              <a:t>In the case where external systems where the required information must be pulled from, the user should get a response within the system time letting them know that the service they are requesting is currently unavailable. This can already happen via the Notification service.</a:t>
+            </a:r>
+          </a:p>
+          <a:p>
+            <a:endParaRPr lang="en-ZM" dirty="0"/>
+          </a:p>
+        </p:txBody>
+      </p:sp>
+      <p:sp>
+        <p:nvSpPr>
+          <p:cNvPr id="4" name="Título 1">
+            <a:extLst>
+              <a:ext uri="{FF2B5EF4-FFF2-40B4-BE49-F238E27FC236}">
+                <a16:creationId xmlns:a16="http://schemas.microsoft.com/office/drawing/2014/main" id="{55B4E936-42A7-E2B6-44E7-90517CAA52FD}"/>
+              </a:ext>
+            </a:extLst>
+          </p:cNvPr>
+          <p:cNvSpPr txBox="1">
+            <a:spLocks/>
+          </p:cNvSpPr>
+          <p:nvPr/>
+        </p:nvSpPr>
+        <p:spPr>
+          <a:xfrm>
+            <a:off x="630935" y="323088"/>
+            <a:ext cx="11329761" cy="1085088"/>
+          </a:xfrm>
+          <a:prstGeom prst="rect">
+            <a:avLst/>
+          </a:prstGeom>
+          <a:effectLst>
+            <a:outerShdw blurRad="25400" dir="17880000">
+              <a:srgbClr val="000000">
+                <a:alpha val="46000"/>
+              </a:srgbClr>
+            </a:outerShdw>
+          </a:effectLst>
+        </p:spPr>
+        <p:txBody>
+          <a:bodyPr vert="horz" lIns="91440" tIns="45720" rIns="91440" bIns="45720" rtlCol="0" anchor="b">
+            <a:normAutofit/>
+          </a:bodyPr>
+          <a:lstStyle>
+            <a:lvl1pPr algn="ctr" defTabSz="457200" rtl="0" eaLnBrk="1" latinLnBrk="0" hangingPunct="1">
+              <a:spcBef>
+                <a:spcPct val="0"/>
+              </a:spcBef>
+              <a:buNone/>
+              <a:defRPr sz="4000" kern="1200">
+                <a:ln>
+                  <a:solidFill>
+                    <a:schemeClr val="bg1">
+                      <a:lumMod val="75000"/>
+                      <a:lumOff val="25000"/>
+                      <a:alpha val="10000"/>
+                    </a:schemeClr>
+                  </a:solidFill>
+                </a:ln>
+                <a:solidFill>
+                  <a:schemeClr val="tx2"/>
+                </a:solidFill>
+                <a:effectLst>
+                  <a:outerShdw blurRad="9525" dist="25400" dir="14640000" algn="tl" rotWithShape="0">
+                    <a:schemeClr val="bg1">
+                      <a:alpha val="30000"/>
+                    </a:schemeClr>
+                  </a:outerShdw>
+                </a:effectLst>
+                <a:latin typeface="+mj-lt"/>
+                <a:ea typeface="+mj-ea"/>
+                <a:cs typeface="Trebuchet MS"/>
+              </a:defRPr>
+            </a:lvl1pPr>
+            <a:lvl2pPr eaLnBrk="1" hangingPunct="1">
+              <a:defRPr>
+                <a:solidFill>
+                  <a:schemeClr val="tx2"/>
+                </a:solidFill>
+              </a:defRPr>
+            </a:lvl2pPr>
+            <a:lvl3pPr eaLnBrk="1" hangingPunct="1">
+              <a:defRPr>
+                <a:solidFill>
+                  <a:schemeClr val="tx2"/>
+                </a:solidFill>
+              </a:defRPr>
+            </a:lvl3pPr>
+            <a:lvl4pPr eaLnBrk="1" hangingPunct="1">
+              <a:defRPr>
+                <a:solidFill>
+                  <a:schemeClr val="tx2"/>
+                </a:solidFill>
+              </a:defRPr>
+            </a:lvl4pPr>
+            <a:lvl5pPr eaLnBrk="1" hangingPunct="1">
+              <a:defRPr>
+                <a:solidFill>
+                  <a:schemeClr val="tx2"/>
+                </a:solidFill>
+              </a:defRPr>
+            </a:lvl5pPr>
+            <a:lvl6pPr eaLnBrk="1" hangingPunct="1">
+              <a:defRPr>
+                <a:solidFill>
+                  <a:schemeClr val="tx2"/>
+                </a:solidFill>
+              </a:defRPr>
+            </a:lvl6pPr>
+            <a:lvl7pPr eaLnBrk="1" hangingPunct="1">
+              <a:defRPr>
+                <a:solidFill>
+                  <a:schemeClr val="tx2"/>
+                </a:solidFill>
+              </a:defRPr>
+            </a:lvl7pPr>
+            <a:lvl8pPr eaLnBrk="1" hangingPunct="1">
+              <a:defRPr>
+                <a:solidFill>
+                  <a:schemeClr val="tx2"/>
+                </a:solidFill>
+              </a:defRPr>
+            </a:lvl8pPr>
+            <a:lvl9pPr eaLnBrk="1" hangingPunct="1">
+              <a:defRPr>
+                <a:solidFill>
+                  <a:schemeClr val="tx2"/>
+                </a:solidFill>
+              </a:defRPr>
+            </a:lvl9pPr>
+          </a:lstStyle>
+          <a:p>
+            <a:pPr algn="l"/>
+            <a:r>
+              <a:rPr lang="en-US" b="1" dirty="0"/>
+              <a:t>CURRENT WEAKNESSES:</a:t>
+            </a:r>
+            <a:endParaRPr lang="es-ES" dirty="0"/>
+          </a:p>
+        </p:txBody>
+      </p:sp>
+    </p:spTree>
+    <p:extLst>
+      <p:ext uri="{BB962C8B-B14F-4D97-AF65-F5344CB8AC3E}">
+        <p14:creationId xmlns:p14="http://schemas.microsoft.com/office/powerpoint/2010/main" val="1119246554"/>
+      </p:ext>
+    </p:extLst>
+  </p:cSld>
+  <p:clrMapOvr>
+    <a:masterClrMapping/>
+  </p:clrMapOvr>
+</p:sld>
+</file>
+
+<file path=ppt/slides/slide12.xml><?xml version="1.0" encoding="utf-8"?>
+<p:sld xmlns:a="http://schemas.openxmlformats.org/drawingml/2006/main" xmlns:r="http://schemas.openxmlformats.org/officeDocument/2006/relationships" xmlns:p="http://schemas.openxmlformats.org/presentationml/2006/main">
+  <p:cSld>
+    <p:spTree>
+      <p:nvGrpSpPr>
         <p:cNvPr id="1" name=""/>
         <p:cNvGrpSpPr/>
         <p:nvPr/>
@@ -9947,7 +7738,7 @@
           <p:cNvPr id="2" name="Title 1">
             <a:extLst>
               <a:ext uri="{FF2B5EF4-FFF2-40B4-BE49-F238E27FC236}">
-                <a16:creationId xmlns:a16="http://schemas.microsoft.com/office/drawing/2014/main" id="{9300C51F-749D-800C-7CAA-218B24BBBA95}"/>
+                <a16:creationId xmlns:a16="http://schemas.microsoft.com/office/drawing/2014/main" id="{577AB557-89EB-19D9-FCA3-830624D063DE}"/>
               </a:ext>
             </a:extLst>
           </p:cNvPr>
@@ -9963,16 +7754,16 @@
           <a:bodyPr/>
           <a:lstStyle/>
           <a:p>
-            <a:endParaRPr lang="en-ZM" dirty="0"/>
+            <a:endParaRPr lang="en-ZM"/>
           </a:p>
         </p:txBody>
       </p:sp>
       <p:pic>
         <p:nvPicPr>
-          <p:cNvPr id="7" name="Content Placeholder 6">
+          <p:cNvPr id="5" name="Content Placeholder 4">
             <a:extLst>
               <a:ext uri="{FF2B5EF4-FFF2-40B4-BE49-F238E27FC236}">
-                <a16:creationId xmlns:a16="http://schemas.microsoft.com/office/drawing/2014/main" id="{B5A44C1D-0D38-1327-7B27-84A9FCA7EDDE}"/>
+                <a16:creationId xmlns:a16="http://schemas.microsoft.com/office/drawing/2014/main" id="{E7EED4FF-D268-8925-BC37-72F4CA746538}"/>
               </a:ext>
             </a:extLst>
           </p:cNvPr>
@@ -9997,15 +7788,15 @@
         </p:blipFill>
         <p:spPr>
           <a:xfrm>
-            <a:off x="0" y="402771"/>
-            <a:ext cx="12192000" cy="5845629"/>
+            <a:off x="-26479" y="1349829"/>
+            <a:ext cx="12425847" cy="4898571"/>
           </a:xfrm>
         </p:spPr>
       </p:pic>
     </p:spTree>
     <p:extLst>
       <p:ext uri="{BB962C8B-B14F-4D97-AF65-F5344CB8AC3E}">
-        <p14:creationId xmlns:p14="http://schemas.microsoft.com/office/powerpoint/2010/main" val="1818847291"/>
+        <p14:creationId xmlns:p14="http://schemas.microsoft.com/office/powerpoint/2010/main" val="358379547"/>
       </p:ext>
     </p:extLst>
   </p:cSld>
@@ -10015,28 +7806,9 @@
 </p:sld>
 </file>
 
-<file path=ppt/slides/slide11.xml><?xml version="1.0" encoding="utf-8"?>
+<file path=ppt/slides/slide13.xml><?xml version="1.0" encoding="utf-8"?>
 <p:sld xmlns:a="http://schemas.openxmlformats.org/drawingml/2006/main" xmlns:r="http://schemas.openxmlformats.org/officeDocument/2006/relationships" xmlns:p="http://schemas.openxmlformats.org/presentationml/2006/main">
   <p:cSld>
-    <p:bg>
-      <p:bgPr>
-        <a:blipFill rotWithShape="1">
-          <a:blip r:embed="rId2">
-            <a:duotone>
-              <a:schemeClr val="bg2">
-                <a:shade val="80000"/>
-                <a:lumMod val="80000"/>
-              </a:schemeClr>
-              <a:schemeClr val="bg2">
-                <a:tint val="98000"/>
-              </a:schemeClr>
-            </a:duotone>
-          </a:blip>
-          <a:stretch/>
-        </a:blipFill>
-        <a:effectLst/>
-      </p:bgPr>
-    </p:bg>
     <p:spTree>
       <p:nvGrpSpPr>
         <p:cNvPr id="1" name=""/>
@@ -10051,1181 +7823,37 @@
           <a:chExt cx="0" cy="0"/>
         </a:xfrm>
       </p:grpSpPr>
-      <p:sp useBgFill="1">
-        <p:nvSpPr>
-          <p:cNvPr id="8" name="Rectangle 7">
+      <p:sp>
+        <p:nvSpPr>
+          <p:cNvPr id="2" name="Title 1">
             <a:extLst>
               <a:ext uri="{FF2B5EF4-FFF2-40B4-BE49-F238E27FC236}">
-                <a16:creationId xmlns:a16="http://schemas.microsoft.com/office/drawing/2014/main" id="{9A6C2C86-63BF-47D5-AA3F-905111A238E2}"/>
-              </a:ext>
-              <a:ext uri="{C183D7F6-B498-43B3-948B-1728B52AA6E4}">
-                <adec:decorative xmlns:adec="http://schemas.microsoft.com/office/drawing/2017/decorative" val="1"/>
+                <a16:creationId xmlns:a16="http://schemas.microsoft.com/office/drawing/2014/main" id="{A6FAFA5E-8F30-4191-8F34-87CF623B35B9}"/>
               </a:ext>
             </a:extLst>
           </p:cNvPr>
           <p:cNvSpPr>
-            <a:spLocks noGrp="1" noRot="1" noChangeAspect="1" noMove="1" noResize="1" noEditPoints="1" noAdjustHandles="1" noChangeArrowheads="1" noChangeShapeType="1" noTextEdit="1"/>
-          </p:cNvSpPr>
-          <p:nvPr>
-            <p:extLst>
-              <p:ext uri="{386F3935-93C4-4BCD-93E2-E3B085C9AB24}">
-                <p16:designElem xmlns:p16="http://schemas.microsoft.com/office/powerpoint/2015/main" val="1"/>
-              </p:ext>
-            </p:extLst>
-          </p:nvPr>
-        </p:nvSpPr>
-        <p:spPr>
-          <a:xfrm>
-            <a:off x="0" y="0"/>
-            <a:ext cx="12192000" cy="6858000"/>
-          </a:xfrm>
-          <a:prstGeom prst="rect">
-            <a:avLst/>
-          </a:prstGeom>
-          <a:ln>
-            <a:noFill/>
-          </a:ln>
-        </p:spPr>
-        <p:style>
-          <a:lnRef idx="2">
-            <a:schemeClr val="accent1">
-              <a:shade val="50000"/>
-            </a:schemeClr>
-          </a:lnRef>
-          <a:fillRef idx="1">
-            <a:schemeClr val="accent1"/>
-          </a:fillRef>
-          <a:effectRef idx="0">
-            <a:schemeClr val="accent1"/>
-          </a:effectRef>
-          <a:fontRef idx="minor">
-            <a:schemeClr val="lt1"/>
-          </a:fontRef>
-        </p:style>
-        <p:txBody>
-          <a:bodyPr rtlCol="0" anchor="ctr"/>
+            <a:spLocks noGrp="1"/>
+          </p:cNvSpPr>
+          <p:nvPr>
+            <p:ph type="title"/>
+          </p:nvPr>
+        </p:nvSpPr>
+        <p:spPr/>
+        <p:txBody>
+          <a:bodyPr/>
           <a:lstStyle/>
           <a:p>
-            <a:pPr algn="ctr"/>
-            <a:endParaRPr lang="en-US"/>
-          </a:p>
-        </p:txBody>
-      </p:sp>
-      <p:sp>
-        <p:nvSpPr>
-          <p:cNvPr id="2" name="Title 1">
+            <a:endParaRPr lang="en-ZM"/>
+          </a:p>
+        </p:txBody>
+      </p:sp>
+      <p:pic>
+        <p:nvPicPr>
+          <p:cNvPr id="5" name="Content Placeholder 4">
             <a:extLst>
               <a:ext uri="{FF2B5EF4-FFF2-40B4-BE49-F238E27FC236}">
-                <a16:creationId xmlns:a16="http://schemas.microsoft.com/office/drawing/2014/main" id="{FE991824-B68A-6E46-F513-9ED57B37DC97}"/>
-              </a:ext>
-            </a:extLst>
-          </p:cNvPr>
-          <p:cNvSpPr>
-            <a:spLocks noGrp="1"/>
-          </p:cNvSpPr>
-          <p:nvPr>
-            <p:ph type="title"/>
-          </p:nvPr>
-        </p:nvSpPr>
-        <p:spPr>
-          <a:xfrm>
-            <a:off x="834013" y="1115568"/>
-            <a:ext cx="3487616" cy="4626864"/>
-          </a:xfrm>
-        </p:spPr>
-        <p:txBody>
-          <a:bodyPr>
-            <a:normAutofit/>
-          </a:bodyPr>
-          <a:lstStyle/>
-          <a:p>
-            <a:pPr algn="l"/>
-            <a:r>
-              <a:rPr lang="en-US" sz="3600" b="1" dirty="0"/>
-              <a:t>2. Testability by Design:</a:t>
-            </a:r>
-            <a:endParaRPr lang="en-ZM" sz="3600" dirty="0"/>
-          </a:p>
-        </p:txBody>
-      </p:sp>
-      <p:cxnSp>
-        <p:nvCxnSpPr>
-          <p:cNvPr id="10" name="Straight Connector 9">
-            <a:extLst>
-              <a:ext uri="{FF2B5EF4-FFF2-40B4-BE49-F238E27FC236}">
-                <a16:creationId xmlns:a16="http://schemas.microsoft.com/office/drawing/2014/main" id="{425A0768-3044-4AA9-A889-D2CAA68C517A}"/>
-              </a:ext>
-              <a:ext uri="{C183D7F6-B498-43B3-948B-1728B52AA6E4}">
-                <adec:decorative xmlns:adec="http://schemas.microsoft.com/office/drawing/2017/decorative" val="1"/>
-              </a:ext>
-            </a:extLst>
-          </p:cNvPr>
-          <p:cNvCxnSpPr>
-            <a:cxnSpLocks noGrp="1" noRot="1" noChangeAspect="1" noMove="1" noResize="1" noEditPoints="1" noAdjustHandles="1" noChangeArrowheads="1" noChangeShapeType="1"/>
-          </p:cNvCxnSpPr>
-          <p:nvPr>
-            <p:extLst>
-              <p:ext uri="{386F3935-93C4-4BCD-93E2-E3B085C9AB24}">
-                <p16:designElem xmlns:p16="http://schemas.microsoft.com/office/powerpoint/2015/main" val="1"/>
-              </p:ext>
-            </p:extLst>
-          </p:nvPr>
-        </p:nvCxnSpPr>
-        <p:spPr>
-          <a:xfrm>
-            <a:off x="4654605" y="2057400"/>
-            <a:ext cx="0" cy="2743200"/>
-          </a:xfrm>
-          <a:prstGeom prst="line">
-            <a:avLst/>
-          </a:prstGeom>
-          <a:ln w="19050">
-            <a:solidFill>
-              <a:schemeClr val="tx2"/>
-            </a:solidFill>
-          </a:ln>
-        </p:spPr>
-        <p:style>
-          <a:lnRef idx="1">
-            <a:schemeClr val="accent1"/>
-          </a:lnRef>
-          <a:fillRef idx="0">
-            <a:schemeClr val="accent1"/>
-          </a:fillRef>
-          <a:effectRef idx="0">
-            <a:schemeClr val="accent1"/>
-          </a:effectRef>
-          <a:fontRef idx="minor">
-            <a:schemeClr val="tx1"/>
-          </a:fontRef>
-        </p:style>
-      </p:cxnSp>
-      <p:sp>
-        <p:nvSpPr>
-          <p:cNvPr id="3" name="Content Placeholder 2">
-            <a:extLst>
-              <a:ext uri="{FF2B5EF4-FFF2-40B4-BE49-F238E27FC236}">
-                <a16:creationId xmlns:a16="http://schemas.microsoft.com/office/drawing/2014/main" id="{3BA3024D-1C22-0AF7-81C5-D00687464850}"/>
-              </a:ext>
-            </a:extLst>
-          </p:cNvPr>
-          <p:cNvSpPr>
-            <a:spLocks noGrp="1"/>
-          </p:cNvSpPr>
-          <p:nvPr>
-            <p:ph idx="1"/>
-          </p:nvPr>
-        </p:nvSpPr>
-        <p:spPr>
-          <a:xfrm>
-            <a:off x="5105398" y="1115568"/>
-            <a:ext cx="6245352" cy="4626864"/>
-          </a:xfrm>
-        </p:spPr>
-        <p:txBody>
-          <a:bodyPr anchor="ctr">
-            <a:normAutofit/>
-          </a:bodyPr>
-          <a:lstStyle/>
-          <a:p>
-            <a:r>
-              <a:rPr lang="en-US" dirty="0"/>
-              <a:t>Integration Adapter abstracts external systems - can be mocked for unit testing</a:t>
-            </a:r>
-          </a:p>
-          <a:p>
-            <a:r>
-              <a:rPr lang="en-US" dirty="0"/>
-              <a:t>Persistence Adapter abstracts database - enables in-memory testing</a:t>
-            </a:r>
-          </a:p>
-          <a:p>
-            <a:r>
-              <a:rPr lang="en-US" dirty="0"/>
-              <a:t>Each component has clear inputs/outputs suitable for contract testing</a:t>
-            </a:r>
-          </a:p>
-          <a:p>
-            <a:r>
-              <a:rPr lang="en-US" dirty="0"/>
-              <a:t>Dynamic views document interaction flows useful for integration test scenarios</a:t>
-            </a:r>
-          </a:p>
-          <a:p>
-            <a:endParaRPr lang="en-US" dirty="0"/>
-          </a:p>
-          <a:p>
-            <a:endParaRPr lang="en-ZM" dirty="0"/>
-          </a:p>
-        </p:txBody>
-      </p:sp>
-    </p:spTree>
-    <p:extLst>
-      <p:ext uri="{BB962C8B-B14F-4D97-AF65-F5344CB8AC3E}">
-        <p14:creationId xmlns:p14="http://schemas.microsoft.com/office/powerpoint/2010/main" val="1483507386"/>
-      </p:ext>
-    </p:extLst>
-  </p:cSld>
-  <p:clrMapOvr>
-    <a:masterClrMapping/>
-  </p:clrMapOvr>
-</p:sld>
-</file>
-
-<file path=ppt/slides/slide12.xml><?xml version="1.0" encoding="utf-8"?>
-<p:sld xmlns:a="http://schemas.openxmlformats.org/drawingml/2006/main" xmlns:r="http://schemas.openxmlformats.org/officeDocument/2006/relationships" xmlns:p="http://schemas.openxmlformats.org/presentationml/2006/main">
-  <p:cSld>
-    <p:bg>
-      <p:bgPr>
-        <a:blipFill rotWithShape="1">
-          <a:blip r:embed="rId2">
-            <a:duotone>
-              <a:schemeClr val="bg2">
-                <a:shade val="80000"/>
-                <a:lumMod val="80000"/>
-              </a:schemeClr>
-              <a:schemeClr val="bg2">
-                <a:tint val="98000"/>
-              </a:schemeClr>
-            </a:duotone>
-          </a:blip>
-          <a:stretch/>
-        </a:blipFill>
-        <a:effectLst/>
-      </p:bgPr>
-    </p:bg>
-    <p:spTree>
-      <p:nvGrpSpPr>
-        <p:cNvPr id="1" name=""/>
-        <p:cNvGrpSpPr/>
-        <p:nvPr/>
-      </p:nvGrpSpPr>
-      <p:grpSpPr>
-        <a:xfrm>
-          <a:off x="0" y="0"/>
-          <a:ext cx="0" cy="0"/>
-          <a:chOff x="0" y="0"/>
-          <a:chExt cx="0" cy="0"/>
-        </a:xfrm>
-      </p:grpSpPr>
-      <p:sp useBgFill="1">
-        <p:nvSpPr>
-          <p:cNvPr id="8" name="Rectangle 7">
-            <a:extLst>
-              <a:ext uri="{FF2B5EF4-FFF2-40B4-BE49-F238E27FC236}">
-                <a16:creationId xmlns:a16="http://schemas.microsoft.com/office/drawing/2014/main" id="{9A6C2C86-63BF-47D5-AA3F-905111A238E2}"/>
-              </a:ext>
-              <a:ext uri="{C183D7F6-B498-43B3-948B-1728B52AA6E4}">
-                <adec:decorative xmlns:adec="http://schemas.microsoft.com/office/drawing/2017/decorative" val="1"/>
-              </a:ext>
-            </a:extLst>
-          </p:cNvPr>
-          <p:cNvSpPr>
-            <a:spLocks noGrp="1" noRot="1" noChangeAspect="1" noMove="1" noResize="1" noEditPoints="1" noAdjustHandles="1" noChangeArrowheads="1" noChangeShapeType="1" noTextEdit="1"/>
-          </p:cNvSpPr>
-          <p:nvPr>
-            <p:extLst>
-              <p:ext uri="{386F3935-93C4-4BCD-93E2-E3B085C9AB24}">
-                <p16:designElem xmlns:p16="http://schemas.microsoft.com/office/powerpoint/2015/main" val="1"/>
-              </p:ext>
-            </p:extLst>
-          </p:nvPr>
-        </p:nvSpPr>
-        <p:spPr>
-          <a:xfrm>
-            <a:off x="0" y="0"/>
-            <a:ext cx="12192000" cy="6858000"/>
-          </a:xfrm>
-          <a:prstGeom prst="rect">
-            <a:avLst/>
-          </a:prstGeom>
-          <a:ln>
-            <a:noFill/>
-          </a:ln>
-        </p:spPr>
-        <p:style>
-          <a:lnRef idx="2">
-            <a:schemeClr val="accent1">
-              <a:shade val="50000"/>
-            </a:schemeClr>
-          </a:lnRef>
-          <a:fillRef idx="1">
-            <a:schemeClr val="accent1"/>
-          </a:fillRef>
-          <a:effectRef idx="0">
-            <a:schemeClr val="accent1"/>
-          </a:effectRef>
-          <a:fontRef idx="minor">
-            <a:schemeClr val="lt1"/>
-          </a:fontRef>
-        </p:style>
-        <p:txBody>
-          <a:bodyPr rtlCol="0" anchor="ctr"/>
-          <a:lstStyle/>
-          <a:p>
-            <a:pPr algn="ctr"/>
-            <a:endParaRPr lang="en-US"/>
-          </a:p>
-        </p:txBody>
-      </p:sp>
-      <p:sp>
-        <p:nvSpPr>
-          <p:cNvPr id="2" name="Title 1">
-            <a:extLst>
-              <a:ext uri="{FF2B5EF4-FFF2-40B4-BE49-F238E27FC236}">
-                <a16:creationId xmlns:a16="http://schemas.microsoft.com/office/drawing/2014/main" id="{A10F5296-7D6A-AC7E-A3EF-4D5B8A2453B4}"/>
-              </a:ext>
-            </a:extLst>
-          </p:cNvPr>
-          <p:cNvSpPr>
-            <a:spLocks noGrp="1"/>
-          </p:cNvSpPr>
-          <p:nvPr>
-            <p:ph type="title"/>
-          </p:nvPr>
-        </p:nvSpPr>
-        <p:spPr>
-          <a:xfrm>
-            <a:off x="834013" y="1115568"/>
-            <a:ext cx="3487616" cy="4626864"/>
-          </a:xfrm>
-        </p:spPr>
-        <p:txBody>
-          <a:bodyPr>
-            <a:normAutofit/>
-          </a:bodyPr>
-          <a:lstStyle/>
-          <a:p>
-            <a:pPr algn="l"/>
-            <a:r>
-              <a:rPr lang="en-US" sz="3600" b="1" dirty="0"/>
-              <a:t>3. Deployment Independence:</a:t>
-            </a:r>
-            <a:endParaRPr lang="en-ZM" sz="3600" dirty="0"/>
-          </a:p>
-        </p:txBody>
-      </p:sp>
-      <p:cxnSp>
-        <p:nvCxnSpPr>
-          <p:cNvPr id="10" name="Straight Connector 9">
-            <a:extLst>
-              <a:ext uri="{FF2B5EF4-FFF2-40B4-BE49-F238E27FC236}">
-                <a16:creationId xmlns:a16="http://schemas.microsoft.com/office/drawing/2014/main" id="{425A0768-3044-4AA9-A889-D2CAA68C517A}"/>
-              </a:ext>
-              <a:ext uri="{C183D7F6-B498-43B3-948B-1728B52AA6E4}">
-                <adec:decorative xmlns:adec="http://schemas.microsoft.com/office/drawing/2017/decorative" val="1"/>
-              </a:ext>
-            </a:extLst>
-          </p:cNvPr>
-          <p:cNvCxnSpPr>
-            <a:cxnSpLocks noGrp="1" noRot="1" noChangeAspect="1" noMove="1" noResize="1" noEditPoints="1" noAdjustHandles="1" noChangeArrowheads="1" noChangeShapeType="1"/>
-          </p:cNvCxnSpPr>
-          <p:nvPr>
-            <p:extLst>
-              <p:ext uri="{386F3935-93C4-4BCD-93E2-E3B085C9AB24}">
-                <p16:designElem xmlns:p16="http://schemas.microsoft.com/office/powerpoint/2015/main" val="1"/>
-              </p:ext>
-            </p:extLst>
-          </p:nvPr>
-        </p:nvCxnSpPr>
-        <p:spPr>
-          <a:xfrm>
-            <a:off x="4654605" y="2057400"/>
-            <a:ext cx="0" cy="2743200"/>
-          </a:xfrm>
-          <a:prstGeom prst="line">
-            <a:avLst/>
-          </a:prstGeom>
-          <a:ln w="19050">
-            <a:solidFill>
-              <a:schemeClr val="tx2"/>
-            </a:solidFill>
-          </a:ln>
-        </p:spPr>
-        <p:style>
-          <a:lnRef idx="1">
-            <a:schemeClr val="accent1"/>
-          </a:lnRef>
-          <a:fillRef idx="0">
-            <a:schemeClr val="accent1"/>
-          </a:fillRef>
-          <a:effectRef idx="0">
-            <a:schemeClr val="accent1"/>
-          </a:effectRef>
-          <a:fontRef idx="minor">
-            <a:schemeClr val="tx1"/>
-          </a:fontRef>
-        </p:style>
-      </p:cxnSp>
-      <p:sp>
-        <p:nvSpPr>
-          <p:cNvPr id="3" name="Content Placeholder 2">
-            <a:extLst>
-              <a:ext uri="{FF2B5EF4-FFF2-40B4-BE49-F238E27FC236}">
-                <a16:creationId xmlns:a16="http://schemas.microsoft.com/office/drawing/2014/main" id="{2F722D86-143A-E623-FB54-DBD636FE4625}"/>
-              </a:ext>
-            </a:extLst>
-          </p:cNvPr>
-          <p:cNvSpPr>
-            <a:spLocks noGrp="1"/>
-          </p:cNvSpPr>
-          <p:nvPr>
-            <p:ph idx="1"/>
-          </p:nvPr>
-        </p:nvSpPr>
-        <p:spPr>
-          <a:xfrm>
-            <a:off x="5105398" y="1115568"/>
-            <a:ext cx="6245352" cy="4626864"/>
-          </a:xfrm>
-        </p:spPr>
-        <p:txBody>
-          <a:bodyPr anchor="ctr">
-            <a:normAutofit/>
-          </a:bodyPr>
-          <a:lstStyle/>
-          <a:p>
-            <a:r>
-              <a:rPr lang="en-US" dirty="0"/>
-              <a:t>Web Application (SPA) can be deployed separately from Backend API</a:t>
-            </a:r>
-          </a:p>
-          <a:p>
-            <a:r>
-              <a:rPr lang="en-US" dirty="0"/>
-              <a:t>Component-level separation within API container allows for future microservices extraction</a:t>
-            </a:r>
-          </a:p>
-          <a:p>
-            <a:r>
-              <a:rPr lang="en-US" dirty="0"/>
-              <a:t>Database schema changes can be managed through migration scripts independently</a:t>
-            </a:r>
-          </a:p>
-          <a:p>
-            <a:endParaRPr lang="en-US" dirty="0"/>
-          </a:p>
-        </p:txBody>
-      </p:sp>
-    </p:spTree>
-    <p:extLst>
-      <p:ext uri="{BB962C8B-B14F-4D97-AF65-F5344CB8AC3E}">
-        <p14:creationId xmlns:p14="http://schemas.microsoft.com/office/powerpoint/2010/main" val="334085847"/>
-      </p:ext>
-    </p:extLst>
-  </p:cSld>
-  <p:clrMapOvr>
-    <a:masterClrMapping/>
-  </p:clrMapOvr>
-</p:sld>
-</file>
-
-<file path=ppt/slides/slide13.xml><?xml version="1.0" encoding="utf-8"?>
-<p:sld xmlns:a="http://schemas.openxmlformats.org/drawingml/2006/main" xmlns:r="http://schemas.openxmlformats.org/officeDocument/2006/relationships" xmlns:p="http://schemas.openxmlformats.org/presentationml/2006/main">
-  <p:cSld>
-    <p:bg>
-      <p:bgPr>
-        <a:blipFill rotWithShape="1">
-          <a:blip r:embed="rId2">
-            <a:duotone>
-              <a:schemeClr val="bg2">
-                <a:shade val="80000"/>
-                <a:lumMod val="80000"/>
-              </a:schemeClr>
-              <a:schemeClr val="bg2">
-                <a:tint val="98000"/>
-              </a:schemeClr>
-            </a:duotone>
-          </a:blip>
-          <a:stretch/>
-        </a:blipFill>
-        <a:effectLst/>
-      </p:bgPr>
-    </p:bg>
-    <p:spTree>
-      <p:nvGrpSpPr>
-        <p:cNvPr id="1" name=""/>
-        <p:cNvGrpSpPr/>
-        <p:nvPr/>
-      </p:nvGrpSpPr>
-      <p:grpSpPr>
-        <a:xfrm>
-          <a:off x="0" y="0"/>
-          <a:ext cx="0" cy="0"/>
-          <a:chOff x="0" y="0"/>
-          <a:chExt cx="0" cy="0"/>
-        </a:xfrm>
-      </p:grpSpPr>
-      <p:sp useBgFill="1">
-        <p:nvSpPr>
-          <p:cNvPr id="8" name="Rectangle 7">
-            <a:extLst>
-              <a:ext uri="{FF2B5EF4-FFF2-40B4-BE49-F238E27FC236}">
-                <a16:creationId xmlns:a16="http://schemas.microsoft.com/office/drawing/2014/main" id="{9A6C2C86-63BF-47D5-AA3F-905111A238E2}"/>
-              </a:ext>
-              <a:ext uri="{C183D7F6-B498-43B3-948B-1728B52AA6E4}">
-                <adec:decorative xmlns:adec="http://schemas.microsoft.com/office/drawing/2017/decorative" val="1"/>
-              </a:ext>
-            </a:extLst>
-          </p:cNvPr>
-          <p:cNvSpPr>
-            <a:spLocks noGrp="1" noRot="1" noChangeAspect="1" noMove="1" noResize="1" noEditPoints="1" noAdjustHandles="1" noChangeArrowheads="1" noChangeShapeType="1" noTextEdit="1"/>
-          </p:cNvSpPr>
-          <p:nvPr>
-            <p:extLst>
-              <p:ext uri="{386F3935-93C4-4BCD-93E2-E3B085C9AB24}">
-                <p16:designElem xmlns:p16="http://schemas.microsoft.com/office/powerpoint/2015/main" val="1"/>
-              </p:ext>
-            </p:extLst>
-          </p:nvPr>
-        </p:nvSpPr>
-        <p:spPr>
-          <a:xfrm>
-            <a:off x="0" y="0"/>
-            <a:ext cx="12192000" cy="6858000"/>
-          </a:xfrm>
-          <a:prstGeom prst="rect">
-            <a:avLst/>
-          </a:prstGeom>
-          <a:ln>
-            <a:noFill/>
-          </a:ln>
-        </p:spPr>
-        <p:style>
-          <a:lnRef idx="2">
-            <a:schemeClr val="accent1">
-              <a:shade val="50000"/>
-            </a:schemeClr>
-          </a:lnRef>
-          <a:fillRef idx="1">
-            <a:schemeClr val="accent1"/>
-          </a:fillRef>
-          <a:effectRef idx="0">
-            <a:schemeClr val="accent1"/>
-          </a:effectRef>
-          <a:fontRef idx="minor">
-            <a:schemeClr val="lt1"/>
-          </a:fontRef>
-        </p:style>
-        <p:txBody>
-          <a:bodyPr rtlCol="0" anchor="ctr"/>
-          <a:lstStyle/>
-          <a:p>
-            <a:pPr algn="ctr"/>
-            <a:endParaRPr lang="en-US"/>
-          </a:p>
-        </p:txBody>
-      </p:sp>
-      <p:sp>
-        <p:nvSpPr>
-          <p:cNvPr id="2" name="Title 1">
-            <a:extLst>
-              <a:ext uri="{FF2B5EF4-FFF2-40B4-BE49-F238E27FC236}">
-                <a16:creationId xmlns:a16="http://schemas.microsoft.com/office/drawing/2014/main" id="{2CE60735-A537-3771-AF87-49D96D824C5F}"/>
-              </a:ext>
-            </a:extLst>
-          </p:cNvPr>
-          <p:cNvSpPr>
-            <a:spLocks noGrp="1"/>
-          </p:cNvSpPr>
-          <p:nvPr>
-            <p:ph type="title"/>
-          </p:nvPr>
-        </p:nvSpPr>
-        <p:spPr>
-          <a:xfrm>
-            <a:off x="834013" y="1115568"/>
-            <a:ext cx="3487616" cy="4626864"/>
-          </a:xfrm>
-        </p:spPr>
-        <p:txBody>
-          <a:bodyPr>
-            <a:normAutofit/>
-          </a:bodyPr>
-          <a:lstStyle/>
-          <a:p>
-            <a:pPr algn="l"/>
-            <a:r>
-              <a:rPr lang="en-US" sz="3600" b="1" dirty="0"/>
-              <a:t>4. Development Environment Support:</a:t>
-            </a:r>
-            <a:endParaRPr lang="en-ZM" sz="3600" dirty="0"/>
-          </a:p>
-        </p:txBody>
-      </p:sp>
-      <p:cxnSp>
-        <p:nvCxnSpPr>
-          <p:cNvPr id="10" name="Straight Connector 9">
-            <a:extLst>
-              <a:ext uri="{FF2B5EF4-FFF2-40B4-BE49-F238E27FC236}">
-                <a16:creationId xmlns:a16="http://schemas.microsoft.com/office/drawing/2014/main" id="{425A0768-3044-4AA9-A889-D2CAA68C517A}"/>
-              </a:ext>
-              <a:ext uri="{C183D7F6-B498-43B3-948B-1728B52AA6E4}">
-                <adec:decorative xmlns:adec="http://schemas.microsoft.com/office/drawing/2017/decorative" val="1"/>
-              </a:ext>
-            </a:extLst>
-          </p:cNvPr>
-          <p:cNvCxnSpPr>
-            <a:cxnSpLocks noGrp="1" noRot="1" noChangeAspect="1" noMove="1" noResize="1" noEditPoints="1" noAdjustHandles="1" noChangeArrowheads="1" noChangeShapeType="1"/>
-          </p:cNvCxnSpPr>
-          <p:nvPr>
-            <p:extLst>
-              <p:ext uri="{386F3935-93C4-4BCD-93E2-E3B085C9AB24}">
-                <p16:designElem xmlns:p16="http://schemas.microsoft.com/office/powerpoint/2015/main" val="1"/>
-              </p:ext>
-            </p:extLst>
-          </p:nvPr>
-        </p:nvCxnSpPr>
-        <p:spPr>
-          <a:xfrm>
-            <a:off x="4654605" y="2057400"/>
-            <a:ext cx="0" cy="2743200"/>
-          </a:xfrm>
-          <a:prstGeom prst="line">
-            <a:avLst/>
-          </a:prstGeom>
-          <a:ln w="19050">
-            <a:solidFill>
-              <a:schemeClr val="tx2"/>
-            </a:solidFill>
-          </a:ln>
-        </p:spPr>
-        <p:style>
-          <a:lnRef idx="1">
-            <a:schemeClr val="accent1"/>
-          </a:lnRef>
-          <a:fillRef idx="0">
-            <a:schemeClr val="accent1"/>
-          </a:fillRef>
-          <a:effectRef idx="0">
-            <a:schemeClr val="accent1"/>
-          </a:effectRef>
-          <a:fontRef idx="minor">
-            <a:schemeClr val="tx1"/>
-          </a:fontRef>
-        </p:style>
-      </p:cxnSp>
-      <p:sp>
-        <p:nvSpPr>
-          <p:cNvPr id="3" name="Content Placeholder 2">
-            <a:extLst>
-              <a:ext uri="{FF2B5EF4-FFF2-40B4-BE49-F238E27FC236}">
-                <a16:creationId xmlns:a16="http://schemas.microsoft.com/office/drawing/2014/main" id="{A095BDFC-CEBF-BE12-2C41-624DAAF080AD}"/>
-              </a:ext>
-            </a:extLst>
-          </p:cNvPr>
-          <p:cNvSpPr>
-            <a:spLocks noGrp="1"/>
-          </p:cNvSpPr>
-          <p:nvPr>
-            <p:ph idx="1"/>
-          </p:nvPr>
-        </p:nvSpPr>
-        <p:spPr>
-          <a:xfrm>
-            <a:off x="5105398" y="1115568"/>
-            <a:ext cx="6245352" cy="4626864"/>
-          </a:xfrm>
-        </p:spPr>
-        <p:txBody>
-          <a:bodyPr anchor="ctr">
-            <a:normAutofit/>
-          </a:bodyPr>
-          <a:lstStyle/>
-          <a:p>
-            <a:r>
-              <a:rPr lang="en-US" dirty="0"/>
-              <a:t>Dedicated development deployment environment shown</a:t>
-            </a:r>
-          </a:p>
-          <a:p>
-            <a:r>
-              <a:rPr lang="en-US" dirty="0"/>
-              <a:t>Test instances of external systems enable isolated testing</a:t>
-            </a:r>
-            <a:endParaRPr lang="en-ZM" dirty="0"/>
-          </a:p>
-          <a:p>
-            <a:pPr marL="0" indent="0">
-              <a:buNone/>
-            </a:pPr>
-            <a:endParaRPr lang="en-ZM" dirty="0"/>
-          </a:p>
-        </p:txBody>
-      </p:sp>
-    </p:spTree>
-    <p:extLst>
-      <p:ext uri="{BB962C8B-B14F-4D97-AF65-F5344CB8AC3E}">
-        <p14:creationId xmlns:p14="http://schemas.microsoft.com/office/powerpoint/2010/main" val="4077293303"/>
-      </p:ext>
-    </p:extLst>
-  </p:cSld>
-  <p:clrMapOvr>
-    <a:masterClrMapping/>
-  </p:clrMapOvr>
-</p:sld>
-</file>
-
-<file path=ppt/slides/slide14.xml><?xml version="1.0" encoding="utf-8"?>
-<p:sld xmlns:a="http://schemas.openxmlformats.org/drawingml/2006/main" xmlns:r="http://schemas.openxmlformats.org/officeDocument/2006/relationships" xmlns:p="http://schemas.openxmlformats.org/presentationml/2006/main">
-  <p:cSld>
-    <p:bg>
-      <p:bgPr>
-        <a:blipFill rotWithShape="1">
-          <a:blip r:embed="rId2">
-            <a:duotone>
-              <a:schemeClr val="bg2">
-                <a:shade val="80000"/>
-                <a:lumMod val="80000"/>
-              </a:schemeClr>
-              <a:schemeClr val="bg2">
-                <a:tint val="98000"/>
-              </a:schemeClr>
-            </a:duotone>
-          </a:blip>
-          <a:stretch/>
-        </a:blipFill>
-        <a:effectLst/>
-      </p:bgPr>
-    </p:bg>
-    <p:spTree>
-      <p:nvGrpSpPr>
-        <p:cNvPr id="1" name="">
-          <a:extLst>
-            <a:ext uri="{FF2B5EF4-FFF2-40B4-BE49-F238E27FC236}">
-              <a16:creationId xmlns:a16="http://schemas.microsoft.com/office/drawing/2014/main" id="{9CD5A564-3280-47EA-6EB4-37EE3CC4F677}"/>
-            </a:ext>
-          </a:extLst>
-        </p:cNvPr>
-        <p:cNvGrpSpPr/>
-        <p:nvPr/>
-      </p:nvGrpSpPr>
-      <p:grpSpPr>
-        <a:xfrm>
-          <a:off x="0" y="0"/>
-          <a:ext cx="0" cy="0"/>
-          <a:chOff x="0" y="0"/>
-          <a:chExt cx="0" cy="0"/>
-        </a:xfrm>
-      </p:grpSpPr>
-      <p:sp>
-        <p:nvSpPr>
-          <p:cNvPr id="2" name="Título 1">
-            <a:extLst>
-              <a:ext uri="{FF2B5EF4-FFF2-40B4-BE49-F238E27FC236}">
-                <a16:creationId xmlns:a16="http://schemas.microsoft.com/office/drawing/2014/main" id="{14076DA3-E36E-FE13-DF66-EC0FC5678E7C}"/>
-              </a:ext>
-            </a:extLst>
-          </p:cNvPr>
-          <p:cNvSpPr>
-            <a:spLocks noGrp="1"/>
-          </p:cNvSpPr>
-          <p:nvPr>
-            <p:ph type="title"/>
-          </p:nvPr>
-        </p:nvSpPr>
-        <p:spPr>
-          <a:xfrm>
-            <a:off x="913795" y="609600"/>
-            <a:ext cx="5978072" cy="970450"/>
-          </a:xfrm>
-        </p:spPr>
-        <p:txBody>
-          <a:bodyPr>
-            <a:normAutofit/>
-          </a:bodyPr>
-          <a:lstStyle/>
-          <a:p>
-            <a:pPr>
-              <a:lnSpc>
-                <a:spcPct val="90000"/>
-              </a:lnSpc>
-            </a:pPr>
-            <a:r>
-              <a:rPr lang="en-US" sz="3100"/>
-              <a:t>REQUIREMENT: </a:t>
-            </a:r>
-            <a:br>
-              <a:rPr lang="en-US" sz="3100"/>
-            </a:br>
-            <a:r>
-              <a:rPr lang="en-US" sz="3100"/>
-              <a:t>SECURITY &amp; DATA PRIVACY</a:t>
-            </a:r>
-            <a:endParaRPr lang="es-ES" sz="3100"/>
-          </a:p>
-        </p:txBody>
-      </p:sp>
-      <p:sp>
-        <p:nvSpPr>
-          <p:cNvPr id="3" name="Marcador de contenido 2">
-            <a:extLst>
-              <a:ext uri="{FF2B5EF4-FFF2-40B4-BE49-F238E27FC236}">
-                <a16:creationId xmlns:a16="http://schemas.microsoft.com/office/drawing/2014/main" id="{B1DBC167-6B30-04B2-10C3-8F3E9D505C20}"/>
-              </a:ext>
-            </a:extLst>
-          </p:cNvPr>
-          <p:cNvSpPr>
-            <a:spLocks noGrp="1"/>
-          </p:cNvSpPr>
-          <p:nvPr>
-            <p:ph idx="1"/>
-          </p:nvPr>
-        </p:nvSpPr>
-        <p:spPr>
-          <a:xfrm>
-            <a:off x="913795" y="1828801"/>
-            <a:ext cx="5978072" cy="3866048"/>
-          </a:xfrm>
-        </p:spPr>
-        <p:txBody>
-          <a:bodyPr anchor="ctr">
-            <a:normAutofit/>
-          </a:bodyPr>
-          <a:lstStyle/>
-          <a:p>
-            <a:r>
-              <a:rPr lang="en-US"/>
-              <a:t>Protect sensitive user data (grades, PII, </a:t>
-            </a:r>
-            <a:r>
-              <a:rPr lang="en-US" err="1"/>
-              <a:t>etc</a:t>
-            </a:r>
-            <a:r>
-              <a:rPr lang="en-US"/>
-              <a:t>) with end-to-end encryption, role-based access control (RBAC).</a:t>
-            </a:r>
-          </a:p>
-          <a:p>
-            <a:pPr marL="0" indent="0">
-              <a:buNone/>
-            </a:pPr>
-            <a:endParaRPr lang="en-US"/>
-          </a:p>
-          <a:p>
-            <a:r>
-              <a:rPr lang="en-US"/>
-              <a:t>Architectural Extension: Required</a:t>
-            </a:r>
-          </a:p>
-        </p:txBody>
-      </p:sp>
-      <p:pic>
-        <p:nvPicPr>
-          <p:cNvPr id="5" name="Picture 4" descr="Padlock on computer motherboard">
-            <a:extLst>
-              <a:ext uri="{FF2B5EF4-FFF2-40B4-BE49-F238E27FC236}">
-                <a16:creationId xmlns:a16="http://schemas.microsoft.com/office/drawing/2014/main" id="{8051CC00-C6C0-DE9D-5B8F-ABB1588911B6}"/>
-              </a:ext>
-            </a:extLst>
-          </p:cNvPr>
-          <p:cNvPicPr>
-            <a:picLocks noChangeAspect="1"/>
-          </p:cNvPicPr>
-          <p:nvPr/>
-        </p:nvPicPr>
-        <p:blipFill>
-          <a:blip r:embed="rId3"/>
-          <a:srcRect l="16075" r="39428" b="-1"/>
-          <a:stretch>
-            <a:fillRect/>
-          </a:stretch>
-        </p:blipFill>
-        <p:spPr>
-          <a:xfrm>
-            <a:off x="7620351" y="10"/>
-            <a:ext cx="4571649" cy="6857990"/>
-          </a:xfrm>
-          <a:prstGeom prst="rect">
-            <a:avLst/>
-          </a:prstGeom>
-        </p:spPr>
-      </p:pic>
-      <p:pic>
-        <p:nvPicPr>
-          <p:cNvPr id="9" name="Picture 8">
-            <a:extLst>
-              <a:ext uri="{FF2B5EF4-FFF2-40B4-BE49-F238E27FC236}">
-                <a16:creationId xmlns:a16="http://schemas.microsoft.com/office/drawing/2014/main" id="{11772103-80A1-4212-B82B-261A06D067E2}"/>
-              </a:ext>
-              <a:ext uri="{C183D7F6-B498-43B3-948B-1728B52AA6E4}">
-                <adec:decorative xmlns:adec="http://schemas.microsoft.com/office/drawing/2017/decorative" val="1"/>
-              </a:ext>
-            </a:extLst>
-          </p:cNvPr>
-          <p:cNvPicPr>
-            <a:picLocks noGrp="1" noRot="1" noChangeAspect="1" noMove="1" noResize="1" noEditPoints="1" noAdjustHandles="1" noChangeArrowheads="1" noChangeShapeType="1" noCrop="1"/>
-          </p:cNvPicPr>
-          <p:nvPr>
-            <p:extLst>
-              <p:ext uri="{386F3935-93C4-4BCD-93E2-E3B085C9AB24}">
-                <p16:designElem xmlns:p16="http://schemas.microsoft.com/office/powerpoint/2015/main" val="1"/>
-              </p:ext>
-            </p:extLst>
-          </p:nvPr>
-        </p:nvPicPr>
-        <p:blipFill rotWithShape="1">
-          <a:blip r:embed="rId4">
-            <a:extLst>
-              <a:ext uri="{28A0092B-C50C-407E-A947-70E740481C1C}">
-                <a14:useLocalDpi xmlns:a14="http://schemas.microsoft.com/office/drawing/2010/main" val="0"/>
-              </a:ext>
-            </a:extLst>
-          </a:blip>
-          <a:srcRect t="964" r="2807" b="1446"/>
-          <a:stretch/>
-        </p:blipFill>
-        <p:spPr>
-          <a:xfrm>
-            <a:off x="7501468" y="1"/>
-            <a:ext cx="4690532" cy="6858000"/>
-          </a:xfrm>
-          <a:prstGeom prst="rect">
-            <a:avLst/>
-          </a:prstGeom>
-        </p:spPr>
-      </p:pic>
-    </p:spTree>
-    <p:extLst>
-      <p:ext uri="{BB962C8B-B14F-4D97-AF65-F5344CB8AC3E}">
-        <p14:creationId xmlns:p14="http://schemas.microsoft.com/office/powerpoint/2010/main" val="300417712"/>
-      </p:ext>
-    </p:extLst>
-  </p:cSld>
-  <p:clrMapOvr>
-    <a:masterClrMapping/>
-  </p:clrMapOvr>
-</p:sld>
-</file>
-
-<file path=ppt/slides/slide15.xml><?xml version="1.0" encoding="utf-8"?>
-<p:sld xmlns:a="http://schemas.openxmlformats.org/drawingml/2006/main" xmlns:r="http://schemas.openxmlformats.org/officeDocument/2006/relationships" xmlns:p="http://schemas.openxmlformats.org/presentationml/2006/main">
-  <p:cSld>
-    <p:bg>
-      <p:bgPr>
-        <a:blipFill rotWithShape="1">
-          <a:blip r:embed="rId2">
-            <a:duotone>
-              <a:schemeClr val="bg2">
-                <a:shade val="80000"/>
-                <a:lumMod val="80000"/>
-              </a:schemeClr>
-              <a:schemeClr val="bg2">
-                <a:tint val="98000"/>
-              </a:schemeClr>
-            </a:duotone>
-          </a:blip>
-          <a:stretch/>
-        </a:blipFill>
-        <a:effectLst/>
-      </p:bgPr>
-    </p:bg>
-    <p:spTree>
-      <p:nvGrpSpPr>
-        <p:cNvPr id="1" name="">
-          <a:extLst>
-            <a:ext uri="{FF2B5EF4-FFF2-40B4-BE49-F238E27FC236}">
-              <a16:creationId xmlns:a16="http://schemas.microsoft.com/office/drawing/2014/main" id="{438C8ECC-DEBD-9C29-DED3-D8CD5C21064E}"/>
-            </a:ext>
-          </a:extLst>
-        </p:cNvPr>
-        <p:cNvGrpSpPr/>
-        <p:nvPr/>
-      </p:nvGrpSpPr>
-      <p:grpSpPr>
-        <a:xfrm>
-          <a:off x="0" y="0"/>
-          <a:ext cx="0" cy="0"/>
-          <a:chOff x="0" y="0"/>
-          <a:chExt cx="0" cy="0"/>
-        </a:xfrm>
-      </p:grpSpPr>
-      <p:sp>
-        <p:nvSpPr>
-          <p:cNvPr id="2" name="Title 1">
-            <a:extLst>
-              <a:ext uri="{FF2B5EF4-FFF2-40B4-BE49-F238E27FC236}">
-                <a16:creationId xmlns:a16="http://schemas.microsoft.com/office/drawing/2014/main" id="{FCE3AF4B-DA69-8205-596C-F3631AE846C8}"/>
-              </a:ext>
-            </a:extLst>
-          </p:cNvPr>
-          <p:cNvSpPr>
-            <a:spLocks noGrp="1"/>
-          </p:cNvSpPr>
-          <p:nvPr>
-            <p:ph type="title"/>
-          </p:nvPr>
-        </p:nvSpPr>
-        <p:spPr>
-          <a:xfrm>
-            <a:off x="913795" y="609600"/>
-            <a:ext cx="10353762" cy="970450"/>
-          </a:xfrm>
-        </p:spPr>
-        <p:txBody>
-          <a:bodyPr>
-            <a:normAutofit/>
-          </a:bodyPr>
-          <a:lstStyle/>
-          <a:p>
-            <a:r>
-              <a:rPr lang="en-US" dirty="0"/>
-              <a:t>Current Strengths:</a:t>
-            </a:r>
-            <a:endParaRPr lang="en-ZM" dirty="0"/>
-          </a:p>
-        </p:txBody>
-      </p:sp>
-      <p:pic>
-        <p:nvPicPr>
-          <p:cNvPr id="11" name="Picture 10">
-            <a:extLst>
-              <a:ext uri="{FF2B5EF4-FFF2-40B4-BE49-F238E27FC236}">
-                <a16:creationId xmlns:a16="http://schemas.microsoft.com/office/drawing/2014/main" id="{06E80AB4-055C-437A-B2CE-9AB15FF19AE3}"/>
-              </a:ext>
-              <a:ext uri="{C183D7F6-B498-43B3-948B-1728B52AA6E4}">
-                <adec:decorative xmlns:adec="http://schemas.microsoft.com/office/drawing/2017/decorative" val="1"/>
-              </a:ext>
-            </a:extLst>
-          </p:cNvPr>
-          <p:cNvPicPr preferRelativeResize="0">
-            <a:picLocks noGrp="1" noRot="1" noChangeAspect="1" noMove="1" noResize="1" noEditPoints="1" noAdjustHandles="1" noChangeArrowheads="1" noChangeShapeType="1" noCrop="1"/>
-          </p:cNvPicPr>
-          <p:nvPr>
-            <p:extLst>
-              <p:ext uri="{386F3935-93C4-4BCD-93E2-E3B085C9AB24}">
-                <p16:designElem xmlns:p16="http://schemas.microsoft.com/office/powerpoint/2015/main" val="1"/>
-              </p:ext>
-            </p:extLst>
-          </p:nvPr>
-        </p:nvPicPr>
-        <p:blipFill rotWithShape="1">
-          <a:blip r:embed="rId3">
-            <a:extLst>
-              <a:ext uri="{28A0092B-C50C-407E-A947-70E740481C1C}">
-                <a14:useLocalDpi xmlns:a14="http://schemas.microsoft.com/office/drawing/2010/main" val="0"/>
-              </a:ext>
-            </a:extLst>
-          </a:blip>
-          <a:srcRect l="798" t="2669" r="616"/>
-          <a:stretch/>
-        </p:blipFill>
-        <p:spPr>
-          <a:xfrm>
-            <a:off x="-1" y="1731964"/>
-            <a:ext cx="12192001" cy="5126036"/>
-          </a:xfrm>
-          <a:prstGeom prst="rect">
-            <a:avLst/>
-          </a:prstGeom>
-          <a:effectLst>
-            <a:innerShdw blurRad="63500" dist="50800" dir="16200000">
-              <a:prstClr val="black">
-                <a:alpha val="50000"/>
-              </a:prstClr>
-            </a:innerShdw>
-          </a:effectLst>
-        </p:spPr>
-      </p:pic>
-      <p:graphicFrame>
-        <p:nvGraphicFramePr>
-          <p:cNvPr id="12" name="Content Placeholder 2">
-            <a:extLst>
-              <a:ext uri="{FF2B5EF4-FFF2-40B4-BE49-F238E27FC236}">
-                <a16:creationId xmlns:a16="http://schemas.microsoft.com/office/drawing/2014/main" id="{372E7E83-2585-898F-E5C8-063554CF03E7}"/>
-              </a:ext>
-            </a:extLst>
-          </p:cNvPr>
-          <p:cNvGraphicFramePr>
-            <a:graphicFrameLocks noGrp="1"/>
-          </p:cNvGraphicFramePr>
-          <p:nvPr>
-            <p:ph idx="1"/>
-            <p:extLst>
-              <p:ext uri="{D42A27DB-BD31-4B8C-83A1-F6EECF244321}">
-                <p14:modId xmlns:p14="http://schemas.microsoft.com/office/powerpoint/2010/main" val="3636310471"/>
-              </p:ext>
-            </p:extLst>
-          </p:nvPr>
-        </p:nvGraphicFramePr>
-        <p:xfrm>
-          <a:off x="914400" y="1892830"/>
-          <a:ext cx="10353675" cy="3898369"/>
-        </p:xfrm>
-        <a:graphic>
-          <a:graphicData uri="http://schemas.openxmlformats.org/drawingml/2006/diagram">
-            <dgm:relIds xmlns:dgm="http://schemas.openxmlformats.org/drawingml/2006/diagram" xmlns:r="http://schemas.openxmlformats.org/officeDocument/2006/relationships" r:dm="rId4" r:lo="rId5" r:qs="rId6" r:cs="rId7"/>
-          </a:graphicData>
-        </a:graphic>
-      </p:graphicFrame>
-    </p:spTree>
-    <p:extLst>
-      <p:ext uri="{BB962C8B-B14F-4D97-AF65-F5344CB8AC3E}">
-        <p14:creationId xmlns:p14="http://schemas.microsoft.com/office/powerpoint/2010/main" val="4045528519"/>
-      </p:ext>
-    </p:extLst>
-  </p:cSld>
-  <p:clrMapOvr>
-    <a:masterClrMapping/>
-  </p:clrMapOvr>
-</p:sld>
-</file>
-
-<file path=ppt/slides/slide16.xml><?xml version="1.0" encoding="utf-8"?>
-<p:sld xmlns:a="http://schemas.openxmlformats.org/drawingml/2006/main" xmlns:r="http://schemas.openxmlformats.org/officeDocument/2006/relationships" xmlns:p="http://schemas.openxmlformats.org/presentationml/2006/main">
-  <p:cSld>
-    <p:spTree>
-      <p:nvGrpSpPr>
-        <p:cNvPr id="1" name="">
-          <a:extLst>
-            <a:ext uri="{FF2B5EF4-FFF2-40B4-BE49-F238E27FC236}">
-              <a16:creationId xmlns:a16="http://schemas.microsoft.com/office/drawing/2014/main" id="{7D4C52FD-F759-150E-D883-5F24CED0BA36}"/>
-            </a:ext>
-          </a:extLst>
-        </p:cNvPr>
-        <p:cNvGrpSpPr/>
-        <p:nvPr/>
-      </p:nvGrpSpPr>
-      <p:grpSpPr>
-        <a:xfrm>
-          <a:off x="0" y="0"/>
-          <a:ext cx="0" cy="0"/>
-          <a:chOff x="0" y="0"/>
-          <a:chExt cx="0" cy="0"/>
-        </a:xfrm>
-      </p:grpSpPr>
-      <p:sp>
-        <p:nvSpPr>
-          <p:cNvPr id="2" name="Title 1">
-            <a:extLst>
-              <a:ext uri="{FF2B5EF4-FFF2-40B4-BE49-F238E27FC236}">
-                <a16:creationId xmlns:a16="http://schemas.microsoft.com/office/drawing/2014/main" id="{FDB30E13-7201-875A-9625-B334AFDC1AC4}"/>
-              </a:ext>
-            </a:extLst>
-          </p:cNvPr>
-          <p:cNvSpPr>
-            <a:spLocks noGrp="1"/>
-          </p:cNvSpPr>
-          <p:nvPr>
-            <p:ph type="title"/>
-          </p:nvPr>
-        </p:nvSpPr>
-        <p:spPr/>
-        <p:txBody>
-          <a:bodyPr/>
-          <a:lstStyle/>
-          <a:p>
-            <a:endParaRPr lang="en-ZM" dirty="0"/>
-          </a:p>
-        </p:txBody>
-      </p:sp>
-      <p:pic>
-        <p:nvPicPr>
-          <p:cNvPr id="7" name="Content Placeholder 6">
-            <a:extLst>
-              <a:ext uri="{FF2B5EF4-FFF2-40B4-BE49-F238E27FC236}">
-                <a16:creationId xmlns:a16="http://schemas.microsoft.com/office/drawing/2014/main" id="{F454CE25-FDBF-6A94-3B8B-5C6E6C99534B}"/>
+                <a16:creationId xmlns:a16="http://schemas.microsoft.com/office/drawing/2014/main" id="{08A0B2C6-E375-1731-9C05-A244D442BBBA}"/>
               </a:ext>
             </a:extLst>
           </p:cNvPr>
@@ -11250,15 +7878,15 @@
         </p:blipFill>
         <p:spPr>
           <a:xfrm>
-            <a:off x="0" y="0"/>
-            <a:ext cx="12192000" cy="6858000"/>
+            <a:off x="92636" y="258896"/>
+            <a:ext cx="12006727" cy="6340207"/>
           </a:xfrm>
         </p:spPr>
       </p:pic>
     </p:spTree>
     <p:extLst>
       <p:ext uri="{BB962C8B-B14F-4D97-AF65-F5344CB8AC3E}">
-        <p14:creationId xmlns:p14="http://schemas.microsoft.com/office/powerpoint/2010/main" val="2353398762"/>
+        <p14:creationId xmlns:p14="http://schemas.microsoft.com/office/powerpoint/2010/main" val="1969910524"/>
       </p:ext>
     </p:extLst>
   </p:cSld>
@@ -11268,28 +7896,9 @@
 </p:sld>
 </file>
 
-<file path=ppt/slides/slide17.xml><?xml version="1.0" encoding="utf-8"?>
+<file path=ppt/slides/slide14.xml><?xml version="1.0" encoding="utf-8"?>
 <p:sld xmlns:a="http://schemas.openxmlformats.org/drawingml/2006/main" xmlns:r="http://schemas.openxmlformats.org/officeDocument/2006/relationships" xmlns:p="http://schemas.openxmlformats.org/presentationml/2006/main">
   <p:cSld>
-    <p:bg>
-      <p:bgPr>
-        <a:blipFill rotWithShape="1">
-          <a:blip r:embed="rId2">
-            <a:duotone>
-              <a:schemeClr val="bg2">
-                <a:shade val="80000"/>
-                <a:lumMod val="80000"/>
-              </a:schemeClr>
-              <a:schemeClr val="bg2">
-                <a:tint val="98000"/>
-              </a:schemeClr>
-            </a:duotone>
-          </a:blip>
-          <a:stretch/>
-        </a:blipFill>
-        <a:effectLst/>
-      </p:bgPr>
-    </p:bg>
     <p:spTree>
       <p:nvGrpSpPr>
         <p:cNvPr id="1" name=""/>
@@ -11306,778 +7915,489 @@
       </p:grpSpPr>
       <p:sp>
         <p:nvSpPr>
-          <p:cNvPr id="8" name="Rectangle 7">
+          <p:cNvPr id="2" name="Title 1">
             <a:extLst>
               <a:ext uri="{FF2B5EF4-FFF2-40B4-BE49-F238E27FC236}">
-                <a16:creationId xmlns:a16="http://schemas.microsoft.com/office/drawing/2014/main" id="{AC224410-FF86-4FBB-A05E-61232D4B1368}"/>
-              </a:ext>
-              <a:ext uri="{C183D7F6-B498-43B3-948B-1728B52AA6E4}">
-                <adec:decorative xmlns:adec="http://schemas.microsoft.com/office/drawing/2017/decorative" val="1"/>
+                <a16:creationId xmlns:a16="http://schemas.microsoft.com/office/drawing/2014/main" id="{FD8331E0-1B73-903F-337F-7B0D7151F904}"/>
               </a:ext>
             </a:extLst>
           </p:cNvPr>
           <p:cNvSpPr>
-            <a:spLocks noGrp="1" noRot="1" noChangeAspect="1" noMove="1" noResize="1" noEditPoints="1" noAdjustHandles="1" noChangeArrowheads="1" noChangeShapeType="1" noTextEdit="1"/>
-          </p:cNvSpPr>
-          <p:nvPr>
-            <p:extLst>
-              <p:ext uri="{386F3935-93C4-4BCD-93E2-E3B085C9AB24}">
-                <p16:designElem xmlns:p16="http://schemas.microsoft.com/office/powerpoint/2015/main" val="1"/>
-              </p:ext>
-            </p:extLst>
-          </p:nvPr>
-        </p:nvSpPr>
-        <p:spPr>
-          <a:xfrm>
-            <a:off x="0" y="0"/>
-            <a:ext cx="12192000" cy="6858000"/>
-          </a:xfrm>
-          <a:prstGeom prst="rect">
-            <a:avLst/>
-          </a:prstGeom>
-          <a:solidFill>
-            <a:schemeClr val="bg2">
-              <a:lumMod val="75000"/>
-              <a:lumOff val="25000"/>
-            </a:schemeClr>
-          </a:solidFill>
-          <a:ln>
-            <a:noFill/>
-          </a:ln>
-        </p:spPr>
-        <p:style>
-          <a:lnRef idx="2">
-            <a:schemeClr val="accent1">
-              <a:shade val="50000"/>
-            </a:schemeClr>
-          </a:lnRef>
-          <a:fillRef idx="1">
-            <a:schemeClr val="accent1"/>
-          </a:fillRef>
-          <a:effectRef idx="0">
-            <a:schemeClr val="accent1"/>
-          </a:effectRef>
-          <a:fontRef idx="minor">
-            <a:schemeClr val="lt1"/>
-          </a:fontRef>
-        </p:style>
-        <p:txBody>
-          <a:bodyPr rtlCol="0" anchor="ctr"/>
+            <a:spLocks noGrp="1"/>
+          </p:cNvSpPr>
+          <p:nvPr>
+            <p:ph type="title"/>
+          </p:nvPr>
+        </p:nvSpPr>
+        <p:spPr/>
+        <p:txBody>
+          <a:bodyPr/>
           <a:lstStyle/>
           <a:p>
-            <a:pPr algn="ctr"/>
-            <a:endParaRPr lang="en-US"/>
-          </a:p>
-        </p:txBody>
-      </p:sp>
-      <p:sp useBgFill="1">
-        <p:nvSpPr>
-          <p:cNvPr id="10" name="Freeform: Shape 9">
+            <a:endParaRPr lang="en-ZM"/>
+          </a:p>
+        </p:txBody>
+      </p:sp>
+      <p:pic>
+        <p:nvPicPr>
+          <p:cNvPr id="5" name="Content Placeholder 4">
             <a:extLst>
               <a:ext uri="{FF2B5EF4-FFF2-40B4-BE49-F238E27FC236}">
-                <a16:creationId xmlns:a16="http://schemas.microsoft.com/office/drawing/2014/main" id="{F3BDD110-869E-4A8C-9250-C7AE5C840842}"/>
-              </a:ext>
-              <a:ext uri="{C183D7F6-B498-43B3-948B-1728B52AA6E4}">
-                <adec:decorative xmlns:adec="http://schemas.microsoft.com/office/drawing/2017/decorative" val="1"/>
+                <a16:creationId xmlns:a16="http://schemas.microsoft.com/office/drawing/2014/main" id="{D51AD91B-EC24-AB7E-3E59-E586AF6B4960}"/>
               </a:ext>
             </a:extLst>
           </p:cNvPr>
-          <p:cNvSpPr>
-            <a:spLocks noGrp="1" noRot="1" noChangeAspect="1" noMove="1" noResize="1" noEditPoints="1" noAdjustHandles="1" noChangeArrowheads="1" noChangeShapeType="1" noTextEdit="1"/>
-          </p:cNvSpPr>
-          <p:nvPr>
-            <p:extLst>
-              <p:ext uri="{386F3935-93C4-4BCD-93E2-E3B085C9AB24}">
-                <p16:designElem xmlns:p16="http://schemas.microsoft.com/office/powerpoint/2015/main" val="1"/>
-              </p:ext>
-            </p:extLst>
-          </p:nvPr>
-        </p:nvSpPr>
+          <p:cNvPicPr>
+            <a:picLocks noGrp="1" noChangeAspect="1"/>
+          </p:cNvPicPr>
+          <p:nvPr>
+            <p:ph idx="1"/>
+          </p:nvPr>
+        </p:nvPicPr>
+        <p:blipFill>
+          <a:blip r:embed="rId2">
+            <a:extLst>
+              <a:ext uri="{28A0092B-C50C-407E-A947-70E740481C1C}">
+                <a14:useLocalDpi xmlns:a14="http://schemas.microsoft.com/office/drawing/2010/main" val="0"/>
+              </a:ext>
+            </a:extLst>
+          </a:blip>
+          <a:stretch>
+            <a:fillRect/>
+          </a:stretch>
+        </p:blipFill>
         <p:spPr>
           <a:xfrm>
-            <a:off x="7302" y="-2"/>
-            <a:ext cx="6088698" cy="6858002"/>
-          </a:xfrm>
-          <a:custGeom>
-            <a:avLst/>
-            <a:gdLst>
-              <a:gd name="connsiteX0" fmla="*/ 0 w 6088698"/>
-              <a:gd name="connsiteY0" fmla="*/ 0 h 6858002"/>
-              <a:gd name="connsiteX1" fmla="*/ 2610464 w 6088698"/>
-              <a:gd name="connsiteY1" fmla="*/ 0 h 6858002"/>
-              <a:gd name="connsiteX2" fmla="*/ 2610464 w 6088698"/>
-              <a:gd name="connsiteY2" fmla="*/ 3 h 6858002"/>
-              <a:gd name="connsiteX3" fmla="*/ 5749313 w 6088698"/>
-              <a:gd name="connsiteY3" fmla="*/ 3 h 6858002"/>
-              <a:gd name="connsiteX4" fmla="*/ 5749313 w 6088698"/>
-              <a:gd name="connsiteY4" fmla="*/ 4 h 6858002"/>
-              <a:gd name="connsiteX5" fmla="*/ 5740011 w 6088698"/>
-              <a:gd name="connsiteY5" fmla="*/ 4 h 6858002"/>
-              <a:gd name="connsiteX6" fmla="*/ 5748114 w 6088698"/>
-              <a:gd name="connsiteY6" fmla="*/ 40466 h 6858002"/>
-              <a:gd name="connsiteX7" fmla="*/ 5771963 w 6088698"/>
-              <a:gd name="connsiteY7" fmla="*/ 159110 h 6858002"/>
-              <a:gd name="connsiteX8" fmla="*/ 5788633 w 6088698"/>
-              <a:gd name="connsiteY8" fmla="*/ 245521 h 6858002"/>
-              <a:gd name="connsiteX9" fmla="*/ 5806229 w 6088698"/>
-              <a:gd name="connsiteY9" fmla="*/ 348391 h 6858002"/>
-              <a:gd name="connsiteX10" fmla="*/ 5827299 w 6088698"/>
-              <a:gd name="connsiteY10" fmla="*/ 470463 h 6858002"/>
-              <a:gd name="connsiteX11" fmla="*/ 5849526 w 6088698"/>
-              <a:gd name="connsiteY11" fmla="*/ 605566 h 6858002"/>
-              <a:gd name="connsiteX12" fmla="*/ 5872911 w 6088698"/>
-              <a:gd name="connsiteY12" fmla="*/ 757813 h 6858002"/>
-              <a:gd name="connsiteX13" fmla="*/ 5897684 w 6088698"/>
-              <a:gd name="connsiteY13" fmla="*/ 923777 h 6858002"/>
-              <a:gd name="connsiteX14" fmla="*/ 5922459 w 6088698"/>
-              <a:gd name="connsiteY14" fmla="*/ 1104142 h 6858002"/>
-              <a:gd name="connsiteX15" fmla="*/ 5947695 w 6088698"/>
-              <a:gd name="connsiteY15" fmla="*/ 1296166 h 6858002"/>
-              <a:gd name="connsiteX16" fmla="*/ 5971079 w 6088698"/>
-              <a:gd name="connsiteY16" fmla="*/ 1503278 h 6858002"/>
-              <a:gd name="connsiteX17" fmla="*/ 5993538 w 6088698"/>
-              <a:gd name="connsiteY17" fmla="*/ 1719991 h 6858002"/>
-              <a:gd name="connsiteX18" fmla="*/ 6013913 w 6088698"/>
-              <a:gd name="connsiteY18" fmla="*/ 1949048 h 6858002"/>
-              <a:gd name="connsiteX19" fmla="*/ 6033361 w 6088698"/>
-              <a:gd name="connsiteY19" fmla="*/ 2187706 h 6858002"/>
-              <a:gd name="connsiteX20" fmla="*/ 6051654 w 6088698"/>
-              <a:gd name="connsiteY20" fmla="*/ 2436652 h 6858002"/>
-              <a:gd name="connsiteX21" fmla="*/ 6058136 w 6088698"/>
-              <a:gd name="connsiteY21" fmla="*/ 2564211 h 6858002"/>
-              <a:gd name="connsiteX22" fmla="*/ 6065314 w 6088698"/>
-              <a:gd name="connsiteY22" fmla="*/ 2694512 h 6858002"/>
-              <a:gd name="connsiteX23" fmla="*/ 6072027 w 6088698"/>
-              <a:gd name="connsiteY23" fmla="*/ 2826871 h 6858002"/>
-              <a:gd name="connsiteX24" fmla="*/ 6076427 w 6088698"/>
-              <a:gd name="connsiteY24" fmla="*/ 2959917 h 6858002"/>
-              <a:gd name="connsiteX25" fmla="*/ 6080363 w 6088698"/>
-              <a:gd name="connsiteY25" fmla="*/ 3095705 h 6858002"/>
-              <a:gd name="connsiteX26" fmla="*/ 6084530 w 6088698"/>
-              <a:gd name="connsiteY26" fmla="*/ 3232865 h 6858002"/>
-              <a:gd name="connsiteX27" fmla="*/ 6087308 w 6088698"/>
-              <a:gd name="connsiteY27" fmla="*/ 3372768 h 6858002"/>
-              <a:gd name="connsiteX28" fmla="*/ 6087308 w 6088698"/>
-              <a:gd name="connsiteY28" fmla="*/ 3514043 h 6858002"/>
-              <a:gd name="connsiteX29" fmla="*/ 6088698 w 6088698"/>
-              <a:gd name="connsiteY29" fmla="*/ 3656689 h 6858002"/>
-              <a:gd name="connsiteX30" fmla="*/ 6087308 w 6088698"/>
-              <a:gd name="connsiteY30" fmla="*/ 3800707 h 6858002"/>
-              <a:gd name="connsiteX31" fmla="*/ 6084530 w 6088698"/>
-              <a:gd name="connsiteY31" fmla="*/ 3946783 h 6858002"/>
-              <a:gd name="connsiteX32" fmla="*/ 6081983 w 6088698"/>
-              <a:gd name="connsiteY32" fmla="*/ 4092858 h 6858002"/>
-              <a:gd name="connsiteX33" fmla="*/ 6076427 w 6088698"/>
-              <a:gd name="connsiteY33" fmla="*/ 4240991 h 6858002"/>
-              <a:gd name="connsiteX34" fmla="*/ 6070639 w 6088698"/>
-              <a:gd name="connsiteY34" fmla="*/ 4390495 h 6858002"/>
-              <a:gd name="connsiteX35" fmla="*/ 6063924 w 6088698"/>
-              <a:gd name="connsiteY35" fmla="*/ 4540000 h 6858002"/>
-              <a:gd name="connsiteX36" fmla="*/ 6054432 w 6088698"/>
-              <a:gd name="connsiteY36" fmla="*/ 4690876 h 6858002"/>
-              <a:gd name="connsiteX37" fmla="*/ 6043086 w 6088698"/>
-              <a:gd name="connsiteY37" fmla="*/ 4843123 h 6858002"/>
-              <a:gd name="connsiteX38" fmla="*/ 6032204 w 6088698"/>
-              <a:gd name="connsiteY38" fmla="*/ 4996057 h 6858002"/>
-              <a:gd name="connsiteX39" fmla="*/ 6018313 w 6088698"/>
-              <a:gd name="connsiteY39" fmla="*/ 5148990 h 6858002"/>
-              <a:gd name="connsiteX40" fmla="*/ 6001642 w 6088698"/>
-              <a:gd name="connsiteY40" fmla="*/ 5303981 h 6858002"/>
-              <a:gd name="connsiteX41" fmla="*/ 5984972 w 6088698"/>
-              <a:gd name="connsiteY41" fmla="*/ 5456914 h 6858002"/>
-              <a:gd name="connsiteX42" fmla="*/ 5965754 w 6088698"/>
-              <a:gd name="connsiteY42" fmla="*/ 5612591 h 6858002"/>
-              <a:gd name="connsiteX43" fmla="*/ 5944685 w 6088698"/>
-              <a:gd name="connsiteY43" fmla="*/ 5768953 h 6858002"/>
-              <a:gd name="connsiteX44" fmla="*/ 5922459 w 6088698"/>
-              <a:gd name="connsiteY44" fmla="*/ 5923258 h 6858002"/>
-              <a:gd name="connsiteX45" fmla="*/ 5896527 w 6088698"/>
-              <a:gd name="connsiteY45" fmla="*/ 6079621 h 6858002"/>
-              <a:gd name="connsiteX46" fmla="*/ 5868743 w 6088698"/>
-              <a:gd name="connsiteY46" fmla="*/ 6235297 h 6858002"/>
-              <a:gd name="connsiteX47" fmla="*/ 5841190 w 6088698"/>
-              <a:gd name="connsiteY47" fmla="*/ 6391660 h 6858002"/>
-              <a:gd name="connsiteX48" fmla="*/ 5809008 w 6088698"/>
-              <a:gd name="connsiteY48" fmla="*/ 6547336 h 6858002"/>
-              <a:gd name="connsiteX49" fmla="*/ 5776130 w 6088698"/>
-              <a:gd name="connsiteY49" fmla="*/ 6702327 h 6858002"/>
-              <a:gd name="connsiteX50" fmla="*/ 5741633 w 6088698"/>
-              <a:gd name="connsiteY50" fmla="*/ 6858002 h 6858002"/>
-              <a:gd name="connsiteX51" fmla="*/ 2610464 w 6088698"/>
-              <a:gd name="connsiteY51" fmla="*/ 6858002 h 6858002"/>
-              <a:gd name="connsiteX52" fmla="*/ 0 w 6088698"/>
-              <a:gd name="connsiteY52" fmla="*/ 6858002 h 6858002"/>
-            </a:gdLst>
-            <a:ahLst/>
-            <a:cxnLst>
-              <a:cxn ang="0">
-                <a:pos x="connsiteX0" y="connsiteY0"/>
-              </a:cxn>
-              <a:cxn ang="0">
-                <a:pos x="connsiteX1" y="connsiteY1"/>
-              </a:cxn>
-              <a:cxn ang="0">
-                <a:pos x="connsiteX2" y="connsiteY2"/>
-              </a:cxn>
-              <a:cxn ang="0">
-                <a:pos x="connsiteX3" y="connsiteY3"/>
-              </a:cxn>
-              <a:cxn ang="0">
-                <a:pos x="connsiteX4" y="connsiteY4"/>
-              </a:cxn>
-              <a:cxn ang="0">
-                <a:pos x="connsiteX5" y="connsiteY5"/>
-              </a:cxn>
-              <a:cxn ang="0">
-                <a:pos x="connsiteX6" y="connsiteY6"/>
-              </a:cxn>
-              <a:cxn ang="0">
-                <a:pos x="connsiteX7" y="connsiteY7"/>
-              </a:cxn>
-              <a:cxn ang="0">
-                <a:pos x="connsiteX8" y="connsiteY8"/>
-              </a:cxn>
-              <a:cxn ang="0">
-                <a:pos x="connsiteX9" y="connsiteY9"/>
-              </a:cxn>
-              <a:cxn ang="0">
-                <a:pos x="connsiteX10" y="connsiteY10"/>
-              </a:cxn>
-              <a:cxn ang="0">
-                <a:pos x="connsiteX11" y="connsiteY11"/>
-              </a:cxn>
-              <a:cxn ang="0">
-                <a:pos x="connsiteX12" y="connsiteY12"/>
-              </a:cxn>
-              <a:cxn ang="0">
-                <a:pos x="connsiteX13" y="connsiteY13"/>
-              </a:cxn>
-              <a:cxn ang="0">
-                <a:pos x="connsiteX14" y="connsiteY14"/>
-              </a:cxn>
-              <a:cxn ang="0">
-                <a:pos x="connsiteX15" y="connsiteY15"/>
-              </a:cxn>
-              <a:cxn ang="0">
-                <a:pos x="connsiteX16" y="connsiteY16"/>
-              </a:cxn>
-              <a:cxn ang="0">
-                <a:pos x="connsiteX17" y="connsiteY17"/>
-              </a:cxn>
-              <a:cxn ang="0">
-                <a:pos x="connsiteX18" y="connsiteY18"/>
-              </a:cxn>
-              <a:cxn ang="0">
-                <a:pos x="connsiteX19" y="connsiteY19"/>
-              </a:cxn>
-              <a:cxn ang="0">
-                <a:pos x="connsiteX20" y="connsiteY20"/>
-              </a:cxn>
-              <a:cxn ang="0">
-                <a:pos x="connsiteX21" y="connsiteY21"/>
-              </a:cxn>
-              <a:cxn ang="0">
-                <a:pos x="connsiteX22" y="connsiteY22"/>
-              </a:cxn>
-              <a:cxn ang="0">
-                <a:pos x="connsiteX23" y="connsiteY23"/>
-              </a:cxn>
-              <a:cxn ang="0">
-                <a:pos x="connsiteX24" y="connsiteY24"/>
-              </a:cxn>
-              <a:cxn ang="0">
-                <a:pos x="connsiteX25" y="connsiteY25"/>
-              </a:cxn>
-              <a:cxn ang="0">
-                <a:pos x="connsiteX26" y="connsiteY26"/>
-              </a:cxn>
-              <a:cxn ang="0">
-                <a:pos x="connsiteX27" y="connsiteY27"/>
-              </a:cxn>
-              <a:cxn ang="0">
-                <a:pos x="connsiteX28" y="connsiteY28"/>
-              </a:cxn>
-              <a:cxn ang="0">
-                <a:pos x="connsiteX29" y="connsiteY29"/>
-              </a:cxn>
-              <a:cxn ang="0">
-                <a:pos x="connsiteX30" y="connsiteY30"/>
-              </a:cxn>
-              <a:cxn ang="0">
-                <a:pos x="connsiteX31" y="connsiteY31"/>
-              </a:cxn>
-              <a:cxn ang="0">
-                <a:pos x="connsiteX32" y="connsiteY32"/>
-              </a:cxn>
-              <a:cxn ang="0">
-                <a:pos x="connsiteX33" y="connsiteY33"/>
-              </a:cxn>
-              <a:cxn ang="0">
-                <a:pos x="connsiteX34" y="connsiteY34"/>
-              </a:cxn>
-              <a:cxn ang="0">
-                <a:pos x="connsiteX35" y="connsiteY35"/>
-              </a:cxn>
-              <a:cxn ang="0">
-                <a:pos x="connsiteX36" y="connsiteY36"/>
-              </a:cxn>
-              <a:cxn ang="0">
-                <a:pos x="connsiteX37" y="connsiteY37"/>
-              </a:cxn>
-              <a:cxn ang="0">
-                <a:pos x="connsiteX38" y="connsiteY38"/>
-              </a:cxn>
-              <a:cxn ang="0">
-                <a:pos x="connsiteX39" y="connsiteY39"/>
-              </a:cxn>
-              <a:cxn ang="0">
-                <a:pos x="connsiteX40" y="connsiteY40"/>
-              </a:cxn>
-              <a:cxn ang="0">
-                <a:pos x="connsiteX41" y="connsiteY41"/>
-              </a:cxn>
-              <a:cxn ang="0">
-                <a:pos x="connsiteX42" y="connsiteY42"/>
-              </a:cxn>
-              <a:cxn ang="0">
-                <a:pos x="connsiteX43" y="connsiteY43"/>
-              </a:cxn>
-              <a:cxn ang="0">
-                <a:pos x="connsiteX44" y="connsiteY44"/>
-              </a:cxn>
-              <a:cxn ang="0">
-                <a:pos x="connsiteX45" y="connsiteY45"/>
-              </a:cxn>
-              <a:cxn ang="0">
-                <a:pos x="connsiteX46" y="connsiteY46"/>
-              </a:cxn>
-              <a:cxn ang="0">
-                <a:pos x="connsiteX47" y="connsiteY47"/>
-              </a:cxn>
-              <a:cxn ang="0">
-                <a:pos x="connsiteX48" y="connsiteY48"/>
-              </a:cxn>
-              <a:cxn ang="0">
-                <a:pos x="connsiteX49" y="connsiteY49"/>
-              </a:cxn>
-              <a:cxn ang="0">
-                <a:pos x="connsiteX50" y="connsiteY50"/>
-              </a:cxn>
-              <a:cxn ang="0">
-                <a:pos x="connsiteX51" y="connsiteY51"/>
-              </a:cxn>
-              <a:cxn ang="0">
-                <a:pos x="connsiteX52" y="connsiteY52"/>
-              </a:cxn>
-            </a:cxnLst>
-            <a:rect l="l" t="t" r="r" b="b"/>
-            <a:pathLst>
-              <a:path w="6088698" h="6858002">
-                <a:moveTo>
-                  <a:pt x="0" y="0"/>
-                </a:moveTo>
-                <a:lnTo>
-                  <a:pt x="2610464" y="0"/>
-                </a:lnTo>
-                <a:lnTo>
-                  <a:pt x="2610464" y="3"/>
-                </a:lnTo>
-                <a:lnTo>
-                  <a:pt x="5749313" y="3"/>
-                </a:lnTo>
-                <a:lnTo>
-                  <a:pt x="5749313" y="4"/>
-                </a:lnTo>
-                <a:lnTo>
-                  <a:pt x="5740011" y="4"/>
-                </a:lnTo>
-                <a:lnTo>
-                  <a:pt x="5748114" y="40466"/>
-                </a:lnTo>
-                <a:lnTo>
-                  <a:pt x="5771963" y="159110"/>
-                </a:lnTo>
-                <a:lnTo>
-                  <a:pt x="5788633" y="245521"/>
-                </a:lnTo>
-                <a:lnTo>
-                  <a:pt x="5806229" y="348391"/>
-                </a:lnTo>
-                <a:lnTo>
-                  <a:pt x="5827299" y="470463"/>
-                </a:lnTo>
-                <a:lnTo>
-                  <a:pt x="5849526" y="605566"/>
-                </a:lnTo>
-                <a:lnTo>
-                  <a:pt x="5872911" y="757813"/>
-                </a:lnTo>
-                <a:lnTo>
-                  <a:pt x="5897684" y="923777"/>
-                </a:lnTo>
-                <a:lnTo>
-                  <a:pt x="5922459" y="1104142"/>
-                </a:lnTo>
-                <a:lnTo>
-                  <a:pt x="5947695" y="1296166"/>
-                </a:lnTo>
-                <a:lnTo>
-                  <a:pt x="5971079" y="1503278"/>
-                </a:lnTo>
-                <a:lnTo>
-                  <a:pt x="5993538" y="1719991"/>
-                </a:lnTo>
-                <a:lnTo>
-                  <a:pt x="6013913" y="1949048"/>
-                </a:lnTo>
-                <a:lnTo>
-                  <a:pt x="6033361" y="2187706"/>
-                </a:lnTo>
-                <a:lnTo>
-                  <a:pt x="6051654" y="2436652"/>
-                </a:lnTo>
-                <a:lnTo>
-                  <a:pt x="6058136" y="2564211"/>
-                </a:lnTo>
-                <a:lnTo>
-                  <a:pt x="6065314" y="2694512"/>
-                </a:lnTo>
-                <a:lnTo>
-                  <a:pt x="6072027" y="2826871"/>
-                </a:lnTo>
-                <a:lnTo>
-                  <a:pt x="6076427" y="2959917"/>
-                </a:lnTo>
-                <a:lnTo>
-                  <a:pt x="6080363" y="3095705"/>
-                </a:lnTo>
-                <a:lnTo>
-                  <a:pt x="6084530" y="3232865"/>
-                </a:lnTo>
-                <a:lnTo>
-                  <a:pt x="6087308" y="3372768"/>
-                </a:lnTo>
-                <a:lnTo>
-                  <a:pt x="6087308" y="3514043"/>
-                </a:lnTo>
-                <a:lnTo>
-                  <a:pt x="6088698" y="3656689"/>
-                </a:lnTo>
-                <a:lnTo>
-                  <a:pt x="6087308" y="3800707"/>
-                </a:lnTo>
-                <a:lnTo>
-                  <a:pt x="6084530" y="3946783"/>
-                </a:lnTo>
-                <a:lnTo>
-                  <a:pt x="6081983" y="4092858"/>
-                </a:lnTo>
-                <a:lnTo>
-                  <a:pt x="6076427" y="4240991"/>
-                </a:lnTo>
-                <a:lnTo>
-                  <a:pt x="6070639" y="4390495"/>
-                </a:lnTo>
-                <a:lnTo>
-                  <a:pt x="6063924" y="4540000"/>
-                </a:lnTo>
-                <a:lnTo>
-                  <a:pt x="6054432" y="4690876"/>
-                </a:lnTo>
-                <a:lnTo>
-                  <a:pt x="6043086" y="4843123"/>
-                </a:lnTo>
-                <a:lnTo>
-                  <a:pt x="6032204" y="4996057"/>
-                </a:lnTo>
-                <a:lnTo>
-                  <a:pt x="6018313" y="5148990"/>
-                </a:lnTo>
-                <a:lnTo>
-                  <a:pt x="6001642" y="5303981"/>
-                </a:lnTo>
-                <a:lnTo>
-                  <a:pt x="5984972" y="5456914"/>
-                </a:lnTo>
-                <a:lnTo>
-                  <a:pt x="5965754" y="5612591"/>
-                </a:lnTo>
-                <a:lnTo>
-                  <a:pt x="5944685" y="5768953"/>
-                </a:lnTo>
-                <a:lnTo>
-                  <a:pt x="5922459" y="5923258"/>
-                </a:lnTo>
-                <a:lnTo>
-                  <a:pt x="5896527" y="6079621"/>
-                </a:lnTo>
-                <a:lnTo>
-                  <a:pt x="5868743" y="6235297"/>
-                </a:lnTo>
-                <a:lnTo>
-                  <a:pt x="5841190" y="6391660"/>
-                </a:lnTo>
-                <a:lnTo>
-                  <a:pt x="5809008" y="6547336"/>
-                </a:lnTo>
-                <a:lnTo>
-                  <a:pt x="5776130" y="6702327"/>
-                </a:lnTo>
-                <a:lnTo>
-                  <a:pt x="5741633" y="6858002"/>
-                </a:lnTo>
-                <a:lnTo>
-                  <a:pt x="2610464" y="6858002"/>
-                </a:lnTo>
-                <a:lnTo>
-                  <a:pt x="0" y="6858002"/>
-                </a:lnTo>
-                <a:close/>
-              </a:path>
-            </a:pathLst>
-          </a:custGeom>
-          <a:ln>
-            <a:noFill/>
-          </a:ln>
-          <a:effectLst>
-            <a:outerShdw blurRad="50800" dist="38100" algn="l" rotWithShape="0">
-              <a:prstClr val="black">
-                <a:alpha val="40000"/>
-              </a:prstClr>
-            </a:outerShdw>
-          </a:effectLst>
-        </p:spPr>
-        <p:style>
-          <a:lnRef idx="2">
-            <a:schemeClr val="accent1">
-              <a:shade val="50000"/>
-            </a:schemeClr>
-          </a:lnRef>
-          <a:fillRef idx="1">
-            <a:schemeClr val="accent1"/>
-          </a:fillRef>
-          <a:effectRef idx="0">
-            <a:schemeClr val="accent1"/>
-          </a:effectRef>
-          <a:fontRef idx="minor">
-            <a:schemeClr val="lt1"/>
-          </a:fontRef>
-        </p:style>
-        <p:txBody>
-          <a:bodyPr wrap="square" rtlCol="0" anchor="ctr">
-            <a:noAutofit/>
-          </a:bodyPr>
-          <a:lstStyle/>
-          <a:p>
-            <a:pPr algn="ctr"/>
-            <a:endParaRPr lang="en-US"/>
-          </a:p>
-        </p:txBody>
-      </p:sp>
-      <p:sp>
-        <p:nvSpPr>
-          <p:cNvPr id="2" name="Title 1">
-            <a:extLst>
-              <a:ext uri="{FF2B5EF4-FFF2-40B4-BE49-F238E27FC236}">
-                <a16:creationId xmlns:a16="http://schemas.microsoft.com/office/drawing/2014/main" id="{6E1E8EFF-25A9-691C-FBDD-89827A5836AE}"/>
-              </a:ext>
-            </a:extLst>
-          </p:cNvPr>
-          <p:cNvSpPr>
-            <a:spLocks noGrp="1"/>
-          </p:cNvSpPr>
-          <p:nvPr>
-            <p:ph type="title"/>
-          </p:nvPr>
-        </p:nvSpPr>
-        <p:spPr>
-          <a:xfrm>
-            <a:off x="900506" y="1118808"/>
-            <a:ext cx="4671467" cy="4747683"/>
+            <a:off x="2005069" y="46898"/>
+            <a:ext cx="7943162" cy="6764204"/>
           </a:xfrm>
         </p:spPr>
-        <p:txBody>
-          <a:bodyPr anchor="ctr">
-            <a:normAutofit/>
-          </a:bodyPr>
-          <a:lstStyle/>
-          <a:p>
-            <a:pPr algn="l"/>
-            <a:r>
-              <a:rPr lang="en-US" sz="3700"/>
-              <a:t>SUGGESTED ARCHITECTURAL EXTENSION:</a:t>
-            </a:r>
-            <a:endParaRPr lang="en-ZM" sz="3700"/>
-          </a:p>
-        </p:txBody>
-      </p:sp>
-      <p:sp>
-        <p:nvSpPr>
-          <p:cNvPr id="3" name="Content Placeholder 2">
-            <a:extLst>
-              <a:ext uri="{FF2B5EF4-FFF2-40B4-BE49-F238E27FC236}">
-                <a16:creationId xmlns:a16="http://schemas.microsoft.com/office/drawing/2014/main" id="{EF75029D-7F7E-D7D5-D383-BE48FF2C2FBC}"/>
-              </a:ext>
-            </a:extLst>
-          </p:cNvPr>
-          <p:cNvSpPr>
-            <a:spLocks noGrp="1"/>
-          </p:cNvSpPr>
-          <p:nvPr>
-            <p:ph idx="1"/>
-          </p:nvPr>
-        </p:nvSpPr>
-        <p:spPr>
-          <a:xfrm>
-            <a:off x="6498769" y="1118809"/>
-            <a:ext cx="5049763" cy="4747681"/>
-          </a:xfrm>
-          <a:effectLst/>
-        </p:spPr>
-        <p:txBody>
-          <a:bodyPr anchor="ctr">
-            <a:normAutofit/>
-          </a:bodyPr>
-          <a:lstStyle/>
-          <a:p>
-            <a:r>
-              <a:rPr lang="en-US">
-                <a:solidFill>
-                  <a:schemeClr val="tx1"/>
-                </a:solidFill>
-              </a:rPr>
-              <a:t>Implement "</a:t>
-            </a:r>
-            <a:r>
-              <a:rPr lang="en-US" b="1">
-                <a:solidFill>
-                  <a:schemeClr val="tx1"/>
-                </a:solidFill>
-              </a:rPr>
-              <a:t>Data Encryption Service</a:t>
-            </a:r>
-            <a:r>
-              <a:rPr lang="en-US">
-                <a:solidFill>
-                  <a:schemeClr val="tx1"/>
-                </a:solidFill>
-              </a:rPr>
-              <a:t>" component for at-rest encryption</a:t>
-            </a:r>
-            <a:endParaRPr lang="en-ZM">
-              <a:solidFill>
-                <a:schemeClr val="tx1"/>
-              </a:solidFill>
-            </a:endParaRPr>
-          </a:p>
-        </p:txBody>
-      </p:sp>
+      </p:pic>
     </p:spTree>
     <p:extLst>
       <p:ext uri="{BB962C8B-B14F-4D97-AF65-F5344CB8AC3E}">
-        <p14:creationId xmlns:p14="http://schemas.microsoft.com/office/powerpoint/2010/main" val="1658002362"/>
+        <p14:creationId xmlns:p14="http://schemas.microsoft.com/office/powerpoint/2010/main" val="2993654089"/>
       </p:ext>
     </p:extLst>
   </p:cSld>
   <p:clrMapOvr>
     <a:masterClrMapping/>
   </p:clrMapOvr>
-  <p:timing>
-    <p:tnLst>
-      <p:par>
-        <p:cTn id="1" dur="indefinite" restart="never" nodeType="tmRoot">
-          <p:childTnLst>
-            <p:seq concurrent="1" nextAc="seek">
-              <p:cTn id="2" dur="indefinite" nodeType="mainSeq">
-                <p:childTnLst>
-                  <p:par>
-                    <p:cTn id="3" fill="hold">
-                      <p:stCondLst>
-                        <p:cond delay="indefinite"/>
-                        <p:cond evt="onBegin" delay="0">
-                          <p:tn val="2"/>
-                        </p:cond>
-                      </p:stCondLst>
-                      <p:childTnLst>
-                        <p:par>
-                          <p:cTn id="4" fill="hold">
-                            <p:stCondLst>
-                              <p:cond delay="0"/>
-                            </p:stCondLst>
-                            <p:childTnLst>
-                              <p:par>
-                                <p:cTn id="5" presetID="10" presetClass="entr" presetSubtype="0" fill="hold" grpId="0" nodeType="withEffect">
-                                  <p:stCondLst>
-                                    <p:cond delay="500"/>
-                                  </p:stCondLst>
-                                  <p:iterate type="wd">
-                                    <p:tmPct val="15000"/>
-                                  </p:iterate>
-                                  <p:childTnLst>
-                                    <p:set>
-                                      <p:cBhvr>
-                                        <p:cTn id="6" dur="1" fill="hold">
-                                          <p:stCondLst>
-                                            <p:cond delay="0"/>
-                                          </p:stCondLst>
-                                        </p:cTn>
-                                        <p:tgtEl>
-                                          <p:spTgt spid="2"/>
-                                        </p:tgtEl>
-                                        <p:attrNameLst>
-                                          <p:attrName>style.visibility</p:attrName>
-                                        </p:attrNameLst>
-                                      </p:cBhvr>
-                                      <p:to>
-                                        <p:strVal val="visible"/>
-                                      </p:to>
-                                    </p:set>
-                                    <p:animEffect transition="in" filter="fade">
-                                      <p:cBhvr>
-                                        <p:cTn id="7" dur="1000"/>
-                                        <p:tgtEl>
-                                          <p:spTgt spid="2"/>
-                                        </p:tgtEl>
-                                      </p:cBhvr>
-                                    </p:animEffect>
-                                  </p:childTnLst>
-                                </p:cTn>
-                              </p:par>
-                            </p:childTnLst>
-                          </p:cTn>
-                        </p:par>
-                      </p:childTnLst>
-                    </p:cTn>
-                  </p:par>
-                </p:childTnLst>
-              </p:cTn>
-              <p:prevCondLst>
-                <p:cond evt="onPrev" delay="0">
-                  <p:tgtEl>
-                    <p:sldTgt/>
-                  </p:tgtEl>
-                </p:cond>
-              </p:prevCondLst>
-              <p:nextCondLst>
-                <p:cond evt="onNext" delay="0">
-                  <p:tgtEl>
-                    <p:sldTgt/>
-                  </p:tgtEl>
-                </p:cond>
-              </p:nextCondLst>
-            </p:seq>
-          </p:childTnLst>
-        </p:cTn>
-      </p:par>
-    </p:tnLst>
-    <p:bldLst>
-      <p:bldP spid="2" grpId="0"/>
-    </p:bldLst>
-  </p:timing>
 </p:sld>
 </file>
 
-<file path=ppt/slides/slide18.xml><?xml version="1.0" encoding="utf-8"?>
+<file path=ppt/slides/slide15.xml><?xml version="1.0" encoding="utf-8"?>
+<p:sld xmlns:a="http://schemas.openxmlformats.org/drawingml/2006/main" xmlns:r="http://schemas.openxmlformats.org/officeDocument/2006/relationships" xmlns:p="http://schemas.openxmlformats.org/presentationml/2006/main">
+  <p:cSld>
+    <p:bg>
+      <p:bgPr>
+        <a:solidFill>
+          <a:schemeClr val="bg1"/>
+        </a:solidFill>
+        <a:effectLst/>
+      </p:bgPr>
+    </p:bg>
+    <p:spTree>
+      <p:nvGrpSpPr>
+        <p:cNvPr id="1" name="">
+          <a:extLst>
+            <a:ext uri="{FF2B5EF4-FFF2-40B4-BE49-F238E27FC236}">
+              <a16:creationId xmlns:a16="http://schemas.microsoft.com/office/drawing/2014/main" id="{40D75302-7086-39AF-681D-AA4CA1B40A2F}"/>
+            </a:ext>
+          </a:extLst>
+        </p:cNvPr>
+        <p:cNvGrpSpPr/>
+        <p:nvPr/>
+      </p:nvGrpSpPr>
+      <p:grpSpPr>
+        <a:xfrm>
+          <a:off x="0" y="0"/>
+          <a:ext cx="0" cy="0"/>
+          <a:chOff x="0" y="0"/>
+          <a:chExt cx="0" cy="0"/>
+        </a:xfrm>
+      </p:grpSpPr>
+      <p:sp>
+        <p:nvSpPr>
+          <p:cNvPr id="2" name="Título 1">
+            <a:extLst>
+              <a:ext uri="{FF2B5EF4-FFF2-40B4-BE49-F238E27FC236}">
+                <a16:creationId xmlns:a16="http://schemas.microsoft.com/office/drawing/2014/main" id="{84F26597-39C7-F7D6-4554-A75DC45B28BD}"/>
+              </a:ext>
+            </a:extLst>
+          </p:cNvPr>
+          <p:cNvSpPr>
+            <a:spLocks noGrp="1"/>
+          </p:cNvSpPr>
+          <p:nvPr>
+            <p:ph type="title"/>
+          </p:nvPr>
+        </p:nvSpPr>
+        <p:spPr>
+          <a:xfrm>
+            <a:off x="630936" y="323088"/>
+            <a:ext cx="5637784" cy="1592072"/>
+          </a:xfrm>
+        </p:spPr>
+        <p:txBody>
+          <a:bodyPr anchor="b">
+            <a:normAutofit fontScale="90000"/>
+          </a:bodyPr>
+          <a:lstStyle/>
+          <a:p>
+            <a:pPr algn="l"/>
+            <a:r>
+              <a:rPr lang="es-ES" dirty="0"/>
+              <a:t>MODIFIABILITY PROBLEM: SOLUTION</a:t>
+            </a:r>
+          </a:p>
+        </p:txBody>
+      </p:sp>
+      <p:sp>
+        <p:nvSpPr>
+          <p:cNvPr id="3" name="Marcador de contenido 2">
+            <a:extLst>
+              <a:ext uri="{FF2B5EF4-FFF2-40B4-BE49-F238E27FC236}">
+                <a16:creationId xmlns:a16="http://schemas.microsoft.com/office/drawing/2014/main" id="{904A46F4-5F3A-8047-7AD8-5EC66B448D1D}"/>
+              </a:ext>
+            </a:extLst>
+          </p:cNvPr>
+          <p:cNvSpPr>
+            <a:spLocks noGrp="1"/>
+          </p:cNvSpPr>
+          <p:nvPr>
+            <p:ph idx="1"/>
+          </p:nvPr>
+        </p:nvSpPr>
+        <p:spPr>
+          <a:xfrm>
+            <a:off x="630936" y="2660904"/>
+            <a:ext cx="4818888" cy="3547872"/>
+          </a:xfrm>
+        </p:spPr>
+        <p:txBody>
+          <a:bodyPr anchor="t">
+            <a:normAutofit fontScale="92500" lnSpcReduction="10000"/>
+          </a:bodyPr>
+          <a:lstStyle/>
+          <a:p>
+            <a:r>
+              <a:rPr lang="en-GB" sz="2200" dirty="0"/>
+              <a:t>The persistent adapter is </a:t>
+            </a:r>
+            <a:r>
+              <a:rPr lang="en-GB" sz="2200" dirty="0" err="1"/>
+              <a:t>splited</a:t>
+            </a:r>
+            <a:r>
+              <a:rPr lang="en-GB" sz="2200" dirty="0"/>
+              <a:t> in many independent adapters, as much as services are in the system.</a:t>
+            </a:r>
+            <a:endParaRPr lang="es-ES" sz="2200" dirty="0"/>
+          </a:p>
+          <a:p>
+            <a:r>
+              <a:rPr lang="es-ES" sz="2200" noProof="0" dirty="0" err="1"/>
+              <a:t>With</a:t>
+            </a:r>
+            <a:r>
+              <a:rPr lang="es-ES" sz="2200" noProof="0" dirty="0"/>
+              <a:t> </a:t>
+            </a:r>
+            <a:r>
+              <a:rPr lang="es-ES" sz="2200" noProof="0" dirty="0" err="1"/>
+              <a:t>this</a:t>
+            </a:r>
+            <a:r>
+              <a:rPr lang="es-ES" sz="2200" dirty="0"/>
+              <a:t>, </a:t>
+            </a:r>
+            <a:r>
+              <a:rPr lang="es-ES" sz="2200" dirty="0" err="1"/>
+              <a:t>if</a:t>
+            </a:r>
+            <a:r>
+              <a:rPr lang="es-ES" sz="2200" dirty="0"/>
+              <a:t> </a:t>
+            </a:r>
+            <a:r>
+              <a:rPr lang="es-ES" sz="2200" dirty="0" err="1"/>
+              <a:t>one</a:t>
+            </a:r>
+            <a:r>
+              <a:rPr lang="es-ES" sz="2200" dirty="0"/>
+              <a:t> </a:t>
+            </a:r>
+            <a:r>
+              <a:rPr lang="es-ES" sz="2200" dirty="0" err="1"/>
+              <a:t>service</a:t>
+            </a:r>
+            <a:r>
+              <a:rPr lang="es-ES" sz="2200" dirty="0"/>
+              <a:t> </a:t>
+            </a:r>
+            <a:r>
+              <a:rPr lang="es-ES" sz="2200" dirty="0" err="1"/>
+              <a:t>part</a:t>
+            </a:r>
+            <a:r>
+              <a:rPr lang="es-ES" sz="2200" dirty="0"/>
+              <a:t> </a:t>
+            </a:r>
+            <a:r>
+              <a:rPr lang="es-ES" sz="2200" dirty="0" err="1"/>
+              <a:t>needs</a:t>
+            </a:r>
+            <a:r>
+              <a:rPr lang="es-ES" sz="2200" dirty="0"/>
+              <a:t> </a:t>
+            </a:r>
+            <a:r>
+              <a:rPr lang="es-ES" sz="2200" dirty="0" err="1"/>
+              <a:t>to</a:t>
+            </a:r>
+            <a:r>
+              <a:rPr lang="es-ES" sz="2200" dirty="0"/>
+              <a:t> be </a:t>
+            </a:r>
+            <a:r>
+              <a:rPr lang="es-ES" sz="2200" dirty="0" err="1"/>
+              <a:t>modified</a:t>
+            </a:r>
+            <a:r>
+              <a:rPr lang="es-ES" sz="2200" dirty="0"/>
+              <a:t>, </a:t>
+            </a:r>
+            <a:r>
+              <a:rPr lang="es-ES" sz="2200" dirty="0" err="1"/>
+              <a:t>it</a:t>
+            </a:r>
+            <a:r>
+              <a:rPr lang="es-ES" sz="2200" dirty="0"/>
+              <a:t> can be done </a:t>
+            </a:r>
+            <a:r>
+              <a:rPr lang="es-ES" sz="2200" dirty="0" err="1"/>
+              <a:t>without</a:t>
+            </a:r>
+            <a:r>
+              <a:rPr lang="es-ES" sz="2200" dirty="0"/>
+              <a:t> </a:t>
+            </a:r>
+            <a:r>
+              <a:rPr lang="es-ES" sz="2200" dirty="0" err="1"/>
+              <a:t>affecting</a:t>
+            </a:r>
+            <a:r>
+              <a:rPr lang="es-ES" sz="2200" dirty="0"/>
+              <a:t> </a:t>
+            </a:r>
+            <a:r>
+              <a:rPr lang="es-ES" sz="2200" dirty="0" err="1"/>
+              <a:t>to</a:t>
+            </a:r>
+            <a:r>
+              <a:rPr lang="es-ES" sz="2200" dirty="0"/>
+              <a:t> </a:t>
+            </a:r>
+            <a:r>
+              <a:rPr lang="es-ES" sz="2200" dirty="0" err="1"/>
+              <a:t>the</a:t>
+            </a:r>
+            <a:r>
+              <a:rPr lang="es-ES" sz="2200" dirty="0"/>
+              <a:t> </a:t>
+            </a:r>
+            <a:r>
+              <a:rPr lang="es-ES" sz="2200" dirty="0" err="1"/>
+              <a:t>other</a:t>
+            </a:r>
+            <a:r>
+              <a:rPr lang="es-ES" sz="2200" dirty="0"/>
+              <a:t> </a:t>
+            </a:r>
+            <a:r>
+              <a:rPr lang="es-ES" sz="2200" dirty="0" err="1"/>
+              <a:t>services</a:t>
+            </a:r>
+            <a:r>
+              <a:rPr lang="es-ES" sz="2200" dirty="0"/>
+              <a:t> </a:t>
+            </a:r>
+            <a:r>
+              <a:rPr lang="es-ES" sz="2200" dirty="0" err="1"/>
+              <a:t>or</a:t>
+            </a:r>
+            <a:r>
+              <a:rPr lang="es-ES" sz="2200" dirty="0"/>
+              <a:t> data </a:t>
+            </a:r>
+            <a:r>
+              <a:rPr lang="es-ES" sz="2200" dirty="0" err="1"/>
+              <a:t>flows</a:t>
+            </a:r>
+            <a:r>
+              <a:rPr lang="es-ES" sz="2200" dirty="0"/>
+              <a:t>.</a:t>
+            </a:r>
+          </a:p>
+          <a:p>
+            <a:r>
+              <a:rPr lang="es-ES" sz="2200" noProof="0" dirty="0"/>
+              <a:t>In </a:t>
+            </a:r>
+            <a:r>
+              <a:rPr lang="es-ES" sz="2200" dirty="0" err="1"/>
+              <a:t>our</a:t>
+            </a:r>
+            <a:r>
+              <a:rPr lang="es-ES" sz="2200" dirty="0"/>
+              <a:t> case, </a:t>
+            </a:r>
+            <a:r>
+              <a:rPr lang="es-ES" sz="2200" dirty="0" err="1"/>
+              <a:t>this</a:t>
+            </a:r>
+            <a:r>
+              <a:rPr lang="es-ES" sz="2200" dirty="0"/>
+              <a:t> </a:t>
+            </a:r>
+            <a:r>
+              <a:rPr lang="es-ES" sz="2200" dirty="0" err="1"/>
+              <a:t>modification</a:t>
+            </a:r>
+            <a:r>
+              <a:rPr lang="es-ES" sz="2200" dirty="0"/>
+              <a:t> </a:t>
+            </a:r>
+            <a:r>
+              <a:rPr lang="es-ES" sz="2200" dirty="0" err="1"/>
+              <a:t>allows</a:t>
+            </a:r>
+            <a:r>
+              <a:rPr lang="es-ES" sz="2200" dirty="0"/>
+              <a:t> </a:t>
+            </a:r>
+            <a:r>
+              <a:rPr lang="es-ES" sz="2200" dirty="0" err="1"/>
+              <a:t>an</a:t>
+            </a:r>
+            <a:r>
+              <a:rPr lang="es-ES" sz="2200" dirty="0"/>
+              <a:t> </a:t>
+            </a:r>
+            <a:r>
+              <a:rPr lang="es-ES" sz="2200" dirty="0" err="1"/>
+              <a:t>easy</a:t>
+            </a:r>
+            <a:r>
+              <a:rPr lang="es-ES" sz="2200" dirty="0"/>
+              <a:t> </a:t>
+            </a:r>
+            <a:r>
+              <a:rPr lang="es-ES" sz="2200" dirty="0" err="1"/>
+              <a:t>Grading</a:t>
+            </a:r>
+            <a:r>
+              <a:rPr lang="es-ES" sz="2200" dirty="0"/>
+              <a:t> </a:t>
+            </a:r>
+            <a:r>
+              <a:rPr lang="es-ES" sz="2200" dirty="0" err="1"/>
+              <a:t>System</a:t>
+            </a:r>
+            <a:r>
+              <a:rPr lang="es-ES" sz="2200" dirty="0"/>
+              <a:t> </a:t>
+            </a:r>
+            <a:r>
+              <a:rPr lang="es-ES" sz="2200" dirty="0" err="1"/>
+              <a:t>service</a:t>
+            </a:r>
+            <a:r>
+              <a:rPr lang="es-ES" sz="2200" dirty="0"/>
+              <a:t> </a:t>
+            </a:r>
+            <a:r>
+              <a:rPr lang="es-ES" sz="2200" dirty="0" err="1"/>
+              <a:t>modification</a:t>
+            </a:r>
+            <a:r>
+              <a:rPr lang="es-ES" sz="2200" dirty="0"/>
+              <a:t>, meeting </a:t>
+            </a:r>
+            <a:r>
+              <a:rPr lang="es-ES" sz="2200" dirty="0" err="1"/>
+              <a:t>the</a:t>
+            </a:r>
+            <a:r>
+              <a:rPr lang="es-ES" sz="2200" dirty="0"/>
+              <a:t> </a:t>
+            </a:r>
+            <a:r>
+              <a:rPr lang="es-ES" sz="2200" dirty="0" err="1"/>
+              <a:t>one-hour</a:t>
+            </a:r>
+            <a:r>
+              <a:rPr lang="es-ES" sz="2200" dirty="0"/>
+              <a:t> </a:t>
+            </a:r>
+            <a:r>
+              <a:rPr lang="es-ES" sz="2200" dirty="0" err="1"/>
+              <a:t>deadline</a:t>
+            </a:r>
+            <a:r>
+              <a:rPr lang="es-ES" sz="2200" dirty="0"/>
+              <a:t>.</a:t>
+            </a:r>
+            <a:endParaRPr lang="en-GB" sz="2200" noProof="0" dirty="0"/>
+          </a:p>
+        </p:txBody>
+      </p:sp>
+      <p:pic>
+        <p:nvPicPr>
+          <p:cNvPr id="6" name="Imagen 5" descr="Imagen que contiene Interfaz de usuario gráfica&#10;&#10;El contenido generado por IA puede ser incorrecto.">
+            <a:extLst>
+              <a:ext uri="{FF2B5EF4-FFF2-40B4-BE49-F238E27FC236}">
+                <a16:creationId xmlns:a16="http://schemas.microsoft.com/office/drawing/2014/main" id="{F6643991-A7AA-096C-F3C9-60637A085517}"/>
+              </a:ext>
+            </a:extLst>
+          </p:cNvPr>
+          <p:cNvPicPr>
+            <a:picLocks noChangeAspect="1"/>
+          </p:cNvPicPr>
+          <p:nvPr/>
+        </p:nvPicPr>
+        <p:blipFill>
+          <a:blip r:embed="rId2"/>
+          <a:stretch>
+            <a:fillRect/>
+          </a:stretch>
+        </p:blipFill>
+        <p:spPr>
+          <a:xfrm>
+            <a:off x="5449824" y="2121408"/>
+            <a:ext cx="6510873" cy="3881120"/>
+          </a:xfrm>
+          <a:prstGeom prst="rect">
+            <a:avLst/>
+          </a:prstGeom>
+        </p:spPr>
+      </p:pic>
+    </p:spTree>
+    <p:extLst>
+      <p:ext uri="{BB962C8B-B14F-4D97-AF65-F5344CB8AC3E}">
+        <p14:creationId xmlns:p14="http://schemas.microsoft.com/office/powerpoint/2010/main" val="1428783815"/>
+      </p:ext>
+    </p:extLst>
+  </p:cSld>
+  <p:clrMapOvr>
+    <a:masterClrMapping/>
+  </p:clrMapOvr>
+</p:sld>
+</file>
+
+<file path=ppt/slides/slide16.xml><?xml version="1.0" encoding="utf-8"?>
 <p:sld xmlns:a="http://schemas.openxmlformats.org/drawingml/2006/main" xmlns:r="http://schemas.openxmlformats.org/officeDocument/2006/relationships" xmlns:p="http://schemas.openxmlformats.org/presentationml/2006/main">
   <p:cSld>
     <p:spTree>
@@ -12503,7 +8823,7 @@
 </p:sld>
 </file>
 
-<file path=ppt/slides/slide19.xml><?xml version="1.0" encoding="utf-8"?>
+<file path=ppt/slides/slide17.xml><?xml version="1.0" encoding="utf-8"?>
 <p:sld xmlns:a="http://schemas.openxmlformats.org/drawingml/2006/main" xmlns:r="http://schemas.openxmlformats.org/officeDocument/2006/relationships" xmlns:p="http://schemas.openxmlformats.org/presentationml/2006/main">
   <p:cSld>
     <p:spTree>
@@ -12683,215 +9003,7 @@
 </p:sld>
 </file>
 
-<file path=ppt/slides/slide2.xml><?xml version="1.0" encoding="utf-8"?>
-<p:sld xmlns:a="http://schemas.openxmlformats.org/drawingml/2006/main" xmlns:r="http://schemas.openxmlformats.org/officeDocument/2006/relationships" xmlns:p="http://schemas.openxmlformats.org/presentationml/2006/main">
-  <p:cSld>
-    <p:spTree>
-      <p:nvGrpSpPr>
-        <p:cNvPr id="1" name="">
-          <a:extLst>
-            <a:ext uri="{FF2B5EF4-FFF2-40B4-BE49-F238E27FC236}">
-              <a16:creationId xmlns:a16="http://schemas.microsoft.com/office/drawing/2014/main" id="{4B94F80A-071C-338C-291F-2AD14EF3B1C7}"/>
-            </a:ext>
-          </a:extLst>
-        </p:cNvPr>
-        <p:cNvGrpSpPr/>
-        <p:nvPr/>
-      </p:nvGrpSpPr>
-      <p:grpSpPr>
-        <a:xfrm>
-          <a:off x="0" y="0"/>
-          <a:ext cx="0" cy="0"/>
-          <a:chOff x="0" y="0"/>
-          <a:chExt cx="0" cy="0"/>
-        </a:xfrm>
-      </p:grpSpPr>
-      <p:sp>
-        <p:nvSpPr>
-          <p:cNvPr id="2" name="Title 1">
-            <a:extLst>
-              <a:ext uri="{FF2B5EF4-FFF2-40B4-BE49-F238E27FC236}">
-                <a16:creationId xmlns:a16="http://schemas.microsoft.com/office/drawing/2014/main" id="{CE747146-4EA1-AA67-17BB-5CA0BD57D447}"/>
-              </a:ext>
-            </a:extLst>
-          </p:cNvPr>
-          <p:cNvSpPr>
-            <a:spLocks noGrp="1"/>
-          </p:cNvSpPr>
-          <p:nvPr>
-            <p:ph type="title"/>
-          </p:nvPr>
-        </p:nvSpPr>
-        <p:spPr>
-          <a:xfrm>
-            <a:off x="433086" y="0"/>
-            <a:ext cx="10515600" cy="1325563"/>
-          </a:xfrm>
-        </p:spPr>
-        <p:txBody>
-          <a:bodyPr/>
-          <a:lstStyle/>
-          <a:p>
-            <a:r>
-              <a:rPr lang="en-001" dirty="0"/>
-              <a:t>SECURITY </a:t>
-            </a:r>
-            <a:r>
-              <a:rPr lang="en-US" dirty="0"/>
-              <a:t>PROBLEM</a:t>
-            </a:r>
-            <a:br>
-              <a:rPr lang="en-001" dirty="0"/>
-            </a:br>
-            <a:r>
-              <a:rPr lang="en-001" sz="2000" dirty="0"/>
-              <a:t>(Valentyn)</a:t>
-            </a:r>
-            <a:endParaRPr lang="en-US" sz="2000" dirty="0"/>
-          </a:p>
-        </p:txBody>
-      </p:sp>
-      <p:sp>
-        <p:nvSpPr>
-          <p:cNvPr id="3" name="Content Placeholder 2">
-            <a:extLst>
-              <a:ext uri="{FF2B5EF4-FFF2-40B4-BE49-F238E27FC236}">
-                <a16:creationId xmlns:a16="http://schemas.microsoft.com/office/drawing/2014/main" id="{3275C814-2661-2F57-ADD4-4A961CB1C671}"/>
-              </a:ext>
-            </a:extLst>
-          </p:cNvPr>
-          <p:cNvSpPr>
-            <a:spLocks noGrp="1"/>
-          </p:cNvSpPr>
-          <p:nvPr>
-            <p:ph idx="1"/>
-          </p:nvPr>
-        </p:nvSpPr>
-        <p:spPr>
-          <a:xfrm>
-            <a:off x="6095999" y="196057"/>
-            <a:ext cx="5822092" cy="4916574"/>
-          </a:xfrm>
-        </p:spPr>
-        <p:txBody>
-          <a:bodyPr>
-            <a:normAutofit/>
-          </a:bodyPr>
-          <a:lstStyle/>
-          <a:p>
-            <a:pPr marL="0" indent="0">
-              <a:buNone/>
-            </a:pPr>
-            <a:r>
-              <a:rPr lang="en-US" sz="2400" dirty="0"/>
-              <a:t>An attacker</a:t>
-            </a:r>
-            <a:r>
-              <a:rPr lang="en-001" sz="2400" dirty="0"/>
-              <a:t> tries to modify the grades by</a:t>
-            </a:r>
-            <a:r>
-              <a:rPr lang="en-US" sz="2400" dirty="0"/>
-              <a:t> </a:t>
-            </a:r>
-            <a:r>
-              <a:rPr lang="en-001" sz="2400" dirty="0"/>
-              <a:t>sending </a:t>
-            </a:r>
-            <a:r>
-              <a:rPr lang="en-US" sz="2400" dirty="0"/>
-              <a:t>a grade edit request to Grading Management component.</a:t>
-            </a:r>
-            <a:endParaRPr lang="en-001" sz="2400" dirty="0"/>
-          </a:p>
-          <a:p>
-            <a:pPr marL="0" indent="0">
-              <a:buNone/>
-            </a:pPr>
-            <a:endParaRPr lang="en-001" sz="2400" dirty="0"/>
-          </a:p>
-          <a:p>
-            <a:pPr marL="0" indent="0">
-              <a:buNone/>
-            </a:pPr>
-            <a:r>
-              <a:rPr lang="en-001" sz="3200" dirty="0"/>
-              <a:t>Solution:</a:t>
-            </a:r>
-            <a:endParaRPr lang="en-001" sz="2400" dirty="0"/>
-          </a:p>
-          <a:p>
-            <a:pPr marL="0" indent="0">
-              <a:buNone/>
-            </a:pPr>
-            <a:r>
-              <a:rPr lang="en-US" sz="2400" dirty="0"/>
-              <a:t>The request is detected, an attacker is not recognized as a teacher, notification is sent.</a:t>
-            </a:r>
-            <a:endParaRPr lang="en-001" sz="2400" dirty="0"/>
-          </a:p>
-          <a:p>
-            <a:pPr marL="0" indent="0">
-              <a:buNone/>
-            </a:pPr>
-            <a:endParaRPr lang="en-001" sz="2400" dirty="0"/>
-          </a:p>
-          <a:p>
-            <a:pPr marL="0" indent="0">
-              <a:buNone/>
-            </a:pPr>
-            <a:r>
-              <a:rPr lang="en-US" sz="2400" dirty="0"/>
-              <a:t>No architecture modification is needed because a notification is just being sent.</a:t>
-            </a:r>
-            <a:endParaRPr lang="en-001" sz="2400" dirty="0"/>
-          </a:p>
-        </p:txBody>
-      </p:sp>
-      <p:pic>
-        <p:nvPicPr>
-          <p:cNvPr id="13" name="Picture 12">
-            <a:extLst>
-              <a:ext uri="{FF2B5EF4-FFF2-40B4-BE49-F238E27FC236}">
-                <a16:creationId xmlns:a16="http://schemas.microsoft.com/office/drawing/2014/main" id="{11C8A0D1-575D-4D21-5CD4-9B1DD20D63DA}"/>
-              </a:ext>
-            </a:extLst>
-          </p:cNvPr>
-          <p:cNvPicPr>
-            <a:picLocks noChangeAspect="1"/>
-          </p:cNvPicPr>
-          <p:nvPr/>
-        </p:nvPicPr>
-        <p:blipFill>
-          <a:blip r:embed="rId2"/>
-          <a:stretch>
-            <a:fillRect/>
-          </a:stretch>
-        </p:blipFill>
-        <p:spPr>
-          <a:xfrm>
-            <a:off x="527860" y="5080572"/>
-            <a:ext cx="11136279" cy="1581371"/>
-          </a:xfrm>
-          <a:prstGeom prst="rect">
-            <a:avLst/>
-          </a:prstGeom>
-        </p:spPr>
-      </p:pic>
-    </p:spTree>
-    <p:extLst>
-      <p:ext uri="{BB962C8B-B14F-4D97-AF65-F5344CB8AC3E}">
-        <p14:creationId xmlns:p14="http://schemas.microsoft.com/office/powerpoint/2010/main" val="1245900753"/>
-      </p:ext>
-    </p:extLst>
-  </p:cSld>
-  <p:clrMapOvr>
-    <a:masterClrMapping/>
-  </p:clrMapOvr>
-</p:sld>
-</file>
-
-<file path=ppt/slides/slide20.xml><?xml version="1.0" encoding="utf-8"?>
+<file path=ppt/slides/slide18.xml><?xml version="1.0" encoding="utf-8"?>
 <p:sld xmlns:a="http://schemas.openxmlformats.org/drawingml/2006/main" xmlns:r="http://schemas.openxmlformats.org/officeDocument/2006/relationships" xmlns:p="http://schemas.openxmlformats.org/presentationml/2006/main">
   <p:cSld>
     <p:spTree>
@@ -13114,7 +9226,7 @@
 </p:sld>
 </file>
 
-<file path=ppt/slides/slide21.xml><?xml version="1.0" encoding="utf-8"?>
+<file path=ppt/slides/slide19.xml><?xml version="1.0" encoding="utf-8"?>
 <p:sld xmlns:a="http://schemas.openxmlformats.org/drawingml/2006/main" xmlns:r="http://schemas.openxmlformats.org/officeDocument/2006/relationships" xmlns:p="http://schemas.openxmlformats.org/presentationml/2006/main">
   <p:cSld>
     <p:spTree>
@@ -13376,7 +9488,215 @@
 </p:sld>
 </file>
 
-<file path=ppt/slides/slide22.xml><?xml version="1.0" encoding="utf-8"?>
+<file path=ppt/slides/slide2.xml><?xml version="1.0" encoding="utf-8"?>
+<p:sld xmlns:a="http://schemas.openxmlformats.org/drawingml/2006/main" xmlns:r="http://schemas.openxmlformats.org/officeDocument/2006/relationships" xmlns:p="http://schemas.openxmlformats.org/presentationml/2006/main">
+  <p:cSld>
+    <p:spTree>
+      <p:nvGrpSpPr>
+        <p:cNvPr id="1" name="">
+          <a:extLst>
+            <a:ext uri="{FF2B5EF4-FFF2-40B4-BE49-F238E27FC236}">
+              <a16:creationId xmlns:a16="http://schemas.microsoft.com/office/drawing/2014/main" id="{4B94F80A-071C-338C-291F-2AD14EF3B1C7}"/>
+            </a:ext>
+          </a:extLst>
+        </p:cNvPr>
+        <p:cNvGrpSpPr/>
+        <p:nvPr/>
+      </p:nvGrpSpPr>
+      <p:grpSpPr>
+        <a:xfrm>
+          <a:off x="0" y="0"/>
+          <a:ext cx="0" cy="0"/>
+          <a:chOff x="0" y="0"/>
+          <a:chExt cx="0" cy="0"/>
+        </a:xfrm>
+      </p:grpSpPr>
+      <p:sp>
+        <p:nvSpPr>
+          <p:cNvPr id="2" name="Title 1">
+            <a:extLst>
+              <a:ext uri="{FF2B5EF4-FFF2-40B4-BE49-F238E27FC236}">
+                <a16:creationId xmlns:a16="http://schemas.microsoft.com/office/drawing/2014/main" id="{CE747146-4EA1-AA67-17BB-5CA0BD57D447}"/>
+              </a:ext>
+            </a:extLst>
+          </p:cNvPr>
+          <p:cNvSpPr>
+            <a:spLocks noGrp="1"/>
+          </p:cNvSpPr>
+          <p:nvPr>
+            <p:ph type="title"/>
+          </p:nvPr>
+        </p:nvSpPr>
+        <p:spPr>
+          <a:xfrm>
+            <a:off x="433086" y="0"/>
+            <a:ext cx="10515600" cy="1325563"/>
+          </a:xfrm>
+        </p:spPr>
+        <p:txBody>
+          <a:bodyPr/>
+          <a:lstStyle/>
+          <a:p>
+            <a:r>
+              <a:rPr lang="en-001" dirty="0"/>
+              <a:t>SECURITY </a:t>
+            </a:r>
+            <a:r>
+              <a:rPr lang="en-US" dirty="0"/>
+              <a:t>PROBLEM</a:t>
+            </a:r>
+            <a:br>
+              <a:rPr lang="en-001" dirty="0"/>
+            </a:br>
+            <a:r>
+              <a:rPr lang="en-001" sz="2000" dirty="0"/>
+              <a:t>(Valentyn)</a:t>
+            </a:r>
+            <a:endParaRPr lang="en-US" sz="2000" dirty="0"/>
+          </a:p>
+        </p:txBody>
+      </p:sp>
+      <p:sp>
+        <p:nvSpPr>
+          <p:cNvPr id="3" name="Content Placeholder 2">
+            <a:extLst>
+              <a:ext uri="{FF2B5EF4-FFF2-40B4-BE49-F238E27FC236}">
+                <a16:creationId xmlns:a16="http://schemas.microsoft.com/office/drawing/2014/main" id="{3275C814-2661-2F57-ADD4-4A961CB1C671}"/>
+              </a:ext>
+            </a:extLst>
+          </p:cNvPr>
+          <p:cNvSpPr>
+            <a:spLocks noGrp="1"/>
+          </p:cNvSpPr>
+          <p:nvPr>
+            <p:ph idx="1"/>
+          </p:nvPr>
+        </p:nvSpPr>
+        <p:spPr>
+          <a:xfrm>
+            <a:off x="6095999" y="196057"/>
+            <a:ext cx="5822092" cy="4916574"/>
+          </a:xfrm>
+        </p:spPr>
+        <p:txBody>
+          <a:bodyPr>
+            <a:normAutofit/>
+          </a:bodyPr>
+          <a:lstStyle/>
+          <a:p>
+            <a:pPr marL="0" indent="0">
+              <a:buNone/>
+            </a:pPr>
+            <a:r>
+              <a:rPr lang="en-US" sz="2400" dirty="0"/>
+              <a:t>An attacker</a:t>
+            </a:r>
+            <a:r>
+              <a:rPr lang="en-001" sz="2400" dirty="0"/>
+              <a:t> tries to modify the grades by</a:t>
+            </a:r>
+            <a:r>
+              <a:rPr lang="en-US" sz="2400" dirty="0"/>
+              <a:t> </a:t>
+            </a:r>
+            <a:r>
+              <a:rPr lang="en-001" sz="2400" dirty="0"/>
+              <a:t>sending </a:t>
+            </a:r>
+            <a:r>
+              <a:rPr lang="en-US" sz="2400" dirty="0"/>
+              <a:t>a grade edit request to Grading Management component.</a:t>
+            </a:r>
+            <a:endParaRPr lang="en-001" sz="2400" dirty="0"/>
+          </a:p>
+          <a:p>
+            <a:pPr marL="0" indent="0">
+              <a:buNone/>
+            </a:pPr>
+            <a:endParaRPr lang="en-001" sz="2400" dirty="0"/>
+          </a:p>
+          <a:p>
+            <a:pPr marL="0" indent="0">
+              <a:buNone/>
+            </a:pPr>
+            <a:r>
+              <a:rPr lang="en-001" sz="3200" dirty="0"/>
+              <a:t>Solution:</a:t>
+            </a:r>
+            <a:endParaRPr lang="en-001" sz="2400" dirty="0"/>
+          </a:p>
+          <a:p>
+            <a:pPr marL="0" indent="0">
+              <a:buNone/>
+            </a:pPr>
+            <a:r>
+              <a:rPr lang="en-US" sz="2400" dirty="0"/>
+              <a:t>The request is detected, an attacker is not recognized as a teacher, notification is sent.</a:t>
+            </a:r>
+            <a:endParaRPr lang="en-001" sz="2400" dirty="0"/>
+          </a:p>
+          <a:p>
+            <a:pPr marL="0" indent="0">
+              <a:buNone/>
+            </a:pPr>
+            <a:endParaRPr lang="en-001" sz="2400" dirty="0"/>
+          </a:p>
+          <a:p>
+            <a:pPr marL="0" indent="0">
+              <a:buNone/>
+            </a:pPr>
+            <a:r>
+              <a:rPr lang="en-US" sz="2400" dirty="0"/>
+              <a:t>No architecture modification is needed because a notification is just being sent.</a:t>
+            </a:r>
+            <a:endParaRPr lang="en-001" sz="2400" dirty="0"/>
+          </a:p>
+        </p:txBody>
+      </p:sp>
+      <p:pic>
+        <p:nvPicPr>
+          <p:cNvPr id="13" name="Picture 12">
+            <a:extLst>
+              <a:ext uri="{FF2B5EF4-FFF2-40B4-BE49-F238E27FC236}">
+                <a16:creationId xmlns:a16="http://schemas.microsoft.com/office/drawing/2014/main" id="{11C8A0D1-575D-4D21-5CD4-9B1DD20D63DA}"/>
+              </a:ext>
+            </a:extLst>
+          </p:cNvPr>
+          <p:cNvPicPr>
+            <a:picLocks noChangeAspect="1"/>
+          </p:cNvPicPr>
+          <p:nvPr/>
+        </p:nvPicPr>
+        <p:blipFill>
+          <a:blip r:embed="rId2"/>
+          <a:stretch>
+            <a:fillRect/>
+          </a:stretch>
+        </p:blipFill>
+        <p:spPr>
+          <a:xfrm>
+            <a:off x="527860" y="5080572"/>
+            <a:ext cx="11136279" cy="1581371"/>
+          </a:xfrm>
+          <a:prstGeom prst="rect">
+            <a:avLst/>
+          </a:prstGeom>
+        </p:spPr>
+      </p:pic>
+    </p:spTree>
+    <p:extLst>
+      <p:ext uri="{BB962C8B-B14F-4D97-AF65-F5344CB8AC3E}">
+        <p14:creationId xmlns:p14="http://schemas.microsoft.com/office/powerpoint/2010/main" val="1245900753"/>
+      </p:ext>
+    </p:extLst>
+  </p:cSld>
+  <p:clrMapOvr>
+    <a:masterClrMapping/>
+  </p:clrMapOvr>
+</p:sld>
+</file>
+
+<file path=ppt/slides/slide20.xml><?xml version="1.0" encoding="utf-8"?>
 <p:sld xmlns:a="http://schemas.openxmlformats.org/drawingml/2006/main" xmlns:r="http://schemas.openxmlformats.org/officeDocument/2006/relationships" xmlns:p="http://schemas.openxmlformats.org/presentationml/2006/main">
   <p:cSld>
     <p:spTree>
@@ -13670,7 +9990,7 @@
 </p:sld>
 </file>
 
-<file path=ppt/slides/slide23.xml><?xml version="1.0" encoding="utf-8"?>
+<file path=ppt/slides/slide21.xml><?xml version="1.0" encoding="utf-8"?>
 <p:sld xmlns:a="http://schemas.openxmlformats.org/drawingml/2006/main" xmlns:r="http://schemas.openxmlformats.org/officeDocument/2006/relationships" xmlns:p="http://schemas.openxmlformats.org/presentationml/2006/main">
   <p:cSld>
     <p:spTree>
@@ -14932,436 +11252,6 @@
 <file path=ppt/slides/slide7.xml><?xml version="1.0" encoding="utf-8"?>
 <p:sld xmlns:a="http://schemas.openxmlformats.org/drawingml/2006/main" xmlns:r="http://schemas.openxmlformats.org/officeDocument/2006/relationships" xmlns:p="http://schemas.openxmlformats.org/presentationml/2006/main">
   <p:cSld>
-    <p:bg>
-      <p:bgPr>
-        <a:solidFill>
-          <a:schemeClr val="bg1"/>
-        </a:solidFill>
-        <a:effectLst/>
-      </p:bgPr>
-    </p:bg>
-    <p:spTree>
-      <p:nvGrpSpPr>
-        <p:cNvPr id="1" name="">
-          <a:extLst>
-            <a:ext uri="{FF2B5EF4-FFF2-40B4-BE49-F238E27FC236}">
-              <a16:creationId xmlns:a16="http://schemas.microsoft.com/office/drawing/2014/main" id="{40D75302-7086-39AF-681D-AA4CA1B40A2F}"/>
-            </a:ext>
-          </a:extLst>
-        </p:cNvPr>
-        <p:cNvGrpSpPr/>
-        <p:nvPr/>
-      </p:nvGrpSpPr>
-      <p:grpSpPr>
-        <a:xfrm>
-          <a:off x="0" y="0"/>
-          <a:ext cx="0" cy="0"/>
-          <a:chOff x="0" y="0"/>
-          <a:chExt cx="0" cy="0"/>
-        </a:xfrm>
-      </p:grpSpPr>
-      <p:sp>
-        <p:nvSpPr>
-          <p:cNvPr id="2" name="Título 1">
-            <a:extLst>
-              <a:ext uri="{FF2B5EF4-FFF2-40B4-BE49-F238E27FC236}">
-                <a16:creationId xmlns:a16="http://schemas.microsoft.com/office/drawing/2014/main" id="{84F26597-39C7-F7D6-4554-A75DC45B28BD}"/>
-              </a:ext>
-            </a:extLst>
-          </p:cNvPr>
-          <p:cNvSpPr>
-            <a:spLocks noGrp="1"/>
-          </p:cNvSpPr>
-          <p:nvPr>
-            <p:ph type="title"/>
-          </p:nvPr>
-        </p:nvSpPr>
-        <p:spPr>
-          <a:xfrm>
-            <a:off x="630936" y="323088"/>
-            <a:ext cx="5637784" cy="1592072"/>
-          </a:xfrm>
-        </p:spPr>
-        <p:txBody>
-          <a:bodyPr anchor="b">
-            <a:normAutofit fontScale="90000"/>
-          </a:bodyPr>
-          <a:lstStyle/>
-          <a:p>
-            <a:pPr algn="l"/>
-            <a:r>
-              <a:rPr lang="es-ES" dirty="0"/>
-              <a:t>MODIFIABILITY PROBLEM: SOLUTION</a:t>
-            </a:r>
-          </a:p>
-        </p:txBody>
-      </p:sp>
-      <p:sp>
-        <p:nvSpPr>
-          <p:cNvPr id="3" name="Marcador de contenido 2">
-            <a:extLst>
-              <a:ext uri="{FF2B5EF4-FFF2-40B4-BE49-F238E27FC236}">
-                <a16:creationId xmlns:a16="http://schemas.microsoft.com/office/drawing/2014/main" id="{904A46F4-5F3A-8047-7AD8-5EC66B448D1D}"/>
-              </a:ext>
-            </a:extLst>
-          </p:cNvPr>
-          <p:cNvSpPr>
-            <a:spLocks noGrp="1"/>
-          </p:cNvSpPr>
-          <p:nvPr>
-            <p:ph idx="1"/>
-          </p:nvPr>
-        </p:nvSpPr>
-        <p:spPr>
-          <a:xfrm>
-            <a:off x="630936" y="2660904"/>
-            <a:ext cx="4818888" cy="3547872"/>
-          </a:xfrm>
-        </p:spPr>
-        <p:txBody>
-          <a:bodyPr anchor="t">
-            <a:normAutofit fontScale="92500" lnSpcReduction="10000"/>
-          </a:bodyPr>
-          <a:lstStyle/>
-          <a:p>
-            <a:r>
-              <a:rPr lang="en-GB" sz="2200" dirty="0"/>
-              <a:t>The persistent adapter is </a:t>
-            </a:r>
-            <a:r>
-              <a:rPr lang="en-GB" sz="2200" dirty="0" err="1"/>
-              <a:t>splited</a:t>
-            </a:r>
-            <a:r>
-              <a:rPr lang="en-GB" sz="2200" dirty="0"/>
-              <a:t> in many independent adapters, as much as services are in the system.</a:t>
-            </a:r>
-            <a:endParaRPr lang="es-ES" sz="2200" dirty="0"/>
-          </a:p>
-          <a:p>
-            <a:r>
-              <a:rPr lang="es-ES" sz="2200" noProof="0" dirty="0" err="1"/>
-              <a:t>With</a:t>
-            </a:r>
-            <a:r>
-              <a:rPr lang="es-ES" sz="2200" noProof="0" dirty="0"/>
-              <a:t> </a:t>
-            </a:r>
-            <a:r>
-              <a:rPr lang="es-ES" sz="2200" noProof="0" dirty="0" err="1"/>
-              <a:t>this</a:t>
-            </a:r>
-            <a:r>
-              <a:rPr lang="es-ES" sz="2200" dirty="0"/>
-              <a:t>, </a:t>
-            </a:r>
-            <a:r>
-              <a:rPr lang="es-ES" sz="2200" dirty="0" err="1"/>
-              <a:t>if</a:t>
-            </a:r>
-            <a:r>
-              <a:rPr lang="es-ES" sz="2200" dirty="0"/>
-              <a:t> </a:t>
-            </a:r>
-            <a:r>
-              <a:rPr lang="es-ES" sz="2200" dirty="0" err="1"/>
-              <a:t>one</a:t>
-            </a:r>
-            <a:r>
-              <a:rPr lang="es-ES" sz="2200" dirty="0"/>
-              <a:t> </a:t>
-            </a:r>
-            <a:r>
-              <a:rPr lang="es-ES" sz="2200" dirty="0" err="1"/>
-              <a:t>service</a:t>
-            </a:r>
-            <a:r>
-              <a:rPr lang="es-ES" sz="2200" dirty="0"/>
-              <a:t> </a:t>
-            </a:r>
-            <a:r>
-              <a:rPr lang="es-ES" sz="2200" dirty="0" err="1"/>
-              <a:t>part</a:t>
-            </a:r>
-            <a:r>
-              <a:rPr lang="es-ES" sz="2200" dirty="0"/>
-              <a:t> </a:t>
-            </a:r>
-            <a:r>
-              <a:rPr lang="es-ES" sz="2200" dirty="0" err="1"/>
-              <a:t>needs</a:t>
-            </a:r>
-            <a:r>
-              <a:rPr lang="es-ES" sz="2200" dirty="0"/>
-              <a:t> </a:t>
-            </a:r>
-            <a:r>
-              <a:rPr lang="es-ES" sz="2200" dirty="0" err="1"/>
-              <a:t>to</a:t>
-            </a:r>
-            <a:r>
-              <a:rPr lang="es-ES" sz="2200" dirty="0"/>
-              <a:t> be </a:t>
-            </a:r>
-            <a:r>
-              <a:rPr lang="es-ES" sz="2200" dirty="0" err="1"/>
-              <a:t>modified</a:t>
-            </a:r>
-            <a:r>
-              <a:rPr lang="es-ES" sz="2200" dirty="0"/>
-              <a:t>, </a:t>
-            </a:r>
-            <a:r>
-              <a:rPr lang="es-ES" sz="2200" dirty="0" err="1"/>
-              <a:t>it</a:t>
-            </a:r>
-            <a:r>
-              <a:rPr lang="es-ES" sz="2200" dirty="0"/>
-              <a:t> can be done </a:t>
-            </a:r>
-            <a:r>
-              <a:rPr lang="es-ES" sz="2200" dirty="0" err="1"/>
-              <a:t>without</a:t>
-            </a:r>
-            <a:r>
-              <a:rPr lang="es-ES" sz="2200" dirty="0"/>
-              <a:t> </a:t>
-            </a:r>
-            <a:r>
-              <a:rPr lang="es-ES" sz="2200" dirty="0" err="1"/>
-              <a:t>affecting</a:t>
-            </a:r>
-            <a:r>
-              <a:rPr lang="es-ES" sz="2200" dirty="0"/>
-              <a:t> </a:t>
-            </a:r>
-            <a:r>
-              <a:rPr lang="es-ES" sz="2200" dirty="0" err="1"/>
-              <a:t>to</a:t>
-            </a:r>
-            <a:r>
-              <a:rPr lang="es-ES" sz="2200" dirty="0"/>
-              <a:t> </a:t>
-            </a:r>
-            <a:r>
-              <a:rPr lang="es-ES" sz="2200" dirty="0" err="1"/>
-              <a:t>the</a:t>
-            </a:r>
-            <a:r>
-              <a:rPr lang="es-ES" sz="2200" dirty="0"/>
-              <a:t> </a:t>
-            </a:r>
-            <a:r>
-              <a:rPr lang="es-ES" sz="2200" dirty="0" err="1"/>
-              <a:t>other</a:t>
-            </a:r>
-            <a:r>
-              <a:rPr lang="es-ES" sz="2200" dirty="0"/>
-              <a:t> </a:t>
-            </a:r>
-            <a:r>
-              <a:rPr lang="es-ES" sz="2200" dirty="0" err="1"/>
-              <a:t>services</a:t>
-            </a:r>
-            <a:r>
-              <a:rPr lang="es-ES" sz="2200" dirty="0"/>
-              <a:t> </a:t>
-            </a:r>
-            <a:r>
-              <a:rPr lang="es-ES" sz="2200" dirty="0" err="1"/>
-              <a:t>or</a:t>
-            </a:r>
-            <a:r>
-              <a:rPr lang="es-ES" sz="2200" dirty="0"/>
-              <a:t> data </a:t>
-            </a:r>
-            <a:r>
-              <a:rPr lang="es-ES" sz="2200" dirty="0" err="1"/>
-              <a:t>flows</a:t>
-            </a:r>
-            <a:r>
-              <a:rPr lang="es-ES" sz="2200" dirty="0"/>
-              <a:t>.</a:t>
-            </a:r>
-          </a:p>
-          <a:p>
-            <a:r>
-              <a:rPr lang="es-ES" sz="2200" noProof="0" dirty="0"/>
-              <a:t>In </a:t>
-            </a:r>
-            <a:r>
-              <a:rPr lang="es-ES" sz="2200" dirty="0" err="1"/>
-              <a:t>our</a:t>
-            </a:r>
-            <a:r>
-              <a:rPr lang="es-ES" sz="2200" dirty="0"/>
-              <a:t> case, </a:t>
-            </a:r>
-            <a:r>
-              <a:rPr lang="es-ES" sz="2200" dirty="0" err="1"/>
-              <a:t>this</a:t>
-            </a:r>
-            <a:r>
-              <a:rPr lang="es-ES" sz="2200" dirty="0"/>
-              <a:t> </a:t>
-            </a:r>
-            <a:r>
-              <a:rPr lang="es-ES" sz="2200" dirty="0" err="1"/>
-              <a:t>modification</a:t>
-            </a:r>
-            <a:r>
-              <a:rPr lang="es-ES" sz="2200" dirty="0"/>
-              <a:t> </a:t>
-            </a:r>
-            <a:r>
-              <a:rPr lang="es-ES" sz="2200" dirty="0" err="1"/>
-              <a:t>allows</a:t>
-            </a:r>
-            <a:r>
-              <a:rPr lang="es-ES" sz="2200" dirty="0"/>
-              <a:t> </a:t>
-            </a:r>
-            <a:r>
-              <a:rPr lang="es-ES" sz="2200" dirty="0" err="1"/>
-              <a:t>an</a:t>
-            </a:r>
-            <a:r>
-              <a:rPr lang="es-ES" sz="2200" dirty="0"/>
-              <a:t> </a:t>
-            </a:r>
-            <a:r>
-              <a:rPr lang="es-ES" sz="2200" dirty="0" err="1"/>
-              <a:t>easy</a:t>
-            </a:r>
-            <a:r>
-              <a:rPr lang="es-ES" sz="2200" dirty="0"/>
-              <a:t> </a:t>
-            </a:r>
-            <a:r>
-              <a:rPr lang="es-ES" sz="2200" dirty="0" err="1"/>
-              <a:t>Grading</a:t>
-            </a:r>
-            <a:r>
-              <a:rPr lang="es-ES" sz="2200" dirty="0"/>
-              <a:t> </a:t>
-            </a:r>
-            <a:r>
-              <a:rPr lang="es-ES" sz="2200" dirty="0" err="1"/>
-              <a:t>System</a:t>
-            </a:r>
-            <a:r>
-              <a:rPr lang="es-ES" sz="2200" dirty="0"/>
-              <a:t> </a:t>
-            </a:r>
-            <a:r>
-              <a:rPr lang="es-ES" sz="2200" dirty="0" err="1"/>
-              <a:t>service</a:t>
-            </a:r>
-            <a:r>
-              <a:rPr lang="es-ES" sz="2200" dirty="0"/>
-              <a:t> </a:t>
-            </a:r>
-            <a:r>
-              <a:rPr lang="es-ES" sz="2200" dirty="0" err="1"/>
-              <a:t>modification</a:t>
-            </a:r>
-            <a:r>
-              <a:rPr lang="es-ES" sz="2200" dirty="0"/>
-              <a:t>, meeting </a:t>
-            </a:r>
-            <a:r>
-              <a:rPr lang="es-ES" sz="2200" dirty="0" err="1"/>
-              <a:t>the</a:t>
-            </a:r>
-            <a:r>
-              <a:rPr lang="es-ES" sz="2200" dirty="0"/>
-              <a:t> </a:t>
-            </a:r>
-            <a:r>
-              <a:rPr lang="es-ES" sz="2200" dirty="0" err="1"/>
-              <a:t>one-hour</a:t>
-            </a:r>
-            <a:r>
-              <a:rPr lang="es-ES" sz="2200" dirty="0"/>
-              <a:t> </a:t>
-            </a:r>
-            <a:r>
-              <a:rPr lang="es-ES" sz="2200" dirty="0" err="1"/>
-              <a:t>deadline</a:t>
-            </a:r>
-            <a:r>
-              <a:rPr lang="es-ES" sz="2200" dirty="0"/>
-              <a:t>.</a:t>
-            </a:r>
-            <a:endParaRPr lang="en-GB" sz="2200" noProof="0" dirty="0"/>
-          </a:p>
-        </p:txBody>
-      </p:sp>
-      <p:pic>
-        <p:nvPicPr>
-          <p:cNvPr id="6" name="Imagen 5" descr="Imagen que contiene Interfaz de usuario gráfica&#10;&#10;El contenido generado por IA puede ser incorrecto.">
-            <a:extLst>
-              <a:ext uri="{FF2B5EF4-FFF2-40B4-BE49-F238E27FC236}">
-                <a16:creationId xmlns:a16="http://schemas.microsoft.com/office/drawing/2014/main" id="{F6643991-A7AA-096C-F3C9-60637A085517}"/>
-              </a:ext>
-            </a:extLst>
-          </p:cNvPr>
-          <p:cNvPicPr>
-            <a:picLocks noChangeAspect="1"/>
-          </p:cNvPicPr>
-          <p:nvPr/>
-        </p:nvPicPr>
-        <p:blipFill>
-          <a:blip r:embed="rId2"/>
-          <a:stretch>
-            <a:fillRect/>
-          </a:stretch>
-        </p:blipFill>
-        <p:spPr>
-          <a:xfrm>
-            <a:off x="5449824" y="2121408"/>
-            <a:ext cx="6510873" cy="3881120"/>
-          </a:xfrm>
-          <a:prstGeom prst="rect">
-            <a:avLst/>
-          </a:prstGeom>
-        </p:spPr>
-      </p:pic>
-    </p:spTree>
-    <p:extLst>
-      <p:ext uri="{BB962C8B-B14F-4D97-AF65-F5344CB8AC3E}">
-        <p14:creationId xmlns:p14="http://schemas.microsoft.com/office/powerpoint/2010/main" val="1428783815"/>
-      </p:ext>
-    </p:extLst>
-  </p:cSld>
-  <p:clrMapOvr>
-    <a:masterClrMapping/>
-  </p:clrMapOvr>
-</p:sld>
-</file>
-
-<file path=ppt/slides/slide8.xml><?xml version="1.0" encoding="utf-8"?>
-<p:sld xmlns:a="http://schemas.openxmlformats.org/drawingml/2006/main" xmlns:r="http://schemas.openxmlformats.org/officeDocument/2006/relationships" xmlns:p="http://schemas.openxmlformats.org/presentationml/2006/main">
-  <p:cSld>
-    <p:bg>
-      <p:bgPr>
-        <a:blipFill rotWithShape="1">
-          <a:blip r:embed="rId2">
-            <a:duotone>
-              <a:schemeClr val="bg2">
-                <a:shade val="80000"/>
-                <a:lumMod val="80000"/>
-              </a:schemeClr>
-              <a:schemeClr val="bg2">
-                <a:tint val="98000"/>
-              </a:schemeClr>
-            </a:duotone>
-          </a:blip>
-          <a:stretch/>
-        </a:blipFill>
-        <a:effectLst/>
-      </p:bgPr>
-    </p:bg>
     <p:spTree>
       <p:nvGrpSpPr>
         <p:cNvPr id="1" name="">
@@ -15384,576 +11274,6 @@
       </p:grpSpPr>
       <p:sp>
         <p:nvSpPr>
-          <p:cNvPr id="12" name="Rectangle 11">
-            <a:extLst>
-              <a:ext uri="{FF2B5EF4-FFF2-40B4-BE49-F238E27FC236}">
-                <a16:creationId xmlns:a16="http://schemas.microsoft.com/office/drawing/2014/main" id="{AC224410-FF86-4FBB-A05E-61232D4B1368}"/>
-              </a:ext>
-              <a:ext uri="{C183D7F6-B498-43B3-948B-1728B52AA6E4}">
-                <adec:decorative xmlns:adec="http://schemas.microsoft.com/office/drawing/2017/decorative" val="1"/>
-              </a:ext>
-            </a:extLst>
-          </p:cNvPr>
-          <p:cNvSpPr>
-            <a:spLocks noGrp="1" noRot="1" noChangeAspect="1" noMove="1" noResize="1" noEditPoints="1" noAdjustHandles="1" noChangeArrowheads="1" noChangeShapeType="1" noTextEdit="1"/>
-          </p:cNvSpPr>
-          <p:nvPr>
-            <p:extLst>
-              <p:ext uri="{386F3935-93C4-4BCD-93E2-E3B085C9AB24}">
-                <p16:designElem xmlns:p16="http://schemas.microsoft.com/office/powerpoint/2015/main" val="1"/>
-              </p:ext>
-            </p:extLst>
-          </p:nvPr>
-        </p:nvSpPr>
-        <p:spPr>
-          <a:xfrm>
-            <a:off x="0" y="0"/>
-            <a:ext cx="12192000" cy="6858000"/>
-          </a:xfrm>
-          <a:prstGeom prst="rect">
-            <a:avLst/>
-          </a:prstGeom>
-          <a:solidFill>
-            <a:schemeClr val="bg2">
-              <a:lumMod val="75000"/>
-              <a:lumOff val="25000"/>
-            </a:schemeClr>
-          </a:solidFill>
-          <a:ln>
-            <a:noFill/>
-          </a:ln>
-        </p:spPr>
-        <p:style>
-          <a:lnRef idx="2">
-            <a:schemeClr val="accent1">
-              <a:shade val="50000"/>
-            </a:schemeClr>
-          </a:lnRef>
-          <a:fillRef idx="1">
-            <a:schemeClr val="accent1"/>
-          </a:fillRef>
-          <a:effectRef idx="0">
-            <a:schemeClr val="accent1"/>
-          </a:effectRef>
-          <a:fontRef idx="minor">
-            <a:schemeClr val="lt1"/>
-          </a:fontRef>
-        </p:style>
-        <p:txBody>
-          <a:bodyPr rtlCol="0" anchor="ctr"/>
-          <a:lstStyle/>
-          <a:p>
-            <a:pPr algn="ctr"/>
-            <a:endParaRPr lang="en-US"/>
-          </a:p>
-        </p:txBody>
-      </p:sp>
-      <p:sp useBgFill="1">
-        <p:nvSpPr>
-          <p:cNvPr id="13" name="Freeform: Shape 12">
-            <a:extLst>
-              <a:ext uri="{FF2B5EF4-FFF2-40B4-BE49-F238E27FC236}">
-                <a16:creationId xmlns:a16="http://schemas.microsoft.com/office/drawing/2014/main" id="{F3BDD110-869E-4A8C-9250-C7AE5C840842}"/>
-              </a:ext>
-              <a:ext uri="{C183D7F6-B498-43B3-948B-1728B52AA6E4}">
-                <adec:decorative xmlns:adec="http://schemas.microsoft.com/office/drawing/2017/decorative" val="1"/>
-              </a:ext>
-            </a:extLst>
-          </p:cNvPr>
-          <p:cNvSpPr>
-            <a:spLocks noGrp="1" noRot="1" noChangeAspect="1" noMove="1" noResize="1" noEditPoints="1" noAdjustHandles="1" noChangeArrowheads="1" noChangeShapeType="1" noTextEdit="1"/>
-          </p:cNvSpPr>
-          <p:nvPr>
-            <p:extLst>
-              <p:ext uri="{386F3935-93C4-4BCD-93E2-E3B085C9AB24}">
-                <p16:designElem xmlns:p16="http://schemas.microsoft.com/office/powerpoint/2015/main" val="1"/>
-              </p:ext>
-            </p:extLst>
-          </p:nvPr>
-        </p:nvSpPr>
-        <p:spPr>
-          <a:xfrm>
-            <a:off x="7302" y="-2"/>
-            <a:ext cx="6088698" cy="6858002"/>
-          </a:xfrm>
-          <a:custGeom>
-            <a:avLst/>
-            <a:gdLst>
-              <a:gd name="connsiteX0" fmla="*/ 0 w 6088698"/>
-              <a:gd name="connsiteY0" fmla="*/ 0 h 6858002"/>
-              <a:gd name="connsiteX1" fmla="*/ 2610464 w 6088698"/>
-              <a:gd name="connsiteY1" fmla="*/ 0 h 6858002"/>
-              <a:gd name="connsiteX2" fmla="*/ 2610464 w 6088698"/>
-              <a:gd name="connsiteY2" fmla="*/ 3 h 6858002"/>
-              <a:gd name="connsiteX3" fmla="*/ 5749313 w 6088698"/>
-              <a:gd name="connsiteY3" fmla="*/ 3 h 6858002"/>
-              <a:gd name="connsiteX4" fmla="*/ 5749313 w 6088698"/>
-              <a:gd name="connsiteY4" fmla="*/ 4 h 6858002"/>
-              <a:gd name="connsiteX5" fmla="*/ 5740011 w 6088698"/>
-              <a:gd name="connsiteY5" fmla="*/ 4 h 6858002"/>
-              <a:gd name="connsiteX6" fmla="*/ 5748114 w 6088698"/>
-              <a:gd name="connsiteY6" fmla="*/ 40466 h 6858002"/>
-              <a:gd name="connsiteX7" fmla="*/ 5771963 w 6088698"/>
-              <a:gd name="connsiteY7" fmla="*/ 159110 h 6858002"/>
-              <a:gd name="connsiteX8" fmla="*/ 5788633 w 6088698"/>
-              <a:gd name="connsiteY8" fmla="*/ 245521 h 6858002"/>
-              <a:gd name="connsiteX9" fmla="*/ 5806229 w 6088698"/>
-              <a:gd name="connsiteY9" fmla="*/ 348391 h 6858002"/>
-              <a:gd name="connsiteX10" fmla="*/ 5827299 w 6088698"/>
-              <a:gd name="connsiteY10" fmla="*/ 470463 h 6858002"/>
-              <a:gd name="connsiteX11" fmla="*/ 5849526 w 6088698"/>
-              <a:gd name="connsiteY11" fmla="*/ 605566 h 6858002"/>
-              <a:gd name="connsiteX12" fmla="*/ 5872911 w 6088698"/>
-              <a:gd name="connsiteY12" fmla="*/ 757813 h 6858002"/>
-              <a:gd name="connsiteX13" fmla="*/ 5897684 w 6088698"/>
-              <a:gd name="connsiteY13" fmla="*/ 923777 h 6858002"/>
-              <a:gd name="connsiteX14" fmla="*/ 5922459 w 6088698"/>
-              <a:gd name="connsiteY14" fmla="*/ 1104142 h 6858002"/>
-              <a:gd name="connsiteX15" fmla="*/ 5947695 w 6088698"/>
-              <a:gd name="connsiteY15" fmla="*/ 1296166 h 6858002"/>
-              <a:gd name="connsiteX16" fmla="*/ 5971079 w 6088698"/>
-              <a:gd name="connsiteY16" fmla="*/ 1503278 h 6858002"/>
-              <a:gd name="connsiteX17" fmla="*/ 5993538 w 6088698"/>
-              <a:gd name="connsiteY17" fmla="*/ 1719991 h 6858002"/>
-              <a:gd name="connsiteX18" fmla="*/ 6013913 w 6088698"/>
-              <a:gd name="connsiteY18" fmla="*/ 1949048 h 6858002"/>
-              <a:gd name="connsiteX19" fmla="*/ 6033361 w 6088698"/>
-              <a:gd name="connsiteY19" fmla="*/ 2187706 h 6858002"/>
-              <a:gd name="connsiteX20" fmla="*/ 6051654 w 6088698"/>
-              <a:gd name="connsiteY20" fmla="*/ 2436652 h 6858002"/>
-              <a:gd name="connsiteX21" fmla="*/ 6058136 w 6088698"/>
-              <a:gd name="connsiteY21" fmla="*/ 2564211 h 6858002"/>
-              <a:gd name="connsiteX22" fmla="*/ 6065314 w 6088698"/>
-              <a:gd name="connsiteY22" fmla="*/ 2694512 h 6858002"/>
-              <a:gd name="connsiteX23" fmla="*/ 6072027 w 6088698"/>
-              <a:gd name="connsiteY23" fmla="*/ 2826871 h 6858002"/>
-              <a:gd name="connsiteX24" fmla="*/ 6076427 w 6088698"/>
-              <a:gd name="connsiteY24" fmla="*/ 2959917 h 6858002"/>
-              <a:gd name="connsiteX25" fmla="*/ 6080363 w 6088698"/>
-              <a:gd name="connsiteY25" fmla="*/ 3095705 h 6858002"/>
-              <a:gd name="connsiteX26" fmla="*/ 6084530 w 6088698"/>
-              <a:gd name="connsiteY26" fmla="*/ 3232865 h 6858002"/>
-              <a:gd name="connsiteX27" fmla="*/ 6087308 w 6088698"/>
-              <a:gd name="connsiteY27" fmla="*/ 3372768 h 6858002"/>
-              <a:gd name="connsiteX28" fmla="*/ 6087308 w 6088698"/>
-              <a:gd name="connsiteY28" fmla="*/ 3514043 h 6858002"/>
-              <a:gd name="connsiteX29" fmla="*/ 6088698 w 6088698"/>
-              <a:gd name="connsiteY29" fmla="*/ 3656689 h 6858002"/>
-              <a:gd name="connsiteX30" fmla="*/ 6087308 w 6088698"/>
-              <a:gd name="connsiteY30" fmla="*/ 3800707 h 6858002"/>
-              <a:gd name="connsiteX31" fmla="*/ 6084530 w 6088698"/>
-              <a:gd name="connsiteY31" fmla="*/ 3946783 h 6858002"/>
-              <a:gd name="connsiteX32" fmla="*/ 6081983 w 6088698"/>
-              <a:gd name="connsiteY32" fmla="*/ 4092858 h 6858002"/>
-              <a:gd name="connsiteX33" fmla="*/ 6076427 w 6088698"/>
-              <a:gd name="connsiteY33" fmla="*/ 4240991 h 6858002"/>
-              <a:gd name="connsiteX34" fmla="*/ 6070639 w 6088698"/>
-              <a:gd name="connsiteY34" fmla="*/ 4390495 h 6858002"/>
-              <a:gd name="connsiteX35" fmla="*/ 6063924 w 6088698"/>
-              <a:gd name="connsiteY35" fmla="*/ 4540000 h 6858002"/>
-              <a:gd name="connsiteX36" fmla="*/ 6054432 w 6088698"/>
-              <a:gd name="connsiteY36" fmla="*/ 4690876 h 6858002"/>
-              <a:gd name="connsiteX37" fmla="*/ 6043086 w 6088698"/>
-              <a:gd name="connsiteY37" fmla="*/ 4843123 h 6858002"/>
-              <a:gd name="connsiteX38" fmla="*/ 6032204 w 6088698"/>
-              <a:gd name="connsiteY38" fmla="*/ 4996057 h 6858002"/>
-              <a:gd name="connsiteX39" fmla="*/ 6018313 w 6088698"/>
-              <a:gd name="connsiteY39" fmla="*/ 5148990 h 6858002"/>
-              <a:gd name="connsiteX40" fmla="*/ 6001642 w 6088698"/>
-              <a:gd name="connsiteY40" fmla="*/ 5303981 h 6858002"/>
-              <a:gd name="connsiteX41" fmla="*/ 5984972 w 6088698"/>
-              <a:gd name="connsiteY41" fmla="*/ 5456914 h 6858002"/>
-              <a:gd name="connsiteX42" fmla="*/ 5965754 w 6088698"/>
-              <a:gd name="connsiteY42" fmla="*/ 5612591 h 6858002"/>
-              <a:gd name="connsiteX43" fmla="*/ 5944685 w 6088698"/>
-              <a:gd name="connsiteY43" fmla="*/ 5768953 h 6858002"/>
-              <a:gd name="connsiteX44" fmla="*/ 5922459 w 6088698"/>
-              <a:gd name="connsiteY44" fmla="*/ 5923258 h 6858002"/>
-              <a:gd name="connsiteX45" fmla="*/ 5896527 w 6088698"/>
-              <a:gd name="connsiteY45" fmla="*/ 6079621 h 6858002"/>
-              <a:gd name="connsiteX46" fmla="*/ 5868743 w 6088698"/>
-              <a:gd name="connsiteY46" fmla="*/ 6235297 h 6858002"/>
-              <a:gd name="connsiteX47" fmla="*/ 5841190 w 6088698"/>
-              <a:gd name="connsiteY47" fmla="*/ 6391660 h 6858002"/>
-              <a:gd name="connsiteX48" fmla="*/ 5809008 w 6088698"/>
-              <a:gd name="connsiteY48" fmla="*/ 6547336 h 6858002"/>
-              <a:gd name="connsiteX49" fmla="*/ 5776130 w 6088698"/>
-              <a:gd name="connsiteY49" fmla="*/ 6702327 h 6858002"/>
-              <a:gd name="connsiteX50" fmla="*/ 5741633 w 6088698"/>
-              <a:gd name="connsiteY50" fmla="*/ 6858002 h 6858002"/>
-              <a:gd name="connsiteX51" fmla="*/ 2610464 w 6088698"/>
-              <a:gd name="connsiteY51" fmla="*/ 6858002 h 6858002"/>
-              <a:gd name="connsiteX52" fmla="*/ 0 w 6088698"/>
-              <a:gd name="connsiteY52" fmla="*/ 6858002 h 6858002"/>
-            </a:gdLst>
-            <a:ahLst/>
-            <a:cxnLst>
-              <a:cxn ang="0">
-                <a:pos x="connsiteX0" y="connsiteY0"/>
-              </a:cxn>
-              <a:cxn ang="0">
-                <a:pos x="connsiteX1" y="connsiteY1"/>
-              </a:cxn>
-              <a:cxn ang="0">
-                <a:pos x="connsiteX2" y="connsiteY2"/>
-              </a:cxn>
-              <a:cxn ang="0">
-                <a:pos x="connsiteX3" y="connsiteY3"/>
-              </a:cxn>
-              <a:cxn ang="0">
-                <a:pos x="connsiteX4" y="connsiteY4"/>
-              </a:cxn>
-              <a:cxn ang="0">
-                <a:pos x="connsiteX5" y="connsiteY5"/>
-              </a:cxn>
-              <a:cxn ang="0">
-                <a:pos x="connsiteX6" y="connsiteY6"/>
-              </a:cxn>
-              <a:cxn ang="0">
-                <a:pos x="connsiteX7" y="connsiteY7"/>
-              </a:cxn>
-              <a:cxn ang="0">
-                <a:pos x="connsiteX8" y="connsiteY8"/>
-              </a:cxn>
-              <a:cxn ang="0">
-                <a:pos x="connsiteX9" y="connsiteY9"/>
-              </a:cxn>
-              <a:cxn ang="0">
-                <a:pos x="connsiteX10" y="connsiteY10"/>
-              </a:cxn>
-              <a:cxn ang="0">
-                <a:pos x="connsiteX11" y="connsiteY11"/>
-              </a:cxn>
-              <a:cxn ang="0">
-                <a:pos x="connsiteX12" y="connsiteY12"/>
-              </a:cxn>
-              <a:cxn ang="0">
-                <a:pos x="connsiteX13" y="connsiteY13"/>
-              </a:cxn>
-              <a:cxn ang="0">
-                <a:pos x="connsiteX14" y="connsiteY14"/>
-              </a:cxn>
-              <a:cxn ang="0">
-                <a:pos x="connsiteX15" y="connsiteY15"/>
-              </a:cxn>
-              <a:cxn ang="0">
-                <a:pos x="connsiteX16" y="connsiteY16"/>
-              </a:cxn>
-              <a:cxn ang="0">
-                <a:pos x="connsiteX17" y="connsiteY17"/>
-              </a:cxn>
-              <a:cxn ang="0">
-                <a:pos x="connsiteX18" y="connsiteY18"/>
-              </a:cxn>
-              <a:cxn ang="0">
-                <a:pos x="connsiteX19" y="connsiteY19"/>
-              </a:cxn>
-              <a:cxn ang="0">
-                <a:pos x="connsiteX20" y="connsiteY20"/>
-              </a:cxn>
-              <a:cxn ang="0">
-                <a:pos x="connsiteX21" y="connsiteY21"/>
-              </a:cxn>
-              <a:cxn ang="0">
-                <a:pos x="connsiteX22" y="connsiteY22"/>
-              </a:cxn>
-              <a:cxn ang="0">
-                <a:pos x="connsiteX23" y="connsiteY23"/>
-              </a:cxn>
-              <a:cxn ang="0">
-                <a:pos x="connsiteX24" y="connsiteY24"/>
-              </a:cxn>
-              <a:cxn ang="0">
-                <a:pos x="connsiteX25" y="connsiteY25"/>
-              </a:cxn>
-              <a:cxn ang="0">
-                <a:pos x="connsiteX26" y="connsiteY26"/>
-              </a:cxn>
-              <a:cxn ang="0">
-                <a:pos x="connsiteX27" y="connsiteY27"/>
-              </a:cxn>
-              <a:cxn ang="0">
-                <a:pos x="connsiteX28" y="connsiteY28"/>
-              </a:cxn>
-              <a:cxn ang="0">
-                <a:pos x="connsiteX29" y="connsiteY29"/>
-              </a:cxn>
-              <a:cxn ang="0">
-                <a:pos x="connsiteX30" y="connsiteY30"/>
-              </a:cxn>
-              <a:cxn ang="0">
-                <a:pos x="connsiteX31" y="connsiteY31"/>
-              </a:cxn>
-              <a:cxn ang="0">
-                <a:pos x="connsiteX32" y="connsiteY32"/>
-              </a:cxn>
-              <a:cxn ang="0">
-                <a:pos x="connsiteX33" y="connsiteY33"/>
-              </a:cxn>
-              <a:cxn ang="0">
-                <a:pos x="connsiteX34" y="connsiteY34"/>
-              </a:cxn>
-              <a:cxn ang="0">
-                <a:pos x="connsiteX35" y="connsiteY35"/>
-              </a:cxn>
-              <a:cxn ang="0">
-                <a:pos x="connsiteX36" y="connsiteY36"/>
-              </a:cxn>
-              <a:cxn ang="0">
-                <a:pos x="connsiteX37" y="connsiteY37"/>
-              </a:cxn>
-              <a:cxn ang="0">
-                <a:pos x="connsiteX38" y="connsiteY38"/>
-              </a:cxn>
-              <a:cxn ang="0">
-                <a:pos x="connsiteX39" y="connsiteY39"/>
-              </a:cxn>
-              <a:cxn ang="0">
-                <a:pos x="connsiteX40" y="connsiteY40"/>
-              </a:cxn>
-              <a:cxn ang="0">
-                <a:pos x="connsiteX41" y="connsiteY41"/>
-              </a:cxn>
-              <a:cxn ang="0">
-                <a:pos x="connsiteX42" y="connsiteY42"/>
-              </a:cxn>
-              <a:cxn ang="0">
-                <a:pos x="connsiteX43" y="connsiteY43"/>
-              </a:cxn>
-              <a:cxn ang="0">
-                <a:pos x="connsiteX44" y="connsiteY44"/>
-              </a:cxn>
-              <a:cxn ang="0">
-                <a:pos x="connsiteX45" y="connsiteY45"/>
-              </a:cxn>
-              <a:cxn ang="0">
-                <a:pos x="connsiteX46" y="connsiteY46"/>
-              </a:cxn>
-              <a:cxn ang="0">
-                <a:pos x="connsiteX47" y="connsiteY47"/>
-              </a:cxn>
-              <a:cxn ang="0">
-                <a:pos x="connsiteX48" y="connsiteY48"/>
-              </a:cxn>
-              <a:cxn ang="0">
-                <a:pos x="connsiteX49" y="connsiteY49"/>
-              </a:cxn>
-              <a:cxn ang="0">
-                <a:pos x="connsiteX50" y="connsiteY50"/>
-              </a:cxn>
-              <a:cxn ang="0">
-                <a:pos x="connsiteX51" y="connsiteY51"/>
-              </a:cxn>
-              <a:cxn ang="0">
-                <a:pos x="connsiteX52" y="connsiteY52"/>
-              </a:cxn>
-            </a:cxnLst>
-            <a:rect l="l" t="t" r="r" b="b"/>
-            <a:pathLst>
-              <a:path w="6088698" h="6858002">
-                <a:moveTo>
-                  <a:pt x="0" y="0"/>
-                </a:moveTo>
-                <a:lnTo>
-                  <a:pt x="2610464" y="0"/>
-                </a:lnTo>
-                <a:lnTo>
-                  <a:pt x="2610464" y="3"/>
-                </a:lnTo>
-                <a:lnTo>
-                  <a:pt x="5749313" y="3"/>
-                </a:lnTo>
-                <a:lnTo>
-                  <a:pt x="5749313" y="4"/>
-                </a:lnTo>
-                <a:lnTo>
-                  <a:pt x="5740011" y="4"/>
-                </a:lnTo>
-                <a:lnTo>
-                  <a:pt x="5748114" y="40466"/>
-                </a:lnTo>
-                <a:lnTo>
-                  <a:pt x="5771963" y="159110"/>
-                </a:lnTo>
-                <a:lnTo>
-                  <a:pt x="5788633" y="245521"/>
-                </a:lnTo>
-                <a:lnTo>
-                  <a:pt x="5806229" y="348391"/>
-                </a:lnTo>
-                <a:lnTo>
-                  <a:pt x="5827299" y="470463"/>
-                </a:lnTo>
-                <a:lnTo>
-                  <a:pt x="5849526" y="605566"/>
-                </a:lnTo>
-                <a:lnTo>
-                  <a:pt x="5872911" y="757813"/>
-                </a:lnTo>
-                <a:lnTo>
-                  <a:pt x="5897684" y="923777"/>
-                </a:lnTo>
-                <a:lnTo>
-                  <a:pt x="5922459" y="1104142"/>
-                </a:lnTo>
-                <a:lnTo>
-                  <a:pt x="5947695" y="1296166"/>
-                </a:lnTo>
-                <a:lnTo>
-                  <a:pt x="5971079" y="1503278"/>
-                </a:lnTo>
-                <a:lnTo>
-                  <a:pt x="5993538" y="1719991"/>
-                </a:lnTo>
-                <a:lnTo>
-                  <a:pt x="6013913" y="1949048"/>
-                </a:lnTo>
-                <a:lnTo>
-                  <a:pt x="6033361" y="2187706"/>
-                </a:lnTo>
-                <a:lnTo>
-                  <a:pt x="6051654" y="2436652"/>
-                </a:lnTo>
-                <a:lnTo>
-                  <a:pt x="6058136" y="2564211"/>
-                </a:lnTo>
-                <a:lnTo>
-                  <a:pt x="6065314" y="2694512"/>
-                </a:lnTo>
-                <a:lnTo>
-                  <a:pt x="6072027" y="2826871"/>
-                </a:lnTo>
-                <a:lnTo>
-                  <a:pt x="6076427" y="2959917"/>
-                </a:lnTo>
-                <a:lnTo>
-                  <a:pt x="6080363" y="3095705"/>
-                </a:lnTo>
-                <a:lnTo>
-                  <a:pt x="6084530" y="3232865"/>
-                </a:lnTo>
-                <a:lnTo>
-                  <a:pt x="6087308" y="3372768"/>
-                </a:lnTo>
-                <a:lnTo>
-                  <a:pt x="6087308" y="3514043"/>
-                </a:lnTo>
-                <a:lnTo>
-                  <a:pt x="6088698" y="3656689"/>
-                </a:lnTo>
-                <a:lnTo>
-                  <a:pt x="6087308" y="3800707"/>
-                </a:lnTo>
-                <a:lnTo>
-                  <a:pt x="6084530" y="3946783"/>
-                </a:lnTo>
-                <a:lnTo>
-                  <a:pt x="6081983" y="4092858"/>
-                </a:lnTo>
-                <a:lnTo>
-                  <a:pt x="6076427" y="4240991"/>
-                </a:lnTo>
-                <a:lnTo>
-                  <a:pt x="6070639" y="4390495"/>
-                </a:lnTo>
-                <a:lnTo>
-                  <a:pt x="6063924" y="4540000"/>
-                </a:lnTo>
-                <a:lnTo>
-                  <a:pt x="6054432" y="4690876"/>
-                </a:lnTo>
-                <a:lnTo>
-                  <a:pt x="6043086" y="4843123"/>
-                </a:lnTo>
-                <a:lnTo>
-                  <a:pt x="6032204" y="4996057"/>
-                </a:lnTo>
-                <a:lnTo>
-                  <a:pt x="6018313" y="5148990"/>
-                </a:lnTo>
-                <a:lnTo>
-                  <a:pt x="6001642" y="5303981"/>
-                </a:lnTo>
-                <a:lnTo>
-                  <a:pt x="5984972" y="5456914"/>
-                </a:lnTo>
-                <a:lnTo>
-                  <a:pt x="5965754" y="5612591"/>
-                </a:lnTo>
-                <a:lnTo>
-                  <a:pt x="5944685" y="5768953"/>
-                </a:lnTo>
-                <a:lnTo>
-                  <a:pt x="5922459" y="5923258"/>
-                </a:lnTo>
-                <a:lnTo>
-                  <a:pt x="5896527" y="6079621"/>
-                </a:lnTo>
-                <a:lnTo>
-                  <a:pt x="5868743" y="6235297"/>
-                </a:lnTo>
-                <a:lnTo>
-                  <a:pt x="5841190" y="6391660"/>
-                </a:lnTo>
-                <a:lnTo>
-                  <a:pt x="5809008" y="6547336"/>
-                </a:lnTo>
-                <a:lnTo>
-                  <a:pt x="5776130" y="6702327"/>
-                </a:lnTo>
-                <a:lnTo>
-                  <a:pt x="5741633" y="6858002"/>
-                </a:lnTo>
-                <a:lnTo>
-                  <a:pt x="2610464" y="6858002"/>
-                </a:lnTo>
-                <a:lnTo>
-                  <a:pt x="0" y="6858002"/>
-                </a:lnTo>
-                <a:close/>
-              </a:path>
-            </a:pathLst>
-          </a:custGeom>
-          <a:ln>
-            <a:noFill/>
-          </a:ln>
-          <a:effectLst>
-            <a:outerShdw blurRad="50800" dist="38100" algn="l" rotWithShape="0">
-              <a:prstClr val="black">
-                <a:alpha val="40000"/>
-              </a:prstClr>
-            </a:outerShdw>
-          </a:effectLst>
-        </p:spPr>
-        <p:style>
-          <a:lnRef idx="2">
-            <a:schemeClr val="accent1">
-              <a:shade val="50000"/>
-            </a:schemeClr>
-          </a:lnRef>
-          <a:fillRef idx="1">
-            <a:schemeClr val="accent1"/>
-          </a:fillRef>
-          <a:effectRef idx="0">
-            <a:schemeClr val="accent1"/>
-          </a:effectRef>
-          <a:fontRef idx="minor">
-            <a:schemeClr val="lt1"/>
-          </a:fontRef>
-        </p:style>
-        <p:txBody>
-          <a:bodyPr wrap="square" rtlCol="0" anchor="ctr">
-            <a:noAutofit/>
-          </a:bodyPr>
-          <a:lstStyle/>
-          <a:p>
-            <a:pPr algn="ctr"/>
-            <a:endParaRPr lang="en-US"/>
-          </a:p>
-        </p:txBody>
-      </p:sp>
-      <p:sp>
-        <p:nvSpPr>
           <p:cNvPr id="2" name="Título 1">
             <a:extLst>
               <a:ext uri="{FF2B5EF4-FFF2-40B4-BE49-F238E27FC236}">
@@ -15982,17 +11302,17 @@
           <a:p>
             <a:pPr algn="l"/>
             <a:r>
-              <a:rPr lang="en-US" sz="3400"/>
+              <a:rPr lang="en-US" sz="3400" dirty="0"/>
               <a:t>REQUIREMENT:</a:t>
             </a:r>
             <a:br>
-              <a:rPr lang="en-US" sz="3400"/>
+              <a:rPr lang="en-US" sz="3400" dirty="0"/>
             </a:br>
             <a:r>
-              <a:rPr lang="en-US" sz="3400"/>
-              <a:t>MAINTAINABILITY &amp; TESTABILITY</a:t>
-            </a:r>
-            <a:endParaRPr lang="es-ES" sz="3400"/>
+              <a:rPr lang="en-US" sz="3400" dirty="0"/>
+              <a:t>TESTABILITY</a:t>
+            </a:r>
+            <a:endParaRPr lang="es-ES" sz="3400" dirty="0"/>
           </a:p>
         </p:txBody>
       </p:sp>
@@ -16026,16 +11346,19 @@
           <a:lstStyle/>
           <a:p>
             <a:r>
-              <a:rPr lang="en-US">
+              <a:rPr lang="en-US" dirty="0">
                 <a:solidFill>
                   <a:schemeClr val="tx1"/>
                 </a:solidFill>
               </a:rPr>
-              <a:t>Enable independent deployment of components, comprehensive automated testing, support bi-weekly releases.</a:t>
-            </a:r>
-          </a:p>
-          <a:p>
-            <a:endParaRPr lang="en-US">
+              <a:t>Each component of the system must take not more than 15 minutes to setup and deploy for testing.</a:t>
+            </a:r>
+          </a:p>
+          <a:p>
+            <a:pPr marL="36900" indent="0">
+              <a:buNone/>
+            </a:pPr>
+            <a:endParaRPr lang="en-US" dirty="0">
               <a:solidFill>
                 <a:schemeClr val="tx1"/>
               </a:solidFill>
@@ -16043,7 +11366,7 @@
           </a:p>
           <a:p>
             <a:r>
-              <a:rPr lang="en-US">
+              <a:rPr lang="en-US" dirty="0">
                 <a:solidFill>
                   <a:schemeClr val="tx1"/>
                 </a:solidFill>
@@ -16066,28 +11389,9 @@
 </p:sld>
 </file>
 
-<file path=ppt/slides/slide9.xml><?xml version="1.0" encoding="utf-8"?>
+<file path=ppt/slides/slide8.xml><?xml version="1.0" encoding="utf-8"?>
 <p:sld xmlns:a="http://schemas.openxmlformats.org/drawingml/2006/main" xmlns:r="http://schemas.openxmlformats.org/officeDocument/2006/relationships" xmlns:p="http://schemas.openxmlformats.org/presentationml/2006/main">
   <p:cSld>
-    <p:bg>
-      <p:bgPr>
-        <a:blipFill rotWithShape="1">
-          <a:blip r:embed="rId2">
-            <a:duotone>
-              <a:schemeClr val="bg2">
-                <a:shade val="80000"/>
-                <a:lumMod val="80000"/>
-              </a:schemeClr>
-              <a:schemeClr val="bg2">
-                <a:tint val="98000"/>
-              </a:schemeClr>
-            </a:duotone>
-          </a:blip>
-          <a:stretch/>
-        </a:blipFill>
-        <a:effectLst/>
-      </p:bgPr>
-    </p:bg>
     <p:spTree>
       <p:nvGrpSpPr>
         <p:cNvPr id="1" name="">
@@ -16108,66 +11412,6 @@
           <a:chExt cx="0" cy="0"/>
         </a:xfrm>
       </p:grpSpPr>
-      <p:sp useBgFill="1">
-        <p:nvSpPr>
-          <p:cNvPr id="8" name="Rectangle 7">
-            <a:extLst>
-              <a:ext uri="{FF2B5EF4-FFF2-40B4-BE49-F238E27FC236}">
-                <a16:creationId xmlns:a16="http://schemas.microsoft.com/office/drawing/2014/main" id="{9A6C2C86-63BF-47D5-AA3F-905111A238E2}"/>
-              </a:ext>
-              <a:ext uri="{C183D7F6-B498-43B3-948B-1728B52AA6E4}">
-                <adec:decorative xmlns:adec="http://schemas.microsoft.com/office/drawing/2017/decorative" val="1"/>
-              </a:ext>
-            </a:extLst>
-          </p:cNvPr>
-          <p:cNvSpPr>
-            <a:spLocks noGrp="1" noRot="1" noChangeAspect="1" noMove="1" noResize="1" noEditPoints="1" noAdjustHandles="1" noChangeArrowheads="1" noChangeShapeType="1" noTextEdit="1"/>
-          </p:cNvSpPr>
-          <p:nvPr>
-            <p:extLst>
-              <p:ext uri="{386F3935-93C4-4BCD-93E2-E3B085C9AB24}">
-                <p16:designElem xmlns:p16="http://schemas.microsoft.com/office/powerpoint/2015/main" val="1"/>
-              </p:ext>
-            </p:extLst>
-          </p:nvPr>
-        </p:nvSpPr>
-        <p:spPr>
-          <a:xfrm>
-            <a:off x="0" y="0"/>
-            <a:ext cx="12192000" cy="6858000"/>
-          </a:xfrm>
-          <a:prstGeom prst="rect">
-            <a:avLst/>
-          </a:prstGeom>
-          <a:ln>
-            <a:noFill/>
-          </a:ln>
-        </p:spPr>
-        <p:style>
-          <a:lnRef idx="2">
-            <a:schemeClr val="accent1">
-              <a:shade val="50000"/>
-            </a:schemeClr>
-          </a:lnRef>
-          <a:fillRef idx="1">
-            <a:schemeClr val="accent1"/>
-          </a:fillRef>
-          <a:effectRef idx="0">
-            <a:schemeClr val="accent1"/>
-          </a:effectRef>
-          <a:fontRef idx="minor">
-            <a:schemeClr val="lt1"/>
-          </a:fontRef>
-        </p:style>
-        <p:txBody>
-          <a:bodyPr rtlCol="0" anchor="ctr"/>
-          <a:lstStyle/>
-          <a:p>
-            <a:pPr algn="ctr"/>
-            <a:endParaRPr lang="en-US"/>
-          </a:p>
-        </p:txBody>
-      </p:sp>
       <p:sp>
         <p:nvSpPr>
           <p:cNvPr id="2" name="Title 1">
@@ -16199,7 +11443,7 @@
             <a:pPr algn="l"/>
             <a:r>
               <a:rPr lang="en-US" sz="3600" b="1" dirty="0"/>
-              <a:t>1. Clean Separation of Concerns:</a:t>
+              <a:t>1. Easy unit deployment:</a:t>
             </a:r>
             <a:br>
               <a:rPr lang="en-US" sz="3600" b="1" dirty="0"/>
@@ -16208,58 +11452,6 @@
           </a:p>
         </p:txBody>
       </p:sp>
-      <p:cxnSp>
-        <p:nvCxnSpPr>
-          <p:cNvPr id="10" name="Straight Connector 9">
-            <a:extLst>
-              <a:ext uri="{FF2B5EF4-FFF2-40B4-BE49-F238E27FC236}">
-                <a16:creationId xmlns:a16="http://schemas.microsoft.com/office/drawing/2014/main" id="{425A0768-3044-4AA9-A889-D2CAA68C517A}"/>
-              </a:ext>
-              <a:ext uri="{C183D7F6-B498-43B3-948B-1728B52AA6E4}">
-                <adec:decorative xmlns:adec="http://schemas.microsoft.com/office/drawing/2017/decorative" val="1"/>
-              </a:ext>
-            </a:extLst>
-          </p:cNvPr>
-          <p:cNvCxnSpPr>
-            <a:cxnSpLocks noGrp="1" noRot="1" noChangeAspect="1" noMove="1" noResize="1" noEditPoints="1" noAdjustHandles="1" noChangeArrowheads="1" noChangeShapeType="1"/>
-          </p:cNvCxnSpPr>
-          <p:nvPr>
-            <p:extLst>
-              <p:ext uri="{386F3935-93C4-4BCD-93E2-E3B085C9AB24}">
-                <p16:designElem xmlns:p16="http://schemas.microsoft.com/office/powerpoint/2015/main" val="1"/>
-              </p:ext>
-            </p:extLst>
-          </p:nvPr>
-        </p:nvCxnSpPr>
-        <p:spPr>
-          <a:xfrm>
-            <a:off x="4654605" y="2057400"/>
-            <a:ext cx="0" cy="2743200"/>
-          </a:xfrm>
-          <a:prstGeom prst="line">
-            <a:avLst/>
-          </a:prstGeom>
-          <a:ln w="19050">
-            <a:solidFill>
-              <a:schemeClr val="tx2"/>
-            </a:solidFill>
-          </a:ln>
-        </p:spPr>
-        <p:style>
-          <a:lnRef idx="1">
-            <a:schemeClr val="accent1"/>
-          </a:lnRef>
-          <a:fillRef idx="0">
-            <a:schemeClr val="accent1"/>
-          </a:fillRef>
-          <a:effectRef idx="0">
-            <a:schemeClr val="accent1"/>
-          </a:effectRef>
-          <a:fontRef idx="minor">
-            <a:schemeClr val="tx1"/>
-          </a:fontRef>
-        </p:style>
-      </p:cxnSp>
       <p:sp>
         <p:nvSpPr>
           <p:cNvPr id="3" name="Content Placeholder 2">
@@ -16290,23 +11482,14 @@
           <a:p>
             <a:r>
               <a:rPr lang="en-US" dirty="0"/>
-              <a:t>Clear component boundaries with single responsibilities (Term Management, Registration, Grading, Results)</a:t>
+              <a:t>All modules communicate with each other via the Integration Adaptor</a:t>
             </a:r>
           </a:p>
           <a:p>
             <a:r>
               <a:rPr lang="en-US" dirty="0"/>
-              <a:t>Hexagonal/ports-and-adapters pattern evident (Persistence Adapter, Integration Adapter)</a:t>
-            </a:r>
-          </a:p>
-          <a:p>
-            <a:r>
-              <a:rPr lang="en-US" dirty="0"/>
-              <a:t>Components communicate through well-defined interfaces</a:t>
-            </a:r>
-          </a:p>
-          <a:p>
-            <a:endParaRPr lang="en-US" dirty="0"/>
+              <a:t>During testing only the adaptor (which only needs to be deployed once for all components in the backend API) and the module being tested need to be deployed. </a:t>
+            </a:r>
           </a:p>
           <a:p>
             <a:endParaRPr lang="en-ZM" dirty="0"/>
@@ -16449,6 +11632,100 @@
     <p:extLst>
       <p:ext uri="{BB962C8B-B14F-4D97-AF65-F5344CB8AC3E}">
         <p14:creationId xmlns:p14="http://schemas.microsoft.com/office/powerpoint/2010/main" val="1325727566"/>
+      </p:ext>
+    </p:extLst>
+  </p:cSld>
+  <p:clrMapOvr>
+    <a:masterClrMapping/>
+  </p:clrMapOvr>
+</p:sld>
+</file>
+
+<file path=ppt/slides/slide9.xml><?xml version="1.0" encoding="utf-8"?>
+<p:sld xmlns:a="http://schemas.openxmlformats.org/drawingml/2006/main" xmlns:r="http://schemas.openxmlformats.org/officeDocument/2006/relationships" xmlns:p="http://schemas.openxmlformats.org/presentationml/2006/main">
+  <p:cSld>
+    <p:spTree>
+      <p:nvGrpSpPr>
+        <p:cNvPr id="1" name=""/>
+        <p:cNvGrpSpPr/>
+        <p:nvPr/>
+      </p:nvGrpSpPr>
+      <p:grpSpPr>
+        <a:xfrm>
+          <a:off x="0" y="0"/>
+          <a:ext cx="0" cy="0"/>
+          <a:chOff x="0" y="0"/>
+          <a:chExt cx="0" cy="0"/>
+        </a:xfrm>
+      </p:grpSpPr>
+      <p:sp>
+        <p:nvSpPr>
+          <p:cNvPr id="2" name="Title 1">
+            <a:extLst>
+              <a:ext uri="{FF2B5EF4-FFF2-40B4-BE49-F238E27FC236}">
+                <a16:creationId xmlns:a16="http://schemas.microsoft.com/office/drawing/2014/main" id="{9300C51F-749D-800C-7CAA-218B24BBBA95}"/>
+              </a:ext>
+            </a:extLst>
+          </p:cNvPr>
+          <p:cNvSpPr>
+            <a:spLocks noGrp="1"/>
+          </p:cNvSpPr>
+          <p:nvPr>
+            <p:ph type="title"/>
+          </p:nvPr>
+        </p:nvSpPr>
+        <p:spPr/>
+        <p:txBody>
+          <a:bodyPr/>
+          <a:lstStyle/>
+          <a:p>
+            <a:r>
+              <a:rPr lang="en-US" dirty="0"/>
+              <a:t>a</a:t>
+            </a:r>
+            <a:endParaRPr lang="en-ZM" dirty="0"/>
+          </a:p>
+        </p:txBody>
+      </p:sp>
+      <p:pic>
+        <p:nvPicPr>
+          <p:cNvPr id="7" name="Content Placeholder 6">
+            <a:extLst>
+              <a:ext uri="{FF2B5EF4-FFF2-40B4-BE49-F238E27FC236}">
+                <a16:creationId xmlns:a16="http://schemas.microsoft.com/office/drawing/2014/main" id="{B5A44C1D-0D38-1327-7B27-84A9FCA7EDDE}"/>
+              </a:ext>
+            </a:extLst>
+          </p:cNvPr>
+          <p:cNvPicPr>
+            <a:picLocks noGrp="1" noChangeAspect="1"/>
+          </p:cNvPicPr>
+          <p:nvPr>
+            <p:ph idx="1"/>
+          </p:nvPr>
+        </p:nvPicPr>
+        <p:blipFill>
+          <a:blip r:embed="rId2">
+            <a:extLst>
+              <a:ext uri="{28A0092B-C50C-407E-A947-70E740481C1C}">
+                <a14:useLocalDpi xmlns:a14="http://schemas.microsoft.com/office/drawing/2010/main" val="0"/>
+              </a:ext>
+            </a:extLst>
+          </a:blip>
+          <a:stretch>
+            <a:fillRect/>
+          </a:stretch>
+        </p:blipFill>
+        <p:spPr>
+          <a:xfrm>
+            <a:off x="0" y="402771"/>
+            <a:ext cx="12192000" cy="5845629"/>
+          </a:xfrm>
+        </p:spPr>
+      </p:pic>
+    </p:spTree>
+    <p:extLst>
+      <p:ext uri="{BB962C8B-B14F-4D97-AF65-F5344CB8AC3E}">
+        <p14:creationId xmlns:p14="http://schemas.microsoft.com/office/powerpoint/2010/main" val="1818847291"/>
       </p:ext>
     </p:extLst>
   </p:cSld>

--- a/M2/Presentation_Qualities.pptx
+++ b/M2/Presentation_Qualities.pptx
@@ -7310,7 +7310,7 @@
             <a:pPr algn="l"/>
             <a:r>
               <a:rPr lang="en-US" b="1" dirty="0"/>
-              <a:t>Vlad</a:t>
+              <a:t>Vladislav</a:t>
             </a:r>
           </a:p>
           <a:p>
@@ -7434,7 +7434,7 @@
                   <a:schemeClr val="tx1"/>
                 </a:solidFill>
               </a:rPr>
-              <a:t>When a user makes a request, the system should respond within a maximum of 2 seconds during peak periods (5000 requests per second).</a:t>
+              <a:t>When a user makes a request, the system should respond within a maximum of 5 seconds during peak periods (5000 requests per second).</a:t>
             </a:r>
           </a:p>
           <a:p>
@@ -7789,7 +7789,7 @@
         <p:spPr>
           <a:xfrm>
             <a:off x="-26479" y="1349829"/>
-            <a:ext cx="12425847" cy="4898571"/>
+            <a:ext cx="12218479" cy="4898571"/>
           </a:xfrm>
         </p:spPr>
       </p:pic>
@@ -7872,14 +7872,13 @@
               </a:ext>
             </a:extLst>
           </a:blip>
-          <a:stretch>
-            <a:fillRect/>
-          </a:stretch>
+          <a:srcRect/>
+          <a:stretch/>
         </p:blipFill>
         <p:spPr>
           <a:xfrm>
-            <a:off x="92636" y="258896"/>
-            <a:ext cx="12006727" cy="6340207"/>
+            <a:off x="0" y="0"/>
+            <a:ext cx="12192000" cy="6858000"/>
           </a:xfrm>
         </p:spPr>
       </p:pic>
@@ -7962,14 +7961,13 @@
               </a:ext>
             </a:extLst>
           </a:blip>
-          <a:stretch>
-            <a:fillRect/>
-          </a:stretch>
+          <a:srcRect/>
+          <a:stretch/>
         </p:blipFill>
         <p:spPr>
           <a:xfrm>
-            <a:off x="2005069" y="46898"/>
-            <a:ext cx="7943162" cy="6764204"/>
+            <a:off x="0" y="0"/>
+            <a:ext cx="12192000" cy="6858000"/>
           </a:xfrm>
         </p:spPr>
       </p:pic>
@@ -9530,7 +9528,7 @@
         <p:spPr>
           <a:xfrm>
             <a:off x="433086" y="0"/>
-            <a:ext cx="10515600" cy="1325563"/>
+            <a:ext cx="5662913" cy="1325563"/>
           </a:xfrm>
         </p:spPr>
         <p:txBody>
@@ -11470,8 +11468,8 @@
         </p:nvSpPr>
         <p:spPr>
           <a:xfrm>
-            <a:off x="5105398" y="1115568"/>
-            <a:ext cx="6245352" cy="4626864"/>
+            <a:off x="5105398" y="1621410"/>
+            <a:ext cx="6245352" cy="4121022"/>
           </a:xfrm>
         </p:spPr>
         <p:txBody>
@@ -11488,7 +11486,7 @@
           <a:p>
             <a:r>
               <a:rPr lang="en-US" dirty="0"/>
-              <a:t>During testing only the adaptor (which only needs to be deployed once for all components in the backend API) and the module being tested need to be deployed. </a:t>
+              <a:t>During testing, only the adaptor (which only needs to be deployed once for all components in the backend API) and the module being tested need to be deployed as other modules and the database can be mocked in the integration and persistence adaptors. </a:t>
             </a:r>
           </a:p>
           <a:p>

--- a/M2/Presentation_Qualities.pptx
+++ b/M2/Presentation_Qualities.pptx
@@ -23,7 +23,7 @@
     <p:sldId id="284" r:id="rId14"/>
     <p:sldId id="285" r:id="rId15"/>
     <p:sldId id="259" r:id="rId16"/>
-    <p:sldId id="271" r:id="rId17"/>
+    <p:sldId id="286" r:id="rId17"/>
     <p:sldId id="275" r:id="rId18"/>
     <p:sldId id="272" r:id="rId19"/>
     <p:sldId id="273" r:id="rId20"/>
@@ -937,7 +937,7 @@
           <a:p>
             <a:fld id="{FC1B7745-5391-477F-8AE8-1136866A9302}" type="datetimeFigureOut">
               <a:rPr lang="es-ES" smtClean="0"/>
-              <a:t>05/01/2026</a:t>
+              <a:t>7/1/26</a:t>
             </a:fld>
             <a:endParaRPr lang="es-ES"/>
           </a:p>
@@ -1473,7 +1473,7 @@
           <a:p>
             <a:fld id="{6A3C2F7B-537C-4500-BF1F-DDEBE70AF5A2}" type="datetimeFigureOut">
               <a:rPr lang="es-ES" smtClean="0"/>
-              <a:t>05/01/2026</a:t>
+              <a:t>7/1/26</a:t>
             </a:fld>
             <a:endParaRPr lang="es-ES"/>
           </a:p>
@@ -1771,7 +1771,7 @@
           <a:p>
             <a:fld id="{6A3C2F7B-537C-4500-BF1F-DDEBE70AF5A2}" type="datetimeFigureOut">
               <a:rPr lang="es-ES" smtClean="0"/>
-              <a:t>05/01/2026</a:t>
+              <a:t>7/1/26</a:t>
             </a:fld>
             <a:endParaRPr lang="es-ES"/>
           </a:p>
@@ -1963,7 +1963,7 @@
           <a:p>
             <a:fld id="{6A3C2F7B-537C-4500-BF1F-DDEBE70AF5A2}" type="datetimeFigureOut">
               <a:rPr lang="es-ES" smtClean="0"/>
-              <a:t>05/01/2026</a:t>
+              <a:t>7/1/26</a:t>
             </a:fld>
             <a:endParaRPr lang="es-ES"/>
           </a:p>
@@ -2224,7 +2224,7 @@
           <a:p>
             <a:fld id="{6A3C2F7B-537C-4500-BF1F-DDEBE70AF5A2}" type="datetimeFigureOut">
               <a:rPr lang="es-ES" smtClean="0"/>
-              <a:t>05/01/2026</a:t>
+              <a:t>7/1/26</a:t>
             </a:fld>
             <a:endParaRPr lang="es-ES"/>
           </a:p>
@@ -2648,7 +2648,7 @@
           <a:p>
             <a:fld id="{6A3C2F7B-537C-4500-BF1F-DDEBE70AF5A2}" type="datetimeFigureOut">
               <a:rPr lang="es-ES" smtClean="0"/>
-              <a:t>05/01/2026</a:t>
+              <a:t>7/1/26</a:t>
             </a:fld>
             <a:endParaRPr lang="es-ES"/>
           </a:p>
@@ -3185,7 +3185,7 @@
           <a:p>
             <a:fld id="{6A3C2F7B-537C-4500-BF1F-DDEBE70AF5A2}" type="datetimeFigureOut">
               <a:rPr lang="es-ES" smtClean="0"/>
-              <a:t>05/01/2026</a:t>
+              <a:t>7/1/26</a:t>
             </a:fld>
             <a:endParaRPr lang="es-ES"/>
           </a:p>
@@ -4049,7 +4049,7 @@
           <a:p>
             <a:fld id="{6A3C2F7B-537C-4500-BF1F-DDEBE70AF5A2}" type="datetimeFigureOut">
               <a:rPr lang="es-ES" smtClean="0"/>
-              <a:t>05/01/2026</a:t>
+              <a:t>7/1/26</a:t>
             </a:fld>
             <a:endParaRPr lang="es-ES"/>
           </a:p>
@@ -4219,7 +4219,7 @@
           <a:p>
             <a:fld id="{6A3C2F7B-537C-4500-BF1F-DDEBE70AF5A2}" type="datetimeFigureOut">
               <a:rPr lang="es-ES" smtClean="0"/>
-              <a:t>05/01/2026</a:t>
+              <a:t>7/1/26</a:t>
             </a:fld>
             <a:endParaRPr lang="es-ES"/>
           </a:p>
@@ -4403,7 +4403,7 @@
           <a:p>
             <a:fld id="{6A3C2F7B-537C-4500-BF1F-DDEBE70AF5A2}" type="datetimeFigureOut">
               <a:rPr lang="es-ES" smtClean="0"/>
-              <a:t>05/01/2026</a:t>
+              <a:t>7/1/26</a:t>
             </a:fld>
             <a:endParaRPr lang="es-ES"/>
           </a:p>
@@ -4573,7 +4573,7 @@
           <a:p>
             <a:fld id="{6A3C2F7B-537C-4500-BF1F-DDEBE70AF5A2}" type="datetimeFigureOut">
               <a:rPr lang="es-ES" smtClean="0"/>
-              <a:t>05/01/2026</a:t>
+              <a:t>7/1/26</a:t>
             </a:fld>
             <a:endParaRPr lang="es-ES"/>
           </a:p>
@@ -4817,7 +4817,7 @@
           <a:p>
             <a:fld id="{6A3C2F7B-537C-4500-BF1F-DDEBE70AF5A2}" type="datetimeFigureOut">
               <a:rPr lang="es-ES" smtClean="0"/>
-              <a:t>05/01/2026</a:t>
+              <a:t>7/1/26</a:t>
             </a:fld>
             <a:endParaRPr lang="es-ES"/>
           </a:p>
@@ -5053,7 +5053,7 @@
           <a:p>
             <a:fld id="{6A3C2F7B-537C-4500-BF1F-DDEBE70AF5A2}" type="datetimeFigureOut">
               <a:rPr lang="es-ES" smtClean="0"/>
-              <a:t>05/01/2026</a:t>
+              <a:t>7/1/26</a:t>
             </a:fld>
             <a:endParaRPr lang="es-ES"/>
           </a:p>
@@ -5519,7 +5519,7 @@
           <a:p>
             <a:fld id="{6A3C2F7B-537C-4500-BF1F-DDEBE70AF5A2}" type="datetimeFigureOut">
               <a:rPr lang="es-ES" smtClean="0"/>
-              <a:t>05/01/2026</a:t>
+              <a:t>7/1/26</a:t>
             </a:fld>
             <a:endParaRPr lang="es-ES"/>
           </a:p>
@@ -5637,7 +5637,7 @@
           <a:p>
             <a:fld id="{6A3C2F7B-537C-4500-BF1F-DDEBE70AF5A2}" type="datetimeFigureOut">
               <a:rPr lang="es-ES" smtClean="0"/>
-              <a:t>05/01/2026</a:t>
+              <a:t>7/1/26</a:t>
             </a:fld>
             <a:endParaRPr lang="es-ES"/>
           </a:p>
@@ -5732,7 +5732,7 @@
           <a:p>
             <a:fld id="{6A3C2F7B-537C-4500-BF1F-DDEBE70AF5A2}" type="datetimeFigureOut">
               <a:rPr lang="es-ES" smtClean="0"/>
-              <a:t>05/01/2026</a:t>
+              <a:t>7/1/26</a:t>
             </a:fld>
             <a:endParaRPr lang="es-ES"/>
           </a:p>
@@ -5987,7 +5987,7 @@
           <a:p>
             <a:fld id="{6A3C2F7B-537C-4500-BF1F-DDEBE70AF5A2}" type="datetimeFigureOut">
               <a:rPr lang="es-ES" smtClean="0"/>
-              <a:t>05/01/2026</a:t>
+              <a:t>7/1/26</a:t>
             </a:fld>
             <a:endParaRPr lang="es-ES"/>
           </a:p>
@@ -6287,7 +6287,7 @@
           <a:p>
             <a:fld id="{6A3C2F7B-537C-4500-BF1F-DDEBE70AF5A2}" type="datetimeFigureOut">
               <a:rPr lang="es-ES" smtClean="0"/>
-              <a:t>05/01/2026</a:t>
+              <a:t>7/1/26</a:t>
             </a:fld>
             <a:endParaRPr lang="es-ES"/>
           </a:p>
@@ -6521,7 +6521,7 @@
           <a:p>
             <a:fld id="{6A3C2F7B-537C-4500-BF1F-DDEBE70AF5A2}" type="datetimeFigureOut">
               <a:rPr lang="es-ES" smtClean="0"/>
-              <a:t>05/01/2026</a:t>
+              <a:t>7/1/26</a:t>
             </a:fld>
             <a:endParaRPr lang="es-ES"/>
           </a:p>
@@ -8400,7 +8400,13 @@
   <p:cSld>
     <p:spTree>
       <p:nvGrpSpPr>
-        <p:cNvPr id="1" name=""/>
+        <p:cNvPr id="1" name="">
+          <a:extLst>
+            <a:ext uri="{FF2B5EF4-FFF2-40B4-BE49-F238E27FC236}">
+              <a16:creationId xmlns:a16="http://schemas.microsoft.com/office/drawing/2014/main" id="{7A5F8B78-5510-897D-3FBC-C33FE9968D77}"/>
+            </a:ext>
+          </a:extLst>
+        </p:cNvPr>
         <p:cNvGrpSpPr/>
         <p:nvPr/>
       </p:nvGrpSpPr>
@@ -8417,7 +8423,7 @@
           <p:cNvPr id="2" name="Title 1">
             <a:extLst>
               <a:ext uri="{FF2B5EF4-FFF2-40B4-BE49-F238E27FC236}">
-                <a16:creationId xmlns:a16="http://schemas.microsoft.com/office/drawing/2014/main" id="{BBF5A8BF-6192-B19B-A2C6-CDA80A202DF4}"/>
+                <a16:creationId xmlns:a16="http://schemas.microsoft.com/office/drawing/2014/main" id="{731BB516-E111-70A3-C2A7-05E08F3AF0AF}"/>
               </a:ext>
             </a:extLst>
           </p:cNvPr>
@@ -8430,7 +8436,7 @@
         </p:nvSpPr>
         <p:spPr>
           <a:xfrm>
-            <a:off x="838200" y="371904"/>
+            <a:off x="838200" y="104295"/>
             <a:ext cx="10515600" cy="1325563"/>
           </a:xfrm>
         </p:spPr>
@@ -8451,7 +8457,7 @@
           <p:cNvPr id="3" name="Content Placeholder 2">
             <a:extLst>
               <a:ext uri="{FF2B5EF4-FFF2-40B4-BE49-F238E27FC236}">
-                <a16:creationId xmlns:a16="http://schemas.microsoft.com/office/drawing/2014/main" id="{D4E7DA52-6770-12C8-9262-6A9C1DD7109B}"/>
+                <a16:creationId xmlns:a16="http://schemas.microsoft.com/office/drawing/2014/main" id="{737E8425-A7DA-2208-91E3-96D106CB6E12}"/>
               </a:ext>
             </a:extLst>
           </p:cNvPr>
@@ -8464,7 +8470,7 @@
         </p:nvSpPr>
         <p:spPr>
           <a:xfrm>
-            <a:off x="838200" y="1410227"/>
+            <a:off x="838200" y="1270527"/>
             <a:ext cx="10983686" cy="2676118"/>
           </a:xfrm>
         </p:spPr>
@@ -8474,344 +8480,621 @@
           </a:bodyPr>
           <a:lstStyle/>
           <a:p>
-            <a:pPr marL="0" indent="0">
+            <a:pPr marL="0" indent="0" algn="just">
               <a:buNone/>
             </a:pPr>
             <a:r>
-              <a:rPr lang="en-IN" sz="1400" dirty="0"/>
+              <a:rPr lang="en-IN" sz="1600" dirty="0">
+                <a:solidFill>
+                  <a:schemeClr val="tx1"/>
+                </a:solidFill>
+              </a:rPr>
               <a:t>During peak usage (e.g. after grade publication or before exam registration deadlines), external systems such as the </a:t>
             </a:r>
             <a:r>
-              <a:rPr lang="en-IN" sz="1400" b="1" dirty="0"/>
+              <a:rPr lang="en-IN" sz="1600" b="1" dirty="0">
+                <a:solidFill>
+                  <a:schemeClr val="tx1"/>
+                </a:solidFill>
+              </a:rPr>
               <a:t>Student Information System (SIS)</a:t>
             </a:r>
             <a:r>
-              <a:rPr lang="en-IN" sz="1400" dirty="0"/>
+              <a:rPr lang="en-IN" sz="1600" dirty="0">
+                <a:solidFill>
+                  <a:schemeClr val="tx1"/>
+                </a:solidFill>
+              </a:rPr>
               <a:t> or the </a:t>
             </a:r>
             <a:r>
-              <a:rPr lang="en-IN" sz="1400" b="1" dirty="0"/>
+              <a:rPr lang="en-IN" sz="1600" b="1" dirty="0">
+                <a:solidFill>
+                  <a:schemeClr val="tx1"/>
+                </a:solidFill>
+              </a:rPr>
               <a:t>Timetable Service</a:t>
             </a:r>
             <a:r>
-              <a:rPr lang="en-IN" sz="1400" dirty="0"/>
+              <a:rPr lang="en-IN" sz="1600" dirty="0">
+                <a:solidFill>
+                  <a:schemeClr val="tx1"/>
+                </a:solidFill>
+              </a:rPr>
               <a:t> may become temporarily unavailable or respond slowly.</a:t>
             </a:r>
             <a:br>
-              <a:rPr lang="en-IN" sz="1400" dirty="0"/>
+              <a:rPr lang="en-IN" sz="1600" dirty="0">
+                <a:solidFill>
+                  <a:schemeClr val="tx1"/>
+                </a:solidFill>
+              </a:rPr>
             </a:br>
             <a:r>
-              <a:rPr lang="en-IN" sz="1400" dirty="0"/>
+              <a:rPr lang="en-IN" sz="1600" dirty="0">
+                <a:solidFill>
+                  <a:schemeClr val="tx1"/>
+                </a:solidFill>
+              </a:rPr>
               <a:t>When this happens, core EXA functionality (registration, result viewing, or grading workflows) may fail or hang due to synchronous dependencies on these external services.</a:t>
             </a:r>
           </a:p>
           <a:p>
-            <a:endParaRPr lang="en-US" sz="1400" dirty="0"/>
-          </a:p>
-        </p:txBody>
-      </p:sp>
-      <p:sp>
-        <p:nvSpPr>
-          <p:cNvPr id="4" name="Content Placeholder 2">
+            <a:endParaRPr lang="en-US" sz="1600" dirty="0">
+              <a:solidFill>
+                <a:schemeClr val="tx1"/>
+              </a:solidFill>
+            </a:endParaRPr>
+          </a:p>
+        </p:txBody>
+      </p:sp>
+      <p:graphicFrame>
+        <p:nvGraphicFramePr>
+          <p:cNvPr id="5" name="Table 4">
             <a:extLst>
               <a:ext uri="{FF2B5EF4-FFF2-40B4-BE49-F238E27FC236}">
-                <a16:creationId xmlns:a16="http://schemas.microsoft.com/office/drawing/2014/main" id="{76EA7DAE-2384-CF0F-BD90-CCE4EE120430}"/>
+                <a16:creationId xmlns:a16="http://schemas.microsoft.com/office/drawing/2014/main" id="{A49937D7-AB74-7559-96AC-A2677F5E0901}"/>
               </a:ext>
             </a:extLst>
           </p:cNvPr>
-          <p:cNvSpPr txBox="1">
-            <a:spLocks/>
-          </p:cNvSpPr>
-          <p:nvPr/>
-        </p:nvSpPr>
-        <p:spPr>
-          <a:xfrm>
-            <a:off x="838200" y="2500442"/>
-            <a:ext cx="10515599" cy="3985654"/>
-          </a:xfrm>
-          <a:prstGeom prst="rect">
-            <a:avLst/>
-          </a:prstGeom>
-        </p:spPr>
-        <p:txBody>
-          <a:bodyPr vert="horz" lIns="91440" tIns="45720" rIns="91440" bIns="45720" rtlCol="0">
-            <a:normAutofit/>
-          </a:bodyPr>
-          <a:lstStyle>
-            <a:lvl1pPr marL="228600" indent="-228600" algn="l" defTabSz="914400" rtl="0" eaLnBrk="1" latinLnBrk="0" hangingPunct="1">
-              <a:lnSpc>
-                <a:spcPct val="90000"/>
-              </a:lnSpc>
-              <a:spcBef>
-                <a:spcPts val="1000"/>
-              </a:spcBef>
-              <a:buFont typeface="Arial" panose="020B0604020202020204" pitchFamily="34" charset="0"/>
-              <a:buChar char="•"/>
-              <a:defRPr sz="2800" kern="1200">
-                <a:solidFill>
-                  <a:schemeClr val="tx1"/>
-                </a:solidFill>
-                <a:latin typeface="+mn-lt"/>
-                <a:ea typeface="+mn-ea"/>
-                <a:cs typeface="+mn-cs"/>
-              </a:defRPr>
-            </a:lvl1pPr>
-            <a:lvl2pPr marL="685800" indent="-228600" algn="l" defTabSz="914400" rtl="0" eaLnBrk="1" latinLnBrk="0" hangingPunct="1">
-              <a:lnSpc>
-                <a:spcPct val="90000"/>
-              </a:lnSpc>
-              <a:spcBef>
-                <a:spcPts val="500"/>
-              </a:spcBef>
-              <a:buFont typeface="Arial" panose="020B0604020202020204" pitchFamily="34" charset="0"/>
-              <a:buChar char="•"/>
-              <a:defRPr sz="2400" kern="1200">
-                <a:solidFill>
-                  <a:schemeClr val="tx1"/>
-                </a:solidFill>
-                <a:latin typeface="+mn-lt"/>
-                <a:ea typeface="+mn-ea"/>
-                <a:cs typeface="+mn-cs"/>
-              </a:defRPr>
-            </a:lvl2pPr>
-            <a:lvl3pPr marL="1143000" indent="-228600" algn="l" defTabSz="914400" rtl="0" eaLnBrk="1" latinLnBrk="0" hangingPunct="1">
-              <a:lnSpc>
-                <a:spcPct val="90000"/>
-              </a:lnSpc>
-              <a:spcBef>
-                <a:spcPts val="500"/>
-              </a:spcBef>
-              <a:buFont typeface="Arial" panose="020B0604020202020204" pitchFamily="34" charset="0"/>
-              <a:buChar char="•"/>
-              <a:defRPr sz="2000" kern="1200">
-                <a:solidFill>
-                  <a:schemeClr val="tx1"/>
-                </a:solidFill>
-                <a:latin typeface="+mn-lt"/>
-                <a:ea typeface="+mn-ea"/>
-                <a:cs typeface="+mn-cs"/>
-              </a:defRPr>
-            </a:lvl3pPr>
-            <a:lvl4pPr marL="1600200" indent="-228600" algn="l" defTabSz="914400" rtl="0" eaLnBrk="1" latinLnBrk="0" hangingPunct="1">
-              <a:lnSpc>
-                <a:spcPct val="90000"/>
-              </a:lnSpc>
-              <a:spcBef>
-                <a:spcPts val="500"/>
-              </a:spcBef>
-              <a:buFont typeface="Arial" panose="020B0604020202020204" pitchFamily="34" charset="0"/>
-              <a:buChar char="•"/>
-              <a:defRPr sz="1800" kern="1200">
-                <a:solidFill>
-                  <a:schemeClr val="tx1"/>
-                </a:solidFill>
-                <a:latin typeface="+mn-lt"/>
-                <a:ea typeface="+mn-ea"/>
-                <a:cs typeface="+mn-cs"/>
-              </a:defRPr>
-            </a:lvl4pPr>
-            <a:lvl5pPr marL="2057400" indent="-228600" algn="l" defTabSz="914400" rtl="0" eaLnBrk="1" latinLnBrk="0" hangingPunct="1">
-              <a:lnSpc>
-                <a:spcPct val="90000"/>
-              </a:lnSpc>
-              <a:spcBef>
-                <a:spcPts val="500"/>
-              </a:spcBef>
-              <a:buFont typeface="Arial" panose="020B0604020202020204" pitchFamily="34" charset="0"/>
-              <a:buChar char="•"/>
-              <a:defRPr sz="1800" kern="1200">
-                <a:solidFill>
-                  <a:schemeClr val="tx1"/>
-                </a:solidFill>
-                <a:latin typeface="+mn-lt"/>
-                <a:ea typeface="+mn-ea"/>
-                <a:cs typeface="+mn-cs"/>
-              </a:defRPr>
-            </a:lvl5pPr>
-            <a:lvl6pPr marL="2514600" indent="-228600" algn="l" defTabSz="914400" rtl="0" eaLnBrk="1" latinLnBrk="0" hangingPunct="1">
-              <a:lnSpc>
-                <a:spcPct val="90000"/>
-              </a:lnSpc>
-              <a:spcBef>
-                <a:spcPts val="500"/>
-              </a:spcBef>
-              <a:buFont typeface="Arial" panose="020B0604020202020204" pitchFamily="34" charset="0"/>
-              <a:buChar char="•"/>
-              <a:defRPr sz="1800" kern="1200">
-                <a:solidFill>
-                  <a:schemeClr val="tx1"/>
-                </a:solidFill>
-                <a:latin typeface="+mn-lt"/>
-                <a:ea typeface="+mn-ea"/>
-                <a:cs typeface="+mn-cs"/>
-              </a:defRPr>
-            </a:lvl6pPr>
-            <a:lvl7pPr marL="2971800" indent="-228600" algn="l" defTabSz="914400" rtl="0" eaLnBrk="1" latinLnBrk="0" hangingPunct="1">
-              <a:lnSpc>
-                <a:spcPct val="90000"/>
-              </a:lnSpc>
-              <a:spcBef>
-                <a:spcPts val="500"/>
-              </a:spcBef>
-              <a:buFont typeface="Arial" panose="020B0604020202020204" pitchFamily="34" charset="0"/>
-              <a:buChar char="•"/>
-              <a:defRPr sz="1800" kern="1200">
-                <a:solidFill>
-                  <a:schemeClr val="tx1"/>
-                </a:solidFill>
-                <a:latin typeface="+mn-lt"/>
-                <a:ea typeface="+mn-ea"/>
-                <a:cs typeface="+mn-cs"/>
-              </a:defRPr>
-            </a:lvl7pPr>
-            <a:lvl8pPr marL="3429000" indent="-228600" algn="l" defTabSz="914400" rtl="0" eaLnBrk="1" latinLnBrk="0" hangingPunct="1">
-              <a:lnSpc>
-                <a:spcPct val="90000"/>
-              </a:lnSpc>
-              <a:spcBef>
-                <a:spcPts val="500"/>
-              </a:spcBef>
-              <a:buFont typeface="Arial" panose="020B0604020202020204" pitchFamily="34" charset="0"/>
-              <a:buChar char="•"/>
-              <a:defRPr sz="1800" kern="1200">
-                <a:solidFill>
-                  <a:schemeClr val="tx1"/>
-                </a:solidFill>
-                <a:latin typeface="+mn-lt"/>
-                <a:ea typeface="+mn-ea"/>
-                <a:cs typeface="+mn-cs"/>
-              </a:defRPr>
-            </a:lvl8pPr>
-            <a:lvl9pPr marL="3886200" indent="-228600" algn="l" defTabSz="914400" rtl="0" eaLnBrk="1" latinLnBrk="0" hangingPunct="1">
-              <a:lnSpc>
-                <a:spcPct val="90000"/>
-              </a:lnSpc>
-              <a:spcBef>
-                <a:spcPts val="500"/>
-              </a:spcBef>
-              <a:buFont typeface="Arial" panose="020B0604020202020204" pitchFamily="34" charset="0"/>
-              <a:buChar char="•"/>
-              <a:defRPr sz="1800" kern="1200">
-                <a:solidFill>
-                  <a:schemeClr val="tx1"/>
-                </a:solidFill>
-                <a:latin typeface="+mn-lt"/>
-                <a:ea typeface="+mn-ea"/>
-                <a:cs typeface="+mn-cs"/>
-              </a:defRPr>
-            </a:lvl9pPr>
-          </a:lstStyle>
-          <a:p>
-            <a:r>
-              <a:rPr lang="en-IN" sz="1400" b="1" dirty="0"/>
-              <a:t>Involved Users:</a:t>
-            </a:r>
-            <a:br>
-              <a:rPr lang="en-IN" sz="1400" dirty="0"/>
-            </a:br>
-            <a:r>
-              <a:rPr lang="en-IN" sz="1400" dirty="0"/>
-              <a:t>Student, Teacher</a:t>
-            </a:r>
-          </a:p>
-          <a:p>
-            <a:r>
-              <a:rPr lang="en-IN" sz="1400" b="1" dirty="0"/>
-              <a:t>Affected System Parts:</a:t>
-            </a:r>
-            <a:br>
-              <a:rPr lang="en-IN" sz="1400" dirty="0"/>
-            </a:br>
-            <a:r>
-              <a:rPr lang="en-IN" sz="1400" b="1" i="1" u="sng" dirty="0"/>
-              <a:t>1. In Backend API:</a:t>
-            </a:r>
-          </a:p>
-          <a:p>
-            <a:pPr>
-              <a:buFont typeface="Arial" panose="020B0604020202020204" pitchFamily="34" charset="0"/>
-              <a:buChar char="•"/>
-            </a:pPr>
-            <a:r>
-              <a:rPr lang="en-IN" sz="1400" dirty="0"/>
-              <a:t>Integration Adapter</a:t>
-            </a:r>
-          </a:p>
-          <a:p>
-            <a:pPr>
-              <a:buFont typeface="Arial" panose="020B0604020202020204" pitchFamily="34" charset="0"/>
-              <a:buChar char="•"/>
-            </a:pPr>
-            <a:r>
-              <a:rPr lang="en-IN" sz="1400" dirty="0"/>
-              <a:t>Registration Management</a:t>
-            </a:r>
-          </a:p>
-          <a:p>
-            <a:pPr>
-              <a:buFont typeface="Arial" panose="020B0604020202020204" pitchFamily="34" charset="0"/>
-              <a:buChar char="•"/>
-            </a:pPr>
-            <a:r>
-              <a:rPr lang="en-IN" sz="1400" dirty="0"/>
-              <a:t>Grading Management</a:t>
-            </a:r>
-          </a:p>
-          <a:p>
-            <a:pPr>
-              <a:buFont typeface="Arial" panose="020B0604020202020204" pitchFamily="34" charset="0"/>
-              <a:buChar char="•"/>
-            </a:pPr>
-            <a:r>
-              <a:rPr lang="en-IN" sz="1400" dirty="0"/>
-              <a:t>Result Viewing</a:t>
-            </a:r>
-          </a:p>
-          <a:p>
-            <a:pPr marL="0" indent="0">
-              <a:buNone/>
-            </a:pPr>
-            <a:r>
-              <a:rPr lang="en-IN" sz="1400" dirty="0"/>
-              <a:t>       </a:t>
-            </a:r>
-            <a:r>
-              <a:rPr lang="en-IN" sz="1400" b="1" i="1" u="sng" dirty="0"/>
-              <a:t>2. In External Systems:</a:t>
-            </a:r>
-          </a:p>
-          <a:p>
-            <a:pPr>
-              <a:buFont typeface="Arial" panose="020B0604020202020204" pitchFamily="34" charset="0"/>
-              <a:buChar char="•"/>
-            </a:pPr>
-            <a:r>
-              <a:rPr lang="en-IN" sz="1400" dirty="0"/>
-              <a:t>Student Information System (SIS)</a:t>
-            </a:r>
-          </a:p>
-          <a:p>
-            <a:pPr>
-              <a:buFont typeface="Arial" panose="020B0604020202020204" pitchFamily="34" charset="0"/>
-              <a:buChar char="•"/>
-            </a:pPr>
-            <a:r>
-              <a:rPr lang="en-IN" sz="1400" dirty="0"/>
-              <a:t>Timetable Service</a:t>
-            </a:r>
-          </a:p>
-          <a:p>
-            <a:r>
-              <a:rPr lang="en-IN" sz="1400" dirty="0"/>
-              <a:t>The current architecture allows failures in external systems to propagate into EXA, reducing overall system reliability and potentially blocking critical academic processes.</a:t>
-            </a:r>
-          </a:p>
-        </p:txBody>
-      </p:sp>
+          <p:cNvGraphicFramePr>
+            <a:graphicFrameLocks noGrp="1"/>
+          </p:cNvGraphicFramePr>
+          <p:nvPr>
+            <p:extLst>
+              <p:ext uri="{D42A27DB-BD31-4B8C-83A1-F6EECF244321}">
+                <p14:modId xmlns:p14="http://schemas.microsoft.com/office/powerpoint/2010/main" val="1804115678"/>
+              </p:ext>
+            </p:extLst>
+          </p:nvPr>
+        </p:nvGraphicFramePr>
+        <p:xfrm>
+          <a:off x="1135743" y="2430463"/>
+          <a:ext cx="10388600" cy="4059236"/>
+        </p:xfrm>
+        <a:graphic>
+          <a:graphicData uri="http://schemas.openxmlformats.org/drawingml/2006/table">
+            <a:tbl>
+              <a:tblPr/>
+              <a:tblGrid>
+                <a:gridCol w="2620195">
+                  <a:extLst>
+                    <a:ext uri="{9D8B030D-6E8A-4147-A177-3AD203B41FA5}">
+                      <a16:colId xmlns:a16="http://schemas.microsoft.com/office/drawing/2014/main" val="4142023511"/>
+                    </a:ext>
+                  </a:extLst>
+                </a:gridCol>
+                <a:gridCol w="7768405">
+                  <a:extLst>
+                    <a:ext uri="{9D8B030D-6E8A-4147-A177-3AD203B41FA5}">
+                      <a16:colId xmlns:a16="http://schemas.microsoft.com/office/drawing/2014/main" val="156645862"/>
+                    </a:ext>
+                  </a:extLst>
+                </a:gridCol>
+              </a:tblGrid>
+              <a:tr h="289945">
+                <a:tc>
+                  <a:txBody>
+                    <a:bodyPr/>
+                    <a:lstStyle/>
+                    <a:p>
+                      <a:r>
+                        <a:rPr lang="en-IN" sz="1400"/>
+                        <a:t>Field</a:t>
+                      </a:r>
+                    </a:p>
+                  </a:txBody>
+                  <a:tcPr marL="72486" marR="72486" marT="36243" marB="36243" anchor="ctr">
+                    <a:lnL>
+                      <a:noFill/>
+                    </a:lnL>
+                    <a:lnR>
+                      <a:noFill/>
+                    </a:lnR>
+                    <a:lnT>
+                      <a:noFill/>
+                    </a:lnT>
+                    <a:lnB>
+                      <a:noFill/>
+                    </a:lnB>
+                    <a:noFill/>
+                  </a:tcPr>
+                </a:tc>
+                <a:tc>
+                  <a:txBody>
+                    <a:bodyPr/>
+                    <a:lstStyle/>
+                    <a:p>
+                      <a:r>
+                        <a:rPr lang="en-IN" sz="1400"/>
+                        <a:t>Description</a:t>
+                      </a:r>
+                    </a:p>
+                  </a:txBody>
+                  <a:tcPr marL="72486" marR="72486" marT="36243" marB="36243" anchor="ctr">
+                    <a:lnL>
+                      <a:noFill/>
+                    </a:lnL>
+                    <a:lnR>
+                      <a:noFill/>
+                    </a:lnR>
+                    <a:lnT>
+                      <a:noFill/>
+                    </a:lnT>
+                    <a:lnB>
+                      <a:noFill/>
+                    </a:lnB>
+                    <a:noFill/>
+                  </a:tcPr>
+                </a:tc>
+                <a:extLst>
+                  <a:ext uri="{0D108BD9-81ED-4DB2-BD59-A6C34878D82A}">
+                    <a16:rowId xmlns:a16="http://schemas.microsoft.com/office/drawing/2014/main" val="3243619380"/>
+                  </a:ext>
+                </a:extLst>
+              </a:tr>
+              <a:tr h="289945">
+                <a:tc>
+                  <a:txBody>
+                    <a:bodyPr/>
+                    <a:lstStyle/>
+                    <a:p>
+                      <a:r>
+                        <a:rPr lang="en-IN" sz="1400" b="1"/>
+                        <a:t>Quality Attribute</a:t>
+                      </a:r>
+                      <a:endParaRPr lang="en-IN" sz="1400"/>
+                    </a:p>
+                  </a:txBody>
+                  <a:tcPr marL="72486" marR="72486" marT="36243" marB="36243" anchor="ctr">
+                    <a:lnL>
+                      <a:noFill/>
+                    </a:lnL>
+                    <a:lnR>
+                      <a:noFill/>
+                    </a:lnR>
+                    <a:lnT>
+                      <a:noFill/>
+                    </a:lnT>
+                    <a:lnB>
+                      <a:noFill/>
+                    </a:lnB>
+                    <a:noFill/>
+                  </a:tcPr>
+                </a:tc>
+                <a:tc>
+                  <a:txBody>
+                    <a:bodyPr/>
+                    <a:lstStyle/>
+                    <a:p>
+                      <a:r>
+                        <a:rPr lang="en-IN" sz="1400"/>
+                        <a:t>Reliability</a:t>
+                      </a:r>
+                    </a:p>
+                  </a:txBody>
+                  <a:tcPr marL="72486" marR="72486" marT="36243" marB="36243" anchor="ctr">
+                    <a:lnL>
+                      <a:noFill/>
+                    </a:lnL>
+                    <a:lnR>
+                      <a:noFill/>
+                    </a:lnR>
+                    <a:lnT>
+                      <a:noFill/>
+                    </a:lnT>
+                    <a:lnB>
+                      <a:noFill/>
+                    </a:lnB>
+                    <a:noFill/>
+                  </a:tcPr>
+                </a:tc>
+                <a:extLst>
+                  <a:ext uri="{0D108BD9-81ED-4DB2-BD59-A6C34878D82A}">
+                    <a16:rowId xmlns:a16="http://schemas.microsoft.com/office/drawing/2014/main" val="2088599293"/>
+                  </a:ext>
+                </a:extLst>
+              </a:tr>
+              <a:tr h="507405">
+                <a:tc>
+                  <a:txBody>
+                    <a:bodyPr/>
+                    <a:lstStyle/>
+                    <a:p>
+                      <a:r>
+                        <a:rPr lang="en-IN" sz="1400" b="1"/>
+                        <a:t>Source of Stimulus</a:t>
+                      </a:r>
+                      <a:endParaRPr lang="en-IN" sz="1400"/>
+                    </a:p>
+                  </a:txBody>
+                  <a:tcPr marL="72486" marR="72486" marT="36243" marB="36243" anchor="ctr">
+                    <a:lnL>
+                      <a:noFill/>
+                    </a:lnL>
+                    <a:lnR>
+                      <a:noFill/>
+                    </a:lnR>
+                    <a:lnT>
+                      <a:noFill/>
+                    </a:lnT>
+                    <a:lnB>
+                      <a:noFill/>
+                    </a:lnB>
+                    <a:noFill/>
+                  </a:tcPr>
+                </a:tc>
+                <a:tc>
+                  <a:txBody>
+                    <a:bodyPr/>
+                    <a:lstStyle/>
+                    <a:p>
+                      <a:r>
+                        <a:rPr lang="en-IN" sz="1400"/>
+                        <a:t>External system (Student Information System or Timetable Service)</a:t>
+                      </a:r>
+                    </a:p>
+                  </a:txBody>
+                  <a:tcPr marL="72486" marR="72486" marT="36243" marB="36243" anchor="ctr">
+                    <a:lnL>
+                      <a:noFill/>
+                    </a:lnL>
+                    <a:lnR>
+                      <a:noFill/>
+                    </a:lnR>
+                    <a:lnT>
+                      <a:noFill/>
+                    </a:lnT>
+                    <a:lnB>
+                      <a:noFill/>
+                    </a:lnB>
+                    <a:noFill/>
+                  </a:tcPr>
+                </a:tc>
+                <a:extLst>
+                  <a:ext uri="{0D108BD9-81ED-4DB2-BD59-A6C34878D82A}">
+                    <a16:rowId xmlns:a16="http://schemas.microsoft.com/office/drawing/2014/main" val="3800424000"/>
+                  </a:ext>
+                </a:extLst>
+              </a:tr>
+              <a:tr h="507405">
+                <a:tc>
+                  <a:txBody>
+                    <a:bodyPr/>
+                    <a:lstStyle/>
+                    <a:p>
+                      <a:r>
+                        <a:rPr lang="en-IN" sz="1400" b="1"/>
+                        <a:t>Stimulus</a:t>
+                      </a:r>
+                      <a:endParaRPr lang="en-IN" sz="1400"/>
+                    </a:p>
+                  </a:txBody>
+                  <a:tcPr marL="72486" marR="72486" marT="36243" marB="36243" anchor="ctr">
+                    <a:lnL>
+                      <a:noFill/>
+                    </a:lnL>
+                    <a:lnR>
+                      <a:noFill/>
+                    </a:lnR>
+                    <a:lnT>
+                      <a:noFill/>
+                    </a:lnT>
+                    <a:lnB>
+                      <a:noFill/>
+                    </a:lnB>
+                    <a:noFill/>
+                  </a:tcPr>
+                </a:tc>
+                <a:tc>
+                  <a:txBody>
+                    <a:bodyPr/>
+                    <a:lstStyle/>
+                    <a:p>
+                      <a:r>
+                        <a:rPr lang="en-IN" sz="1400"/>
+                        <a:t>An external system becomes unavailable or responds slowly</a:t>
+                      </a:r>
+                    </a:p>
+                  </a:txBody>
+                  <a:tcPr marL="72486" marR="72486" marT="36243" marB="36243" anchor="ctr">
+                    <a:lnL>
+                      <a:noFill/>
+                    </a:lnL>
+                    <a:lnR>
+                      <a:noFill/>
+                    </a:lnR>
+                    <a:lnT>
+                      <a:noFill/>
+                    </a:lnT>
+                    <a:lnB>
+                      <a:noFill/>
+                    </a:lnB>
+                    <a:noFill/>
+                  </a:tcPr>
+                </a:tc>
+                <a:extLst>
+                  <a:ext uri="{0D108BD9-81ED-4DB2-BD59-A6C34878D82A}">
+                    <a16:rowId xmlns:a16="http://schemas.microsoft.com/office/drawing/2014/main" val="1939123124"/>
+                  </a:ext>
+                </a:extLst>
+              </a:tr>
+              <a:tr h="289945">
+                <a:tc>
+                  <a:txBody>
+                    <a:bodyPr/>
+                    <a:lstStyle/>
+                    <a:p>
+                      <a:r>
+                        <a:rPr lang="en-IN" sz="1400" b="1"/>
+                        <a:t>Environment</a:t>
+                      </a:r>
+                      <a:endParaRPr lang="en-IN" sz="1400"/>
+                    </a:p>
+                  </a:txBody>
+                  <a:tcPr marL="72486" marR="72486" marT="36243" marB="36243" anchor="ctr">
+                    <a:lnL>
+                      <a:noFill/>
+                    </a:lnL>
+                    <a:lnR>
+                      <a:noFill/>
+                    </a:lnR>
+                    <a:lnT>
+                      <a:noFill/>
+                    </a:lnT>
+                    <a:lnB>
+                      <a:noFill/>
+                    </a:lnB>
+                    <a:noFill/>
+                  </a:tcPr>
+                </a:tc>
+                <a:tc>
+                  <a:txBody>
+                    <a:bodyPr/>
+                    <a:lstStyle/>
+                    <a:p>
+                      <a:r>
+                        <a:rPr lang="en-IN" sz="1400"/>
+                        <a:t>Normal operation, possibly during peak usage</a:t>
+                      </a:r>
+                    </a:p>
+                  </a:txBody>
+                  <a:tcPr marL="72486" marR="72486" marT="36243" marB="36243" anchor="ctr">
+                    <a:lnL>
+                      <a:noFill/>
+                    </a:lnL>
+                    <a:lnR>
+                      <a:noFill/>
+                    </a:lnR>
+                    <a:lnT>
+                      <a:noFill/>
+                    </a:lnT>
+                    <a:lnB>
+                      <a:noFill/>
+                    </a:lnB>
+                    <a:noFill/>
+                  </a:tcPr>
+                </a:tc>
+                <a:extLst>
+                  <a:ext uri="{0D108BD9-81ED-4DB2-BD59-A6C34878D82A}">
+                    <a16:rowId xmlns:a16="http://schemas.microsoft.com/office/drawing/2014/main" val="560919176"/>
+                  </a:ext>
+                </a:extLst>
+              </a:tr>
+              <a:tr h="289945">
+                <a:tc>
+                  <a:txBody>
+                    <a:bodyPr/>
+                    <a:lstStyle/>
+                    <a:p>
+                      <a:r>
+                        <a:rPr lang="en-IN" sz="1400" b="1"/>
+                        <a:t>Artifact</a:t>
+                      </a:r>
+                      <a:endParaRPr lang="en-IN" sz="1400"/>
+                    </a:p>
+                  </a:txBody>
+                  <a:tcPr marL="72486" marR="72486" marT="36243" marB="36243" anchor="ctr">
+                    <a:lnL>
+                      <a:noFill/>
+                    </a:lnL>
+                    <a:lnR>
+                      <a:noFill/>
+                    </a:lnR>
+                    <a:lnT>
+                      <a:noFill/>
+                    </a:lnT>
+                    <a:lnB>
+                      <a:noFill/>
+                    </a:lnB>
+                    <a:noFill/>
+                  </a:tcPr>
+                </a:tc>
+                <a:tc>
+                  <a:txBody>
+                    <a:bodyPr/>
+                    <a:lstStyle/>
+                    <a:p>
+                      <a:r>
+                        <a:rPr lang="en-IN" sz="1400"/>
+                        <a:t>Integration Adapter (Backend API)</a:t>
+                      </a:r>
+                    </a:p>
+                  </a:txBody>
+                  <a:tcPr marL="72486" marR="72486" marT="36243" marB="36243" anchor="ctr">
+                    <a:lnL>
+                      <a:noFill/>
+                    </a:lnL>
+                    <a:lnR>
+                      <a:noFill/>
+                    </a:lnR>
+                    <a:lnT>
+                      <a:noFill/>
+                    </a:lnT>
+                    <a:lnB>
+                      <a:noFill/>
+                    </a:lnB>
+                    <a:noFill/>
+                  </a:tcPr>
+                </a:tc>
+                <a:extLst>
+                  <a:ext uri="{0D108BD9-81ED-4DB2-BD59-A6C34878D82A}">
+                    <a16:rowId xmlns:a16="http://schemas.microsoft.com/office/drawing/2014/main" val="4189590913"/>
+                  </a:ext>
+                </a:extLst>
+              </a:tr>
+              <a:tr h="1159782">
+                <a:tc>
+                  <a:txBody>
+                    <a:bodyPr/>
+                    <a:lstStyle/>
+                    <a:p>
+                      <a:r>
+                        <a:rPr lang="en-IN" sz="1400" b="1"/>
+                        <a:t>Response</a:t>
+                      </a:r>
+                      <a:endParaRPr lang="en-IN" sz="1400"/>
+                    </a:p>
+                  </a:txBody>
+                  <a:tcPr marL="72486" marR="72486" marT="36243" marB="36243" anchor="ctr">
+                    <a:lnL>
+                      <a:noFill/>
+                    </a:lnL>
+                    <a:lnR>
+                      <a:noFill/>
+                    </a:lnR>
+                    <a:lnT>
+                      <a:noFill/>
+                    </a:lnT>
+                    <a:lnB>
+                      <a:noFill/>
+                    </a:lnB>
+                    <a:noFill/>
+                  </a:tcPr>
+                </a:tc>
+                <a:tc>
+                  <a:txBody>
+                    <a:bodyPr/>
+                    <a:lstStyle/>
+                    <a:p>
+                      <a:r>
+                        <a:rPr lang="en-IN" sz="1400"/>
+                        <a:t>The Integration Adapter detects the failure using timeouts, retries, or circuit breakers and prevents the failure from propagating to core business components. The system continues operating in a degraded but controlled mode</a:t>
+                      </a:r>
+                    </a:p>
+                  </a:txBody>
+                  <a:tcPr marL="72486" marR="72486" marT="36243" marB="36243" anchor="ctr">
+                    <a:lnL>
+                      <a:noFill/>
+                    </a:lnL>
+                    <a:lnR>
+                      <a:noFill/>
+                    </a:lnR>
+                    <a:lnT>
+                      <a:noFill/>
+                    </a:lnT>
+                    <a:lnB>
+                      <a:noFill/>
+                    </a:lnB>
+                    <a:noFill/>
+                  </a:tcPr>
+                </a:tc>
+                <a:extLst>
+                  <a:ext uri="{0D108BD9-81ED-4DB2-BD59-A6C34878D82A}">
+                    <a16:rowId xmlns:a16="http://schemas.microsoft.com/office/drawing/2014/main" val="1445647130"/>
+                  </a:ext>
+                </a:extLst>
+              </a:tr>
+              <a:tr h="724864">
+                <a:tc>
+                  <a:txBody>
+                    <a:bodyPr/>
+                    <a:lstStyle/>
+                    <a:p>
+                      <a:r>
+                        <a:rPr lang="en-IN" sz="1400" b="1"/>
+                        <a:t>Response Measure</a:t>
+                      </a:r>
+                      <a:endParaRPr lang="en-IN" sz="1400"/>
+                    </a:p>
+                  </a:txBody>
+                  <a:tcPr marL="72486" marR="72486" marT="36243" marB="36243" anchor="ctr">
+                    <a:lnL>
+                      <a:noFill/>
+                    </a:lnL>
+                    <a:lnR>
+                      <a:noFill/>
+                    </a:lnR>
+                    <a:lnT>
+                      <a:noFill/>
+                    </a:lnT>
+                    <a:lnB>
+                      <a:noFill/>
+                    </a:lnB>
+                    <a:noFill/>
+                  </a:tcPr>
+                </a:tc>
+                <a:tc>
+                  <a:txBody>
+                    <a:bodyPr/>
+                    <a:lstStyle/>
+                    <a:p>
+                      <a:r>
+                        <a:rPr lang="en-IN" sz="1400" dirty="0"/>
+                        <a:t>Core EXA functionality remains available and failures do not cascade beyond the Integration Adapter</a:t>
+                      </a:r>
+                    </a:p>
+                  </a:txBody>
+                  <a:tcPr marL="72486" marR="72486" marT="36243" marB="36243" anchor="ctr">
+                    <a:lnL>
+                      <a:noFill/>
+                    </a:lnL>
+                    <a:lnR>
+                      <a:noFill/>
+                    </a:lnR>
+                    <a:lnT>
+                      <a:noFill/>
+                    </a:lnT>
+                    <a:lnB>
+                      <a:noFill/>
+                    </a:lnB>
+                    <a:noFill/>
+                  </a:tcPr>
+                </a:tc>
+                <a:extLst>
+                  <a:ext uri="{0D108BD9-81ED-4DB2-BD59-A6C34878D82A}">
+                    <a16:rowId xmlns:a16="http://schemas.microsoft.com/office/drawing/2014/main" val="1643286551"/>
+                  </a:ext>
+                </a:extLst>
+              </a:tr>
+            </a:tbl>
+          </a:graphicData>
+        </a:graphic>
+      </p:graphicFrame>
     </p:spTree>
     <p:extLst>
       <p:ext uri="{BB962C8B-B14F-4D97-AF65-F5344CB8AC3E}">
-        <p14:creationId xmlns:p14="http://schemas.microsoft.com/office/powerpoint/2010/main" val="1850926752"/>
+        <p14:creationId xmlns:p14="http://schemas.microsoft.com/office/powerpoint/2010/main" val="534078243"/>
       </p:ext>
     </p:extLst>
   </p:cSld>
@@ -9263,13 +9546,20 @@
             <p:ph type="title"/>
           </p:nvPr>
         </p:nvSpPr>
-        <p:spPr/>
-        <p:txBody>
-          <a:bodyPr/>
+        <p:spPr>
+          <a:xfrm>
+            <a:off x="-1791305" y="450104"/>
+            <a:ext cx="10353762" cy="970450"/>
+          </a:xfrm>
+        </p:spPr>
+        <p:txBody>
+          <a:bodyPr>
+            <a:normAutofit/>
+          </a:bodyPr>
           <a:lstStyle/>
           <a:p>
             <a:r>
-              <a:rPr lang="en-US" dirty="0"/>
+              <a:rPr lang="en-US" sz="3200" dirty="0"/>
               <a:t>SCALABILITY PROBLEM</a:t>
             </a:r>
           </a:p>
@@ -9293,8 +9583,8 @@
         </p:nvSpPr>
         <p:spPr>
           <a:xfrm>
-            <a:off x="838200" y="1576301"/>
-            <a:ext cx="5822092" cy="4916574"/>
+            <a:off x="838200" y="1380680"/>
+            <a:ext cx="7226300" cy="1192299"/>
           </a:xfrm>
         </p:spPr>
         <p:txBody>
@@ -9324,91 +9614,6 @@
             <a:r>
               <a:rPr lang="en-IN" sz="1400" dirty="0"/>
               <a:t>This leads to sudden spikes in load on the Backend API, particularly on registration-related components and database access.</a:t>
-            </a:r>
-          </a:p>
-          <a:p>
-            <a:r>
-              <a:rPr lang="en-IN" sz="1400" b="1" dirty="0"/>
-              <a:t>Involved Users:</a:t>
-            </a:r>
-            <a:br>
-              <a:rPr lang="en-IN" sz="1400" dirty="0"/>
-            </a:br>
-            <a:r>
-              <a:rPr lang="en-IN" sz="1400" dirty="0"/>
-              <a:t>Student</a:t>
-            </a:r>
-          </a:p>
-          <a:p>
-            <a:r>
-              <a:rPr lang="en-IN" sz="1400" b="1" dirty="0"/>
-              <a:t>Affected System Parts:</a:t>
-            </a:r>
-            <a:br>
-              <a:rPr lang="en-IN" sz="1400" dirty="0"/>
-            </a:br>
-            <a:r>
-              <a:rPr lang="en-IN" sz="1400" b="1" i="1" u="sng" dirty="0"/>
-              <a:t>1. In Backend API:</a:t>
-            </a:r>
-          </a:p>
-          <a:p>
-            <a:pPr>
-              <a:buFont typeface="Arial" panose="020B0604020202020204" pitchFamily="34" charset="0"/>
-              <a:buChar char="•"/>
-            </a:pPr>
-            <a:r>
-              <a:rPr lang="en-IN" sz="1400" dirty="0"/>
-              <a:t>Registration Management</a:t>
-            </a:r>
-          </a:p>
-          <a:p>
-            <a:pPr>
-              <a:buFont typeface="Arial" panose="020B0604020202020204" pitchFamily="34" charset="0"/>
-              <a:buChar char="•"/>
-            </a:pPr>
-            <a:r>
-              <a:rPr lang="en-IN" sz="1400" dirty="0"/>
-              <a:t>Persistence Adapter</a:t>
-            </a:r>
-          </a:p>
-          <a:p>
-            <a:pPr>
-              <a:buFont typeface="Arial" panose="020B0604020202020204" pitchFamily="34" charset="0"/>
-              <a:buChar char="•"/>
-            </a:pPr>
-            <a:r>
-              <a:rPr lang="en-IN" sz="1400" dirty="0"/>
-              <a:t>Database</a:t>
-            </a:r>
-          </a:p>
-          <a:p>
-            <a:pPr marL="0" indent="0">
-              <a:buNone/>
-            </a:pPr>
-            <a:r>
-              <a:rPr lang="en-IN" sz="1400" dirty="0"/>
-              <a:t>        </a:t>
-            </a:r>
-            <a:r>
-              <a:rPr lang="en-IN" sz="1400" b="1" i="1" u="sng" dirty="0"/>
-              <a:t>2 .In Infrastructure:</a:t>
-            </a:r>
-          </a:p>
-          <a:p>
-            <a:pPr>
-              <a:buFont typeface="Arial" panose="020B0604020202020204" pitchFamily="34" charset="0"/>
-              <a:buChar char="•"/>
-            </a:pPr>
-            <a:r>
-              <a:rPr lang="en-IN" sz="1400" dirty="0"/>
-              <a:t>Backend API container</a:t>
-            </a:r>
-          </a:p>
-          <a:p>
-            <a:r>
-              <a:rPr lang="en-IN" sz="1400" dirty="0"/>
-              <a:t>The current architecture risks performance degradation or request failures under high concurrent load if backend components cannot scale quickly enough.</a:t>
             </a:r>
           </a:p>
         </p:txBody>
@@ -9435,8 +9640,8 @@
         </p:blipFill>
         <p:spPr>
           <a:xfrm>
-            <a:off x="7037613" y="365125"/>
-            <a:ext cx="4871357" cy="2863811"/>
+            <a:off x="8153400" y="365126"/>
+            <a:ext cx="3755570" cy="2207853"/>
           </a:xfrm>
           <a:prstGeom prst="rect">
             <a:avLst/>
@@ -9465,14 +9670,557 @@
         </p:blipFill>
         <p:spPr>
           <a:xfrm>
-            <a:off x="7037612" y="3429000"/>
-            <a:ext cx="4871358" cy="2493671"/>
+            <a:off x="8153400" y="2728726"/>
+            <a:ext cx="3755570" cy="1922494"/>
           </a:xfrm>
           <a:prstGeom prst="rect">
             <a:avLst/>
           </a:prstGeom>
         </p:spPr>
       </p:pic>
+      <p:graphicFrame>
+        <p:nvGraphicFramePr>
+          <p:cNvPr id="6" name="Table 5">
+            <a:extLst>
+              <a:ext uri="{FF2B5EF4-FFF2-40B4-BE49-F238E27FC236}">
+                <a16:creationId xmlns:a16="http://schemas.microsoft.com/office/drawing/2014/main" id="{9AC26A06-43AB-6CAC-411E-02ACD94B8D69}"/>
+              </a:ext>
+            </a:extLst>
+          </p:cNvPr>
+          <p:cNvGraphicFramePr>
+            <a:graphicFrameLocks noGrp="1"/>
+          </p:cNvGraphicFramePr>
+          <p:nvPr>
+            <p:extLst>
+              <p:ext uri="{D42A27DB-BD31-4B8C-83A1-F6EECF244321}">
+                <p14:modId xmlns:p14="http://schemas.microsoft.com/office/powerpoint/2010/main" val="887941306"/>
+              </p:ext>
+            </p:extLst>
+          </p:nvPr>
+        </p:nvGraphicFramePr>
+        <p:xfrm>
+          <a:off x="838200" y="2728726"/>
+          <a:ext cx="8207572" cy="4059236"/>
+        </p:xfrm>
+        <a:graphic>
+          <a:graphicData uri="http://schemas.openxmlformats.org/drawingml/2006/table">
+            <a:tbl>
+              <a:tblPr/>
+              <a:tblGrid>
+                <a:gridCol w="1957486">
+                  <a:extLst>
+                    <a:ext uri="{9D8B030D-6E8A-4147-A177-3AD203B41FA5}">
+                      <a16:colId xmlns:a16="http://schemas.microsoft.com/office/drawing/2014/main" val="3441313519"/>
+                    </a:ext>
+                  </a:extLst>
+                </a:gridCol>
+                <a:gridCol w="6250086">
+                  <a:extLst>
+                    <a:ext uri="{9D8B030D-6E8A-4147-A177-3AD203B41FA5}">
+                      <a16:colId xmlns:a16="http://schemas.microsoft.com/office/drawing/2014/main" val="3408472008"/>
+                    </a:ext>
+                  </a:extLst>
+                </a:gridCol>
+              </a:tblGrid>
+              <a:tr h="289945">
+                <a:tc>
+                  <a:txBody>
+                    <a:bodyPr/>
+                    <a:lstStyle/>
+                    <a:p>
+                      <a:r>
+                        <a:rPr lang="en-IN" sz="1400"/>
+                        <a:t>Field</a:t>
+                      </a:r>
+                    </a:p>
+                  </a:txBody>
+                  <a:tcPr marL="72486" marR="72486" marT="36243" marB="36243" anchor="ctr">
+                    <a:lnL>
+                      <a:noFill/>
+                    </a:lnL>
+                    <a:lnR>
+                      <a:noFill/>
+                    </a:lnR>
+                    <a:lnT>
+                      <a:noFill/>
+                    </a:lnT>
+                    <a:lnB>
+                      <a:noFill/>
+                    </a:lnB>
+                    <a:noFill/>
+                  </a:tcPr>
+                </a:tc>
+                <a:tc>
+                  <a:txBody>
+                    <a:bodyPr/>
+                    <a:lstStyle/>
+                    <a:p>
+                      <a:r>
+                        <a:rPr lang="en-IN" sz="1400" dirty="0"/>
+                        <a:t>Description</a:t>
+                      </a:r>
+                    </a:p>
+                  </a:txBody>
+                  <a:tcPr marL="72486" marR="72486" marT="36243" marB="36243" anchor="ctr">
+                    <a:lnL>
+                      <a:noFill/>
+                    </a:lnL>
+                    <a:lnR>
+                      <a:noFill/>
+                    </a:lnR>
+                    <a:lnT>
+                      <a:noFill/>
+                    </a:lnT>
+                    <a:lnB>
+                      <a:noFill/>
+                    </a:lnB>
+                    <a:noFill/>
+                  </a:tcPr>
+                </a:tc>
+                <a:extLst>
+                  <a:ext uri="{0D108BD9-81ED-4DB2-BD59-A6C34878D82A}">
+                    <a16:rowId xmlns:a16="http://schemas.microsoft.com/office/drawing/2014/main" val="1541138862"/>
+                  </a:ext>
+                </a:extLst>
+              </a:tr>
+              <a:tr h="289945">
+                <a:tc>
+                  <a:txBody>
+                    <a:bodyPr/>
+                    <a:lstStyle/>
+                    <a:p>
+                      <a:r>
+                        <a:rPr lang="en-IN" sz="1400" b="1"/>
+                        <a:t>Quality Attribute</a:t>
+                      </a:r>
+                      <a:endParaRPr lang="en-IN" sz="1400"/>
+                    </a:p>
+                  </a:txBody>
+                  <a:tcPr marL="72486" marR="72486" marT="36243" marB="36243" anchor="ctr">
+                    <a:lnL>
+                      <a:noFill/>
+                    </a:lnL>
+                    <a:lnR>
+                      <a:noFill/>
+                    </a:lnR>
+                    <a:lnT>
+                      <a:noFill/>
+                    </a:lnT>
+                    <a:lnB>
+                      <a:noFill/>
+                    </a:lnB>
+                    <a:noFill/>
+                  </a:tcPr>
+                </a:tc>
+                <a:tc>
+                  <a:txBody>
+                    <a:bodyPr/>
+                    <a:lstStyle/>
+                    <a:p>
+                      <a:r>
+                        <a:rPr lang="en-IN" sz="1400"/>
+                        <a:t>Scalability</a:t>
+                      </a:r>
+                    </a:p>
+                  </a:txBody>
+                  <a:tcPr marL="72486" marR="72486" marT="36243" marB="36243" anchor="ctr">
+                    <a:lnL>
+                      <a:noFill/>
+                    </a:lnL>
+                    <a:lnR>
+                      <a:noFill/>
+                    </a:lnR>
+                    <a:lnT>
+                      <a:noFill/>
+                    </a:lnT>
+                    <a:lnB>
+                      <a:noFill/>
+                    </a:lnB>
+                    <a:noFill/>
+                  </a:tcPr>
+                </a:tc>
+                <a:extLst>
+                  <a:ext uri="{0D108BD9-81ED-4DB2-BD59-A6C34878D82A}">
+                    <a16:rowId xmlns:a16="http://schemas.microsoft.com/office/drawing/2014/main" val="3424056702"/>
+                  </a:ext>
+                </a:extLst>
+              </a:tr>
+              <a:tr h="289945">
+                <a:tc>
+                  <a:txBody>
+                    <a:bodyPr/>
+                    <a:lstStyle/>
+                    <a:p>
+                      <a:r>
+                        <a:rPr lang="en-IN" sz="1400" b="1"/>
+                        <a:t>Source of Stimulus</a:t>
+                      </a:r>
+                      <a:endParaRPr lang="en-IN" sz="1400"/>
+                    </a:p>
+                  </a:txBody>
+                  <a:tcPr marL="72486" marR="72486" marT="36243" marB="36243" anchor="ctr">
+                    <a:lnL>
+                      <a:noFill/>
+                    </a:lnL>
+                    <a:lnR>
+                      <a:noFill/>
+                    </a:lnR>
+                    <a:lnT>
+                      <a:noFill/>
+                    </a:lnT>
+                    <a:lnB>
+                      <a:noFill/>
+                    </a:lnB>
+                    <a:noFill/>
+                  </a:tcPr>
+                </a:tc>
+                <a:tc>
+                  <a:txBody>
+                    <a:bodyPr/>
+                    <a:lstStyle/>
+                    <a:p>
+                      <a:r>
+                        <a:rPr lang="en-IN" sz="1400"/>
+                        <a:t>Students</a:t>
+                      </a:r>
+                    </a:p>
+                  </a:txBody>
+                  <a:tcPr marL="72486" marR="72486" marT="36243" marB="36243" anchor="ctr">
+                    <a:lnL>
+                      <a:noFill/>
+                    </a:lnL>
+                    <a:lnR>
+                      <a:noFill/>
+                    </a:lnR>
+                    <a:lnT>
+                      <a:noFill/>
+                    </a:lnT>
+                    <a:lnB>
+                      <a:noFill/>
+                    </a:lnB>
+                    <a:noFill/>
+                  </a:tcPr>
+                </a:tc>
+                <a:extLst>
+                  <a:ext uri="{0D108BD9-81ED-4DB2-BD59-A6C34878D82A}">
+                    <a16:rowId xmlns:a16="http://schemas.microsoft.com/office/drawing/2014/main" val="2175101912"/>
+                  </a:ext>
+                </a:extLst>
+              </a:tr>
+              <a:tr h="507405">
+                <a:tc>
+                  <a:txBody>
+                    <a:bodyPr/>
+                    <a:lstStyle/>
+                    <a:p>
+                      <a:r>
+                        <a:rPr lang="en-IN" sz="1400" b="1"/>
+                        <a:t>Stimulus</a:t>
+                      </a:r>
+                      <a:endParaRPr lang="en-IN" sz="1400"/>
+                    </a:p>
+                  </a:txBody>
+                  <a:tcPr marL="72486" marR="72486" marT="36243" marB="36243" anchor="ctr">
+                    <a:lnL>
+                      <a:noFill/>
+                    </a:lnL>
+                    <a:lnR>
+                      <a:noFill/>
+                    </a:lnR>
+                    <a:lnT>
+                      <a:noFill/>
+                    </a:lnT>
+                    <a:lnB>
+                      <a:noFill/>
+                    </a:lnB>
+                    <a:noFill/>
+                  </a:tcPr>
+                </a:tc>
+                <a:tc>
+                  <a:txBody>
+                    <a:bodyPr/>
+                    <a:lstStyle/>
+                    <a:p>
+                      <a:r>
+                        <a:rPr lang="en-IN" sz="1400"/>
+                        <a:t>A large number of concurrent requests arrive at the system</a:t>
+                      </a:r>
+                    </a:p>
+                  </a:txBody>
+                  <a:tcPr marL="72486" marR="72486" marT="36243" marB="36243" anchor="ctr">
+                    <a:lnL>
+                      <a:noFill/>
+                    </a:lnL>
+                    <a:lnR>
+                      <a:noFill/>
+                    </a:lnR>
+                    <a:lnT>
+                      <a:noFill/>
+                    </a:lnT>
+                    <a:lnB>
+                      <a:noFill/>
+                    </a:lnB>
+                    <a:noFill/>
+                  </a:tcPr>
+                </a:tc>
+                <a:extLst>
+                  <a:ext uri="{0D108BD9-81ED-4DB2-BD59-A6C34878D82A}">
+                    <a16:rowId xmlns:a16="http://schemas.microsoft.com/office/drawing/2014/main" val="1508562039"/>
+                  </a:ext>
+                </a:extLst>
+              </a:tr>
+              <a:tr h="289945">
+                <a:tc>
+                  <a:txBody>
+                    <a:bodyPr/>
+                    <a:lstStyle/>
+                    <a:p>
+                      <a:r>
+                        <a:rPr lang="en-IN" sz="1400" b="1"/>
+                        <a:t>Environment</a:t>
+                      </a:r>
+                      <a:endParaRPr lang="en-IN" sz="1400"/>
+                    </a:p>
+                  </a:txBody>
+                  <a:tcPr marL="72486" marR="72486" marT="36243" marB="36243" anchor="ctr">
+                    <a:lnL>
+                      <a:noFill/>
+                    </a:lnL>
+                    <a:lnR>
+                      <a:noFill/>
+                    </a:lnR>
+                    <a:lnT>
+                      <a:noFill/>
+                    </a:lnT>
+                    <a:lnB>
+                      <a:noFill/>
+                    </a:lnB>
+                    <a:noFill/>
+                  </a:tcPr>
+                </a:tc>
+                <a:tc>
+                  <a:txBody>
+                    <a:bodyPr/>
+                    <a:lstStyle/>
+                    <a:p>
+                      <a:r>
+                        <a:rPr lang="en-IN" sz="1400"/>
+                        <a:t>Peak usage periods (e.g. exam registration opening)</a:t>
+                      </a:r>
+                    </a:p>
+                  </a:txBody>
+                  <a:tcPr marL="72486" marR="72486" marT="36243" marB="36243" anchor="ctr">
+                    <a:lnL>
+                      <a:noFill/>
+                    </a:lnL>
+                    <a:lnR>
+                      <a:noFill/>
+                    </a:lnR>
+                    <a:lnT>
+                      <a:noFill/>
+                    </a:lnT>
+                    <a:lnB>
+                      <a:noFill/>
+                    </a:lnB>
+                    <a:noFill/>
+                  </a:tcPr>
+                </a:tc>
+                <a:extLst>
+                  <a:ext uri="{0D108BD9-81ED-4DB2-BD59-A6C34878D82A}">
+                    <a16:rowId xmlns:a16="http://schemas.microsoft.com/office/drawing/2014/main" val="1453488838"/>
+                  </a:ext>
+                </a:extLst>
+              </a:tr>
+              <a:tr h="507405">
+                <a:tc>
+                  <a:txBody>
+                    <a:bodyPr/>
+                    <a:lstStyle/>
+                    <a:p>
+                      <a:r>
+                        <a:rPr lang="en-IN" sz="1400" b="1"/>
+                        <a:t>Artifact</a:t>
+                      </a:r>
+                      <a:endParaRPr lang="en-IN" sz="1400"/>
+                    </a:p>
+                  </a:txBody>
+                  <a:tcPr marL="72486" marR="72486" marT="36243" marB="36243" anchor="ctr">
+                    <a:lnL>
+                      <a:noFill/>
+                    </a:lnL>
+                    <a:lnR>
+                      <a:noFill/>
+                    </a:lnR>
+                    <a:lnT>
+                      <a:noFill/>
+                    </a:lnT>
+                    <a:lnB>
+                      <a:noFill/>
+                    </a:lnB>
+                    <a:noFill/>
+                  </a:tcPr>
+                </a:tc>
+                <a:tc>
+                  <a:txBody>
+                    <a:bodyPr/>
+                    <a:lstStyle/>
+                    <a:p>
+                      <a:r>
+                        <a:rPr lang="en-IN" sz="1400"/>
+                        <a:t>Backend API container, especially Registration Management</a:t>
+                      </a:r>
+                    </a:p>
+                  </a:txBody>
+                  <a:tcPr marL="72486" marR="72486" marT="36243" marB="36243" anchor="ctr">
+                    <a:lnL>
+                      <a:noFill/>
+                    </a:lnL>
+                    <a:lnR>
+                      <a:noFill/>
+                    </a:lnR>
+                    <a:lnT>
+                      <a:noFill/>
+                    </a:lnT>
+                    <a:lnB>
+                      <a:noFill/>
+                    </a:lnB>
+                    <a:noFill/>
+                  </a:tcPr>
+                </a:tc>
+                <a:extLst>
+                  <a:ext uri="{0D108BD9-81ED-4DB2-BD59-A6C34878D82A}">
+                    <a16:rowId xmlns:a16="http://schemas.microsoft.com/office/drawing/2014/main" val="1347179215"/>
+                  </a:ext>
+                </a:extLst>
+              </a:tr>
+              <a:tr h="1159782">
+                <a:tc>
+                  <a:txBody>
+                    <a:bodyPr/>
+                    <a:lstStyle/>
+                    <a:p>
+                      <a:r>
+                        <a:rPr lang="en-IN" sz="1400" b="1"/>
+                        <a:t>Response</a:t>
+                      </a:r>
+                      <a:endParaRPr lang="en-IN" sz="1400"/>
+                    </a:p>
+                  </a:txBody>
+                  <a:tcPr marL="72486" marR="72486" marT="36243" marB="36243" anchor="ctr">
+                    <a:lnL>
+                      <a:noFill/>
+                    </a:lnL>
+                    <a:lnR>
+                      <a:noFill/>
+                    </a:lnR>
+                    <a:lnT>
+                      <a:noFill/>
+                    </a:lnT>
+                    <a:lnB>
+                      <a:noFill/>
+                    </a:lnB>
+                    <a:noFill/>
+                  </a:tcPr>
+                </a:tc>
+                <a:tc>
+                  <a:txBody>
+                    <a:bodyPr/>
+                    <a:lstStyle/>
+                    <a:p>
+                      <a:r>
+                        <a:rPr lang="en-IN" sz="1400" dirty="0"/>
+                        <a:t>The Backend API scales horizontally by running multiple stateless instances behind a load balancer. Requests are distributed across instances and database access is optimized using connection pooling</a:t>
+                      </a:r>
+                    </a:p>
+                  </a:txBody>
+                  <a:tcPr marL="72486" marR="72486" marT="36243" marB="36243" anchor="ctr">
+                    <a:lnL>
+                      <a:noFill/>
+                    </a:lnL>
+                    <a:lnR>
+                      <a:noFill/>
+                    </a:lnR>
+                    <a:lnT>
+                      <a:noFill/>
+                    </a:lnT>
+                    <a:lnB>
+                      <a:noFill/>
+                    </a:lnB>
+                    <a:noFill/>
+                  </a:tcPr>
+                </a:tc>
+                <a:extLst>
+                  <a:ext uri="{0D108BD9-81ED-4DB2-BD59-A6C34878D82A}">
+                    <a16:rowId xmlns:a16="http://schemas.microsoft.com/office/drawing/2014/main" val="272562500"/>
+                  </a:ext>
+                </a:extLst>
+              </a:tr>
+              <a:tr h="724864">
+                <a:tc>
+                  <a:txBody>
+                    <a:bodyPr/>
+                    <a:lstStyle/>
+                    <a:p>
+                      <a:r>
+                        <a:rPr lang="en-IN" sz="1400" b="1"/>
+                        <a:t>Response Measure</a:t>
+                      </a:r>
+                      <a:endParaRPr lang="en-IN" sz="1400"/>
+                    </a:p>
+                  </a:txBody>
+                  <a:tcPr marL="72486" marR="72486" marT="36243" marB="36243" anchor="ctr">
+                    <a:lnL>
+                      <a:noFill/>
+                    </a:lnL>
+                    <a:lnR>
+                      <a:noFill/>
+                    </a:lnR>
+                    <a:lnT>
+                      <a:noFill/>
+                    </a:lnT>
+                    <a:lnB>
+                      <a:noFill/>
+                    </a:lnB>
+                    <a:noFill/>
+                  </a:tcPr>
+                </a:tc>
+                <a:tc>
+                  <a:txBody>
+                    <a:bodyPr/>
+                    <a:lstStyle/>
+                    <a:p>
+                      <a:r>
+                        <a:rPr lang="en-IN" sz="1400" dirty="0"/>
+                        <a:t>The system handles large bursts of concurrent requests without request failures or unacceptable response-time degradation</a:t>
+                      </a:r>
+                    </a:p>
+                  </a:txBody>
+                  <a:tcPr marL="72486" marR="72486" marT="36243" marB="36243" anchor="ctr">
+                    <a:lnL>
+                      <a:noFill/>
+                    </a:lnL>
+                    <a:lnR>
+                      <a:noFill/>
+                    </a:lnR>
+                    <a:lnT>
+                      <a:noFill/>
+                    </a:lnT>
+                    <a:lnB>
+                      <a:noFill/>
+                    </a:lnB>
+                    <a:noFill/>
+                  </a:tcPr>
+                </a:tc>
+                <a:extLst>
+                  <a:ext uri="{0D108BD9-81ED-4DB2-BD59-A6C34878D82A}">
+                    <a16:rowId xmlns:a16="http://schemas.microsoft.com/office/drawing/2014/main" val="1136433596"/>
+                  </a:ext>
+                </a:extLst>
+              </a:tr>
+            </a:tbl>
+          </a:graphicData>
+        </a:graphic>
+      </p:graphicFrame>
     </p:spTree>
     <p:extLst>
       <p:ext uri="{BB962C8B-B14F-4D97-AF65-F5344CB8AC3E}">

--- a/M2/Presentation_Qualities.pptx
+++ b/M2/Presentation_Qualities.pptx
@@ -937,7 +937,7 @@
           <a:p>
             <a:fld id="{FC1B7745-5391-477F-8AE8-1136866A9302}" type="datetimeFigureOut">
               <a:rPr lang="es-ES" smtClean="0"/>
-              <a:t>7/1/26</a:t>
+              <a:t>07/01/2026</a:t>
             </a:fld>
             <a:endParaRPr lang="es-ES"/>
           </a:p>
@@ -1473,7 +1473,7 @@
           <a:p>
             <a:fld id="{6A3C2F7B-537C-4500-BF1F-DDEBE70AF5A2}" type="datetimeFigureOut">
               <a:rPr lang="es-ES" smtClean="0"/>
-              <a:t>7/1/26</a:t>
+              <a:t>07/01/2026</a:t>
             </a:fld>
             <a:endParaRPr lang="es-ES"/>
           </a:p>
@@ -1771,7 +1771,7 @@
           <a:p>
             <a:fld id="{6A3C2F7B-537C-4500-BF1F-DDEBE70AF5A2}" type="datetimeFigureOut">
               <a:rPr lang="es-ES" smtClean="0"/>
-              <a:t>7/1/26</a:t>
+              <a:t>07/01/2026</a:t>
             </a:fld>
             <a:endParaRPr lang="es-ES"/>
           </a:p>
@@ -1963,7 +1963,7 @@
           <a:p>
             <a:fld id="{6A3C2F7B-537C-4500-BF1F-DDEBE70AF5A2}" type="datetimeFigureOut">
               <a:rPr lang="es-ES" smtClean="0"/>
-              <a:t>7/1/26</a:t>
+              <a:t>07/01/2026</a:t>
             </a:fld>
             <a:endParaRPr lang="es-ES"/>
           </a:p>
@@ -2224,7 +2224,7 @@
           <a:p>
             <a:fld id="{6A3C2F7B-537C-4500-BF1F-DDEBE70AF5A2}" type="datetimeFigureOut">
               <a:rPr lang="es-ES" smtClean="0"/>
-              <a:t>7/1/26</a:t>
+              <a:t>07/01/2026</a:t>
             </a:fld>
             <a:endParaRPr lang="es-ES"/>
           </a:p>
@@ -2648,7 +2648,7 @@
           <a:p>
             <a:fld id="{6A3C2F7B-537C-4500-BF1F-DDEBE70AF5A2}" type="datetimeFigureOut">
               <a:rPr lang="es-ES" smtClean="0"/>
-              <a:t>7/1/26</a:t>
+              <a:t>07/01/2026</a:t>
             </a:fld>
             <a:endParaRPr lang="es-ES"/>
           </a:p>
@@ -3185,7 +3185,7 @@
           <a:p>
             <a:fld id="{6A3C2F7B-537C-4500-BF1F-DDEBE70AF5A2}" type="datetimeFigureOut">
               <a:rPr lang="es-ES" smtClean="0"/>
-              <a:t>7/1/26</a:t>
+              <a:t>07/01/2026</a:t>
             </a:fld>
             <a:endParaRPr lang="es-ES"/>
           </a:p>
@@ -4049,7 +4049,7 @@
           <a:p>
             <a:fld id="{6A3C2F7B-537C-4500-BF1F-DDEBE70AF5A2}" type="datetimeFigureOut">
               <a:rPr lang="es-ES" smtClean="0"/>
-              <a:t>7/1/26</a:t>
+              <a:t>07/01/2026</a:t>
             </a:fld>
             <a:endParaRPr lang="es-ES"/>
           </a:p>
@@ -4219,7 +4219,7 @@
           <a:p>
             <a:fld id="{6A3C2F7B-537C-4500-BF1F-DDEBE70AF5A2}" type="datetimeFigureOut">
               <a:rPr lang="es-ES" smtClean="0"/>
-              <a:t>7/1/26</a:t>
+              <a:t>07/01/2026</a:t>
             </a:fld>
             <a:endParaRPr lang="es-ES"/>
           </a:p>
@@ -4403,7 +4403,7 @@
           <a:p>
             <a:fld id="{6A3C2F7B-537C-4500-BF1F-DDEBE70AF5A2}" type="datetimeFigureOut">
               <a:rPr lang="es-ES" smtClean="0"/>
-              <a:t>7/1/26</a:t>
+              <a:t>07/01/2026</a:t>
             </a:fld>
             <a:endParaRPr lang="es-ES"/>
           </a:p>
@@ -4573,7 +4573,7 @@
           <a:p>
             <a:fld id="{6A3C2F7B-537C-4500-BF1F-DDEBE70AF5A2}" type="datetimeFigureOut">
               <a:rPr lang="es-ES" smtClean="0"/>
-              <a:t>7/1/26</a:t>
+              <a:t>07/01/2026</a:t>
             </a:fld>
             <a:endParaRPr lang="es-ES"/>
           </a:p>
@@ -4817,7 +4817,7 @@
           <a:p>
             <a:fld id="{6A3C2F7B-537C-4500-BF1F-DDEBE70AF5A2}" type="datetimeFigureOut">
               <a:rPr lang="es-ES" smtClean="0"/>
-              <a:t>7/1/26</a:t>
+              <a:t>07/01/2026</a:t>
             </a:fld>
             <a:endParaRPr lang="es-ES"/>
           </a:p>
@@ -5053,7 +5053,7 @@
           <a:p>
             <a:fld id="{6A3C2F7B-537C-4500-BF1F-DDEBE70AF5A2}" type="datetimeFigureOut">
               <a:rPr lang="es-ES" smtClean="0"/>
-              <a:t>7/1/26</a:t>
+              <a:t>07/01/2026</a:t>
             </a:fld>
             <a:endParaRPr lang="es-ES"/>
           </a:p>
@@ -5519,7 +5519,7 @@
           <a:p>
             <a:fld id="{6A3C2F7B-537C-4500-BF1F-DDEBE70AF5A2}" type="datetimeFigureOut">
               <a:rPr lang="es-ES" smtClean="0"/>
-              <a:t>7/1/26</a:t>
+              <a:t>07/01/2026</a:t>
             </a:fld>
             <a:endParaRPr lang="es-ES"/>
           </a:p>
@@ -5637,7 +5637,7 @@
           <a:p>
             <a:fld id="{6A3C2F7B-537C-4500-BF1F-DDEBE70AF5A2}" type="datetimeFigureOut">
               <a:rPr lang="es-ES" smtClean="0"/>
-              <a:t>7/1/26</a:t>
+              <a:t>07/01/2026</a:t>
             </a:fld>
             <a:endParaRPr lang="es-ES"/>
           </a:p>
@@ -5732,7 +5732,7 @@
           <a:p>
             <a:fld id="{6A3C2F7B-537C-4500-BF1F-DDEBE70AF5A2}" type="datetimeFigureOut">
               <a:rPr lang="es-ES" smtClean="0"/>
-              <a:t>7/1/26</a:t>
+              <a:t>07/01/2026</a:t>
             </a:fld>
             <a:endParaRPr lang="es-ES"/>
           </a:p>
@@ -5987,7 +5987,7 @@
           <a:p>
             <a:fld id="{6A3C2F7B-537C-4500-BF1F-DDEBE70AF5A2}" type="datetimeFigureOut">
               <a:rPr lang="es-ES" smtClean="0"/>
-              <a:t>7/1/26</a:t>
+              <a:t>07/01/2026</a:t>
             </a:fld>
             <a:endParaRPr lang="es-ES"/>
           </a:p>
@@ -6287,7 +6287,7 @@
           <a:p>
             <a:fld id="{6A3C2F7B-537C-4500-BF1F-DDEBE70AF5A2}" type="datetimeFigureOut">
               <a:rPr lang="es-ES" smtClean="0"/>
-              <a:t>7/1/26</a:t>
+              <a:t>07/01/2026</a:t>
             </a:fld>
             <a:endParaRPr lang="es-ES"/>
           </a:p>
@@ -6521,7 +6521,7 @@
           <a:p>
             <a:fld id="{6A3C2F7B-537C-4500-BF1F-DDEBE70AF5A2}" type="datetimeFigureOut">
               <a:rPr lang="es-ES" smtClean="0"/>
-              <a:t>7/1/26</a:t>
+              <a:t>07/01/2026</a:t>
             </a:fld>
             <a:endParaRPr lang="es-ES"/>
           </a:p>
@@ -10320,7 +10320,7 @@
         </p:nvSpPr>
         <p:spPr>
           <a:xfrm>
-            <a:off x="6095999" y="196057"/>
+            <a:off x="527860" y="1325563"/>
             <a:ext cx="5822092" cy="4916574"/>
           </a:xfrm>
         </p:spPr>
@@ -10334,68 +10334,70 @@
               <a:buNone/>
             </a:pPr>
             <a:r>
-              <a:rPr lang="en-US" sz="2400" dirty="0"/>
+              <a:rPr lang="en-US" dirty="0"/>
               <a:t>An attacker</a:t>
             </a:r>
             <a:r>
-              <a:rPr lang="en-001" sz="2400" dirty="0"/>
+              <a:rPr lang="en-001" dirty="0"/>
               <a:t> tries to modify the grades by</a:t>
             </a:r>
             <a:r>
-              <a:rPr lang="en-US" sz="2400" dirty="0"/>
+              <a:rPr lang="en-US" dirty="0"/>
               <a:t> </a:t>
             </a:r>
             <a:r>
-              <a:rPr lang="en-001" sz="2400" dirty="0"/>
+              <a:rPr lang="en-001" dirty="0"/>
               <a:t>sending </a:t>
             </a:r>
             <a:r>
-              <a:rPr lang="en-US" sz="2400" dirty="0"/>
+              <a:rPr lang="en-US" dirty="0"/>
               <a:t>a grade edit request to Grading Management component.</a:t>
             </a:r>
-            <a:endParaRPr lang="en-001" sz="2400" dirty="0"/>
+            <a:endParaRPr lang="en-001" dirty="0"/>
           </a:p>
           <a:p>
             <a:pPr marL="0" indent="0">
               <a:buNone/>
             </a:pPr>
-            <a:endParaRPr lang="en-001" sz="2400" dirty="0"/>
+            <a:endParaRPr lang="en-001" dirty="0"/>
           </a:p>
           <a:p>
             <a:pPr marL="0" indent="0">
               <a:buNone/>
             </a:pPr>
             <a:r>
-              <a:rPr lang="en-001" sz="3200" dirty="0"/>
-              <a:t>Solution:</a:t>
-            </a:r>
-            <a:endParaRPr lang="en-001" sz="2400" dirty="0"/>
+              <a:rPr lang="en-001" dirty="0"/>
+              <a:t>Solution: </a:t>
+            </a:r>
+            <a:r>
+              <a:rPr lang="en-US" dirty="0"/>
+              <a:t>The </a:t>
+            </a:r>
+            <a:r>
+              <a:rPr lang="en-001" dirty="0"/>
+              <a:t>request </a:t>
+            </a:r>
+            <a:r>
+              <a:rPr lang="en-US" dirty="0"/>
+              <a:t>is detected, an attacker is not recognized as a teacher, notification is sent.</a:t>
+            </a:r>
+            <a:endParaRPr lang="en-001" dirty="0"/>
           </a:p>
           <a:p>
             <a:pPr marL="0" indent="0">
               <a:buNone/>
             </a:pPr>
-            <a:r>
-              <a:rPr lang="en-US" sz="2400" dirty="0"/>
-              <a:t>The request is detected, an attacker is not recognized as a teacher, notification is sent.</a:t>
-            </a:r>
-            <a:endParaRPr lang="en-001" sz="2400" dirty="0"/>
+            <a:endParaRPr lang="en-001" dirty="0"/>
           </a:p>
           <a:p>
             <a:pPr marL="0" indent="0">
               <a:buNone/>
             </a:pPr>
-            <a:endParaRPr lang="en-001" sz="2400" dirty="0"/>
-          </a:p>
-          <a:p>
-            <a:pPr marL="0" indent="0">
-              <a:buNone/>
-            </a:pPr>
-            <a:r>
-              <a:rPr lang="en-US" sz="2400" dirty="0"/>
+            <a:r>
+              <a:rPr lang="en-US" dirty="0"/>
               <a:t>No architecture modification is needed because a notification is just being sent.</a:t>
             </a:r>
-            <a:endParaRPr lang="en-001" sz="2400" dirty="0"/>
+            <a:endParaRPr lang="en-001" dirty="0"/>
           </a:p>
         </p:txBody>
       </p:sp>
@@ -10429,6 +10431,91 @@
           </a:prstGeom>
         </p:spPr>
       </p:pic>
+      <p:sp>
+        <p:nvSpPr>
+          <p:cNvPr id="5" name="TextBox 4">
+            <a:extLst>
+              <a:ext uri="{FF2B5EF4-FFF2-40B4-BE49-F238E27FC236}">
+                <a16:creationId xmlns:a16="http://schemas.microsoft.com/office/drawing/2014/main" id="{F41EE124-D96B-C268-F58D-A5B17826BB4A}"/>
+              </a:ext>
+            </a:extLst>
+          </p:cNvPr>
+          <p:cNvSpPr txBox="1"/>
+          <p:nvPr/>
+        </p:nvSpPr>
+        <p:spPr>
+          <a:xfrm>
+            <a:off x="6785988" y="736048"/>
+            <a:ext cx="5299008" cy="3693319"/>
+          </a:xfrm>
+          <a:prstGeom prst="rect">
+            <a:avLst/>
+          </a:prstGeom>
+          <a:noFill/>
+        </p:spPr>
+        <p:txBody>
+          <a:bodyPr wrap="square">
+            <a:spAutoFit/>
+          </a:bodyPr>
+          <a:lstStyle/>
+          <a:p>
+            <a:r>
+              <a:rPr lang="en-US" dirty="0"/>
+              <a:t>Source of stimulus: Grading Management (unauthorized access)</a:t>
+            </a:r>
+            <a:endParaRPr lang="en-001" dirty="0"/>
+          </a:p>
+          <a:p>
+            <a:endParaRPr lang="en-US" dirty="0"/>
+          </a:p>
+          <a:p>
+            <a:r>
+              <a:rPr lang="en-US" dirty="0"/>
+              <a:t>Stimulus: Editing the grades with an unauthorized access</a:t>
+            </a:r>
+            <a:endParaRPr lang="en-001" dirty="0"/>
+          </a:p>
+          <a:p>
+            <a:endParaRPr lang="en-US" dirty="0"/>
+          </a:p>
+          <a:p>
+            <a:r>
+              <a:rPr lang="en-US" dirty="0"/>
+              <a:t>Environment: Run-time</a:t>
+            </a:r>
+          </a:p>
+          <a:p>
+            <a:endParaRPr lang="en-001" dirty="0"/>
+          </a:p>
+          <a:p>
+            <a:r>
+              <a:rPr lang="en-US" dirty="0"/>
+              <a:t>Artifact: Persistence Adapter</a:t>
+            </a:r>
+            <a:endParaRPr lang="en-001" dirty="0"/>
+          </a:p>
+          <a:p>
+            <a:endParaRPr lang="en-US" dirty="0"/>
+          </a:p>
+          <a:p>
+            <a:r>
+              <a:rPr lang="en-US" dirty="0"/>
+              <a:t>Response: Unauthorized access detected</a:t>
+            </a:r>
+            <a:endParaRPr lang="en-001" dirty="0"/>
+          </a:p>
+          <a:p>
+            <a:endParaRPr lang="en-US" dirty="0"/>
+          </a:p>
+          <a:p>
+            <a:r>
+              <a:rPr lang="en-US" dirty="0"/>
+              <a:t>Measure: Notification is sent</a:t>
+            </a:r>
+            <a:endParaRPr lang="en-001" dirty="0"/>
+          </a:p>
+        </p:txBody>
+      </p:sp>
     </p:spTree>
     <p:extLst>
       <p:ext uri="{BB962C8B-B14F-4D97-AF65-F5344CB8AC3E}">

--- a/M2/Presentation_Qualities.pptx
+++ b/M2/Presentation_Qualities.pptx
@@ -5,7 +5,7 @@
     <p:sldMasterId id="2147483696" r:id="rId1"/>
   </p:sldMasterIdLst>
   <p:notesMasterIdLst>
-    <p:notesMasterId r:id="rId23"/>
+    <p:notesMasterId r:id="rId24"/>
   </p:notesMasterIdLst>
   <p:sldIdLst>
     <p:sldId id="256" r:id="rId2"/>
@@ -14,21 +14,22 @@
     <p:sldId id="260" r:id="rId5"/>
     <p:sldId id="261" r:id="rId6"/>
     <p:sldId id="257" r:id="rId7"/>
-    <p:sldId id="262" r:id="rId8"/>
-    <p:sldId id="277" r:id="rId9"/>
-    <p:sldId id="263" r:id="rId10"/>
-    <p:sldId id="281" r:id="rId11"/>
-    <p:sldId id="282" r:id="rId12"/>
-    <p:sldId id="283" r:id="rId13"/>
-    <p:sldId id="284" r:id="rId14"/>
-    <p:sldId id="285" r:id="rId15"/>
-    <p:sldId id="259" r:id="rId16"/>
-    <p:sldId id="286" r:id="rId17"/>
-    <p:sldId id="275" r:id="rId18"/>
-    <p:sldId id="272" r:id="rId19"/>
-    <p:sldId id="273" r:id="rId20"/>
-    <p:sldId id="274" r:id="rId21"/>
-    <p:sldId id="276" r:id="rId22"/>
+    <p:sldId id="287" r:id="rId8"/>
+    <p:sldId id="262" r:id="rId9"/>
+    <p:sldId id="277" r:id="rId10"/>
+    <p:sldId id="263" r:id="rId11"/>
+    <p:sldId id="281" r:id="rId12"/>
+    <p:sldId id="282" r:id="rId13"/>
+    <p:sldId id="283" r:id="rId14"/>
+    <p:sldId id="284" r:id="rId15"/>
+    <p:sldId id="285" r:id="rId16"/>
+    <p:sldId id="259" r:id="rId17"/>
+    <p:sldId id="286" r:id="rId18"/>
+    <p:sldId id="275" r:id="rId19"/>
+    <p:sldId id="272" r:id="rId20"/>
+    <p:sldId id="273" r:id="rId21"/>
+    <p:sldId id="274" r:id="rId22"/>
+    <p:sldId id="276" r:id="rId23"/>
   </p:sldIdLst>
   <p:sldSz cx="12192000" cy="6858000"/>
   <p:notesSz cx="6858000" cy="9144000"/>
@@ -138,7 +139,7 @@
 <file path=ppt/revisionInfo.xml><?xml version="1.0" encoding="utf-8"?>
 <p1510:revInfo xmlns:a="http://schemas.openxmlformats.org/drawingml/2006/main" xmlns:r="http://schemas.openxmlformats.org/officeDocument/2006/relationships" xmlns:p1510="http://schemas.microsoft.com/office/powerpoint/2015/10/main">
   <p1510:revLst>
-    <p1510:client id="{AF2F9144-AC0E-4516-A58E-21268A424A36}" v="9" dt="2026-01-02T16:32:01.421"/>
+    <p1510:client id="{AF2F9144-AC0E-4516-A58E-21268A424A36}" v="14" dt="2026-01-07T19:41:29.770"/>
   </p1510:revLst>
 </p1510:revInfo>
 </file>
@@ -147,8 +148,8 @@
 <pc:chgInfo xmlns:a="http://schemas.openxmlformats.org/drawingml/2006/main" xmlns:r="http://schemas.openxmlformats.org/officeDocument/2006/relationships" xmlns:ac="http://schemas.microsoft.com/office/drawing/2013/main/command" xmlns:pc="http://schemas.microsoft.com/office/powerpoint/2013/main/command">
   <pc:docChgLst>
     <pc:chgData name="Iker Joaquín" userId="acaffbe4a706a9d4" providerId="LiveId" clId="{D1DFD0CF-3B6A-4A93-9F8B-FF939B2F1C04}"/>
-    <pc:docChg chg="undo custSel addSld delSld modSld">
-      <pc:chgData name="Iker Joaquín" userId="acaffbe4a706a9d4" providerId="LiveId" clId="{D1DFD0CF-3B6A-4A93-9F8B-FF939B2F1C04}" dt="2026-01-02T16:32:26.172" v="1831" actId="1076"/>
+    <pc:docChg chg="undo custSel addSld delSld modSld sldOrd">
+      <pc:chgData name="Iker Joaquín" userId="acaffbe4a706a9d4" providerId="LiveId" clId="{D1DFD0CF-3B6A-4A93-9F8B-FF939B2F1C04}" dt="2026-01-07T19:41:29.770" v="2000"/>
       <pc:docMkLst>
         <pc:docMk/>
       </pc:docMkLst>
@@ -174,63 +175,15 @@
             <ac:spMk id="3" creationId="{E1B75CE3-D0D0-D9DA-4B45-6DDADDB1D0E0}"/>
           </ac:spMkLst>
         </pc:spChg>
-        <pc:spChg chg="add del">
-          <ac:chgData name="Iker Joaquín" userId="acaffbe4a706a9d4" providerId="LiveId" clId="{D1DFD0CF-3B6A-4A93-9F8B-FF939B2F1C04}" dt="2026-01-02T15:03:02.965" v="46" actId="26606"/>
-          <ac:spMkLst>
-            <pc:docMk/>
-            <pc:sldMk cId="527988461" sldId="256"/>
-            <ac:spMk id="8" creationId="{5A292AEA-2528-46C0-B426-95822B6141FB}"/>
-          </ac:spMkLst>
-        </pc:spChg>
-        <pc:spChg chg="add del">
-          <ac:chgData name="Iker Joaquín" userId="acaffbe4a706a9d4" providerId="LiveId" clId="{D1DFD0CF-3B6A-4A93-9F8B-FF939B2F1C04}" dt="2026-01-02T15:03:02.965" v="46" actId="26606"/>
-          <ac:spMkLst>
-            <pc:docMk/>
-            <pc:sldMk cId="527988461" sldId="256"/>
-            <ac:spMk id="10" creationId="{D8B7B198-E4DF-43CD-AD8C-199884323745}"/>
-          </ac:spMkLst>
-        </pc:spChg>
-        <pc:spChg chg="add del">
-          <ac:chgData name="Iker Joaquín" userId="acaffbe4a706a9d4" providerId="LiveId" clId="{D1DFD0CF-3B6A-4A93-9F8B-FF939B2F1C04}" dt="2026-01-02T15:03:02.965" v="46" actId="26606"/>
-          <ac:spMkLst>
-            <pc:docMk/>
-            <pc:sldMk cId="527988461" sldId="256"/>
-            <ac:spMk id="12" creationId="{2BE67753-EA0E-4819-8D22-0B6600CF7231}"/>
-          </ac:spMkLst>
-        </pc:spChg>
-        <pc:grpChg chg="add del">
-          <ac:chgData name="Iker Joaquín" userId="acaffbe4a706a9d4" providerId="LiveId" clId="{D1DFD0CF-3B6A-4A93-9F8B-FF939B2F1C04}" dt="2026-01-02T15:03:02.965" v="46" actId="26606"/>
-          <ac:grpSpMkLst>
-            <pc:docMk/>
-            <pc:sldMk cId="527988461" sldId="256"/>
-            <ac:grpSpMk id="14" creationId="{D76D63AC-0421-45EC-B383-E79A61A78C6B}"/>
-          </ac:grpSpMkLst>
-        </pc:grpChg>
-        <pc:grpChg chg="add del">
-          <ac:chgData name="Iker Joaquín" userId="acaffbe4a706a9d4" providerId="LiveId" clId="{D1DFD0CF-3B6A-4A93-9F8B-FF939B2F1C04}" dt="2026-01-02T15:03:02.965" v="46" actId="26606"/>
-          <ac:grpSpMkLst>
-            <pc:docMk/>
-            <pc:sldMk cId="527988461" sldId="256"/>
-            <ac:grpSpMk id="23" creationId="{87F87F1B-42BA-4AC7-A4E2-41544DDB2CE3}"/>
-          </ac:grpSpMkLst>
-        </pc:grpChg>
-        <pc:grpChg chg="add del">
-          <ac:chgData name="Iker Joaquín" userId="acaffbe4a706a9d4" providerId="LiveId" clId="{D1DFD0CF-3B6A-4A93-9F8B-FF939B2F1C04}" dt="2026-01-02T15:03:02.965" v="46" actId="26606"/>
-          <ac:grpSpMkLst>
-            <pc:docMk/>
-            <pc:sldMk cId="527988461" sldId="256"/>
-            <ac:grpSpMk id="29" creationId="{967346A5-7569-4F15-AB5D-BE3DADF192C0}"/>
-          </ac:grpSpMkLst>
-        </pc:grpChg>
       </pc:sldChg>
       <pc:sldChg chg="addSp delSp modSp new mod setBg">
-        <pc:chgData name="Iker Joaquín" userId="acaffbe4a706a9d4" providerId="LiveId" clId="{D1DFD0CF-3B6A-4A93-9F8B-FF939B2F1C04}" dt="2026-01-02T15:48:04.979" v="597" actId="1076"/>
+        <pc:chgData name="Iker Joaquín" userId="acaffbe4a706a9d4" providerId="LiveId" clId="{D1DFD0CF-3B6A-4A93-9F8B-FF939B2F1C04}" dt="2026-01-07T19:41:29.770" v="2000"/>
         <pc:sldMkLst>
           <pc:docMk/>
           <pc:sldMk cId="648425079" sldId="257"/>
         </pc:sldMkLst>
         <pc:spChg chg="mod">
-          <ac:chgData name="Iker Joaquín" userId="acaffbe4a706a9d4" providerId="LiveId" clId="{D1DFD0CF-3B6A-4A93-9F8B-FF939B2F1C04}" dt="2026-01-02T15:48:00.617" v="594" actId="26606"/>
+          <ac:chgData name="Iker Joaquín" userId="acaffbe4a706a9d4" providerId="LiveId" clId="{D1DFD0CF-3B6A-4A93-9F8B-FF939B2F1C04}" dt="2026-01-07T19:41:29.770" v="2000"/>
           <ac:spMkLst>
             <pc:docMk/>
             <pc:sldMk cId="648425079" sldId="257"/>
@@ -238,132 +191,29 @@
           </ac:spMkLst>
         </pc:spChg>
         <pc:spChg chg="mod">
-          <ac:chgData name="Iker Joaquín" userId="acaffbe4a706a9d4" providerId="LiveId" clId="{D1DFD0CF-3B6A-4A93-9F8B-FF939B2F1C04}" dt="2026-01-02T15:48:00.617" v="594" actId="26606"/>
+          <ac:chgData name="Iker Joaquín" userId="acaffbe4a706a9d4" providerId="LiveId" clId="{D1DFD0CF-3B6A-4A93-9F8B-FF939B2F1C04}" dt="2026-01-07T19:32:01.744" v="1950" actId="27636"/>
           <ac:spMkLst>
             <pc:docMk/>
             <pc:sldMk cId="648425079" sldId="257"/>
             <ac:spMk id="3" creationId="{61F5AB5F-386D-CE95-CCBF-2F74C67C4105}"/>
           </ac:spMkLst>
         </pc:spChg>
-        <pc:spChg chg="add del">
-          <ac:chgData name="Iker Joaquín" userId="acaffbe4a706a9d4" providerId="LiveId" clId="{D1DFD0CF-3B6A-4A93-9F8B-FF939B2F1C04}" dt="2026-01-02T15:47:10.307" v="588" actId="26606"/>
-          <ac:spMkLst>
-            <pc:docMk/>
-            <pc:sldMk cId="648425079" sldId="257"/>
-            <ac:spMk id="10" creationId="{DBC6133C-0615-4CE4-9132-37E609A9BDFA}"/>
-          </ac:spMkLst>
-        </pc:spChg>
-        <pc:spChg chg="add del">
-          <ac:chgData name="Iker Joaquín" userId="acaffbe4a706a9d4" providerId="LiveId" clId="{D1DFD0CF-3B6A-4A93-9F8B-FF939B2F1C04}" dt="2026-01-02T15:47:10.307" v="588" actId="26606"/>
-          <ac:spMkLst>
-            <pc:docMk/>
-            <pc:sldMk cId="648425079" sldId="257"/>
-            <ac:spMk id="12" creationId="{169CC832-2974-4E8D-90ED-3E2941BA7336}"/>
-          </ac:spMkLst>
-        </pc:spChg>
-        <pc:spChg chg="add del">
-          <ac:chgData name="Iker Joaquín" userId="acaffbe4a706a9d4" providerId="LiveId" clId="{D1DFD0CF-3B6A-4A93-9F8B-FF939B2F1C04}" dt="2026-01-02T15:47:10.307" v="588" actId="26606"/>
-          <ac:spMkLst>
-            <pc:docMk/>
-            <pc:sldMk cId="648425079" sldId="257"/>
-            <ac:spMk id="14" creationId="{55222F96-971A-4F90-B841-6BAB416C7AC1}"/>
-          </ac:spMkLst>
-        </pc:spChg>
-        <pc:spChg chg="add del">
-          <ac:chgData name="Iker Joaquín" userId="acaffbe4a706a9d4" providerId="LiveId" clId="{D1DFD0CF-3B6A-4A93-9F8B-FF939B2F1C04}" dt="2026-01-02T15:47:10.307" v="588" actId="26606"/>
-          <ac:spMkLst>
-            <pc:docMk/>
-            <pc:sldMk cId="648425079" sldId="257"/>
-            <ac:spMk id="16" creationId="{08980754-6F4B-43C9-B9BE-127B6BED6586}"/>
-          </ac:spMkLst>
-        </pc:spChg>
-        <pc:spChg chg="add del">
-          <ac:chgData name="Iker Joaquín" userId="acaffbe4a706a9d4" providerId="LiveId" clId="{D1DFD0CF-3B6A-4A93-9F8B-FF939B2F1C04}" dt="2026-01-02T15:47:10.307" v="588" actId="26606"/>
-          <ac:spMkLst>
-            <pc:docMk/>
-            <pc:sldMk cId="648425079" sldId="257"/>
-            <ac:spMk id="18" creationId="{2C1BBA94-3F40-40AA-8BB9-E69E25E537C1}"/>
-          </ac:spMkLst>
-        </pc:spChg>
-        <pc:spChg chg="add del">
-          <ac:chgData name="Iker Joaquín" userId="acaffbe4a706a9d4" providerId="LiveId" clId="{D1DFD0CF-3B6A-4A93-9F8B-FF939B2F1C04}" dt="2026-01-02T15:48:00.620" v="595" actId="26606"/>
-          <ac:spMkLst>
-            <pc:docMk/>
-            <pc:sldMk cId="648425079" sldId="257"/>
-            <ac:spMk id="20" creationId="{743AA782-23D1-4521-8CAD-47662984AA08}"/>
-          </ac:spMkLst>
-        </pc:spChg>
-        <pc:spChg chg="add del">
-          <ac:chgData name="Iker Joaquín" userId="acaffbe4a706a9d4" providerId="LiveId" clId="{D1DFD0CF-3B6A-4A93-9F8B-FF939B2F1C04}" dt="2026-01-02T15:48:00.620" v="595" actId="26606"/>
-          <ac:spMkLst>
-            <pc:docMk/>
-            <pc:sldMk cId="648425079" sldId="257"/>
-            <ac:spMk id="21" creationId="{71877DBC-BB60-40F0-AC93-2ACDBAAE60CE}"/>
-          </ac:spMkLst>
-        </pc:spChg>
-        <pc:spChg chg="add del">
-          <ac:chgData name="Iker Joaquín" userId="acaffbe4a706a9d4" providerId="LiveId" clId="{D1DFD0CF-3B6A-4A93-9F8B-FF939B2F1C04}" dt="2026-01-02T15:48:00.617" v="594" actId="26606"/>
-          <ac:spMkLst>
-            <pc:docMk/>
-            <pc:sldMk cId="648425079" sldId="257"/>
-            <ac:spMk id="26" creationId="{7FF47CB7-972F-479F-A36D-9E72D26EC8DA}"/>
-          </ac:spMkLst>
-        </pc:spChg>
-        <pc:spChg chg="add del">
-          <ac:chgData name="Iker Joaquín" userId="acaffbe4a706a9d4" providerId="LiveId" clId="{D1DFD0CF-3B6A-4A93-9F8B-FF939B2F1C04}" dt="2026-01-02T15:48:00.617" v="594" actId="26606"/>
-          <ac:spMkLst>
-            <pc:docMk/>
-            <pc:sldMk cId="648425079" sldId="257"/>
-            <ac:spMk id="28" creationId="{0D153B68-5844-490D-8E67-F616D6D721CA}"/>
-          </ac:spMkLst>
-        </pc:spChg>
-        <pc:spChg chg="add del">
-          <ac:chgData name="Iker Joaquín" userId="acaffbe4a706a9d4" providerId="LiveId" clId="{D1DFD0CF-3B6A-4A93-9F8B-FF939B2F1C04}" dt="2026-01-02T15:48:00.617" v="594" actId="26606"/>
-          <ac:spMkLst>
-            <pc:docMk/>
-            <pc:sldMk cId="648425079" sldId="257"/>
-            <ac:spMk id="30" creationId="{9A0D773F-7A7D-4DBB-9DEA-86BB8B8F4BC8}"/>
-          </ac:spMkLst>
-        </pc:spChg>
-        <pc:spChg chg="add">
-          <ac:chgData name="Iker Joaquín" userId="acaffbe4a706a9d4" providerId="LiveId" clId="{D1DFD0CF-3B6A-4A93-9F8B-FF939B2F1C04}" dt="2026-01-02T15:48:00.620" v="595" actId="26606"/>
-          <ac:spMkLst>
-            <pc:docMk/>
-            <pc:sldMk cId="648425079" sldId="257"/>
-            <ac:spMk id="32" creationId="{743AA782-23D1-4521-8CAD-47662984AA08}"/>
-          </ac:spMkLst>
-        </pc:spChg>
-        <pc:spChg chg="add">
-          <ac:chgData name="Iker Joaquín" userId="acaffbe4a706a9d4" providerId="LiveId" clId="{D1DFD0CF-3B6A-4A93-9F8B-FF939B2F1C04}" dt="2026-01-02T15:48:00.620" v="595" actId="26606"/>
-          <ac:spMkLst>
-            <pc:docMk/>
-            <pc:sldMk cId="648425079" sldId="257"/>
-            <ac:spMk id="33" creationId="{650D18FE-0824-4A46-B22C-A86B52E5780A}"/>
-          </ac:spMkLst>
-        </pc:spChg>
         <pc:picChg chg="add mod">
-          <ac:chgData name="Iker Joaquín" userId="acaffbe4a706a9d4" providerId="LiveId" clId="{D1DFD0CF-3B6A-4A93-9F8B-FF939B2F1C04}" dt="2026-01-02T15:48:04.979" v="597" actId="1076"/>
+          <ac:chgData name="Iker Joaquín" userId="acaffbe4a706a9d4" providerId="LiveId" clId="{D1DFD0CF-3B6A-4A93-9F8B-FF939B2F1C04}" dt="2026-01-07T19:31:19.658" v="1931" actId="14100"/>
           <ac:picMkLst>
             <pc:docMk/>
             <pc:sldMk cId="648425079" sldId="257"/>
             <ac:picMk id="5" creationId="{FBE88C5A-76C0-CA70-1F19-B652A1D7B555}"/>
           </ac:picMkLst>
         </pc:picChg>
-      </pc:sldChg>
-      <pc:sldChg chg="modSp add del mod">
-        <pc:chgData name="Iker Joaquín" userId="acaffbe4a706a9d4" providerId="LiveId" clId="{D1DFD0CF-3B6A-4A93-9F8B-FF939B2F1C04}" dt="2026-01-02T15:48:36.491" v="599" actId="47"/>
-        <pc:sldMkLst>
-          <pc:docMk/>
-          <pc:sldMk cId="2537118722" sldId="258"/>
-        </pc:sldMkLst>
-        <pc:spChg chg="mod">
-          <ac:chgData name="Iker Joaquín" userId="acaffbe4a706a9d4" providerId="LiveId" clId="{D1DFD0CF-3B6A-4A93-9F8B-FF939B2F1C04}" dt="2026-01-02T15:02:34.929" v="44" actId="20577"/>
-          <ac:spMkLst>
+        <pc:picChg chg="add">
+          <ac:chgData name="Iker Joaquín" userId="acaffbe4a706a9d4" providerId="LiveId" clId="{D1DFD0CF-3B6A-4A93-9F8B-FF939B2F1C04}" dt="2026-01-07T19:31:15.484" v="1929" actId="26606"/>
+          <ac:picMkLst>
             <pc:docMk/>
-            <pc:sldMk cId="2537118722" sldId="258"/>
-            <ac:spMk id="2" creationId="{1454FF2D-3A28-FBCC-1375-4C76C367281A}"/>
-          </ac:spMkLst>
-        </pc:spChg>
+            <pc:sldMk cId="648425079" sldId="257"/>
+            <ac:picMk id="10" creationId="{7724A564-BE2C-4188-AA55-E1F8840FFB13}"/>
+          </ac:picMkLst>
+        </pc:picChg>
       </pc:sldChg>
       <pc:sldChg chg="addSp delSp modSp add mod">
         <pc:chgData name="Iker Joaquín" userId="acaffbe4a706a9d4" providerId="LiveId" clId="{D1DFD0CF-3B6A-4A93-9F8B-FF939B2F1C04}" dt="2026-01-02T16:01:48.123" v="1180" actId="20577"/>
@@ -387,86 +237,6 @@
             <ac:spMk id="3" creationId="{904A46F4-5F3A-8047-7AD8-5EC66B448D1D}"/>
           </ac:spMkLst>
         </pc:spChg>
-        <pc:spChg chg="del">
-          <ac:chgData name="Iker Joaquín" userId="acaffbe4a706a9d4" providerId="LiveId" clId="{D1DFD0CF-3B6A-4A93-9F8B-FF939B2F1C04}" dt="2026-01-02T15:50:54.658" v="927" actId="26606"/>
-          <ac:spMkLst>
-            <pc:docMk/>
-            <pc:sldMk cId="1428783815" sldId="259"/>
-            <ac:spMk id="32" creationId="{4623E9C9-78BB-6FBF-BA33-14B1CAA6FE8E}"/>
-          </ac:spMkLst>
-        </pc:spChg>
-        <pc:spChg chg="del">
-          <ac:chgData name="Iker Joaquín" userId="acaffbe4a706a9d4" providerId="LiveId" clId="{D1DFD0CF-3B6A-4A93-9F8B-FF939B2F1C04}" dt="2026-01-02T15:50:54.658" v="927" actId="26606"/>
-          <ac:spMkLst>
-            <pc:docMk/>
-            <pc:sldMk cId="1428783815" sldId="259"/>
-            <ac:spMk id="33" creationId="{98E8229F-91E6-2786-C517-454E62CE061D}"/>
-          </ac:spMkLst>
-        </pc:spChg>
-        <pc:spChg chg="add del">
-          <ac:chgData name="Iker Joaquín" userId="acaffbe4a706a9d4" providerId="LiveId" clId="{D1DFD0CF-3B6A-4A93-9F8B-FF939B2F1C04}" dt="2026-01-02T15:51:37.432" v="945" actId="26606"/>
-          <ac:spMkLst>
-            <pc:docMk/>
-            <pc:sldMk cId="1428783815" sldId="259"/>
-            <ac:spMk id="38" creationId="{743AA782-23D1-4521-8CAD-47662984AA08}"/>
-          </ac:spMkLst>
-        </pc:spChg>
-        <pc:spChg chg="add del">
-          <ac:chgData name="Iker Joaquín" userId="acaffbe4a706a9d4" providerId="LiveId" clId="{D1DFD0CF-3B6A-4A93-9F8B-FF939B2F1C04}" dt="2026-01-02T15:51:37.432" v="945" actId="26606"/>
-          <ac:spMkLst>
-            <pc:docMk/>
-            <pc:sldMk cId="1428783815" sldId="259"/>
-            <ac:spMk id="40" creationId="{71877DBC-BB60-40F0-AC93-2ACDBAAE60CE}"/>
-          </ac:spMkLst>
-        </pc:spChg>
-        <pc:spChg chg="add del">
-          <ac:chgData name="Iker Joaquín" userId="acaffbe4a706a9d4" providerId="LiveId" clId="{D1DFD0CF-3B6A-4A93-9F8B-FF939B2F1C04}" dt="2026-01-02T15:51:37.432" v="945" actId="26606"/>
-          <ac:spMkLst>
-            <pc:docMk/>
-            <pc:sldMk cId="1428783815" sldId="259"/>
-            <ac:spMk id="46" creationId="{BACC6370-2D7E-4714-9D71-7542949D7D5D}"/>
-          </ac:spMkLst>
-        </pc:spChg>
-        <pc:spChg chg="add del">
-          <ac:chgData name="Iker Joaquín" userId="acaffbe4a706a9d4" providerId="LiveId" clId="{D1DFD0CF-3B6A-4A93-9F8B-FF939B2F1C04}" dt="2026-01-02T15:51:37.432" v="945" actId="26606"/>
-          <ac:spMkLst>
-            <pc:docMk/>
-            <pc:sldMk cId="1428783815" sldId="259"/>
-            <ac:spMk id="48" creationId="{F68B3F68-107C-434F-AA38-110D5EA91B85}"/>
-          </ac:spMkLst>
-        </pc:spChg>
-        <pc:spChg chg="add del">
-          <ac:chgData name="Iker Joaquín" userId="acaffbe4a706a9d4" providerId="LiveId" clId="{D1DFD0CF-3B6A-4A93-9F8B-FF939B2F1C04}" dt="2026-01-02T15:51:37.432" v="945" actId="26606"/>
-          <ac:spMkLst>
-            <pc:docMk/>
-            <pc:sldMk cId="1428783815" sldId="259"/>
-            <ac:spMk id="50" creationId="{AAD0DBB9-1A4B-4391-81D4-CB19F9AB918A}"/>
-          </ac:spMkLst>
-        </pc:spChg>
-        <pc:spChg chg="add del">
-          <ac:chgData name="Iker Joaquín" userId="acaffbe4a706a9d4" providerId="LiveId" clId="{D1DFD0CF-3B6A-4A93-9F8B-FF939B2F1C04}" dt="2026-01-02T15:51:37.432" v="945" actId="26606"/>
-          <ac:spMkLst>
-            <pc:docMk/>
-            <pc:sldMk cId="1428783815" sldId="259"/>
-            <ac:spMk id="52" creationId="{063BBA22-50EA-4C4D-BE05-F1CE4E63AA56}"/>
-          </ac:spMkLst>
-        </pc:spChg>
-        <pc:graphicFrameChg chg="add del">
-          <ac:chgData name="Iker Joaquín" userId="acaffbe4a706a9d4" providerId="LiveId" clId="{D1DFD0CF-3B6A-4A93-9F8B-FF939B2F1C04}" dt="2026-01-02T15:51:37.432" v="945" actId="26606"/>
-          <ac:graphicFrameMkLst>
-            <pc:docMk/>
-            <pc:sldMk cId="1428783815" sldId="259"/>
-            <ac:graphicFrameMk id="42" creationId="{FF2F0E07-5DDA-60DE-45EC-8BA75EDE7751}"/>
-          </ac:graphicFrameMkLst>
-        </pc:graphicFrameChg>
-        <pc:picChg chg="del mod">
-          <ac:chgData name="Iker Joaquín" userId="acaffbe4a706a9d4" providerId="LiveId" clId="{D1DFD0CF-3B6A-4A93-9F8B-FF939B2F1C04}" dt="2026-01-02T15:51:27.680" v="943" actId="478"/>
-          <ac:picMkLst>
-            <pc:docMk/>
-            <pc:sldMk cId="1428783815" sldId="259"/>
-            <ac:picMk id="5" creationId="{ACAF4CFA-5F04-FB94-7F34-BFBD23AEDBB0}"/>
-          </ac:picMkLst>
-        </pc:picChg>
         <pc:picChg chg="add mod">
           <ac:chgData name="Iker Joaquín" userId="acaffbe4a706a9d4" providerId="LiveId" clId="{D1DFD0CF-3B6A-4A93-9F8B-FF939B2F1C04}" dt="2026-01-02T15:59:57.411" v="950" actId="1076"/>
           <ac:picMkLst>
@@ -477,92 +247,68 @@
         </pc:picChg>
       </pc:sldChg>
       <pc:sldChg chg="addSp delSp modSp add mod setBg delDesignElem">
-        <pc:chgData name="Iker Joaquín" userId="acaffbe4a706a9d4" providerId="LiveId" clId="{D1DFD0CF-3B6A-4A93-9F8B-FF939B2F1C04}" dt="2026-01-02T16:17:36.106" v="1808" actId="1076"/>
+        <pc:chgData name="Iker Joaquín" userId="acaffbe4a706a9d4" providerId="LiveId" clId="{D1DFD0CF-3B6A-4A93-9F8B-FF939B2F1C04}" dt="2026-01-07T19:31:27.754" v="1932" actId="26606"/>
         <pc:sldMkLst>
           <pc:docMk/>
           <pc:sldMk cId="1693471688" sldId="260"/>
         </pc:sldMkLst>
         <pc:spChg chg="mod">
-          <ac:chgData name="Iker Joaquín" userId="acaffbe4a706a9d4" providerId="LiveId" clId="{D1DFD0CF-3B6A-4A93-9F8B-FF939B2F1C04}" dt="2026-01-02T16:17:25.260" v="1805" actId="26606"/>
+          <ac:chgData name="Iker Joaquín" userId="acaffbe4a706a9d4" providerId="LiveId" clId="{D1DFD0CF-3B6A-4A93-9F8B-FF939B2F1C04}" dt="2026-01-07T19:31:27.754" v="1932" actId="26606"/>
           <ac:spMkLst>
             <pc:docMk/>
             <pc:sldMk cId="1693471688" sldId="260"/>
             <ac:spMk id="2" creationId="{4244D783-E63C-0F9B-BE3D-8C8414FFF3B7}"/>
           </ac:spMkLst>
         </pc:spChg>
-        <pc:spChg chg="mod">
-          <ac:chgData name="Iker Joaquín" userId="acaffbe4a706a9d4" providerId="LiveId" clId="{D1DFD0CF-3B6A-4A93-9F8B-FF939B2F1C04}" dt="2026-01-02T16:17:25.260" v="1805" actId="26606"/>
+        <pc:spChg chg="add del mod">
+          <ac:chgData name="Iker Joaquín" userId="acaffbe4a706a9d4" providerId="LiveId" clId="{D1DFD0CF-3B6A-4A93-9F8B-FF939B2F1C04}" dt="2026-01-07T19:31:27.754" v="1932" actId="26606"/>
           <ac:spMkLst>
             <pc:docMk/>
             <pc:sldMk cId="1693471688" sldId="260"/>
             <ac:spMk id="3" creationId="{ADEC5E53-9844-16DF-46F8-30A6E8DD1804}"/>
           </ac:spMkLst>
         </pc:spChg>
-        <pc:spChg chg="add">
-          <ac:chgData name="Iker Joaquín" userId="acaffbe4a706a9d4" providerId="LiveId" clId="{D1DFD0CF-3B6A-4A93-9F8B-FF939B2F1C04}" dt="2026-01-02T16:17:25.260" v="1805" actId="26606"/>
-          <ac:spMkLst>
-            <pc:docMk/>
-            <pc:sldMk cId="1693471688" sldId="260"/>
-            <ac:spMk id="13" creationId="{352BEC0E-22F8-46D0-9632-375DB541B06C}"/>
-          </ac:spMkLst>
-        </pc:spChg>
-        <pc:spChg chg="add">
-          <ac:chgData name="Iker Joaquín" userId="acaffbe4a706a9d4" providerId="LiveId" clId="{D1DFD0CF-3B6A-4A93-9F8B-FF939B2F1C04}" dt="2026-01-02T16:17:25.260" v="1805" actId="26606"/>
-          <ac:spMkLst>
-            <pc:docMk/>
-            <pc:sldMk cId="1693471688" sldId="260"/>
-            <ac:spMk id="15" creationId="{3FCFB1DE-0B7E-48CC-BA90-B2AB0889F9D6}"/>
-          </ac:spMkLst>
-        </pc:spChg>
-        <pc:spChg chg="del">
-          <ac:chgData name="Iker Joaquín" userId="acaffbe4a706a9d4" providerId="LiveId" clId="{D1DFD0CF-3B6A-4A93-9F8B-FF939B2F1C04}" dt="2026-01-02T16:03:15.862" v="1182"/>
-          <ac:spMkLst>
-            <pc:docMk/>
-            <pc:sldMk cId="1693471688" sldId="260"/>
-            <ac:spMk id="32" creationId="{CD8CBA0B-D44D-96D9-47C0-83E7CAA337EC}"/>
-          </ac:spMkLst>
-        </pc:spChg>
-        <pc:spChg chg="del">
-          <ac:chgData name="Iker Joaquín" userId="acaffbe4a706a9d4" providerId="LiveId" clId="{D1DFD0CF-3B6A-4A93-9F8B-FF939B2F1C04}" dt="2026-01-02T16:03:15.862" v="1182"/>
-          <ac:spMkLst>
-            <pc:docMk/>
-            <pc:sldMk cId="1693471688" sldId="260"/>
-            <ac:spMk id="33" creationId="{ED749DBA-461F-A0B6-67ED-0938EC06F70B}"/>
-          </ac:spMkLst>
-        </pc:spChg>
-        <pc:picChg chg="del">
-          <ac:chgData name="Iker Joaquín" userId="acaffbe4a706a9d4" providerId="LiveId" clId="{D1DFD0CF-3B6A-4A93-9F8B-FF939B2F1C04}" dt="2026-01-02T16:16:05.676" v="1769" actId="478"/>
+        <pc:picChg chg="add del mod">
+          <ac:chgData name="Iker Joaquín" userId="acaffbe4a706a9d4" providerId="LiveId" clId="{D1DFD0CF-3B6A-4A93-9F8B-FF939B2F1C04}" dt="2026-01-07T19:29:50.463" v="1899" actId="22"/>
           <ac:picMkLst>
             <pc:docMk/>
             <pc:sldMk cId="1693471688" sldId="260"/>
-            <ac:picMk id="5" creationId="{FED166B1-1257-48CF-0C74-7CDF34CAB3FA}"/>
+            <ac:picMk id="5" creationId="{56050FE1-5576-593A-9DC5-7FCADD4A82F8}"/>
           </ac:picMkLst>
         </pc:picChg>
         <pc:picChg chg="add mod">
-          <ac:chgData name="Iker Joaquín" userId="acaffbe4a706a9d4" providerId="LiveId" clId="{D1DFD0CF-3B6A-4A93-9F8B-FF939B2F1C04}" dt="2026-01-02T16:17:25.260" v="1805" actId="26606"/>
+          <ac:chgData name="Iker Joaquín" userId="acaffbe4a706a9d4" providerId="LiveId" clId="{D1DFD0CF-3B6A-4A93-9F8B-FF939B2F1C04}" dt="2026-01-07T19:31:27.754" v="1932" actId="26606"/>
           <ac:picMkLst>
             <pc:docMk/>
             <pc:sldMk cId="1693471688" sldId="260"/>
             <ac:picMk id="6" creationId="{5AF782F3-3471-5D94-42D3-EB82D0872B8A}"/>
           </ac:picMkLst>
         </pc:picChg>
-        <pc:picChg chg="add mod">
-          <ac:chgData name="Iker Joaquín" userId="acaffbe4a706a9d4" providerId="LiveId" clId="{D1DFD0CF-3B6A-4A93-9F8B-FF939B2F1C04}" dt="2026-01-02T16:17:36.106" v="1808" actId="1076"/>
+        <pc:picChg chg="add del mod">
+          <ac:chgData name="Iker Joaquín" userId="acaffbe4a706a9d4" providerId="LiveId" clId="{D1DFD0CF-3B6A-4A93-9F8B-FF939B2F1C04}" dt="2026-01-07T19:29:08.417" v="1882" actId="478"/>
           <ac:picMkLst>
             <pc:docMk/>
             <pc:sldMk cId="1693471688" sldId="260"/>
             <ac:picMk id="8" creationId="{C08C081E-6687-7FC9-07B6-5A19C24E4E5A}"/>
           </ac:picMkLst>
         </pc:picChg>
+        <pc:picChg chg="add">
+          <ac:chgData name="Iker Joaquín" userId="acaffbe4a706a9d4" providerId="LiveId" clId="{D1DFD0CF-3B6A-4A93-9F8B-FF939B2F1C04}" dt="2026-01-07T19:31:27.754" v="1932" actId="26606"/>
+          <ac:picMkLst>
+            <pc:docMk/>
+            <pc:sldMk cId="1693471688" sldId="260"/>
+            <ac:picMk id="11" creationId="{7724A564-BE2C-4188-AA55-E1F8840FFB13}"/>
+          </ac:picMkLst>
+        </pc:picChg>
       </pc:sldChg>
       <pc:sldChg chg="addSp delSp modSp add mod setBg delDesignElem">
-        <pc:chgData name="Iker Joaquín" userId="acaffbe4a706a9d4" providerId="LiveId" clId="{D1DFD0CF-3B6A-4A93-9F8B-FF939B2F1C04}" dt="2026-01-02T16:32:26.172" v="1831" actId="1076"/>
+        <pc:chgData name="Iker Joaquín" userId="acaffbe4a706a9d4" providerId="LiveId" clId="{D1DFD0CF-3B6A-4A93-9F8B-FF939B2F1C04}" dt="2026-01-07T19:31:38.055" v="1946" actId="20577"/>
         <pc:sldMkLst>
           <pc:docMk/>
           <pc:sldMk cId="421348256" sldId="261"/>
         </pc:sldMkLst>
         <pc:spChg chg="mod">
-          <ac:chgData name="Iker Joaquín" userId="acaffbe4a706a9d4" providerId="LiveId" clId="{D1DFD0CF-3B6A-4A93-9F8B-FF939B2F1C04}" dt="2026-01-02T16:32:06.440" v="1819" actId="26606"/>
+          <ac:chgData name="Iker Joaquín" userId="acaffbe4a706a9d4" providerId="LiveId" clId="{D1DFD0CF-3B6A-4A93-9F8B-FF939B2F1C04}" dt="2026-01-07T19:31:38.055" v="1946" actId="20577"/>
           <ac:spMkLst>
             <pc:docMk/>
             <pc:sldMk cId="421348256" sldId="261"/>
@@ -570,59 +316,90 @@
           </ac:spMkLst>
         </pc:spChg>
         <pc:spChg chg="mod">
-          <ac:chgData name="Iker Joaquín" userId="acaffbe4a706a9d4" providerId="LiveId" clId="{D1DFD0CF-3B6A-4A93-9F8B-FF939B2F1C04}" dt="2026-01-02T16:32:17.339" v="1827" actId="27636"/>
+          <ac:chgData name="Iker Joaquín" userId="acaffbe4a706a9d4" providerId="LiveId" clId="{D1DFD0CF-3B6A-4A93-9F8B-FF939B2F1C04}" dt="2026-01-07T19:30:58.747" v="1925" actId="26606"/>
           <ac:spMkLst>
             <pc:docMk/>
             <pc:sldMk cId="421348256" sldId="261"/>
             <ac:spMk id="3" creationId="{98E6E1CF-5DBB-B309-6D09-BE14D4EBA029}"/>
           </ac:spMkLst>
         </pc:spChg>
-        <pc:spChg chg="add">
-          <ac:chgData name="Iker Joaquín" userId="acaffbe4a706a9d4" providerId="LiveId" clId="{D1DFD0CF-3B6A-4A93-9F8B-FF939B2F1C04}" dt="2026-01-02T16:32:06.440" v="1819" actId="26606"/>
-          <ac:spMkLst>
-            <pc:docMk/>
-            <pc:sldMk cId="421348256" sldId="261"/>
-            <ac:spMk id="10" creationId="{743AA782-23D1-4521-8CAD-47662984AA08}"/>
-          </ac:spMkLst>
-        </pc:spChg>
-        <pc:spChg chg="add">
-          <ac:chgData name="Iker Joaquín" userId="acaffbe4a706a9d4" providerId="LiveId" clId="{D1DFD0CF-3B6A-4A93-9F8B-FF939B2F1C04}" dt="2026-01-02T16:32:06.440" v="1819" actId="26606"/>
-          <ac:spMkLst>
-            <pc:docMk/>
-            <pc:sldMk cId="421348256" sldId="261"/>
-            <ac:spMk id="12" creationId="{71877DBC-BB60-40F0-AC93-2ACDBAAE60CE}"/>
-          </ac:spMkLst>
-        </pc:spChg>
-        <pc:spChg chg="del">
-          <ac:chgData name="Iker Joaquín" userId="acaffbe4a706a9d4" providerId="LiveId" clId="{D1DFD0CF-3B6A-4A93-9F8B-FF939B2F1C04}" dt="2026-01-02T16:03:20.895" v="1184"/>
-          <ac:spMkLst>
-            <pc:docMk/>
-            <pc:sldMk cId="421348256" sldId="261"/>
-            <ac:spMk id="38" creationId="{0DF7555C-B374-7C71-8CF4-9DCC050FA492}"/>
-          </ac:spMkLst>
-        </pc:spChg>
-        <pc:spChg chg="del">
-          <ac:chgData name="Iker Joaquín" userId="acaffbe4a706a9d4" providerId="LiveId" clId="{D1DFD0CF-3B6A-4A93-9F8B-FF939B2F1C04}" dt="2026-01-02T16:03:20.895" v="1184"/>
-          <ac:spMkLst>
-            <pc:docMk/>
-            <pc:sldMk cId="421348256" sldId="261"/>
-            <ac:spMk id="40" creationId="{F85FAB04-3CB1-C598-BA0D-4DC35372D05F}"/>
-          </ac:spMkLst>
-        </pc:spChg>
-        <pc:picChg chg="add mod">
-          <ac:chgData name="Iker Joaquín" userId="acaffbe4a706a9d4" providerId="LiveId" clId="{D1DFD0CF-3B6A-4A93-9F8B-FF939B2F1C04}" dt="2026-01-02T16:32:26.172" v="1831" actId="1076"/>
+        <pc:picChg chg="add del mod">
+          <ac:chgData name="Iker Joaquín" userId="acaffbe4a706a9d4" providerId="LiveId" clId="{D1DFD0CF-3B6A-4A93-9F8B-FF939B2F1C04}" dt="2026-01-07T19:30:33.414" v="1920" actId="478"/>
           <ac:picMkLst>
             <pc:docMk/>
             <pc:sldMk cId="421348256" sldId="261"/>
             <ac:picMk id="5" creationId="{11284E59-AD43-F674-F05D-545433E2CCA9}"/>
           </ac:picMkLst>
         </pc:picChg>
-        <pc:picChg chg="del">
-          <ac:chgData name="Iker Joaquín" userId="acaffbe4a706a9d4" providerId="LiveId" clId="{D1DFD0CF-3B6A-4A93-9F8B-FF939B2F1C04}" dt="2026-01-02T16:17:44.432" v="1809" actId="478"/>
+        <pc:picChg chg="add mod">
+          <ac:chgData name="Iker Joaquín" userId="acaffbe4a706a9d4" providerId="LiveId" clId="{D1DFD0CF-3B6A-4A93-9F8B-FF939B2F1C04}" dt="2026-01-07T19:31:11.164" v="1928" actId="1076"/>
           <ac:picMkLst>
             <pc:docMk/>
             <pc:sldMk cId="421348256" sldId="261"/>
-            <ac:picMk id="6" creationId="{4B35EA53-1302-E6A2-6B2E-2087A5FA5990}"/>
+            <ac:picMk id="6" creationId="{BAC98227-B575-4827-3DC5-DEDE27122F89}"/>
+          </ac:picMkLst>
+        </pc:picChg>
+        <pc:picChg chg="add">
+          <ac:chgData name="Iker Joaquín" userId="acaffbe4a706a9d4" providerId="LiveId" clId="{D1DFD0CF-3B6A-4A93-9F8B-FF939B2F1C04}" dt="2026-01-07T19:30:58.747" v="1925" actId="26606"/>
+          <ac:picMkLst>
+            <pc:docMk/>
+            <pc:sldMk cId="421348256" sldId="261"/>
+            <ac:picMk id="11" creationId="{7724A564-BE2C-4188-AA55-E1F8840FFB13}"/>
+          </ac:picMkLst>
+        </pc:picChg>
+      </pc:sldChg>
+      <pc:sldChg chg="addSp delSp modSp add mod ord">
+        <pc:chgData name="Iker Joaquín" userId="acaffbe4a706a9d4" providerId="LiveId" clId="{D1DFD0CF-3B6A-4A93-9F8B-FF939B2F1C04}" dt="2026-01-07T19:41:14.485" v="1994" actId="20577"/>
+        <pc:sldMkLst>
+          <pc:docMk/>
+          <pc:sldMk cId="2126189352" sldId="287"/>
+        </pc:sldMkLst>
+        <pc:spChg chg="mod">
+          <ac:chgData name="Iker Joaquín" userId="acaffbe4a706a9d4" providerId="LiveId" clId="{D1DFD0CF-3B6A-4A93-9F8B-FF939B2F1C04}" dt="2026-01-07T19:41:14.485" v="1994" actId="20577"/>
+          <ac:spMkLst>
+            <pc:docMk/>
+            <pc:sldMk cId="2126189352" sldId="287"/>
+            <ac:spMk id="2" creationId="{0B8CB2DA-4B2A-5908-5F1A-36A6E4A2E1E7}"/>
+          </ac:spMkLst>
+        </pc:spChg>
+        <pc:spChg chg="mod">
+          <ac:chgData name="Iker Joaquín" userId="acaffbe4a706a9d4" providerId="LiveId" clId="{D1DFD0CF-3B6A-4A93-9F8B-FF939B2F1C04}" dt="2026-01-07T19:40:56.566" v="1977" actId="26606"/>
+          <ac:spMkLst>
+            <pc:docMk/>
+            <pc:sldMk cId="2126189352" sldId="287"/>
+            <ac:spMk id="3" creationId="{A7ECEE4E-23E6-276A-0CC1-FC0D138581F2}"/>
+          </ac:spMkLst>
+        </pc:spChg>
+        <pc:picChg chg="add mod">
+          <ac:chgData name="Iker Joaquín" userId="acaffbe4a706a9d4" providerId="LiveId" clId="{D1DFD0CF-3B6A-4A93-9F8B-FF939B2F1C04}" dt="2026-01-07T19:41:07.456" v="1981" actId="14100"/>
+          <ac:picMkLst>
+            <pc:docMk/>
+            <pc:sldMk cId="2126189352" sldId="287"/>
+            <ac:picMk id="5" creationId="{E95A1131-E749-8097-57E0-C56AA78B70C7}"/>
+          </ac:picMkLst>
+        </pc:picChg>
+        <pc:picChg chg="del">
+          <ac:chgData name="Iker Joaquín" userId="acaffbe4a706a9d4" providerId="LiveId" clId="{D1DFD0CF-3B6A-4A93-9F8B-FF939B2F1C04}" dt="2026-01-07T19:40:52.209" v="1973" actId="478"/>
+          <ac:picMkLst>
+            <pc:docMk/>
+            <pc:sldMk cId="2126189352" sldId="287"/>
+            <ac:picMk id="6" creationId="{4017AD12-BF33-F27D-6A2A-89E15E0DBECA}"/>
+          </ac:picMkLst>
+        </pc:picChg>
+        <pc:picChg chg="del">
+          <ac:chgData name="Iker Joaquín" userId="acaffbe4a706a9d4" providerId="LiveId" clId="{D1DFD0CF-3B6A-4A93-9F8B-FF939B2F1C04}" dt="2026-01-07T19:40:56.566" v="1977" actId="26606"/>
+          <ac:picMkLst>
+            <pc:docMk/>
+            <pc:sldMk cId="2126189352" sldId="287"/>
+            <ac:picMk id="11" creationId="{DCE49F08-F3F1-37F7-325D-7AD5D539A3E0}"/>
+          </ac:picMkLst>
+        </pc:picChg>
+        <pc:picChg chg="add">
+          <ac:chgData name="Iker Joaquín" userId="acaffbe4a706a9d4" providerId="LiveId" clId="{D1DFD0CF-3B6A-4A93-9F8B-FF939B2F1C04}" dt="2026-01-07T19:40:56.566" v="1977" actId="26606"/>
+          <ac:picMkLst>
+            <pc:docMk/>
+            <pc:sldMk cId="2126189352" sldId="287"/>
+            <ac:picMk id="16" creationId="{7724A564-BE2C-4188-AA55-E1F8840FFB13}"/>
           </ac:picMkLst>
         </pc:picChg>
       </pc:sldChg>
@@ -1095,7 +872,7 @@
           <a:p>
             <a:fld id="{44806F1A-BC72-4B4D-B94E-9BE432BE5415}" type="slidenum">
               <a:rPr lang="es-ES" smtClean="0"/>
-              <a:t>‹#›</a:t>
+              <a:t>‹Nº›</a:t>
             </a:fld>
             <a:endParaRPr lang="es-ES"/>
           </a:p>
@@ -1515,7 +1292,7 @@
           <a:p>
             <a:fld id="{5CDF74C9-6FB5-4621-B7DC-E9E2DB2ABB0E}" type="slidenum">
               <a:rPr lang="es-ES" smtClean="0"/>
-              <a:t>‹#›</a:t>
+              <a:t>‹Nº›</a:t>
             </a:fld>
             <a:endParaRPr lang="es-ES"/>
           </a:p>
@@ -1813,7 +1590,7 @@
           <a:p>
             <a:fld id="{5CDF74C9-6FB5-4621-B7DC-E9E2DB2ABB0E}" type="slidenum">
               <a:rPr lang="es-ES" smtClean="0"/>
-              <a:t>‹#›</a:t>
+              <a:t>‹Nº›</a:t>
             </a:fld>
             <a:endParaRPr lang="es-ES"/>
           </a:p>
@@ -2005,7 +1782,7 @@
           <a:p>
             <a:fld id="{5CDF74C9-6FB5-4621-B7DC-E9E2DB2ABB0E}" type="slidenum">
               <a:rPr lang="es-ES" smtClean="0"/>
-              <a:t>‹#›</a:t>
+              <a:t>‹Nº›</a:t>
             </a:fld>
             <a:endParaRPr lang="es-ES"/>
           </a:p>
@@ -2266,7 +2043,7 @@
           <a:p>
             <a:fld id="{5CDF74C9-6FB5-4621-B7DC-E9E2DB2ABB0E}" type="slidenum">
               <a:rPr lang="es-ES" smtClean="0"/>
-              <a:t>‹#›</a:t>
+              <a:t>‹Nº›</a:t>
             </a:fld>
             <a:endParaRPr lang="es-ES"/>
           </a:p>
@@ -2690,7 +2467,7 @@
           <a:p>
             <a:fld id="{5CDF74C9-6FB5-4621-B7DC-E9E2DB2ABB0E}" type="slidenum">
               <a:rPr lang="es-ES" smtClean="0"/>
-              <a:t>‹#›</a:t>
+              <a:t>‹Nº›</a:t>
             </a:fld>
             <a:endParaRPr lang="es-ES"/>
           </a:p>
@@ -3227,7 +3004,7 @@
           <a:p>
             <a:fld id="{5CDF74C9-6FB5-4621-B7DC-E9E2DB2ABB0E}" type="slidenum">
               <a:rPr lang="es-ES" smtClean="0"/>
-              <a:t>‹#›</a:t>
+              <a:t>‹Nº›</a:t>
             </a:fld>
             <a:endParaRPr lang="es-ES"/>
           </a:p>
@@ -4091,7 +3868,7 @@
           <a:p>
             <a:fld id="{5CDF74C9-6FB5-4621-B7DC-E9E2DB2ABB0E}" type="slidenum">
               <a:rPr lang="es-ES" smtClean="0"/>
-              <a:t>‹#›</a:t>
+              <a:t>‹Nº›</a:t>
             </a:fld>
             <a:endParaRPr lang="es-ES"/>
           </a:p>
@@ -4261,7 +4038,7 @@
           <a:p>
             <a:fld id="{5CDF74C9-6FB5-4621-B7DC-E9E2DB2ABB0E}" type="slidenum">
               <a:rPr lang="es-ES" smtClean="0"/>
-              <a:t>‹#›</a:t>
+              <a:t>‹Nº›</a:t>
             </a:fld>
             <a:endParaRPr lang="es-ES"/>
           </a:p>
@@ -4445,7 +4222,7 @@
           <a:p>
             <a:fld id="{5CDF74C9-6FB5-4621-B7DC-E9E2DB2ABB0E}" type="slidenum">
               <a:rPr lang="es-ES" smtClean="0"/>
-              <a:t>‹#›</a:t>
+              <a:t>‹Nº›</a:t>
             </a:fld>
             <a:endParaRPr lang="es-ES"/>
           </a:p>
@@ -4615,7 +4392,7 @@
           <a:p>
             <a:fld id="{5CDF74C9-6FB5-4621-B7DC-E9E2DB2ABB0E}" type="slidenum">
               <a:rPr lang="es-ES" smtClean="0"/>
-              <a:t>‹#›</a:t>
+              <a:t>‹Nº›</a:t>
             </a:fld>
             <a:endParaRPr lang="es-ES"/>
           </a:p>
@@ -4859,7 +4636,7 @@
           <a:p>
             <a:fld id="{5CDF74C9-6FB5-4621-B7DC-E9E2DB2ABB0E}" type="slidenum">
               <a:rPr lang="es-ES" smtClean="0"/>
-              <a:t>‹#›</a:t>
+              <a:t>‹Nº›</a:t>
             </a:fld>
             <a:endParaRPr lang="es-ES"/>
           </a:p>
@@ -5095,7 +4872,7 @@
           <a:p>
             <a:fld id="{5CDF74C9-6FB5-4621-B7DC-E9E2DB2ABB0E}" type="slidenum">
               <a:rPr lang="es-ES" smtClean="0"/>
-              <a:t>‹#›</a:t>
+              <a:t>‹Nº›</a:t>
             </a:fld>
             <a:endParaRPr lang="es-ES"/>
           </a:p>
@@ -5561,7 +5338,7 @@
           <a:p>
             <a:fld id="{5CDF74C9-6FB5-4621-B7DC-E9E2DB2ABB0E}" type="slidenum">
               <a:rPr lang="es-ES" smtClean="0"/>
-              <a:t>‹#›</a:t>
+              <a:t>‹Nº›</a:t>
             </a:fld>
             <a:endParaRPr lang="es-ES"/>
           </a:p>
@@ -5679,7 +5456,7 @@
           <a:p>
             <a:fld id="{5CDF74C9-6FB5-4621-B7DC-E9E2DB2ABB0E}" type="slidenum">
               <a:rPr lang="es-ES" smtClean="0"/>
-              <a:t>‹#›</a:t>
+              <a:t>‹Nº›</a:t>
             </a:fld>
             <a:endParaRPr lang="es-ES"/>
           </a:p>
@@ -5774,7 +5551,7 @@
           <a:p>
             <a:fld id="{5CDF74C9-6FB5-4621-B7DC-E9E2DB2ABB0E}" type="slidenum">
               <a:rPr lang="es-ES" smtClean="0"/>
-              <a:t>‹#›</a:t>
+              <a:t>‹Nº›</a:t>
             </a:fld>
             <a:endParaRPr lang="es-ES"/>
           </a:p>
@@ -6029,7 +5806,7 @@
           <a:p>
             <a:fld id="{5CDF74C9-6FB5-4621-B7DC-E9E2DB2ABB0E}" type="slidenum">
               <a:rPr lang="es-ES" smtClean="0"/>
-              <a:t>‹#›</a:t>
+              <a:t>‹Nº›</a:t>
             </a:fld>
             <a:endParaRPr lang="es-ES"/>
           </a:p>
@@ -6329,7 +6106,7 @@
           <a:p>
             <a:fld id="{5CDF74C9-6FB5-4621-B7DC-E9E2DB2ABB0E}" type="slidenum">
               <a:rPr lang="es-ES" smtClean="0"/>
-              <a:t>‹#›</a:t>
+              <a:t>‹Nº›</a:t>
             </a:fld>
             <a:endParaRPr lang="es-ES"/>
           </a:p>
@@ -6613,7 +6390,7 @@
           <a:p>
             <a:fld id="{5CDF74C9-6FB5-4621-B7DC-E9E2DB2ABB0E}" type="slidenum">
               <a:rPr lang="es-ES" smtClean="0"/>
-              <a:t>‹#›</a:t>
+              <a:t>‹Nº›</a:t>
             </a:fld>
             <a:endParaRPr lang="es-ES"/>
           </a:p>
@@ -7337,6 +7114,100 @@
   <p:cSld>
     <p:spTree>
       <p:nvGrpSpPr>
+        <p:cNvPr id="1" name=""/>
+        <p:cNvGrpSpPr/>
+        <p:nvPr/>
+      </p:nvGrpSpPr>
+      <p:grpSpPr>
+        <a:xfrm>
+          <a:off x="0" y="0"/>
+          <a:ext cx="0" cy="0"/>
+          <a:chOff x="0" y="0"/>
+          <a:chExt cx="0" cy="0"/>
+        </a:xfrm>
+      </p:grpSpPr>
+      <p:sp>
+        <p:nvSpPr>
+          <p:cNvPr id="2" name="Title 1">
+            <a:extLst>
+              <a:ext uri="{FF2B5EF4-FFF2-40B4-BE49-F238E27FC236}">
+                <a16:creationId xmlns:a16="http://schemas.microsoft.com/office/drawing/2014/main" id="{9300C51F-749D-800C-7CAA-218B24BBBA95}"/>
+              </a:ext>
+            </a:extLst>
+          </p:cNvPr>
+          <p:cNvSpPr>
+            <a:spLocks noGrp="1"/>
+          </p:cNvSpPr>
+          <p:nvPr>
+            <p:ph type="title"/>
+          </p:nvPr>
+        </p:nvSpPr>
+        <p:spPr/>
+        <p:txBody>
+          <a:bodyPr/>
+          <a:lstStyle/>
+          <a:p>
+            <a:r>
+              <a:rPr lang="en-US" dirty="0"/>
+              <a:t>a</a:t>
+            </a:r>
+            <a:endParaRPr lang="en-ZM" dirty="0"/>
+          </a:p>
+        </p:txBody>
+      </p:sp>
+      <p:pic>
+        <p:nvPicPr>
+          <p:cNvPr id="7" name="Content Placeholder 6">
+            <a:extLst>
+              <a:ext uri="{FF2B5EF4-FFF2-40B4-BE49-F238E27FC236}">
+                <a16:creationId xmlns:a16="http://schemas.microsoft.com/office/drawing/2014/main" id="{B5A44C1D-0D38-1327-7B27-84A9FCA7EDDE}"/>
+              </a:ext>
+            </a:extLst>
+          </p:cNvPr>
+          <p:cNvPicPr>
+            <a:picLocks noGrp="1" noChangeAspect="1"/>
+          </p:cNvPicPr>
+          <p:nvPr>
+            <p:ph idx="1"/>
+          </p:nvPr>
+        </p:nvPicPr>
+        <p:blipFill>
+          <a:blip r:embed="rId2">
+            <a:extLst>
+              <a:ext uri="{28A0092B-C50C-407E-A947-70E740481C1C}">
+                <a14:useLocalDpi xmlns:a14="http://schemas.microsoft.com/office/drawing/2010/main" val="0"/>
+              </a:ext>
+            </a:extLst>
+          </a:blip>
+          <a:stretch>
+            <a:fillRect/>
+          </a:stretch>
+        </p:blipFill>
+        <p:spPr>
+          <a:xfrm>
+            <a:off x="0" y="402771"/>
+            <a:ext cx="12192000" cy="5845629"/>
+          </a:xfrm>
+        </p:spPr>
+      </p:pic>
+    </p:spTree>
+    <p:extLst>
+      <p:ext uri="{BB962C8B-B14F-4D97-AF65-F5344CB8AC3E}">
+        <p14:creationId xmlns:p14="http://schemas.microsoft.com/office/powerpoint/2010/main" val="1818847291"/>
+      </p:ext>
+    </p:extLst>
+  </p:cSld>
+  <p:clrMapOvr>
+    <a:masterClrMapping/>
+  </p:clrMapOvr>
+</p:sld>
+</file>
+
+<file path=ppt/slides/slide11.xml><?xml version="1.0" encoding="utf-8"?>
+<p:sld xmlns:a="http://schemas.openxmlformats.org/drawingml/2006/main" xmlns:r="http://schemas.openxmlformats.org/officeDocument/2006/relationships" xmlns:p="http://schemas.openxmlformats.org/presentationml/2006/main">
+  <p:cSld>
+    <p:spTree>
+      <p:nvGrpSpPr>
         <p:cNvPr id="1" name="">
           <a:extLst>
             <a:ext uri="{FF2B5EF4-FFF2-40B4-BE49-F238E27FC236}">
@@ -7462,7 +7333,7 @@
 </p:sld>
 </file>
 
-<file path=ppt/slides/slide11.xml><?xml version="1.0" encoding="utf-8"?>
+<file path=ppt/slides/slide12.xml><?xml version="1.0" encoding="utf-8"?>
 <p:sld xmlns:a="http://schemas.openxmlformats.org/drawingml/2006/main" xmlns:r="http://schemas.openxmlformats.org/officeDocument/2006/relationships" xmlns:p="http://schemas.openxmlformats.org/presentationml/2006/main">
   <p:cSld>
     <p:spTree>
@@ -7716,7 +7587,7 @@
 </p:sld>
 </file>
 
-<file path=ppt/slides/slide12.xml><?xml version="1.0" encoding="utf-8"?>
+<file path=ppt/slides/slide13.xml><?xml version="1.0" encoding="utf-8"?>
 <p:sld xmlns:a="http://schemas.openxmlformats.org/drawingml/2006/main" xmlns:r="http://schemas.openxmlformats.org/officeDocument/2006/relationships" xmlns:p="http://schemas.openxmlformats.org/presentationml/2006/main">
   <p:cSld>
     <p:spTree>
@@ -7806,7 +7677,7 @@
 </p:sld>
 </file>
 
-<file path=ppt/slides/slide13.xml><?xml version="1.0" encoding="utf-8"?>
+<file path=ppt/slides/slide14.xml><?xml version="1.0" encoding="utf-8"?>
 <p:sld xmlns:a="http://schemas.openxmlformats.org/drawingml/2006/main" xmlns:r="http://schemas.openxmlformats.org/officeDocument/2006/relationships" xmlns:p="http://schemas.openxmlformats.org/presentationml/2006/main">
   <p:cSld>
     <p:spTree>
@@ -7895,7 +7766,7 @@
 </p:sld>
 </file>
 
-<file path=ppt/slides/slide14.xml><?xml version="1.0" encoding="utf-8"?>
+<file path=ppt/slides/slide15.xml><?xml version="1.0" encoding="utf-8"?>
 <p:sld xmlns:a="http://schemas.openxmlformats.org/drawingml/2006/main" xmlns:r="http://schemas.openxmlformats.org/officeDocument/2006/relationships" xmlns:p="http://schemas.openxmlformats.org/presentationml/2006/main">
   <p:cSld>
     <p:spTree>
@@ -7984,7 +7855,7 @@
 </p:sld>
 </file>
 
-<file path=ppt/slides/slide15.xml><?xml version="1.0" encoding="utf-8"?>
+<file path=ppt/slides/slide16.xml><?xml version="1.0" encoding="utf-8"?>
 <p:sld xmlns:a="http://schemas.openxmlformats.org/drawingml/2006/main" xmlns:r="http://schemas.openxmlformats.org/officeDocument/2006/relationships" xmlns:p="http://schemas.openxmlformats.org/presentationml/2006/main">
   <p:cSld>
     <p:bg>
@@ -8395,7 +8266,7 @@
 </p:sld>
 </file>
 
-<file path=ppt/slides/slide16.xml><?xml version="1.0" encoding="utf-8"?>
+<file path=ppt/slides/slide17.xml><?xml version="1.0" encoding="utf-8"?>
 <p:sld xmlns:a="http://schemas.openxmlformats.org/drawingml/2006/main" xmlns:r="http://schemas.openxmlformats.org/officeDocument/2006/relationships" xmlns:p="http://schemas.openxmlformats.org/presentationml/2006/main">
   <p:cSld>
     <p:spTree>
@@ -9104,7 +8975,7 @@
 </p:sld>
 </file>
 
-<file path=ppt/slides/slide17.xml><?xml version="1.0" encoding="utf-8"?>
+<file path=ppt/slides/slide18.xml><?xml version="1.0" encoding="utf-8"?>
 <p:sld xmlns:a="http://schemas.openxmlformats.org/drawingml/2006/main" xmlns:r="http://schemas.openxmlformats.org/officeDocument/2006/relationships" xmlns:p="http://schemas.openxmlformats.org/presentationml/2006/main">
   <p:cSld>
     <p:spTree>
@@ -9284,7 +9155,7 @@
 </p:sld>
 </file>
 
-<file path=ppt/slides/slide18.xml><?xml version="1.0" encoding="utf-8"?>
+<file path=ppt/slides/slide19.xml><?xml version="1.0" encoding="utf-8"?>
 <p:sld xmlns:a="http://schemas.openxmlformats.org/drawingml/2006/main" xmlns:r="http://schemas.openxmlformats.org/officeDocument/2006/relationships" xmlns:p="http://schemas.openxmlformats.org/presentationml/2006/main">
   <p:cSld>
     <p:spTree>
@@ -9507,7 +9378,302 @@
 </p:sld>
 </file>
 
-<file path=ppt/slides/slide19.xml><?xml version="1.0" encoding="utf-8"?>
+<file path=ppt/slides/slide2.xml><?xml version="1.0" encoding="utf-8"?>
+<p:sld xmlns:a="http://schemas.openxmlformats.org/drawingml/2006/main" xmlns:r="http://schemas.openxmlformats.org/officeDocument/2006/relationships" xmlns:p="http://schemas.openxmlformats.org/presentationml/2006/main">
+  <p:cSld>
+    <p:spTree>
+      <p:nvGrpSpPr>
+        <p:cNvPr id="1" name="">
+          <a:extLst>
+            <a:ext uri="{FF2B5EF4-FFF2-40B4-BE49-F238E27FC236}">
+              <a16:creationId xmlns:a16="http://schemas.microsoft.com/office/drawing/2014/main" id="{4B94F80A-071C-338C-291F-2AD14EF3B1C7}"/>
+            </a:ext>
+          </a:extLst>
+        </p:cNvPr>
+        <p:cNvGrpSpPr/>
+        <p:nvPr/>
+      </p:nvGrpSpPr>
+      <p:grpSpPr>
+        <a:xfrm>
+          <a:off x="0" y="0"/>
+          <a:ext cx="0" cy="0"/>
+          <a:chOff x="0" y="0"/>
+          <a:chExt cx="0" cy="0"/>
+        </a:xfrm>
+      </p:grpSpPr>
+      <p:sp>
+        <p:nvSpPr>
+          <p:cNvPr id="2" name="Title 1">
+            <a:extLst>
+              <a:ext uri="{FF2B5EF4-FFF2-40B4-BE49-F238E27FC236}">
+                <a16:creationId xmlns:a16="http://schemas.microsoft.com/office/drawing/2014/main" id="{CE747146-4EA1-AA67-17BB-5CA0BD57D447}"/>
+              </a:ext>
+            </a:extLst>
+          </p:cNvPr>
+          <p:cNvSpPr>
+            <a:spLocks noGrp="1"/>
+          </p:cNvSpPr>
+          <p:nvPr>
+            <p:ph type="title"/>
+          </p:nvPr>
+        </p:nvSpPr>
+        <p:spPr>
+          <a:xfrm>
+            <a:off x="433086" y="0"/>
+            <a:ext cx="5662913" cy="1325563"/>
+          </a:xfrm>
+        </p:spPr>
+        <p:txBody>
+          <a:bodyPr/>
+          <a:lstStyle/>
+          <a:p>
+            <a:r>
+              <a:rPr lang="en-001" dirty="0"/>
+              <a:t>SECURITY </a:t>
+            </a:r>
+            <a:r>
+              <a:rPr lang="en-US" dirty="0"/>
+              <a:t>PROBLEM</a:t>
+            </a:r>
+            <a:br>
+              <a:rPr lang="en-001" dirty="0"/>
+            </a:br>
+            <a:r>
+              <a:rPr lang="en-001" sz="2000" dirty="0"/>
+              <a:t>(Valentyn)</a:t>
+            </a:r>
+            <a:endParaRPr lang="en-US" sz="2000" dirty="0"/>
+          </a:p>
+        </p:txBody>
+      </p:sp>
+      <p:sp>
+        <p:nvSpPr>
+          <p:cNvPr id="3" name="Content Placeholder 2">
+            <a:extLst>
+              <a:ext uri="{FF2B5EF4-FFF2-40B4-BE49-F238E27FC236}">
+                <a16:creationId xmlns:a16="http://schemas.microsoft.com/office/drawing/2014/main" id="{3275C814-2661-2F57-ADD4-4A961CB1C671}"/>
+              </a:ext>
+            </a:extLst>
+          </p:cNvPr>
+          <p:cNvSpPr>
+            <a:spLocks noGrp="1"/>
+          </p:cNvSpPr>
+          <p:nvPr>
+            <p:ph idx="1"/>
+          </p:nvPr>
+        </p:nvSpPr>
+        <p:spPr>
+          <a:xfrm>
+            <a:off x="527860" y="1325563"/>
+            <a:ext cx="5822092" cy="4916574"/>
+          </a:xfrm>
+        </p:spPr>
+        <p:txBody>
+          <a:bodyPr>
+            <a:normAutofit/>
+          </a:bodyPr>
+          <a:lstStyle/>
+          <a:p>
+            <a:pPr marL="0" indent="0">
+              <a:buNone/>
+            </a:pPr>
+            <a:r>
+              <a:rPr lang="en-US" dirty="0"/>
+              <a:t>An attacker</a:t>
+            </a:r>
+            <a:r>
+              <a:rPr lang="en-001" dirty="0"/>
+              <a:t> tries to modify the grades by</a:t>
+            </a:r>
+            <a:r>
+              <a:rPr lang="en-US" dirty="0"/>
+              <a:t> </a:t>
+            </a:r>
+            <a:r>
+              <a:rPr lang="en-001" dirty="0"/>
+              <a:t>sending </a:t>
+            </a:r>
+            <a:r>
+              <a:rPr lang="en-US" dirty="0"/>
+              <a:t>a grade edit request to Grading Management component.</a:t>
+            </a:r>
+            <a:endParaRPr lang="en-001" dirty="0"/>
+          </a:p>
+          <a:p>
+            <a:pPr marL="0" indent="0">
+              <a:buNone/>
+            </a:pPr>
+            <a:endParaRPr lang="en-001" dirty="0"/>
+          </a:p>
+          <a:p>
+            <a:pPr marL="0" indent="0">
+              <a:buNone/>
+            </a:pPr>
+            <a:r>
+              <a:rPr lang="en-001" dirty="0"/>
+              <a:t>Solution: </a:t>
+            </a:r>
+            <a:r>
+              <a:rPr lang="en-US" dirty="0"/>
+              <a:t>The </a:t>
+            </a:r>
+            <a:r>
+              <a:rPr lang="en-001" dirty="0"/>
+              <a:t>request </a:t>
+            </a:r>
+            <a:r>
+              <a:rPr lang="en-US" dirty="0"/>
+              <a:t>is detected, an attacker is not recognized as a teacher, notification is sent.</a:t>
+            </a:r>
+            <a:endParaRPr lang="en-001" dirty="0"/>
+          </a:p>
+          <a:p>
+            <a:pPr marL="0" indent="0">
+              <a:buNone/>
+            </a:pPr>
+            <a:endParaRPr lang="en-001" dirty="0"/>
+          </a:p>
+          <a:p>
+            <a:pPr marL="0" indent="0">
+              <a:buNone/>
+            </a:pPr>
+            <a:r>
+              <a:rPr lang="en-US" dirty="0"/>
+              <a:t>No architecture modification is needed because a notification is just being sent.</a:t>
+            </a:r>
+            <a:endParaRPr lang="en-001" dirty="0"/>
+          </a:p>
+        </p:txBody>
+      </p:sp>
+      <p:pic>
+        <p:nvPicPr>
+          <p:cNvPr id="13" name="Picture 12">
+            <a:extLst>
+              <a:ext uri="{FF2B5EF4-FFF2-40B4-BE49-F238E27FC236}">
+                <a16:creationId xmlns:a16="http://schemas.microsoft.com/office/drawing/2014/main" id="{11C8A0D1-575D-4D21-5CD4-9B1DD20D63DA}"/>
+              </a:ext>
+            </a:extLst>
+          </p:cNvPr>
+          <p:cNvPicPr>
+            <a:picLocks noChangeAspect="1"/>
+          </p:cNvPicPr>
+          <p:nvPr/>
+        </p:nvPicPr>
+        <p:blipFill>
+          <a:blip r:embed="rId2"/>
+          <a:stretch>
+            <a:fillRect/>
+          </a:stretch>
+        </p:blipFill>
+        <p:spPr>
+          <a:xfrm>
+            <a:off x="527860" y="5080572"/>
+            <a:ext cx="11136279" cy="1581371"/>
+          </a:xfrm>
+          <a:prstGeom prst="rect">
+            <a:avLst/>
+          </a:prstGeom>
+        </p:spPr>
+      </p:pic>
+      <p:sp>
+        <p:nvSpPr>
+          <p:cNvPr id="5" name="TextBox 4">
+            <a:extLst>
+              <a:ext uri="{FF2B5EF4-FFF2-40B4-BE49-F238E27FC236}">
+                <a16:creationId xmlns:a16="http://schemas.microsoft.com/office/drawing/2014/main" id="{F41EE124-D96B-C268-F58D-A5B17826BB4A}"/>
+              </a:ext>
+            </a:extLst>
+          </p:cNvPr>
+          <p:cNvSpPr txBox="1"/>
+          <p:nvPr/>
+        </p:nvSpPr>
+        <p:spPr>
+          <a:xfrm>
+            <a:off x="6785988" y="736048"/>
+            <a:ext cx="5299008" cy="3693319"/>
+          </a:xfrm>
+          <a:prstGeom prst="rect">
+            <a:avLst/>
+          </a:prstGeom>
+          <a:noFill/>
+        </p:spPr>
+        <p:txBody>
+          <a:bodyPr wrap="square">
+            <a:spAutoFit/>
+          </a:bodyPr>
+          <a:lstStyle/>
+          <a:p>
+            <a:r>
+              <a:rPr lang="en-US" dirty="0"/>
+              <a:t>Source of stimulus: Grading Management (unauthorized access)</a:t>
+            </a:r>
+            <a:endParaRPr lang="en-001" dirty="0"/>
+          </a:p>
+          <a:p>
+            <a:endParaRPr lang="en-US" dirty="0"/>
+          </a:p>
+          <a:p>
+            <a:r>
+              <a:rPr lang="en-US" dirty="0"/>
+              <a:t>Stimulus: Editing the grades with an unauthorized access</a:t>
+            </a:r>
+            <a:endParaRPr lang="en-001" dirty="0"/>
+          </a:p>
+          <a:p>
+            <a:endParaRPr lang="en-US" dirty="0"/>
+          </a:p>
+          <a:p>
+            <a:r>
+              <a:rPr lang="en-US" dirty="0"/>
+              <a:t>Environment: Run-time</a:t>
+            </a:r>
+          </a:p>
+          <a:p>
+            <a:endParaRPr lang="en-001" dirty="0"/>
+          </a:p>
+          <a:p>
+            <a:r>
+              <a:rPr lang="en-US" dirty="0"/>
+              <a:t>Artifact: Persistence Adapter</a:t>
+            </a:r>
+            <a:endParaRPr lang="en-001" dirty="0"/>
+          </a:p>
+          <a:p>
+            <a:endParaRPr lang="en-US" dirty="0"/>
+          </a:p>
+          <a:p>
+            <a:r>
+              <a:rPr lang="en-US" dirty="0"/>
+              <a:t>Response: Unauthorized access detected</a:t>
+            </a:r>
+            <a:endParaRPr lang="en-001" dirty="0"/>
+          </a:p>
+          <a:p>
+            <a:endParaRPr lang="en-US" dirty="0"/>
+          </a:p>
+          <a:p>
+            <a:r>
+              <a:rPr lang="en-US" dirty="0"/>
+              <a:t>Measure: Notification is sent</a:t>
+            </a:r>
+            <a:endParaRPr lang="en-001" dirty="0"/>
+          </a:p>
+        </p:txBody>
+      </p:sp>
+    </p:spTree>
+    <p:extLst>
+      <p:ext uri="{BB962C8B-B14F-4D97-AF65-F5344CB8AC3E}">
+        <p14:creationId xmlns:p14="http://schemas.microsoft.com/office/powerpoint/2010/main" val="1245900753"/>
+      </p:ext>
+    </p:extLst>
+  </p:cSld>
+  <p:clrMapOvr>
+    <a:masterClrMapping/>
+  </p:clrMapOvr>
+</p:sld>
+</file>
+
+<file path=ppt/slides/slide20.xml><?xml version="1.0" encoding="utf-8"?>
 <p:sld xmlns:a="http://schemas.openxmlformats.org/drawingml/2006/main" xmlns:r="http://schemas.openxmlformats.org/officeDocument/2006/relationships" xmlns:p="http://schemas.openxmlformats.org/presentationml/2006/main">
   <p:cSld>
     <p:spTree>
@@ -10234,302 +10400,7 @@
 </p:sld>
 </file>
 
-<file path=ppt/slides/slide2.xml><?xml version="1.0" encoding="utf-8"?>
-<p:sld xmlns:a="http://schemas.openxmlformats.org/drawingml/2006/main" xmlns:r="http://schemas.openxmlformats.org/officeDocument/2006/relationships" xmlns:p="http://schemas.openxmlformats.org/presentationml/2006/main">
-  <p:cSld>
-    <p:spTree>
-      <p:nvGrpSpPr>
-        <p:cNvPr id="1" name="">
-          <a:extLst>
-            <a:ext uri="{FF2B5EF4-FFF2-40B4-BE49-F238E27FC236}">
-              <a16:creationId xmlns:a16="http://schemas.microsoft.com/office/drawing/2014/main" id="{4B94F80A-071C-338C-291F-2AD14EF3B1C7}"/>
-            </a:ext>
-          </a:extLst>
-        </p:cNvPr>
-        <p:cNvGrpSpPr/>
-        <p:nvPr/>
-      </p:nvGrpSpPr>
-      <p:grpSpPr>
-        <a:xfrm>
-          <a:off x="0" y="0"/>
-          <a:ext cx="0" cy="0"/>
-          <a:chOff x="0" y="0"/>
-          <a:chExt cx="0" cy="0"/>
-        </a:xfrm>
-      </p:grpSpPr>
-      <p:sp>
-        <p:nvSpPr>
-          <p:cNvPr id="2" name="Title 1">
-            <a:extLst>
-              <a:ext uri="{FF2B5EF4-FFF2-40B4-BE49-F238E27FC236}">
-                <a16:creationId xmlns:a16="http://schemas.microsoft.com/office/drawing/2014/main" id="{CE747146-4EA1-AA67-17BB-5CA0BD57D447}"/>
-              </a:ext>
-            </a:extLst>
-          </p:cNvPr>
-          <p:cNvSpPr>
-            <a:spLocks noGrp="1"/>
-          </p:cNvSpPr>
-          <p:nvPr>
-            <p:ph type="title"/>
-          </p:nvPr>
-        </p:nvSpPr>
-        <p:spPr>
-          <a:xfrm>
-            <a:off x="433086" y="0"/>
-            <a:ext cx="5662913" cy="1325563"/>
-          </a:xfrm>
-        </p:spPr>
-        <p:txBody>
-          <a:bodyPr/>
-          <a:lstStyle/>
-          <a:p>
-            <a:r>
-              <a:rPr lang="en-001" dirty="0"/>
-              <a:t>SECURITY </a:t>
-            </a:r>
-            <a:r>
-              <a:rPr lang="en-US" dirty="0"/>
-              <a:t>PROBLEM</a:t>
-            </a:r>
-            <a:br>
-              <a:rPr lang="en-001" dirty="0"/>
-            </a:br>
-            <a:r>
-              <a:rPr lang="en-001" sz="2000" dirty="0"/>
-              <a:t>(Valentyn)</a:t>
-            </a:r>
-            <a:endParaRPr lang="en-US" sz="2000" dirty="0"/>
-          </a:p>
-        </p:txBody>
-      </p:sp>
-      <p:sp>
-        <p:nvSpPr>
-          <p:cNvPr id="3" name="Content Placeholder 2">
-            <a:extLst>
-              <a:ext uri="{FF2B5EF4-FFF2-40B4-BE49-F238E27FC236}">
-                <a16:creationId xmlns:a16="http://schemas.microsoft.com/office/drawing/2014/main" id="{3275C814-2661-2F57-ADD4-4A961CB1C671}"/>
-              </a:ext>
-            </a:extLst>
-          </p:cNvPr>
-          <p:cNvSpPr>
-            <a:spLocks noGrp="1"/>
-          </p:cNvSpPr>
-          <p:nvPr>
-            <p:ph idx="1"/>
-          </p:nvPr>
-        </p:nvSpPr>
-        <p:spPr>
-          <a:xfrm>
-            <a:off x="527860" y="1325563"/>
-            <a:ext cx="5822092" cy="4916574"/>
-          </a:xfrm>
-        </p:spPr>
-        <p:txBody>
-          <a:bodyPr>
-            <a:normAutofit/>
-          </a:bodyPr>
-          <a:lstStyle/>
-          <a:p>
-            <a:pPr marL="0" indent="0">
-              <a:buNone/>
-            </a:pPr>
-            <a:r>
-              <a:rPr lang="en-US" dirty="0"/>
-              <a:t>An attacker</a:t>
-            </a:r>
-            <a:r>
-              <a:rPr lang="en-001" dirty="0"/>
-              <a:t> tries to modify the grades by</a:t>
-            </a:r>
-            <a:r>
-              <a:rPr lang="en-US" dirty="0"/>
-              <a:t> </a:t>
-            </a:r>
-            <a:r>
-              <a:rPr lang="en-001" dirty="0"/>
-              <a:t>sending </a:t>
-            </a:r>
-            <a:r>
-              <a:rPr lang="en-US" dirty="0"/>
-              <a:t>a grade edit request to Grading Management component.</a:t>
-            </a:r>
-            <a:endParaRPr lang="en-001" dirty="0"/>
-          </a:p>
-          <a:p>
-            <a:pPr marL="0" indent="0">
-              <a:buNone/>
-            </a:pPr>
-            <a:endParaRPr lang="en-001" dirty="0"/>
-          </a:p>
-          <a:p>
-            <a:pPr marL="0" indent="0">
-              <a:buNone/>
-            </a:pPr>
-            <a:r>
-              <a:rPr lang="en-001" dirty="0"/>
-              <a:t>Solution: </a:t>
-            </a:r>
-            <a:r>
-              <a:rPr lang="en-US" dirty="0"/>
-              <a:t>The </a:t>
-            </a:r>
-            <a:r>
-              <a:rPr lang="en-001" dirty="0"/>
-              <a:t>request </a:t>
-            </a:r>
-            <a:r>
-              <a:rPr lang="en-US" dirty="0"/>
-              <a:t>is detected, an attacker is not recognized as a teacher, notification is sent.</a:t>
-            </a:r>
-            <a:endParaRPr lang="en-001" dirty="0"/>
-          </a:p>
-          <a:p>
-            <a:pPr marL="0" indent="0">
-              <a:buNone/>
-            </a:pPr>
-            <a:endParaRPr lang="en-001" dirty="0"/>
-          </a:p>
-          <a:p>
-            <a:pPr marL="0" indent="0">
-              <a:buNone/>
-            </a:pPr>
-            <a:r>
-              <a:rPr lang="en-US" dirty="0"/>
-              <a:t>No architecture modification is needed because a notification is just being sent.</a:t>
-            </a:r>
-            <a:endParaRPr lang="en-001" dirty="0"/>
-          </a:p>
-        </p:txBody>
-      </p:sp>
-      <p:pic>
-        <p:nvPicPr>
-          <p:cNvPr id="13" name="Picture 12">
-            <a:extLst>
-              <a:ext uri="{FF2B5EF4-FFF2-40B4-BE49-F238E27FC236}">
-                <a16:creationId xmlns:a16="http://schemas.microsoft.com/office/drawing/2014/main" id="{11C8A0D1-575D-4D21-5CD4-9B1DD20D63DA}"/>
-              </a:ext>
-            </a:extLst>
-          </p:cNvPr>
-          <p:cNvPicPr>
-            <a:picLocks noChangeAspect="1"/>
-          </p:cNvPicPr>
-          <p:nvPr/>
-        </p:nvPicPr>
-        <p:blipFill>
-          <a:blip r:embed="rId2"/>
-          <a:stretch>
-            <a:fillRect/>
-          </a:stretch>
-        </p:blipFill>
-        <p:spPr>
-          <a:xfrm>
-            <a:off x="527860" y="5080572"/>
-            <a:ext cx="11136279" cy="1581371"/>
-          </a:xfrm>
-          <a:prstGeom prst="rect">
-            <a:avLst/>
-          </a:prstGeom>
-        </p:spPr>
-      </p:pic>
-      <p:sp>
-        <p:nvSpPr>
-          <p:cNvPr id="5" name="TextBox 4">
-            <a:extLst>
-              <a:ext uri="{FF2B5EF4-FFF2-40B4-BE49-F238E27FC236}">
-                <a16:creationId xmlns:a16="http://schemas.microsoft.com/office/drawing/2014/main" id="{F41EE124-D96B-C268-F58D-A5B17826BB4A}"/>
-              </a:ext>
-            </a:extLst>
-          </p:cNvPr>
-          <p:cNvSpPr txBox="1"/>
-          <p:nvPr/>
-        </p:nvSpPr>
-        <p:spPr>
-          <a:xfrm>
-            <a:off x="6785988" y="736048"/>
-            <a:ext cx="5299008" cy="3693319"/>
-          </a:xfrm>
-          <a:prstGeom prst="rect">
-            <a:avLst/>
-          </a:prstGeom>
-          <a:noFill/>
-        </p:spPr>
-        <p:txBody>
-          <a:bodyPr wrap="square">
-            <a:spAutoFit/>
-          </a:bodyPr>
-          <a:lstStyle/>
-          <a:p>
-            <a:r>
-              <a:rPr lang="en-US" dirty="0"/>
-              <a:t>Source of stimulus: Grading Management (unauthorized access)</a:t>
-            </a:r>
-            <a:endParaRPr lang="en-001" dirty="0"/>
-          </a:p>
-          <a:p>
-            <a:endParaRPr lang="en-US" dirty="0"/>
-          </a:p>
-          <a:p>
-            <a:r>
-              <a:rPr lang="en-US" dirty="0"/>
-              <a:t>Stimulus: Editing the grades with an unauthorized access</a:t>
-            </a:r>
-            <a:endParaRPr lang="en-001" dirty="0"/>
-          </a:p>
-          <a:p>
-            <a:endParaRPr lang="en-US" dirty="0"/>
-          </a:p>
-          <a:p>
-            <a:r>
-              <a:rPr lang="en-US" dirty="0"/>
-              <a:t>Environment: Run-time</a:t>
-            </a:r>
-          </a:p>
-          <a:p>
-            <a:endParaRPr lang="en-001" dirty="0"/>
-          </a:p>
-          <a:p>
-            <a:r>
-              <a:rPr lang="en-US" dirty="0"/>
-              <a:t>Artifact: Persistence Adapter</a:t>
-            </a:r>
-            <a:endParaRPr lang="en-001" dirty="0"/>
-          </a:p>
-          <a:p>
-            <a:endParaRPr lang="en-US" dirty="0"/>
-          </a:p>
-          <a:p>
-            <a:r>
-              <a:rPr lang="en-US" dirty="0"/>
-              <a:t>Response: Unauthorized access detected</a:t>
-            </a:r>
-            <a:endParaRPr lang="en-001" dirty="0"/>
-          </a:p>
-          <a:p>
-            <a:endParaRPr lang="en-US" dirty="0"/>
-          </a:p>
-          <a:p>
-            <a:r>
-              <a:rPr lang="en-US" dirty="0"/>
-              <a:t>Measure: Notification is sent</a:t>
-            </a:r>
-            <a:endParaRPr lang="en-001" dirty="0"/>
-          </a:p>
-        </p:txBody>
-      </p:sp>
-    </p:spTree>
-    <p:extLst>
-      <p:ext uri="{BB962C8B-B14F-4D97-AF65-F5344CB8AC3E}">
-        <p14:creationId xmlns:p14="http://schemas.microsoft.com/office/powerpoint/2010/main" val="1245900753"/>
-      </p:ext>
-    </p:extLst>
-  </p:cSld>
-  <p:clrMapOvr>
-    <a:masterClrMapping/>
-  </p:clrMapOvr>
-</p:sld>
-</file>
-
-<file path=ppt/slides/slide20.xml><?xml version="1.0" encoding="utf-8"?>
+<file path=ppt/slides/slide21.xml><?xml version="1.0" encoding="utf-8"?>
 <p:sld xmlns:a="http://schemas.openxmlformats.org/drawingml/2006/main" xmlns:r="http://schemas.openxmlformats.org/officeDocument/2006/relationships" xmlns:p="http://schemas.openxmlformats.org/presentationml/2006/main">
   <p:cSld>
     <p:spTree>
@@ -10823,7 +10694,7 @@
 </p:sld>
 </file>
 
-<file path=ppt/slides/slide21.xml><?xml version="1.0" encoding="utf-8"?>
+<file path=ppt/slides/slide22.xml><?xml version="1.0" encoding="utf-8"?>
 <p:sld xmlns:a="http://schemas.openxmlformats.org/drawingml/2006/main" xmlns:r="http://schemas.openxmlformats.org/officeDocument/2006/relationships" xmlns:p="http://schemas.openxmlformats.org/presentationml/2006/main">
   <p:cSld>
     <p:spTree>
@@ -11505,9 +11376,20 @@
   <p:cSld>
     <p:bg>
       <p:bgPr>
-        <a:solidFill>
-          <a:schemeClr val="bg1"/>
-        </a:solidFill>
+        <a:blipFill rotWithShape="1">
+          <a:blip r:embed="rId3">
+            <a:duotone>
+              <a:schemeClr val="bg2">
+                <a:shade val="80000"/>
+                <a:lumMod val="80000"/>
+              </a:schemeClr>
+              <a:schemeClr val="bg2">
+                <a:tint val="98000"/>
+              </a:schemeClr>
+            </a:duotone>
+          </a:blip>
+          <a:stretch/>
+        </a:blipFill>
         <a:effectLst/>
       </p:bgPr>
     </p:bg>
@@ -11549,21 +11431,30 @@
         </p:nvSpPr>
         <p:spPr>
           <a:xfrm>
-            <a:off x="640080" y="329184"/>
-            <a:ext cx="6894576" cy="1783080"/>
+            <a:off x="913795" y="609600"/>
+            <a:ext cx="5978072" cy="970450"/>
           </a:xfrm>
         </p:spPr>
         <p:txBody>
-          <a:bodyPr anchor="b">
+          <a:bodyPr>
             <a:normAutofit/>
           </a:bodyPr>
           <a:lstStyle/>
           <a:p>
-            <a:pPr algn="l"/>
-            <a:r>
-              <a:rPr lang="es-ES" sz="5400" dirty="0"/>
-              <a:t>AVALABILITY PROBLEM: ISSUE</a:t>
-            </a:r>
+            <a:pPr>
+              <a:lnSpc>
+                <a:spcPct val="90000"/>
+              </a:lnSpc>
+            </a:pPr>
+            <a:r>
+              <a:rPr lang="es-ES" sz="3100" dirty="0"/>
+              <a:t>AVALABILITY PROBLEM: </a:t>
+            </a:r>
+            <a:r>
+              <a:rPr lang="es-ES" sz="3100" dirty="0" err="1"/>
+              <a:t>Requirements</a:t>
+            </a:r>
+            <a:endParaRPr lang="es-ES" sz="3100" dirty="0"/>
           </a:p>
         </p:txBody>
       </p:sp>
@@ -11585,59 +11476,136 @@
         </p:nvSpPr>
         <p:spPr>
           <a:xfrm>
-            <a:off x="640080" y="2706624"/>
-            <a:ext cx="6894576" cy="3483864"/>
+            <a:off x="913795" y="1828801"/>
+            <a:ext cx="5978072" cy="3866048"/>
           </a:xfrm>
         </p:spPr>
         <p:txBody>
-          <a:bodyPr>
-            <a:normAutofit fontScale="92500" lnSpcReduction="10000"/>
+          <a:bodyPr anchor="ctr">
+            <a:normAutofit/>
           </a:bodyPr>
           <a:lstStyle/>
           <a:p>
-            <a:r>
-              <a:rPr lang="en-GB" sz="2000"/>
-              <a:t>After having the exams corrected, the teacher uploads the grading marks to the system, and within 15 minutes, the systems must make it available to check for the student. When this does not happen, there is an issue.</a:t>
-            </a:r>
-            <a:endParaRPr lang="en-GB" sz="2000" noProof="0"/>
-          </a:p>
-          <a:p>
-            <a:r>
-              <a:rPr lang="en-GB" sz="2000" noProof="0"/>
-              <a:t>Involved Users: Student, Teacher</a:t>
-            </a:r>
-          </a:p>
-          <a:p>
-            <a:r>
-              <a:rPr lang="es-ES" sz="2000"/>
-              <a:t>Afected System Parts: In Backend API:</a:t>
-            </a:r>
-          </a:p>
-          <a:p>
-            <a:pPr lvl="1"/>
-            <a:r>
-              <a:rPr lang="es-ES" sz="2000"/>
-              <a:t>Grading Management Container, Persistent Adapter, Result Viewing, Notification Adapter</a:t>
-            </a:r>
-          </a:p>
-          <a:p>
-            <a:pPr marL="0" indent="0">
-              <a:buNone/>
+            <a:pPr>
+              <a:lnSpc>
+                <a:spcPct val="90000"/>
+              </a:lnSpc>
             </a:pPr>
             <a:r>
-              <a:rPr lang="es-ES" sz="2000"/>
-              <a:t>    In Web Application:</a:t>
-            </a:r>
-          </a:p>
-          <a:p>
-            <a:pPr lvl="1"/>
-            <a:r>
-              <a:rPr lang="es-ES" sz="2000"/>
-              <a:t>Results View</a:t>
-            </a:r>
-          </a:p>
-        </p:txBody>
-      </p:sp>
+              <a:rPr lang="en-US" sz="1600"/>
+              <a:t>Source of stimulus: Results Views component (Web Application), requesting updated exam marks for student visualization.</a:t>
+            </a:r>
+          </a:p>
+          <a:p>
+            <a:pPr>
+              <a:lnSpc>
+                <a:spcPct val="90000"/>
+              </a:lnSpc>
+            </a:pPr>
+            <a:r>
+              <a:rPr lang="en-US" sz="1600"/>
+              <a:t>    Stimulus: Results Views requests the publication and availability of newly uploaded exam marks from the Web Application.</a:t>
+            </a:r>
+          </a:p>
+          <a:p>
+            <a:pPr>
+              <a:lnSpc>
+                <a:spcPct val="90000"/>
+              </a:lnSpc>
+            </a:pPr>
+            <a:r>
+              <a:rPr lang="en-US" sz="1600"/>
+              <a:t>    Environment: Normal system operation, with internal container communication enabled between Web Application and Backend API.</a:t>
+            </a:r>
+          </a:p>
+          <a:p>
+            <a:pPr>
+              <a:lnSpc>
+                <a:spcPct val="90000"/>
+              </a:lnSpc>
+            </a:pPr>
+            <a:r>
+              <a:rPr lang="en-US" sz="1600"/>
+              <a:t>    Artifact: Web Application – Grade Publisher Monitor container.</a:t>
+            </a:r>
+          </a:p>
+          <a:p>
+            <a:pPr>
+              <a:lnSpc>
+                <a:spcPct val="90000"/>
+              </a:lnSpc>
+            </a:pPr>
+            <a:r>
+              <a:rPr lang="en-US" sz="1600"/>
+              <a:t>    Response: Validation from the Grade Publisher Monitor, if </a:t>
+            </a:r>
+            <a:r>
+              <a:rPr lang="en-US" sz="1600" err="1"/>
+              <a:t>succeded</a:t>
+            </a:r>
+            <a:r>
+              <a:rPr lang="en-US" sz="1600"/>
+              <a:t> confirmation, if failed notification of failure.</a:t>
+            </a:r>
+          </a:p>
+          <a:p>
+            <a:pPr>
+              <a:lnSpc>
+                <a:spcPct val="90000"/>
+              </a:lnSpc>
+            </a:pPr>
+            <a:r>
+              <a:rPr lang="en-US" sz="1600"/>
+              <a:t>    Measure: Validation &lt; 1 min. Mark availability &lt; 15 min.</a:t>
+            </a:r>
+            <a:endParaRPr lang="es-ES" sz="1600"/>
+          </a:p>
+        </p:txBody>
+      </p:sp>
+      <p:pic>
+        <p:nvPicPr>
+          <p:cNvPr id="11" name="Picture 10">
+            <a:extLst>
+              <a:ext uri="{FF2B5EF4-FFF2-40B4-BE49-F238E27FC236}">
+                <a16:creationId xmlns:a16="http://schemas.microsoft.com/office/drawing/2014/main" id="{7724A564-BE2C-4188-AA55-E1F8840FFB13}"/>
+              </a:ext>
+              <a:ext uri="{C183D7F6-B498-43B3-948B-1728B52AA6E4}">
+                <adec:decorative xmlns:adec="http://schemas.microsoft.com/office/drawing/2017/decorative" val="1"/>
+              </a:ext>
+            </a:extLst>
+          </p:cNvPr>
+          <p:cNvPicPr>
+            <a:picLocks noGrp="1" noRot="1" noChangeAspect="1" noMove="1" noResize="1" noEditPoints="1" noAdjustHandles="1" noChangeArrowheads="1" noChangeShapeType="1" noCrop="1"/>
+          </p:cNvPicPr>
+          <p:nvPr>
+            <p:extLst>
+              <p:ext uri="{386F3935-93C4-4BCD-93E2-E3B085C9AB24}">
+                <p16:designElem xmlns:p16="http://schemas.microsoft.com/office/powerpoint/2015/main" val="1"/>
+              </p:ext>
+            </p:extLst>
+          </p:nvPr>
+        </p:nvPicPr>
+        <p:blipFill rotWithShape="1">
+          <a:blip r:embed="rId4">
+            <a:extLst>
+              <a:ext uri="{28A0092B-C50C-407E-A947-70E740481C1C}">
+                <a14:useLocalDpi xmlns:a14="http://schemas.microsoft.com/office/drawing/2010/main" val="0"/>
+              </a:ext>
+            </a:extLst>
+          </a:blip>
+          <a:srcRect t="964" r="2807" b="1446"/>
+          <a:stretch/>
+        </p:blipFill>
+        <p:spPr>
+          <a:xfrm>
+            <a:off x="7232905" y="1"/>
+            <a:ext cx="4959095" cy="6858000"/>
+          </a:xfrm>
+          <a:prstGeom prst="rect">
+            <a:avLst/>
+          </a:prstGeom>
+        </p:spPr>
+      </p:pic>
       <p:pic>
         <p:nvPicPr>
           <p:cNvPr id="6" name="Imagen 5" descr="Diagrama&#10;&#10;El contenido generado por IA puede ser incorrecto.">
@@ -11653,45 +11621,15 @@
           <p:nvPr/>
         </p:nvPicPr>
         <p:blipFill>
-          <a:blip r:embed="rId3"/>
+          <a:blip r:embed="rId5"/>
           <a:stretch>
             <a:fillRect/>
           </a:stretch>
         </p:blipFill>
         <p:spPr>
           <a:xfrm>
-            <a:off x="8151665" y="329183"/>
-            <a:ext cx="3438565" cy="3429969"/>
-          </a:xfrm>
-          <a:prstGeom prst="rect">
-            <a:avLst/>
-          </a:prstGeom>
-        </p:spPr>
-      </p:pic>
-      <p:pic>
-        <p:nvPicPr>
-          <p:cNvPr id="8" name="Imagen 7" descr="Diagrama&#10;&#10;El contenido generado por IA puede ser incorrecto.">
-            <a:extLst>
-              <a:ext uri="{FF2B5EF4-FFF2-40B4-BE49-F238E27FC236}">
-                <a16:creationId xmlns:a16="http://schemas.microsoft.com/office/drawing/2014/main" id="{C08C081E-6687-7FC9-07B6-5A19C24E4E5A}"/>
-              </a:ext>
-            </a:extLst>
-          </p:cNvPr>
-          <p:cNvPicPr>
-            <a:picLocks noChangeAspect="1"/>
-          </p:cNvPicPr>
-          <p:nvPr/>
-        </p:nvPicPr>
-        <p:blipFill>
-          <a:blip r:embed="rId4"/>
-          <a:stretch>
-            <a:fillRect/>
-          </a:stretch>
-        </p:blipFill>
-        <p:spPr>
-          <a:xfrm>
-            <a:off x="7131064" y="4349352"/>
-            <a:ext cx="5057888" cy="2174892"/>
+            <a:off x="7552945" y="1202350"/>
+            <a:ext cx="3995592" cy="3985602"/>
           </a:xfrm>
           <a:prstGeom prst="rect">
             <a:avLst/>
@@ -11716,9 +11654,20 @@
   <p:cSld>
     <p:bg>
       <p:bgPr>
-        <a:solidFill>
-          <a:schemeClr val="bg1"/>
-        </a:solidFill>
+        <a:blipFill rotWithShape="1">
+          <a:blip r:embed="rId2">
+            <a:duotone>
+              <a:schemeClr val="bg2">
+                <a:shade val="80000"/>
+                <a:lumMod val="80000"/>
+              </a:schemeClr>
+              <a:schemeClr val="bg2">
+                <a:tint val="98000"/>
+              </a:schemeClr>
+            </a:duotone>
+          </a:blip>
+          <a:stretch/>
+        </a:blipFill>
         <a:effectLst/>
       </p:bgPr>
     </p:bg>
@@ -11760,21 +11709,30 @@
         </p:nvSpPr>
         <p:spPr>
           <a:xfrm>
-            <a:off x="630936" y="219456"/>
-            <a:ext cx="5879592" cy="1481328"/>
+            <a:off x="913795" y="609600"/>
+            <a:ext cx="5978072" cy="970450"/>
           </a:xfrm>
         </p:spPr>
         <p:txBody>
-          <a:bodyPr anchor="b">
+          <a:bodyPr>
             <a:normAutofit/>
           </a:bodyPr>
           <a:lstStyle/>
           <a:p>
-            <a:pPr algn="l"/>
-            <a:r>
-              <a:rPr lang="es-ES" sz="3800" dirty="0"/>
-              <a:t>AVAILABILITY PROBLEM: SOLUTION</a:t>
-            </a:r>
+            <a:pPr>
+              <a:lnSpc>
+                <a:spcPct val="90000"/>
+              </a:lnSpc>
+            </a:pPr>
+            <a:r>
+              <a:rPr lang="es-ES" sz="3100" dirty="0"/>
+              <a:t>AVAILABILITY PROBLEM: </a:t>
+            </a:r>
+            <a:r>
+              <a:rPr lang="es-ES" sz="3100" dirty="0" err="1"/>
+              <a:t>Solution</a:t>
+            </a:r>
+            <a:endParaRPr lang="es-ES" sz="3100" dirty="0"/>
           </a:p>
         </p:txBody>
       </p:sp>
@@ -11796,51 +11754,112 @@
         </p:nvSpPr>
         <p:spPr>
           <a:xfrm>
-            <a:off x="630936" y="2660904"/>
-            <a:ext cx="5272024" cy="3547872"/>
+            <a:off x="913795" y="1828801"/>
+            <a:ext cx="5978072" cy="3866048"/>
           </a:xfrm>
         </p:spPr>
         <p:txBody>
-          <a:bodyPr anchor="t">
-            <a:normAutofit fontScale="85000" lnSpcReduction="20000"/>
+          <a:bodyPr anchor="ctr">
+            <a:normAutofit/>
           </a:bodyPr>
           <a:lstStyle/>
           <a:p>
-            <a:r>
-              <a:rPr lang="en-US" sz="1900" dirty="0"/>
-              <a:t>The solution introduces a monitoring mechanism for the grade publication process that detects when grading results are not available to students within the defined time limit.</a:t>
-            </a:r>
-          </a:p>
-          <a:p>
-            <a:r>
-              <a:rPr lang="en-US" sz="1900" dirty="0"/>
-              <a:t>When the 15-minute availability deadline is violated, the system automatically triggers compensating notifications to both the teacher and the student, informing them of the temporary system failure.</a:t>
-            </a:r>
-          </a:p>
-          <a:p>
-            <a:r>
-              <a:rPr lang="en-US" sz="1900" dirty="0"/>
-              <a:t>With this approach, the system does not silently fail: students are informed about the unavailability of their grades, and teachers are explicitly instructed to communicate the results through alternative means.</a:t>
-            </a:r>
-            <a:br>
-              <a:rPr lang="en-US" sz="1900" dirty="0"/>
-            </a:br>
-            <a:r>
-              <a:rPr lang="en-US" sz="1900" dirty="0"/>
-              <a:t>This ensures transparency, maintains trust in the system, and preserves the academic process continuity even when the system availability requirement is not met.</a:t>
-            </a:r>
-          </a:p>
-          <a:p>
-            <a:endParaRPr lang="en-GB" sz="1400" noProof="0" dirty="0"/>
+            <a:pPr>
+              <a:lnSpc>
+                <a:spcPct val="90000"/>
+              </a:lnSpc>
+            </a:pPr>
+            <a:r>
+              <a:rPr lang="en-US" sz="1700"/>
+              <a:t>After the upload of the marks by the teacher, the system performs a validation process lasting up to 1 minute.</a:t>
+            </a:r>
+          </a:p>
+          <a:p>
+            <a:pPr>
+              <a:lnSpc>
+                <a:spcPct val="90000"/>
+              </a:lnSpc>
+            </a:pPr>
+            <a:r>
+              <a:rPr lang="en-US" sz="1700"/>
+              <a:t>    This is achieved by implementing a Grade Publisher Monitor container in the Web Application layer of the architecture.</a:t>
+            </a:r>
+          </a:p>
+          <a:p>
+            <a:pPr>
+              <a:lnSpc>
+                <a:spcPct val="90000"/>
+              </a:lnSpc>
+            </a:pPr>
+            <a:r>
+              <a:rPr lang="en-US" sz="1700"/>
+              <a:t>    If the validation fails, a notification is sent to the teacher informing that the marks have not been correctly published, so corrective action can be taken in order to meet the 15-minute margin.</a:t>
+            </a:r>
+          </a:p>
+          <a:p>
+            <a:pPr>
+              <a:lnSpc>
+                <a:spcPct val="90000"/>
+              </a:lnSpc>
+            </a:pPr>
+            <a:r>
+              <a:rPr lang="en-US" sz="1700"/>
+              <a:t>    If the validation succeeds, the Grade Publisher Monitor sends a confirmation notification to the teacher indicating that the marks have been correctly published.</a:t>
+            </a:r>
+            <a:endParaRPr lang="en-GB" sz="1700" noProof="0"/>
           </a:p>
         </p:txBody>
       </p:sp>
       <p:pic>
         <p:nvPicPr>
-          <p:cNvPr id="5" name="Imagen 4" descr="Diagrama&#10;&#10;El contenido generado por IA puede ser incorrecto.">
+          <p:cNvPr id="11" name="Picture 10">
             <a:extLst>
               <a:ext uri="{FF2B5EF4-FFF2-40B4-BE49-F238E27FC236}">
-                <a16:creationId xmlns:a16="http://schemas.microsoft.com/office/drawing/2014/main" id="{11284E59-AD43-F674-F05D-545433E2CCA9}"/>
+                <a16:creationId xmlns:a16="http://schemas.microsoft.com/office/drawing/2014/main" id="{7724A564-BE2C-4188-AA55-E1F8840FFB13}"/>
+              </a:ext>
+              <a:ext uri="{C183D7F6-B498-43B3-948B-1728B52AA6E4}">
+                <adec:decorative xmlns:adec="http://schemas.microsoft.com/office/drawing/2017/decorative" val="1"/>
+              </a:ext>
+            </a:extLst>
+          </p:cNvPr>
+          <p:cNvPicPr>
+            <a:picLocks noGrp="1" noRot="1" noChangeAspect="1" noMove="1" noResize="1" noEditPoints="1" noAdjustHandles="1" noChangeArrowheads="1" noChangeShapeType="1" noCrop="1"/>
+          </p:cNvPicPr>
+          <p:nvPr>
+            <p:extLst>
+              <p:ext uri="{386F3935-93C4-4BCD-93E2-E3B085C9AB24}">
+                <p16:designElem xmlns:p16="http://schemas.microsoft.com/office/powerpoint/2015/main" val="1"/>
+              </p:ext>
+            </p:extLst>
+          </p:nvPr>
+        </p:nvPicPr>
+        <p:blipFill rotWithShape="1">
+          <a:blip r:embed="rId3">
+            <a:extLst>
+              <a:ext uri="{28A0092B-C50C-407E-A947-70E740481C1C}">
+                <a14:useLocalDpi xmlns:a14="http://schemas.microsoft.com/office/drawing/2010/main" val="0"/>
+              </a:ext>
+            </a:extLst>
+          </a:blip>
+          <a:srcRect t="964" r="2807" b="1446"/>
+          <a:stretch/>
+        </p:blipFill>
+        <p:spPr>
+          <a:xfrm>
+            <a:off x="7232905" y="1"/>
+            <a:ext cx="4959095" cy="6858000"/>
+          </a:xfrm>
+          <a:prstGeom prst="rect">
+            <a:avLst/>
+          </a:prstGeom>
+        </p:spPr>
+      </p:pic>
+      <p:pic>
+        <p:nvPicPr>
+          <p:cNvPr id="6" name="Imagen 5" descr="Diagrama&#10;&#10;El contenido generado por IA puede ser incorrecto.">
+            <a:extLst>
+              <a:ext uri="{FF2B5EF4-FFF2-40B4-BE49-F238E27FC236}">
+                <a16:creationId xmlns:a16="http://schemas.microsoft.com/office/drawing/2014/main" id="{BAC98227-B575-4827-3DC5-DEDE27122F89}"/>
               </a:ext>
             </a:extLst>
           </p:cNvPr>
@@ -11850,15 +11869,15 @@
           <p:nvPr/>
         </p:nvPicPr>
         <p:blipFill>
-          <a:blip r:embed="rId2"/>
+          <a:blip r:embed="rId4"/>
           <a:stretch>
             <a:fillRect/>
           </a:stretch>
         </p:blipFill>
         <p:spPr>
           <a:xfrm>
-            <a:off x="5902960" y="1664742"/>
-            <a:ext cx="6167120" cy="4270729"/>
+            <a:off x="7373546" y="945573"/>
+            <a:ext cx="4677812" cy="4455616"/>
           </a:xfrm>
           <a:prstGeom prst="rect">
             <a:avLst/>
@@ -11883,9 +11902,20 @@
   <p:cSld>
     <p:bg>
       <p:bgPr>
-        <a:solidFill>
-          <a:schemeClr val="bg1"/>
-        </a:solidFill>
+        <a:blipFill rotWithShape="1">
+          <a:blip r:embed="rId2">
+            <a:duotone>
+              <a:schemeClr val="bg2">
+                <a:shade val="80000"/>
+                <a:lumMod val="80000"/>
+              </a:schemeClr>
+              <a:schemeClr val="bg2">
+                <a:tint val="98000"/>
+              </a:schemeClr>
+            </a:duotone>
+          </a:blip>
+          <a:stretch/>
+        </a:blipFill>
         <a:effectLst/>
       </p:bgPr>
     </p:bg>
@@ -11921,21 +11951,30 @@
         </p:nvSpPr>
         <p:spPr>
           <a:xfrm>
-            <a:off x="630936" y="493776"/>
-            <a:ext cx="5696712" cy="1481328"/>
+            <a:off x="913795" y="609600"/>
+            <a:ext cx="5978072" cy="970450"/>
           </a:xfrm>
         </p:spPr>
         <p:txBody>
-          <a:bodyPr anchor="b">
-            <a:normAutofit fontScale="90000"/>
+          <a:bodyPr>
+            <a:normAutofit/>
           </a:bodyPr>
           <a:lstStyle/>
           <a:p>
-            <a:pPr algn="l"/>
-            <a:r>
-              <a:rPr lang="es-ES" sz="5000" dirty="0"/>
-              <a:t>MODIFIABILITY PROBLEM: ISSUE</a:t>
-            </a:r>
+            <a:pPr>
+              <a:lnSpc>
+                <a:spcPct val="90000"/>
+              </a:lnSpc>
+            </a:pPr>
+            <a:r>
+              <a:rPr lang="es-ES" sz="3100" dirty="0"/>
+              <a:t>MODIFIABILITY PROBLEM: </a:t>
+            </a:r>
+            <a:r>
+              <a:rPr lang="es-ES" sz="3100" dirty="0" err="1"/>
+              <a:t>Requirements</a:t>
+            </a:r>
+            <a:endParaRPr lang="es-ES" sz="3100" dirty="0"/>
           </a:p>
         </p:txBody>
       </p:sp>
@@ -11957,88 +11996,124 @@
         </p:nvSpPr>
         <p:spPr>
           <a:xfrm>
-            <a:off x="630936" y="2660904"/>
-            <a:ext cx="4818888" cy="3547872"/>
+            <a:off x="913795" y="1828801"/>
+            <a:ext cx="5978072" cy="3866048"/>
           </a:xfrm>
         </p:spPr>
         <p:txBody>
-          <a:bodyPr anchor="t">
-            <a:normAutofit lnSpcReduction="10000"/>
+          <a:bodyPr anchor="ctr">
+            <a:normAutofit fontScale="85000" lnSpcReduction="10000"/>
           </a:bodyPr>
           <a:lstStyle/>
           <a:p>
-            <a:r>
-              <a:rPr lang="en-GB" sz="2000" dirty="0"/>
-              <a:t>The Grading system must be modified within an hour. However, all the data flow of all services go through the persistence adapter, so every service data flow must be modified and because of that the modification takes much more time.</a:t>
-            </a:r>
-            <a:endParaRPr lang="en-GB" sz="2000" noProof="0" dirty="0"/>
-          </a:p>
-          <a:p>
-            <a:r>
-              <a:rPr lang="en-GB" sz="2000" noProof="0" dirty="0"/>
-              <a:t>Involved Users: Student, Teacher</a:t>
-            </a:r>
-          </a:p>
-          <a:p>
-            <a:r>
-              <a:rPr lang="es-ES" sz="2000" dirty="0" err="1"/>
-              <a:t>Afected</a:t>
-            </a:r>
-            <a:r>
-              <a:rPr lang="es-ES" sz="2000" dirty="0"/>
-              <a:t> </a:t>
-            </a:r>
-            <a:r>
-              <a:rPr lang="es-ES" sz="2000" dirty="0" err="1"/>
-              <a:t>System</a:t>
-            </a:r>
-            <a:r>
-              <a:rPr lang="es-ES" sz="2000" dirty="0"/>
-              <a:t> </a:t>
-            </a:r>
-            <a:r>
-              <a:rPr lang="es-ES" sz="2000" dirty="0" err="1"/>
-              <a:t>Parts</a:t>
-            </a:r>
-            <a:r>
-              <a:rPr lang="es-ES" sz="2000" dirty="0"/>
-              <a:t>: </a:t>
-            </a:r>
-            <a:r>
-              <a:rPr lang="es-ES" sz="2000" dirty="0" err="1"/>
-              <a:t>Backend</a:t>
-            </a:r>
-            <a:r>
-              <a:rPr lang="es-ES" sz="2000" dirty="0"/>
-              <a:t> API, </a:t>
-            </a:r>
-            <a:r>
-              <a:rPr lang="es-ES" sz="2000" dirty="0" err="1"/>
-              <a:t>Grading</a:t>
-            </a:r>
-            <a:r>
-              <a:rPr lang="es-ES" sz="2000" dirty="0"/>
-              <a:t> Management Container, </a:t>
-            </a:r>
-            <a:r>
-              <a:rPr lang="es-ES" sz="2000" dirty="0" err="1"/>
-              <a:t>Persistent</a:t>
-            </a:r>
-            <a:r>
-              <a:rPr lang="es-ES" sz="2000" dirty="0"/>
-              <a:t> </a:t>
-            </a:r>
-            <a:r>
-              <a:rPr lang="es-ES" sz="2000" dirty="0" err="1"/>
-              <a:t>Adapter</a:t>
-            </a:r>
-            <a:endParaRPr lang="es-ES" sz="2000" dirty="0"/>
-          </a:p>
-          <a:p>
-            <a:endParaRPr lang="es-ES" sz="2000" dirty="0"/>
-          </a:p>
-        </p:txBody>
-      </p:sp>
+            <a:pPr marL="36900" indent="0">
+              <a:buNone/>
+            </a:pPr>
+            <a:r>
+              <a:rPr lang="en-US" dirty="0"/>
+              <a:t>Source of stimulus: IT Department / Maintenance Engineer.</a:t>
+            </a:r>
+          </a:p>
+          <a:p>
+            <a:pPr marL="36900" indent="0">
+              <a:buNone/>
+            </a:pPr>
+            <a:r>
+              <a:rPr lang="en-US" dirty="0"/>
+              <a:t>    Stimulus: A request to modify the Grading Management functionality to include a new feature.</a:t>
+            </a:r>
+          </a:p>
+          <a:p>
+            <a:pPr marL="36900" indent="0">
+              <a:buNone/>
+            </a:pPr>
+            <a:r>
+              <a:rPr lang="en-US" dirty="0"/>
+              <a:t>    Environment: System in maintenance mode, with access to the Backend API source code, automated build pipeline, and test environment.</a:t>
+            </a:r>
+          </a:p>
+          <a:p>
+            <a:pPr marL="36900" indent="0">
+              <a:buNone/>
+            </a:pPr>
+            <a:r>
+              <a:rPr lang="en-US" dirty="0"/>
+              <a:t>    Artifact: Backend API – Grading Management component and its dedicated Grading Persistence Adapter</a:t>
+            </a:r>
+          </a:p>
+          <a:p>
+            <a:pPr marL="36900" indent="0">
+              <a:buNone/>
+            </a:pPr>
+            <a:r>
+              <a:rPr lang="en-US" dirty="0"/>
+              <a:t>    Response: The IT department modifies only the grading-related business logic and its dedicated persistence </a:t>
+            </a:r>
+            <a:r>
+              <a:rPr lang="en-US" dirty="0" err="1"/>
+              <a:t>adapter.No</a:t>
+            </a:r>
+            <a:r>
+              <a:rPr lang="en-US" dirty="0"/>
+              <a:t> changes are required in persistence adapters of other services</a:t>
+            </a:r>
+          </a:p>
+          <a:p>
+            <a:pPr marL="36900" indent="0">
+              <a:buNone/>
+            </a:pPr>
+            <a:r>
+              <a:rPr lang="en-US" dirty="0"/>
+              <a:t>    Measure: Modification &lt; 1 hour. Only grading-related components and adapters are changed. </a:t>
+            </a:r>
+            <a:endParaRPr lang="es-ES" dirty="0"/>
+          </a:p>
+        </p:txBody>
+      </p:sp>
+      <p:pic>
+        <p:nvPicPr>
+          <p:cNvPr id="10" name="Picture 9">
+            <a:extLst>
+              <a:ext uri="{FF2B5EF4-FFF2-40B4-BE49-F238E27FC236}">
+                <a16:creationId xmlns:a16="http://schemas.microsoft.com/office/drawing/2014/main" id="{7724A564-BE2C-4188-AA55-E1F8840FFB13}"/>
+              </a:ext>
+              <a:ext uri="{C183D7F6-B498-43B3-948B-1728B52AA6E4}">
+                <adec:decorative xmlns:adec="http://schemas.microsoft.com/office/drawing/2017/decorative" val="1"/>
+              </a:ext>
+            </a:extLst>
+          </p:cNvPr>
+          <p:cNvPicPr>
+            <a:picLocks noGrp="1" noRot="1" noChangeAspect="1" noMove="1" noResize="1" noEditPoints="1" noAdjustHandles="1" noChangeArrowheads="1" noChangeShapeType="1" noCrop="1"/>
+          </p:cNvPicPr>
+          <p:nvPr>
+            <p:extLst>
+              <p:ext uri="{386F3935-93C4-4BCD-93E2-E3B085C9AB24}">
+                <p16:designElem xmlns:p16="http://schemas.microsoft.com/office/powerpoint/2015/main" val="1"/>
+              </p:ext>
+            </p:extLst>
+          </p:nvPr>
+        </p:nvPicPr>
+        <p:blipFill rotWithShape="1">
+          <a:blip r:embed="rId3">
+            <a:extLst>
+              <a:ext uri="{28A0092B-C50C-407E-A947-70E740481C1C}">
+                <a14:useLocalDpi xmlns:a14="http://schemas.microsoft.com/office/drawing/2010/main" val="0"/>
+              </a:ext>
+            </a:extLst>
+          </a:blip>
+          <a:srcRect t="964" r="2807" b="1446"/>
+          <a:stretch/>
+        </p:blipFill>
+        <p:spPr>
+          <a:xfrm>
+            <a:off x="7232905" y="1"/>
+            <a:ext cx="4959095" cy="6858000"/>
+          </a:xfrm>
+          <a:prstGeom prst="rect">
+            <a:avLst/>
+          </a:prstGeom>
+        </p:spPr>
+      </p:pic>
       <p:pic>
         <p:nvPicPr>
           <p:cNvPr id="5" name="Imagen 4" descr="Diagrama&#10;&#10;El contenido generado por IA puede ser incorrecto.">
@@ -12054,15 +12129,15 @@
           <p:nvPr/>
         </p:nvPicPr>
         <p:blipFill>
-          <a:blip r:embed="rId2"/>
+          <a:blip r:embed="rId4"/>
           <a:stretch>
             <a:fillRect/>
           </a:stretch>
         </p:blipFill>
         <p:spPr>
           <a:xfrm>
-            <a:off x="5449824" y="2011680"/>
-            <a:ext cx="6367500" cy="3963768"/>
+            <a:off x="7355801" y="1828801"/>
+            <a:ext cx="4708044" cy="2930756"/>
           </a:xfrm>
           <a:prstGeom prst="rect">
             <a:avLst/>
@@ -12085,6 +12160,222 @@
 <file path=ppt/slides/slide7.xml><?xml version="1.0" encoding="utf-8"?>
 <p:sld xmlns:a="http://schemas.openxmlformats.org/drawingml/2006/main" xmlns:r="http://schemas.openxmlformats.org/officeDocument/2006/relationships" xmlns:p="http://schemas.openxmlformats.org/presentationml/2006/main">
   <p:cSld>
+    <p:bg>
+      <p:bgPr>
+        <a:blipFill rotWithShape="1">
+          <a:blip r:embed="rId2">
+            <a:duotone>
+              <a:schemeClr val="bg2">
+                <a:shade val="80000"/>
+                <a:lumMod val="80000"/>
+              </a:schemeClr>
+              <a:schemeClr val="bg2">
+                <a:tint val="98000"/>
+              </a:schemeClr>
+            </a:duotone>
+          </a:blip>
+          <a:stretch/>
+        </a:blipFill>
+        <a:effectLst/>
+      </p:bgPr>
+    </p:bg>
+    <p:spTree>
+      <p:nvGrpSpPr>
+        <p:cNvPr id="1" name="">
+          <a:extLst>
+            <a:ext uri="{FF2B5EF4-FFF2-40B4-BE49-F238E27FC236}">
+              <a16:creationId xmlns:a16="http://schemas.microsoft.com/office/drawing/2014/main" id="{7432310D-1A0D-8246-0814-8A3C1C4FFF34}"/>
+            </a:ext>
+          </a:extLst>
+        </p:cNvPr>
+        <p:cNvGrpSpPr/>
+        <p:nvPr/>
+      </p:nvGrpSpPr>
+      <p:grpSpPr>
+        <a:xfrm>
+          <a:off x="0" y="0"/>
+          <a:ext cx="0" cy="0"/>
+          <a:chOff x="0" y="0"/>
+          <a:chExt cx="0" cy="0"/>
+        </a:xfrm>
+      </p:grpSpPr>
+      <p:sp>
+        <p:nvSpPr>
+          <p:cNvPr id="2" name="Título 1">
+            <a:extLst>
+              <a:ext uri="{FF2B5EF4-FFF2-40B4-BE49-F238E27FC236}">
+                <a16:creationId xmlns:a16="http://schemas.microsoft.com/office/drawing/2014/main" id="{0B8CB2DA-4B2A-5908-5F1A-36A6E4A2E1E7}"/>
+              </a:ext>
+            </a:extLst>
+          </p:cNvPr>
+          <p:cNvSpPr>
+            <a:spLocks noGrp="1"/>
+          </p:cNvSpPr>
+          <p:nvPr>
+            <p:ph type="title"/>
+          </p:nvPr>
+        </p:nvSpPr>
+        <p:spPr>
+          <a:xfrm>
+            <a:off x="913795" y="609600"/>
+            <a:ext cx="5978072" cy="970450"/>
+          </a:xfrm>
+        </p:spPr>
+        <p:txBody>
+          <a:bodyPr>
+            <a:normAutofit/>
+          </a:bodyPr>
+          <a:lstStyle/>
+          <a:p>
+            <a:pPr>
+              <a:lnSpc>
+                <a:spcPct val="90000"/>
+              </a:lnSpc>
+            </a:pPr>
+            <a:r>
+              <a:rPr lang="es-ES" sz="3100" dirty="0"/>
+              <a:t>MODIFIABILITY PROBLEM: </a:t>
+            </a:r>
+            <a:r>
+              <a:rPr lang="es-ES" sz="3100" dirty="0" err="1"/>
+              <a:t>Solution</a:t>
+            </a:r>
+            <a:endParaRPr lang="es-ES" sz="3100" dirty="0"/>
+          </a:p>
+        </p:txBody>
+      </p:sp>
+      <p:sp>
+        <p:nvSpPr>
+          <p:cNvPr id="3" name="Marcador de contenido 2">
+            <a:extLst>
+              <a:ext uri="{FF2B5EF4-FFF2-40B4-BE49-F238E27FC236}">
+                <a16:creationId xmlns:a16="http://schemas.microsoft.com/office/drawing/2014/main" id="{A7ECEE4E-23E6-276A-0CC1-FC0D138581F2}"/>
+              </a:ext>
+            </a:extLst>
+          </p:cNvPr>
+          <p:cNvSpPr>
+            <a:spLocks noGrp="1"/>
+          </p:cNvSpPr>
+          <p:nvPr>
+            <p:ph idx="1"/>
+          </p:nvPr>
+        </p:nvSpPr>
+        <p:spPr>
+          <a:xfrm>
+            <a:off x="913795" y="1828801"/>
+            <a:ext cx="5978072" cy="3866048"/>
+          </a:xfrm>
+        </p:spPr>
+        <p:txBody>
+          <a:bodyPr anchor="ctr">
+            <a:normAutofit/>
+          </a:bodyPr>
+          <a:lstStyle/>
+          <a:p>
+            <a:r>
+              <a:rPr lang="en-US"/>
+              <a:t>To improve modifiability, the single shared Persistence Adapter is split into multiple independent persistence adapters, one per service data flow. </a:t>
+            </a:r>
+          </a:p>
+          <a:p>
+            <a:r>
+              <a:rPr lang="en-US"/>
+              <a:t>With this separation, changes in the grading data flow affect only the Grading Persistence Adapter and the Grading Management component, other services remain untouched and the time required to do any modification in any data flow is significantly reduced, allowing the change to be implemented within the 1-hour constraint.</a:t>
+            </a:r>
+            <a:endParaRPr lang="en-GB" noProof="0"/>
+          </a:p>
+        </p:txBody>
+      </p:sp>
+      <p:pic>
+        <p:nvPicPr>
+          <p:cNvPr id="16" name="Picture 15">
+            <a:extLst>
+              <a:ext uri="{FF2B5EF4-FFF2-40B4-BE49-F238E27FC236}">
+                <a16:creationId xmlns:a16="http://schemas.microsoft.com/office/drawing/2014/main" id="{7724A564-BE2C-4188-AA55-E1F8840FFB13}"/>
+              </a:ext>
+              <a:ext uri="{C183D7F6-B498-43B3-948B-1728B52AA6E4}">
+                <adec:decorative xmlns:adec="http://schemas.microsoft.com/office/drawing/2017/decorative" val="1"/>
+              </a:ext>
+            </a:extLst>
+          </p:cNvPr>
+          <p:cNvPicPr>
+            <a:picLocks noGrp="1" noRot="1" noChangeAspect="1" noMove="1" noResize="1" noEditPoints="1" noAdjustHandles="1" noChangeArrowheads="1" noChangeShapeType="1" noCrop="1"/>
+          </p:cNvPicPr>
+          <p:nvPr>
+            <p:extLst>
+              <p:ext uri="{386F3935-93C4-4BCD-93E2-E3B085C9AB24}">
+                <p16:designElem xmlns:p16="http://schemas.microsoft.com/office/powerpoint/2015/main" val="1"/>
+              </p:ext>
+            </p:extLst>
+          </p:nvPr>
+        </p:nvPicPr>
+        <p:blipFill rotWithShape="1">
+          <a:blip r:embed="rId3">
+            <a:extLst>
+              <a:ext uri="{28A0092B-C50C-407E-A947-70E740481C1C}">
+                <a14:useLocalDpi xmlns:a14="http://schemas.microsoft.com/office/drawing/2010/main" val="0"/>
+              </a:ext>
+            </a:extLst>
+          </a:blip>
+          <a:srcRect t="964" r="2807" b="1446"/>
+          <a:stretch/>
+        </p:blipFill>
+        <p:spPr>
+          <a:xfrm>
+            <a:off x="7232905" y="1"/>
+            <a:ext cx="4959095" cy="6858000"/>
+          </a:xfrm>
+          <a:prstGeom prst="rect">
+            <a:avLst/>
+          </a:prstGeom>
+        </p:spPr>
+      </p:pic>
+      <p:pic>
+        <p:nvPicPr>
+          <p:cNvPr id="5" name="Imagen 4" descr="Diagrama&#10;&#10;El contenido generado por IA puede ser incorrecto.">
+            <a:extLst>
+              <a:ext uri="{FF2B5EF4-FFF2-40B4-BE49-F238E27FC236}">
+                <a16:creationId xmlns:a16="http://schemas.microsoft.com/office/drawing/2014/main" id="{E95A1131-E749-8097-57E0-C56AA78B70C7}"/>
+              </a:ext>
+            </a:extLst>
+          </p:cNvPr>
+          <p:cNvPicPr>
+            <a:picLocks noChangeAspect="1"/>
+          </p:cNvPicPr>
+          <p:nvPr/>
+        </p:nvPicPr>
+        <p:blipFill>
+          <a:blip r:embed="rId4"/>
+          <a:stretch>
+            <a:fillRect/>
+          </a:stretch>
+        </p:blipFill>
+        <p:spPr>
+          <a:xfrm>
+            <a:off x="7232906" y="1828802"/>
+            <a:ext cx="4959094" cy="3076192"/>
+          </a:xfrm>
+          <a:prstGeom prst="rect">
+            <a:avLst/>
+          </a:prstGeom>
+        </p:spPr>
+      </p:pic>
+    </p:spTree>
+    <p:extLst>
+      <p:ext uri="{BB962C8B-B14F-4D97-AF65-F5344CB8AC3E}">
+        <p14:creationId xmlns:p14="http://schemas.microsoft.com/office/powerpoint/2010/main" val="2126189352"/>
+      </p:ext>
+    </p:extLst>
+  </p:cSld>
+  <p:clrMapOvr>
+    <a:masterClrMapping/>
+  </p:clrMapOvr>
+</p:sld>
+</file>
+
+<file path=ppt/slides/slide8.xml><?xml version="1.0" encoding="utf-8"?>
+<p:sld xmlns:a="http://schemas.openxmlformats.org/drawingml/2006/main" xmlns:r="http://schemas.openxmlformats.org/officeDocument/2006/relationships" xmlns:p="http://schemas.openxmlformats.org/presentationml/2006/main">
+  <p:cSld>
     <p:spTree>
       <p:nvGrpSpPr>
         <p:cNvPr id="1" name="">
@@ -12222,7 +12513,7 @@
 </p:sld>
 </file>
 
-<file path=ppt/slides/slide8.xml><?xml version="1.0" encoding="utf-8"?>
+<file path=ppt/slides/slide9.xml><?xml version="1.0" encoding="utf-8"?>
 <p:sld xmlns:a="http://schemas.openxmlformats.org/drawingml/2006/main" xmlns:r="http://schemas.openxmlformats.org/officeDocument/2006/relationships" xmlns:p="http://schemas.openxmlformats.org/presentationml/2006/main">
   <p:cSld>
     <p:spTree>
@@ -12465,100 +12756,6 @@
     <p:extLst>
       <p:ext uri="{BB962C8B-B14F-4D97-AF65-F5344CB8AC3E}">
         <p14:creationId xmlns:p14="http://schemas.microsoft.com/office/powerpoint/2010/main" val="1325727566"/>
-      </p:ext>
-    </p:extLst>
-  </p:cSld>
-  <p:clrMapOvr>
-    <a:masterClrMapping/>
-  </p:clrMapOvr>
-</p:sld>
-</file>
-
-<file path=ppt/slides/slide9.xml><?xml version="1.0" encoding="utf-8"?>
-<p:sld xmlns:a="http://schemas.openxmlformats.org/drawingml/2006/main" xmlns:r="http://schemas.openxmlformats.org/officeDocument/2006/relationships" xmlns:p="http://schemas.openxmlformats.org/presentationml/2006/main">
-  <p:cSld>
-    <p:spTree>
-      <p:nvGrpSpPr>
-        <p:cNvPr id="1" name=""/>
-        <p:cNvGrpSpPr/>
-        <p:nvPr/>
-      </p:nvGrpSpPr>
-      <p:grpSpPr>
-        <a:xfrm>
-          <a:off x="0" y="0"/>
-          <a:ext cx="0" cy="0"/>
-          <a:chOff x="0" y="0"/>
-          <a:chExt cx="0" cy="0"/>
-        </a:xfrm>
-      </p:grpSpPr>
-      <p:sp>
-        <p:nvSpPr>
-          <p:cNvPr id="2" name="Title 1">
-            <a:extLst>
-              <a:ext uri="{FF2B5EF4-FFF2-40B4-BE49-F238E27FC236}">
-                <a16:creationId xmlns:a16="http://schemas.microsoft.com/office/drawing/2014/main" id="{9300C51F-749D-800C-7CAA-218B24BBBA95}"/>
-              </a:ext>
-            </a:extLst>
-          </p:cNvPr>
-          <p:cNvSpPr>
-            <a:spLocks noGrp="1"/>
-          </p:cNvSpPr>
-          <p:nvPr>
-            <p:ph type="title"/>
-          </p:nvPr>
-        </p:nvSpPr>
-        <p:spPr/>
-        <p:txBody>
-          <a:bodyPr/>
-          <a:lstStyle/>
-          <a:p>
-            <a:r>
-              <a:rPr lang="en-US" dirty="0"/>
-              <a:t>a</a:t>
-            </a:r>
-            <a:endParaRPr lang="en-ZM" dirty="0"/>
-          </a:p>
-        </p:txBody>
-      </p:sp>
-      <p:pic>
-        <p:nvPicPr>
-          <p:cNvPr id="7" name="Content Placeholder 6">
-            <a:extLst>
-              <a:ext uri="{FF2B5EF4-FFF2-40B4-BE49-F238E27FC236}">
-                <a16:creationId xmlns:a16="http://schemas.microsoft.com/office/drawing/2014/main" id="{B5A44C1D-0D38-1327-7B27-84A9FCA7EDDE}"/>
-              </a:ext>
-            </a:extLst>
-          </p:cNvPr>
-          <p:cNvPicPr>
-            <a:picLocks noGrp="1" noChangeAspect="1"/>
-          </p:cNvPicPr>
-          <p:nvPr>
-            <p:ph idx="1"/>
-          </p:nvPr>
-        </p:nvPicPr>
-        <p:blipFill>
-          <a:blip r:embed="rId2">
-            <a:extLst>
-              <a:ext uri="{28A0092B-C50C-407E-A947-70E740481C1C}">
-                <a14:useLocalDpi xmlns:a14="http://schemas.microsoft.com/office/drawing/2010/main" val="0"/>
-              </a:ext>
-            </a:extLst>
-          </a:blip>
-          <a:stretch>
-            <a:fillRect/>
-          </a:stretch>
-        </p:blipFill>
-        <p:spPr>
-          <a:xfrm>
-            <a:off x="0" y="402771"/>
-            <a:ext cx="12192000" cy="5845629"/>
-          </a:xfrm>
-        </p:spPr>
-      </p:pic>
-    </p:spTree>
-    <p:extLst>
-      <p:ext uri="{BB962C8B-B14F-4D97-AF65-F5344CB8AC3E}">
-        <p14:creationId xmlns:p14="http://schemas.microsoft.com/office/powerpoint/2010/main" val="1818847291"/>
       </p:ext>
     </p:extLst>
   </p:cSld>
